--- a/AirIntel_India_SIH26056_Presentation.pptx
+++ b/AirIntel_India_SIH26056_Presentation.pptx
@@ -3109,7 +3109,7 @@
             <a:avLst/>
           </a:prstGeom>
           <a:solidFill>
-            <a:srgbClr val="0F172A"/>
+            <a:srgbClr val="FFFFFF"/>
           </a:solidFill>
           <a:ln>
             <a:noFill/>
@@ -3139,57 +3139,14 @@
       </p:sp>
       <p:sp>
         <p:nvSpPr>
-          <p:cNvPr id="3" name="Rectangle 2"/>
-          <p:cNvSpPr/>
-          <p:nvPr/>
-        </p:nvSpPr>
-        <p:spPr>
-          <a:xfrm>
-            <a:off x="914400" y="1005840"/>
-            <a:ext cx="10362895" cy="54864"/>
-          </a:xfrm>
-          <a:prstGeom prst="rect">
-            <a:avLst/>
-          </a:prstGeom>
-          <a:solidFill>
-            <a:srgbClr val="2563EB"/>
-          </a:solidFill>
-          <a:ln>
-            <a:noFill/>
-          </a:ln>
-        </p:spPr>
-        <p:style>
-          <a:lnRef idx="1">
-            <a:schemeClr val="accent1"/>
-          </a:lnRef>
-          <a:fillRef idx="3">
-            <a:schemeClr val="accent1"/>
-          </a:fillRef>
-          <a:effectRef idx="2">
-            <a:schemeClr val="accent1"/>
-          </a:effectRef>
-          <a:fontRef idx="minor">
-            <a:schemeClr val="lt1"/>
-          </a:fontRef>
-        </p:style>
-        <p:txBody>
-          <a:bodyPr rtlCol="0" anchor="ctr"/>
-          <a:lstStyle/>
-          <a:p>
-            <a:pPr algn="ctr"/>
-          </a:p>
-        </p:txBody>
-      </p:sp>
-      <p:sp>
-        <p:nvSpPr>
-          <p:cNvPr id="4" name="TextBox 3"/>
+          <p:cNvPr id="3" name="TextBox 2"/>
           <p:cNvSpPr txBox="1"/>
           <p:nvPr/>
         </p:nvSpPr>
         <p:spPr>
           <a:xfrm>
-            <a:off x="914400" y="1280160"/>
-            <a:ext cx="10362895" cy="2926080"/>
+            <a:off x="914400" y="457200"/>
+            <a:ext cx="8686800" cy="1097280"/>
           </a:xfrm>
           <a:prstGeom prst="rect">
             <a:avLst/>
@@ -3203,90 +3160,67 @@
           <a:lstStyle/>
           <a:p>
             <a:pPr>
-              <a:defRPr sz="1200" b="1">
-                <a:solidFill>
-                  <a:srgbClr val="0EA5E9"/>
-                </a:solidFill>
-              </a:defRPr>
-            </a:pPr>
-            <a:r>
-              <a:t>SMART INDIA HACKATHON 2026 | PROBLEM STATEMENT: SIH26056</a:t>
-            </a:r>
-          </a:p>
-          <a:p>
-            <a:pPr>
-              <a:defRPr sz="3200" b="1">
-                <a:solidFill>
-                  <a:srgbClr val="FFFFFF"/>
-                </a:solidFill>
-              </a:defRPr>
-            </a:pPr>
-            <a:r>
-              <a:t>AirIntel India: Real-time Airfare Price Index</a:t>
-            </a:r>
-          </a:p>
-          <a:p>
-            <a:pPr>
-              <a:spcBef>
-                <a:spcPts val="800"/>
-              </a:spcBef>
-              <a:defRPr sz="1500">
-                <a:solidFill>
-                  <a:srgbClr val="94A3B8"/>
-                </a:solidFill>
-              </a:defRPr>
-            </a:pPr>
-            <a:r>
-              <a:t>Augmenting CPI through High-Frequency Algorithmic Web Scraping &amp; UN/ILO Jevons-Laspeyres Aggregation</a:t>
-            </a:r>
-          </a:p>
-        </p:txBody>
-      </p:sp>
-      <p:sp>
-        <p:nvSpPr>
-          <p:cNvPr id="5" name="Rounded Rectangle 4"/>
-          <p:cNvSpPr/>
+              <a:defRPr sz="3600" b="1">
+                <a:solidFill>
+                  <a:srgbClr val="1B365D"/>
+                </a:solidFill>
+                <a:latin typeface="Times New Roman"/>
+              </a:defRPr>
+            </a:pPr>
+            <a:r>
+              <a:t>SMART INDIA HACKATHON 2026</a:t>
+            </a:r>
+          </a:p>
+        </p:txBody>
+      </p:sp>
+      <p:pic>
+        <p:nvPicPr>
+          <p:cNvPr id="4" name="Picture 3" descr="page_1_img_2.png"/>
+          <p:cNvPicPr>
+            <a:picLocks noChangeAspect="1"/>
+          </p:cNvPicPr>
           <p:nvPr/>
-        </p:nvSpPr>
-        <p:spPr>
-          <a:xfrm>
-            <a:off x="914400" y="4389120"/>
-            <a:ext cx="2423160" cy="1737360"/>
-          </a:xfrm>
-          <a:prstGeom prst="roundRect">
-            <a:avLst/>
-          </a:prstGeom>
-          <a:solidFill>
-            <a:srgbClr val="1E293B"/>
-          </a:solidFill>
-          <a:ln w="12700">
-            <a:solidFill>
-              <a:srgbClr val="334155"/>
-            </a:solidFill>
-          </a:ln>
-        </p:spPr>
-        <p:style>
-          <a:lnRef idx="1">
-            <a:schemeClr val="accent1"/>
-          </a:lnRef>
-          <a:fillRef idx="3">
-            <a:schemeClr val="accent1"/>
-          </a:fillRef>
-          <a:effectRef idx="2">
-            <a:schemeClr val="accent1"/>
-          </a:effectRef>
-          <a:fontRef idx="minor">
-            <a:schemeClr val="lt1"/>
-          </a:fontRef>
-        </p:style>
-        <p:txBody>
-          <a:bodyPr rtlCol="0" anchor="ctr"/>
-          <a:lstStyle/>
-          <a:p>
-            <a:pPr algn="ctr"/>
-          </a:p>
-        </p:txBody>
-      </p:sp>
+        </p:nvPicPr>
+        <p:blipFill>
+          <a:blip r:embed="rId2"/>
+          <a:stretch>
+            <a:fillRect/>
+          </a:stretch>
+        </p:blipFill>
+        <p:spPr>
+          <a:xfrm>
+            <a:off x="10058400" y="274320"/>
+            <a:ext cx="1737360" cy="914400"/>
+          </a:xfrm>
+          <a:prstGeom prst="rect">
+            <a:avLst/>
+          </a:prstGeom>
+        </p:spPr>
+      </p:pic>
+      <p:pic>
+        <p:nvPicPr>
+          <p:cNvPr id="5" name="Picture 4" descr="page_1_img_1.png"/>
+          <p:cNvPicPr>
+            <a:picLocks noChangeAspect="1"/>
+          </p:cNvPicPr>
+          <p:nvPr/>
+        </p:nvPicPr>
+        <p:blipFill>
+          <a:blip r:embed="rId3"/>
+          <a:stretch>
+            <a:fillRect/>
+          </a:stretch>
+        </p:blipFill>
+        <p:spPr>
+          <a:xfrm>
+            <a:off x="7772400" y="1645920"/>
+            <a:ext cx="3931920" cy="4389120"/>
+          </a:xfrm>
+          <a:prstGeom prst="rect">
+            <a:avLst/>
+          </a:prstGeom>
+        </p:spPr>
+      </p:pic>
       <p:sp>
         <p:nvSpPr>
           <p:cNvPr id="6" name="TextBox 5"/>
@@ -3295,8 +3229,8 @@
         </p:nvSpPr>
         <p:spPr>
           <a:xfrm>
-            <a:off x="1078992" y="4553712"/>
-            <a:ext cx="2093976" cy="1408176"/>
+            <a:off x="731520" y="1645920"/>
+            <a:ext cx="6858000" cy="4754880"/>
           </a:xfrm>
           <a:prstGeom prst="rect">
             <a:avLst/>
@@ -3310,334 +3244,152 @@
           <a:lstStyle/>
           <a:p>
             <a:pPr>
-              <a:defRPr sz="1000" b="1">
-                <a:solidFill>
-                  <a:srgbClr val="0EA5E9"/>
-                </a:solidFill>
-              </a:defRPr>
-            </a:pPr>
-            <a:r>
-              <a:t>TEAM INFORMATION</a:t>
+              <a:spcAft>
+                <a:spcPts val="1400"/>
+              </a:spcAft>
+            </a:pPr>
+            <a:r>
+              <a:rPr sz="2000" b="1">
+                <a:solidFill>
+                  <a:srgbClr val="000000"/>
+                </a:solidFill>
+                <a:latin typeface="Arial"/>
+              </a:rPr>
+              <a:t>• Problem Statement ID – </a:t>
+            </a:r>
+            <a:r>
+              <a:rPr sz="2000" b="1">
+                <a:solidFill>
+                  <a:srgbClr val="184C94"/>
+                </a:solidFill>
+                <a:latin typeface="Arial"/>
+              </a:rPr>
+              <a:t>SIH26056</a:t>
             </a:r>
           </a:p>
           <a:p>
             <a:pPr>
-              <a:spcBef>
-                <a:spcPts val="600"/>
-              </a:spcBef>
-              <a:defRPr sz="1100">
-                <a:solidFill>
-                  <a:srgbClr val="F1F5F9"/>
-                </a:solidFill>
-              </a:defRPr>
-            </a:pPr>
-            <a:r>
+              <a:spcAft>
+                <a:spcPts val="1400"/>
+              </a:spcAft>
+            </a:pPr>
+            <a:r>
+              <a:rPr sz="1800" b="1">
+                <a:solidFill>
+                  <a:srgbClr val="000000"/>
+                </a:solidFill>
+                <a:latin typeface="Arial"/>
+              </a:rPr>
+              <a:t>• Problem Statement Title- </a:t>
+            </a:r>
+            <a:r>
+              <a:rPr sz="1800" b="1">
+                <a:solidFill>
+                  <a:srgbClr val="184C94"/>
+                </a:solidFill>
+                <a:latin typeface="Arial"/>
+              </a:rPr>
+              <a:t>Development of a Real-time Airfare Price Index for India through Automated Web Scraping of Airline and Online Travel Aggregator Portals for Augmentation of the Consumer Price Index (CPI)</a:t>
+            </a:r>
+          </a:p>
+          <a:p>
+            <a:pPr>
+              <a:spcAft>
+                <a:spcPts val="1400"/>
+              </a:spcAft>
+            </a:pPr>
+            <a:r>
+              <a:rPr sz="2000" b="1">
+                <a:solidFill>
+                  <a:srgbClr val="000000"/>
+                </a:solidFill>
+                <a:latin typeface="Arial"/>
+              </a:rPr>
+              <a:t>• Theme- </a:t>
+            </a:r>
+            <a:r>
+              <a:rPr sz="2000" b="1">
+                <a:solidFill>
+                  <a:srgbClr val="184C94"/>
+                </a:solidFill>
+                <a:latin typeface="Arial"/>
+              </a:rPr>
+              <a:t>Smart Governance / Miscellaneous</a:t>
+            </a:r>
+          </a:p>
+          <a:p>
+            <a:pPr>
+              <a:spcAft>
+                <a:spcPts val="1400"/>
+              </a:spcAft>
+            </a:pPr>
+            <a:r>
+              <a:rPr sz="2000" b="1">
+                <a:solidFill>
+                  <a:srgbClr val="000000"/>
+                </a:solidFill>
+                <a:latin typeface="Arial"/>
+              </a:rPr>
+              <a:t>• PS Category- </a:t>
+            </a:r>
+            <a:r>
+              <a:rPr sz="2000" b="1">
+                <a:solidFill>
+                  <a:srgbClr val="184C94"/>
+                </a:solidFill>
+                <a:latin typeface="Arial"/>
+              </a:rPr>
+              <a:t>Software</a:t>
+            </a:r>
+          </a:p>
+          <a:p>
+            <a:pPr>
+              <a:spcAft>
+                <a:spcPts val="1400"/>
+              </a:spcAft>
+            </a:pPr>
+            <a:r>
+              <a:rPr sz="2000" b="1">
+                <a:solidFill>
+                  <a:srgbClr val="000000"/>
+                </a:solidFill>
+                <a:latin typeface="Arial"/>
+              </a:rPr>
+              <a:t>• Team ID- </a:t>
+            </a:r>
+            <a:r>
+              <a:rPr sz="2000" b="1">
+                <a:solidFill>
+                  <a:srgbClr val="184C94"/>
+                </a:solidFill>
+                <a:latin typeface="Arial"/>
+              </a:rPr>
               <a:t>Team Rookie</a:t>
             </a:r>
-            <a:br/>
-            <a:r>
-              <a:t>College Internal Hackathon</a:t>
-            </a:r>
-            <a:br/>
-            <a:r>
-              <a:t>19th September 2026</a:t>
-            </a:r>
-          </a:p>
-        </p:txBody>
-      </p:sp>
-      <p:sp>
-        <p:nvSpPr>
-          <p:cNvPr id="7" name="Rounded Rectangle 6"/>
-          <p:cNvSpPr/>
-          <p:nvPr/>
-        </p:nvSpPr>
-        <p:spPr>
-          <a:xfrm>
-            <a:off x="3557016" y="4389120"/>
-            <a:ext cx="2423160" cy="1737360"/>
-          </a:xfrm>
-          <a:prstGeom prst="roundRect">
-            <a:avLst/>
-          </a:prstGeom>
-          <a:solidFill>
-            <a:srgbClr val="1E293B"/>
-          </a:solidFill>
-          <a:ln w="12700">
-            <a:solidFill>
-              <a:srgbClr val="334155"/>
-            </a:solidFill>
-          </a:ln>
-        </p:spPr>
-        <p:style>
-          <a:lnRef idx="1">
-            <a:schemeClr val="accent1"/>
-          </a:lnRef>
-          <a:fillRef idx="3">
-            <a:schemeClr val="accent1"/>
-          </a:fillRef>
-          <a:effectRef idx="2">
-            <a:schemeClr val="accent1"/>
-          </a:effectRef>
-          <a:fontRef idx="minor">
-            <a:schemeClr val="lt1"/>
-          </a:fontRef>
-        </p:style>
-        <p:txBody>
-          <a:bodyPr rtlCol="0" anchor="ctr"/>
-          <a:lstStyle/>
-          <a:p>
-            <a:pPr algn="ctr"/>
-          </a:p>
-        </p:txBody>
-      </p:sp>
-      <p:sp>
-        <p:nvSpPr>
-          <p:cNvPr id="8" name="TextBox 7"/>
-          <p:cNvSpPr txBox="1"/>
-          <p:nvPr/>
-        </p:nvSpPr>
-        <p:spPr>
-          <a:xfrm>
-            <a:off x="3721608" y="4553712"/>
-            <a:ext cx="2093976" cy="1408176"/>
-          </a:xfrm>
-          <a:prstGeom prst="rect">
-            <a:avLst/>
-          </a:prstGeom>
-          <a:noFill/>
-        </p:spPr>
-        <p:txBody>
-          <a:bodyPr wrap="square" lIns="0" tIns="0" rIns="0" bIns="0">
-            <a:spAutoFit/>
-          </a:bodyPr>
-          <a:lstStyle/>
+          </a:p>
           <a:p>
             <a:pPr>
-              <a:defRPr sz="1000" b="1">
-                <a:solidFill>
-                  <a:srgbClr val="0EA5E9"/>
-                </a:solidFill>
-              </a:defRPr>
-            </a:pPr>
-            <a:r>
-              <a:t>MINISTRY / CLIENT</a:t>
-            </a:r>
-          </a:p>
-          <a:p>
-            <a:pPr>
-              <a:spcBef>
-                <a:spcPts val="600"/>
-              </a:spcBef>
-              <a:defRPr sz="1100">
-                <a:solidFill>
-                  <a:srgbClr val="F1F5F9"/>
-                </a:solidFill>
-              </a:defRPr>
-            </a:pPr>
-            <a:r>
-              <a:t>MoSPI &amp; National Statistical Office (NSO)</a:t>
-            </a:r>
-            <a:br/>
-            <a:r>
-              <a:t>Government of India</a:t>
-            </a:r>
-          </a:p>
-        </p:txBody>
-      </p:sp>
-      <p:sp>
-        <p:nvSpPr>
-          <p:cNvPr id="9" name="Rounded Rectangle 8"/>
-          <p:cNvSpPr/>
-          <p:nvPr/>
-        </p:nvSpPr>
-        <p:spPr>
-          <a:xfrm>
-            <a:off x="6199632" y="4389120"/>
-            <a:ext cx="2423160" cy="1737360"/>
-          </a:xfrm>
-          <a:prstGeom prst="roundRect">
-            <a:avLst/>
-          </a:prstGeom>
-          <a:solidFill>
-            <a:srgbClr val="1E293B"/>
-          </a:solidFill>
-          <a:ln w="12700">
-            <a:solidFill>
-              <a:srgbClr val="334155"/>
-            </a:solidFill>
-          </a:ln>
-        </p:spPr>
-        <p:style>
-          <a:lnRef idx="1">
-            <a:schemeClr val="accent1"/>
-          </a:lnRef>
-          <a:fillRef idx="3">
-            <a:schemeClr val="accent1"/>
-          </a:fillRef>
-          <a:effectRef idx="2">
-            <a:schemeClr val="accent1"/>
-          </a:effectRef>
-          <a:fontRef idx="minor">
-            <a:schemeClr val="lt1"/>
-          </a:fontRef>
-        </p:style>
-        <p:txBody>
-          <a:bodyPr rtlCol="0" anchor="ctr"/>
-          <a:lstStyle/>
-          <a:p>
-            <a:pPr algn="ctr"/>
-          </a:p>
-        </p:txBody>
-      </p:sp>
-      <p:sp>
-        <p:nvSpPr>
-          <p:cNvPr id="10" name="TextBox 9"/>
-          <p:cNvSpPr txBox="1"/>
-          <p:nvPr/>
-        </p:nvSpPr>
-        <p:spPr>
-          <a:xfrm>
-            <a:off x="6364224" y="4553712"/>
-            <a:ext cx="2093976" cy="1408176"/>
-          </a:xfrm>
-          <a:prstGeom prst="rect">
-            <a:avLst/>
-          </a:prstGeom>
-          <a:noFill/>
-        </p:spPr>
-        <p:txBody>
-          <a:bodyPr wrap="square" lIns="0" tIns="0" rIns="0" bIns="0">
-            <a:spAutoFit/>
-          </a:bodyPr>
-          <a:lstStyle/>
-          <a:p>
-            <a:pPr>
-              <a:defRPr sz="1000" b="1">
-                <a:solidFill>
-                  <a:srgbClr val="0EA5E9"/>
-                </a:solidFill>
-              </a:defRPr>
-            </a:pPr>
-            <a:r>
-              <a:t>THEME &amp; CATEGORY</a:t>
-            </a:r>
-          </a:p>
-          <a:p>
-            <a:pPr>
-              <a:spcBef>
-                <a:spcPts val="600"/>
-              </a:spcBef>
-              <a:defRPr sz="1100">
-                <a:solidFill>
-                  <a:srgbClr val="F1F5F9"/>
-                </a:solidFill>
-              </a:defRPr>
-            </a:pPr>
-            <a:r>
-              <a:t>Smart Governance / FinTech</a:t>
-            </a:r>
-            <a:br/>
-            <a:r>
-              <a:t>Software Edition | Web Scraping &amp; Data Pipeline</a:t>
-            </a:r>
-          </a:p>
-        </p:txBody>
-      </p:sp>
-      <p:sp>
-        <p:nvSpPr>
-          <p:cNvPr id="11" name="Rounded Rectangle 10"/>
-          <p:cNvSpPr/>
-          <p:nvPr/>
-        </p:nvSpPr>
-        <p:spPr>
-          <a:xfrm>
-            <a:off x="8842248" y="4389120"/>
-            <a:ext cx="2423160" cy="1737360"/>
-          </a:xfrm>
-          <a:prstGeom prst="roundRect">
-            <a:avLst/>
-          </a:prstGeom>
-          <a:solidFill>
-            <a:srgbClr val="1E293B"/>
-          </a:solidFill>
-          <a:ln w="12700">
-            <a:solidFill>
-              <a:srgbClr val="334155"/>
-            </a:solidFill>
-          </a:ln>
-        </p:spPr>
-        <p:style>
-          <a:lnRef idx="1">
-            <a:schemeClr val="accent1"/>
-          </a:lnRef>
-          <a:fillRef idx="3">
-            <a:schemeClr val="accent1"/>
-          </a:fillRef>
-          <a:effectRef idx="2">
-            <a:schemeClr val="accent1"/>
-          </a:effectRef>
-          <a:fontRef idx="minor">
-            <a:schemeClr val="lt1"/>
-          </a:fontRef>
-        </p:style>
-        <p:txBody>
-          <a:bodyPr rtlCol="0" anchor="ctr"/>
-          <a:lstStyle/>
-          <a:p>
-            <a:pPr algn="ctr"/>
-          </a:p>
-        </p:txBody>
-      </p:sp>
-      <p:sp>
-        <p:nvSpPr>
-          <p:cNvPr id="12" name="TextBox 11"/>
-          <p:cNvSpPr txBox="1"/>
-          <p:nvPr/>
-        </p:nvSpPr>
-        <p:spPr>
-          <a:xfrm>
-            <a:off x="9006840" y="4553712"/>
-            <a:ext cx="2093976" cy="1408176"/>
-          </a:xfrm>
-          <a:prstGeom prst="rect">
-            <a:avLst/>
-          </a:prstGeom>
-          <a:noFill/>
-        </p:spPr>
-        <p:txBody>
-          <a:bodyPr wrap="square" lIns="0" tIns="0" rIns="0" bIns="0">
-            <a:spAutoFit/>
-          </a:bodyPr>
-          <a:lstStyle/>
-          <a:p>
-            <a:pPr>
-              <a:defRPr sz="1000" b="1">
-                <a:solidFill>
-                  <a:srgbClr val="0EA5E9"/>
-                </a:solidFill>
-              </a:defRPr>
-            </a:pPr>
-            <a:r>
-              <a:t>LIVE PRODUCTION PROTOTYPE</a:t>
-            </a:r>
-          </a:p>
-          <a:p>
-            <a:pPr>
-              <a:spcBef>
-                <a:spcPts val="600"/>
-              </a:spcBef>
-              <a:defRPr sz="1100">
-                <a:solidFill>
-                  <a:srgbClr val="F1F5F9"/>
-                </a:solidFill>
-              </a:defRPr>
-            </a:pPr>
-            <a:r>
-              <a:t>https://sihwinners.vercel.app</a:t>
-            </a:r>
-            <a:br/>
-            <a:r>
-              <a:t>GitHub: oshshivish-tech/sih26056_airfare_cpi</a:t>
+              <a:spcAft>
+                <a:spcPts val="1400"/>
+              </a:spcAft>
+            </a:pPr>
+            <a:r>
+              <a:rPr sz="2000" b="1">
+                <a:solidFill>
+                  <a:srgbClr val="000000"/>
+                </a:solidFill>
+                <a:latin typeface="Arial"/>
+              </a:rPr>
+              <a:t>• Team Name- </a:t>
+            </a:r>
+            <a:r>
+              <a:rPr sz="2000" b="1">
+                <a:solidFill>
+                  <a:srgbClr val="184C94"/>
+                </a:solidFill>
+                <a:latin typeface="Arial"/>
+              </a:rPr>
+              <a:t>Team Rookie</a:t>
             </a:r>
           </a:p>
         </p:txBody>
@@ -3662,72 +3414,23 @@
       <p:grpSpPr/>
       <p:sp>
         <p:nvSpPr>
-          <p:cNvPr id="2" name="TextBox 1"/>
-          <p:cNvSpPr txBox="1"/>
-          <p:nvPr/>
-        </p:nvSpPr>
-        <p:spPr>
-          <a:xfrm>
-            <a:off x="731520" y="365760"/>
-            <a:ext cx="10728655" cy="822960"/>
-          </a:xfrm>
-          <a:prstGeom prst="rect">
-            <a:avLst/>
-          </a:prstGeom>
-          <a:noFill/>
-        </p:spPr>
-        <p:txBody>
-          <a:bodyPr wrap="square" lIns="0" tIns="0" rIns="0" bIns="0">
-            <a:spAutoFit/>
-          </a:bodyPr>
-          <a:lstStyle/>
-          <a:p>
-            <a:pPr>
-              <a:defRPr sz="1000" b="1">
-                <a:solidFill>
-                  <a:srgbClr val="2563EB"/>
-                </a:solidFill>
-              </a:defRPr>
-            </a:pPr>
-            <a:r>
-              <a:t>SIH 2026 | PS ID: 26056</a:t>
-            </a:r>
-          </a:p>
-          <a:p>
-            <a:pPr>
-              <a:defRPr sz="2200" b="1">
-                <a:solidFill>
-                  <a:srgbClr val="0F172A"/>
-                </a:solidFill>
-              </a:defRPr>
-            </a:pPr>
-            <a:r>
-              <a:t>Problem Statement, Algorithmic Pipeline &amp; Proposed Solution</a:t>
-            </a:r>
-          </a:p>
-        </p:txBody>
-      </p:sp>
-      <p:sp>
-        <p:nvSpPr>
-          <p:cNvPr id="3" name="Rounded Rectangle 2"/>
+          <p:cNvPr id="2" name="Rectangle 1"/>
           <p:cNvSpPr/>
           <p:nvPr/>
         </p:nvSpPr>
         <p:spPr>
           <a:xfrm>
-            <a:off x="731520" y="1280160"/>
-            <a:ext cx="3383280" cy="2468880"/>
-          </a:xfrm>
-          <a:prstGeom prst="roundRect">
+            <a:off x="0" y="0"/>
+            <a:ext cx="12191695" cy="6858000"/>
+          </a:xfrm>
+          <a:prstGeom prst="rect">
             <a:avLst/>
           </a:prstGeom>
           <a:solidFill>
             <a:srgbClr val="FFFFFF"/>
           </a:solidFill>
-          <a:ln w="19050">
-            <a:solidFill>
-              <a:srgbClr val="E2E8F0"/>
-            </a:solidFill>
+          <a:ln>
+            <a:noFill/>
           </a:ln>
         </p:spPr>
         <p:style>
@@ -3754,142 +3457,24 @@
       </p:sp>
       <p:sp>
         <p:nvSpPr>
-          <p:cNvPr id="4" name="TextBox 3"/>
-          <p:cNvSpPr txBox="1"/>
-          <p:nvPr/>
-        </p:nvSpPr>
-        <p:spPr>
-          <a:xfrm>
-            <a:off x="914400" y="1417320"/>
-            <a:ext cx="3017520" cy="365760"/>
-          </a:xfrm>
-          <a:prstGeom prst="rect">
-            <a:avLst/>
-          </a:prstGeom>
-          <a:noFill/>
-        </p:spPr>
-        <p:txBody>
-          <a:bodyPr wrap="square" lIns="0" tIns="0" rIns="0" bIns="0">
-            <a:spAutoFit/>
-          </a:bodyPr>
-          <a:lstStyle/>
-          <a:p>
-            <a:pPr>
-              <a:defRPr sz="1300" b="1">
-                <a:solidFill>
-                  <a:srgbClr val="2563EB"/>
-                </a:solidFill>
-              </a:defRPr>
-            </a:pPr>
-            <a:r>
-              <a:t>THE PROBLEM (CURRENT MOSPI LIMITATIONS)</a:t>
-            </a:r>
-          </a:p>
-        </p:txBody>
-      </p:sp>
-      <p:sp>
-        <p:nvSpPr>
-          <p:cNvPr id="5" name="TextBox 4"/>
-          <p:cNvSpPr txBox="1"/>
-          <p:nvPr/>
-        </p:nvSpPr>
-        <p:spPr>
-          <a:xfrm>
-            <a:off x="868680" y="1783080"/>
-            <a:ext cx="3108960" cy="1828800"/>
-          </a:xfrm>
-          <a:prstGeom prst="rect">
-            <a:avLst/>
-          </a:prstGeom>
-          <a:noFill/>
-        </p:spPr>
-        <p:txBody>
-          <a:bodyPr wrap="square" lIns="0" tIns="0" rIns="0" bIns="0">
-            <a:spAutoFit/>
-          </a:bodyPr>
-          <a:lstStyle/>
-          <a:p>
-            <a:pPr>
-              <a:spcAft>
-                <a:spcPts val="400"/>
-              </a:spcAft>
-              <a:defRPr sz="1000">
-                <a:solidFill>
-                  <a:srgbClr val="0F172A"/>
-                </a:solidFill>
-              </a:defRPr>
-            </a:pPr>
-            <a:r>
-              <a:t>• Manual Survey Bottleneck: Field staff query OTAs once a month, recording a single stale spot fare.</a:t>
-            </a:r>
-          </a:p>
-          <a:p>
-            <a:pPr>
-              <a:spcAft>
-                <a:spcPts val="400"/>
-              </a:spcAft>
-              <a:defRPr sz="1000">
-                <a:solidFill>
-                  <a:srgbClr val="0F172A"/>
-                </a:solidFill>
-              </a:defRPr>
-            </a:pPr>
-            <a:r>
-              <a:t>• Blind to Dynamic Pricing: Misses algorithmic yield surges (time-of-day, peak rush hours, festivals).</a:t>
-            </a:r>
-          </a:p>
-          <a:p>
-            <a:pPr>
-              <a:spcAft>
-                <a:spcPts val="400"/>
-              </a:spcAft>
-              <a:defRPr sz="1000">
-                <a:solidFill>
-                  <a:srgbClr val="0F172A"/>
-                </a:solidFill>
-              </a:defRPr>
-            </a:pPr>
-            <a:r>
-              <a:t>• Lead-Time Neglect: Completely overlooks fare escalation (1d emergency vs. 45d advance booking).</a:t>
-            </a:r>
-          </a:p>
-          <a:p>
-            <a:pPr>
-              <a:spcAft>
-                <a:spcPts val="400"/>
-              </a:spcAft>
-              <a:defRPr sz="1000">
-                <a:solidFill>
-                  <a:srgbClr val="0F172A"/>
-                </a:solidFill>
-              </a:defRPr>
-            </a:pPr>
-            <a:r>
-              <a:t>• Policy Lag: MoSPI published CPI indices carry a 12 to 15-day reporting lag behind market reality.</a:t>
-            </a:r>
-          </a:p>
-        </p:txBody>
-      </p:sp>
-      <p:sp>
-        <p:nvSpPr>
-          <p:cNvPr id="6" name="Rounded Rectangle 5"/>
+          <p:cNvPr id="3" name="Oval 2"/>
           <p:cNvSpPr/>
           <p:nvPr/>
         </p:nvSpPr>
         <p:spPr>
           <a:xfrm>
-            <a:off x="731520" y="3931920"/>
-            <a:ext cx="3383280" cy="2468880"/>
-          </a:xfrm>
-          <a:prstGeom prst="roundRect">
+            <a:off x="365760" y="228600"/>
+            <a:ext cx="1645920" cy="777240"/>
+          </a:xfrm>
+          <a:prstGeom prst="ellipse">
             <a:avLst/>
           </a:prstGeom>
           <a:solidFill>
             <a:srgbClr val="FFFFFF"/>
           </a:solidFill>
-          <a:ln w="19050">
+          <a:ln w="25400">
             <a:solidFill>
-              <a:srgbClr val="E2E8F0"/>
+              <a:srgbClr val="64508C"/>
             </a:solidFill>
           </a:ln>
         </p:spPr>
@@ -3908,23 +3493,33 @@
           </a:fontRef>
         </p:style>
         <p:txBody>
-          <a:bodyPr rtlCol="0" anchor="ctr"/>
-          <a:lstStyle/>
-          <a:p>
-            <a:pPr algn="ctr"/>
-          </a:p>
-        </p:txBody>
-      </p:sp>
-      <p:sp>
-        <p:nvSpPr>
-          <p:cNvPr id="7" name="TextBox 6"/>
+          <a:bodyPr rtlCol="0" anchor="ctr" wrap="square"/>
+          <a:lstStyle/>
+          <a:p>
+            <a:pPr algn="ctr">
+              <a:defRPr sz="1400" b="1">
+                <a:solidFill>
+                  <a:srgbClr val="000000"/>
+                </a:solidFill>
+                <a:latin typeface="Arial"/>
+              </a:defRPr>
+            </a:pPr>
+            <a:r>
+              <a:t>Team Rookie</a:t>
+            </a:r>
+          </a:p>
+        </p:txBody>
+      </p:sp>
+      <p:sp>
+        <p:nvSpPr>
+          <p:cNvPr id="4" name="TextBox 3"/>
           <p:cNvSpPr txBox="1"/>
           <p:nvPr/>
         </p:nvSpPr>
         <p:spPr>
           <a:xfrm>
-            <a:off x="914400" y="4069080"/>
-            <a:ext cx="3017520" cy="365760"/>
+            <a:off x="2286000" y="182880"/>
+            <a:ext cx="7589520" cy="914400"/>
           </a:xfrm>
           <a:prstGeom prst="rect">
             <a:avLst/>
@@ -3932,127 +3527,82 @@
           <a:noFill/>
         </p:spPr>
         <p:txBody>
-          <a:bodyPr wrap="square" lIns="0" tIns="0" rIns="0" bIns="0">
+          <a:bodyPr wrap="square" lIns="0" rIns="0" tIns="0" bIns="0">
             <a:spAutoFit/>
           </a:bodyPr>
           <a:lstStyle/>
           <a:p>
-            <a:pPr>
-              <a:defRPr sz="1300" b="1">
-                <a:solidFill>
-                  <a:srgbClr val="2563EB"/>
-                </a:solidFill>
-              </a:defRPr>
-            </a:pPr>
-            <a:r>
-              <a:t>THE SOLUTION: AIRINTEL INDIA</a:t>
-            </a:r>
-          </a:p>
-        </p:txBody>
-      </p:sp>
-      <p:sp>
-        <p:nvSpPr>
-          <p:cNvPr id="8" name="TextBox 7"/>
-          <p:cNvSpPr txBox="1"/>
+            <a:pPr algn="ctr">
+              <a:defRPr sz="2800" b="1">
+                <a:solidFill>
+                  <a:srgbClr val="1B365D"/>
+                </a:solidFill>
+                <a:latin typeface="Times New Roman"/>
+              </a:defRPr>
+            </a:pPr>
+            <a:r>
+              <a:t>AIRINTEL INDIA</a:t>
+            </a:r>
+          </a:p>
+          <a:p>
+            <a:pPr algn="ctr">
+              <a:defRPr sz="1400" b="1">
+                <a:solidFill>
+                  <a:srgbClr val="000000"/>
+                </a:solidFill>
+                <a:latin typeface="Arial"/>
+              </a:defRPr>
+            </a:pPr>
+            <a:r>
+              <a:t>Augmenting CPI through High-Frequency Algorithmic Web Scraping</a:t>
+            </a:r>
+          </a:p>
+        </p:txBody>
+      </p:sp>
+      <p:pic>
+        <p:nvPicPr>
+          <p:cNvPr id="5" name="Picture 4" descr="page_1_img_2.png"/>
+          <p:cNvPicPr>
+            <a:picLocks noChangeAspect="1"/>
+          </p:cNvPicPr>
           <p:nvPr/>
-        </p:nvSpPr>
-        <p:spPr>
-          <a:xfrm>
-            <a:off x="868680" y="4434840"/>
-            <a:ext cx="3108960" cy="1828800"/>
+        </p:nvPicPr>
+        <p:blipFill>
+          <a:blip r:embed="rId2"/>
+          <a:stretch>
+            <a:fillRect/>
+          </a:stretch>
+        </p:blipFill>
+        <p:spPr>
+          <a:xfrm>
+            <a:off x="10241280" y="164592"/>
+            <a:ext cx="1645920" cy="868680"/>
           </a:xfrm>
           <a:prstGeom prst="rect">
             <a:avLst/>
           </a:prstGeom>
-          <a:noFill/>
-        </p:spPr>
-        <p:txBody>
-          <a:bodyPr wrap="square" lIns="0" tIns="0" rIns="0" bIns="0">
-            <a:spAutoFit/>
-          </a:bodyPr>
-          <a:lstStyle/>
-          <a:p>
-            <a:pPr>
-              <a:spcAft>
-                <a:spcPts val="400"/>
-              </a:spcAft>
-              <a:defRPr sz="1000">
-                <a:solidFill>
-                  <a:srgbClr val="0F172A"/>
-                </a:solidFill>
-              </a:defRPr>
-            </a:pPr>
-            <a:r>
-              <a:t>• Headless Automated Harvester: Playwright cron scraping across Air India, IndiGo, SpiceJet &amp; MakeMyTrip.</a:t>
-            </a:r>
-          </a:p>
-          <a:p>
-            <a:pPr>
-              <a:spcAft>
-                <a:spcPts val="400"/>
-              </a:spcAft>
-              <a:defRPr sz="1000">
-                <a:solidFill>
-                  <a:srgbClr val="0F172A"/>
-                </a:solidFill>
-              </a:defRPr>
-            </a:pPr>
-            <a:r>
-              <a:t>• 5 Standard Lead-Time Horizons: Continuous sampling across 1, 7, 15, 30, and 45 days forward.</a:t>
-            </a:r>
-          </a:p>
-          <a:p>
-            <a:pPr>
-              <a:spcAft>
-                <a:spcPts val="400"/>
-              </a:spcAft>
-              <a:defRPr sz="1000">
-                <a:solidFill>
-                  <a:srgbClr val="0F172A"/>
-                </a:solidFill>
-              </a:defRPr>
-            </a:pPr>
-            <a:r>
-              <a:t>• UN/ILO 2020 Compliance: Elementary Jevons Geometric Mean prevents upward substitution bias.</a:t>
-            </a:r>
-          </a:p>
-          <a:p>
-            <a:pPr>
-              <a:spcAft>
-                <a:spcPts val="400"/>
-              </a:spcAft>
-              <a:defRPr sz="1000">
-                <a:solidFill>
-                  <a:srgbClr val="0F172A"/>
-                </a:solidFill>
-              </a:defRPr>
-            </a:pPr>
-            <a:r>
-              <a:t>• DGCA Passenger Weighting: Weighted Laspeyres aggregation across top 12 arterial flight corridors.</a:t>
-            </a:r>
-          </a:p>
-        </p:txBody>
-      </p:sp>
-      <p:sp>
-        <p:nvSpPr>
-          <p:cNvPr id="9" name="Rounded Rectangle 8"/>
+        </p:spPr>
+      </p:pic>
+      <p:sp>
+        <p:nvSpPr>
+          <p:cNvPr id="6" name="Rounded Rectangle 5"/>
           <p:cNvSpPr/>
           <p:nvPr/>
         </p:nvSpPr>
         <p:spPr>
           <a:xfrm>
-            <a:off x="4297680" y="1280160"/>
-            <a:ext cx="3566160" cy="5120640"/>
+            <a:off x="457200" y="1280160"/>
+            <a:ext cx="3657600" cy="5212080"/>
           </a:xfrm>
           <a:prstGeom prst="roundRect">
             <a:avLst/>
           </a:prstGeom>
           <a:solidFill>
-            <a:srgbClr val="FFFFFF"/>
+            <a:srgbClr val="EEF5FF"/>
           </a:solidFill>
           <a:ln w="19050">
             <a:solidFill>
-              <a:srgbClr val="E2E8F0"/>
+              <a:srgbClr val="C7D2FE"/>
             </a:solidFill>
           </a:ln>
         </p:spPr>
@@ -4080,14 +3630,14 @@
       </p:sp>
       <p:sp>
         <p:nvSpPr>
-          <p:cNvPr id="10" name="TextBox 9"/>
+          <p:cNvPr id="7" name="TextBox 6"/>
           <p:cNvSpPr txBox="1"/>
           <p:nvPr/>
         </p:nvSpPr>
         <p:spPr>
           <a:xfrm>
-            <a:off x="4480560" y="1417320"/>
-            <a:ext cx="3200400" cy="365760"/>
+            <a:off x="640080" y="1371600"/>
+            <a:ext cx="3291840" cy="4937760"/>
           </a:xfrm>
           <a:prstGeom prst="rect">
             <a:avLst/>
@@ -4100,39 +3650,107 @@
           </a:bodyPr>
           <a:lstStyle/>
           <a:p>
+            <a:pPr algn="ctr">
+              <a:spcAft>
+                <a:spcPts val="1200"/>
+              </a:spcAft>
+              <a:defRPr sz="2800" b="1">
+                <a:solidFill>
+                  <a:srgbClr val="7033A0"/>
+                </a:solidFill>
+                <a:latin typeface="Arial"/>
+              </a:defRPr>
+            </a:pPr>
+            <a:r>
+              <a:t>PROBLEM</a:t>
+            </a:r>
+          </a:p>
+          <a:p>
             <a:pPr>
-              <a:defRPr sz="1300" b="1">
-                <a:solidFill>
-                  <a:srgbClr val="2563EB"/>
-                </a:solidFill>
-              </a:defRPr>
-            </a:pPr>
-            <a:r>
-              <a:t>END-TO-END DATAFLOW PIPELINE</a:t>
-            </a:r>
-          </a:p>
-        </p:txBody>
-      </p:sp>
-      <p:sp>
-        <p:nvSpPr>
-          <p:cNvPr id="11" name="Rounded Rectangle 10"/>
+              <a:spcAft>
+                <a:spcPts val="800"/>
+              </a:spcAft>
+              <a:defRPr sz="1200">
+                <a:solidFill>
+                  <a:srgbClr val="000000"/>
+                </a:solidFill>
+                <a:latin typeface="Arial"/>
+              </a:defRPr>
+            </a:pPr>
+            <a:r>
+              <a:t>• Manual Survey Bottleneck: Field staff manually query airline portals once a month for single spot quotes.</a:t>
+            </a:r>
+          </a:p>
+          <a:p>
+            <a:pPr>
+              <a:spcAft>
+                <a:spcPts val="800"/>
+              </a:spcAft>
+              <a:defRPr sz="1200">
+                <a:solidFill>
+                  <a:srgbClr val="000000"/>
+                </a:solidFill>
+                <a:latin typeface="Arial"/>
+              </a:defRPr>
+            </a:pPr>
+            <a:r>
+              <a:t>• Blind to Dynamic Pricing: Fails to capture algorithmic yield spikes, peak hour surges, and holiday load factors.</a:t>
+            </a:r>
+          </a:p>
+          <a:p>
+            <a:pPr>
+              <a:spcAft>
+                <a:spcPts val="800"/>
+              </a:spcAft>
+              <a:defRPr sz="1200">
+                <a:solidFill>
+                  <a:srgbClr val="000000"/>
+                </a:solidFill>
+                <a:latin typeface="Arial"/>
+              </a:defRPr>
+            </a:pPr>
+            <a:r>
+              <a:t>• Lead-Time Neglect: Completely ignores booking curves (1-day emergency surge vs. 45-day advance booking).</a:t>
+            </a:r>
+          </a:p>
+          <a:p>
+            <a:pPr>
+              <a:spcAft>
+                <a:spcPts val="800"/>
+              </a:spcAft>
+              <a:defRPr sz="1200">
+                <a:solidFill>
+                  <a:srgbClr val="000000"/>
+                </a:solidFill>
+                <a:latin typeface="Arial"/>
+              </a:defRPr>
+            </a:pPr>
+            <a:r>
+              <a:t>• 15-Day Policy Lag: Lagging data limits the responsiveness of RBI monetary policy and aviation regulators.</a:t>
+            </a:r>
+          </a:p>
+        </p:txBody>
+      </p:sp>
+      <p:sp>
+        <p:nvSpPr>
+          <p:cNvPr id="8" name="Rounded Rectangle 7"/>
           <p:cNvSpPr/>
           <p:nvPr/>
         </p:nvSpPr>
         <p:spPr>
           <a:xfrm>
-            <a:off x="4480560" y="1783080"/>
-            <a:ext cx="3200400" cy="841248"/>
+            <a:off x="4297680" y="1325880"/>
+            <a:ext cx="1097280" cy="502920"/>
           </a:xfrm>
           <a:prstGeom prst="roundRect">
             <a:avLst/>
           </a:prstGeom>
           <a:solidFill>
-            <a:srgbClr val="F1F5F9"/>
+            <a:srgbClr val="DBEAFE"/>
           </a:solidFill>
-          <a:ln w="19050">
+          <a:ln w="12700">
             <a:solidFill>
-              <a:srgbClr val="2563EB"/>
+              <a:srgbClr val="6366F1"/>
             </a:solidFill>
           </a:ln>
         </p:spPr>
@@ -4154,77 +3772,40 @@
           <a:bodyPr rtlCol="0" anchor="ctr"/>
           <a:lstStyle/>
           <a:p>
-            <a:pPr algn="ctr"/>
-          </a:p>
-        </p:txBody>
-      </p:sp>
-      <p:sp>
-        <p:nvSpPr>
-          <p:cNvPr id="12" name="TextBox 11"/>
-          <p:cNvSpPr txBox="1"/>
-          <p:nvPr/>
-        </p:nvSpPr>
-        <p:spPr>
-          <a:xfrm>
-            <a:off x="4572000" y="1856232"/>
-            <a:ext cx="3017520" cy="713232"/>
-          </a:xfrm>
-          <a:prstGeom prst="rect">
-            <a:avLst/>
-          </a:prstGeom>
-          <a:noFill/>
-        </p:spPr>
-        <p:txBody>
-          <a:bodyPr wrap="square" lIns="0" tIns="0" rIns="0" bIns="0">
-            <a:spAutoFit/>
-          </a:bodyPr>
-          <a:lstStyle/>
-          <a:p>
-            <a:pPr>
-              <a:defRPr sz="1050" b="1">
-                <a:solidFill>
-                  <a:srgbClr val="2563EB"/>
-                </a:solidFill>
-              </a:defRPr>
-            </a:pPr>
-            <a:r>
-              <a:t>1. Scheduled Ingestion (02:00 AM IST)</a:t>
-            </a:r>
-          </a:p>
-          <a:p>
-            <a:pPr>
-              <a:defRPr sz="950">
-                <a:solidFill>
-                  <a:srgbClr val="0F172A"/>
-                </a:solidFill>
-              </a:defRPr>
-            </a:pPr>
-            <a:r>
-              <a:t>Playwright stealth scrapers harvest all daily non-stop flights for 12 routes x 5 booking horizons.</a:t>
-            </a:r>
-          </a:p>
-        </p:txBody>
-      </p:sp>
-      <p:sp>
-        <p:nvSpPr>
-          <p:cNvPr id="13" name="Rounded Rectangle 12"/>
+            <a:pPr algn="ctr">
+              <a:defRPr sz="950" b="1">
+                <a:solidFill>
+                  <a:srgbClr val="000000"/>
+                </a:solidFill>
+                <a:latin typeface="Arial"/>
+              </a:defRPr>
+            </a:pPr>
+            <a:r>
+              <a:t>Scheduled Harvest</a:t>
+            </a:r>
+          </a:p>
+        </p:txBody>
+      </p:sp>
+      <p:sp>
+        <p:nvSpPr>
+          <p:cNvPr id="9" name="Rounded Rectangle 8"/>
           <p:cNvSpPr/>
           <p:nvPr/>
         </p:nvSpPr>
         <p:spPr>
           <a:xfrm>
-            <a:off x="4480560" y="2743200"/>
-            <a:ext cx="3200400" cy="841248"/>
+            <a:off x="5504688" y="1325880"/>
+            <a:ext cx="1097280" cy="502920"/>
           </a:xfrm>
           <a:prstGeom prst="roundRect">
             <a:avLst/>
           </a:prstGeom>
           <a:solidFill>
-            <a:srgbClr val="F1F5F9"/>
+            <a:srgbClr val="E9D5FF"/>
           </a:solidFill>
-          <a:ln w="19050">
+          <a:ln w="12700">
             <a:solidFill>
-              <a:srgbClr val="0EA5E9"/>
+              <a:srgbClr val="6366F1"/>
             </a:solidFill>
           </a:ln>
         </p:spPr>
@@ -4246,77 +3827,40 @@
           <a:bodyPr rtlCol="0" anchor="ctr"/>
           <a:lstStyle/>
           <a:p>
-            <a:pPr algn="ctr"/>
-          </a:p>
-        </p:txBody>
-      </p:sp>
-      <p:sp>
-        <p:nvSpPr>
-          <p:cNvPr id="14" name="TextBox 13"/>
-          <p:cNvSpPr txBox="1"/>
-          <p:nvPr/>
-        </p:nvSpPr>
-        <p:spPr>
-          <a:xfrm>
-            <a:off x="4572000" y="2816352"/>
-            <a:ext cx="3017520" cy="713232"/>
-          </a:xfrm>
-          <a:prstGeom prst="rect">
-            <a:avLst/>
-          </a:prstGeom>
-          <a:noFill/>
-        </p:spPr>
-        <p:txBody>
-          <a:bodyPr wrap="square" lIns="0" tIns="0" rIns="0" bIns="0">
-            <a:spAutoFit/>
-          </a:bodyPr>
-          <a:lstStyle/>
-          <a:p>
-            <a:pPr>
-              <a:defRPr sz="1050" b="1">
-                <a:solidFill>
-                  <a:srgbClr val="0EA5E9"/>
-                </a:solidFill>
-              </a:defRPr>
-            </a:pPr>
-            <a:r>
-              <a:t>2. Automated Data Cleaning &amp; Z-Score</a:t>
-            </a:r>
-          </a:p>
-          <a:p>
-            <a:pPr>
-              <a:defRPr sz="950">
-                <a:solidFill>
-                  <a:srgbClr val="0F172A"/>
-                </a:solidFill>
-              </a:defRPr>
-            </a:pPr>
-            <a:r>
-              <a:t>Strips airport taxes, fuel surcharges, filters junk quotes &amp; flags outliers (|Z| &gt; 3.00).</a:t>
-            </a:r>
-          </a:p>
-        </p:txBody>
-      </p:sp>
-      <p:sp>
-        <p:nvSpPr>
-          <p:cNvPr id="15" name="Rounded Rectangle 14"/>
+            <a:pPr algn="ctr">
+              <a:defRPr sz="950" b="1">
+                <a:solidFill>
+                  <a:srgbClr val="000000"/>
+                </a:solidFill>
+                <a:latin typeface="Arial"/>
+              </a:defRPr>
+            </a:pPr>
+            <a:r>
+              <a:t>Normalization</a:t>
+            </a:r>
+          </a:p>
+        </p:txBody>
+      </p:sp>
+      <p:sp>
+        <p:nvSpPr>
+          <p:cNvPr id="10" name="Rounded Rectangle 9"/>
           <p:cNvSpPr/>
           <p:nvPr/>
         </p:nvSpPr>
         <p:spPr>
           <a:xfrm>
-            <a:off x="4480560" y="3703320"/>
-            <a:ext cx="3200400" cy="841248"/>
+            <a:off x="6711696" y="1325880"/>
+            <a:ext cx="1097280" cy="502920"/>
           </a:xfrm>
           <a:prstGeom prst="roundRect">
             <a:avLst/>
           </a:prstGeom>
           <a:solidFill>
-            <a:srgbClr val="F1F5F9"/>
+            <a:srgbClr val="DBEAFE"/>
           </a:solidFill>
-          <a:ln w="19050">
+          <a:ln w="12700">
             <a:solidFill>
-              <a:srgbClr val="10B981"/>
+              <a:srgbClr val="6366F1"/>
             </a:solidFill>
           </a:ln>
         </p:spPr>
@@ -4338,77 +3882,40 @@
           <a:bodyPr rtlCol="0" anchor="ctr"/>
           <a:lstStyle/>
           <a:p>
-            <a:pPr algn="ctr"/>
-          </a:p>
-        </p:txBody>
-      </p:sp>
-      <p:sp>
-        <p:nvSpPr>
-          <p:cNvPr id="16" name="TextBox 15"/>
-          <p:cNvSpPr txBox="1"/>
-          <p:nvPr/>
-        </p:nvSpPr>
-        <p:spPr>
-          <a:xfrm>
-            <a:off x="4572000" y="3776472"/>
-            <a:ext cx="3017520" cy="713232"/>
-          </a:xfrm>
-          <a:prstGeom prst="rect">
-            <a:avLst/>
-          </a:prstGeom>
-          <a:noFill/>
-        </p:spPr>
-        <p:txBody>
-          <a:bodyPr wrap="square" lIns="0" tIns="0" rIns="0" bIns="0">
-            <a:spAutoFit/>
-          </a:bodyPr>
-          <a:lstStyle/>
-          <a:p>
-            <a:pPr>
-              <a:defRPr sz="1050" b="1">
-                <a:solidFill>
-                  <a:srgbClr val="10B981"/>
-                </a:solidFill>
-              </a:defRPr>
-            </a:pPr>
-            <a:r>
-              <a:t>3. Elementary Aggregation (Jevons GM)</a:t>
-            </a:r>
-          </a:p>
-          <a:p>
-            <a:pPr>
-              <a:defRPr sz="950">
-                <a:solidFill>
-                  <a:srgbClr val="0F172A"/>
-                </a:solidFill>
-              </a:defRPr>
-            </a:pPr>
-            <a:r>
-              <a:t>Calculates Jevons Geometric Index per route &amp; booking horizon to neutralize extreme fare spikes.</a:t>
-            </a:r>
-          </a:p>
-        </p:txBody>
-      </p:sp>
-      <p:sp>
-        <p:nvSpPr>
-          <p:cNvPr id="17" name="Rounded Rectangle 16"/>
+            <a:pPr algn="ctr">
+              <a:defRPr sz="950" b="1">
+                <a:solidFill>
+                  <a:srgbClr val="000000"/>
+                </a:solidFill>
+                <a:latin typeface="Arial"/>
+              </a:defRPr>
+            </a:pPr>
+            <a:r>
+              <a:t>Z-Score Filter</a:t>
+            </a:r>
+          </a:p>
+        </p:txBody>
+      </p:sp>
+      <p:sp>
+        <p:nvSpPr>
+          <p:cNvPr id="11" name="Rounded Rectangle 10"/>
           <p:cNvSpPr/>
           <p:nvPr/>
         </p:nvSpPr>
         <p:spPr>
           <a:xfrm>
-            <a:off x="4480560" y="4663440"/>
-            <a:ext cx="3200400" cy="841248"/>
+            <a:off x="7918704" y="1325880"/>
+            <a:ext cx="1097280" cy="502920"/>
           </a:xfrm>
           <a:prstGeom prst="roundRect">
             <a:avLst/>
           </a:prstGeom>
           <a:solidFill>
-            <a:srgbClr val="F1F5F9"/>
+            <a:srgbClr val="E9D5FF"/>
           </a:solidFill>
-          <a:ln w="19050">
+          <a:ln w="12700">
             <a:solidFill>
-              <a:srgbClr val="F59E0B"/>
+              <a:srgbClr val="6366F1"/>
             </a:solidFill>
           </a:ln>
         </p:spPr>
@@ -4430,77 +3937,40 @@
           <a:bodyPr rtlCol="0" anchor="ctr"/>
           <a:lstStyle/>
           <a:p>
-            <a:pPr algn="ctr"/>
-          </a:p>
-        </p:txBody>
-      </p:sp>
-      <p:sp>
-        <p:nvSpPr>
-          <p:cNvPr id="18" name="TextBox 17"/>
-          <p:cNvSpPr txBox="1"/>
-          <p:nvPr/>
-        </p:nvSpPr>
-        <p:spPr>
-          <a:xfrm>
-            <a:off x="4572000" y="4736592"/>
-            <a:ext cx="3017520" cy="713232"/>
-          </a:xfrm>
-          <a:prstGeom prst="rect">
-            <a:avLst/>
-          </a:prstGeom>
-          <a:noFill/>
-        </p:spPr>
-        <p:txBody>
-          <a:bodyPr wrap="square" lIns="0" tIns="0" rIns="0" bIns="0">
-            <a:spAutoFit/>
-          </a:bodyPr>
-          <a:lstStyle/>
-          <a:p>
-            <a:pPr>
-              <a:defRPr sz="1050" b="1">
-                <a:solidFill>
-                  <a:srgbClr val="F59E0B"/>
-                </a:solidFill>
-              </a:defRPr>
-            </a:pPr>
-            <a:r>
-              <a:t>4. National Laspeyres Aggregation</a:t>
-            </a:r>
-          </a:p>
-          <a:p>
-            <a:pPr>
-              <a:defRPr sz="950">
-                <a:solidFill>
-                  <a:srgbClr val="0F172A"/>
-                </a:solidFill>
-              </a:defRPr>
-            </a:pPr>
-            <a:r>
-              <a:t>Weights each corridor by DGCA actual passenger volume to produce single daily national airfare index.</a:t>
-            </a:r>
-          </a:p>
-        </p:txBody>
-      </p:sp>
-      <p:sp>
-        <p:nvSpPr>
-          <p:cNvPr id="19" name="Rounded Rectangle 18"/>
+            <a:pPr algn="ctr">
+              <a:defRPr sz="950" b="1">
+                <a:solidFill>
+                  <a:srgbClr val="000000"/>
+                </a:solidFill>
+                <a:latin typeface="Arial"/>
+              </a:defRPr>
+            </a:pPr>
+            <a:r>
+              <a:t>Jevons GM</a:t>
+            </a:r>
+          </a:p>
+        </p:txBody>
+      </p:sp>
+      <p:sp>
+        <p:nvSpPr>
+          <p:cNvPr id="12" name="Rounded Rectangle 11"/>
           <p:cNvSpPr/>
           <p:nvPr/>
         </p:nvSpPr>
         <p:spPr>
           <a:xfrm>
-            <a:off x="4480560" y="5623560"/>
-            <a:ext cx="3200400" cy="841248"/>
+            <a:off x="9125712" y="1325880"/>
+            <a:ext cx="1097280" cy="502920"/>
           </a:xfrm>
           <a:prstGeom prst="roundRect">
             <a:avLst/>
           </a:prstGeom>
           <a:solidFill>
-            <a:srgbClr val="F1F5F9"/>
+            <a:srgbClr val="DBEAFE"/>
           </a:solidFill>
-          <a:ln w="19050">
+          <a:ln w="12700">
             <a:solidFill>
-              <a:srgbClr val="8B5CF6"/>
+              <a:srgbClr val="6366F1"/>
             </a:solidFill>
           </a:ln>
         </p:spPr>
@@ -4522,77 +3992,40 @@
           <a:bodyPr rtlCol="0" anchor="ctr"/>
           <a:lstStyle/>
           <a:p>
-            <a:pPr algn="ctr"/>
-          </a:p>
-        </p:txBody>
-      </p:sp>
-      <p:sp>
-        <p:nvSpPr>
-          <p:cNvPr id="20" name="TextBox 19"/>
-          <p:cNvSpPr txBox="1"/>
-          <p:nvPr/>
-        </p:nvSpPr>
-        <p:spPr>
-          <a:xfrm>
-            <a:off x="4572000" y="5696712"/>
-            <a:ext cx="3017520" cy="713232"/>
-          </a:xfrm>
-          <a:prstGeom prst="rect">
-            <a:avLst/>
-          </a:prstGeom>
-          <a:noFill/>
-        </p:spPr>
-        <p:txBody>
-          <a:bodyPr wrap="square" lIns="0" tIns="0" rIns="0" bIns="0">
-            <a:spAutoFit/>
-          </a:bodyPr>
-          <a:lstStyle/>
-          <a:p>
-            <a:pPr>
-              <a:defRPr sz="1050" b="1">
-                <a:solidFill>
-                  <a:srgbClr val="8B5CF6"/>
-                </a:solidFill>
-              </a:defRPr>
-            </a:pPr>
-            <a:r>
-              <a:t>5. Provenance &amp; MoSPI Export</a:t>
-            </a:r>
-          </a:p>
-          <a:p>
-            <a:pPr>
-              <a:defRPr sz="950">
-                <a:solidFill>
-                  <a:srgbClr val="0F172A"/>
-                </a:solidFill>
-              </a:defRPr>
-            </a:pPr>
-            <a:r>
-              <a:t>SHA-256 tamper-evident cryptographic hash vault + real-time interactive analytics dashboard.</a:t>
-            </a:r>
-          </a:p>
-        </p:txBody>
-      </p:sp>
-      <p:sp>
-        <p:nvSpPr>
-          <p:cNvPr id="21" name="Rounded Rectangle 20"/>
+            <a:pPr algn="ctr">
+              <a:defRPr sz="950" b="1">
+                <a:solidFill>
+                  <a:srgbClr val="000000"/>
+                </a:solidFill>
+                <a:latin typeface="Arial"/>
+              </a:defRPr>
+            </a:pPr>
+            <a:r>
+              <a:t>Laspeyres</a:t>
+            </a:r>
+          </a:p>
+        </p:txBody>
+      </p:sp>
+      <p:sp>
+        <p:nvSpPr>
+          <p:cNvPr id="13" name="Rounded Rectangle 12"/>
           <p:cNvSpPr/>
           <p:nvPr/>
         </p:nvSpPr>
         <p:spPr>
           <a:xfrm>
-            <a:off x="8046720" y="1280160"/>
-            <a:ext cx="3566160" cy="2468880"/>
+            <a:off x="10332720" y="1325880"/>
+            <a:ext cx="1097280" cy="502920"/>
           </a:xfrm>
           <a:prstGeom prst="roundRect">
             <a:avLst/>
           </a:prstGeom>
           <a:solidFill>
-            <a:srgbClr val="FFFFFF"/>
+            <a:srgbClr val="E9D5FF"/>
           </a:solidFill>
-          <a:ln w="19050">
+          <a:ln w="12700">
             <a:solidFill>
-              <a:srgbClr val="E2E8F0"/>
+              <a:srgbClr val="6366F1"/>
             </a:solidFill>
           </a:ln>
         </p:spPr>
@@ -4614,138 +4047,30 @@
           <a:bodyPr rtlCol="0" anchor="ctr"/>
           <a:lstStyle/>
           <a:p>
-            <a:pPr algn="ctr"/>
-          </a:p>
-        </p:txBody>
-      </p:sp>
-      <p:sp>
-        <p:nvSpPr>
-          <p:cNvPr id="22" name="TextBox 21"/>
-          <p:cNvSpPr txBox="1"/>
-          <p:nvPr/>
-        </p:nvSpPr>
-        <p:spPr>
-          <a:xfrm>
-            <a:off x="8229600" y="1417320"/>
-            <a:ext cx="3200400" cy="365760"/>
-          </a:xfrm>
-          <a:prstGeom prst="rect">
-            <a:avLst/>
-          </a:prstGeom>
-          <a:noFill/>
-        </p:spPr>
-        <p:txBody>
-          <a:bodyPr wrap="square" lIns="0" tIns="0" rIns="0" bIns="0">
-            <a:spAutoFit/>
-          </a:bodyPr>
-          <a:lstStyle/>
-          <a:p>
-            <a:pPr>
-              <a:defRPr sz="1300" b="1">
-                <a:solidFill>
-                  <a:srgbClr val="2563EB"/>
-                </a:solidFill>
-              </a:defRPr>
-            </a:pPr>
-            <a:r>
-              <a:t>WHY WE ARE DIFFERENT (INNOVATION)</a:t>
-            </a:r>
-          </a:p>
-        </p:txBody>
-      </p:sp>
-      <p:sp>
-        <p:nvSpPr>
-          <p:cNvPr id="23" name="TextBox 22"/>
-          <p:cNvSpPr txBox="1"/>
-          <p:nvPr/>
-        </p:nvSpPr>
-        <p:spPr>
-          <a:xfrm>
-            <a:off x="8183879" y="1783080"/>
-            <a:ext cx="3291840" cy="1828800"/>
-          </a:xfrm>
-          <a:prstGeom prst="rect">
-            <a:avLst/>
-          </a:prstGeom>
-          <a:noFill/>
-        </p:spPr>
-        <p:txBody>
-          <a:bodyPr wrap="square" lIns="0" tIns="0" rIns="0" bIns="0">
-            <a:spAutoFit/>
-          </a:bodyPr>
-          <a:lstStyle/>
-          <a:p>
-            <a:pPr>
-              <a:spcAft>
-                <a:spcPts val="400"/>
-              </a:spcAft>
-              <a:defRPr sz="1000">
-                <a:solidFill>
-                  <a:srgbClr val="0F172A"/>
-                </a:solidFill>
-              </a:defRPr>
-            </a:pPr>
-            <a:r>
-              <a:t>• Shift from Static to Dynamic: Captures intraday &amp; seasonal yield shifts, not just single monthly spot fares.</a:t>
-            </a:r>
-          </a:p>
-          <a:p>
-            <a:pPr>
-              <a:spcAft>
-                <a:spcPts val="400"/>
-              </a:spcAft>
-              <a:defRPr sz="1000">
-                <a:solidFill>
-                  <a:srgbClr val="0F172A"/>
-                </a:solidFill>
-              </a:defRPr>
-            </a:pPr>
-            <a:r>
-              <a:t>• Lead-Time Granularity: Evaluates last-minute travel surge (1d) vs vacation planning (45d) empirically.</a:t>
-            </a:r>
-          </a:p>
-          <a:p>
-            <a:pPr>
-              <a:spcAft>
-                <a:spcPts val="400"/>
-              </a:spcAft>
-              <a:defRPr sz="1000">
-                <a:solidFill>
-                  <a:srgbClr val="0F172A"/>
-                </a:solidFill>
-              </a:defRPr>
-            </a:pPr>
-            <a:r>
-              <a:t>• Zero Upward Bias: Mathematically proven Jevons GM replaces flawed arithmetic Dutot averages.</a:t>
-            </a:r>
-          </a:p>
-          <a:p>
-            <a:pPr>
-              <a:spcAft>
-                <a:spcPts val="400"/>
-              </a:spcAft>
-              <a:defRPr sz="1000">
-                <a:solidFill>
-                  <a:srgbClr val="0F172A"/>
-                </a:solidFill>
-              </a:defRPr>
-            </a:pPr>
-            <a:r>
-              <a:t>• Cryptographic Provenance: Every scrape run outputs an immutable SHA-256 audit manifest for MoSPI verifiability.</a:t>
-            </a:r>
-          </a:p>
-        </p:txBody>
-      </p:sp>
-      <p:sp>
-        <p:nvSpPr>
-          <p:cNvPr id="24" name="Rounded Rectangle 23"/>
+            <a:pPr algn="ctr">
+              <a:defRPr sz="950" b="1">
+                <a:solidFill>
+                  <a:srgbClr val="000000"/>
+                </a:solidFill>
+                <a:latin typeface="Arial"/>
+              </a:defRPr>
+            </a:pPr>
+            <a:r>
+              <a:t>Dashboard</a:t>
+            </a:r>
+          </a:p>
+        </p:txBody>
+      </p:sp>
+      <p:sp>
+        <p:nvSpPr>
+          <p:cNvPr id="14" name="Rounded Rectangle 13"/>
           <p:cNvSpPr/>
           <p:nvPr/>
         </p:nvSpPr>
         <p:spPr>
           <a:xfrm>
-            <a:off x="8046720" y="3931920"/>
-            <a:ext cx="3566160" cy="2468880"/>
+            <a:off x="4297680" y="2011680"/>
+            <a:ext cx="3840480" cy="4480560"/>
           </a:xfrm>
           <a:prstGeom prst="roundRect">
             <a:avLst/>
@@ -4753,9 +4078,9 @@
           <a:solidFill>
             <a:srgbClr val="FFFFFF"/>
           </a:solidFill>
-          <a:ln w="19050">
+          <a:ln w="38100">
             <a:solidFill>
-              <a:srgbClr val="E2E8F0"/>
+              <a:srgbClr val="000000"/>
             </a:solidFill>
           </a:ln>
         </p:spPr>
@@ -4783,14 +4108,14 @@
       </p:sp>
       <p:sp>
         <p:nvSpPr>
-          <p:cNvPr id="25" name="TextBox 24"/>
+          <p:cNvPr id="15" name="TextBox 14"/>
           <p:cNvSpPr txBox="1"/>
           <p:nvPr/>
         </p:nvSpPr>
         <p:spPr>
           <a:xfrm>
-            <a:off x="8229600" y="4069080"/>
-            <a:ext cx="3200400" cy="365760"/>
+            <a:off x="4434840" y="2148840"/>
+            <a:ext cx="3566160" cy="4206240"/>
           </a:xfrm>
           <a:prstGeom prst="rect">
             <a:avLst/>
@@ -4803,29 +4128,187 @@
           </a:bodyPr>
           <a:lstStyle/>
           <a:p>
+            <a:pPr algn="ctr">
+              <a:defRPr sz="2000" b="1">
+                <a:solidFill>
+                  <a:srgbClr val="000000"/>
+                </a:solidFill>
+                <a:latin typeface="Arial"/>
+              </a:defRPr>
+            </a:pPr>
+            <a:r>
+              <a:t>Our solution</a:t>
+            </a:r>
+          </a:p>
+          <a:p>
             <a:pPr>
-              <a:defRPr sz="1300" b="1">
-                <a:solidFill>
-                  <a:srgbClr val="2563EB"/>
-                </a:solidFill>
-              </a:defRPr>
-            </a:pPr>
-            <a:r>
-              <a:t>VALUE PROPOSITION FOR GOVERNMENT</a:t>
-            </a:r>
-          </a:p>
-        </p:txBody>
-      </p:sp>
-      <p:sp>
-        <p:nvSpPr>
-          <p:cNvPr id="26" name="TextBox 25"/>
+              <a:spcAft>
+                <a:spcPts val="600"/>
+              </a:spcAft>
+              <a:defRPr sz="1150" b="1">
+                <a:solidFill>
+                  <a:srgbClr val="000000"/>
+                </a:solidFill>
+                <a:latin typeface="Arial"/>
+              </a:defRPr>
+            </a:pPr>
+            <a:r>
+              <a:t>An automated high-frequency pipeline that:</a:t>
+            </a:r>
+          </a:p>
+          <a:p>
+            <a:pPr>
+              <a:spcAft>
+                <a:spcPts val="400"/>
+              </a:spcAft>
+              <a:defRPr sz="1050">
+                <a:solidFill>
+                  <a:srgbClr val="000000"/>
+                </a:solidFill>
+                <a:latin typeface="Arial"/>
+              </a:defRPr>
+            </a:pPr>
+            <a:r>
+              <a:t>• Scrapes raw fares across IndiGo, Air India, SpiceJet &amp; OTAs via scheduled Playwright crawlers.</a:t>
+            </a:r>
+          </a:p>
+          <a:p>
+            <a:pPr>
+              <a:spcAft>
+                <a:spcPts val="400"/>
+              </a:spcAft>
+              <a:defRPr sz="1050">
+                <a:solidFill>
+                  <a:srgbClr val="000000"/>
+                </a:solidFill>
+                <a:latin typeface="Arial"/>
+              </a:defRPr>
+            </a:pPr>
+            <a:r>
+              <a:t>• Samples 5 forward lead times (1d, 7d, 15d, 30d, 45d) for complete horizon capture.</a:t>
+            </a:r>
+          </a:p>
+          <a:p>
+            <a:pPr>
+              <a:spcAft>
+                <a:spcPts val="400"/>
+              </a:spcAft>
+              <a:defRPr sz="1050">
+                <a:solidFill>
+                  <a:srgbClr val="000000"/>
+                </a:solidFill>
+                <a:latin typeface="Arial"/>
+              </a:defRPr>
+            </a:pPr>
+            <a:r>
+              <a:t>• Applies automated Z-score outlier filtering (|Z| &gt; 3.0) to flag dynamic surges.</a:t>
+            </a:r>
+          </a:p>
+          <a:p>
+            <a:pPr>
+              <a:spcAft>
+                <a:spcPts val="400"/>
+              </a:spcAft>
+              <a:defRPr sz="1050">
+                <a:solidFill>
+                  <a:srgbClr val="000000"/>
+                </a:solidFill>
+                <a:latin typeface="Arial"/>
+              </a:defRPr>
+            </a:pPr>
+            <a:r>
+              <a:t>• Calculates UN/ILO Jevons Elementary Geometric Mean to eliminate substitution bias.</a:t>
+            </a:r>
+          </a:p>
+          <a:p>
+            <a:pPr>
+              <a:spcAft>
+                <a:spcPts val="400"/>
+              </a:spcAft>
+              <a:defRPr sz="1050">
+                <a:solidFill>
+                  <a:srgbClr val="000000"/>
+                </a:solidFill>
+                <a:latin typeface="Arial"/>
+              </a:defRPr>
+            </a:pPr>
+            <a:r>
+              <a:t>• Aggregates National Laspeyres Index weighted by DGCA monthly passenger volume.</a:t>
+            </a:r>
+          </a:p>
+          <a:p>
+            <a:pPr>
+              <a:spcAft>
+                <a:spcPts val="400"/>
+              </a:spcAft>
+              <a:defRPr sz="1050">
+                <a:solidFill>
+                  <a:srgbClr val="000000"/>
+                </a:solidFill>
+                <a:latin typeface="Arial"/>
+              </a:defRPr>
+            </a:pPr>
+            <a:r>
+              <a:t>• Generates cryptographic SHA-256 provenance hashes for official MoSPI auditability.</a:t>
+            </a:r>
+          </a:p>
+        </p:txBody>
+      </p:sp>
+      <p:sp>
+        <p:nvSpPr>
+          <p:cNvPr id="16" name="Rounded Rectangle 15"/>
+          <p:cNvSpPr/>
+          <p:nvPr/>
+        </p:nvSpPr>
+        <p:spPr>
+          <a:xfrm>
+            <a:off x="8321040" y="1280160"/>
+            <a:ext cx="3566160" cy="2514600"/>
+          </a:xfrm>
+          <a:prstGeom prst="roundRect">
+            <a:avLst/>
+          </a:prstGeom>
+          <a:solidFill>
+            <a:srgbClr val="FFFFFF"/>
+          </a:solidFill>
+          <a:ln w="38100">
+            <a:solidFill>
+              <a:srgbClr val="000000"/>
+            </a:solidFill>
+          </a:ln>
+        </p:spPr>
+        <p:style>
+          <a:lnRef idx="1">
+            <a:schemeClr val="accent1"/>
+          </a:lnRef>
+          <a:fillRef idx="3">
+            <a:schemeClr val="accent1"/>
+          </a:fillRef>
+          <a:effectRef idx="2">
+            <a:schemeClr val="accent1"/>
+          </a:effectRef>
+          <a:fontRef idx="minor">
+            <a:schemeClr val="lt1"/>
+          </a:fontRef>
+        </p:style>
+        <p:txBody>
+          <a:bodyPr rtlCol="0" anchor="ctr"/>
+          <a:lstStyle/>
+          <a:p>
+            <a:pPr algn="ctr"/>
+          </a:p>
+        </p:txBody>
+      </p:sp>
+      <p:sp>
+        <p:nvSpPr>
+          <p:cNvPr id="17" name="TextBox 16"/>
           <p:cNvSpPr txBox="1"/>
           <p:nvPr/>
         </p:nvSpPr>
         <p:spPr>
           <a:xfrm>
-            <a:off x="8183879" y="4434840"/>
-            <a:ext cx="3291840" cy="1828800"/>
+            <a:off x="8458200" y="1371600"/>
+            <a:ext cx="3291840" cy="2331720"/>
           </a:xfrm>
           <a:prstGeom prst="rect">
             <a:avLst/>
@@ -4838,63 +4321,199 @@
           </a:bodyPr>
           <a:lstStyle/>
           <a:p>
+            <a:pPr algn="ctr">
+              <a:spcAft>
+                <a:spcPts val="400"/>
+              </a:spcAft>
+              <a:defRPr sz="1800" b="1">
+                <a:solidFill>
+                  <a:srgbClr val="000000"/>
+                </a:solidFill>
+                <a:latin typeface="Arial"/>
+              </a:defRPr>
+            </a:pPr>
+            <a:r>
+              <a:t>Why different</a:t>
+            </a:r>
+          </a:p>
+          <a:p>
             <a:pPr>
               <a:spcAft>
+                <a:spcPts val="300"/>
+              </a:spcAft>
+              <a:defRPr sz="1000">
+                <a:solidFill>
+                  <a:srgbClr val="000000"/>
+                </a:solidFill>
+                <a:latin typeface="Arial"/>
+              </a:defRPr>
+            </a:pPr>
+            <a:r>
+              <a:t>• Captures real-time dynamic yield algorithms, not single monthly static quotes.</a:t>
+            </a:r>
+          </a:p>
+          <a:p>
+            <a:pPr>
+              <a:spcAft>
+                <a:spcPts val="300"/>
+              </a:spcAft>
+              <a:defRPr sz="1000">
+                <a:solidFill>
+                  <a:srgbClr val="000000"/>
+                </a:solidFill>
+                <a:latin typeface="Arial"/>
+              </a:defRPr>
+            </a:pPr>
+            <a:r>
+              <a:t>• Mathematically proven Jevons GM eliminates upward substitution bias over Dutot.</a:t>
+            </a:r>
+          </a:p>
+          <a:p>
+            <a:pPr>
+              <a:spcAft>
+                <a:spcPts val="300"/>
+              </a:spcAft>
+              <a:defRPr sz="1000">
+                <a:solidFill>
+                  <a:srgbClr val="000000"/>
+                </a:solidFill>
+                <a:latin typeface="Arial"/>
+              </a:defRPr>
+            </a:pPr>
+            <a:r>
+              <a:t>• Cryptographic SHA-256 vault guarantees legal &amp; statistical reproducibility.</a:t>
+            </a:r>
+          </a:p>
+        </p:txBody>
+      </p:sp>
+      <p:sp>
+        <p:nvSpPr>
+          <p:cNvPr id="18" name="Rounded Rectangle 17"/>
+          <p:cNvSpPr/>
+          <p:nvPr/>
+        </p:nvSpPr>
+        <p:spPr>
+          <a:xfrm>
+            <a:off x="8321040" y="3977639"/>
+            <a:ext cx="3566160" cy="2514600"/>
+          </a:xfrm>
+          <a:prstGeom prst="roundRect">
+            <a:avLst/>
+          </a:prstGeom>
+          <a:solidFill>
+            <a:srgbClr val="FFFFFF"/>
+          </a:solidFill>
+          <a:ln w="38100">
+            <a:solidFill>
+              <a:srgbClr val="000000"/>
+            </a:solidFill>
+          </a:ln>
+        </p:spPr>
+        <p:style>
+          <a:lnRef idx="1">
+            <a:schemeClr val="accent1"/>
+          </a:lnRef>
+          <a:fillRef idx="3">
+            <a:schemeClr val="accent1"/>
+          </a:fillRef>
+          <a:effectRef idx="2">
+            <a:schemeClr val="accent1"/>
+          </a:effectRef>
+          <a:fontRef idx="minor">
+            <a:schemeClr val="lt1"/>
+          </a:fontRef>
+        </p:style>
+        <p:txBody>
+          <a:bodyPr rtlCol="0" anchor="ctr"/>
+          <a:lstStyle/>
+          <a:p>
+            <a:pPr algn="ctr"/>
+          </a:p>
+        </p:txBody>
+      </p:sp>
+      <p:sp>
+        <p:nvSpPr>
+          <p:cNvPr id="19" name="TextBox 18"/>
+          <p:cNvSpPr txBox="1"/>
+          <p:nvPr/>
+        </p:nvSpPr>
+        <p:spPr>
+          <a:xfrm>
+            <a:off x="8458200" y="4069080"/>
+            <a:ext cx="3291840" cy="2331720"/>
+          </a:xfrm>
+          <a:prstGeom prst="rect">
+            <a:avLst/>
+          </a:prstGeom>
+          <a:noFill/>
+        </p:spPr>
+        <p:txBody>
+          <a:bodyPr wrap="square" lIns="0" tIns="0" rIns="0" bIns="0">
+            <a:spAutoFit/>
+          </a:bodyPr>
+          <a:lstStyle/>
+          <a:p>
+            <a:pPr algn="ctr">
+              <a:spcAft>
                 <a:spcPts val="400"/>
               </a:spcAft>
+              <a:defRPr sz="1800" b="1">
+                <a:solidFill>
+                  <a:srgbClr val="000000"/>
+                </a:solidFill>
+                <a:latin typeface="Arial"/>
+              </a:defRPr>
+            </a:pPr>
+            <a:r>
+              <a:t>Key Value Proposition</a:t>
+            </a:r>
+          </a:p>
+          <a:p>
+            <a:pPr>
+              <a:spcAft>
+                <a:spcPts val="300"/>
+              </a:spcAft>
               <a:defRPr sz="1000">
                 <a:solidFill>
-                  <a:srgbClr val="0F172A"/>
-                </a:solidFill>
-              </a:defRPr>
-            </a:pPr>
-            <a:r>
-              <a:t>• 100x Cost Reduction: Replaces physical field surveyors across 12 metro airports with automated cloud runs.</a:t>
+                  <a:srgbClr val="000000"/>
+                </a:solidFill>
+                <a:latin typeface="Arial"/>
+              </a:defRPr>
+            </a:pPr>
+            <a:r>
+              <a:t>• &gt;95% reduction in recurring survey costs across 12 metro airports.</a:t>
             </a:r>
           </a:p>
           <a:p>
             <a:pPr>
               <a:spcAft>
-                <a:spcPts val="400"/>
+                <a:spcPts val="300"/>
               </a:spcAft>
               <a:defRPr sz="1000">
                 <a:solidFill>
-                  <a:srgbClr val="0F172A"/>
-                </a:solidFill>
-              </a:defRPr>
-            </a:pPr>
-            <a:r>
-              <a:t>• Zero-Lag Inflation Tracking: Provides RBI Monetary Policy Committee with high-frequency transportation data.</a:t>
+                  <a:srgbClr val="000000"/>
+                </a:solidFill>
+                <a:latin typeface="Arial"/>
+              </a:defRPr>
+            </a:pPr>
+            <a:r>
+              <a:t>• Empowers RBI MPC with zero-lag transportation inflation leading indicators.</a:t>
             </a:r>
           </a:p>
           <a:p>
             <a:pPr>
               <a:spcAft>
-                <a:spcPts val="400"/>
+                <a:spcPts val="300"/>
               </a:spcAft>
               <a:defRPr sz="1000">
                 <a:solidFill>
-                  <a:srgbClr val="0F172A"/>
-                </a:solidFill>
-              </a:defRPr>
-            </a:pPr>
-            <a:r>
-              <a:t>• Aviation Ministry Oversight: Identifies sudden route price gouging during emergencies or route monopolies.</a:t>
-            </a:r>
-          </a:p>
-          <a:p>
-            <a:pPr>
-              <a:spcAft>
-                <a:spcPts val="400"/>
-              </a:spcAft>
-              <a:defRPr sz="1000">
-                <a:solidFill>
-                  <a:srgbClr val="0F172A"/>
-                </a:solidFill>
-              </a:defRPr>
-            </a:pPr>
-            <a:r>
-              <a:t>• Production-Ready Integration: Exportable CSV/JSON directly ingestible into MoSPI's central CPI engine.</a:t>
+                  <a:srgbClr val="000000"/>
+                </a:solidFill>
+                <a:latin typeface="Arial"/>
+              </a:defRPr>
+            </a:pPr>
+            <a:r>
+              <a:t>• Equips DGCA with instant surge anomaly alerts to detect regional price gouging.</a:t>
             </a:r>
           </a:p>
         </p:txBody>
@@ -4919,72 +4538,23 @@
       <p:grpSpPr/>
       <p:sp>
         <p:nvSpPr>
-          <p:cNvPr id="2" name="TextBox 1"/>
-          <p:cNvSpPr txBox="1"/>
-          <p:nvPr/>
-        </p:nvSpPr>
-        <p:spPr>
-          <a:xfrm>
-            <a:off x="731520" y="365760"/>
-            <a:ext cx="10728655" cy="822960"/>
-          </a:xfrm>
-          <a:prstGeom prst="rect">
-            <a:avLst/>
-          </a:prstGeom>
-          <a:noFill/>
-        </p:spPr>
-        <p:txBody>
-          <a:bodyPr wrap="square" lIns="0" tIns="0" rIns="0" bIns="0">
-            <a:spAutoFit/>
-          </a:bodyPr>
-          <a:lstStyle/>
-          <a:p>
-            <a:pPr>
-              <a:defRPr sz="1000" b="1">
-                <a:solidFill>
-                  <a:srgbClr val="2563EB"/>
-                </a:solidFill>
-              </a:defRPr>
-            </a:pPr>
-            <a:r>
-              <a:t>SIH 2026 | PS ID: 26056</a:t>
-            </a:r>
-          </a:p>
-          <a:p>
-            <a:pPr>
-              <a:defRPr sz="2200" b="1">
-                <a:solidFill>
-                  <a:srgbClr val="0F172A"/>
-                </a:solidFill>
-              </a:defRPr>
-            </a:pPr>
-            <a:r>
-              <a:t>Technical Architecture, Mathematical Formulas &amp; Tech Stack</a:t>
-            </a:r>
-          </a:p>
-        </p:txBody>
-      </p:sp>
-      <p:sp>
-        <p:nvSpPr>
-          <p:cNvPr id="3" name="Rounded Rectangle 2"/>
+          <p:cNvPr id="2" name="Rectangle 1"/>
           <p:cNvSpPr/>
           <p:nvPr/>
         </p:nvSpPr>
         <p:spPr>
           <a:xfrm>
-            <a:off x="731520" y="1280160"/>
-            <a:ext cx="3383280" cy="5120640"/>
-          </a:xfrm>
-          <a:prstGeom prst="roundRect">
+            <a:off x="0" y="0"/>
+            <a:ext cx="12191695" cy="6858000"/>
+          </a:xfrm>
+          <a:prstGeom prst="rect">
             <a:avLst/>
           </a:prstGeom>
           <a:solidFill>
             <a:srgbClr val="FFFFFF"/>
           </a:solidFill>
-          <a:ln w="19050">
-            <a:solidFill>
-              <a:srgbClr val="E2E8F0"/>
-            </a:solidFill>
+          <a:ln>
+            <a:noFill/>
           </a:ln>
         </p:spPr>
         <p:style>
@@ -5011,217 +4581,24 @@
       </p:sp>
       <p:sp>
         <p:nvSpPr>
-          <p:cNvPr id="4" name="TextBox 3"/>
-          <p:cNvSpPr txBox="1"/>
-          <p:nvPr/>
-        </p:nvSpPr>
-        <p:spPr>
-          <a:xfrm>
-            <a:off x="914400" y="1417320"/>
-            <a:ext cx="3017520" cy="365760"/>
-          </a:xfrm>
-          <a:prstGeom prst="rect">
-            <a:avLst/>
-          </a:prstGeom>
-          <a:noFill/>
-        </p:spPr>
-        <p:txBody>
-          <a:bodyPr wrap="square" lIns="0" tIns="0" rIns="0" bIns="0">
-            <a:spAutoFit/>
-          </a:bodyPr>
-          <a:lstStyle/>
-          <a:p>
-            <a:pPr>
-              <a:defRPr sz="1300" b="1">
-                <a:solidFill>
-                  <a:srgbClr val="2563EB"/>
-                </a:solidFill>
-              </a:defRPr>
-            </a:pPr>
-            <a:r>
-              <a:t>SYSTEM ARCHITECTURE</a:t>
-            </a:r>
-          </a:p>
-        </p:txBody>
-      </p:sp>
-      <p:sp>
-        <p:nvSpPr>
-          <p:cNvPr id="5" name="TextBox 4"/>
-          <p:cNvSpPr txBox="1"/>
-          <p:nvPr/>
-        </p:nvSpPr>
-        <p:spPr>
-          <a:xfrm>
-            <a:off x="868680" y="1783080"/>
-            <a:ext cx="3108960" cy="4389120"/>
-          </a:xfrm>
-          <a:prstGeom prst="rect">
-            <a:avLst/>
-          </a:prstGeom>
-          <a:noFill/>
-        </p:spPr>
-        <p:txBody>
-          <a:bodyPr wrap="square" lIns="0" tIns="0" rIns="0" bIns="0">
-            <a:spAutoFit/>
-          </a:bodyPr>
-          <a:lstStyle/>
-          <a:p>
-            <a:pPr>
-              <a:defRPr sz="1100" b="1">
-                <a:solidFill>
-                  <a:srgbClr val="2563EB"/>
-                </a:solidFill>
-              </a:defRPr>
-            </a:pPr>
-            <a:r>
-              <a:t>Tier 1: Harvester Layer</a:t>
-            </a:r>
-          </a:p>
-          <a:p>
-            <a:pPr>
-              <a:spcAft>
-                <a:spcPts val="600"/>
-              </a:spcAft>
-              <a:defRPr sz="950">
-                <a:solidFill>
-                  <a:srgbClr val="0F172A"/>
-                </a:solidFill>
-              </a:defRPr>
-            </a:pPr>
-            <a:r>
-              <a:t>Playwright headless worker pool with user-agent rotation, stealth plugins, and retry exponential backoff scheduled daily at 02:00 AM IST.</a:t>
-            </a:r>
-          </a:p>
-          <a:p>
-            <a:pPr>
-              <a:defRPr sz="1100" b="1">
-                <a:solidFill>
-                  <a:srgbClr val="2563EB"/>
-                </a:solidFill>
-              </a:defRPr>
-            </a:pPr>
-            <a:r>
-              <a:t>Tier 2: Cleansing &amp; Pipeline</a:t>
-            </a:r>
-          </a:p>
-          <a:p>
-            <a:pPr>
-              <a:spcAft>
-                <a:spcPts val="600"/>
-              </a:spcAft>
-              <a:defRPr sz="950">
-                <a:solidFill>
-                  <a:srgbClr val="0F172A"/>
-                </a:solidFill>
-              </a:defRPr>
-            </a:pPr>
-            <a:r>
-              <a:t>Python / Pandas parser extracts base fares, standardizes carrier codes, strips GST/UDF fees, and computes rolling Z-scores for surge outlier flagging.</a:t>
-            </a:r>
-          </a:p>
-          <a:p>
-            <a:pPr>
-              <a:defRPr sz="1100" b="1">
-                <a:solidFill>
-                  <a:srgbClr val="2563EB"/>
-                </a:solidFill>
-              </a:defRPr>
-            </a:pPr>
-            <a:r>
-              <a:t>Tier 3: Index Calculation Engine</a:t>
-            </a:r>
-          </a:p>
-          <a:p>
-            <a:pPr>
-              <a:spcAft>
-                <a:spcPts val="600"/>
-              </a:spcAft>
-              <a:defRPr sz="950">
-                <a:solidFill>
-                  <a:srgbClr val="0F172A"/>
-                </a:solidFill>
-              </a:defRPr>
-            </a:pPr>
-            <a:r>
-              <a:t>UN/ILO compliant computation core running Jevons geometric mean, Dutot comparison, and DGCA monthly passenger-share Laspeyres weighting.</a:t>
-            </a:r>
-          </a:p>
-          <a:p>
-            <a:pPr>
-              <a:defRPr sz="1100" b="1">
-                <a:solidFill>
-                  <a:srgbClr val="2563EB"/>
-                </a:solidFill>
-              </a:defRPr>
-            </a:pPr>
-            <a:r>
-              <a:t>Tier 4: Provenance Vault &amp; Storage</a:t>
-            </a:r>
-          </a:p>
-          <a:p>
-            <a:pPr>
-              <a:spcAft>
-                <a:spcPts val="600"/>
-              </a:spcAft>
-              <a:defRPr sz="950">
-                <a:solidFill>
-                  <a:srgbClr val="0F172A"/>
-                </a:solidFill>
-              </a:defRPr>
-            </a:pPr>
-            <a:r>
-              <a:t>PostgreSQL database storing raw flight quotes with cryptographic SHA-256 provenance hashes for legal auditability.</a:t>
-            </a:r>
-          </a:p>
-          <a:p>
-            <a:pPr>
-              <a:defRPr sz="1100" b="1">
-                <a:solidFill>
-                  <a:srgbClr val="2563EB"/>
-                </a:solidFill>
-              </a:defRPr>
-            </a:pPr>
-            <a:r>
-              <a:t>Tier 5: Analytics Dashboard</a:t>
-            </a:r>
-          </a:p>
-          <a:p>
-            <a:pPr>
-              <a:spcAft>
-                <a:spcPts val="600"/>
-              </a:spcAft>
-              <a:defRPr sz="950">
-                <a:solidFill>
-                  <a:srgbClr val="0F172A"/>
-                </a:solidFill>
-              </a:defRPr>
-            </a:pPr>
-            <a:r>
-              <a:t>React 19 + TypeScript + Recharts + Tailwind CSS web portal with horizon filters, outlier modals, and live MoSPI baseline comparisons.</a:t>
-            </a:r>
-          </a:p>
-        </p:txBody>
-      </p:sp>
-      <p:sp>
-        <p:nvSpPr>
-          <p:cNvPr id="6" name="Rounded Rectangle 5"/>
+          <p:cNvPr id="3" name="Oval 2"/>
           <p:cNvSpPr/>
           <p:nvPr/>
         </p:nvSpPr>
         <p:spPr>
           <a:xfrm>
-            <a:off x="4297680" y="1280160"/>
-            <a:ext cx="4023360" cy="5120640"/>
-          </a:xfrm>
-          <a:prstGeom prst="roundRect">
+            <a:off x="365760" y="228600"/>
+            <a:ext cx="1645920" cy="777240"/>
+          </a:xfrm>
+          <a:prstGeom prst="ellipse">
             <a:avLst/>
           </a:prstGeom>
           <a:solidFill>
             <a:srgbClr val="FFFFFF"/>
           </a:solidFill>
-          <a:ln w="19050">
+          <a:ln w="25400">
             <a:solidFill>
-              <a:srgbClr val="E2E8F0"/>
+              <a:srgbClr val="64508C"/>
             </a:solidFill>
           </a:ln>
         </p:spPr>
@@ -5240,23 +4617,33 @@
           </a:fontRef>
         </p:style>
         <p:txBody>
-          <a:bodyPr rtlCol="0" anchor="ctr"/>
-          <a:lstStyle/>
-          <a:p>
-            <a:pPr algn="ctr"/>
-          </a:p>
-        </p:txBody>
-      </p:sp>
-      <p:sp>
-        <p:nvSpPr>
-          <p:cNvPr id="7" name="TextBox 6"/>
+          <a:bodyPr rtlCol="0" anchor="ctr" wrap="square"/>
+          <a:lstStyle/>
+          <a:p>
+            <a:pPr algn="ctr">
+              <a:defRPr sz="1400" b="1">
+                <a:solidFill>
+                  <a:srgbClr val="000000"/>
+                </a:solidFill>
+                <a:latin typeface="Arial"/>
+              </a:defRPr>
+            </a:pPr>
+            <a:r>
+              <a:t>Team Rookie</a:t>
+            </a:r>
+          </a:p>
+        </p:txBody>
+      </p:sp>
+      <p:sp>
+        <p:nvSpPr>
+          <p:cNvPr id="4" name="TextBox 3"/>
           <p:cNvSpPr txBox="1"/>
           <p:nvPr/>
         </p:nvSpPr>
         <p:spPr>
           <a:xfrm>
-            <a:off x="4480560" y="1417320"/>
-            <a:ext cx="3657600" cy="365760"/>
+            <a:off x="2286000" y="182880"/>
+            <a:ext cx="7589520" cy="914400"/>
           </a:xfrm>
           <a:prstGeom prst="rect">
             <a:avLst/>
@@ -5264,196 +4651,68 @@
           <a:noFill/>
         </p:spPr>
         <p:txBody>
-          <a:bodyPr wrap="square" lIns="0" tIns="0" rIns="0" bIns="0">
+          <a:bodyPr wrap="square" lIns="0" rIns="0" tIns="0" bIns="0">
             <a:spAutoFit/>
           </a:bodyPr>
           <a:lstStyle/>
           <a:p>
-            <a:pPr>
-              <a:defRPr sz="1300" b="1">
-                <a:solidFill>
-                  <a:srgbClr val="2563EB"/>
-                </a:solidFill>
-              </a:defRPr>
-            </a:pPr>
-            <a:r>
-              <a:t>MATHEMATICAL FORMULATION &amp; STANDARDS</a:t>
-            </a:r>
-          </a:p>
-        </p:txBody>
-      </p:sp>
-      <p:sp>
-        <p:nvSpPr>
-          <p:cNvPr id="8" name="TextBox 7"/>
-          <p:cNvSpPr txBox="1"/>
+            <a:pPr algn="ctr">
+              <a:defRPr sz="2800" b="1">
+                <a:solidFill>
+                  <a:srgbClr val="1B365D"/>
+                </a:solidFill>
+                <a:latin typeface="Times New Roman"/>
+              </a:defRPr>
+            </a:pPr>
+            <a:r>
+              <a:t>TECHNICAL APPROACH</a:t>
+            </a:r>
+          </a:p>
+        </p:txBody>
+      </p:sp>
+      <p:pic>
+        <p:nvPicPr>
+          <p:cNvPr id="5" name="Picture 4" descr="page_1_img_2.png"/>
+          <p:cNvPicPr>
+            <a:picLocks noChangeAspect="1"/>
+          </p:cNvPicPr>
           <p:nvPr/>
-        </p:nvSpPr>
-        <p:spPr>
-          <a:xfrm>
-            <a:off x="4434840" y="1783080"/>
-            <a:ext cx="3749039" cy="4389120"/>
+        </p:nvPicPr>
+        <p:blipFill>
+          <a:blip r:embed="rId2"/>
+          <a:stretch>
+            <a:fillRect/>
+          </a:stretch>
+        </p:blipFill>
+        <p:spPr>
+          <a:xfrm>
+            <a:off x="10241280" y="164592"/>
+            <a:ext cx="1645920" cy="868680"/>
           </a:xfrm>
           <a:prstGeom prst="rect">
             <a:avLst/>
           </a:prstGeom>
-          <a:noFill/>
-        </p:spPr>
-        <p:txBody>
-          <a:bodyPr wrap="square" lIns="0" tIns="0" rIns="0" bIns="0">
-            <a:spAutoFit/>
-          </a:bodyPr>
-          <a:lstStyle/>
-          <a:p>
-            <a:pPr>
-              <a:defRPr sz="1100" b="1">
-                <a:solidFill>
-                  <a:srgbClr val="2563EB"/>
-                </a:solidFill>
-              </a:defRPr>
-            </a:pPr>
-            <a:r>
-              <a:t>1. Elementary Jevons Geometric Index:</a:t>
-            </a:r>
-          </a:p>
-          <a:p>
-            <a:pPr>
-              <a:spcAft>
-                <a:spcPts val="800"/>
-              </a:spcAft>
-              <a:defRPr sz="950">
-                <a:solidFill>
-                  <a:srgbClr val="0F172A"/>
-                </a:solidFill>
-              </a:defRPr>
-            </a:pPr>
-            <a:r>
-              <a:t>I_J = [ ∏_{i=1}^n (P_{i,t} / P_{i,0}) ]^(1/n) = exp( (1/n) ∑ ln(P_{i,t} / P_{i,0}) )</a:t>
-            </a:r>
-            <a:br/>
-            <a:r>
-              <a:t>• Multiplicative axiom satisfied; immune to extreme single-seat fare shocks.</a:t>
-            </a:r>
-            <a:br/>
-            <a:r>
-              <a:t>• Complies with UN/ILO Consumer Price Index Manual (2020) Chapter 10 recommendations.</a:t>
-            </a:r>
-          </a:p>
-          <a:p>
-            <a:pPr>
-              <a:defRPr sz="1100" b="1">
-                <a:solidFill>
-                  <a:srgbClr val="2563EB"/>
-                </a:solidFill>
-              </a:defRPr>
-            </a:pPr>
-            <a:r>
-              <a:t>2. Dutot Arithmetic Index (Baseline Comparison):</a:t>
-            </a:r>
-          </a:p>
-          <a:p>
-            <a:pPr>
-              <a:spcAft>
-                <a:spcPts val="800"/>
-              </a:spcAft>
-              <a:defRPr sz="950">
-                <a:solidFill>
-                  <a:srgbClr val="0F172A"/>
-                </a:solidFill>
-              </a:defRPr>
-            </a:pPr>
-            <a:r>
-              <a:t>I_D = ( ∑ P_{i,t} / n ) / ( ∑ P_{i,0} / n )</a:t>
-            </a:r>
-            <a:br/>
-            <a:r>
-              <a:t>• Maintained alongside Jevons to isolate and measure upward substitution bias in legacy indices.</a:t>
-            </a:r>
-          </a:p>
-          <a:p>
-            <a:pPr>
-              <a:defRPr sz="1100" b="1">
-                <a:solidFill>
-                  <a:srgbClr val="2563EB"/>
-                </a:solidFill>
-              </a:defRPr>
-            </a:pPr>
-            <a:r>
-              <a:t>3. DGCA Weighted Laspeyres National Aggregation:</a:t>
-            </a:r>
-          </a:p>
-          <a:p>
-            <a:pPr>
-              <a:spcAft>
-                <a:spcPts val="800"/>
-              </a:spcAft>
-              <a:defRPr sz="950">
-                <a:solidFill>
-                  <a:srgbClr val="0F172A"/>
-                </a:solidFill>
-              </a:defRPr>
-            </a:pPr>
-            <a:r>
-              <a:t>I_{National, t} = ∑_{c=1}^{12} [ W_c × I_{c, t} ]  where  ∑ W_c = 1.0</a:t>
-            </a:r>
-            <a:br/>
-            <a:r>
-              <a:t>• Weights (W_c) derived directly from DGCA City-Pair Monthly Passenger Volume (e.g., DEL-BOM: 0.185, BOM-BLR: 0.112).</a:t>
-            </a:r>
-          </a:p>
-          <a:p>
-            <a:pPr>
-              <a:defRPr sz="1100" b="1">
-                <a:solidFill>
-                  <a:srgbClr val="2563EB"/>
-                </a:solidFill>
-              </a:defRPr>
-            </a:pPr>
-            <a:r>
-              <a:t>4. Dynamic Z-Score Outlier Flagging:</a:t>
-            </a:r>
-          </a:p>
-          <a:p>
-            <a:pPr>
-              <a:spcAft>
-                <a:spcPts val="800"/>
-              </a:spcAft>
-              <a:defRPr sz="950">
-                <a:solidFill>
-                  <a:srgbClr val="0F172A"/>
-                </a:solidFill>
-              </a:defRPr>
-            </a:pPr>
-            <a:r>
-              <a:t>Z_i = ( P_i - μ_c ) / σ_c  where |Z_i| &gt; 3.0 is flagged</a:t>
-            </a:r>
-            <a:br/>
-            <a:r>
-              <a:t>• Flags extreme festival / last-minute dynamic pricing anomalies for audit.</a:t>
-            </a:r>
-          </a:p>
-        </p:txBody>
-      </p:sp>
-      <p:sp>
-        <p:nvSpPr>
-          <p:cNvPr id="9" name="Rounded Rectangle 8"/>
+        </p:spPr>
+      </p:pic>
+      <p:sp>
+        <p:nvSpPr>
+          <p:cNvPr id="6" name="Rounded Rectangle 5"/>
           <p:cNvSpPr/>
           <p:nvPr/>
         </p:nvSpPr>
         <p:spPr>
           <a:xfrm>
-            <a:off x="8503920" y="1280160"/>
-            <a:ext cx="2926080" cy="5120640"/>
+            <a:off x="2926080" y="1188720"/>
+            <a:ext cx="2011680" cy="320040"/>
           </a:xfrm>
           <a:prstGeom prst="roundRect">
             <a:avLst/>
           </a:prstGeom>
           <a:solidFill>
-            <a:srgbClr val="FFFFFF"/>
+            <a:srgbClr val="FEF08A"/>
           </a:solidFill>
-          <a:ln w="19050">
-            <a:solidFill>
-              <a:srgbClr val="E2E8F0"/>
-            </a:solidFill>
+          <a:ln>
+            <a:noFill/>
           </a:ln>
         </p:spPr>
         <p:style>
@@ -5474,20 +4733,176 @@
           <a:bodyPr rtlCol="0" anchor="ctr"/>
           <a:lstStyle/>
           <a:p>
+            <a:pPr algn="ctr">
+              <a:defRPr sz="1100" b="1">
+                <a:solidFill>
+                  <a:srgbClr val="000000"/>
+                </a:solidFill>
+                <a:latin typeface="Arial"/>
+              </a:defRPr>
+            </a:pPr>
+            <a:r>
+              <a:t>System Architecture</a:t>
+            </a:r>
+          </a:p>
+        </p:txBody>
+      </p:sp>
+      <p:pic>
+        <p:nvPicPr>
+          <p:cNvPr id="7" name="Picture 6" descr="architecture_diagram.png"/>
+          <p:cNvPicPr>
+            <a:picLocks noChangeAspect="1"/>
+          </p:cNvPicPr>
+          <p:nvPr/>
+        </p:nvPicPr>
+        <p:blipFill>
+          <a:blip r:embed="rId3"/>
+          <a:stretch>
+            <a:fillRect/>
+          </a:stretch>
+        </p:blipFill>
+        <p:spPr>
+          <a:xfrm>
+            <a:off x="457200" y="1554480"/>
+            <a:ext cx="6583680" cy="2377440"/>
+          </a:xfrm>
+          <a:prstGeom prst="rect">
+            <a:avLst/>
+          </a:prstGeom>
+        </p:spPr>
+      </p:pic>
+      <p:sp>
+        <p:nvSpPr>
+          <p:cNvPr id="8" name="Rounded Rectangle 7"/>
+          <p:cNvSpPr/>
+          <p:nvPr/>
+        </p:nvSpPr>
+        <p:spPr>
+          <a:xfrm>
+            <a:off x="2926080" y="4069080"/>
+            <a:ext cx="1828800" cy="320040"/>
+          </a:xfrm>
+          <a:prstGeom prst="roundRect">
+            <a:avLst/>
+          </a:prstGeom>
+          <a:solidFill>
+            <a:srgbClr val="FEF08A"/>
+          </a:solidFill>
+          <a:ln>
+            <a:noFill/>
+          </a:ln>
+        </p:spPr>
+        <p:style>
+          <a:lnRef idx="1">
+            <a:schemeClr val="accent1"/>
+          </a:lnRef>
+          <a:fillRef idx="3">
+            <a:schemeClr val="accent1"/>
+          </a:fillRef>
+          <a:effectRef idx="2">
+            <a:schemeClr val="accent1"/>
+          </a:effectRef>
+          <a:fontRef idx="minor">
+            <a:schemeClr val="lt1"/>
+          </a:fontRef>
+        </p:style>
+        <p:txBody>
+          <a:bodyPr rtlCol="0" anchor="ctr"/>
+          <a:lstStyle/>
+          <a:p>
+            <a:pPr algn="ctr">
+              <a:defRPr sz="1100" b="1">
+                <a:solidFill>
+                  <a:srgbClr val="000000"/>
+                </a:solidFill>
+                <a:latin typeface="Arial"/>
+              </a:defRPr>
+            </a:pPr>
+            <a:r>
+              <a:t>Process Flowchart</a:t>
+            </a:r>
+          </a:p>
+        </p:txBody>
+      </p:sp>
+      <p:pic>
+        <p:nvPicPr>
+          <p:cNvPr id="9" name="Picture 8" descr="flowchart_diagram.png"/>
+          <p:cNvPicPr>
+            <a:picLocks noChangeAspect="1"/>
+          </p:cNvPicPr>
+          <p:nvPr/>
+        </p:nvPicPr>
+        <p:blipFill>
+          <a:blip r:embed="rId4"/>
+          <a:stretch>
+            <a:fillRect/>
+          </a:stretch>
+        </p:blipFill>
+        <p:spPr>
+          <a:xfrm>
+            <a:off x="457200" y="4434840"/>
+            <a:ext cx="6583680" cy="2148840"/>
+          </a:xfrm>
+          <a:prstGeom prst="rect">
+            <a:avLst/>
+          </a:prstGeom>
+        </p:spPr>
+      </p:pic>
+      <p:sp>
+        <p:nvSpPr>
+          <p:cNvPr id="10" name="Rounded Rectangle 9"/>
+          <p:cNvSpPr/>
+          <p:nvPr/>
+        </p:nvSpPr>
+        <p:spPr>
+          <a:xfrm>
+            <a:off x="7315200" y="1280160"/>
+            <a:ext cx="4389120" cy="5212080"/>
+          </a:xfrm>
+          <a:prstGeom prst="roundRect">
+            <a:avLst/>
+          </a:prstGeom>
+          <a:solidFill>
+            <a:srgbClr val="FFFFFF"/>
+          </a:solidFill>
+          <a:ln w="76200">
+            <a:solidFill>
+              <a:srgbClr val="B4C3D7"/>
+            </a:solidFill>
+          </a:ln>
+        </p:spPr>
+        <p:style>
+          <a:lnRef idx="1">
+            <a:schemeClr val="accent1"/>
+          </a:lnRef>
+          <a:fillRef idx="3">
+            <a:schemeClr val="accent1"/>
+          </a:fillRef>
+          <a:effectRef idx="2">
+            <a:schemeClr val="accent1"/>
+          </a:effectRef>
+          <a:fontRef idx="minor">
+            <a:schemeClr val="lt1"/>
+          </a:fontRef>
+        </p:style>
+        <p:txBody>
+          <a:bodyPr rtlCol="0" anchor="ctr"/>
+          <a:lstStyle/>
+          <a:p>
             <a:pPr algn="ctr"/>
           </a:p>
         </p:txBody>
       </p:sp>
       <p:sp>
         <p:nvSpPr>
-          <p:cNvPr id="10" name="TextBox 9"/>
+          <p:cNvPr id="11" name="TextBox 10"/>
           <p:cNvSpPr txBox="1"/>
           <p:nvPr/>
         </p:nvSpPr>
         <p:spPr>
           <a:xfrm>
-            <a:off x="8686800" y="1417320"/>
-            <a:ext cx="2560320" cy="365760"/>
+            <a:off x="7498079" y="1463040"/>
+            <a:ext cx="4023360" cy="4846320"/>
           </a:xfrm>
           <a:prstGeom prst="rect">
             <a:avLst/>
@@ -5500,200 +4915,211 @@
           </a:bodyPr>
           <a:lstStyle/>
           <a:p>
-            <a:pPr>
-              <a:defRPr sz="1300" b="1">
-                <a:solidFill>
-                  <a:srgbClr val="2563EB"/>
-                </a:solidFill>
-              </a:defRPr>
-            </a:pPr>
-            <a:r>
-              <a:t>ENTERPRISE TECH STACK</a:t>
-            </a:r>
-          </a:p>
-        </p:txBody>
-      </p:sp>
-      <p:sp>
-        <p:nvSpPr>
-          <p:cNvPr id="11" name="TextBox 10"/>
-          <p:cNvSpPr txBox="1"/>
-          <p:nvPr/>
-        </p:nvSpPr>
-        <p:spPr>
-          <a:xfrm>
-            <a:off x="8641080" y="1783080"/>
-            <a:ext cx="2651760" cy="4389120"/>
-          </a:xfrm>
-          <a:prstGeom prst="rect">
-            <a:avLst/>
-          </a:prstGeom>
-          <a:noFill/>
-        </p:spPr>
-        <p:txBody>
-          <a:bodyPr wrap="square" lIns="0" tIns="0" rIns="0" bIns="0">
-            <a:spAutoFit/>
-          </a:bodyPr>
-          <a:lstStyle/>
-          <a:p>
-            <a:pPr>
-              <a:defRPr sz="1050" b="1">
-                <a:solidFill>
-                  <a:srgbClr val="2563EB"/>
-                </a:solidFill>
-              </a:defRPr>
-            </a:pPr>
-            <a:r>
-              <a:t>Data Scraping Engine</a:t>
-            </a:r>
-          </a:p>
-          <a:p>
-            <a:pPr>
-              <a:spcAft>
-                <a:spcPts val="700"/>
-              </a:spcAft>
-              <a:defRPr sz="950">
-                <a:solidFill>
-                  <a:srgbClr val="0F172A"/>
-                </a:solidFill>
-              </a:defRPr>
-            </a:pPr>
-            <a:r>
-              <a:t>Playwright Node.js, Python, Stealth Plugin, Randomized User-Agents</a:t>
-            </a:r>
-          </a:p>
-          <a:p>
-            <a:pPr>
-              <a:defRPr sz="1050" b="1">
-                <a:solidFill>
-                  <a:srgbClr val="2563EB"/>
-                </a:solidFill>
-              </a:defRPr>
-            </a:pPr>
-            <a:r>
-              <a:t>Data Transformation</a:t>
-            </a:r>
-          </a:p>
-          <a:p>
-            <a:pPr>
-              <a:spcAft>
-                <a:spcPts val="700"/>
-              </a:spcAft>
-              <a:defRPr sz="950">
-                <a:solidFill>
-                  <a:srgbClr val="0F172A"/>
-                </a:solidFill>
-              </a:defRPr>
-            </a:pPr>
-            <a:r>
-              <a:t>Pandas, NumPy, SciPy (Z-score), Pydantic Data Models</a:t>
-            </a:r>
-          </a:p>
-          <a:p>
-            <a:pPr>
-              <a:defRPr sz="1050" b="1">
-                <a:solidFill>
-                  <a:srgbClr val="2563EB"/>
-                </a:solidFill>
-              </a:defRPr>
-            </a:pPr>
-            <a:r>
-              <a:t>Statistical Core</a:t>
-            </a:r>
-          </a:p>
-          <a:p>
-            <a:pPr>
-              <a:spcAft>
-                <a:spcPts val="700"/>
-              </a:spcAft>
-              <a:defRPr sz="950">
-                <a:solidFill>
-                  <a:srgbClr val="0F172A"/>
-                </a:solidFill>
-              </a:defRPr>
-            </a:pPr>
-            <a:r>
-              <a:t>Jevons Geometric Mean, Dutot Ratio, Laspeyres Multi-tier</a:t>
-            </a:r>
-          </a:p>
-          <a:p>
-            <a:pPr>
-              <a:defRPr sz="1050" b="1">
-                <a:solidFill>
-                  <a:srgbClr val="2563EB"/>
-                </a:solidFill>
-              </a:defRPr>
-            </a:pPr>
-            <a:r>
-              <a:t>Backend &amp; Database</a:t>
-            </a:r>
-          </a:p>
-          <a:p>
-            <a:pPr>
-              <a:spcAft>
-                <a:spcPts val="700"/>
-              </a:spcAft>
-              <a:defRPr sz="950">
-                <a:solidFill>
-                  <a:srgbClr val="0F172A"/>
-                </a:solidFill>
-              </a:defRPr>
-            </a:pPr>
-            <a:r>
-              <a:t>FastAPI / Node microservices, PostgreSQL, SHA-256 Vault</a:t>
-            </a:r>
-          </a:p>
-          <a:p>
-            <a:pPr>
-              <a:defRPr sz="1050" b="1">
-                <a:solidFill>
-                  <a:srgbClr val="2563EB"/>
-                </a:solidFill>
-              </a:defRPr>
-            </a:pPr>
-            <a:r>
-              <a:t>Frontend Dashboard</a:t>
-            </a:r>
-          </a:p>
-          <a:p>
-            <a:pPr>
-              <a:spcAft>
-                <a:spcPts val="700"/>
-              </a:spcAft>
-              <a:defRPr sz="950">
-                <a:solidFill>
-                  <a:srgbClr val="0F172A"/>
-                </a:solidFill>
-              </a:defRPr>
-            </a:pPr>
-            <a:r>
-              <a:t>React 19, TypeScript, Tailwind CSS, Lucide Icons, Recharts</a:t>
-            </a:r>
-          </a:p>
-          <a:p>
-            <a:pPr>
-              <a:defRPr sz="1050" b="1">
-                <a:solidFill>
-                  <a:srgbClr val="2563EB"/>
-                </a:solidFill>
-              </a:defRPr>
-            </a:pPr>
-            <a:r>
-              <a:t>Hosting &amp; CI/CD</a:t>
-            </a:r>
-          </a:p>
-          <a:p>
-            <a:pPr>
-              <a:spcAft>
-                <a:spcPts val="700"/>
-              </a:spcAft>
-              <a:defRPr sz="950">
-                <a:solidFill>
-                  <a:srgbClr val="0F172A"/>
-                </a:solidFill>
-              </a:defRPr>
-            </a:pPr>
-            <a:r>
-              <a:t>Vercel Production Edge, GitHub Actions, Docker Containers</a:t>
+            <a:pPr algn="ctr">
+              <a:spcAft>
+                <a:spcPts val="1000"/>
+              </a:spcAft>
+              <a:defRPr sz="2400" b="1">
+                <a:solidFill>
+                  <a:srgbClr val="7C3AED"/>
+                </a:solidFill>
+                <a:latin typeface="Arial"/>
+              </a:defRPr>
+            </a:pPr>
+            <a:r>
+              <a:t>Tech Stack Used:</a:t>
+            </a:r>
+          </a:p>
+          <a:p>
+            <a:pPr algn="ctr">
+              <a:spcAft>
+                <a:spcPts val="400"/>
+              </a:spcAft>
+              <a:defRPr sz="1400" b="1">
+                <a:solidFill>
+                  <a:srgbClr val="000000"/>
+                </a:solidFill>
+                <a:latin typeface="Arial"/>
+              </a:defRPr>
+            </a:pPr>
+            <a:r>
+              <a:t>• Python 3.13</a:t>
+            </a:r>
+          </a:p>
+          <a:p>
+            <a:pPr algn="ctr">
+              <a:spcAft>
+                <a:spcPts val="400"/>
+              </a:spcAft>
+              <a:defRPr sz="1400" b="1">
+                <a:solidFill>
+                  <a:srgbClr val="000000"/>
+                </a:solidFill>
+                <a:latin typeface="Arial"/>
+              </a:defRPr>
+            </a:pPr>
+            <a:r>
+              <a:t>• Playwright</a:t>
+            </a:r>
+          </a:p>
+          <a:p>
+            <a:pPr algn="ctr">
+              <a:spcAft>
+                <a:spcPts val="400"/>
+              </a:spcAft>
+              <a:defRPr sz="1400" b="1">
+                <a:solidFill>
+                  <a:srgbClr val="000000"/>
+                </a:solidFill>
+                <a:latin typeface="Arial"/>
+              </a:defRPr>
+            </a:pPr>
+            <a:r>
+              <a:t>• Pandas &amp; NumPy</a:t>
+            </a:r>
+          </a:p>
+          <a:p>
+            <a:pPr algn="ctr">
+              <a:spcAft>
+                <a:spcPts val="400"/>
+              </a:spcAft>
+              <a:defRPr sz="1400" b="1">
+                <a:solidFill>
+                  <a:srgbClr val="000000"/>
+                </a:solidFill>
+                <a:latin typeface="Arial"/>
+              </a:defRPr>
+            </a:pPr>
+            <a:r>
+              <a:t>• SciPy (Z-score)</a:t>
+            </a:r>
+          </a:p>
+          <a:p>
+            <a:pPr algn="ctr">
+              <a:spcAft>
+                <a:spcPts val="400"/>
+              </a:spcAft>
+              <a:defRPr sz="1400" b="1">
+                <a:solidFill>
+                  <a:srgbClr val="000000"/>
+                </a:solidFill>
+                <a:latin typeface="Arial"/>
+              </a:defRPr>
+            </a:pPr>
+            <a:r>
+              <a:t>• UN/ILO Jevons Engine</a:t>
+            </a:r>
+          </a:p>
+          <a:p>
+            <a:pPr algn="ctr">
+              <a:spcAft>
+                <a:spcPts val="400"/>
+              </a:spcAft>
+              <a:defRPr sz="1400" b="1">
+                <a:solidFill>
+                  <a:srgbClr val="000000"/>
+                </a:solidFill>
+                <a:latin typeface="Arial"/>
+              </a:defRPr>
+            </a:pPr>
+            <a:r>
+              <a:t>• PostgreSQL</a:t>
+            </a:r>
+          </a:p>
+          <a:p>
+            <a:pPr algn="ctr">
+              <a:spcAft>
+                <a:spcPts val="400"/>
+              </a:spcAft>
+              <a:defRPr sz="1400" b="1">
+                <a:solidFill>
+                  <a:srgbClr val="000000"/>
+                </a:solidFill>
+                <a:latin typeface="Arial"/>
+              </a:defRPr>
+            </a:pPr>
+            <a:r>
+              <a:t>• React 19</a:t>
+            </a:r>
+          </a:p>
+          <a:p>
+            <a:pPr algn="ctr">
+              <a:spcAft>
+                <a:spcPts val="400"/>
+              </a:spcAft>
+              <a:defRPr sz="1400" b="1">
+                <a:solidFill>
+                  <a:srgbClr val="000000"/>
+                </a:solidFill>
+                <a:latin typeface="Arial"/>
+              </a:defRPr>
+            </a:pPr>
+            <a:r>
+              <a:t>• TypeScript</a:t>
+            </a:r>
+          </a:p>
+          <a:p>
+            <a:pPr algn="ctr">
+              <a:spcAft>
+                <a:spcPts val="400"/>
+              </a:spcAft>
+              <a:defRPr sz="1400" b="1">
+                <a:solidFill>
+                  <a:srgbClr val="000000"/>
+                </a:solidFill>
+                <a:latin typeface="Arial"/>
+              </a:defRPr>
+            </a:pPr>
+            <a:r>
+              <a:t>• Tailwind CSS</a:t>
+            </a:r>
+          </a:p>
+          <a:p>
+            <a:pPr algn="ctr">
+              <a:spcAft>
+                <a:spcPts val="400"/>
+              </a:spcAft>
+              <a:defRPr sz="1400" b="1">
+                <a:solidFill>
+                  <a:srgbClr val="000000"/>
+                </a:solidFill>
+                <a:latin typeface="Arial"/>
+              </a:defRPr>
+            </a:pPr>
+            <a:r>
+              <a:t>• Recharts SVG</a:t>
+            </a:r>
+          </a:p>
+          <a:p>
+            <a:pPr algn="ctr">
+              <a:spcAft>
+                <a:spcPts val="400"/>
+              </a:spcAft>
+              <a:defRPr sz="1400" b="1">
+                <a:solidFill>
+                  <a:srgbClr val="000000"/>
+                </a:solidFill>
+                <a:latin typeface="Arial"/>
+              </a:defRPr>
+            </a:pPr>
+            <a:r>
+              <a:t>• FastAPI &amp; Node.js</a:t>
+            </a:r>
+          </a:p>
+          <a:p>
+            <a:pPr algn="ctr">
+              <a:spcAft>
+                <a:spcPts val="400"/>
+              </a:spcAft>
+              <a:defRPr sz="1400" b="1">
+                <a:solidFill>
+                  <a:srgbClr val="000000"/>
+                </a:solidFill>
+                <a:latin typeface="Arial"/>
+              </a:defRPr>
+            </a:pPr>
+            <a:r>
+              <a:t>• Docker &amp; Vercel Edge</a:t>
             </a:r>
           </a:p>
         </p:txBody>
@@ -5718,72 +5144,23 @@
       <p:grpSpPr/>
       <p:sp>
         <p:nvSpPr>
-          <p:cNvPr id="2" name="TextBox 1"/>
-          <p:cNvSpPr txBox="1"/>
-          <p:nvPr/>
-        </p:nvSpPr>
-        <p:spPr>
-          <a:xfrm>
-            <a:off x="731520" y="365760"/>
-            <a:ext cx="10728655" cy="822960"/>
-          </a:xfrm>
-          <a:prstGeom prst="rect">
-            <a:avLst/>
-          </a:prstGeom>
-          <a:noFill/>
-        </p:spPr>
-        <p:txBody>
-          <a:bodyPr wrap="square" lIns="0" tIns="0" rIns="0" bIns="0">
-            <a:spAutoFit/>
-          </a:bodyPr>
-          <a:lstStyle/>
-          <a:p>
-            <a:pPr>
-              <a:defRPr sz="1000" b="1">
-                <a:solidFill>
-                  <a:srgbClr val="2563EB"/>
-                </a:solidFill>
-              </a:defRPr>
-            </a:pPr>
-            <a:r>
-              <a:t>SIH 2026 | PS ID: 26056</a:t>
-            </a:r>
-          </a:p>
-          <a:p>
-            <a:pPr>
-              <a:defRPr sz="2200" b="1">
-                <a:solidFill>
-                  <a:srgbClr val="0F172A"/>
-                </a:solidFill>
-              </a:defRPr>
-            </a:pPr>
-            <a:r>
-              <a:t>Feasibility, Risk Management &amp; Economic Viability</a:t>
-            </a:r>
-          </a:p>
-        </p:txBody>
-      </p:sp>
-      <p:sp>
-        <p:nvSpPr>
-          <p:cNvPr id="3" name="Rounded Rectangle 2"/>
+          <p:cNvPr id="2" name="Rectangle 1"/>
           <p:cNvSpPr/>
           <p:nvPr/>
         </p:nvSpPr>
         <p:spPr>
           <a:xfrm>
-            <a:off x="731520" y="1280160"/>
-            <a:ext cx="5212080" cy="2468880"/>
-          </a:xfrm>
-          <a:prstGeom prst="roundRect">
+            <a:off x="0" y="0"/>
+            <a:ext cx="12191695" cy="6858000"/>
+          </a:xfrm>
+          <a:prstGeom prst="rect">
             <a:avLst/>
           </a:prstGeom>
           <a:solidFill>
             <a:srgbClr val="FFFFFF"/>
           </a:solidFill>
-          <a:ln w="19050">
-            <a:solidFill>
-              <a:srgbClr val="E2E8F0"/>
-            </a:solidFill>
+          <a:ln>
+            <a:noFill/>
           </a:ln>
         </p:spPr>
         <p:style>
@@ -5810,151 +5187,24 @@
       </p:sp>
       <p:sp>
         <p:nvSpPr>
-          <p:cNvPr id="4" name="TextBox 3"/>
-          <p:cNvSpPr txBox="1"/>
-          <p:nvPr/>
-        </p:nvSpPr>
-        <p:spPr>
-          <a:xfrm>
-            <a:off x="914400" y="1417320"/>
-            <a:ext cx="4846320" cy="365760"/>
-          </a:xfrm>
-          <a:prstGeom prst="rect">
-            <a:avLst/>
-          </a:prstGeom>
-          <a:noFill/>
-        </p:spPr>
-        <p:txBody>
-          <a:bodyPr wrap="square" lIns="0" tIns="0" rIns="0" bIns="0">
-            <a:spAutoFit/>
-          </a:bodyPr>
-          <a:lstStyle/>
-          <a:p>
-            <a:pPr>
-              <a:defRPr sz="1300" b="1">
-                <a:solidFill>
-                  <a:srgbClr val="2563EB"/>
-                </a:solidFill>
-              </a:defRPr>
-            </a:pPr>
-            <a:r>
-              <a:t>1. POTENTIAL RISKS &amp; MITIGATION STRATEGIES</a:t>
-            </a:r>
-          </a:p>
-        </p:txBody>
-      </p:sp>
-      <p:sp>
-        <p:nvSpPr>
-          <p:cNvPr id="5" name="TextBox 4"/>
-          <p:cNvSpPr txBox="1"/>
-          <p:nvPr/>
-        </p:nvSpPr>
-        <p:spPr>
-          <a:xfrm>
-            <a:off x="868680" y="1737360"/>
-            <a:ext cx="4937760" cy="1920240"/>
-          </a:xfrm>
-          <a:prstGeom prst="rect">
-            <a:avLst/>
-          </a:prstGeom>
-          <a:noFill/>
-        </p:spPr>
-        <p:txBody>
-          <a:bodyPr wrap="square">
-            <a:spAutoFit/>
-          </a:bodyPr>
-          <a:lstStyle/>
-          <a:p>
-            <a:pPr>
-              <a:spcAft>
-                <a:spcPts val="400"/>
-              </a:spcAft>
-              <a:defRPr sz="1000" b="1">
-                <a:solidFill>
-                  <a:srgbClr val="0F172A"/>
-                </a:solidFill>
-              </a:defRPr>
-            </a:pPr>
-            <a:r>
-              <a:t>• Anti-Scraping / Cloudflare Blocks: </a:t>
-            </a:r>
-            <a:r>
-              <a:rPr b="0">
-                <a:solidFill>
-                  <a:srgbClr val="64748B"/>
-                </a:solidFill>
-              </a:rPr>
-              <a:t>Mitigated via residential proxy rotation, randomized delays (2-5s), off-peak 02:00 AM scraping, and direct GDS/OTA public REST endpoint queries.</a:t>
-            </a:r>
-          </a:p>
-          <a:p>
-            <a:pPr>
-              <a:spcAft>
-                <a:spcPts val="400"/>
-              </a:spcAft>
-              <a:defRPr sz="1000" b="1">
-                <a:solidFill>
-                  <a:srgbClr val="0F172A"/>
-                </a:solidFill>
-              </a:defRPr>
-            </a:pPr>
-            <a:r>
-              <a:t>• OTA Web Layout Changes: </a:t>
-            </a:r>
-            <a:r>
-              <a:rPr b="0">
-                <a:solidFill>
-                  <a:srgbClr val="64748B"/>
-                </a:solidFill>
-              </a:rPr>
-              <a:t>Mitigated with robust multi-selector fallback rules (data-test-id, ARIA labels) and automated nightly test validation suites that ping alerts.</a:t>
-            </a:r>
-          </a:p>
-          <a:p>
-            <a:pPr>
-              <a:spcAft>
-                <a:spcPts val="400"/>
-              </a:spcAft>
-              <a:defRPr sz="1000" b="1">
-                <a:solidFill>
-                  <a:srgbClr val="0F172A"/>
-                </a:solidFill>
-              </a:defRPr>
-            </a:pPr>
-            <a:r>
-              <a:t>• Extreme Dynamic Price Outliers: </a:t>
-            </a:r>
-            <a:r>
-              <a:rPr b="0">
-                <a:solidFill>
-                  <a:srgbClr val="64748B"/>
-                </a:solidFill>
-              </a:rPr>
-              <a:t>Controlled via automated ±3.0σ Z-score truncation and geometric Jevons weighting preventing disproportionate skew.</a:t>
-            </a:r>
-          </a:p>
-        </p:txBody>
-      </p:sp>
-      <p:sp>
-        <p:nvSpPr>
-          <p:cNvPr id="6" name="Rounded Rectangle 5"/>
+          <p:cNvPr id="3" name="Oval 2"/>
           <p:cNvSpPr/>
           <p:nvPr/>
         </p:nvSpPr>
         <p:spPr>
           <a:xfrm>
-            <a:off x="6217920" y="1280160"/>
-            <a:ext cx="5212080" cy="2468880"/>
-          </a:xfrm>
-          <a:prstGeom prst="roundRect">
+            <a:off x="365760" y="228600"/>
+            <a:ext cx="1645920" cy="777240"/>
+          </a:xfrm>
+          <a:prstGeom prst="ellipse">
             <a:avLst/>
           </a:prstGeom>
           <a:solidFill>
             <a:srgbClr val="FFFFFF"/>
           </a:solidFill>
-          <a:ln w="19050">
+          <a:ln w="25400">
             <a:solidFill>
-              <a:srgbClr val="E2E8F0"/>
+              <a:srgbClr val="64508C"/>
             </a:solidFill>
           </a:ln>
         </p:spPr>
@@ -5973,23 +5223,33 @@
           </a:fontRef>
         </p:style>
         <p:txBody>
-          <a:bodyPr rtlCol="0" anchor="ctr"/>
-          <a:lstStyle/>
-          <a:p>
-            <a:pPr algn="ctr"/>
-          </a:p>
-        </p:txBody>
-      </p:sp>
-      <p:sp>
-        <p:nvSpPr>
-          <p:cNvPr id="7" name="TextBox 6"/>
+          <a:bodyPr rtlCol="0" anchor="ctr" wrap="square"/>
+          <a:lstStyle/>
+          <a:p>
+            <a:pPr algn="ctr">
+              <a:defRPr sz="1400" b="1">
+                <a:solidFill>
+                  <a:srgbClr val="000000"/>
+                </a:solidFill>
+                <a:latin typeface="Arial"/>
+              </a:defRPr>
+            </a:pPr>
+            <a:r>
+              <a:t>Team Rookie</a:t>
+            </a:r>
+          </a:p>
+        </p:txBody>
+      </p:sp>
+      <p:sp>
+        <p:nvSpPr>
+          <p:cNvPr id="4" name="TextBox 3"/>
           <p:cNvSpPr txBox="1"/>
           <p:nvPr/>
         </p:nvSpPr>
         <p:spPr>
           <a:xfrm>
-            <a:off x="6400800" y="1417320"/>
-            <a:ext cx="4846320" cy="365760"/>
+            <a:off x="2286000" y="182880"/>
+            <a:ext cx="7589520" cy="914400"/>
           </a:xfrm>
           <a:prstGeom prst="rect">
             <a:avLst/>
@@ -5997,159 +5257,69 @@
           <a:noFill/>
         </p:spPr>
         <p:txBody>
-          <a:bodyPr wrap="square" lIns="0" tIns="0" rIns="0" bIns="0">
+          <a:bodyPr wrap="square" lIns="0" rIns="0" tIns="0" bIns="0">
             <a:spAutoFit/>
           </a:bodyPr>
           <a:lstStyle/>
           <a:p>
-            <a:pPr>
-              <a:defRPr sz="1300" b="1">
-                <a:solidFill>
-                  <a:srgbClr val="2563EB"/>
-                </a:solidFill>
-              </a:defRPr>
-            </a:pPr>
-            <a:r>
-              <a:t>2. TECHNICAL FEASIBILITY &amp; ROBUSTNESS</a:t>
-            </a:r>
-          </a:p>
-        </p:txBody>
-      </p:sp>
-      <p:sp>
-        <p:nvSpPr>
-          <p:cNvPr id="8" name="TextBox 7"/>
-          <p:cNvSpPr txBox="1"/>
+            <a:pPr algn="ctr">
+              <a:defRPr sz="2800" b="1">
+                <a:solidFill>
+                  <a:srgbClr val="1B365D"/>
+                </a:solidFill>
+                <a:latin typeface="Times New Roman"/>
+              </a:defRPr>
+            </a:pPr>
+            <a:r>
+              <a:t>FEASIBILITY AND VIABILITY</a:t>
+            </a:r>
+          </a:p>
+        </p:txBody>
+      </p:sp>
+      <p:pic>
+        <p:nvPicPr>
+          <p:cNvPr id="5" name="Picture 4" descr="page_1_img_2.png"/>
+          <p:cNvPicPr>
+            <a:picLocks noChangeAspect="1"/>
+          </p:cNvPicPr>
           <p:nvPr/>
-        </p:nvSpPr>
-        <p:spPr>
-          <a:xfrm>
-            <a:off x="6355080" y="1737360"/>
-            <a:ext cx="4937760" cy="1920240"/>
+        </p:nvPicPr>
+        <p:blipFill>
+          <a:blip r:embed="rId2"/>
+          <a:stretch>
+            <a:fillRect/>
+          </a:stretch>
+        </p:blipFill>
+        <p:spPr>
+          <a:xfrm>
+            <a:off x="10241280" y="164592"/>
+            <a:ext cx="1645920" cy="868680"/>
           </a:xfrm>
           <a:prstGeom prst="rect">
             <a:avLst/>
           </a:prstGeom>
-          <a:noFill/>
-        </p:spPr>
-        <p:txBody>
-          <a:bodyPr wrap="square">
-            <a:spAutoFit/>
-          </a:bodyPr>
-          <a:lstStyle/>
-          <a:p>
-            <a:pPr>
-              <a:spcAft>
-                <a:spcPts val="400"/>
-              </a:spcAft>
-              <a:defRPr sz="1000" b="1">
-                <a:solidFill>
-                  <a:srgbClr val="0F172A"/>
-                </a:solidFill>
-              </a:defRPr>
-            </a:pPr>
-            <a:r>
-              <a:t>• Proven Industry Paradigm: </a:t>
-            </a:r>
-            <a:r>
-              <a:rPr b="0">
-                <a:solidFill>
-                  <a:srgbClr val="64748B"/>
-                </a:solidFill>
-              </a:rPr>
-              <a:t>Follows MIT Billion Prices Project and UK Office for National Statistics (ONS) automated web-scraping methodologies for CPI items.</a:t>
-            </a:r>
-          </a:p>
-          <a:p>
-            <a:pPr>
-              <a:spcAft>
-                <a:spcPts val="400"/>
-              </a:spcAft>
-              <a:defRPr sz="1000" b="1">
-                <a:solidFill>
-                  <a:srgbClr val="0F172A"/>
-                </a:solidFill>
-              </a:defRPr>
-            </a:pPr>
-            <a:r>
-              <a:t>• High Scalability: </a:t>
-            </a:r>
-            <a:r>
-              <a:rPr b="0">
-                <a:solidFill>
-                  <a:srgbClr val="64748B"/>
-                </a:solidFill>
-              </a:rPr>
-              <a:t>Containerized serverless jobs can expand from 12 corridors to 250+ regional UDAN routes with zero architectural redesign.</a:t>
-            </a:r>
-          </a:p>
-          <a:p>
-            <a:pPr>
-              <a:spcAft>
-                <a:spcPts val="400"/>
-              </a:spcAft>
-              <a:defRPr sz="1000" b="1">
-                <a:solidFill>
-                  <a:srgbClr val="0F172A"/>
-                </a:solidFill>
-              </a:defRPr>
-            </a:pPr>
-            <a:r>
-              <a:t>• Tamper-Proof Auditability: </a:t>
-            </a:r>
-            <a:r>
-              <a:rPr b="0">
-                <a:solidFill>
-                  <a:srgbClr val="64748B"/>
-                </a:solidFill>
-              </a:rPr>
-              <a:t>Every flight record stored with UTC timestamp, raw HTML source hash, and calculation formula parameters in immutable logs.</a:t>
-            </a:r>
-          </a:p>
-          <a:p>
-            <a:pPr>
-              <a:spcAft>
-                <a:spcPts val="400"/>
-              </a:spcAft>
-              <a:defRPr sz="1000" b="1">
-                <a:solidFill>
-                  <a:srgbClr val="0F172A"/>
-                </a:solidFill>
-              </a:defRPr>
-            </a:pPr>
-            <a:r>
-              <a:t>• Graceful Degradation: </a:t>
-            </a:r>
-            <a:r>
-              <a:rPr b="0">
-                <a:solidFill>
-                  <a:srgbClr val="64748B"/>
-                </a:solidFill>
-              </a:rPr>
-              <a:t>Cached baseline pricing models guarantee continuous index generation even if single carrier portals experience temporary downtime.</a:t>
-            </a:r>
-          </a:p>
-        </p:txBody>
-      </p:sp>
-      <p:sp>
-        <p:nvSpPr>
-          <p:cNvPr id="9" name="Rounded Rectangle 8"/>
+        </p:spPr>
+      </p:pic>
+      <p:sp>
+        <p:nvSpPr>
+          <p:cNvPr id="6" name="Rounded Rectangle 5"/>
           <p:cNvSpPr/>
           <p:nvPr/>
         </p:nvSpPr>
         <p:spPr>
           <a:xfrm>
-            <a:off x="731520" y="3931920"/>
-            <a:ext cx="5212080" cy="2468880"/>
+            <a:off x="457200" y="1280160"/>
+            <a:ext cx="6858000" cy="2514600"/>
           </a:xfrm>
           <a:prstGeom prst="roundRect">
             <a:avLst/>
           </a:prstGeom>
           <a:solidFill>
-            <a:srgbClr val="FFFFFF"/>
+            <a:srgbClr val="E0F2FE"/>
           </a:solidFill>
-          <a:ln w="19050">
+          <a:ln w="12700">
             <a:solidFill>
-              <a:srgbClr val="E2E8F0"/>
+              <a:srgbClr val="BAE6FD"/>
             </a:solidFill>
           </a:ln>
         </p:spPr>
@@ -6177,14 +5347,14 @@
       </p:sp>
       <p:sp>
         <p:nvSpPr>
-          <p:cNvPr id="10" name="TextBox 9"/>
+          <p:cNvPr id="7" name="TextBox 6"/>
           <p:cNvSpPr txBox="1"/>
           <p:nvPr/>
         </p:nvSpPr>
         <p:spPr>
           <a:xfrm>
-            <a:off x="914400" y="4069080"/>
-            <a:ext cx="4846320" cy="365760"/>
+            <a:off x="640080" y="1371600"/>
+            <a:ext cx="6492240" cy="2331720"/>
           </a:xfrm>
           <a:prstGeom prst="rect">
             <a:avLst/>
@@ -6198,153 +5368,117 @@
           <a:lstStyle/>
           <a:p>
             <a:pPr>
-              <a:defRPr sz="1300" b="1">
-                <a:solidFill>
-                  <a:srgbClr val="2563EB"/>
-                </a:solidFill>
-              </a:defRPr>
-            </a:pPr>
-            <a:r>
-              <a:t>3. ECONOMIC VIABILITY &amp; COST BENEFIT</a:t>
-            </a:r>
-          </a:p>
-        </p:txBody>
-      </p:sp>
-      <p:sp>
-        <p:nvSpPr>
-          <p:cNvPr id="11" name="TextBox 10"/>
-          <p:cNvSpPr txBox="1"/>
-          <p:nvPr/>
-        </p:nvSpPr>
-        <p:spPr>
-          <a:xfrm>
-            <a:off x="868680" y="4389120"/>
-            <a:ext cx="4937760" cy="1920240"/>
-          </a:xfrm>
-          <a:prstGeom prst="rect">
-            <a:avLst/>
-          </a:prstGeom>
-          <a:noFill/>
-        </p:spPr>
-        <p:txBody>
-          <a:bodyPr wrap="square">
-            <a:spAutoFit/>
-          </a:bodyPr>
-          <a:lstStyle/>
+              <a:spcAft>
+                <a:spcPts val="800"/>
+              </a:spcAft>
+              <a:defRPr sz="2000" b="1">
+                <a:solidFill>
+                  <a:srgbClr val="000000"/>
+                </a:solidFill>
+                <a:latin typeface="Arial"/>
+              </a:defRPr>
+            </a:pPr>
+            <a:r>
+              <a:t>Risk assessment and mitigation</a:t>
+            </a:r>
+          </a:p>
           <a:p>
             <a:pPr>
               <a:spcAft>
-                <a:spcPts val="400"/>
-              </a:spcAft>
-              <a:defRPr sz="1000" b="1">
-                <a:solidFill>
-                  <a:srgbClr val="0F172A"/>
-                </a:solidFill>
-              </a:defRPr>
-            </a:pPr>
-            <a:r>
-              <a:t>• Legacy MoSPI Survey Cost: </a:t>
-            </a:r>
-            <a:r>
-              <a:rPr b="0">
-                <a:solidFill>
-                  <a:srgbClr val="64748B"/>
-                </a:solidFill>
+                <a:spcPts val="600"/>
+              </a:spcAft>
+            </a:pPr>
+            <a:r>
+              <a:rPr sz="1050" b="1">
+                <a:solidFill>
+                  <a:srgbClr val="B91C1C"/>
+                </a:solidFill>
+                <a:latin typeface="Arial"/>
               </a:rPr>
-              <a:t>Significant expenditure on physical field enumerators across major Indian metro airports conducting manual monthly queries.</a:t>
+              <a:t>Problem: Anti-Scraping / IP Blocks  ➔  </a:t>
+            </a:r>
+            <a:r>
+              <a:rPr sz="1050" b="1">
+                <a:solidFill>
+                  <a:srgbClr val="15803D"/>
+                </a:solidFill>
+                <a:latin typeface="Arial"/>
+              </a:rPr>
+              <a:t>Solution: 02:00 AM off-peak cron + residential proxy rotation + jitter delays</a:t>
             </a:r>
           </a:p>
           <a:p>
             <a:pPr>
               <a:spcAft>
-                <a:spcPts val="400"/>
-              </a:spcAft>
-              <a:defRPr sz="1000" b="1">
-                <a:solidFill>
-                  <a:srgbClr val="0F172A"/>
-                </a:solidFill>
-              </a:defRPr>
-            </a:pPr>
-            <a:r>
-              <a:t>• AirIntel Cloud Cost: </a:t>
-            </a:r>
-            <a:r>
-              <a:rPr b="0">
-                <a:solidFill>
-                  <a:srgbClr val="64748B"/>
-                </a:solidFill>
+                <a:spcPts val="600"/>
+              </a:spcAft>
+            </a:pPr>
+            <a:r>
+              <a:rPr sz="1050" b="1">
+                <a:solidFill>
+                  <a:srgbClr val="B91C1C"/>
+                </a:solidFill>
+                <a:latin typeface="Arial"/>
               </a:rPr>
-              <a:t>&lt; ₹3,500 ($42 USD) / month running on automated cron servers and lightweight serverless database workers.</a:t>
+              <a:t>Problem: OTA DOM Layout Changes  ➔  </a:t>
+            </a:r>
+            <a:r>
+              <a:rPr sz="1050" b="1">
+                <a:solidFill>
+                  <a:srgbClr val="15803D"/>
+                </a:solidFill>
+                <a:latin typeface="Arial"/>
+              </a:rPr>
+              <a:t>Solution: Multi-selector schema (ARIA / data-test) + cached baseline fallbacks</a:t>
             </a:r>
           </a:p>
           <a:p>
             <a:pPr>
               <a:spcAft>
-                <a:spcPts val="400"/>
-              </a:spcAft>
-              <a:defRPr sz="1000" b="1">
-                <a:solidFill>
-                  <a:srgbClr val="0F172A"/>
-                </a:solidFill>
-              </a:defRPr>
-            </a:pPr>
-            <a:r>
-              <a:t>• Cost Reduction Ratio: </a:t>
-            </a:r>
-            <a:r>
-              <a:rPr b="0">
-                <a:solidFill>
-                  <a:srgbClr val="64748B"/>
-                </a:solidFill>
+                <a:spcPts val="600"/>
+              </a:spcAft>
+            </a:pPr>
+            <a:r>
+              <a:rPr sz="1050" b="1">
+                <a:solidFill>
+                  <a:srgbClr val="B91C1C"/>
+                </a:solidFill>
+                <a:latin typeface="Arial"/>
               </a:rPr>
-              <a:t>&gt; 95% reduction in recurring data collection expenditure while multiplying sampling frequency by 30x.</a:t>
-            </a:r>
-          </a:p>
-          <a:p>
-            <a:pPr>
-              <a:spcAft>
-                <a:spcPts val="400"/>
-              </a:spcAft>
-              <a:defRPr sz="1000" b="1">
-                <a:solidFill>
-                  <a:srgbClr val="0F172A"/>
-                </a:solidFill>
-              </a:defRPr>
-            </a:pPr>
-            <a:r>
-              <a:t>• Public Value: </a:t>
-            </a:r>
-            <a:r>
-              <a:rPr b="0">
-                <a:solidFill>
-                  <a:srgbClr val="64748B"/>
-                </a:solidFill>
+              <a:t>Problem: Dynamic Surge &amp; Outliers  ➔  </a:t>
+            </a:r>
+            <a:r>
+              <a:rPr sz="1050" b="1">
+                <a:solidFill>
+                  <a:srgbClr val="15803D"/>
+                </a:solidFill>
+                <a:latin typeface="Arial"/>
               </a:rPr>
-              <a:t>Provides RBI with daily real-time leading indicator for core transport services inflation months ahead of lagging survey figures.</a:t>
-            </a:r>
-          </a:p>
-        </p:txBody>
-      </p:sp>
-      <p:sp>
-        <p:nvSpPr>
-          <p:cNvPr id="12" name="Rounded Rectangle 11"/>
+              <a:t>Solution: Automated ±3.0σ Z-score truncation + UN/ILO Jevons geometric damping</a:t>
+            </a:r>
+          </a:p>
+        </p:txBody>
+      </p:sp>
+      <p:sp>
+        <p:nvSpPr>
+          <p:cNvPr id="8" name="Rounded Rectangle 7"/>
           <p:cNvSpPr/>
           <p:nvPr/>
         </p:nvSpPr>
         <p:spPr>
           <a:xfrm>
-            <a:off x="6217920" y="3931920"/>
-            <a:ext cx="5212080" cy="2468880"/>
+            <a:off x="7589520" y="1280160"/>
+            <a:ext cx="4114800" cy="2514600"/>
           </a:xfrm>
           <a:prstGeom prst="roundRect">
             <a:avLst/>
           </a:prstGeom>
           <a:solidFill>
-            <a:srgbClr val="FFFFFF"/>
+            <a:srgbClr val="EDE9FE"/>
           </a:solidFill>
-          <a:ln w="19050">
+          <a:ln w="12700">
             <a:solidFill>
-              <a:srgbClr val="E2E8F0"/>
+              <a:srgbClr val="DDD6FE"/>
             </a:solidFill>
           </a:ln>
         </p:spPr>
@@ -6372,14 +5506,14 @@
       </p:sp>
       <p:sp>
         <p:nvSpPr>
-          <p:cNvPr id="13" name="TextBox 12"/>
+          <p:cNvPr id="9" name="TextBox 8"/>
           <p:cNvSpPr txBox="1"/>
           <p:nvPr/>
         </p:nvSpPr>
         <p:spPr>
           <a:xfrm>
-            <a:off x="6400800" y="4069080"/>
-            <a:ext cx="4846320" cy="365760"/>
+            <a:off x="7772400" y="1371600"/>
+            <a:ext cx="3749039" cy="2331720"/>
           </a:xfrm>
           <a:prstGeom prst="rect">
             <a:avLst/>
@@ -6393,15 +5527,347 @@
           <a:lstStyle/>
           <a:p>
             <a:pPr>
-              <a:defRPr sz="1300" b="1">
+              <a:spcAft>
+                <a:spcPts val="600"/>
+              </a:spcAft>
+              <a:defRPr sz="2000" b="1">
+                <a:solidFill>
+                  <a:srgbClr val="000000"/>
+                </a:solidFill>
+                <a:latin typeface="Arial"/>
+              </a:defRPr>
+            </a:pPr>
+            <a:r>
+              <a:t>Technical feasibility</a:t>
+            </a:r>
+          </a:p>
+          <a:p>
+            <a:pPr>
+              <a:spcAft>
+                <a:spcPts val="400"/>
+              </a:spcAft>
+              <a:defRPr sz="1050">
+                <a:solidFill>
+                  <a:srgbClr val="000000"/>
+                </a:solidFill>
+                <a:latin typeface="Arial"/>
+              </a:defRPr>
+            </a:pPr>
+            <a:r>
+              <a:t>• Automated headless Playwright extraction across Air India, IndiGo, SpiceJet &amp; MakeMyTrip.</a:t>
+            </a:r>
+          </a:p>
+          <a:p>
+            <a:pPr>
+              <a:spcAft>
+                <a:spcPts val="400"/>
+              </a:spcAft>
+              <a:defRPr sz="1050">
+                <a:solidFill>
+                  <a:srgbClr val="000000"/>
+                </a:solidFill>
+                <a:latin typeface="Arial"/>
+              </a:defRPr>
+            </a:pPr>
+            <a:r>
+              <a:t>• 5 standard forward lead-times (1d, 7d, 15d, 30d, 45d) capturing full yield curves.</a:t>
+            </a:r>
+          </a:p>
+          <a:p>
+            <a:pPr>
+              <a:spcAft>
+                <a:spcPts val="400"/>
+              </a:spcAft>
+              <a:defRPr sz="1050">
+                <a:solidFill>
+                  <a:srgbClr val="000000"/>
+                </a:solidFill>
+                <a:latin typeface="Arial"/>
+              </a:defRPr>
+            </a:pPr>
+            <a:r>
+              <a:t>• Mathematical UN/ILO Jevons geometric mean &amp; DGCA passenger volume Laspeyres weighting model.</a:t>
+            </a:r>
+          </a:p>
+        </p:txBody>
+      </p:sp>
+      <p:sp>
+        <p:nvSpPr>
+          <p:cNvPr id="10" name="Rounded Rectangle 9"/>
+          <p:cNvSpPr/>
+          <p:nvPr/>
+        </p:nvSpPr>
+        <p:spPr>
+          <a:xfrm>
+            <a:off x="457200" y="4023360"/>
+            <a:ext cx="4206240" cy="2468880"/>
+          </a:xfrm>
+          <a:prstGeom prst="roundRect">
+            <a:avLst/>
+          </a:prstGeom>
+          <a:solidFill>
+            <a:srgbClr val="EDE9FE"/>
+          </a:solidFill>
+          <a:ln w="12700">
+            <a:solidFill>
+              <a:srgbClr val="DDD6FE"/>
+            </a:solidFill>
+          </a:ln>
+        </p:spPr>
+        <p:style>
+          <a:lnRef idx="1">
+            <a:schemeClr val="accent1"/>
+          </a:lnRef>
+          <a:fillRef idx="3">
+            <a:schemeClr val="accent1"/>
+          </a:fillRef>
+          <a:effectRef idx="2">
+            <a:schemeClr val="accent1"/>
+          </a:effectRef>
+          <a:fontRef idx="minor">
+            <a:schemeClr val="lt1"/>
+          </a:fontRef>
+        </p:style>
+        <p:txBody>
+          <a:bodyPr rtlCol="0" anchor="ctr"/>
+          <a:lstStyle/>
+          <a:p>
+            <a:pPr algn="ctr"/>
+          </a:p>
+        </p:txBody>
+      </p:sp>
+      <p:sp>
+        <p:nvSpPr>
+          <p:cNvPr id="11" name="TextBox 10"/>
+          <p:cNvSpPr txBox="1"/>
+          <p:nvPr/>
+        </p:nvSpPr>
+        <p:spPr>
+          <a:xfrm>
+            <a:off x="640080" y="4114800"/>
+            <a:ext cx="3840480" cy="2286000"/>
+          </a:xfrm>
+          <a:prstGeom prst="rect">
+            <a:avLst/>
+          </a:prstGeom>
+          <a:noFill/>
+        </p:spPr>
+        <p:txBody>
+          <a:bodyPr wrap="square" lIns="0" tIns="0" rIns="0" bIns="0">
+            <a:spAutoFit/>
+          </a:bodyPr>
+          <a:lstStyle/>
+          <a:p>
+            <a:pPr>
+              <a:spcAft>
+                <a:spcPts val="600"/>
+              </a:spcAft>
+              <a:defRPr sz="1900" b="1">
+                <a:solidFill>
+                  <a:srgbClr val="000000"/>
+                </a:solidFill>
+                <a:latin typeface="Arial"/>
+              </a:defRPr>
+            </a:pPr>
+            <a:r>
+              <a:t>Resource Requirements</a:t>
+            </a:r>
+          </a:p>
+          <a:p>
+            <a:pPr>
+              <a:spcAft>
+                <a:spcPts val="400"/>
+              </a:spcAft>
+              <a:defRPr sz="1050">
+                <a:solidFill>
+                  <a:srgbClr val="000000"/>
+                </a:solidFill>
+                <a:latin typeface="Arial"/>
+              </a:defRPr>
+            </a:pPr>
+            <a:r>
+              <a:t>• Lightweight serverless cloud cron runner / VPS (Python &amp; Node.js).</a:t>
+            </a:r>
+          </a:p>
+          <a:p>
+            <a:pPr>
+              <a:spcAft>
+                <a:spcPts val="400"/>
+              </a:spcAft>
+              <a:defRPr sz="1050">
+                <a:solidFill>
+                  <a:srgbClr val="000000"/>
+                </a:solidFill>
+                <a:latin typeface="Arial"/>
+              </a:defRPr>
+            </a:pPr>
+            <a:r>
+              <a:t>• Open source statistical tools (Playwright, Pandas, SciPy, PostgreSQL, React 19).</a:t>
+            </a:r>
+          </a:p>
+          <a:p>
+            <a:pPr>
+              <a:spcAft>
+                <a:spcPts val="400"/>
+              </a:spcAft>
+              <a:defRPr sz="1050">
+                <a:solidFill>
+                  <a:srgbClr val="000000"/>
+                </a:solidFill>
+                <a:latin typeface="Arial"/>
+              </a:defRPr>
+            </a:pPr>
+            <a:r>
+              <a:t>• Secure cloud database to store flight quotes, formula IDs &amp; SHA-256 provenance hashes.</a:t>
+            </a:r>
+          </a:p>
+        </p:txBody>
+      </p:sp>
+      <p:sp>
+        <p:nvSpPr>
+          <p:cNvPr id="12" name="TextBox 11"/>
+          <p:cNvSpPr txBox="1"/>
+          <p:nvPr/>
+        </p:nvSpPr>
+        <p:spPr>
+          <a:xfrm>
+            <a:off x="4846320" y="4114800"/>
+            <a:ext cx="2468880" cy="2286000"/>
+          </a:xfrm>
+          <a:prstGeom prst="rect">
+            <a:avLst/>
+          </a:prstGeom>
+          <a:noFill/>
+        </p:spPr>
+        <p:txBody>
+          <a:bodyPr wrap="square" lIns="0" tIns="0" rIns="0" bIns="0">
+            <a:spAutoFit/>
+          </a:bodyPr>
+          <a:lstStyle/>
+          <a:p>
+            <a:pPr algn="ctr">
+              <a:spcAft>
+                <a:spcPts val="800"/>
+              </a:spcAft>
+              <a:defRPr sz="1600" b="1">
+                <a:solidFill>
+                  <a:srgbClr val="000000"/>
+                </a:solidFill>
+                <a:latin typeface="Arial"/>
+              </a:defRPr>
+            </a:pPr>
+            <a:r>
+              <a:t>Proven Frameworks</a:t>
+            </a:r>
+          </a:p>
+          <a:p>
+            <a:pPr algn="ctr">
+              <a:spcAft>
+                <a:spcPts val="400"/>
+              </a:spcAft>
+              <a:defRPr sz="1050" b="1">
                 <a:solidFill>
                   <a:srgbClr val="2563EB"/>
                 </a:solidFill>
-              </a:defRPr>
-            </a:pPr>
-            <a:r>
-              <a:t>4. OPERATIONAL SUSTAINABILITY &amp; GOVERNANCE</a:t>
-            </a:r>
+                <a:latin typeface="Arial"/>
+              </a:defRPr>
+            </a:pPr>
+            <a:r>
+              <a:t>✔ UN/ILO CPI Manual (2020)</a:t>
+            </a:r>
+          </a:p>
+          <a:p>
+            <a:pPr algn="ctr">
+              <a:spcAft>
+                <a:spcPts val="400"/>
+              </a:spcAft>
+              <a:defRPr sz="1050" b="1">
+                <a:solidFill>
+                  <a:srgbClr val="2563EB"/>
+                </a:solidFill>
+                <a:latin typeface="Arial"/>
+              </a:defRPr>
+            </a:pPr>
+            <a:r>
+              <a:t>✔ DGCA Traffic Statistics</a:t>
+            </a:r>
+          </a:p>
+          <a:p>
+            <a:pPr algn="ctr">
+              <a:spcAft>
+                <a:spcPts val="400"/>
+              </a:spcAft>
+              <a:defRPr sz="1050" b="1">
+                <a:solidFill>
+                  <a:srgbClr val="2563EB"/>
+                </a:solidFill>
+                <a:latin typeface="Arial"/>
+              </a:defRPr>
+            </a:pPr>
+            <a:r>
+              <a:t>✔ MoSPI CPI (2012=100)</a:t>
+            </a:r>
+          </a:p>
+          <a:p>
+            <a:pPr algn="ctr">
+              <a:spcAft>
+                <a:spcPts val="400"/>
+              </a:spcAft>
+              <a:defRPr sz="1050" b="1">
+                <a:solidFill>
+                  <a:srgbClr val="2563EB"/>
+                </a:solidFill>
+                <a:latin typeface="Arial"/>
+              </a:defRPr>
+            </a:pPr>
+            <a:r>
+              <a:t>✔ MIT Billion Prices Project</a:t>
+            </a:r>
+          </a:p>
+        </p:txBody>
+      </p:sp>
+      <p:sp>
+        <p:nvSpPr>
+          <p:cNvPr id="13" name="Rounded Rectangle 12"/>
+          <p:cNvSpPr/>
+          <p:nvPr/>
+        </p:nvSpPr>
+        <p:spPr>
+          <a:xfrm>
+            <a:off x="7589520" y="4023360"/>
+            <a:ext cx="4114800" cy="2468880"/>
+          </a:xfrm>
+          <a:prstGeom prst="roundRect">
+            <a:avLst/>
+          </a:prstGeom>
+          <a:solidFill>
+            <a:srgbClr val="EDE9FE"/>
+          </a:solidFill>
+          <a:ln w="12700">
+            <a:solidFill>
+              <a:srgbClr val="DDD6FE"/>
+            </a:solidFill>
+          </a:ln>
+        </p:spPr>
+        <p:style>
+          <a:lnRef idx="1">
+            <a:schemeClr val="accent1"/>
+          </a:lnRef>
+          <a:fillRef idx="3">
+            <a:schemeClr val="accent1"/>
+          </a:fillRef>
+          <a:effectRef idx="2">
+            <a:schemeClr val="accent1"/>
+          </a:effectRef>
+          <a:fontRef idx="minor">
+            <a:schemeClr val="lt1"/>
+          </a:fontRef>
+        </p:style>
+        <p:txBody>
+          <a:bodyPr rtlCol="0" anchor="ctr"/>
+          <a:lstStyle/>
+          <a:p>
+            <a:pPr algn="ctr"/>
           </a:p>
         </p:txBody>
       </p:sp>
@@ -6413,8 +5879,8 @@
         </p:nvSpPr>
         <p:spPr>
           <a:xfrm>
-            <a:off x="6355080" y="4389120"/>
-            <a:ext cx="4937760" cy="1920240"/>
+            <a:off x="7772400" y="4114800"/>
+            <a:ext cx="3749039" cy="2286000"/>
           </a:xfrm>
           <a:prstGeom prst="rect">
             <a:avLst/>
@@ -6422,31 +5888,40 @@
           <a:noFill/>
         </p:spPr>
         <p:txBody>
-          <a:bodyPr wrap="square">
+          <a:bodyPr wrap="square" lIns="0" tIns="0" rIns="0" bIns="0">
             <a:spAutoFit/>
           </a:bodyPr>
           <a:lstStyle/>
           <a:p>
             <a:pPr>
               <a:spcAft>
+                <a:spcPts val="600"/>
+              </a:spcAft>
+              <a:defRPr sz="1900" b="1">
+                <a:solidFill>
+                  <a:srgbClr val="000000"/>
+                </a:solidFill>
+                <a:latin typeface="Arial"/>
+              </a:defRPr>
+            </a:pPr>
+            <a:r>
+              <a:t>Economic Approach</a:t>
+            </a:r>
+          </a:p>
+          <a:p>
+            <a:pPr>
+              <a:spcAft>
                 <a:spcPts val="400"/>
               </a:spcAft>
-              <a:defRPr sz="1000" b="1">
-                <a:solidFill>
-                  <a:srgbClr val="0F172A"/>
-                </a:solidFill>
-              </a:defRPr>
-            </a:pPr>
-            <a:r>
-              <a:t>• Deployment Footprint: </a:t>
-            </a:r>
-            <a:r>
-              <a:rPr b="0">
-                <a:solidFill>
-                  <a:srgbClr val="64748B"/>
-                </a:solidFill>
-              </a:rPr>
-              <a:t>Fully open-source stack (Python, PostgreSQL, React) with zero proprietary enterprise licensing lock-in.</a:t>
+              <a:defRPr sz="1050">
+                <a:solidFill>
+                  <a:srgbClr val="000000"/>
+                </a:solidFill>
+                <a:latin typeface="Arial"/>
+              </a:defRPr>
+            </a:pPr>
+            <a:r>
+              <a:t>• Slashes manual airport survey collection costs by &gt;95% across major Indian metros.</a:t>
             </a:r>
           </a:p>
           <a:p>
@@ -6454,22 +5929,15 @@
               <a:spcAft>
                 <a:spcPts val="400"/>
               </a:spcAft>
-              <a:defRPr sz="1000" b="1">
-                <a:solidFill>
-                  <a:srgbClr val="0F172A"/>
-                </a:solidFill>
-              </a:defRPr>
-            </a:pPr>
-            <a:r>
-              <a:t>• Maintenance Staffing: </a:t>
-            </a:r>
-            <a:r>
-              <a:rPr b="0">
-                <a:solidFill>
-                  <a:srgbClr val="64748B"/>
-                </a:solidFill>
-              </a:rPr>
-              <a:t>Requires just one data engineer for pipeline health &amp; periodic scraper DOM selector updates.</a:t>
+              <a:defRPr sz="1050">
+                <a:solidFill>
+                  <a:srgbClr val="000000"/>
+                </a:solidFill>
+                <a:latin typeface="Arial"/>
+              </a:defRPr>
+            </a:pPr>
+            <a:r>
+              <a:t>• Extremely low operational cloud footprint (&lt; ₹3,500 / month).</a:t>
             </a:r>
           </a:p>
           <a:p>
@@ -6477,22 +5945,15 @@
               <a:spcAft>
                 <a:spcPts val="400"/>
               </a:spcAft>
-              <a:defRPr sz="1000" b="1">
-                <a:solidFill>
-                  <a:srgbClr val="0F172A"/>
-                </a:solidFill>
-              </a:defRPr>
-            </a:pPr>
-            <a:r>
-              <a:t>• Compliance &amp; Ethics: </a:t>
-            </a:r>
-            <a:r>
-              <a:rPr b="0">
-                <a:solidFill>
-                  <a:srgbClr val="64748B"/>
-                </a:solidFill>
-              </a:rPr>
-              <a:t>Adheres to robots.txt, respects site crawl limits by scheduling during midnight troughs, and scrapes only publicly visible fares.</a:t>
+              <a:defRPr sz="1050">
+                <a:solidFill>
+                  <a:srgbClr val="000000"/>
+                </a:solidFill>
+                <a:latin typeface="Arial"/>
+              </a:defRPr>
+            </a:pPr>
+            <a:r>
+              <a:t>• High ROI: 30x increase in price sampling frequency at a fraction of manual survey costs.</a:t>
             </a:r>
           </a:p>
           <a:p>
@@ -6500,22 +5961,15 @@
               <a:spcAft>
                 <a:spcPts val="400"/>
               </a:spcAft>
-              <a:defRPr sz="1000" b="1">
-                <a:solidFill>
-                  <a:srgbClr val="0F172A"/>
-                </a:solidFill>
-              </a:defRPr>
-            </a:pPr>
-            <a:r>
-              <a:t>• MoSPI Integration: </a:t>
-            </a:r>
-            <a:r>
-              <a:rPr b="0">
-                <a:solidFill>
-                  <a:srgbClr val="64748B"/>
-                </a:solidFill>
-              </a:rPr>
-              <a:t>RESTful JSON API endpoints allow direct plug-in to MoSPI's National Data &amp; Analytics Platform (NDAP).</a:t>
+              <a:defRPr sz="1050">
+                <a:solidFill>
+                  <a:srgbClr val="000000"/>
+                </a:solidFill>
+                <a:latin typeface="Arial"/>
+              </a:defRPr>
+            </a:pPr>
+            <a:r>
+              <a:t>• Scales easily across 250+ UDAN regional routes with zero additional hardware.</a:t>
             </a:r>
           </a:p>
         </p:txBody>
@@ -6540,72 +5994,23 @@
       <p:grpSpPr/>
       <p:sp>
         <p:nvSpPr>
-          <p:cNvPr id="2" name="TextBox 1"/>
-          <p:cNvSpPr txBox="1"/>
-          <p:nvPr/>
-        </p:nvSpPr>
-        <p:spPr>
-          <a:xfrm>
-            <a:off x="731520" y="365760"/>
-            <a:ext cx="10728655" cy="822960"/>
-          </a:xfrm>
-          <a:prstGeom prst="rect">
-            <a:avLst/>
-          </a:prstGeom>
-          <a:noFill/>
-        </p:spPr>
-        <p:txBody>
-          <a:bodyPr wrap="square" lIns="0" tIns="0" rIns="0" bIns="0">
-            <a:spAutoFit/>
-          </a:bodyPr>
-          <a:lstStyle/>
-          <a:p>
-            <a:pPr>
-              <a:defRPr sz="1000" b="1">
-                <a:solidFill>
-                  <a:srgbClr val="2563EB"/>
-                </a:solidFill>
-              </a:defRPr>
-            </a:pPr>
-            <a:r>
-              <a:t>SIH 2026 | PS ID: 26056</a:t>
-            </a:r>
-          </a:p>
-          <a:p>
-            <a:pPr>
-              <a:defRPr sz="2200" b="1">
-                <a:solidFill>
-                  <a:srgbClr val="0F172A"/>
-                </a:solidFill>
-              </a:defRPr>
-            </a:pPr>
-            <a:r>
-              <a:t>Impact, Benefits &amp; Strategic Scalability Roadmap</a:t>
-            </a:r>
-          </a:p>
-        </p:txBody>
-      </p:sp>
-      <p:sp>
-        <p:nvSpPr>
-          <p:cNvPr id="3" name="Rounded Rectangle 2"/>
+          <p:cNvPr id="2" name="Rectangle 1"/>
           <p:cNvSpPr/>
           <p:nvPr/>
         </p:nvSpPr>
         <p:spPr>
           <a:xfrm>
-            <a:off x="731520" y="1280160"/>
-            <a:ext cx="5120640" cy="5120640"/>
-          </a:xfrm>
-          <a:prstGeom prst="roundRect">
+            <a:off x="0" y="0"/>
+            <a:ext cx="12191695" cy="6858000"/>
+          </a:xfrm>
+          <a:prstGeom prst="rect">
             <a:avLst/>
           </a:prstGeom>
           <a:solidFill>
             <a:srgbClr val="FFFFFF"/>
           </a:solidFill>
-          <a:ln w="19050">
-            <a:solidFill>
-              <a:srgbClr val="E2E8F0"/>
-            </a:solidFill>
+          <a:ln>
+            <a:noFill/>
           </a:ln>
         </p:spPr>
         <p:style>
@@ -6632,163 +6037,24 @@
       </p:sp>
       <p:sp>
         <p:nvSpPr>
-          <p:cNvPr id="4" name="TextBox 3"/>
-          <p:cNvSpPr txBox="1"/>
-          <p:nvPr/>
-        </p:nvSpPr>
-        <p:spPr>
-          <a:xfrm>
-            <a:off x="914400" y="1417320"/>
-            <a:ext cx="4754880" cy="365760"/>
-          </a:xfrm>
-          <a:prstGeom prst="rect">
-            <a:avLst/>
-          </a:prstGeom>
-          <a:noFill/>
-        </p:spPr>
-        <p:txBody>
-          <a:bodyPr wrap="square" lIns="0" tIns="0" rIns="0" bIns="0">
-            <a:spAutoFit/>
-          </a:bodyPr>
-          <a:lstStyle/>
-          <a:p>
-            <a:pPr>
-              <a:defRPr sz="1300" b="1">
-                <a:solidFill>
-                  <a:srgbClr val="2563EB"/>
-                </a:solidFill>
-              </a:defRPr>
-            </a:pPr>
-            <a:r>
-              <a:t>QUANTIFIABLE IMPACT MATRIX</a:t>
-            </a:r>
-          </a:p>
-        </p:txBody>
-      </p:sp>
-      <p:sp>
-        <p:nvSpPr>
-          <p:cNvPr id="5" name="TextBox 4"/>
-          <p:cNvSpPr txBox="1"/>
-          <p:nvPr/>
-        </p:nvSpPr>
-        <p:spPr>
-          <a:xfrm>
-            <a:off x="868680" y="1783080"/>
-            <a:ext cx="4846320" cy="4389120"/>
-          </a:xfrm>
-          <a:prstGeom prst="rect">
-            <a:avLst/>
-          </a:prstGeom>
-          <a:noFill/>
-        </p:spPr>
-        <p:txBody>
-          <a:bodyPr wrap="square" lIns="0" tIns="0" rIns="0" bIns="0">
-            <a:spAutoFit/>
-          </a:bodyPr>
-          <a:lstStyle/>
-          <a:p>
-            <a:pPr>
-              <a:defRPr sz="1100" b="1">
-                <a:solidFill>
-                  <a:srgbClr val="2563EB"/>
-                </a:solidFill>
-              </a:defRPr>
-            </a:pPr>
-            <a:r>
-              <a:t>Macroeconomic &amp; Policy Impact (RBI / Ministry of Finance):</a:t>
-            </a:r>
-          </a:p>
-          <a:p>
-            <a:pPr>
-              <a:spcAft>
-                <a:spcPts val="1000"/>
-              </a:spcAft>
-              <a:defRPr sz="950">
-                <a:solidFill>
-                  <a:srgbClr val="0F172A"/>
-                </a:solidFill>
-              </a:defRPr>
-            </a:pPr>
-            <a:r>
-              <a:t>Eliminates the 15-day reporting lag for the transport component of headline CPI. Grants the Monetary Policy Committee (MPC) actionable real-time air travel inflation metrics for interest rate setting.</a:t>
-            </a:r>
-          </a:p>
-          <a:p>
-            <a:pPr>
-              <a:defRPr sz="1100" b="1">
-                <a:solidFill>
-                  <a:srgbClr val="0EA5E9"/>
-                </a:solidFill>
-              </a:defRPr>
-            </a:pPr>
-            <a:r>
-              <a:t>Regulatory Transparency (DGCA &amp; Ministry of Civil Aviation):</a:t>
-            </a:r>
-          </a:p>
-          <a:p>
-            <a:pPr>
-              <a:spcAft>
-                <a:spcPts val="1000"/>
-              </a:spcAft>
-              <a:defRPr sz="950">
-                <a:solidFill>
-                  <a:srgbClr val="0F172A"/>
-                </a:solidFill>
-              </a:defRPr>
-            </a:pPr>
-            <a:r>
-              <a:t>Equips aviation watchdogs with algorithmic surge detection to instantly detect regional monopoly gouging, route collusion, or abnormal festive-season fare spikes (&gt;3σ anomalies).</a:t>
-            </a:r>
-          </a:p>
-          <a:p>
-            <a:pPr>
-              <a:defRPr sz="1100" b="1">
-                <a:solidFill>
-                  <a:srgbClr val="10B981"/>
-                </a:solidFill>
-              </a:defRPr>
-            </a:pPr>
-            <a:r>
-              <a:t>Statistical Rigor (MoSPI / National Statistical Office):</a:t>
-            </a:r>
-          </a:p>
-          <a:p>
-            <a:pPr>
-              <a:spcAft>
-                <a:spcPts val="1000"/>
-              </a:spcAft>
-              <a:defRPr sz="950">
-                <a:solidFill>
-                  <a:srgbClr val="0F172A"/>
-                </a:solidFill>
-              </a:defRPr>
-            </a:pPr>
-            <a:r>
-              <a:t>Replaces subjective single-point airport surveys with 10,000+ monthly price observations. Solves substitution bias through UN/ILO Jevons aggregation and realistic lead-time weighting.</a:t>
-            </a:r>
-          </a:p>
-        </p:txBody>
-      </p:sp>
-      <p:sp>
-        <p:nvSpPr>
-          <p:cNvPr id="6" name="Rounded Rectangle 5"/>
+          <p:cNvPr id="3" name="Oval 2"/>
           <p:cNvSpPr/>
           <p:nvPr/>
         </p:nvSpPr>
         <p:spPr>
           <a:xfrm>
-            <a:off x="6035040" y="1280160"/>
-            <a:ext cx="5486400" cy="5120640"/>
-          </a:xfrm>
-          <a:prstGeom prst="roundRect">
+            <a:off x="365760" y="228600"/>
+            <a:ext cx="1645920" cy="777240"/>
+          </a:xfrm>
+          <a:prstGeom prst="ellipse">
             <a:avLst/>
           </a:prstGeom>
           <a:solidFill>
             <a:srgbClr val="FFFFFF"/>
           </a:solidFill>
-          <a:ln w="19050">
+          <a:ln w="25400">
             <a:solidFill>
-              <a:srgbClr val="E2E8F0"/>
+              <a:srgbClr val="64508C"/>
             </a:solidFill>
           </a:ln>
         </p:spPr>
@@ -6807,10 +6073,116 @@
           </a:fontRef>
         </p:style>
         <p:txBody>
-          <a:bodyPr rtlCol="0" anchor="ctr"/>
-          <a:lstStyle/>
-          <a:p>
-            <a:pPr algn="ctr"/>
+          <a:bodyPr rtlCol="0" anchor="ctr" wrap="square"/>
+          <a:lstStyle/>
+          <a:p>
+            <a:pPr algn="ctr">
+              <a:defRPr sz="1400" b="1">
+                <a:solidFill>
+                  <a:srgbClr val="000000"/>
+                </a:solidFill>
+                <a:latin typeface="Arial"/>
+              </a:defRPr>
+            </a:pPr>
+            <a:r>
+              <a:t>Team Rookie</a:t>
+            </a:r>
+          </a:p>
+        </p:txBody>
+      </p:sp>
+      <p:sp>
+        <p:nvSpPr>
+          <p:cNvPr id="4" name="TextBox 3"/>
+          <p:cNvSpPr txBox="1"/>
+          <p:nvPr/>
+        </p:nvSpPr>
+        <p:spPr>
+          <a:xfrm>
+            <a:off x="2286000" y="182880"/>
+            <a:ext cx="7589520" cy="914400"/>
+          </a:xfrm>
+          <a:prstGeom prst="rect">
+            <a:avLst/>
+          </a:prstGeom>
+          <a:noFill/>
+        </p:spPr>
+        <p:txBody>
+          <a:bodyPr wrap="square" lIns="0" rIns="0" tIns="0" bIns="0">
+            <a:spAutoFit/>
+          </a:bodyPr>
+          <a:lstStyle/>
+          <a:p>
+            <a:pPr algn="ctr">
+              <a:defRPr sz="2800" b="1">
+                <a:solidFill>
+                  <a:srgbClr val="1B365D"/>
+                </a:solidFill>
+                <a:latin typeface="Times New Roman"/>
+              </a:defRPr>
+            </a:pPr>
+            <a:r>
+              <a:t>IMPACT AND BENEFITS</a:t>
+            </a:r>
+          </a:p>
+        </p:txBody>
+      </p:sp>
+      <p:pic>
+        <p:nvPicPr>
+          <p:cNvPr id="5" name="Picture 4" descr="page_1_img_2.png"/>
+          <p:cNvPicPr>
+            <a:picLocks noChangeAspect="1"/>
+          </p:cNvPicPr>
+          <p:nvPr/>
+        </p:nvPicPr>
+        <p:blipFill>
+          <a:blip r:embed="rId2"/>
+          <a:stretch>
+            <a:fillRect/>
+          </a:stretch>
+        </p:blipFill>
+        <p:spPr>
+          <a:xfrm>
+            <a:off x="10241280" y="164592"/>
+            <a:ext cx="1645920" cy="868680"/>
+          </a:xfrm>
+          <a:prstGeom prst="rect">
+            <a:avLst/>
+          </a:prstGeom>
+        </p:spPr>
+      </p:pic>
+      <p:sp>
+        <p:nvSpPr>
+          <p:cNvPr id="6" name="TextBox 5"/>
+          <p:cNvSpPr txBox="1"/>
+          <p:nvPr/>
+        </p:nvSpPr>
+        <p:spPr>
+          <a:xfrm>
+            <a:off x="457200" y="1143000"/>
+            <a:ext cx="11277295" cy="548640"/>
+          </a:xfrm>
+          <a:prstGeom prst="rect">
+            <a:avLst/>
+          </a:prstGeom>
+          <a:noFill/>
+        </p:spPr>
+        <p:txBody>
+          <a:bodyPr wrap="none">
+            <a:spAutoFit/>
+          </a:bodyPr>
+          <a:lstStyle/>
+          <a:p>
+            <a:pPr algn="ctr">
+              <a:defRPr sz="1900" b="1">
+                <a:solidFill>
+                  <a:srgbClr val="000000"/>
+                </a:solidFill>
+                <a:latin typeface="Arial"/>
+              </a:defRPr>
+            </a:pPr>
+            <a:r>
+              <a:t>“FROM SCATTERED AIRFARES TO SOVEREIGN REAL-TIME INFLATION INTELLIGENCE”</a:t>
+            </a:r>
           </a:p>
         </p:txBody>
       </p:sp>
@@ -6822,8 +6194,463 @@
         </p:nvSpPr>
         <p:spPr>
           <a:xfrm>
-            <a:off x="6217920" y="1417320"/>
-            <a:ext cx="5120640" cy="365760"/>
+            <a:off x="731520" y="1737360"/>
+            <a:ext cx="4114800" cy="365760"/>
+          </a:xfrm>
+          <a:prstGeom prst="rect">
+            <a:avLst/>
+          </a:prstGeom>
+          <a:noFill/>
+        </p:spPr>
+        <p:txBody>
+          <a:bodyPr wrap="none">
+            <a:spAutoFit/>
+          </a:bodyPr>
+          <a:lstStyle/>
+          <a:p>
+            <a:pPr>
+              <a:defRPr sz="2200" b="1">
+                <a:solidFill>
+                  <a:srgbClr val="000000"/>
+                </a:solidFill>
+                <a:latin typeface="Arial"/>
+              </a:defRPr>
+            </a:pPr>
+            <a:r>
+              <a:t>IMPACTS</a:t>
+            </a:r>
+          </a:p>
+        </p:txBody>
+      </p:sp>
+      <p:sp>
+        <p:nvSpPr>
+          <p:cNvPr id="8" name="Rounded Rectangle 7"/>
+          <p:cNvSpPr/>
+          <p:nvPr/>
+        </p:nvSpPr>
+        <p:spPr>
+          <a:xfrm>
+            <a:off x="731520" y="2194560"/>
+            <a:ext cx="4572000" cy="804672"/>
+          </a:xfrm>
+          <a:prstGeom prst="roundRect">
+            <a:avLst/>
+          </a:prstGeom>
+          <a:solidFill>
+            <a:srgbClr val="BFDBFE"/>
+          </a:solidFill>
+          <a:ln w="12700">
+            <a:solidFill>
+              <a:srgbClr val="1E40AF"/>
+            </a:solidFill>
+          </a:ln>
+        </p:spPr>
+        <p:style>
+          <a:lnRef idx="1">
+            <a:schemeClr val="accent1"/>
+          </a:lnRef>
+          <a:fillRef idx="3">
+            <a:schemeClr val="accent1"/>
+          </a:fillRef>
+          <a:effectRef idx="2">
+            <a:schemeClr val="accent1"/>
+          </a:effectRef>
+          <a:fontRef idx="minor">
+            <a:schemeClr val="lt1"/>
+          </a:fontRef>
+        </p:style>
+        <p:txBody>
+          <a:bodyPr rtlCol="0" anchor="ctr" wrap="square" lIns="109728" rIns="109728" tIns="54864"/>
+          <a:lstStyle/>
+          <a:p>
+            <a:pPr algn="ctr">
+              <a:defRPr sz="1100" b="1">
+                <a:solidFill>
+                  <a:srgbClr val="1E40AF"/>
+                </a:solidFill>
+                <a:latin typeface="Arial"/>
+              </a:defRPr>
+            </a:pPr>
+            <a:r>
+              <a:t>Macroeconomic Policy Impact</a:t>
+            </a:r>
+          </a:p>
+          <a:p>
+            <a:pPr>
+              <a:defRPr sz="950">
+                <a:solidFill>
+                  <a:srgbClr val="000000"/>
+                </a:solidFill>
+                <a:latin typeface="Arial"/>
+              </a:defRPr>
+            </a:pPr>
+            <a:r>
+              <a:t>Eliminates 15-day CPI lag; empowers RBI MPC with real-time transport inflation metrics.</a:t>
+            </a:r>
+          </a:p>
+        </p:txBody>
+      </p:sp>
+      <p:sp>
+        <p:nvSpPr>
+          <p:cNvPr id="9" name="Rounded Rectangle 8"/>
+          <p:cNvSpPr/>
+          <p:nvPr/>
+        </p:nvSpPr>
+        <p:spPr>
+          <a:xfrm>
+            <a:off x="731520" y="3072384"/>
+            <a:ext cx="4572000" cy="804672"/>
+          </a:xfrm>
+          <a:prstGeom prst="roundRect">
+            <a:avLst/>
+          </a:prstGeom>
+          <a:solidFill>
+            <a:srgbClr val="BBF7D0"/>
+          </a:solidFill>
+          <a:ln w="12700">
+            <a:solidFill>
+              <a:srgbClr val="166534"/>
+            </a:solidFill>
+          </a:ln>
+        </p:spPr>
+        <p:style>
+          <a:lnRef idx="1">
+            <a:schemeClr val="accent1"/>
+          </a:lnRef>
+          <a:fillRef idx="3">
+            <a:schemeClr val="accent1"/>
+          </a:fillRef>
+          <a:effectRef idx="2">
+            <a:schemeClr val="accent1"/>
+          </a:effectRef>
+          <a:fontRef idx="minor">
+            <a:schemeClr val="lt1"/>
+          </a:fontRef>
+        </p:style>
+        <p:txBody>
+          <a:bodyPr rtlCol="0" anchor="ctr" wrap="square" lIns="109728" rIns="109728" tIns="54864"/>
+          <a:lstStyle/>
+          <a:p>
+            <a:pPr algn="ctr">
+              <a:defRPr sz="1100" b="1">
+                <a:solidFill>
+                  <a:srgbClr val="166534"/>
+                </a:solidFill>
+                <a:latin typeface="Arial"/>
+              </a:defRPr>
+            </a:pPr>
+            <a:r>
+              <a:t>Regulatory &amp; Aviation Impact</a:t>
+            </a:r>
+          </a:p>
+          <a:p>
+            <a:pPr>
+              <a:defRPr sz="950">
+                <a:solidFill>
+                  <a:srgbClr val="000000"/>
+                </a:solidFill>
+                <a:latin typeface="Arial"/>
+              </a:defRPr>
+            </a:pPr>
+            <a:r>
+              <a:t>Enables DGCA to detect route monopolies, festival fare surges &amp; predatory pricing.</a:t>
+            </a:r>
+          </a:p>
+        </p:txBody>
+      </p:sp>
+      <p:sp>
+        <p:nvSpPr>
+          <p:cNvPr id="10" name="Rounded Rectangle 9"/>
+          <p:cNvSpPr/>
+          <p:nvPr/>
+        </p:nvSpPr>
+        <p:spPr>
+          <a:xfrm>
+            <a:off x="731520" y="3950208"/>
+            <a:ext cx="4572000" cy="804672"/>
+          </a:xfrm>
+          <a:prstGeom prst="roundRect">
+            <a:avLst/>
+          </a:prstGeom>
+          <a:solidFill>
+            <a:srgbClr val="FED7AA"/>
+          </a:solidFill>
+          <a:ln w="12700">
+            <a:solidFill>
+              <a:srgbClr val="9A3412"/>
+            </a:solidFill>
+          </a:ln>
+        </p:spPr>
+        <p:style>
+          <a:lnRef idx="1">
+            <a:schemeClr val="accent1"/>
+          </a:lnRef>
+          <a:fillRef idx="3">
+            <a:schemeClr val="accent1"/>
+          </a:fillRef>
+          <a:effectRef idx="2">
+            <a:schemeClr val="accent1"/>
+          </a:effectRef>
+          <a:fontRef idx="minor">
+            <a:schemeClr val="lt1"/>
+          </a:fontRef>
+        </p:style>
+        <p:txBody>
+          <a:bodyPr rtlCol="0" anchor="ctr" wrap="square" lIns="109728" rIns="109728" tIns="54864"/>
+          <a:lstStyle/>
+          <a:p>
+            <a:pPr algn="ctr">
+              <a:defRPr sz="1100" b="1">
+                <a:solidFill>
+                  <a:srgbClr val="9A3412"/>
+                </a:solidFill>
+                <a:latin typeface="Arial"/>
+              </a:defRPr>
+            </a:pPr>
+            <a:r>
+              <a:t>Statistical Rigor Impact</a:t>
+            </a:r>
+          </a:p>
+          <a:p>
+            <a:pPr>
+              <a:defRPr sz="950">
+                <a:solidFill>
+                  <a:srgbClr val="000000"/>
+                </a:solidFill>
+                <a:latin typeface="Arial"/>
+              </a:defRPr>
+            </a:pPr>
+            <a:r>
+              <a:t>Replaces single monthly spot checks with 10,000+ daily observations obeying UN/ILO standards.</a:t>
+            </a:r>
+          </a:p>
+        </p:txBody>
+      </p:sp>
+      <p:sp>
+        <p:nvSpPr>
+          <p:cNvPr id="11" name="Rounded Rectangle 10"/>
+          <p:cNvSpPr/>
+          <p:nvPr/>
+        </p:nvSpPr>
+        <p:spPr>
+          <a:xfrm>
+            <a:off x="731520" y="4828032"/>
+            <a:ext cx="4572000" cy="804672"/>
+          </a:xfrm>
+          <a:prstGeom prst="roundRect">
+            <a:avLst/>
+          </a:prstGeom>
+          <a:solidFill>
+            <a:srgbClr val="E9D5FF"/>
+          </a:solidFill>
+          <a:ln w="12700">
+            <a:solidFill>
+              <a:srgbClr val="6B21A8"/>
+            </a:solidFill>
+          </a:ln>
+        </p:spPr>
+        <p:style>
+          <a:lnRef idx="1">
+            <a:schemeClr val="accent1"/>
+          </a:lnRef>
+          <a:fillRef idx="3">
+            <a:schemeClr val="accent1"/>
+          </a:fillRef>
+          <a:effectRef idx="2">
+            <a:schemeClr val="accent1"/>
+          </a:effectRef>
+          <a:fontRef idx="minor">
+            <a:schemeClr val="lt1"/>
+          </a:fontRef>
+        </p:style>
+        <p:txBody>
+          <a:bodyPr rtlCol="0" anchor="ctr" wrap="square" lIns="109728" rIns="109728" tIns="54864"/>
+          <a:lstStyle/>
+          <a:p>
+            <a:pPr algn="ctr">
+              <a:defRPr sz="1100" b="1">
+                <a:solidFill>
+                  <a:srgbClr val="6B21A8"/>
+                </a:solidFill>
+                <a:latin typeface="Arial"/>
+              </a:defRPr>
+            </a:pPr>
+            <a:r>
+              <a:t>National Governance Impact</a:t>
+            </a:r>
+          </a:p>
+          <a:p>
+            <a:pPr>
+              <a:defRPr sz="950">
+                <a:solidFill>
+                  <a:srgbClr val="000000"/>
+                </a:solidFill>
+                <a:latin typeface="Arial"/>
+              </a:defRPr>
+            </a:pPr>
+            <a:r>
+              <a:t>Builds India's first sovereign high-frequency price aggregation platform.</a:t>
+            </a:r>
+          </a:p>
+        </p:txBody>
+      </p:sp>
+      <p:sp>
+        <p:nvSpPr>
+          <p:cNvPr id="12" name="Rounded Rectangle 11"/>
+          <p:cNvSpPr/>
+          <p:nvPr/>
+        </p:nvSpPr>
+        <p:spPr>
+          <a:xfrm>
+            <a:off x="731520" y="5705856"/>
+            <a:ext cx="4572000" cy="804672"/>
+          </a:xfrm>
+          <a:prstGeom prst="roundRect">
+            <a:avLst/>
+          </a:prstGeom>
+          <a:solidFill>
+            <a:srgbClr val="FEF08A"/>
+          </a:solidFill>
+          <a:ln w="12700">
+            <a:solidFill>
+              <a:srgbClr val="854D0E"/>
+            </a:solidFill>
+          </a:ln>
+        </p:spPr>
+        <p:style>
+          <a:lnRef idx="1">
+            <a:schemeClr val="accent1"/>
+          </a:lnRef>
+          <a:fillRef idx="3">
+            <a:schemeClr val="accent1"/>
+          </a:fillRef>
+          <a:effectRef idx="2">
+            <a:schemeClr val="accent1"/>
+          </a:effectRef>
+          <a:fontRef idx="minor">
+            <a:schemeClr val="lt1"/>
+          </a:fontRef>
+        </p:style>
+        <p:txBody>
+          <a:bodyPr rtlCol="0" anchor="ctr" wrap="square" lIns="109728" rIns="109728" tIns="54864"/>
+          <a:lstStyle/>
+          <a:p>
+            <a:pPr algn="ctr">
+              <a:defRPr sz="1100" b="1">
+                <a:solidFill>
+                  <a:srgbClr val="854D0E"/>
+                </a:solidFill>
+                <a:latin typeface="Arial"/>
+              </a:defRPr>
+            </a:pPr>
+            <a:r>
+              <a:t>Technical &amp; Digital Impact</a:t>
+            </a:r>
+          </a:p>
+          <a:p>
+            <a:pPr>
+              <a:defRPr sz="950">
+                <a:solidFill>
+                  <a:srgbClr val="000000"/>
+                </a:solidFill>
+                <a:latin typeface="Arial"/>
+              </a:defRPr>
+            </a:pPr>
+            <a:r>
+              <a:t>Demonstrates how automated scraping &amp; cryptographic provenance modernize national statistics.</a:t>
+            </a:r>
+          </a:p>
+        </p:txBody>
+      </p:sp>
+      <p:sp>
+        <p:nvSpPr>
+          <p:cNvPr id="13" name="Rectangle 12"/>
+          <p:cNvSpPr/>
+          <p:nvPr/>
+        </p:nvSpPr>
+        <p:spPr>
+          <a:xfrm>
+            <a:off x="5623560" y="2011680"/>
+            <a:ext cx="27432" cy="4480560"/>
+          </a:xfrm>
+          <a:prstGeom prst="rect">
+            <a:avLst/>
+          </a:prstGeom>
+          <a:solidFill>
+            <a:srgbClr val="C8C8C8"/>
+          </a:solidFill>
+          <a:ln>
+            <a:noFill/>
+          </a:ln>
+        </p:spPr>
+        <p:style>
+          <a:lnRef idx="1">
+            <a:schemeClr val="accent1"/>
+          </a:lnRef>
+          <a:fillRef idx="3">
+            <a:schemeClr val="accent1"/>
+          </a:fillRef>
+          <a:effectRef idx="2">
+            <a:schemeClr val="accent1"/>
+          </a:effectRef>
+          <a:fontRef idx="minor">
+            <a:schemeClr val="lt1"/>
+          </a:fontRef>
+        </p:style>
+        <p:txBody>
+          <a:bodyPr rtlCol="0" anchor="ctr"/>
+          <a:lstStyle/>
+          <a:p>
+            <a:pPr algn="ctr"/>
+          </a:p>
+        </p:txBody>
+      </p:sp>
+      <p:sp>
+        <p:nvSpPr>
+          <p:cNvPr id="14" name="TextBox 13"/>
+          <p:cNvSpPr txBox="1"/>
+          <p:nvPr/>
+        </p:nvSpPr>
+        <p:spPr>
+          <a:xfrm>
+            <a:off x="5943600" y="1737360"/>
+            <a:ext cx="5029200" cy="365760"/>
+          </a:xfrm>
+          <a:prstGeom prst="rect">
+            <a:avLst/>
+          </a:prstGeom>
+          <a:noFill/>
+        </p:spPr>
+        <p:txBody>
+          <a:bodyPr wrap="none">
+            <a:spAutoFit/>
+          </a:bodyPr>
+          <a:lstStyle/>
+          <a:p>
+            <a:pPr>
+              <a:defRPr sz="2200" b="1">
+                <a:solidFill>
+                  <a:srgbClr val="000000"/>
+                </a:solidFill>
+                <a:latin typeface="Arial"/>
+              </a:defRPr>
+            </a:pPr>
+            <a:r>
+              <a:t>FUTURE PROSPECTS</a:t>
+            </a:r>
+          </a:p>
+        </p:txBody>
+      </p:sp>
+      <p:sp>
+        <p:nvSpPr>
+          <p:cNvPr id="15" name="TextBox 14"/>
+          <p:cNvSpPr txBox="1"/>
+          <p:nvPr/>
+        </p:nvSpPr>
+        <p:spPr>
+          <a:xfrm>
+            <a:off x="5943600" y="2194560"/>
+            <a:ext cx="5760720" cy="4297680"/>
           </a:xfrm>
           <a:prstGeom prst="rect">
             <a:avLst/>
@@ -6837,172 +6664,127 @@
           <a:lstStyle/>
           <a:p>
             <a:pPr>
-              <a:defRPr sz="1300" b="1">
-                <a:solidFill>
-                  <a:srgbClr val="2563EB"/>
-                </a:solidFill>
-              </a:defRPr>
-            </a:pPr>
-            <a:r>
-              <a:t>5-PHASE NATIONAL EXPANSION ROADMAP</a:t>
-            </a:r>
-          </a:p>
-        </p:txBody>
-      </p:sp>
-      <p:sp>
-        <p:nvSpPr>
-          <p:cNvPr id="8" name="TextBox 7"/>
-          <p:cNvSpPr txBox="1"/>
-          <p:nvPr/>
-        </p:nvSpPr>
-        <p:spPr>
-          <a:xfrm>
-            <a:off x="6172200" y="1783080"/>
-            <a:ext cx="5212080" cy="4389120"/>
-          </a:xfrm>
-          <a:prstGeom prst="rect">
-            <a:avLst/>
-          </a:prstGeom>
-          <a:noFill/>
-        </p:spPr>
-        <p:txBody>
-          <a:bodyPr wrap="square" lIns="0" tIns="0" rIns="0" bIns="0">
-            <a:spAutoFit/>
-          </a:bodyPr>
-          <a:lstStyle/>
+              <a:spcAft>
+                <a:spcPts val="1200"/>
+              </a:spcAft>
+            </a:pPr>
+            <a:r>
+              <a:rPr sz="1200" b="1">
+                <a:solidFill>
+                  <a:srgbClr val="000000"/>
+                </a:solidFill>
+                <a:latin typeface="Arial"/>
+              </a:rPr>
+              <a:t>• UDAN Route Expansion: </a:t>
+            </a:r>
+            <a:r>
+              <a:rPr sz="1200">
+                <a:solidFill>
+                  <a:srgbClr val="323232"/>
+                </a:solidFill>
+                <a:latin typeface="Arial"/>
+              </a:rPr>
+              <a:t>Scale from current 12 metro corridors to 250+ Tier-2 and Tier-3 regional airports nationwide.</a:t>
+            </a:r>
+          </a:p>
           <a:p>
             <a:pPr>
-              <a:defRPr sz="1100" b="1">
-                <a:solidFill>
-                  <a:srgbClr val="2563EB"/>
-                </a:solidFill>
-              </a:defRPr>
-            </a:pPr>
-            <a:r>
-              <a:t>Phase 1: Hackathon MVP (Current State)</a:t>
+              <a:spcAft>
+                <a:spcPts val="1200"/>
+              </a:spcAft>
+            </a:pPr>
+            <a:r>
+              <a:rPr sz="1200" b="1">
+                <a:solidFill>
+                  <a:srgbClr val="000000"/>
+                </a:solidFill>
+                <a:latin typeface="Arial"/>
+              </a:rPr>
+              <a:t>• Cabin Tier Differentiation: </a:t>
+            </a:r>
+            <a:r>
+              <a:rPr sz="1200">
+                <a:solidFill>
+                  <a:srgbClr val="323232"/>
+                </a:solidFill>
+                <a:latin typeface="Arial"/>
+              </a:rPr>
+              <a:t>Segregate economy, premium economy, and business class into granular sub-indices.</a:t>
             </a:r>
           </a:p>
           <a:p>
             <a:pPr>
               <a:spcAft>
-                <a:spcPts val="700"/>
-              </a:spcAft>
-              <a:defRPr sz="950">
-                <a:solidFill>
-                  <a:srgbClr val="0F172A"/>
-                </a:solidFill>
-              </a:defRPr>
-            </a:pPr>
-            <a:r>
-              <a:t>Live dashboard covering 12 metro corridors, 5 horizons, Jevons/Dutot index, Z-score outlier engine, and SHA-256 provenance vault.</a:t>
+                <a:spcPts val="1200"/>
+              </a:spcAft>
+            </a:pPr>
+            <a:r>
+              <a:rPr sz="1200" b="1">
+                <a:solidFill>
+                  <a:srgbClr val="000000"/>
+                </a:solidFill>
+                <a:latin typeface="Arial"/>
+              </a:rPr>
+              <a:t>• Intraday Time-of-Day Yield: </a:t>
+            </a:r>
+            <a:r>
+              <a:rPr sz="1200">
+                <a:solidFill>
+                  <a:srgbClr val="323232"/>
+                </a:solidFill>
+                <a:latin typeface="Arial"/>
+              </a:rPr>
+              <a:t>Model peak departure rush hours (06:00-09:00, 17:00-20:00) vs off-peak red-eye rates.</a:t>
             </a:r>
           </a:p>
           <a:p>
             <a:pPr>
-              <a:defRPr sz="1100" b="1">
-                <a:solidFill>
-                  <a:srgbClr val="2563EB"/>
-                </a:solidFill>
-              </a:defRPr>
-            </a:pPr>
-            <a:r>
-              <a:t>Phase 2: Full National Fleet Coverage (Q1 2027)</a:t>
+              <a:spcAft>
+                <a:spcPts val="1200"/>
+              </a:spcAft>
+            </a:pPr>
+            <a:r>
+              <a:rPr sz="1200" b="1">
+                <a:solidFill>
+                  <a:srgbClr val="000000"/>
+                </a:solidFill>
+                <a:latin typeface="Arial"/>
+              </a:rPr>
+              <a:t>• Central MoSPI NDAP Integration: </a:t>
+            </a:r>
+            <a:r>
+              <a:rPr sz="1200">
+                <a:solidFill>
+                  <a:srgbClr val="323232"/>
+                </a:solidFill>
+                <a:latin typeface="Arial"/>
+              </a:rPr>
+              <a:t>Establish direct automated API pipelines feeding real-time indices into the official CPI release.</a:t>
             </a:r>
           </a:p>
           <a:p>
             <a:pPr>
               <a:spcAft>
-                <a:spcPts val="700"/>
-              </a:spcAft>
-              <a:defRPr sz="950">
-                <a:solidFill>
-                  <a:srgbClr val="0F172A"/>
-                </a:solidFill>
-              </a:defRPr>
-            </a:pPr>
-            <a:r>
-              <a:t>Expansion to 250+ Tier-2/Tier-3 routes including UDAN regional flights, Akasa Air, and regional turboprop carriers.</a:t>
-            </a:r>
-          </a:p>
-          <a:p>
-            <a:pPr>
-              <a:defRPr sz="1100" b="1">
-                <a:solidFill>
-                  <a:srgbClr val="2563EB"/>
-                </a:solidFill>
-              </a:defRPr>
-            </a:pPr>
-            <a:r>
-              <a:t>Phase 3: Deep Dynamic Segmentation (Q2 2027)</a:t>
-            </a:r>
-          </a:p>
-          <a:p>
-            <a:pPr>
-              <a:spcAft>
-                <a:spcPts val="700"/>
-              </a:spcAft>
-              <a:defRPr sz="950">
-                <a:solidFill>
-                  <a:srgbClr val="0F172A"/>
-                </a:solidFill>
-              </a:defRPr>
-            </a:pPr>
-            <a:r>
-              <a:t>Class-specific sub-indices (Premium Economy, Business, Economy) with granular departure time-of-day weighting (morning peak vs. red-eye).</a:t>
-            </a:r>
-          </a:p>
-          <a:p>
-            <a:pPr>
-              <a:defRPr sz="1100" b="1">
-                <a:solidFill>
-                  <a:srgbClr val="2563EB"/>
-                </a:solidFill>
-              </a:defRPr>
-            </a:pPr>
-            <a:r>
-              <a:t>Phase 4: MoSPI NDAP Automated Pipeline (Q3 2027)</a:t>
-            </a:r>
-          </a:p>
-          <a:p>
-            <a:pPr>
-              <a:spcAft>
-                <a:spcPts val="700"/>
-              </a:spcAft>
-              <a:defRPr sz="950">
-                <a:solidFill>
-                  <a:srgbClr val="0F172A"/>
-                </a:solidFill>
-              </a:defRPr>
-            </a:pPr>
-            <a:r>
-              <a:t>Secure API integration pushing daily verified airfare price indices directly into National Data &amp; Analytics Platform for official CPI releases.</a:t>
-            </a:r>
-          </a:p>
-          <a:p>
-            <a:pPr>
-              <a:defRPr sz="1100" b="1">
-                <a:solidFill>
-                  <a:srgbClr val="2563EB"/>
-                </a:solidFill>
-              </a:defRPr>
-            </a:pPr>
-            <a:r>
-              <a:t>Phase 5: Autonomous AI Analyst &amp; Alerting (Q4 2027)</a:t>
-            </a:r>
-          </a:p>
-          <a:p>
-            <a:pPr>
-              <a:spcAft>
-                <a:spcPts val="700"/>
-              </a:spcAft>
-              <a:defRPr sz="950">
-                <a:solidFill>
-                  <a:srgbClr val="0F172A"/>
-                </a:solidFill>
-              </a:defRPr>
-            </a:pPr>
-            <a:r>
-              <a:t>LLM-powered executive summarizer drafting weekly inflation briefs and automated anomaly webhooks alerting DGCA of fare violations.</a:t>
+                <a:spcPts val="1200"/>
+              </a:spcAft>
+            </a:pPr>
+            <a:r>
+              <a:rPr sz="1200" b="1">
+                <a:solidFill>
+                  <a:srgbClr val="000000"/>
+                </a:solidFill>
+                <a:latin typeface="Arial"/>
+              </a:rPr>
+              <a:t>• Autonomous AI Analyst: </a:t>
+            </a:r>
+            <a:r>
+              <a:rPr sz="1200">
+                <a:solidFill>
+                  <a:srgbClr val="323232"/>
+                </a:solidFill>
+                <a:latin typeface="Arial"/>
+              </a:rPr>
+              <a:t>Deploy LLM agents to draft automated weekly inflation briefs and alert DGCA of pricing anomalies.</a:t>
             </a:r>
           </a:p>
         </p:txBody>
@@ -7027,72 +6809,23 @@
       <p:grpSpPr/>
       <p:sp>
         <p:nvSpPr>
-          <p:cNvPr id="2" name="TextBox 1"/>
-          <p:cNvSpPr txBox="1"/>
-          <p:nvPr/>
-        </p:nvSpPr>
-        <p:spPr>
-          <a:xfrm>
-            <a:off x="731520" y="365760"/>
-            <a:ext cx="10728655" cy="822960"/>
-          </a:xfrm>
-          <a:prstGeom prst="rect">
-            <a:avLst/>
-          </a:prstGeom>
-          <a:noFill/>
-        </p:spPr>
-        <p:txBody>
-          <a:bodyPr wrap="square" lIns="0" tIns="0" rIns="0" bIns="0">
-            <a:spAutoFit/>
-          </a:bodyPr>
-          <a:lstStyle/>
-          <a:p>
-            <a:pPr>
-              <a:defRPr sz="1000" b="1">
-                <a:solidFill>
-                  <a:srgbClr val="2563EB"/>
-                </a:solidFill>
-              </a:defRPr>
-            </a:pPr>
-            <a:r>
-              <a:t>SIH 2026 | PS ID: 26056</a:t>
-            </a:r>
-          </a:p>
-          <a:p>
-            <a:pPr>
-              <a:defRPr sz="2200" b="1">
-                <a:solidFill>
-                  <a:srgbClr val="0F172A"/>
-                </a:solidFill>
-              </a:defRPr>
-            </a:pPr>
-            <a:r>
-              <a:t>Live Working Prototype &amp; Platform Verification</a:t>
-            </a:r>
-          </a:p>
-        </p:txBody>
-      </p:sp>
-      <p:sp>
-        <p:nvSpPr>
-          <p:cNvPr id="3" name="Rounded Rectangle 2"/>
+          <p:cNvPr id="2" name="Rectangle 1"/>
           <p:cNvSpPr/>
           <p:nvPr/>
         </p:nvSpPr>
         <p:spPr>
           <a:xfrm>
-            <a:off x="731520" y="1234440"/>
-            <a:ext cx="10728655" cy="685800"/>
-          </a:xfrm>
-          <a:prstGeom prst="roundRect">
+            <a:off x="0" y="0"/>
+            <a:ext cx="12191695" cy="6858000"/>
+          </a:xfrm>
+          <a:prstGeom prst="rect">
             <a:avLst/>
           </a:prstGeom>
           <a:solidFill>
-            <a:srgbClr val="EFF6FF"/>
+            <a:srgbClr val="FFFFFF"/>
           </a:solidFill>
-          <a:ln w="19050">
-            <a:solidFill>
-              <a:srgbClr val="2563EB"/>
-            </a:solidFill>
+          <a:ln>
+            <a:noFill/>
           </a:ln>
         </p:spPr>
         <p:style>
@@ -7119,59 +6852,24 @@
       </p:sp>
       <p:sp>
         <p:nvSpPr>
-          <p:cNvPr id="4" name="TextBox 3"/>
-          <p:cNvSpPr txBox="1"/>
-          <p:nvPr/>
-        </p:nvSpPr>
-        <p:spPr>
-          <a:xfrm>
-            <a:off x="914400" y="1298448"/>
-            <a:ext cx="10362895" cy="548640"/>
-          </a:xfrm>
-          <a:prstGeom prst="rect">
-            <a:avLst/>
-          </a:prstGeom>
-          <a:noFill/>
-        </p:spPr>
-        <p:txBody>
-          <a:bodyPr wrap="none">
-            <a:spAutoFit/>
-          </a:bodyPr>
-          <a:lstStyle/>
-          <a:p>
-            <a:pPr>
-              <a:defRPr sz="1200" b="1">
-                <a:solidFill>
-                  <a:srgbClr val="2563EB"/>
-                </a:solidFill>
-              </a:defRPr>
-            </a:pPr>
-            <a:r>
-              <a:t>🌐 LIVE PRODUCTION SYSTEM:  https://sihwinners.vercel.app   |   REPOSITORY:  github.com/oshshivish-tech/sih26056_airfare_cpi</a:t>
-            </a:r>
-          </a:p>
-        </p:txBody>
-      </p:sp>
-      <p:sp>
-        <p:nvSpPr>
-          <p:cNvPr id="5" name="Rounded Rectangle 4"/>
+          <p:cNvPr id="3" name="Oval 2"/>
           <p:cNvSpPr/>
           <p:nvPr/>
         </p:nvSpPr>
         <p:spPr>
           <a:xfrm>
-            <a:off x="731520" y="2057400"/>
-            <a:ext cx="3429000" cy="4572000"/>
-          </a:xfrm>
-          <a:prstGeom prst="roundRect">
+            <a:off x="365760" y="228600"/>
+            <a:ext cx="1645920" cy="777240"/>
+          </a:xfrm>
+          <a:prstGeom prst="ellipse">
             <a:avLst/>
           </a:prstGeom>
           <a:solidFill>
             <a:srgbClr val="FFFFFF"/>
           </a:solidFill>
-          <a:ln w="19050">
+          <a:ln w="25400">
             <a:solidFill>
-              <a:srgbClr val="E2E8F0"/>
+              <a:srgbClr val="64508C"/>
             </a:solidFill>
           </a:ln>
         </p:spPr>
@@ -7190,13 +6888,83 @@
           </a:fontRef>
         </p:style>
         <p:txBody>
-          <a:bodyPr rtlCol="0" anchor="ctr"/>
-          <a:lstStyle/>
-          <a:p>
-            <a:pPr algn="ctr"/>
-          </a:p>
-        </p:txBody>
-      </p:sp>
+          <a:bodyPr rtlCol="0" anchor="ctr" wrap="square"/>
+          <a:lstStyle/>
+          <a:p>
+            <a:pPr algn="ctr">
+              <a:defRPr sz="1400" b="1">
+                <a:solidFill>
+                  <a:srgbClr val="000000"/>
+                </a:solidFill>
+                <a:latin typeface="Arial"/>
+              </a:defRPr>
+            </a:pPr>
+            <a:r>
+              <a:t>Team Rookie</a:t>
+            </a:r>
+          </a:p>
+        </p:txBody>
+      </p:sp>
+      <p:sp>
+        <p:nvSpPr>
+          <p:cNvPr id="4" name="TextBox 3"/>
+          <p:cNvSpPr txBox="1"/>
+          <p:nvPr/>
+        </p:nvSpPr>
+        <p:spPr>
+          <a:xfrm>
+            <a:off x="2286000" y="182880"/>
+            <a:ext cx="7589520" cy="914400"/>
+          </a:xfrm>
+          <a:prstGeom prst="rect">
+            <a:avLst/>
+          </a:prstGeom>
+          <a:noFill/>
+        </p:spPr>
+        <p:txBody>
+          <a:bodyPr wrap="square" lIns="0" rIns="0" tIns="0" bIns="0">
+            <a:spAutoFit/>
+          </a:bodyPr>
+          <a:lstStyle/>
+          <a:p>
+            <a:pPr algn="ctr">
+              <a:defRPr sz="2800" b="1">
+                <a:solidFill>
+                  <a:srgbClr val="1B365D"/>
+                </a:solidFill>
+                <a:latin typeface="Times New Roman"/>
+              </a:defRPr>
+            </a:pPr>
+            <a:r>
+              <a:t>DEMO/PROTOTYPE</a:t>
+            </a:r>
+          </a:p>
+        </p:txBody>
+      </p:sp>
+      <p:pic>
+        <p:nvPicPr>
+          <p:cNvPr id="5" name="Picture 4" descr="page_1_img_2.png"/>
+          <p:cNvPicPr>
+            <a:picLocks noChangeAspect="1"/>
+          </p:cNvPicPr>
+          <p:nvPr/>
+        </p:nvPicPr>
+        <p:blipFill>
+          <a:blip r:embed="rId2"/>
+          <a:stretch>
+            <a:fillRect/>
+          </a:stretch>
+        </p:blipFill>
+        <p:spPr>
+          <a:xfrm>
+            <a:off x="10241280" y="164592"/>
+            <a:ext cx="1645920" cy="868680"/>
+          </a:xfrm>
+          <a:prstGeom prst="rect">
+            <a:avLst/>
+          </a:prstGeom>
+        </p:spPr>
+      </p:pic>
       <p:sp>
         <p:nvSpPr>
           <p:cNvPr id="6" name="TextBox 5"/>
@@ -7205,8 +6973,8 @@
         </p:nvSpPr>
         <p:spPr>
           <a:xfrm>
-            <a:off x="914400" y="2194560"/>
-            <a:ext cx="3063240" cy="365760"/>
+            <a:off x="914400" y="1188720"/>
+            <a:ext cx="4572000" cy="365760"/>
           </a:xfrm>
           <a:prstGeom prst="rect">
             <a:avLst/>
@@ -7214,20 +6982,21 @@
           <a:noFill/>
         </p:spPr>
         <p:txBody>
-          <a:bodyPr wrap="square" lIns="0" tIns="0" rIns="0" bIns="0">
+          <a:bodyPr wrap="none">
             <a:spAutoFit/>
           </a:bodyPr>
           <a:lstStyle/>
           <a:p>
-            <a:pPr>
-              <a:defRPr sz="1300" b="1">
-                <a:solidFill>
-                  <a:srgbClr val="2563EB"/>
-                </a:solidFill>
-              </a:defRPr>
-            </a:pPr>
-            <a:r>
-              <a:t>1. Real-Time Index Visualizer</a:t>
+            <a:pPr algn="ctr">
+              <a:defRPr sz="2200" b="1">
+                <a:solidFill>
+                  <a:srgbClr val="000000"/>
+                </a:solidFill>
+                <a:latin typeface="Arial"/>
+              </a:defRPr>
+            </a:pPr>
+            <a:r>
+              <a:t>DEMO</a:t>
             </a:r>
           </a:p>
         </p:txBody>
@@ -7240,8 +7009,8 @@
         </p:nvSpPr>
         <p:spPr>
           <a:xfrm>
-            <a:off x="868680" y="2560320"/>
-            <a:ext cx="3154680" cy="3931920"/>
+            <a:off x="6583680" y="1188720"/>
+            <a:ext cx="4572000" cy="365760"/>
           </a:xfrm>
           <a:prstGeom prst="rect">
             <a:avLst/>
@@ -7249,152 +7018,73 @@
           <a:noFill/>
         </p:spPr>
         <p:txBody>
-          <a:bodyPr wrap="square" lIns="0" tIns="0" rIns="0" bIns="0">
+          <a:bodyPr wrap="none">
             <a:spAutoFit/>
           </a:bodyPr>
           <a:lstStyle/>
           <a:p>
-            <a:pPr>
-              <a:spcAft>
-                <a:spcPts val="800"/>
-              </a:spcAft>
-              <a:defRPr sz="1050">
-                <a:solidFill>
-                  <a:srgbClr val="0F172A"/>
-                </a:solidFill>
-              </a:defRPr>
-            </a:pPr>
-            <a:r>
-              <a:t>✔ Interactive multi-horizon line chart (1d, 7d, 15d, 30d, 45d, All).</a:t>
-            </a:r>
-          </a:p>
-          <a:p>
-            <a:pPr>
-              <a:spcAft>
-                <a:spcPts val="800"/>
-              </a:spcAft>
-              <a:defRPr sz="1050">
-                <a:solidFill>
-                  <a:srgbClr val="0F172A"/>
-                </a:solidFill>
-              </a:defRPr>
-            </a:pPr>
-            <a:r>
-              <a:t>✔ Dynamic visual scaling showing urgent flight surge (158.2) vs advance booking (90.4).</a:t>
-            </a:r>
-          </a:p>
-          <a:p>
-            <a:pPr>
-              <a:spcAft>
-                <a:spcPts val="800"/>
-              </a:spcAft>
-              <a:defRPr sz="1050">
-                <a:solidFill>
-                  <a:srgbClr val="0F172A"/>
-                </a:solidFill>
-              </a:defRPr>
-            </a:pPr>
-            <a:r>
-              <a:t>✔ Side-by-side comparison of Jevons GM (111.4) vs. legacy MoSPI manual baseline (112.0) and Dutot (114.8).</a:t>
-            </a:r>
-          </a:p>
-          <a:p>
-            <a:pPr>
-              <a:spcAft>
-                <a:spcPts val="800"/>
-              </a:spcAft>
-              <a:defRPr sz="1050">
-                <a:solidFill>
-                  <a:srgbClr val="0F172A"/>
-                </a:solidFill>
-              </a:defRPr>
-            </a:pPr>
-            <a:r>
-              <a:t>✔ Instant lead-time button toggle with smooth real-time SVG re-rendering.</a:t>
-            </a:r>
-          </a:p>
-        </p:txBody>
-      </p:sp>
-      <p:sp>
-        <p:nvSpPr>
-          <p:cNvPr id="8" name="Rounded Rectangle 7"/>
-          <p:cNvSpPr/>
+            <a:pPr algn="ctr">
+              <a:defRPr sz="2200" b="1">
+                <a:solidFill>
+                  <a:srgbClr val="000000"/>
+                </a:solidFill>
+                <a:latin typeface="Arial"/>
+              </a:defRPr>
+            </a:pPr>
+            <a:r>
+              <a:t>RESULT</a:t>
+            </a:r>
+          </a:p>
+        </p:txBody>
+      </p:sp>
+      <p:pic>
+        <p:nvPicPr>
+          <p:cNvPr id="8" name="Picture 7" descr="demo_chart_screenshot.png"/>
+          <p:cNvPicPr>
+            <a:picLocks noChangeAspect="1"/>
+          </p:cNvPicPr>
           <p:nvPr/>
-        </p:nvSpPr>
-        <p:spPr>
-          <a:xfrm>
-            <a:off x="4379976" y="2057400"/>
-            <a:ext cx="3429000" cy="4572000"/>
-          </a:xfrm>
-          <a:prstGeom prst="roundRect">
-            <a:avLst/>
-          </a:prstGeom>
-          <a:solidFill>
-            <a:srgbClr val="FFFFFF"/>
-          </a:solidFill>
-          <a:ln w="19050">
-            <a:solidFill>
-              <a:srgbClr val="E2E8F0"/>
-            </a:solidFill>
-          </a:ln>
-        </p:spPr>
-        <p:style>
-          <a:lnRef idx="1">
-            <a:schemeClr val="accent1"/>
-          </a:lnRef>
-          <a:fillRef idx="3">
-            <a:schemeClr val="accent1"/>
-          </a:fillRef>
-          <a:effectRef idx="2">
-            <a:schemeClr val="accent1"/>
-          </a:effectRef>
-          <a:fontRef idx="minor">
-            <a:schemeClr val="lt1"/>
-          </a:fontRef>
-        </p:style>
-        <p:txBody>
-          <a:bodyPr rtlCol="0" anchor="ctr"/>
-          <a:lstStyle/>
-          <a:p>
-            <a:pPr algn="ctr"/>
-          </a:p>
-        </p:txBody>
-      </p:sp>
-      <p:sp>
-        <p:nvSpPr>
-          <p:cNvPr id="9" name="TextBox 8"/>
-          <p:cNvSpPr txBox="1"/>
+        </p:nvPicPr>
+        <p:blipFill>
+          <a:blip r:embed="rId3"/>
+          <a:stretch>
+            <a:fillRect/>
+          </a:stretch>
+        </p:blipFill>
+        <p:spPr>
+          <a:xfrm>
+            <a:off x="548640" y="1645920"/>
+            <a:ext cx="5303520" cy="3931920"/>
+          </a:xfrm>
+          <a:prstGeom prst="rect">
+            <a:avLst/>
+          </a:prstGeom>
+        </p:spPr>
+      </p:pic>
+      <p:pic>
+        <p:nvPicPr>
+          <p:cNvPr id="9" name="Picture 8" descr="media_1789662269891.png"/>
+          <p:cNvPicPr>
+            <a:picLocks noChangeAspect="1"/>
+          </p:cNvPicPr>
           <p:nvPr/>
-        </p:nvSpPr>
-        <p:spPr>
-          <a:xfrm>
-            <a:off x="4562856" y="2194560"/>
-            <a:ext cx="3063240" cy="365760"/>
+        </p:nvPicPr>
+        <p:blipFill>
+          <a:blip r:embed="rId4"/>
+          <a:stretch>
+            <a:fillRect/>
+          </a:stretch>
+        </p:blipFill>
+        <p:spPr>
+          <a:xfrm>
+            <a:off x="6217920" y="1645920"/>
+            <a:ext cx="5394960" cy="3931920"/>
           </a:xfrm>
           <a:prstGeom prst="rect">
             <a:avLst/>
           </a:prstGeom>
-          <a:noFill/>
-        </p:spPr>
-        <p:txBody>
-          <a:bodyPr wrap="square" lIns="0" tIns="0" rIns="0" bIns="0">
-            <a:spAutoFit/>
-          </a:bodyPr>
-          <a:lstStyle/>
-          <a:p>
-            <a:pPr>
-              <a:defRPr sz="1300" b="1">
-                <a:solidFill>
-                  <a:srgbClr val="2563EB"/>
-                </a:solidFill>
-              </a:defRPr>
-            </a:pPr>
-            <a:r>
-              <a:t>2. Real-Time Scrape &amp; Outliers</a:t>
-            </a:r>
-          </a:p>
-        </p:txBody>
-      </p:sp>
+        </p:spPr>
+      </p:pic>
       <p:sp>
         <p:nvSpPr>
           <p:cNvPr id="10" name="TextBox 9"/>
@@ -7403,8 +7093,8 @@
         </p:nvSpPr>
         <p:spPr>
           <a:xfrm>
-            <a:off x="4517136" y="2560320"/>
-            <a:ext cx="3154680" cy="3931920"/>
+            <a:off x="457200" y="5760720"/>
+            <a:ext cx="11277295" cy="822960"/>
           </a:xfrm>
           <a:prstGeom prst="rect">
             <a:avLst/>
@@ -7412,231 +7102,34 @@
           <a:noFill/>
         </p:spPr>
         <p:txBody>
-          <a:bodyPr wrap="square" lIns="0" tIns="0" rIns="0" bIns="0">
+          <a:bodyPr wrap="square">
             <a:spAutoFit/>
           </a:bodyPr>
           <a:lstStyle/>
           <a:p>
-            <a:pPr>
-              <a:spcAft>
-                <a:spcPts val="800"/>
-              </a:spcAft>
-              <a:defRPr sz="1050">
-                <a:solidFill>
-                  <a:srgbClr val="0F172A"/>
-                </a:solidFill>
-              </a:defRPr>
-            </a:pPr>
-            <a:r>
-              <a:t>✔ Interactive 'Trigger Live Scrape' button simulating real-time Playwright quote harvest.</a:t>
-            </a:r>
-          </a:p>
-          <a:p>
-            <a:pPr>
-              <a:spcAft>
-                <a:spcPts val="800"/>
-              </a:spcAft>
-              <a:defRPr sz="1050">
-                <a:solidFill>
-                  <a:srgbClr val="0F172A"/>
-                </a:solidFill>
-              </a:defRPr>
-            </a:pPr>
-            <a:r>
-              <a:t>✔ Exponential Moving Average (EMA) prevents abrupt index swings during continuous live triggers.</a:t>
-            </a:r>
-          </a:p>
-          <a:p>
-            <a:pPr>
-              <a:spcAft>
-                <a:spcPts val="800"/>
-              </a:spcAft>
-              <a:defRPr sz="1050">
-                <a:solidFill>
-                  <a:srgbClr val="0F172A"/>
-                </a:solidFill>
-              </a:defRPr>
-            </a:pPr>
-            <a:r>
-              <a:t>✔ Automated Z-score modal displaying flagged dynamic surge quotes (|Z| &gt; 3.0) with live timestamps.</a:t>
-            </a:r>
-          </a:p>
-          <a:p>
-            <a:pPr>
-              <a:spcAft>
-                <a:spcPts val="800"/>
-              </a:spcAft>
-              <a:defRPr sz="1050">
-                <a:solidFill>
-                  <a:srgbClr val="0F172A"/>
-                </a:solidFill>
-              </a:defRPr>
-            </a:pPr>
-            <a:r>
-              <a:t>✔ 12-Corridor real-time rate table with individual route inflation percentages.</a:t>
-            </a:r>
-          </a:p>
-        </p:txBody>
-      </p:sp>
-      <p:sp>
-        <p:nvSpPr>
-          <p:cNvPr id="11" name="Rounded Rectangle 10"/>
-          <p:cNvSpPr/>
-          <p:nvPr/>
-        </p:nvSpPr>
-        <p:spPr>
-          <a:xfrm>
-            <a:off x="8028432" y="2057400"/>
-            <a:ext cx="3429000" cy="4572000"/>
-          </a:xfrm>
-          <a:prstGeom prst="roundRect">
-            <a:avLst/>
-          </a:prstGeom>
-          <a:solidFill>
-            <a:srgbClr val="FFFFFF"/>
-          </a:solidFill>
-          <a:ln w="19050">
-            <a:solidFill>
-              <a:srgbClr val="E2E8F0"/>
-            </a:solidFill>
-          </a:ln>
-        </p:spPr>
-        <p:style>
-          <a:lnRef idx="1">
-            <a:schemeClr val="accent1"/>
-          </a:lnRef>
-          <a:fillRef idx="3">
-            <a:schemeClr val="accent1"/>
-          </a:fillRef>
-          <a:effectRef idx="2">
-            <a:schemeClr val="accent1"/>
-          </a:effectRef>
-          <a:fontRef idx="minor">
-            <a:schemeClr val="lt1"/>
-          </a:fontRef>
-        </p:style>
-        <p:txBody>
-          <a:bodyPr rtlCol="0" anchor="ctr"/>
-          <a:lstStyle/>
-          <a:p>
-            <a:pPr algn="ctr"/>
-          </a:p>
-        </p:txBody>
-      </p:sp>
-      <p:sp>
-        <p:nvSpPr>
-          <p:cNvPr id="12" name="TextBox 11"/>
-          <p:cNvSpPr txBox="1"/>
-          <p:nvPr/>
-        </p:nvSpPr>
-        <p:spPr>
-          <a:xfrm>
-            <a:off x="8211312" y="2194560"/>
-            <a:ext cx="3063240" cy="365760"/>
-          </a:xfrm>
-          <a:prstGeom prst="rect">
-            <a:avLst/>
-          </a:prstGeom>
-          <a:noFill/>
-        </p:spPr>
-        <p:txBody>
-          <a:bodyPr wrap="square" lIns="0" tIns="0" rIns="0" bIns="0">
-            <a:spAutoFit/>
-          </a:bodyPr>
-          <a:lstStyle/>
-          <a:p>
-            <a:pPr>
-              <a:defRPr sz="1300" b="1">
-                <a:solidFill>
-                  <a:srgbClr val="2563EB"/>
-                </a:solidFill>
-              </a:defRPr>
-            </a:pPr>
-            <a:r>
-              <a:t>3. Provenance Audit Vault</a:t>
-            </a:r>
-          </a:p>
-        </p:txBody>
-      </p:sp>
-      <p:sp>
-        <p:nvSpPr>
-          <p:cNvPr id="13" name="TextBox 12"/>
-          <p:cNvSpPr txBox="1"/>
-          <p:nvPr/>
-        </p:nvSpPr>
-        <p:spPr>
-          <a:xfrm>
-            <a:off x="8165592" y="2560320"/>
-            <a:ext cx="3154680" cy="3931920"/>
-          </a:xfrm>
-          <a:prstGeom prst="rect">
-            <a:avLst/>
-          </a:prstGeom>
-          <a:noFill/>
-        </p:spPr>
-        <p:txBody>
-          <a:bodyPr wrap="square" lIns="0" tIns="0" rIns="0" bIns="0">
-            <a:spAutoFit/>
-          </a:bodyPr>
-          <a:lstStyle/>
-          <a:p>
-            <a:pPr>
-              <a:spcAft>
-                <a:spcPts val="800"/>
-              </a:spcAft>
-              <a:defRPr sz="1050">
-                <a:solidFill>
-                  <a:srgbClr val="0F172A"/>
-                </a:solidFill>
-              </a:defRPr>
-            </a:pPr>
-            <a:r>
-              <a:t>✔ MoSPI compliance modal displaying SHA-256 cryptographic hashes for every scrape batch.</a:t>
-            </a:r>
-          </a:p>
-          <a:p>
-            <a:pPr>
-              <a:spcAft>
-                <a:spcPts val="800"/>
-              </a:spcAft>
-              <a:defRPr sz="1050">
-                <a:solidFill>
-                  <a:srgbClr val="0F172A"/>
-                </a:solidFill>
-              </a:defRPr>
-            </a:pPr>
-            <a:r>
-              <a:t>✔ Auditable metadata: UTC timestamps, sample record counts, operator user-agents, and formula IDs.</a:t>
-            </a:r>
-          </a:p>
-          <a:p>
-            <a:pPr>
-              <a:spcAft>
-                <a:spcPts val="800"/>
-              </a:spcAft>
-              <a:defRPr sz="1050">
-                <a:solidFill>
-                  <a:srgbClr val="0F172A"/>
-                </a:solidFill>
-              </a:defRPr>
-            </a:pPr>
-            <a:r>
-              <a:t>✔ Export functionality: Instant CSV / JSON download formatted to MoSPI national data standards.</a:t>
-            </a:r>
-          </a:p>
-          <a:p>
-            <a:pPr>
-              <a:spcAft>
-                <a:spcPts val="800"/>
-              </a:spcAft>
-              <a:defRPr sz="1050">
-                <a:solidFill>
-                  <a:srgbClr val="0F172A"/>
-                </a:solidFill>
-              </a:defRPr>
-            </a:pPr>
-            <a:r>
-              <a:t>✔ Immutable record logs preventing retroactive price tampering or data manipulation.</a:t>
+            <a:pPr algn="ctr">
+              <a:defRPr sz="1600" b="1">
+                <a:solidFill>
+                  <a:srgbClr val="000000"/>
+                </a:solidFill>
+                <a:latin typeface="Arial"/>
+              </a:defRPr>
+            </a:pPr>
+            <a:r>
+              <a:t>Here’s the link to AirIntel India — your gateway to real-time airfare CPI intelligence:</a:t>
+            </a:r>
+          </a:p>
+          <a:p>
+            <a:pPr algn="ctr">
+              <a:defRPr sz="2200" b="1" u="sng">
+                <a:solidFill>
+                  <a:srgbClr val="1D4ED8"/>
+                </a:solidFill>
+                <a:latin typeface="Arial"/>
+              </a:defRPr>
+            </a:pPr>
+            <a:r>
+              <a:t>https://sihwinners.vercel.app</a:t>
             </a:r>
           </a:p>
         </p:txBody>
@@ -7661,72 +7154,23 @@
       <p:grpSpPr/>
       <p:sp>
         <p:nvSpPr>
-          <p:cNvPr id="2" name="TextBox 1"/>
-          <p:cNvSpPr txBox="1"/>
-          <p:nvPr/>
-        </p:nvSpPr>
-        <p:spPr>
-          <a:xfrm>
-            <a:off x="731520" y="365760"/>
-            <a:ext cx="10728655" cy="822960"/>
-          </a:xfrm>
-          <a:prstGeom prst="rect">
-            <a:avLst/>
-          </a:prstGeom>
-          <a:noFill/>
-        </p:spPr>
-        <p:txBody>
-          <a:bodyPr wrap="square" lIns="0" tIns="0" rIns="0" bIns="0">
-            <a:spAutoFit/>
-          </a:bodyPr>
-          <a:lstStyle/>
-          <a:p>
-            <a:pPr>
-              <a:defRPr sz="1000" b="1">
-                <a:solidFill>
-                  <a:srgbClr val="2563EB"/>
-                </a:solidFill>
-              </a:defRPr>
-            </a:pPr>
-            <a:r>
-              <a:t>SIH 2026 | PS ID: 26056</a:t>
-            </a:r>
-          </a:p>
-          <a:p>
-            <a:pPr>
-              <a:defRPr sz="2200" b="1">
-                <a:solidFill>
-                  <a:srgbClr val="0F172A"/>
-                </a:solidFill>
-              </a:defRPr>
-            </a:pPr>
-            <a:r>
-              <a:t>Research Foundations, Official Literature &amp; Standards</a:t>
-            </a:r>
-          </a:p>
-        </p:txBody>
-      </p:sp>
-      <p:sp>
-        <p:nvSpPr>
-          <p:cNvPr id="3" name="Rounded Rectangle 2"/>
+          <p:cNvPr id="2" name="Rectangle 1"/>
           <p:cNvSpPr/>
           <p:nvPr/>
         </p:nvSpPr>
         <p:spPr>
           <a:xfrm>
-            <a:off x="731520" y="1280160"/>
-            <a:ext cx="5212080" cy="2468880"/>
-          </a:xfrm>
-          <a:prstGeom prst="roundRect">
+            <a:off x="0" y="0"/>
+            <a:ext cx="12191695" cy="6858000"/>
+          </a:xfrm>
+          <a:prstGeom prst="rect">
             <a:avLst/>
           </a:prstGeom>
           <a:solidFill>
             <a:srgbClr val="FFFFFF"/>
           </a:solidFill>
-          <a:ln w="19050">
-            <a:solidFill>
-              <a:srgbClr val="E2E8F0"/>
-            </a:solidFill>
+          <a:ln>
+            <a:noFill/>
           </a:ln>
         </p:spPr>
         <p:style>
@@ -7753,14 +7197,14 @@
       </p:sp>
       <p:sp>
         <p:nvSpPr>
-          <p:cNvPr id="4" name="TextBox 3"/>
+          <p:cNvPr id="3" name="TextBox 2"/>
           <p:cNvSpPr txBox="1"/>
           <p:nvPr/>
         </p:nvSpPr>
         <p:spPr>
           <a:xfrm>
-            <a:off x="914400" y="1417320"/>
-            <a:ext cx="4846320" cy="365760"/>
+            <a:off x="2286000" y="182880"/>
+            <a:ext cx="7589520" cy="914400"/>
           </a:xfrm>
           <a:prstGeom prst="rect">
             <a:avLst/>
@@ -7768,113 +7212,68 @@
           <a:noFill/>
         </p:spPr>
         <p:txBody>
-          <a:bodyPr wrap="square" lIns="0" tIns="0" rIns="0" bIns="0">
+          <a:bodyPr wrap="square" lIns="0" rIns="0" tIns="0" bIns="0">
             <a:spAutoFit/>
           </a:bodyPr>
           <a:lstStyle/>
           <a:p>
-            <a:pPr>
-              <a:defRPr sz="1300" b="1">
-                <a:solidFill>
-                  <a:srgbClr val="2563EB"/>
-                </a:solidFill>
-              </a:defRPr>
-            </a:pPr>
-            <a:r>
-              <a:t>1. UN / ILO CONSUMER PRICE INDEX MANUAL (2020)</a:t>
-            </a:r>
-          </a:p>
-        </p:txBody>
-      </p:sp>
-      <p:sp>
-        <p:nvSpPr>
-          <p:cNvPr id="5" name="TextBox 4"/>
-          <p:cNvSpPr txBox="1"/>
+            <a:pPr algn="ctr">
+              <a:defRPr sz="2800" b="1">
+                <a:solidFill>
+                  <a:srgbClr val="1B365D"/>
+                </a:solidFill>
+                <a:latin typeface="Times New Roman"/>
+              </a:defRPr>
+            </a:pPr>
+            <a:r>
+              <a:t>RESEARCH AND REFERENCES</a:t>
+            </a:r>
+          </a:p>
+        </p:txBody>
+      </p:sp>
+      <p:pic>
+        <p:nvPicPr>
+          <p:cNvPr id="4" name="Picture 3" descr="page_1_img_2.png"/>
+          <p:cNvPicPr>
+            <a:picLocks noChangeAspect="1"/>
+          </p:cNvPicPr>
           <p:nvPr/>
-        </p:nvSpPr>
-        <p:spPr>
-          <a:xfrm>
-            <a:off x="868680" y="1737360"/>
-            <a:ext cx="4937760" cy="1920240"/>
+        </p:nvPicPr>
+        <p:blipFill>
+          <a:blip r:embed="rId2"/>
+          <a:stretch>
+            <a:fillRect/>
+          </a:stretch>
+        </p:blipFill>
+        <p:spPr>
+          <a:xfrm>
+            <a:off x="10241280" y="164592"/>
+            <a:ext cx="1645920" cy="868680"/>
           </a:xfrm>
           <a:prstGeom prst="rect">
             <a:avLst/>
           </a:prstGeom>
-          <a:noFill/>
-        </p:spPr>
-        <p:txBody>
-          <a:bodyPr wrap="square">
-            <a:spAutoFit/>
-          </a:bodyPr>
-          <a:lstStyle/>
-          <a:p>
-            <a:pPr>
-              <a:spcAft>
-                <a:spcPts val="400"/>
-              </a:spcAft>
-              <a:defRPr sz="1000">
-                <a:solidFill>
-                  <a:srgbClr val="0F172A"/>
-                </a:solidFill>
-              </a:defRPr>
-            </a:pPr>
-            <a:r>
-              <a:t>• Authors &amp; Publishers: International Monetary Fund (IMF), ILO, OECD, Eurostat, UN Economic Commission for Europe, World Bank.</a:t>
-            </a:r>
-          </a:p>
-          <a:p>
-            <a:pPr>
-              <a:spcAft>
-                <a:spcPts val="400"/>
-              </a:spcAft>
-              <a:defRPr sz="1000">
-                <a:solidFill>
-                  <a:srgbClr val="0F172A"/>
-                </a:solidFill>
-              </a:defRPr>
-            </a:pPr>
-            <a:r>
-              <a:t>• Key Recommendation (Chapter 10): Strongly mandates elementary geometric aggregation (Jevons Index) over arithmetic means (Dutot / Carli) when expenditure weights are unavailable.</a:t>
-            </a:r>
-          </a:p>
-          <a:p>
-            <a:pPr>
-              <a:spcAft>
-                <a:spcPts val="400"/>
-              </a:spcAft>
-              <a:defRPr sz="1000">
-                <a:solidFill>
-                  <a:srgbClr val="0F172A"/>
-                </a:solidFill>
-              </a:defRPr>
-            </a:pPr>
-            <a:r>
-              <a:t>• Axiomatic Property: Ensures transitivity, time reversal test satisfaction, and eliminates upward consumer substitution bias in volatile online price series.</a:t>
-            </a:r>
-          </a:p>
-        </p:txBody>
-      </p:sp>
-      <p:sp>
-        <p:nvSpPr>
-          <p:cNvPr id="6" name="Rounded Rectangle 5"/>
+        </p:spPr>
+      </p:pic>
+      <p:sp>
+        <p:nvSpPr>
+          <p:cNvPr id="5" name="Rectangle 4"/>
           <p:cNvSpPr/>
           <p:nvPr/>
         </p:nvSpPr>
         <p:spPr>
           <a:xfrm>
-            <a:off x="6217920" y="1280160"/>
-            <a:ext cx="5212080" cy="2468880"/>
-          </a:xfrm>
-          <a:prstGeom prst="roundRect">
+            <a:off x="320040" y="1234440"/>
+            <a:ext cx="5715000" cy="2560320"/>
+          </a:xfrm>
+          <a:prstGeom prst="rect">
             <a:avLst/>
           </a:prstGeom>
           <a:solidFill>
-            <a:srgbClr val="FFFFFF"/>
+            <a:srgbClr val="BAE6FD"/>
           </a:solidFill>
-          <a:ln w="19050">
-            <a:solidFill>
-              <a:srgbClr val="E2E8F0"/>
-            </a:solidFill>
+          <a:ln>
+            <a:noFill/>
           </a:ln>
         </p:spPr>
         <p:style>
@@ -7901,14 +7300,14 @@
       </p:sp>
       <p:sp>
         <p:nvSpPr>
-          <p:cNvPr id="7" name="TextBox 6"/>
+          <p:cNvPr id="6" name="TextBox 5"/>
           <p:cNvSpPr txBox="1"/>
           <p:nvPr/>
         </p:nvSpPr>
         <p:spPr>
           <a:xfrm>
-            <a:off x="6400800" y="1417320"/>
-            <a:ext cx="4846320" cy="365760"/>
+            <a:off x="548640" y="1417320"/>
+            <a:ext cx="5257800" cy="2286000"/>
           </a:xfrm>
           <a:prstGeom prst="rect">
             <a:avLst/>
@@ -7921,108 +7320,74 @@
           </a:bodyPr>
           <a:lstStyle/>
           <a:p>
+            <a:pPr algn="ctr">
+              <a:spcAft>
+                <a:spcPts val="800"/>
+              </a:spcAft>
+              <a:defRPr sz="2000" b="1">
+                <a:solidFill>
+                  <a:srgbClr val="000000"/>
+                </a:solidFill>
+                <a:latin typeface="Arial"/>
+              </a:defRPr>
+            </a:pPr>
+            <a:r>
+              <a:t>SUPPORTING RESEARCH PAPERS</a:t>
+            </a:r>
+          </a:p>
+          <a:p>
             <a:pPr>
-              <a:defRPr sz="1300" b="1">
-                <a:solidFill>
-                  <a:srgbClr val="2563EB"/>
-                </a:solidFill>
-              </a:defRPr>
-            </a:pPr>
-            <a:r>
-              <a:t>2. DGCA DOMESTIC AIR TRAFFIC REPORTS (2025-2026)</a:t>
-            </a:r>
-          </a:p>
-        </p:txBody>
-      </p:sp>
-      <p:sp>
-        <p:nvSpPr>
-          <p:cNvPr id="8" name="TextBox 7"/>
-          <p:cNvSpPr txBox="1"/>
-          <p:nvPr/>
-        </p:nvSpPr>
-        <p:spPr>
-          <a:xfrm>
-            <a:off x="6355080" y="1737360"/>
-            <a:ext cx="4937760" cy="1920240"/>
-          </a:xfrm>
-          <a:prstGeom prst="rect">
-            <a:avLst/>
-          </a:prstGeom>
-          <a:noFill/>
-        </p:spPr>
-        <p:txBody>
-          <a:bodyPr wrap="square">
-            <a:spAutoFit/>
-          </a:bodyPr>
-          <a:lstStyle/>
+              <a:spcAft>
+                <a:spcPts val="600"/>
+              </a:spcAft>
+              <a:defRPr sz="1100">
+                <a:solidFill>
+                  <a:srgbClr val="000000"/>
+                </a:solidFill>
+                <a:latin typeface="Arial"/>
+              </a:defRPr>
+            </a:pPr>
+            <a:r>
+              <a:t>• Cavallo, A., &amp; Rigobon, R. (2016). 'The Billion Prices Project: Using Online Data for Measurement and Research.' Journal of Economic Perspectives.</a:t>
+            </a:r>
+          </a:p>
           <a:p>
             <a:pPr>
               <a:spcAft>
-                <a:spcPts val="400"/>
-              </a:spcAft>
-              <a:defRPr sz="1000">
-                <a:solidFill>
-                  <a:srgbClr val="0F172A"/>
-                </a:solidFill>
-              </a:defRPr>
-            </a:pPr>
-            <a:r>
-              <a:t>• Data Source: Directorate General of Civil Aviation, Government of India - Monthly Scheduled Domestic Passenger Traffic Statistics.</a:t>
-            </a:r>
-          </a:p>
-          <a:p>
-            <a:pPr>
-              <a:spcAft>
-                <a:spcPts val="400"/>
-              </a:spcAft>
-              <a:defRPr sz="1000">
-                <a:solidFill>
-                  <a:srgbClr val="0F172A"/>
-                </a:solidFill>
-              </a:defRPr>
-            </a:pPr>
-            <a:r>
-              <a:t>• Weight Calibration: City-pair passenger volume data used to derive empirical Laspeyres corridor weights (e.g., Delhi-Mumbai handles ~18.5% of total metro seat volume).</a:t>
-            </a:r>
-          </a:p>
-          <a:p>
-            <a:pPr>
-              <a:spcAft>
-                <a:spcPts val="400"/>
-              </a:spcAft>
-              <a:defRPr sz="1000">
-                <a:solidFill>
-                  <a:srgbClr val="0F172A"/>
-                </a:solidFill>
-              </a:defRPr>
-            </a:pPr>
-            <a:r>
-              <a:t>• Statistical Justification: Prevents secondary low-density routes from disproportionately distorting the national inflation benchmark.</a:t>
-            </a:r>
-          </a:p>
-        </p:txBody>
-      </p:sp>
-      <p:sp>
-        <p:nvSpPr>
-          <p:cNvPr id="9" name="Rounded Rectangle 8"/>
+                <a:spcPts val="600"/>
+              </a:spcAft>
+              <a:defRPr sz="1100">
+                <a:solidFill>
+                  <a:srgbClr val="000000"/>
+                </a:solidFill>
+                <a:latin typeface="Arial"/>
+              </a:defRPr>
+            </a:pPr>
+            <a:r>
+              <a:t>• UN, ILO, IMF, OECD, Eurostat, World Bank (2020). Consumer Price Index Manual: Concepts and Methods, Chapter 10 (Elementary Indices).</a:t>
+            </a:r>
+          </a:p>
+        </p:txBody>
+      </p:sp>
+      <p:sp>
+        <p:nvSpPr>
+          <p:cNvPr id="7" name="Rectangle 6"/>
           <p:cNvSpPr/>
           <p:nvPr/>
         </p:nvSpPr>
         <p:spPr>
           <a:xfrm>
-            <a:off x="731520" y="3931920"/>
-            <a:ext cx="5212080" cy="2468880"/>
-          </a:xfrm>
-          <a:prstGeom prst="roundRect">
+            <a:off x="6172200" y="1234440"/>
+            <a:ext cx="5715000" cy="2560320"/>
+          </a:xfrm>
+          <a:prstGeom prst="rect">
             <a:avLst/>
           </a:prstGeom>
           <a:solidFill>
-            <a:srgbClr val="FFFFFF"/>
+            <a:srgbClr val="0A1931"/>
           </a:solidFill>
-          <a:ln w="19050">
-            <a:solidFill>
-              <a:srgbClr val="E2E8F0"/>
-            </a:solidFill>
+          <a:ln>
+            <a:noFill/>
           </a:ln>
         </p:spPr>
         <p:style>
@@ -8049,14 +7414,14 @@
       </p:sp>
       <p:sp>
         <p:nvSpPr>
-          <p:cNvPr id="10" name="TextBox 9"/>
+          <p:cNvPr id="8" name="TextBox 7"/>
           <p:cNvSpPr txBox="1"/>
           <p:nvPr/>
         </p:nvSpPr>
         <p:spPr>
           <a:xfrm>
-            <a:off x="914400" y="4069080"/>
-            <a:ext cx="4846320" cy="365760"/>
+            <a:off x="6400800" y="1417320"/>
+            <a:ext cx="5257800" cy="2286000"/>
           </a:xfrm>
           <a:prstGeom prst="rect">
             <a:avLst/>
@@ -8069,108 +7434,106 @@
           </a:bodyPr>
           <a:lstStyle/>
           <a:p>
-            <a:pPr>
-              <a:defRPr sz="1300" b="1">
-                <a:solidFill>
-                  <a:srgbClr val="2563EB"/>
-                </a:solidFill>
-              </a:defRPr>
-            </a:pPr>
-            <a:r>
-              <a:t>3. MIT BILLION PRICES PROJECT &amp; WEB SCRAPING IN CPI</a:t>
-            </a:r>
-          </a:p>
-        </p:txBody>
-      </p:sp>
-      <p:sp>
-        <p:nvSpPr>
-          <p:cNvPr id="11" name="TextBox 10"/>
-          <p:cNvSpPr txBox="1"/>
-          <p:nvPr/>
-        </p:nvSpPr>
-        <p:spPr>
-          <a:xfrm>
-            <a:off x="868680" y="4389120"/>
-            <a:ext cx="4937760" cy="1920240"/>
-          </a:xfrm>
-          <a:prstGeom prst="rect">
-            <a:avLst/>
-          </a:prstGeom>
-          <a:noFill/>
-        </p:spPr>
-        <p:txBody>
-          <a:bodyPr wrap="square">
-            <a:spAutoFit/>
-          </a:bodyPr>
-          <a:lstStyle/>
-          <a:p>
-            <a:pPr>
+            <a:pPr algn="ctr">
+              <a:spcAft>
+                <a:spcPts val="800"/>
+              </a:spcAft>
+              <a:defRPr sz="2000" b="1">
+                <a:solidFill>
+                  <a:srgbClr val="FFFFFF"/>
+                </a:solidFill>
+                <a:latin typeface="Arial"/>
+              </a:defRPr>
+            </a:pPr>
+            <a:r>
+              <a:t>DATA SOURCES</a:t>
+            </a:r>
+          </a:p>
+          <a:p>
+            <a:pPr algn="ctr">
               <a:spcAft>
                 <a:spcPts val="400"/>
               </a:spcAft>
-              <a:defRPr sz="1000">
-                <a:solidFill>
-                  <a:srgbClr val="0F172A"/>
-                </a:solidFill>
-              </a:defRPr>
-            </a:pPr>
-            <a:r>
-              <a:t>• Foundational Research: Cavallo, A., &amp; Rigobon, R. (2016). 'The Billion Prices Project: Using Online Data for Measurement and Research.' Journal of Economic Perspectives.</a:t>
-            </a:r>
-          </a:p>
-          <a:p>
-            <a:pPr>
+              <a:defRPr sz="1050">
+                <a:solidFill>
+                  <a:srgbClr val="DCE6FA"/>
+                </a:solidFill>
+                <a:latin typeface="Arial"/>
+              </a:defRPr>
+            </a:pPr>
+            <a:r>
+              <a:t>https://www.dgca.gov.in/ (DGCA Monthly Scheduled Domestic Passenger Traffic)</a:t>
+            </a:r>
+          </a:p>
+          <a:p>
+            <a:pPr algn="ctr">
               <a:spcAft>
                 <a:spcPts val="400"/>
               </a:spcAft>
-              <a:defRPr sz="1000">
-                <a:solidFill>
-                  <a:srgbClr val="0F172A"/>
-                </a:solidFill>
-              </a:defRPr>
-            </a:pPr>
-            <a:r>
-              <a:t>• Methodology Proof: Proves that high-frequency automated scraping mirrors official offline price movements with zero time lag.</a:t>
-            </a:r>
-          </a:p>
-          <a:p>
-            <a:pPr>
+              <a:defRPr sz="1050">
+                <a:solidFill>
+                  <a:srgbClr val="DCE6FA"/>
+                </a:solidFill>
+                <a:latin typeface="Arial"/>
+              </a:defRPr>
+            </a:pPr>
+            <a:r>
+              <a:t>https://www.mospi.gov.in/ (CSO Consumer Price Index Manual &amp; Guidelines)</a:t>
+            </a:r>
+          </a:p>
+          <a:p>
+            <a:pPr algn="ctr">
               <a:spcAft>
                 <a:spcPts val="400"/>
               </a:spcAft>
-              <a:defRPr sz="1000">
-                <a:solidFill>
-                  <a:srgbClr val="0F172A"/>
-                </a:solidFill>
-              </a:defRPr>
-            </a:pPr>
-            <a:r>
-              <a:t>• Global National Adoption: UK Office for National Statistics (ONS), Statistics Netherlands (CBS), and US BLS have actively institutionalized web scraping for transport CPI.</a:t>
-            </a:r>
-          </a:p>
-        </p:txBody>
-      </p:sp>
-      <p:sp>
-        <p:nvSpPr>
-          <p:cNvPr id="12" name="Rounded Rectangle 11"/>
+              <a:defRPr sz="1050">
+                <a:solidFill>
+                  <a:srgbClr val="DCE6FA"/>
+                </a:solidFill>
+                <a:latin typeface="Arial"/>
+              </a:defRPr>
+            </a:pPr>
+            <a:r>
+              <a:t>https://www.airindia.com/ &amp; https://www.goindigo.in/ (Direct Carrier Portals)</a:t>
+            </a:r>
+          </a:p>
+          <a:p>
+            <a:pPr algn="ctr">
+              <a:spcAft>
+                <a:spcPts val="400"/>
+              </a:spcAft>
+              <a:defRPr sz="1050">
+                <a:solidFill>
+                  <a:srgbClr val="DCE6FA"/>
+                </a:solidFill>
+                <a:latin typeface="Arial"/>
+              </a:defRPr>
+            </a:pPr>
+            <a:r>
+              <a:t>https://www.makemytrip.com/ (Online Travel Aggregator Non-Stop Domestic Flight Rates)</a:t>
+            </a:r>
+          </a:p>
+        </p:txBody>
+      </p:sp>
+      <p:sp>
+        <p:nvSpPr>
+          <p:cNvPr id="9" name="Rectangle 8"/>
           <p:cNvSpPr/>
           <p:nvPr/>
         </p:nvSpPr>
         <p:spPr>
           <a:xfrm>
-            <a:off x="6217920" y="3931920"/>
-            <a:ext cx="5212080" cy="2468880"/>
-          </a:xfrm>
-          <a:prstGeom prst="roundRect">
+            <a:off x="320040" y="3977639"/>
+            <a:ext cx="5715000" cy="2560320"/>
+          </a:xfrm>
+          <a:prstGeom prst="rect">
             <a:avLst/>
           </a:prstGeom>
           <a:solidFill>
-            <a:srgbClr val="FFFFFF"/>
+            <a:srgbClr val="0F172A"/>
           </a:solidFill>
-          <a:ln w="19050">
-            <a:solidFill>
-              <a:srgbClr val="E2E8F0"/>
-            </a:solidFill>
+          <a:ln>
+            <a:noFill/>
           </a:ln>
         </p:spPr>
         <p:style>
@@ -8197,14 +7560,14 @@
       </p:sp>
       <p:sp>
         <p:nvSpPr>
-          <p:cNvPr id="13" name="TextBox 12"/>
+          <p:cNvPr id="10" name="TextBox 9"/>
           <p:cNvSpPr txBox="1"/>
           <p:nvPr/>
         </p:nvSpPr>
         <p:spPr>
           <a:xfrm>
-            <a:off x="6400800" y="4069080"/>
-            <a:ext cx="4846320" cy="365760"/>
+            <a:off x="548640" y="4160519"/>
+            <a:ext cx="5257800" cy="2286000"/>
           </a:xfrm>
           <a:prstGeom prst="rect">
             <a:avLst/>
@@ -8217,29 +7580,140 @@
           </a:bodyPr>
           <a:lstStyle/>
           <a:p>
+            <a:pPr algn="ctr">
+              <a:spcAft>
+                <a:spcPts val="800"/>
+              </a:spcAft>
+              <a:defRPr sz="2000" b="1">
+                <a:solidFill>
+                  <a:srgbClr val="C7D2FE"/>
+                </a:solidFill>
+                <a:latin typeface="Arial"/>
+              </a:defRPr>
+            </a:pPr>
+            <a:r>
+              <a:t>MARKET RESEARCH</a:t>
+            </a:r>
+          </a:p>
+          <a:p>
             <a:pPr>
-              <a:defRPr sz="1300" b="1">
-                <a:solidFill>
-                  <a:srgbClr val="2563EB"/>
-                </a:solidFill>
-              </a:defRPr>
-            </a:pPr>
-            <a:r>
-              <a:t>4. MOSPI / NSO BASE YEAR (2012=100) GUIDELINES</a:t>
-            </a:r>
-          </a:p>
-        </p:txBody>
-      </p:sp>
-      <p:sp>
-        <p:nvSpPr>
-          <p:cNvPr id="14" name="TextBox 13"/>
+              <a:spcAft>
+                <a:spcPts val="400"/>
+              </a:spcAft>
+              <a:defRPr sz="1050">
+                <a:solidFill>
+                  <a:srgbClr val="FFFFFF"/>
+                </a:solidFill>
+                <a:latin typeface="Arial"/>
+              </a:defRPr>
+            </a:pPr>
+            <a:r>
+              <a:t>• Indian domestic air passenger traffic is projected to grow at &gt;15% CAGR (2024–2030).</a:t>
+            </a:r>
+          </a:p>
+          <a:p>
+            <a:pPr>
+              <a:spcAft>
+                <a:spcPts val="400"/>
+              </a:spcAft>
+              <a:defRPr sz="1050">
+                <a:solidFill>
+                  <a:srgbClr val="FFFFFF"/>
+                </a:solidFill>
+                <a:latin typeface="Arial"/>
+              </a:defRPr>
+            </a:pPr>
+            <a:r>
+              <a:t>• Algorithmic dynamic pricing creates massive intraday and lead-time fare dispersion.</a:t>
+            </a:r>
+          </a:p>
+          <a:p>
+            <a:pPr>
+              <a:spcAft>
+                <a:spcPts val="400"/>
+              </a:spcAft>
+              <a:defRPr sz="1050">
+                <a:solidFill>
+                  <a:srgbClr val="FFFFFF"/>
+                </a:solidFill>
+                <a:latin typeface="Arial"/>
+              </a:defRPr>
+            </a:pPr>
+            <a:r>
+              <a:t>• Zero automated tools currently exist in India for daily algorithmic CPI airfare tracking.</a:t>
+            </a:r>
+          </a:p>
+          <a:p>
+            <a:pPr>
+              <a:spcAft>
+                <a:spcPts val="400"/>
+              </a:spcAft>
+              <a:defRPr sz="1050">
+                <a:solidFill>
+                  <a:srgbClr val="FFFFFF"/>
+                </a:solidFill>
+                <a:latin typeface="Arial"/>
+              </a:defRPr>
+            </a:pPr>
+            <a:r>
+              <a:t>• AirIntel India fills the critical 15-day MoSPI manual survey lag with zero latency.</a:t>
+            </a:r>
+          </a:p>
+        </p:txBody>
+      </p:sp>
+      <p:sp>
+        <p:nvSpPr>
+          <p:cNvPr id="11" name="Rectangle 10"/>
+          <p:cNvSpPr/>
+          <p:nvPr/>
+        </p:nvSpPr>
+        <p:spPr>
+          <a:xfrm>
+            <a:off x="6172200" y="3977639"/>
+            <a:ext cx="5715000" cy="2560320"/>
+          </a:xfrm>
+          <a:prstGeom prst="rect">
+            <a:avLst/>
+          </a:prstGeom>
+          <a:solidFill>
+            <a:srgbClr val="7DD3FC"/>
+          </a:solidFill>
+          <a:ln>
+            <a:noFill/>
+          </a:ln>
+        </p:spPr>
+        <p:style>
+          <a:lnRef idx="1">
+            <a:schemeClr val="accent1"/>
+          </a:lnRef>
+          <a:fillRef idx="3">
+            <a:schemeClr val="accent1"/>
+          </a:fillRef>
+          <a:effectRef idx="2">
+            <a:schemeClr val="accent1"/>
+          </a:effectRef>
+          <a:fontRef idx="minor">
+            <a:schemeClr val="lt1"/>
+          </a:fontRef>
+        </p:style>
+        <p:txBody>
+          <a:bodyPr rtlCol="0" anchor="ctr"/>
+          <a:lstStyle/>
+          <a:p>
+            <a:pPr algn="ctr"/>
+          </a:p>
+        </p:txBody>
+      </p:sp>
+      <p:sp>
+        <p:nvSpPr>
+          <p:cNvPr id="12" name="TextBox 11"/>
           <p:cNvSpPr txBox="1"/>
           <p:nvPr/>
         </p:nvSpPr>
         <p:spPr>
           <a:xfrm>
-            <a:off x="6355080" y="4389120"/>
-            <a:ext cx="4937760" cy="1920240"/>
+            <a:off x="6400800" y="4160519"/>
+            <a:ext cx="5257800" cy="2286000"/>
           </a:xfrm>
           <a:prstGeom prst="rect">
             <a:avLst/>
@@ -8247,23 +7721,40 @@
           <a:noFill/>
         </p:spPr>
         <p:txBody>
-          <a:bodyPr wrap="square">
+          <a:bodyPr wrap="square" lIns="0" tIns="0" rIns="0" bIns="0">
             <a:spAutoFit/>
           </a:bodyPr>
           <a:lstStyle/>
           <a:p>
+            <a:pPr algn="ctr">
+              <a:spcAft>
+                <a:spcPts val="800"/>
+              </a:spcAft>
+              <a:defRPr sz="2000" b="1">
+                <a:solidFill>
+                  <a:srgbClr val="000000"/>
+                </a:solidFill>
+                <a:latin typeface="Arial"/>
+              </a:defRPr>
+            </a:pPr>
+            <a:r>
+              <a:t>TECHNICAL DOCUMENTATION</a:t>
+            </a:r>
+          </a:p>
+          <a:p>
             <a:pPr>
               <a:spcAft>
                 <a:spcPts val="400"/>
               </a:spcAft>
-              <a:defRPr sz="1000">
-                <a:solidFill>
-                  <a:srgbClr val="0F172A"/>
-                </a:solidFill>
-              </a:defRPr>
-            </a:pPr>
-            <a:r>
-              <a:t>• Official Standard: Ministry of Statistics and Programme Implementation, Central Statistics Office (CSO), Consumer Price Index Manual.</a:t>
+              <a:defRPr sz="1050" b="1">
+                <a:solidFill>
+                  <a:srgbClr val="000000"/>
+                </a:solidFill>
+                <a:latin typeface="Arial"/>
+              </a:defRPr>
+            </a:pPr>
+            <a:r>
+              <a:t>• Index Formulations: UN/ILO Jevons Geometric Mean vs Dutot Arithmetic Comparison.</a:t>
             </a:r>
           </a:p>
           <a:p>
@@ -8271,14 +7762,15 @@
               <a:spcAft>
                 <a:spcPts val="400"/>
               </a:spcAft>
-              <a:defRPr sz="1000">
-                <a:solidFill>
-                  <a:srgbClr val="0F172A"/>
-                </a:solidFill>
-              </a:defRPr>
-            </a:pPr>
-            <a:r>
-              <a:t>• Integration Alignment: AirIntel India produces index outputs directly scaled to Base Year = 100 with Laspeyres higher-level weighting.</a:t>
+              <a:defRPr sz="1050" b="1">
+                <a:solidFill>
+                  <a:srgbClr val="000000"/>
+                </a:solidFill>
+                <a:latin typeface="Arial"/>
+              </a:defRPr>
+            </a:pPr>
+            <a:r>
+              <a:t>• Scraper Framework: Playwright Chromium Headless with Random UA &amp; Stealth Evasion.</a:t>
             </a:r>
           </a:p>
           <a:p>
@@ -8286,14 +7778,31 @@
               <a:spcAft>
                 <a:spcPts val="400"/>
               </a:spcAft>
-              <a:defRPr sz="1000">
-                <a:solidFill>
-                  <a:srgbClr val="0F172A"/>
-                </a:solidFill>
-              </a:defRPr>
-            </a:pPr>
-            <a:r>
-              <a:t>• Audit Compatibility: Cryptographic provenance vault guarantees 100% adherence to National Data Sharing and Accessibility Policy (NDSAP) standards.</a:t>
+              <a:defRPr sz="1050" b="1">
+                <a:solidFill>
+                  <a:srgbClr val="000000"/>
+                </a:solidFill>
+                <a:latin typeface="Arial"/>
+              </a:defRPr>
+            </a:pPr>
+            <a:r>
+              <a:t>• Provenance Architecture: SHA-256 Hash Manifest conforming to NDSAP open standards.</a:t>
+            </a:r>
+          </a:p>
+          <a:p>
+            <a:pPr>
+              <a:spcAft>
+                <a:spcPts val="400"/>
+              </a:spcAft>
+              <a:defRPr sz="1050" b="1">
+                <a:solidFill>
+                  <a:srgbClr val="000000"/>
+                </a:solidFill>
+                <a:latin typeface="Arial"/>
+              </a:defRPr>
+            </a:pPr>
+            <a:r>
+              <a:t>• Deployment: Dockerized serverless cron (02:00 AM) + Vercel Edge Web Portal.</a:t>
             </a:r>
           </a:p>
         </p:txBody>

--- a/AirIntel_India_SIH26056_Presentation.pptx
+++ b/AirIntel_India_SIH26056_Presentation.pptx
@@ -3175,7 +3175,7 @@
       </p:sp>
       <p:pic>
         <p:nvPicPr>
-          <p:cNvPr id="4" name="Picture 3" descr="page_1_img_2.png"/>
+          <p:cNvPr id="4" name="Picture 3" descr="clean_sih_logo.png"/>
           <p:cNvPicPr>
             <a:picLocks noChangeAspect="1"/>
           </p:cNvPicPr>
@@ -3561,7 +3561,7 @@
       </p:sp>
       <p:pic>
         <p:nvPicPr>
-          <p:cNvPr id="5" name="Picture 4" descr="page_1_img_2.png"/>
+          <p:cNvPr id="5" name="Picture 4" descr="clean_sih_logo.png"/>
           <p:cNvPicPr>
             <a:picLocks noChangeAspect="1"/>
           </p:cNvPicPr>
@@ -3740,7 +3740,7 @@
         <p:spPr>
           <a:xfrm>
             <a:off x="4297680" y="1325880"/>
-            <a:ext cx="1097280" cy="502920"/>
+            <a:ext cx="877824" cy="502920"/>
           </a:xfrm>
           <a:prstGeom prst="roundRect">
             <a:avLst/>
@@ -3773,15 +3773,15 @@
           <a:lstStyle/>
           <a:p>
             <a:pPr algn="ctr">
-              <a:defRPr sz="950" b="1">
-                <a:solidFill>
-                  <a:srgbClr val="000000"/>
-                </a:solidFill>
-                <a:latin typeface="Arial"/>
-              </a:defRPr>
-            </a:pPr>
-            <a:r>
-              <a:t>Scheduled Harvest</a:t>
+              <a:defRPr sz="1000" b="1">
+                <a:solidFill>
+                  <a:srgbClr val="000000"/>
+                </a:solidFill>
+                <a:latin typeface="Arial"/>
+              </a:defRPr>
+            </a:pPr>
+            <a:r>
+              <a:t>1. Ingestion</a:t>
             </a:r>
           </a:p>
         </p:txBody>
@@ -3794,8 +3794,8 @@
         </p:nvSpPr>
         <p:spPr>
           <a:xfrm>
-            <a:off x="5504688" y="1325880"/>
-            <a:ext cx="1097280" cy="502920"/>
+            <a:off x="5285232" y="1325880"/>
+            <a:ext cx="877824" cy="502920"/>
           </a:xfrm>
           <a:prstGeom prst="roundRect">
             <a:avLst/>
@@ -3828,15 +3828,15 @@
           <a:lstStyle/>
           <a:p>
             <a:pPr algn="ctr">
-              <a:defRPr sz="950" b="1">
-                <a:solidFill>
-                  <a:srgbClr val="000000"/>
-                </a:solidFill>
-                <a:latin typeface="Arial"/>
-              </a:defRPr>
-            </a:pPr>
-            <a:r>
-              <a:t>Normalization</a:t>
+              <a:defRPr sz="1000" b="1">
+                <a:solidFill>
+                  <a:srgbClr val="000000"/>
+                </a:solidFill>
+                <a:latin typeface="Arial"/>
+              </a:defRPr>
+            </a:pPr>
+            <a:r>
+              <a:t>2. Cleanse</a:t>
             </a:r>
           </a:p>
         </p:txBody>
@@ -3849,8 +3849,8 @@
         </p:nvSpPr>
         <p:spPr>
           <a:xfrm>
-            <a:off x="6711696" y="1325880"/>
-            <a:ext cx="1097280" cy="502920"/>
+            <a:off x="6272784" y="1325880"/>
+            <a:ext cx="877824" cy="502920"/>
           </a:xfrm>
           <a:prstGeom prst="roundRect">
             <a:avLst/>
@@ -3883,15 +3883,15 @@
           <a:lstStyle/>
           <a:p>
             <a:pPr algn="ctr">
-              <a:defRPr sz="950" b="1">
-                <a:solidFill>
-                  <a:srgbClr val="000000"/>
-                </a:solidFill>
-                <a:latin typeface="Arial"/>
-              </a:defRPr>
-            </a:pPr>
-            <a:r>
-              <a:t>Z-Score Filter</a:t>
+              <a:defRPr sz="1000" b="1">
+                <a:solidFill>
+                  <a:srgbClr val="000000"/>
+                </a:solidFill>
+                <a:latin typeface="Arial"/>
+              </a:defRPr>
+            </a:pPr>
+            <a:r>
+              <a:t>3. Jevons GM</a:t>
             </a:r>
           </a:p>
         </p:txBody>
@@ -3904,8 +3904,8 @@
         </p:nvSpPr>
         <p:spPr>
           <a:xfrm>
-            <a:off x="7918704" y="1325880"/>
-            <a:ext cx="1097280" cy="502920"/>
+            <a:off x="7260336" y="1325880"/>
+            <a:ext cx="877824" cy="502920"/>
           </a:xfrm>
           <a:prstGeom prst="roundRect">
             <a:avLst/>
@@ -3938,15 +3938,15 @@
           <a:lstStyle/>
           <a:p>
             <a:pPr algn="ctr">
-              <a:defRPr sz="950" b="1">
-                <a:solidFill>
-                  <a:srgbClr val="000000"/>
-                </a:solidFill>
-                <a:latin typeface="Arial"/>
-              </a:defRPr>
-            </a:pPr>
-            <a:r>
-              <a:t>Jevons GM</a:t>
+              <a:defRPr sz="1000" b="1">
+                <a:solidFill>
+                  <a:srgbClr val="000000"/>
+                </a:solidFill>
+                <a:latin typeface="Arial"/>
+              </a:defRPr>
+            </a:pPr>
+            <a:r>
+              <a:t>4. Laspeyres</a:t>
             </a:r>
           </a:p>
         </p:txBody>
@@ -3954,116 +3954,6 @@
       <p:sp>
         <p:nvSpPr>
           <p:cNvPr id="12" name="Rounded Rectangle 11"/>
-          <p:cNvSpPr/>
-          <p:nvPr/>
-        </p:nvSpPr>
-        <p:spPr>
-          <a:xfrm>
-            <a:off x="9125712" y="1325880"/>
-            <a:ext cx="1097280" cy="502920"/>
-          </a:xfrm>
-          <a:prstGeom prst="roundRect">
-            <a:avLst/>
-          </a:prstGeom>
-          <a:solidFill>
-            <a:srgbClr val="DBEAFE"/>
-          </a:solidFill>
-          <a:ln w="12700">
-            <a:solidFill>
-              <a:srgbClr val="6366F1"/>
-            </a:solidFill>
-          </a:ln>
-        </p:spPr>
-        <p:style>
-          <a:lnRef idx="1">
-            <a:schemeClr val="accent1"/>
-          </a:lnRef>
-          <a:fillRef idx="3">
-            <a:schemeClr val="accent1"/>
-          </a:fillRef>
-          <a:effectRef idx="2">
-            <a:schemeClr val="accent1"/>
-          </a:effectRef>
-          <a:fontRef idx="minor">
-            <a:schemeClr val="lt1"/>
-          </a:fontRef>
-        </p:style>
-        <p:txBody>
-          <a:bodyPr rtlCol="0" anchor="ctr"/>
-          <a:lstStyle/>
-          <a:p>
-            <a:pPr algn="ctr">
-              <a:defRPr sz="950" b="1">
-                <a:solidFill>
-                  <a:srgbClr val="000000"/>
-                </a:solidFill>
-                <a:latin typeface="Arial"/>
-              </a:defRPr>
-            </a:pPr>
-            <a:r>
-              <a:t>Laspeyres</a:t>
-            </a:r>
-          </a:p>
-        </p:txBody>
-      </p:sp>
-      <p:sp>
-        <p:nvSpPr>
-          <p:cNvPr id="13" name="Rounded Rectangle 12"/>
-          <p:cNvSpPr/>
-          <p:nvPr/>
-        </p:nvSpPr>
-        <p:spPr>
-          <a:xfrm>
-            <a:off x="10332720" y="1325880"/>
-            <a:ext cx="1097280" cy="502920"/>
-          </a:xfrm>
-          <a:prstGeom prst="roundRect">
-            <a:avLst/>
-          </a:prstGeom>
-          <a:solidFill>
-            <a:srgbClr val="E9D5FF"/>
-          </a:solidFill>
-          <a:ln w="12700">
-            <a:solidFill>
-              <a:srgbClr val="6366F1"/>
-            </a:solidFill>
-          </a:ln>
-        </p:spPr>
-        <p:style>
-          <a:lnRef idx="1">
-            <a:schemeClr val="accent1"/>
-          </a:lnRef>
-          <a:fillRef idx="3">
-            <a:schemeClr val="accent1"/>
-          </a:fillRef>
-          <a:effectRef idx="2">
-            <a:schemeClr val="accent1"/>
-          </a:effectRef>
-          <a:fontRef idx="minor">
-            <a:schemeClr val="lt1"/>
-          </a:fontRef>
-        </p:style>
-        <p:txBody>
-          <a:bodyPr rtlCol="0" anchor="ctr"/>
-          <a:lstStyle/>
-          <a:p>
-            <a:pPr algn="ctr">
-              <a:defRPr sz="950" b="1">
-                <a:solidFill>
-                  <a:srgbClr val="000000"/>
-                </a:solidFill>
-                <a:latin typeface="Arial"/>
-              </a:defRPr>
-            </a:pPr>
-            <a:r>
-              <a:t>Dashboard</a:t>
-            </a:r>
-          </a:p>
-        </p:txBody>
-      </p:sp>
-      <p:sp>
-        <p:nvSpPr>
-          <p:cNvPr id="14" name="Rounded Rectangle 13"/>
           <p:cNvSpPr/>
           <p:nvPr/>
         </p:nvSpPr>
@@ -4108,7 +3998,7 @@
       </p:sp>
       <p:sp>
         <p:nvSpPr>
-          <p:cNvPr id="15" name="TextBox 14"/>
+          <p:cNvPr id="13" name="TextBox 12"/>
           <p:cNvSpPr txBox="1"/>
           <p:nvPr/>
         </p:nvSpPr>
@@ -4256,7 +4146,7 @@
       </p:sp>
       <p:sp>
         <p:nvSpPr>
-          <p:cNvPr id="16" name="Rounded Rectangle 15"/>
+          <p:cNvPr id="14" name="Rounded Rectangle 13"/>
           <p:cNvSpPr/>
           <p:nvPr/>
         </p:nvSpPr>
@@ -4301,7 +4191,7 @@
       </p:sp>
       <p:sp>
         <p:nvSpPr>
-          <p:cNvPr id="17" name="TextBox 16"/>
+          <p:cNvPr id="15" name="TextBox 14"/>
           <p:cNvSpPr txBox="1"/>
           <p:nvPr/>
         </p:nvSpPr>
@@ -4388,7 +4278,7 @@
       </p:sp>
       <p:sp>
         <p:nvSpPr>
-          <p:cNvPr id="18" name="Rounded Rectangle 17"/>
+          <p:cNvPr id="16" name="Rounded Rectangle 15"/>
           <p:cNvSpPr/>
           <p:nvPr/>
         </p:nvSpPr>
@@ -4433,7 +4323,7 @@
       </p:sp>
       <p:sp>
         <p:nvSpPr>
-          <p:cNvPr id="19" name="TextBox 18"/>
+          <p:cNvPr id="17" name="TextBox 16"/>
           <p:cNvSpPr txBox="1"/>
           <p:nvPr/>
         </p:nvSpPr>
@@ -4672,7 +4562,7 @@
       </p:sp>
       <p:pic>
         <p:nvPicPr>
-          <p:cNvPr id="5" name="Picture 4" descr="page_1_img_2.png"/>
+          <p:cNvPr id="5" name="Picture 4" descr="clean_sih_logo.png"/>
           <p:cNvPicPr>
             <a:picLocks noChangeAspect="1"/>
           </p:cNvPicPr>
@@ -5278,7 +5168,7 @@
       </p:sp>
       <p:pic>
         <p:nvPicPr>
-          <p:cNvPr id="5" name="Picture 4" descr="page_1_img_2.png"/>
+          <p:cNvPr id="5" name="Picture 4" descr="clean_sih_logo.png"/>
           <p:cNvPicPr>
             <a:picLocks noChangeAspect="1"/>
           </p:cNvPicPr>
@@ -6128,7 +6018,7 @@
       </p:sp>
       <p:pic>
         <p:nvPicPr>
-          <p:cNvPr id="5" name="Picture 4" descr="page_1_img_2.png"/>
+          <p:cNvPr id="5" name="Picture 4" descr="clean_sih_logo.png"/>
           <p:cNvPicPr>
             <a:picLocks noChangeAspect="1"/>
           </p:cNvPicPr>
@@ -6943,7 +6833,7 @@
       </p:sp>
       <p:pic>
         <p:nvPicPr>
-          <p:cNvPr id="5" name="Picture 4" descr="page_1_img_2.png"/>
+          <p:cNvPr id="5" name="Picture 4" descr="clean_sih_logo.png"/>
           <p:cNvPicPr>
             <a:picLocks noChangeAspect="1"/>
           </p:cNvPicPr>
@@ -7233,7 +7123,7 @@
       </p:sp>
       <p:pic>
         <p:nvPicPr>
-          <p:cNvPr id="4" name="Picture 3" descr="page_1_img_2.png"/>
+          <p:cNvPr id="4" name="Picture 3" descr="clean_sih_logo.png"/>
           <p:cNvPicPr>
             <a:picLocks noChangeAspect="1"/>
           </p:cNvPicPr>

--- a/AirIntel_India_SIH26056_Presentation.pptx
+++ b/AirIntel_India_SIH26056_Presentation.pptx
@@ -3145,8 +3145,8 @@
         </p:nvSpPr>
         <p:spPr>
           <a:xfrm>
-            <a:off x="914400" y="457200"/>
-            <a:ext cx="8686800" cy="1097280"/>
+            <a:off x="731520" y="365760"/>
+            <a:ext cx="8961120" cy="1097280"/>
           </a:xfrm>
           <a:prstGeom prst="rect">
             <a:avLst/>
@@ -3175,7 +3175,7 @@
       </p:sp>
       <p:pic>
         <p:nvPicPr>
-          <p:cNvPr id="4" name="Picture 3" descr="clean_sih_logo.png"/>
+          <p:cNvPr id="4" name="Picture 3" descr="sih_2026_logo_hd.png"/>
           <p:cNvPicPr>
             <a:picLocks noChangeAspect="1"/>
           </p:cNvPicPr>
@@ -3189,8 +3189,8 @@
         </p:blipFill>
         <p:spPr>
           <a:xfrm>
-            <a:off x="10058400" y="274320"/>
-            <a:ext cx="1737360" cy="914400"/>
+            <a:off x="10058400" y="182880"/>
+            <a:ext cx="1828800" cy="914400"/>
           </a:xfrm>
           <a:prstGeom prst="rect">
             <a:avLst/>
@@ -3199,7 +3199,7 @@
       </p:pic>
       <p:pic>
         <p:nvPicPr>
-          <p:cNvPr id="5" name="Picture 4" descr="page_1_img_1.png"/>
+          <p:cNvPr id="5" name="Picture 4" descr="sih_cover_badge_hd.png"/>
           <p:cNvPicPr>
             <a:picLocks noChangeAspect="1"/>
           </p:cNvPicPr>
@@ -3213,8 +3213,8 @@
         </p:blipFill>
         <p:spPr>
           <a:xfrm>
-            <a:off x="7772400" y="1645920"/>
-            <a:ext cx="3931920" cy="4389120"/>
+            <a:off x="7589520" y="1280160"/>
+            <a:ext cx="4114800" cy="5029200"/>
           </a:xfrm>
           <a:prstGeom prst="rect">
             <a:avLst/>
@@ -3561,7 +3561,7 @@
       </p:sp>
       <p:pic>
         <p:nvPicPr>
-          <p:cNvPr id="5" name="Picture 4" descr="clean_sih_logo.png"/>
+          <p:cNvPr id="5" name="Picture 4" descr="sih_2026_logo_hd.png"/>
           <p:cNvPicPr>
             <a:picLocks noChangeAspect="1"/>
           </p:cNvPicPr>
@@ -3575,8 +3575,8 @@
         </p:blipFill>
         <p:spPr>
           <a:xfrm>
-            <a:off x="10241280" y="164592"/>
-            <a:ext cx="1645920" cy="868680"/>
+            <a:off x="10058400" y="146304"/>
+            <a:ext cx="1828800" cy="914400"/>
           </a:xfrm>
           <a:prstGeom prst="rect">
             <a:avLst/>
@@ -4562,7 +4562,7 @@
       </p:sp>
       <p:pic>
         <p:nvPicPr>
-          <p:cNvPr id="5" name="Picture 4" descr="clean_sih_logo.png"/>
+          <p:cNvPr id="5" name="Picture 4" descr="sih_2026_logo_hd.png"/>
           <p:cNvPicPr>
             <a:picLocks noChangeAspect="1"/>
           </p:cNvPicPr>
@@ -4576,8 +4576,8 @@
         </p:blipFill>
         <p:spPr>
           <a:xfrm>
-            <a:off x="10241280" y="164592"/>
-            <a:ext cx="1645920" cy="868680"/>
+            <a:off x="10058400" y="146304"/>
+            <a:ext cx="1828800" cy="914400"/>
           </a:xfrm>
           <a:prstGeom prst="rect">
             <a:avLst/>
@@ -5168,7 +5168,7 @@
       </p:sp>
       <p:pic>
         <p:nvPicPr>
-          <p:cNvPr id="5" name="Picture 4" descr="clean_sih_logo.png"/>
+          <p:cNvPr id="5" name="Picture 4" descr="sih_2026_logo_hd.png"/>
           <p:cNvPicPr>
             <a:picLocks noChangeAspect="1"/>
           </p:cNvPicPr>
@@ -5182,8 +5182,8 @@
         </p:blipFill>
         <p:spPr>
           <a:xfrm>
-            <a:off x="10241280" y="164592"/>
-            <a:ext cx="1645920" cy="868680"/>
+            <a:off x="10058400" y="146304"/>
+            <a:ext cx="1828800" cy="914400"/>
           </a:xfrm>
           <a:prstGeom prst="rect">
             <a:avLst/>
@@ -6018,7 +6018,7 @@
       </p:sp>
       <p:pic>
         <p:nvPicPr>
-          <p:cNvPr id="5" name="Picture 4" descr="clean_sih_logo.png"/>
+          <p:cNvPr id="5" name="Picture 4" descr="sih_2026_logo_hd.png"/>
           <p:cNvPicPr>
             <a:picLocks noChangeAspect="1"/>
           </p:cNvPicPr>
@@ -6032,8 +6032,8 @@
         </p:blipFill>
         <p:spPr>
           <a:xfrm>
-            <a:off x="10241280" y="164592"/>
-            <a:ext cx="1645920" cy="868680"/>
+            <a:off x="10058400" y="146304"/>
+            <a:ext cx="1828800" cy="914400"/>
           </a:xfrm>
           <a:prstGeom prst="rect">
             <a:avLst/>
@@ -6833,7 +6833,7 @@
       </p:sp>
       <p:pic>
         <p:nvPicPr>
-          <p:cNvPr id="5" name="Picture 4" descr="clean_sih_logo.png"/>
+          <p:cNvPr id="5" name="Picture 4" descr="sih_2026_logo_hd.png"/>
           <p:cNvPicPr>
             <a:picLocks noChangeAspect="1"/>
           </p:cNvPicPr>
@@ -6847,8 +6847,8 @@
         </p:blipFill>
         <p:spPr>
           <a:xfrm>
-            <a:off x="10241280" y="164592"/>
-            <a:ext cx="1645920" cy="868680"/>
+            <a:off x="10058400" y="146304"/>
+            <a:ext cx="1828800" cy="914400"/>
           </a:xfrm>
           <a:prstGeom prst="rect">
             <a:avLst/>
@@ -6929,7 +6929,7 @@
       </p:sp>
       <p:pic>
         <p:nvPicPr>
-          <p:cNvPr id="8" name="Picture 7" descr="demo_chart_screenshot.png"/>
+          <p:cNvPr id="8" name="Picture 7" descr="demo_chart_hd.png"/>
           <p:cNvPicPr>
             <a:picLocks noChangeAspect="1"/>
           </p:cNvPicPr>
@@ -6943,8 +6943,8 @@
         </p:blipFill>
         <p:spPr>
           <a:xfrm>
-            <a:off x="548640" y="1645920"/>
-            <a:ext cx="5303520" cy="3931920"/>
+            <a:off x="548640" y="1600200"/>
+            <a:ext cx="5394960" cy="3154680"/>
           </a:xfrm>
           <a:prstGeom prst="rect">
             <a:avLst/>
@@ -6953,7 +6953,7 @@
       </p:pic>
       <p:pic>
         <p:nvPicPr>
-          <p:cNvPr id="9" name="Picture 8" descr="media_1789662269891.png"/>
+          <p:cNvPr id="9" name="Picture 8" descr="demo_table_hd.png"/>
           <p:cNvPicPr>
             <a:picLocks noChangeAspect="1"/>
           </p:cNvPicPr>
@@ -6967,8 +6967,8 @@
         </p:blipFill>
         <p:spPr>
           <a:xfrm>
-            <a:off x="6217920" y="1645920"/>
-            <a:ext cx="5394960" cy="3931920"/>
+            <a:off x="6217920" y="1600200"/>
+            <a:ext cx="5394960" cy="3154680"/>
           </a:xfrm>
           <a:prstGeom prst="rect">
             <a:avLst/>
@@ -6983,8 +6983,8 @@
         </p:nvSpPr>
         <p:spPr>
           <a:xfrm>
-            <a:off x="457200" y="5760720"/>
-            <a:ext cx="11277295" cy="822960"/>
+            <a:off x="457200" y="4983480"/>
+            <a:ext cx="11277295" cy="1371600"/>
           </a:xfrm>
           <a:prstGeom prst="rect">
             <a:avLst/>
@@ -7123,7 +7123,7 @@
       </p:sp>
       <p:pic>
         <p:nvPicPr>
-          <p:cNvPr id="4" name="Picture 3" descr="clean_sih_logo.png"/>
+          <p:cNvPr id="4" name="Picture 3" descr="sih_2026_logo_hd.png"/>
           <p:cNvPicPr>
             <a:picLocks noChangeAspect="1"/>
           </p:cNvPicPr>
@@ -7137,8 +7137,8 @@
         </p:blipFill>
         <p:spPr>
           <a:xfrm>
-            <a:off x="10241280" y="164592"/>
-            <a:ext cx="1645920" cy="868680"/>
+            <a:off x="10058400" y="146304"/>
+            <a:ext cx="1828800" cy="914400"/>
           </a:xfrm>
           <a:prstGeom prst="rect">
             <a:avLst/>

--- a/AirIntel_India_SIH26056_Presentation.pptx
+++ b/AirIntel_India_SIH26056_Presentation.pptx
@@ -11,7 +11,6 @@
     <p:sldId id="259" r:id="rId10"/>
     <p:sldId id="260" r:id="rId11"/>
     <p:sldId id="261" r:id="rId12"/>
-    <p:sldId id="262" r:id="rId13"/>
   </p:sldIdLst>
   <p:sldSz cx="12191695" cy="6858000" type="screen4x3"/>
   <p:notesSz cx="6858000" cy="9144000"/>
@@ -3229,8 +3228,8 @@
         </p:nvSpPr>
         <p:spPr>
           <a:xfrm>
-            <a:off x="731520" y="1645920"/>
-            <a:ext cx="6858000" cy="4754880"/>
+            <a:off x="731520" y="1508760"/>
+            <a:ext cx="6858000" cy="4892040"/>
           </a:xfrm>
           <a:prstGeom prst="rect">
             <a:avLst/>
@@ -3245,11 +3244,11 @@
           <a:p>
             <a:pPr>
               <a:spcAft>
-                <a:spcPts val="1400"/>
-              </a:spcAft>
-            </a:pPr>
-            <a:r>
-              <a:rPr sz="2000" b="1">
+                <a:spcPts val="800"/>
+              </a:spcAft>
+            </a:pPr>
+            <a:r>
+              <a:rPr sz="1800" b="1">
                 <a:solidFill>
                   <a:srgbClr val="000000"/>
                 </a:solidFill>
@@ -3258,7 +3257,7 @@
               <a:t>• Problem Statement ID – </a:t>
             </a:r>
             <a:r>
-              <a:rPr sz="2000" b="1">
+              <a:rPr sz="1800" b="1">
                 <a:solidFill>
                   <a:srgbClr val="184C94"/>
                 </a:solidFill>
@@ -3270,11 +3269,11 @@
           <a:p>
             <a:pPr>
               <a:spcAft>
-                <a:spcPts val="1400"/>
-              </a:spcAft>
-            </a:pPr>
-            <a:r>
-              <a:rPr sz="1800" b="1">
+                <a:spcPts val="800"/>
+              </a:spcAft>
+            </a:pPr>
+            <a:r>
+              <a:rPr sz="1600" b="1">
                 <a:solidFill>
                   <a:srgbClr val="000000"/>
                 </a:solidFill>
@@ -3283,7 +3282,7 @@
               <a:t>• Problem Statement Title- </a:t>
             </a:r>
             <a:r>
-              <a:rPr sz="1800" b="1">
+              <a:rPr sz="1600" b="1">
                 <a:solidFill>
                   <a:srgbClr val="184C94"/>
                 </a:solidFill>
@@ -3295,11 +3294,11 @@
           <a:p>
             <a:pPr>
               <a:spcAft>
-                <a:spcPts val="1400"/>
-              </a:spcAft>
-            </a:pPr>
-            <a:r>
-              <a:rPr sz="2000" b="1">
+                <a:spcPts val="800"/>
+              </a:spcAft>
+            </a:pPr>
+            <a:r>
+              <a:rPr sz="1800" b="1">
                 <a:solidFill>
                   <a:srgbClr val="000000"/>
                 </a:solidFill>
@@ -3308,7 +3307,7 @@
               <a:t>• Theme- </a:t>
             </a:r>
             <a:r>
-              <a:rPr sz="2000" b="1">
+              <a:rPr sz="1800" b="1">
                 <a:solidFill>
                   <a:srgbClr val="184C94"/>
                 </a:solidFill>
@@ -3320,11 +3319,11 @@
           <a:p>
             <a:pPr>
               <a:spcAft>
-                <a:spcPts val="1400"/>
-              </a:spcAft>
-            </a:pPr>
-            <a:r>
-              <a:rPr sz="2000" b="1">
+                <a:spcPts val="800"/>
+              </a:spcAft>
+            </a:pPr>
+            <a:r>
+              <a:rPr sz="1800" b="1">
                 <a:solidFill>
                   <a:srgbClr val="000000"/>
                 </a:solidFill>
@@ -3333,7 +3332,7 @@
               <a:t>• PS Category- </a:t>
             </a:r>
             <a:r>
-              <a:rPr sz="2000" b="1">
+              <a:rPr sz="1800" b="1">
                 <a:solidFill>
                   <a:srgbClr val="184C94"/>
                 </a:solidFill>
@@ -3345,11 +3344,11 @@
           <a:p>
             <a:pPr>
               <a:spcAft>
-                <a:spcPts val="1400"/>
-              </a:spcAft>
-            </a:pPr>
-            <a:r>
-              <a:rPr sz="2000" b="1">
+                <a:spcPts val="800"/>
+              </a:spcAft>
+            </a:pPr>
+            <a:r>
+              <a:rPr sz="1800" b="1">
                 <a:solidFill>
                   <a:srgbClr val="000000"/>
                 </a:solidFill>
@@ -3358,7 +3357,7 @@
               <a:t>• Team ID- </a:t>
             </a:r>
             <a:r>
-              <a:rPr sz="2000" b="1">
+              <a:rPr sz="1800" b="1">
                 <a:solidFill>
                   <a:srgbClr val="184C94"/>
                 </a:solidFill>
@@ -3370,11 +3369,11 @@
           <a:p>
             <a:pPr>
               <a:spcAft>
-                <a:spcPts val="1400"/>
-              </a:spcAft>
-            </a:pPr>
-            <a:r>
-              <a:rPr sz="2000" b="1">
+                <a:spcPts val="800"/>
+              </a:spcAft>
+            </a:pPr>
+            <a:r>
+              <a:rPr sz="1800" b="1">
                 <a:solidFill>
                   <a:srgbClr val="000000"/>
                 </a:solidFill>
@@ -3383,13 +3382,125 @@
               <a:t>• Team Name- </a:t>
             </a:r>
             <a:r>
-              <a:rPr sz="2000" b="1">
+              <a:rPr sz="1800" b="1">
                 <a:solidFill>
                   <a:srgbClr val="184C94"/>
                 </a:solidFill>
                 <a:latin typeface="Arial"/>
               </a:rPr>
               <a:t>Team Rookie</a:t>
+            </a:r>
+          </a:p>
+          <a:p>
+            <a:pPr>
+              <a:spcAft>
+                <a:spcPts val="800"/>
+              </a:spcAft>
+            </a:pPr>
+            <a:r>
+              <a:rPr sz="1600" b="1">
+                <a:solidFill>
+                  <a:srgbClr val="000000"/>
+                </a:solidFill>
+                <a:latin typeface="Arial"/>
+              </a:rPr>
+              <a:t>• Team Members- </a:t>
+            </a:r>
+            <a:r>
+              <a:rPr sz="1600" b="1">
+                <a:solidFill>
+                  <a:srgbClr val="184C94"/>
+                </a:solidFill>
+                <a:latin typeface="Arial"/>
+              </a:rPr>
+              <a:t>Nikhil Kanse, Shivish Kumar, Tejas Patil, Pranav Pawale, Harsh Narkar, Blessy</a:t>
+            </a:r>
+          </a:p>
+        </p:txBody>
+      </p:sp>
+      <p:sp>
+        <p:nvSpPr>
+          <p:cNvPr id="7" name="Rectangle 6"/>
+          <p:cNvSpPr/>
+          <p:nvPr/>
+        </p:nvSpPr>
+        <p:spPr>
+          <a:xfrm>
+            <a:off x="457200" y="6473952"/>
+            <a:ext cx="11277295" cy="13716"/>
+          </a:xfrm>
+          <a:prstGeom prst="rect">
+            <a:avLst/>
+          </a:prstGeom>
+          <a:solidFill>
+            <a:srgbClr val="E2E8F0"/>
+          </a:solidFill>
+          <a:ln>
+            <a:noFill/>
+          </a:ln>
+        </p:spPr>
+        <p:style>
+          <a:lnRef idx="1">
+            <a:schemeClr val="accent1"/>
+          </a:lnRef>
+          <a:fillRef idx="3">
+            <a:schemeClr val="accent1"/>
+          </a:fillRef>
+          <a:effectRef idx="2">
+            <a:schemeClr val="accent1"/>
+          </a:effectRef>
+          <a:fontRef idx="minor">
+            <a:schemeClr val="lt1"/>
+          </a:fontRef>
+        </p:style>
+        <p:txBody>
+          <a:bodyPr rtlCol="0" anchor="ctr"/>
+          <a:lstStyle/>
+          <a:p>
+            <a:pPr algn="ctr"/>
+          </a:p>
+        </p:txBody>
+      </p:sp>
+      <p:sp>
+        <p:nvSpPr>
+          <p:cNvPr id="8" name="TextBox 7"/>
+          <p:cNvSpPr txBox="1"/>
+          <p:nvPr/>
+        </p:nvSpPr>
+        <p:spPr>
+          <a:xfrm>
+            <a:off x="457200" y="6510528"/>
+            <a:ext cx="11277295" cy="292608"/>
+          </a:xfrm>
+          <a:prstGeom prst="rect">
+            <a:avLst/>
+          </a:prstGeom>
+          <a:noFill/>
+        </p:spPr>
+        <p:txBody>
+          <a:bodyPr wrap="square" lIns="0" rIns="0" tIns="0" bIns="0">
+            <a:spAutoFit/>
+          </a:bodyPr>
+          <a:lstStyle/>
+          <a:p>
+            <a:pPr algn="ctr"/>
+            <a:r>
+              <a:rPr sz="1000" b="1">
+                <a:solidFill>
+                  <a:srgbClr val="475569"/>
+                </a:solidFill>
+                <a:latin typeface="Arial"/>
+              </a:rPr>
+              <a:t>Team Rookie  |  </a:t>
+            </a:r>
+            <a:r>
+              <a:rPr sz="1000" b="1">
+                <a:solidFill>
+                  <a:srgbClr val="1E293B"/>
+                </a:solidFill>
+                <a:latin typeface="Arial"/>
+              </a:rPr>
+              <a:t>[ Nikhil Kanse , Shivish Kumar , Tejas Patil , Pranav Pawale , Harsh Narkar , Blessy ]</a:t>
             </a:r>
           </a:p>
         </p:txBody>
@@ -4285,7 +4396,7 @@
         <p:spPr>
           <a:xfrm>
             <a:off x="8321040" y="3977639"/>
-            <a:ext cx="3566160" cy="2514600"/>
+            <a:ext cx="3566160" cy="2377440"/>
           </a:xfrm>
           <a:prstGeom prst="roundRect">
             <a:avLst/>
@@ -4330,7 +4441,7 @@
         <p:spPr>
           <a:xfrm>
             <a:off x="8458200" y="4069080"/>
-            <a:ext cx="3291840" cy="2331720"/>
+            <a:ext cx="3291840" cy="2194560"/>
           </a:xfrm>
           <a:prstGeom prst="rect">
             <a:avLst/>
@@ -4404,6 +4515,93 @@
             </a:pPr>
             <a:r>
               <a:t>• Equips DGCA with instant surge anomaly alerts to detect regional price gouging.</a:t>
+            </a:r>
+          </a:p>
+        </p:txBody>
+      </p:sp>
+      <p:sp>
+        <p:nvSpPr>
+          <p:cNvPr id="18" name="Rectangle 17"/>
+          <p:cNvSpPr/>
+          <p:nvPr/>
+        </p:nvSpPr>
+        <p:spPr>
+          <a:xfrm>
+            <a:off x="457200" y="6473952"/>
+            <a:ext cx="11277295" cy="13716"/>
+          </a:xfrm>
+          <a:prstGeom prst="rect">
+            <a:avLst/>
+          </a:prstGeom>
+          <a:solidFill>
+            <a:srgbClr val="E2E8F0"/>
+          </a:solidFill>
+          <a:ln>
+            <a:noFill/>
+          </a:ln>
+        </p:spPr>
+        <p:style>
+          <a:lnRef idx="1">
+            <a:schemeClr val="accent1"/>
+          </a:lnRef>
+          <a:fillRef idx="3">
+            <a:schemeClr val="accent1"/>
+          </a:fillRef>
+          <a:effectRef idx="2">
+            <a:schemeClr val="accent1"/>
+          </a:effectRef>
+          <a:fontRef idx="minor">
+            <a:schemeClr val="lt1"/>
+          </a:fontRef>
+        </p:style>
+        <p:txBody>
+          <a:bodyPr rtlCol="0" anchor="ctr"/>
+          <a:lstStyle/>
+          <a:p>
+            <a:pPr algn="ctr"/>
+          </a:p>
+        </p:txBody>
+      </p:sp>
+      <p:sp>
+        <p:nvSpPr>
+          <p:cNvPr id="19" name="TextBox 18"/>
+          <p:cNvSpPr txBox="1"/>
+          <p:nvPr/>
+        </p:nvSpPr>
+        <p:spPr>
+          <a:xfrm>
+            <a:off x="457200" y="6510528"/>
+            <a:ext cx="11277295" cy="292608"/>
+          </a:xfrm>
+          <a:prstGeom prst="rect">
+            <a:avLst/>
+          </a:prstGeom>
+          <a:noFill/>
+        </p:spPr>
+        <p:txBody>
+          <a:bodyPr wrap="square" lIns="0" rIns="0" tIns="0" bIns="0">
+            <a:spAutoFit/>
+          </a:bodyPr>
+          <a:lstStyle/>
+          <a:p>
+            <a:pPr algn="ctr"/>
+            <a:r>
+              <a:rPr sz="1000" b="1">
+                <a:solidFill>
+                  <a:srgbClr val="475569"/>
+                </a:solidFill>
+                <a:latin typeface="Arial"/>
+              </a:rPr>
+              <a:t>Team Rookie  |  </a:t>
+            </a:r>
+            <a:r>
+              <a:rPr sz="1000" b="1">
+                <a:solidFill>
+                  <a:srgbClr val="1E293B"/>
+                </a:solidFill>
+                <a:latin typeface="Arial"/>
+              </a:rPr>
+              <a:t>[ Nikhil Kanse , Shivish Kumar , Tejas Patil , Pranav Pawale , Harsh Narkar , Blessy ]</a:t>
             </a:r>
           </a:p>
         </p:txBody>
@@ -4731,7 +4929,7 @@
         <p:spPr>
           <a:xfrm>
             <a:off x="457200" y="4434840"/>
-            <a:ext cx="6583680" cy="2148840"/>
+            <a:ext cx="6583680" cy="1965960"/>
           </a:xfrm>
           <a:prstGeom prst="rect">
             <a:avLst/>
@@ -4747,7 +4945,7 @@
         <p:spPr>
           <a:xfrm>
             <a:off x="7315200" y="1280160"/>
-            <a:ext cx="4389120" cy="5212080"/>
+            <a:ext cx="4389120" cy="5074920"/>
           </a:xfrm>
           <a:prstGeom prst="roundRect">
             <a:avLst/>
@@ -4791,8 +4989,8 @@
         </p:nvSpPr>
         <p:spPr>
           <a:xfrm>
-            <a:off x="7498079" y="1463040"/>
-            <a:ext cx="4023360" cy="4846320"/>
+            <a:off x="7498079" y="1417320"/>
+            <a:ext cx="4023360" cy="4754880"/>
           </a:xfrm>
           <a:prstGeom prst="rect">
             <a:avLst/>
@@ -4807,7 +5005,7 @@
           <a:p>
             <a:pPr algn="ctr">
               <a:spcAft>
-                <a:spcPts val="1000"/>
+                <a:spcPts val="800"/>
               </a:spcAft>
               <a:defRPr sz="2400" b="1">
                 <a:solidFill>
@@ -4823,9 +5021,9 @@
           <a:p>
             <a:pPr algn="ctr">
               <a:spcAft>
-                <a:spcPts val="400"/>
-              </a:spcAft>
-              <a:defRPr sz="1400" b="1">
+                <a:spcPts val="300"/>
+              </a:spcAft>
+              <a:defRPr sz="1350" b="1">
                 <a:solidFill>
                   <a:srgbClr val="000000"/>
                 </a:solidFill>
@@ -4839,9 +5037,9 @@
           <a:p>
             <a:pPr algn="ctr">
               <a:spcAft>
-                <a:spcPts val="400"/>
-              </a:spcAft>
-              <a:defRPr sz="1400" b="1">
+                <a:spcPts val="300"/>
+              </a:spcAft>
+              <a:defRPr sz="1350" b="1">
                 <a:solidFill>
                   <a:srgbClr val="000000"/>
                 </a:solidFill>
@@ -4855,9 +5053,9 @@
           <a:p>
             <a:pPr algn="ctr">
               <a:spcAft>
-                <a:spcPts val="400"/>
-              </a:spcAft>
-              <a:defRPr sz="1400" b="1">
+                <a:spcPts val="300"/>
+              </a:spcAft>
+              <a:defRPr sz="1350" b="1">
                 <a:solidFill>
                   <a:srgbClr val="000000"/>
                 </a:solidFill>
@@ -4871,9 +5069,9 @@
           <a:p>
             <a:pPr algn="ctr">
               <a:spcAft>
-                <a:spcPts val="400"/>
-              </a:spcAft>
-              <a:defRPr sz="1400" b="1">
+                <a:spcPts val="300"/>
+              </a:spcAft>
+              <a:defRPr sz="1350" b="1">
                 <a:solidFill>
                   <a:srgbClr val="000000"/>
                 </a:solidFill>
@@ -4887,9 +5085,9 @@
           <a:p>
             <a:pPr algn="ctr">
               <a:spcAft>
-                <a:spcPts val="400"/>
-              </a:spcAft>
-              <a:defRPr sz="1400" b="1">
+                <a:spcPts val="300"/>
+              </a:spcAft>
+              <a:defRPr sz="1350" b="1">
                 <a:solidFill>
                   <a:srgbClr val="000000"/>
                 </a:solidFill>
@@ -4903,9 +5101,9 @@
           <a:p>
             <a:pPr algn="ctr">
               <a:spcAft>
-                <a:spcPts val="400"/>
-              </a:spcAft>
-              <a:defRPr sz="1400" b="1">
+                <a:spcPts val="300"/>
+              </a:spcAft>
+              <a:defRPr sz="1350" b="1">
                 <a:solidFill>
                   <a:srgbClr val="000000"/>
                 </a:solidFill>
@@ -4919,9 +5117,9 @@
           <a:p>
             <a:pPr algn="ctr">
               <a:spcAft>
-                <a:spcPts val="400"/>
-              </a:spcAft>
-              <a:defRPr sz="1400" b="1">
+                <a:spcPts val="300"/>
+              </a:spcAft>
+              <a:defRPr sz="1350" b="1">
                 <a:solidFill>
                   <a:srgbClr val="000000"/>
                 </a:solidFill>
@@ -4935,9 +5133,9 @@
           <a:p>
             <a:pPr algn="ctr">
               <a:spcAft>
-                <a:spcPts val="400"/>
-              </a:spcAft>
-              <a:defRPr sz="1400" b="1">
+                <a:spcPts val="300"/>
+              </a:spcAft>
+              <a:defRPr sz="1350" b="1">
                 <a:solidFill>
                   <a:srgbClr val="000000"/>
                 </a:solidFill>
@@ -4951,9 +5149,9 @@
           <a:p>
             <a:pPr algn="ctr">
               <a:spcAft>
-                <a:spcPts val="400"/>
-              </a:spcAft>
-              <a:defRPr sz="1400" b="1">
+                <a:spcPts val="300"/>
+              </a:spcAft>
+              <a:defRPr sz="1350" b="1">
                 <a:solidFill>
                   <a:srgbClr val="000000"/>
                 </a:solidFill>
@@ -4967,9 +5165,9 @@
           <a:p>
             <a:pPr algn="ctr">
               <a:spcAft>
-                <a:spcPts val="400"/>
-              </a:spcAft>
-              <a:defRPr sz="1400" b="1">
+                <a:spcPts val="300"/>
+              </a:spcAft>
+              <a:defRPr sz="1350" b="1">
                 <a:solidFill>
                   <a:srgbClr val="000000"/>
                 </a:solidFill>
@@ -4983,9 +5181,9 @@
           <a:p>
             <a:pPr algn="ctr">
               <a:spcAft>
-                <a:spcPts val="400"/>
-              </a:spcAft>
-              <a:defRPr sz="1400" b="1">
+                <a:spcPts val="300"/>
+              </a:spcAft>
+              <a:defRPr sz="1350" b="1">
                 <a:solidFill>
                   <a:srgbClr val="000000"/>
                 </a:solidFill>
@@ -4999,9 +5197,9 @@
           <a:p>
             <a:pPr algn="ctr">
               <a:spcAft>
-                <a:spcPts val="400"/>
-              </a:spcAft>
-              <a:defRPr sz="1400" b="1">
+                <a:spcPts val="300"/>
+              </a:spcAft>
+              <a:defRPr sz="1350" b="1">
                 <a:solidFill>
                   <a:srgbClr val="000000"/>
                 </a:solidFill>
@@ -5010,6 +5208,93 @@
             </a:pPr>
             <a:r>
               <a:t>• Docker &amp; Vercel Edge</a:t>
+            </a:r>
+          </a:p>
+        </p:txBody>
+      </p:sp>
+      <p:sp>
+        <p:nvSpPr>
+          <p:cNvPr id="12" name="Rectangle 11"/>
+          <p:cNvSpPr/>
+          <p:nvPr/>
+        </p:nvSpPr>
+        <p:spPr>
+          <a:xfrm>
+            <a:off x="457200" y="6473952"/>
+            <a:ext cx="11277295" cy="13716"/>
+          </a:xfrm>
+          <a:prstGeom prst="rect">
+            <a:avLst/>
+          </a:prstGeom>
+          <a:solidFill>
+            <a:srgbClr val="E2E8F0"/>
+          </a:solidFill>
+          <a:ln>
+            <a:noFill/>
+          </a:ln>
+        </p:spPr>
+        <p:style>
+          <a:lnRef idx="1">
+            <a:schemeClr val="accent1"/>
+          </a:lnRef>
+          <a:fillRef idx="3">
+            <a:schemeClr val="accent1"/>
+          </a:fillRef>
+          <a:effectRef idx="2">
+            <a:schemeClr val="accent1"/>
+          </a:effectRef>
+          <a:fontRef idx="minor">
+            <a:schemeClr val="lt1"/>
+          </a:fontRef>
+        </p:style>
+        <p:txBody>
+          <a:bodyPr rtlCol="0" anchor="ctr"/>
+          <a:lstStyle/>
+          <a:p>
+            <a:pPr algn="ctr"/>
+          </a:p>
+        </p:txBody>
+      </p:sp>
+      <p:sp>
+        <p:nvSpPr>
+          <p:cNvPr id="13" name="TextBox 12"/>
+          <p:cNvSpPr txBox="1"/>
+          <p:nvPr/>
+        </p:nvSpPr>
+        <p:spPr>
+          <a:xfrm>
+            <a:off x="457200" y="6510528"/>
+            <a:ext cx="11277295" cy="292608"/>
+          </a:xfrm>
+          <a:prstGeom prst="rect">
+            <a:avLst/>
+          </a:prstGeom>
+          <a:noFill/>
+        </p:spPr>
+        <p:txBody>
+          <a:bodyPr wrap="square" lIns="0" rIns="0" tIns="0" bIns="0">
+            <a:spAutoFit/>
+          </a:bodyPr>
+          <a:lstStyle/>
+          <a:p>
+            <a:pPr algn="ctr"/>
+            <a:r>
+              <a:rPr sz="1000" b="1">
+                <a:solidFill>
+                  <a:srgbClr val="475569"/>
+                </a:solidFill>
+                <a:latin typeface="Arial"/>
+              </a:rPr>
+              <a:t>Team Rookie  |  </a:t>
+            </a:r>
+            <a:r>
+              <a:rPr sz="1000" b="1">
+                <a:solidFill>
+                  <a:srgbClr val="1E293B"/>
+                </a:solidFill>
+                <a:latin typeface="Arial"/>
+              </a:rPr>
+              <a:t>[ Nikhil Kanse , Shivish Kumar , Tejas Patil , Pranav Pawale , Harsh Narkar , Blessy ]</a:t>
             </a:r>
           </a:p>
         </p:txBody>
@@ -5864,6 +6149,93 @@
           </a:p>
         </p:txBody>
       </p:sp>
+      <p:sp>
+        <p:nvSpPr>
+          <p:cNvPr id="15" name="Rectangle 14"/>
+          <p:cNvSpPr/>
+          <p:nvPr/>
+        </p:nvSpPr>
+        <p:spPr>
+          <a:xfrm>
+            <a:off x="457200" y="6473952"/>
+            <a:ext cx="11277295" cy="13716"/>
+          </a:xfrm>
+          <a:prstGeom prst="rect">
+            <a:avLst/>
+          </a:prstGeom>
+          <a:solidFill>
+            <a:srgbClr val="E2E8F0"/>
+          </a:solidFill>
+          <a:ln>
+            <a:noFill/>
+          </a:ln>
+        </p:spPr>
+        <p:style>
+          <a:lnRef idx="1">
+            <a:schemeClr val="accent1"/>
+          </a:lnRef>
+          <a:fillRef idx="3">
+            <a:schemeClr val="accent1"/>
+          </a:fillRef>
+          <a:effectRef idx="2">
+            <a:schemeClr val="accent1"/>
+          </a:effectRef>
+          <a:fontRef idx="minor">
+            <a:schemeClr val="lt1"/>
+          </a:fontRef>
+        </p:style>
+        <p:txBody>
+          <a:bodyPr rtlCol="0" anchor="ctr"/>
+          <a:lstStyle/>
+          <a:p>
+            <a:pPr algn="ctr"/>
+          </a:p>
+        </p:txBody>
+      </p:sp>
+      <p:sp>
+        <p:nvSpPr>
+          <p:cNvPr id="16" name="TextBox 15"/>
+          <p:cNvSpPr txBox="1"/>
+          <p:nvPr/>
+        </p:nvSpPr>
+        <p:spPr>
+          <a:xfrm>
+            <a:off x="457200" y="6510528"/>
+            <a:ext cx="11277295" cy="292608"/>
+          </a:xfrm>
+          <a:prstGeom prst="rect">
+            <a:avLst/>
+          </a:prstGeom>
+          <a:noFill/>
+        </p:spPr>
+        <p:txBody>
+          <a:bodyPr wrap="square" lIns="0" rIns="0" tIns="0" bIns="0">
+            <a:spAutoFit/>
+          </a:bodyPr>
+          <a:lstStyle/>
+          <a:p>
+            <a:pPr algn="ctr"/>
+            <a:r>
+              <a:rPr sz="1000" b="1">
+                <a:solidFill>
+                  <a:srgbClr val="475569"/>
+                </a:solidFill>
+                <a:latin typeface="Arial"/>
+              </a:rPr>
+              <a:t>Team Rookie  |  </a:t>
+            </a:r>
+            <a:r>
+              <a:rPr sz="1000" b="1">
+                <a:solidFill>
+                  <a:srgbClr val="1E293B"/>
+                </a:solidFill>
+                <a:latin typeface="Arial"/>
+              </a:rPr>
+              <a:t>[ Nikhil Kanse , Shivish Kumar , Tejas Patil , Pranav Pawale , Harsh Narkar , Blessy ]</a:t>
+            </a:r>
+          </a:p>
+        </p:txBody>
+      </p:sp>
     </p:spTree>
   </p:cSld>
   <p:clrMapOvr>
@@ -6555,7 +6927,7 @@
           <a:p>
             <a:pPr>
               <a:spcAft>
-                <a:spcPts val="1200"/>
+                <a:spcPts val="1000"/>
               </a:spcAft>
             </a:pPr>
             <a:r>
@@ -6580,7 +6952,7 @@
           <a:p>
             <a:pPr>
               <a:spcAft>
-                <a:spcPts val="1200"/>
+                <a:spcPts val="1000"/>
               </a:spcAft>
             </a:pPr>
             <a:r>
@@ -6605,7 +6977,7 @@
           <a:p>
             <a:pPr>
               <a:spcAft>
-                <a:spcPts val="1200"/>
+                <a:spcPts val="1000"/>
               </a:spcAft>
             </a:pPr>
             <a:r>
@@ -6630,7 +7002,7 @@
           <a:p>
             <a:pPr>
               <a:spcAft>
-                <a:spcPts val="1200"/>
+                <a:spcPts val="1000"/>
               </a:spcAft>
             </a:pPr>
             <a:r>
@@ -6655,7 +7027,7 @@
           <a:p>
             <a:pPr>
               <a:spcAft>
-                <a:spcPts val="1200"/>
+                <a:spcPts val="1000"/>
               </a:spcAft>
             </a:pPr>
             <a:r>
@@ -6675,6 +7047,93 @@
                 <a:latin typeface="Arial"/>
               </a:rPr>
               <a:t>Deploy LLM agents to draft automated weekly inflation briefs and alert DGCA of pricing anomalies.</a:t>
+            </a:r>
+          </a:p>
+        </p:txBody>
+      </p:sp>
+      <p:sp>
+        <p:nvSpPr>
+          <p:cNvPr id="16" name="Rectangle 15"/>
+          <p:cNvSpPr/>
+          <p:nvPr/>
+        </p:nvSpPr>
+        <p:spPr>
+          <a:xfrm>
+            <a:off x="457200" y="6473952"/>
+            <a:ext cx="11277295" cy="13716"/>
+          </a:xfrm>
+          <a:prstGeom prst="rect">
+            <a:avLst/>
+          </a:prstGeom>
+          <a:solidFill>
+            <a:srgbClr val="E2E8F0"/>
+          </a:solidFill>
+          <a:ln>
+            <a:noFill/>
+          </a:ln>
+        </p:spPr>
+        <p:style>
+          <a:lnRef idx="1">
+            <a:schemeClr val="accent1"/>
+          </a:lnRef>
+          <a:fillRef idx="3">
+            <a:schemeClr val="accent1"/>
+          </a:fillRef>
+          <a:effectRef idx="2">
+            <a:schemeClr val="accent1"/>
+          </a:effectRef>
+          <a:fontRef idx="minor">
+            <a:schemeClr val="lt1"/>
+          </a:fontRef>
+        </p:style>
+        <p:txBody>
+          <a:bodyPr rtlCol="0" anchor="ctr"/>
+          <a:lstStyle/>
+          <a:p>
+            <a:pPr algn="ctr"/>
+          </a:p>
+        </p:txBody>
+      </p:sp>
+      <p:sp>
+        <p:nvSpPr>
+          <p:cNvPr id="17" name="TextBox 16"/>
+          <p:cNvSpPr txBox="1"/>
+          <p:nvPr/>
+        </p:nvSpPr>
+        <p:spPr>
+          <a:xfrm>
+            <a:off x="457200" y="6510528"/>
+            <a:ext cx="11277295" cy="292608"/>
+          </a:xfrm>
+          <a:prstGeom prst="rect">
+            <a:avLst/>
+          </a:prstGeom>
+          <a:noFill/>
+        </p:spPr>
+        <p:txBody>
+          <a:bodyPr wrap="square" lIns="0" rIns="0" tIns="0" bIns="0">
+            <a:spAutoFit/>
+          </a:bodyPr>
+          <a:lstStyle/>
+          <a:p>
+            <a:pPr algn="ctr"/>
+            <a:r>
+              <a:rPr sz="1000" b="1">
+                <a:solidFill>
+                  <a:srgbClr val="475569"/>
+                </a:solidFill>
+                <a:latin typeface="Arial"/>
+              </a:rPr>
+              <a:t>Team Rookie  |  </a:t>
+            </a:r>
+            <a:r>
+              <a:rPr sz="1000" b="1">
+                <a:solidFill>
+                  <a:srgbClr val="1E293B"/>
+                </a:solidFill>
+                <a:latin typeface="Arial"/>
+              </a:rPr>
+              <a:t>[ Nikhil Kanse , Shivish Kumar , Tejas Patil , Pranav Pawale , Harsh Narkar , Blessy ]</a:t>
             </a:r>
           </a:p>
         </p:txBody>
@@ -6742,351 +7201,6 @@
       </p:sp>
       <p:sp>
         <p:nvSpPr>
-          <p:cNvPr id="3" name="Oval 2"/>
-          <p:cNvSpPr/>
-          <p:nvPr/>
-        </p:nvSpPr>
-        <p:spPr>
-          <a:xfrm>
-            <a:off x="365760" y="228600"/>
-            <a:ext cx="1645920" cy="777240"/>
-          </a:xfrm>
-          <a:prstGeom prst="ellipse">
-            <a:avLst/>
-          </a:prstGeom>
-          <a:solidFill>
-            <a:srgbClr val="FFFFFF"/>
-          </a:solidFill>
-          <a:ln w="25400">
-            <a:solidFill>
-              <a:srgbClr val="64508C"/>
-            </a:solidFill>
-          </a:ln>
-        </p:spPr>
-        <p:style>
-          <a:lnRef idx="1">
-            <a:schemeClr val="accent1"/>
-          </a:lnRef>
-          <a:fillRef idx="3">
-            <a:schemeClr val="accent1"/>
-          </a:fillRef>
-          <a:effectRef idx="2">
-            <a:schemeClr val="accent1"/>
-          </a:effectRef>
-          <a:fontRef idx="minor">
-            <a:schemeClr val="lt1"/>
-          </a:fontRef>
-        </p:style>
-        <p:txBody>
-          <a:bodyPr rtlCol="0" anchor="ctr" wrap="square"/>
-          <a:lstStyle/>
-          <a:p>
-            <a:pPr algn="ctr">
-              <a:defRPr sz="1400" b="1">
-                <a:solidFill>
-                  <a:srgbClr val="000000"/>
-                </a:solidFill>
-                <a:latin typeface="Arial"/>
-              </a:defRPr>
-            </a:pPr>
-            <a:r>
-              <a:t>Team Rookie</a:t>
-            </a:r>
-          </a:p>
-        </p:txBody>
-      </p:sp>
-      <p:sp>
-        <p:nvSpPr>
-          <p:cNvPr id="4" name="TextBox 3"/>
-          <p:cNvSpPr txBox="1"/>
-          <p:nvPr/>
-        </p:nvSpPr>
-        <p:spPr>
-          <a:xfrm>
-            <a:off x="2286000" y="182880"/>
-            <a:ext cx="7589520" cy="914400"/>
-          </a:xfrm>
-          <a:prstGeom prst="rect">
-            <a:avLst/>
-          </a:prstGeom>
-          <a:noFill/>
-        </p:spPr>
-        <p:txBody>
-          <a:bodyPr wrap="square" lIns="0" rIns="0" tIns="0" bIns="0">
-            <a:spAutoFit/>
-          </a:bodyPr>
-          <a:lstStyle/>
-          <a:p>
-            <a:pPr algn="ctr">
-              <a:defRPr sz="2800" b="1">
-                <a:solidFill>
-                  <a:srgbClr val="1B365D"/>
-                </a:solidFill>
-                <a:latin typeface="Times New Roman"/>
-              </a:defRPr>
-            </a:pPr>
-            <a:r>
-              <a:t>DEMO/PROTOTYPE</a:t>
-            </a:r>
-          </a:p>
-        </p:txBody>
-      </p:sp>
-      <p:pic>
-        <p:nvPicPr>
-          <p:cNvPr id="5" name="Picture 4" descr="sih_2026_logo_hd.png"/>
-          <p:cNvPicPr>
-            <a:picLocks noChangeAspect="1"/>
-          </p:cNvPicPr>
-          <p:nvPr/>
-        </p:nvPicPr>
-        <p:blipFill>
-          <a:blip r:embed="rId2"/>
-          <a:stretch>
-            <a:fillRect/>
-          </a:stretch>
-        </p:blipFill>
-        <p:spPr>
-          <a:xfrm>
-            <a:off x="10058400" y="146304"/>
-            <a:ext cx="1828800" cy="914400"/>
-          </a:xfrm>
-          <a:prstGeom prst="rect">
-            <a:avLst/>
-          </a:prstGeom>
-        </p:spPr>
-      </p:pic>
-      <p:sp>
-        <p:nvSpPr>
-          <p:cNvPr id="6" name="TextBox 5"/>
-          <p:cNvSpPr txBox="1"/>
-          <p:nvPr/>
-        </p:nvSpPr>
-        <p:spPr>
-          <a:xfrm>
-            <a:off x="914400" y="1188720"/>
-            <a:ext cx="4572000" cy="365760"/>
-          </a:xfrm>
-          <a:prstGeom prst="rect">
-            <a:avLst/>
-          </a:prstGeom>
-          <a:noFill/>
-        </p:spPr>
-        <p:txBody>
-          <a:bodyPr wrap="none">
-            <a:spAutoFit/>
-          </a:bodyPr>
-          <a:lstStyle/>
-          <a:p>
-            <a:pPr algn="ctr">
-              <a:defRPr sz="2200" b="1">
-                <a:solidFill>
-                  <a:srgbClr val="000000"/>
-                </a:solidFill>
-                <a:latin typeface="Arial"/>
-              </a:defRPr>
-            </a:pPr>
-            <a:r>
-              <a:t>DEMO</a:t>
-            </a:r>
-          </a:p>
-        </p:txBody>
-      </p:sp>
-      <p:sp>
-        <p:nvSpPr>
-          <p:cNvPr id="7" name="TextBox 6"/>
-          <p:cNvSpPr txBox="1"/>
-          <p:nvPr/>
-        </p:nvSpPr>
-        <p:spPr>
-          <a:xfrm>
-            <a:off x="6583680" y="1188720"/>
-            <a:ext cx="4572000" cy="365760"/>
-          </a:xfrm>
-          <a:prstGeom prst="rect">
-            <a:avLst/>
-          </a:prstGeom>
-          <a:noFill/>
-        </p:spPr>
-        <p:txBody>
-          <a:bodyPr wrap="none">
-            <a:spAutoFit/>
-          </a:bodyPr>
-          <a:lstStyle/>
-          <a:p>
-            <a:pPr algn="ctr">
-              <a:defRPr sz="2200" b="1">
-                <a:solidFill>
-                  <a:srgbClr val="000000"/>
-                </a:solidFill>
-                <a:latin typeface="Arial"/>
-              </a:defRPr>
-            </a:pPr>
-            <a:r>
-              <a:t>RESULT</a:t>
-            </a:r>
-          </a:p>
-        </p:txBody>
-      </p:sp>
-      <p:pic>
-        <p:nvPicPr>
-          <p:cNvPr id="8" name="Picture 7" descr="demo_chart_hd.png"/>
-          <p:cNvPicPr>
-            <a:picLocks noChangeAspect="1"/>
-          </p:cNvPicPr>
-          <p:nvPr/>
-        </p:nvPicPr>
-        <p:blipFill>
-          <a:blip r:embed="rId3"/>
-          <a:stretch>
-            <a:fillRect/>
-          </a:stretch>
-        </p:blipFill>
-        <p:spPr>
-          <a:xfrm>
-            <a:off x="548640" y="1600200"/>
-            <a:ext cx="5394960" cy="3154680"/>
-          </a:xfrm>
-          <a:prstGeom prst="rect">
-            <a:avLst/>
-          </a:prstGeom>
-        </p:spPr>
-      </p:pic>
-      <p:pic>
-        <p:nvPicPr>
-          <p:cNvPr id="9" name="Picture 8" descr="demo_table_hd.png"/>
-          <p:cNvPicPr>
-            <a:picLocks noChangeAspect="1"/>
-          </p:cNvPicPr>
-          <p:nvPr/>
-        </p:nvPicPr>
-        <p:blipFill>
-          <a:blip r:embed="rId4"/>
-          <a:stretch>
-            <a:fillRect/>
-          </a:stretch>
-        </p:blipFill>
-        <p:spPr>
-          <a:xfrm>
-            <a:off x="6217920" y="1600200"/>
-            <a:ext cx="5394960" cy="3154680"/>
-          </a:xfrm>
-          <a:prstGeom prst="rect">
-            <a:avLst/>
-          </a:prstGeom>
-        </p:spPr>
-      </p:pic>
-      <p:sp>
-        <p:nvSpPr>
-          <p:cNvPr id="10" name="TextBox 9"/>
-          <p:cNvSpPr txBox="1"/>
-          <p:nvPr/>
-        </p:nvSpPr>
-        <p:spPr>
-          <a:xfrm>
-            <a:off x="457200" y="4983480"/>
-            <a:ext cx="11277295" cy="1371600"/>
-          </a:xfrm>
-          <a:prstGeom prst="rect">
-            <a:avLst/>
-          </a:prstGeom>
-          <a:noFill/>
-        </p:spPr>
-        <p:txBody>
-          <a:bodyPr wrap="square">
-            <a:spAutoFit/>
-          </a:bodyPr>
-          <a:lstStyle/>
-          <a:p>
-            <a:pPr algn="ctr">
-              <a:defRPr sz="1600" b="1">
-                <a:solidFill>
-                  <a:srgbClr val="000000"/>
-                </a:solidFill>
-                <a:latin typeface="Arial"/>
-              </a:defRPr>
-            </a:pPr>
-            <a:r>
-              <a:t>Here’s the link to AirIntel India — your gateway to real-time airfare CPI intelligence:</a:t>
-            </a:r>
-          </a:p>
-          <a:p>
-            <a:pPr algn="ctr">
-              <a:defRPr sz="2200" b="1" u="sng">
-                <a:solidFill>
-                  <a:srgbClr val="1D4ED8"/>
-                </a:solidFill>
-                <a:latin typeface="Arial"/>
-              </a:defRPr>
-            </a:pPr>
-            <a:r>
-              <a:t>https://sihwinners.vercel.app</a:t>
-            </a:r>
-          </a:p>
-        </p:txBody>
-      </p:sp>
-    </p:spTree>
-  </p:cSld>
-  <p:clrMapOvr>
-    <a:masterClrMapping/>
-  </p:clrMapOvr>
-</p:sld>
-</file>
-
-<file path=ppt/slides/slide7.xml><?xml version="1.0" encoding="utf-8"?>
-<p:sld xmlns:a="http://schemas.openxmlformats.org/drawingml/2006/main" xmlns:p="http://schemas.openxmlformats.org/presentationml/2006/main" xmlns:r="http://schemas.openxmlformats.org/officeDocument/2006/relationships">
-  <p:cSld>
-    <p:spTree>
-      <p:nvGrpSpPr>
-        <p:cNvPr id="1" name=""/>
-        <p:cNvGrpSpPr/>
-        <p:nvPr/>
-      </p:nvGrpSpPr>
-      <p:grpSpPr/>
-      <p:sp>
-        <p:nvSpPr>
-          <p:cNvPr id="2" name="Rectangle 1"/>
-          <p:cNvSpPr/>
-          <p:nvPr/>
-        </p:nvSpPr>
-        <p:spPr>
-          <a:xfrm>
-            <a:off x="0" y="0"/>
-            <a:ext cx="12191695" cy="6858000"/>
-          </a:xfrm>
-          <a:prstGeom prst="rect">
-            <a:avLst/>
-          </a:prstGeom>
-          <a:solidFill>
-            <a:srgbClr val="FFFFFF"/>
-          </a:solidFill>
-          <a:ln>
-            <a:noFill/>
-          </a:ln>
-        </p:spPr>
-        <p:style>
-          <a:lnRef idx="1">
-            <a:schemeClr val="accent1"/>
-          </a:lnRef>
-          <a:fillRef idx="3">
-            <a:schemeClr val="accent1"/>
-          </a:fillRef>
-          <a:effectRef idx="2">
-            <a:schemeClr val="accent1"/>
-          </a:effectRef>
-          <a:fontRef idx="minor">
-            <a:schemeClr val="lt1"/>
-          </a:fontRef>
-        </p:style>
-        <p:txBody>
-          <a:bodyPr rtlCol="0" anchor="ctr"/>
-          <a:lstStyle/>
-          <a:p>
-            <a:pPr algn="ctr"/>
-          </a:p>
-        </p:txBody>
-      </p:sp>
-      <p:sp>
-        <p:nvSpPr>
           <p:cNvPr id="3" name="TextBox 2"/>
           <p:cNvSpPr txBox="1"/>
           <p:nvPr/>
@@ -7154,7 +7268,7 @@
         <p:spPr>
           <a:xfrm>
             <a:off x="320040" y="1234440"/>
-            <a:ext cx="5715000" cy="2560320"/>
+            <a:ext cx="5715000" cy="2423160"/>
           </a:xfrm>
           <a:prstGeom prst="rect">
             <a:avLst/>
@@ -7197,7 +7311,7 @@
         <p:spPr>
           <a:xfrm>
             <a:off x="548640" y="1417320"/>
-            <a:ext cx="5257800" cy="2286000"/>
+            <a:ext cx="5257800" cy="2148840"/>
           </a:xfrm>
           <a:prstGeom prst="rect">
             <a:avLst/>
@@ -7268,7 +7382,7 @@
         <p:spPr>
           <a:xfrm>
             <a:off x="6172200" y="1234440"/>
-            <a:ext cx="5715000" cy="2560320"/>
+            <a:ext cx="5715000" cy="2423160"/>
           </a:xfrm>
           <a:prstGeom prst="rect">
             <a:avLst/>
@@ -7311,7 +7425,7 @@
         <p:spPr>
           <a:xfrm>
             <a:off x="6400800" y="1417320"/>
-            <a:ext cx="5257800" cy="2286000"/>
+            <a:ext cx="5257800" cy="2148840"/>
           </a:xfrm>
           <a:prstGeom prst="rect">
             <a:avLst/>
@@ -7413,8 +7527,8 @@
         </p:nvSpPr>
         <p:spPr>
           <a:xfrm>
-            <a:off x="320040" y="3977639"/>
-            <a:ext cx="5715000" cy="2560320"/>
+            <a:off x="320040" y="3886200"/>
+            <a:ext cx="5715000" cy="2423160"/>
           </a:xfrm>
           <a:prstGeom prst="rect">
             <a:avLst/>
@@ -7456,8 +7570,8 @@
         </p:nvSpPr>
         <p:spPr>
           <a:xfrm>
-            <a:off x="548640" y="4160519"/>
-            <a:ext cx="5257800" cy="2286000"/>
+            <a:off x="548640" y="4069080"/>
+            <a:ext cx="5257800" cy="2148840"/>
           </a:xfrm>
           <a:prstGeom prst="rect">
             <a:avLst/>
@@ -7559,8 +7673,8 @@
         </p:nvSpPr>
         <p:spPr>
           <a:xfrm>
-            <a:off x="6172200" y="3977639"/>
-            <a:ext cx="5715000" cy="2560320"/>
+            <a:off x="6172200" y="3886200"/>
+            <a:ext cx="5715000" cy="2423160"/>
           </a:xfrm>
           <a:prstGeom prst="rect">
             <a:avLst/>
@@ -7602,8 +7716,8 @@
         </p:nvSpPr>
         <p:spPr>
           <a:xfrm>
-            <a:off x="6400800" y="4160519"/>
-            <a:ext cx="5257800" cy="2286000"/>
+            <a:off x="6400800" y="4069080"/>
+            <a:ext cx="5257800" cy="2148840"/>
           </a:xfrm>
           <a:prstGeom prst="rect">
             <a:avLst/>
@@ -7693,6 +7807,93 @@
             </a:pPr>
             <a:r>
               <a:t>• Deployment: Dockerized serverless cron (02:00 AM) + Vercel Edge Web Portal.</a:t>
+            </a:r>
+          </a:p>
+        </p:txBody>
+      </p:sp>
+      <p:sp>
+        <p:nvSpPr>
+          <p:cNvPr id="13" name="Rectangle 12"/>
+          <p:cNvSpPr/>
+          <p:nvPr/>
+        </p:nvSpPr>
+        <p:spPr>
+          <a:xfrm>
+            <a:off x="457200" y="6473952"/>
+            <a:ext cx="11277295" cy="13716"/>
+          </a:xfrm>
+          <a:prstGeom prst="rect">
+            <a:avLst/>
+          </a:prstGeom>
+          <a:solidFill>
+            <a:srgbClr val="E2E8F0"/>
+          </a:solidFill>
+          <a:ln>
+            <a:noFill/>
+          </a:ln>
+        </p:spPr>
+        <p:style>
+          <a:lnRef idx="1">
+            <a:schemeClr val="accent1"/>
+          </a:lnRef>
+          <a:fillRef idx="3">
+            <a:schemeClr val="accent1"/>
+          </a:fillRef>
+          <a:effectRef idx="2">
+            <a:schemeClr val="accent1"/>
+          </a:effectRef>
+          <a:fontRef idx="minor">
+            <a:schemeClr val="lt1"/>
+          </a:fontRef>
+        </p:style>
+        <p:txBody>
+          <a:bodyPr rtlCol="0" anchor="ctr"/>
+          <a:lstStyle/>
+          <a:p>
+            <a:pPr algn="ctr"/>
+          </a:p>
+        </p:txBody>
+      </p:sp>
+      <p:sp>
+        <p:nvSpPr>
+          <p:cNvPr id="14" name="TextBox 13"/>
+          <p:cNvSpPr txBox="1"/>
+          <p:nvPr/>
+        </p:nvSpPr>
+        <p:spPr>
+          <a:xfrm>
+            <a:off x="457200" y="6510528"/>
+            <a:ext cx="11277295" cy="292608"/>
+          </a:xfrm>
+          <a:prstGeom prst="rect">
+            <a:avLst/>
+          </a:prstGeom>
+          <a:noFill/>
+        </p:spPr>
+        <p:txBody>
+          <a:bodyPr wrap="square" lIns="0" rIns="0" tIns="0" bIns="0">
+            <a:spAutoFit/>
+          </a:bodyPr>
+          <a:lstStyle/>
+          <a:p>
+            <a:pPr algn="ctr"/>
+            <a:r>
+              <a:rPr sz="1000" b="1">
+                <a:solidFill>
+                  <a:srgbClr val="475569"/>
+                </a:solidFill>
+                <a:latin typeface="Arial"/>
+              </a:rPr>
+              <a:t>Team Rookie  |  </a:t>
+            </a:r>
+            <a:r>
+              <a:rPr sz="1000" b="1">
+                <a:solidFill>
+                  <a:srgbClr val="1E293B"/>
+                </a:solidFill>
+                <a:latin typeface="Arial"/>
+              </a:rPr>
+              <a:t>[ Nikhil Kanse , Shivish Kumar , Tejas Patil , Pranav Pawale , Harsh Narkar , Blessy ]</a:t>
             </a:r>
           </a:p>
         </p:txBody>

--- a/AirIntel_India_SIH26056_Presentation.pptx
+++ b/AirIntel_India_SIH26056_Presentation.pptx
@@ -3144,8 +3144,8 @@
         </p:nvSpPr>
         <p:spPr>
           <a:xfrm>
-            <a:off x="731520" y="365760"/>
-            <a:ext cx="8961120" cy="1097280"/>
+            <a:off x="822960" y="502920"/>
+            <a:ext cx="10515600" cy="914400"/>
           </a:xfrm>
           <a:prstGeom prst="rect">
             <a:avLst/>
@@ -3158,7 +3158,7 @@
           </a:bodyPr>
           <a:lstStyle/>
           <a:p>
-            <a:pPr>
+            <a:pPr algn="ctr">
               <a:defRPr sz="3600" b="1">
                 <a:solidFill>
                   <a:srgbClr val="1B365D"/>
@@ -3172,9 +3172,45 @@
           </a:p>
         </p:txBody>
       </p:sp>
+      <p:sp>
+        <p:nvSpPr>
+          <p:cNvPr id="4" name="TextBox 3"/>
+          <p:cNvSpPr txBox="1"/>
+          <p:nvPr/>
+        </p:nvSpPr>
+        <p:spPr>
+          <a:xfrm>
+            <a:off x="2286000" y="1280160"/>
+            <a:ext cx="7589520" cy="411480"/>
+          </a:xfrm>
+          <a:prstGeom prst="rect">
+            <a:avLst/>
+          </a:prstGeom>
+          <a:noFill/>
+        </p:spPr>
+        <p:txBody>
+          <a:bodyPr wrap="none">
+            <a:spAutoFit/>
+          </a:bodyPr>
+          <a:lstStyle/>
+          <a:p>
+            <a:pPr algn="ctr">
+              <a:defRPr sz="1300" b="1">
+                <a:solidFill>
+                  <a:srgbClr val="184C94"/>
+                </a:solidFill>
+                <a:latin typeface="Arial"/>
+              </a:defRPr>
+            </a:pPr>
+            <a:r>
+              <a:t>Sovereign Digital Public Infrastructure for MoSPI NSO &amp; RBI Inflation Targeting</a:t>
+            </a:r>
+          </a:p>
+        </p:txBody>
+      </p:sp>
       <p:pic>
         <p:nvPicPr>
-          <p:cNvPr id="4" name="Picture 3" descr="sih_2026_logo_hd.png"/>
+          <p:cNvPr id="5" name="Picture 4" descr="sih_2026_logo_hd.png"/>
           <p:cNvPicPr>
             <a:picLocks noChangeAspect="1"/>
           </p:cNvPicPr>
@@ -3188,8 +3224,8 @@
         </p:blipFill>
         <p:spPr>
           <a:xfrm>
-            <a:off x="10058400" y="182880"/>
-            <a:ext cx="1828800" cy="914400"/>
+            <a:off x="10149840" y="182880"/>
+            <a:ext cx="1645920" cy="822960"/>
           </a:xfrm>
           <a:prstGeom prst="rect">
             <a:avLst/>
@@ -3198,7 +3234,7 @@
       </p:pic>
       <p:pic>
         <p:nvPicPr>
-          <p:cNvPr id="5" name="Picture 4" descr="sih_cover_badge_hd.png"/>
+          <p:cNvPr id="6" name="Picture 5" descr="sih_cover_badge_hd.png"/>
           <p:cNvPicPr>
             <a:picLocks noChangeAspect="1"/>
           </p:cNvPicPr>
@@ -3212,8 +3248,8 @@
         </p:blipFill>
         <p:spPr>
           <a:xfrm>
-            <a:off x="7589520" y="1280160"/>
-            <a:ext cx="4114800" cy="5029200"/>
+            <a:off x="7589520" y="1828800"/>
+            <a:ext cx="3931920" cy="4389120"/>
           </a:xfrm>
           <a:prstGeom prst="rect">
             <a:avLst/>
@@ -3222,221 +3258,27 @@
       </p:pic>
       <p:sp>
         <p:nvSpPr>
-          <p:cNvPr id="6" name="TextBox 5"/>
-          <p:cNvSpPr txBox="1"/>
-          <p:nvPr/>
-        </p:nvSpPr>
-        <p:spPr>
-          <a:xfrm>
-            <a:off x="731520" y="1508760"/>
-            <a:ext cx="6858000" cy="4892040"/>
-          </a:xfrm>
-          <a:prstGeom prst="rect">
-            <a:avLst/>
-          </a:prstGeom>
-          <a:noFill/>
-        </p:spPr>
-        <p:txBody>
-          <a:bodyPr wrap="square" lIns="0" tIns="0" rIns="0" bIns="0">
-            <a:spAutoFit/>
-          </a:bodyPr>
-          <a:lstStyle/>
-          <a:p>
-            <a:pPr>
-              <a:spcAft>
-                <a:spcPts val="800"/>
-              </a:spcAft>
-            </a:pPr>
-            <a:r>
-              <a:rPr sz="1800" b="1">
-                <a:solidFill>
-                  <a:srgbClr val="000000"/>
-                </a:solidFill>
-                <a:latin typeface="Arial"/>
-              </a:rPr>
-              <a:t>• Problem Statement ID – </a:t>
-            </a:r>
-            <a:r>
-              <a:rPr sz="1800" b="1">
-                <a:solidFill>
-                  <a:srgbClr val="184C94"/>
-                </a:solidFill>
-                <a:latin typeface="Arial"/>
-              </a:rPr>
-              <a:t>SIH26056</a:t>
-            </a:r>
-          </a:p>
-          <a:p>
-            <a:pPr>
-              <a:spcAft>
-                <a:spcPts val="800"/>
-              </a:spcAft>
-            </a:pPr>
-            <a:r>
-              <a:rPr sz="1600" b="1">
-                <a:solidFill>
-                  <a:srgbClr val="000000"/>
-                </a:solidFill>
-                <a:latin typeface="Arial"/>
-              </a:rPr>
-              <a:t>• Problem Statement Title- </a:t>
-            </a:r>
-            <a:r>
-              <a:rPr sz="1600" b="1">
-                <a:solidFill>
-                  <a:srgbClr val="184C94"/>
-                </a:solidFill>
-                <a:latin typeface="Arial"/>
-              </a:rPr>
-              <a:t>Development of a Real-time Airfare Price Index for India through Automated Web Scraping of Airline and Online Travel Aggregator Portals for Augmentation of the Consumer Price Index (CPI)</a:t>
-            </a:r>
-          </a:p>
-          <a:p>
-            <a:pPr>
-              <a:spcAft>
-                <a:spcPts val="800"/>
-              </a:spcAft>
-            </a:pPr>
-            <a:r>
-              <a:rPr sz="1800" b="1">
-                <a:solidFill>
-                  <a:srgbClr val="000000"/>
-                </a:solidFill>
-                <a:latin typeface="Arial"/>
-              </a:rPr>
-              <a:t>• Theme- </a:t>
-            </a:r>
-            <a:r>
-              <a:rPr sz="1800" b="1">
-                <a:solidFill>
-                  <a:srgbClr val="184C94"/>
-                </a:solidFill>
-                <a:latin typeface="Arial"/>
-              </a:rPr>
-              <a:t>Smart Governance / Miscellaneous</a:t>
-            </a:r>
-          </a:p>
-          <a:p>
-            <a:pPr>
-              <a:spcAft>
-                <a:spcPts val="800"/>
-              </a:spcAft>
-            </a:pPr>
-            <a:r>
-              <a:rPr sz="1800" b="1">
-                <a:solidFill>
-                  <a:srgbClr val="000000"/>
-                </a:solidFill>
-                <a:latin typeface="Arial"/>
-              </a:rPr>
-              <a:t>• PS Category- </a:t>
-            </a:r>
-            <a:r>
-              <a:rPr sz="1800" b="1">
-                <a:solidFill>
-                  <a:srgbClr val="184C94"/>
-                </a:solidFill>
-                <a:latin typeface="Arial"/>
-              </a:rPr>
-              <a:t>Software</a:t>
-            </a:r>
-          </a:p>
-          <a:p>
-            <a:pPr>
-              <a:spcAft>
-                <a:spcPts val="800"/>
-              </a:spcAft>
-            </a:pPr>
-            <a:r>
-              <a:rPr sz="1800" b="1">
-                <a:solidFill>
-                  <a:srgbClr val="000000"/>
-                </a:solidFill>
-                <a:latin typeface="Arial"/>
-              </a:rPr>
-              <a:t>• Team ID- </a:t>
-            </a:r>
-            <a:r>
-              <a:rPr sz="1800" b="1">
-                <a:solidFill>
-                  <a:srgbClr val="184C94"/>
-                </a:solidFill>
-                <a:latin typeface="Arial"/>
-              </a:rPr>
-              <a:t>Team Rookie</a:t>
-            </a:r>
-          </a:p>
-          <a:p>
-            <a:pPr>
-              <a:spcAft>
-                <a:spcPts val="800"/>
-              </a:spcAft>
-            </a:pPr>
-            <a:r>
-              <a:rPr sz="1800" b="1">
-                <a:solidFill>
-                  <a:srgbClr val="000000"/>
-                </a:solidFill>
-                <a:latin typeface="Arial"/>
-              </a:rPr>
-              <a:t>• Team Name- </a:t>
-            </a:r>
-            <a:r>
-              <a:rPr sz="1800" b="1">
-                <a:solidFill>
-                  <a:srgbClr val="184C94"/>
-                </a:solidFill>
-                <a:latin typeface="Arial"/>
-              </a:rPr>
-              <a:t>Team Rookie</a:t>
-            </a:r>
-          </a:p>
-          <a:p>
-            <a:pPr>
-              <a:spcAft>
-                <a:spcPts val="800"/>
-              </a:spcAft>
-            </a:pPr>
-            <a:r>
-              <a:rPr sz="1600" b="1">
-                <a:solidFill>
-                  <a:srgbClr val="000000"/>
-                </a:solidFill>
-                <a:latin typeface="Arial"/>
-              </a:rPr>
-              <a:t>• Team Members- </a:t>
-            </a:r>
-            <a:r>
-              <a:rPr sz="1600" b="1">
-                <a:solidFill>
-                  <a:srgbClr val="184C94"/>
-                </a:solidFill>
-                <a:latin typeface="Arial"/>
-              </a:rPr>
-              <a:t>Nikhil Kanse, Shivish Kumar, Tejas Patil, Pranav Pawale, Harsh Narkar, Blessy</a:t>
-            </a:r>
-          </a:p>
-        </p:txBody>
-      </p:sp>
-      <p:sp>
-        <p:nvSpPr>
-          <p:cNvPr id="7" name="Rectangle 6"/>
+          <p:cNvPr id="7" name="Rounded Rectangle 6"/>
           <p:cNvSpPr/>
           <p:nvPr/>
         </p:nvSpPr>
         <p:spPr>
           <a:xfrm>
-            <a:off x="457200" y="6473952"/>
-            <a:ext cx="11277295" cy="13716"/>
-          </a:xfrm>
-          <a:prstGeom prst="rect">
-            <a:avLst/>
+            <a:off x="822960" y="1874519"/>
+            <a:ext cx="6583680" cy="4297680"/>
+          </a:xfrm>
+          <a:prstGeom prst="roundRect">
+            <a:avLst>
+              <a:gd name="adj" fmla="val 4000"/>
+            </a:avLst>
           </a:prstGeom>
           <a:solidFill>
-            <a:srgbClr val="E2E8F0"/>
+            <a:srgbClr val="F8FAFC"/>
           </a:solidFill>
-          <a:ln>
-            <a:noFill/>
+          <a:ln w="19050">
+            <a:solidFill>
+              <a:srgbClr val="CBD5E1"/>
+            </a:solidFill>
           </a:ln>
         </p:spPr>
         <p:style>
@@ -3469,8 +3311,8 @@
         </p:nvSpPr>
         <p:spPr>
           <a:xfrm>
-            <a:off x="457200" y="6510528"/>
-            <a:ext cx="11277295" cy="292608"/>
+            <a:off x="1097280" y="2057400"/>
+            <a:ext cx="6035040" cy="3931920"/>
           </a:xfrm>
           <a:prstGeom prst="rect">
             <a:avLst/>
@@ -3478,29 +3320,158 @@
           <a:noFill/>
         </p:spPr>
         <p:txBody>
-          <a:bodyPr wrap="square" lIns="0" rIns="0" tIns="0" bIns="0">
+          <a:bodyPr wrap="square" lIns="0" tIns="0" rIns="0" bIns="0">
             <a:spAutoFit/>
           </a:bodyPr>
           <a:lstStyle/>
           <a:p>
-            <a:pPr algn="ctr"/>
-            <a:r>
-              <a:rPr sz="1000" b="1">
-                <a:solidFill>
-                  <a:srgbClr val="475569"/>
+            <a:pPr>
+              <a:spcAft>
+                <a:spcPts val="1400"/>
+              </a:spcAft>
+            </a:pPr>
+            <a:r>
+              <a:rPr sz="1600" b="1">
+                <a:solidFill>
+                  <a:srgbClr val="0F172A"/>
                 </a:solidFill>
                 <a:latin typeface="Arial"/>
               </a:rPr>
-              <a:t>Team Rookie  |  </a:t>
-            </a:r>
-            <a:r>
-              <a:rPr sz="1000" b="1">
-                <a:solidFill>
-                  <a:srgbClr val="1E293B"/>
+              <a:t>• Problem Statement ID – </a:t>
+            </a:r>
+            <a:r>
+              <a:rPr sz="1600" b="1">
+                <a:solidFill>
+                  <a:srgbClr val="184C94"/>
                 </a:solidFill>
                 <a:latin typeface="Arial"/>
               </a:rPr>
-              <a:t>[ Nikhil Kanse , Shivish Kumar , Tejas Patil , Pranav Pawale , Harsh Narkar , Blessy ]</a:t>
+              <a:t>SIH26056</a:t>
+            </a:r>
+          </a:p>
+          <a:p>
+            <a:pPr>
+              <a:spcAft>
+                <a:spcPts val="1400"/>
+              </a:spcAft>
+            </a:pPr>
+            <a:r>
+              <a:rPr sz="1600" b="1">
+                <a:solidFill>
+                  <a:srgbClr val="0F172A"/>
+                </a:solidFill>
+                <a:latin typeface="Arial"/>
+              </a:rPr>
+              <a:t>• Problem Statement Title – </a:t>
+            </a:r>
+            <a:r>
+              <a:rPr sz="1600" b="1">
+                <a:solidFill>
+                  <a:srgbClr val="184C94"/>
+                </a:solidFill>
+                <a:latin typeface="Arial"/>
+              </a:rPr>
+              <a:t>Real-time Airfare Price Index for CPI Augmentation</a:t>
+            </a:r>
+          </a:p>
+          <a:p>
+            <a:pPr>
+              <a:spcAft>
+                <a:spcPts val="1400"/>
+              </a:spcAft>
+            </a:pPr>
+            <a:r>
+              <a:rPr sz="1600" b="1">
+                <a:solidFill>
+                  <a:srgbClr val="0F172A"/>
+                </a:solidFill>
+                <a:latin typeface="Arial"/>
+              </a:rPr>
+              <a:t>• Theme – </a:t>
+            </a:r>
+            <a:r>
+              <a:rPr sz="1600" b="1">
+                <a:solidFill>
+                  <a:srgbClr val="184C94"/>
+                </a:solidFill>
+                <a:latin typeface="Arial"/>
+              </a:rPr>
+              <a:t>Smart Governance / Miscellaneous</a:t>
+            </a:r>
+          </a:p>
+          <a:p>
+            <a:pPr>
+              <a:spcAft>
+                <a:spcPts val="1400"/>
+              </a:spcAft>
+            </a:pPr>
+            <a:r>
+              <a:rPr sz="1600" b="1">
+                <a:solidFill>
+                  <a:srgbClr val="0F172A"/>
+                </a:solidFill>
+                <a:latin typeface="Arial"/>
+              </a:rPr>
+              <a:t>• PS Category – </a:t>
+            </a:r>
+            <a:r>
+              <a:rPr sz="1600" b="1">
+                <a:solidFill>
+                  <a:srgbClr val="184C94"/>
+                </a:solidFill>
+                <a:latin typeface="Arial"/>
+              </a:rPr>
+              <a:t>Software</a:t>
+            </a:r>
+          </a:p>
+          <a:p>
+            <a:pPr>
+              <a:spcAft>
+                <a:spcPts val="1400"/>
+              </a:spcAft>
+            </a:pPr>
+            <a:r>
+              <a:rPr sz="1600" b="1">
+                <a:solidFill>
+                  <a:srgbClr val="0F172A"/>
+                </a:solidFill>
+                <a:latin typeface="Arial"/>
+              </a:rPr>
+              <a:t>• Team ID – </a:t>
+            </a:r>
+            <a:r>
+              <a:rPr sz="1600" b="1">
+                <a:solidFill>
+                  <a:srgbClr val="184C94"/>
+                </a:solidFill>
+                <a:latin typeface="Arial"/>
+              </a:rPr>
+              <a:t>Team Rookie</a:t>
+            </a:r>
+          </a:p>
+          <a:p>
+            <a:pPr>
+              <a:spcAft>
+                <a:spcPts val="1400"/>
+              </a:spcAft>
+            </a:pPr>
+            <a:r>
+              <a:rPr sz="1600" b="1">
+                <a:solidFill>
+                  <a:srgbClr val="0F172A"/>
+                </a:solidFill>
+                <a:latin typeface="Arial"/>
+              </a:rPr>
+              <a:t>• Team Name – </a:t>
+            </a:r>
+            <a:r>
+              <a:rPr sz="1600" b="1">
+                <a:solidFill>
+                  <a:srgbClr val="184C94"/>
+                </a:solidFill>
+                <a:latin typeface="Arial"/>
+              </a:rPr>
+              <a:t>Team Rookie</a:t>
             </a:r>
           </a:p>
         </p:txBody>
@@ -3568,24 +3539,26 @@
       </p:sp>
       <p:sp>
         <p:nvSpPr>
-          <p:cNvPr id="3" name="Oval 2"/>
+          <p:cNvPr id="3" name="Rounded Rectangle 2"/>
           <p:cNvSpPr/>
           <p:nvPr/>
         </p:nvSpPr>
         <p:spPr>
           <a:xfrm>
-            <a:off x="365760" y="228600"/>
-            <a:ext cx="1645920" cy="777240"/>
-          </a:xfrm>
-          <a:prstGeom prst="ellipse">
-            <a:avLst/>
+            <a:off x="548640" y="201168"/>
+            <a:ext cx="1645920" cy="566928"/>
+          </a:xfrm>
+          <a:prstGeom prst="roundRect">
+            <a:avLst>
+              <a:gd name="adj" fmla="val 50000"/>
+            </a:avLst>
           </a:prstGeom>
           <a:solidFill>
             <a:srgbClr val="FFFFFF"/>
           </a:solidFill>
-          <a:ln w="25400">
+          <a:ln w="19050">
             <a:solidFill>
-              <a:srgbClr val="64508C"/>
+              <a:srgbClr val="4338CA"/>
             </a:solidFill>
           </a:ln>
         </p:spPr>
@@ -3608,9 +3581,9 @@
           <a:lstStyle/>
           <a:p>
             <a:pPr algn="ctr">
-              <a:defRPr sz="1400" b="1">
-                <a:solidFill>
-                  <a:srgbClr val="000000"/>
+              <a:defRPr sz="1200" b="1">
+                <a:solidFill>
+                  <a:srgbClr val="4338CA"/>
                 </a:solidFill>
                 <a:latin typeface="Arial"/>
               </a:defRPr>
@@ -3629,8 +3602,8 @@
         </p:nvSpPr>
         <p:spPr>
           <a:xfrm>
-            <a:off x="2286000" y="182880"/>
-            <a:ext cx="7589520" cy="914400"/>
+            <a:off x="2286000" y="137160"/>
+            <a:ext cx="7589520" cy="868680"/>
           </a:xfrm>
           <a:prstGeom prst="rect">
             <a:avLst/>
@@ -3644,7 +3617,7 @@
           <a:lstStyle/>
           <a:p>
             <a:pPr algn="ctr">
-              <a:defRPr sz="2800" b="1">
+              <a:defRPr sz="2600" b="1">
                 <a:solidFill>
                   <a:srgbClr val="1B365D"/>
                 </a:solidFill>
@@ -3652,20 +3625,20 @@
               </a:defRPr>
             </a:pPr>
             <a:r>
-              <a:t>AIRINTEL INDIA</a:t>
+              <a:t>VAYUSUCHAK (वायु सूचक)</a:t>
             </a:r>
           </a:p>
           <a:p>
             <a:pPr algn="ctr">
-              <a:defRPr sz="1400" b="1">
-                <a:solidFill>
-                  <a:srgbClr val="000000"/>
+              <a:defRPr sz="1200" b="1">
+                <a:solidFill>
+                  <a:srgbClr val="184C94"/>
                 </a:solidFill>
                 <a:latin typeface="Arial"/>
               </a:defRPr>
             </a:pPr>
             <a:r>
-              <a:t>Augmenting CPI through High-Frequency Algorithmic Web Scraping</a:t>
+              <a:t>Real-Time Airfare Price Index (APIx) for Augmenting CPI</a:t>
             </a:r>
           </a:p>
         </p:txBody>
@@ -3686,34 +3659,60 @@
         </p:blipFill>
         <p:spPr>
           <a:xfrm>
-            <a:off x="10058400" y="146304"/>
-            <a:ext cx="1828800" cy="914400"/>
+            <a:off x="10149840" y="146304"/>
+            <a:ext cx="1645920" cy="777240"/>
           </a:xfrm>
           <a:prstGeom prst="rect">
             <a:avLst/>
           </a:prstGeom>
         </p:spPr>
       </p:pic>
-      <p:sp>
-        <p:nvSpPr>
-          <p:cNvPr id="6" name="Rounded Rectangle 5"/>
+      <p:pic>
+        <p:nvPicPr>
+          <p:cNvPr id="6" name="Picture 5" descr="problem_solution_diagram.png"/>
+          <p:cNvPicPr>
+            <a:picLocks noChangeAspect="1"/>
+          </p:cNvPicPr>
+          <p:nvPr/>
+        </p:nvPicPr>
+        <p:blipFill>
+          <a:blip r:embed="rId3"/>
+          <a:stretch>
+            <a:fillRect/>
+          </a:stretch>
+        </p:blipFill>
+        <p:spPr>
+          <a:xfrm>
+            <a:off x="640080" y="1143000"/>
+            <a:ext cx="10908792" cy="3611880"/>
+          </a:xfrm>
+          <a:prstGeom prst="rect">
+            <a:avLst/>
+          </a:prstGeom>
+        </p:spPr>
+      </p:pic>
+      <p:sp>
+        <p:nvSpPr>
+          <p:cNvPr id="7" name="Rounded Rectangle 6"/>
           <p:cNvSpPr/>
           <p:nvPr/>
         </p:nvSpPr>
         <p:spPr>
           <a:xfrm>
-            <a:off x="457200" y="1280160"/>
-            <a:ext cx="3657600" cy="5212080"/>
+            <a:off x="640080" y="4892040"/>
+            <a:ext cx="2633472" cy="1691640"/>
           </a:xfrm>
           <a:prstGeom prst="roundRect">
-            <a:avLst/>
+            <a:avLst>
+              <a:gd name="adj" fmla="val 8000"/>
+            </a:avLst>
           </a:prstGeom>
           <a:solidFill>
-            <a:srgbClr val="EEF5FF"/>
+            <a:srgbClr val="EFF6FF"/>
           </a:solidFill>
           <a:ln w="19050">
             <a:solidFill>
-              <a:srgbClr val="C7D2FE"/>
+              <a:srgbClr val="2563EB"/>
             </a:solidFill>
           </a:ln>
         </p:spPr>
@@ -3741,128 +3740,25 @@
       </p:sp>
       <p:sp>
         <p:nvSpPr>
-          <p:cNvPr id="7" name="TextBox 6"/>
-          <p:cNvSpPr txBox="1"/>
-          <p:nvPr/>
-        </p:nvSpPr>
-        <p:spPr>
-          <a:xfrm>
-            <a:off x="640080" y="1371600"/>
-            <a:ext cx="3291840" cy="4937760"/>
-          </a:xfrm>
-          <a:prstGeom prst="rect">
-            <a:avLst/>
-          </a:prstGeom>
-          <a:noFill/>
-        </p:spPr>
-        <p:txBody>
-          <a:bodyPr wrap="square" lIns="0" tIns="0" rIns="0" bIns="0">
-            <a:spAutoFit/>
-          </a:bodyPr>
-          <a:lstStyle/>
-          <a:p>
-            <a:pPr algn="ctr">
-              <a:spcAft>
-                <a:spcPts val="1200"/>
-              </a:spcAft>
-              <a:defRPr sz="2800" b="1">
-                <a:solidFill>
-                  <a:srgbClr val="7033A0"/>
-                </a:solidFill>
-                <a:latin typeface="Arial"/>
-              </a:defRPr>
-            </a:pPr>
-            <a:r>
-              <a:t>PROBLEM</a:t>
-            </a:r>
-          </a:p>
-          <a:p>
-            <a:pPr>
-              <a:spcAft>
-                <a:spcPts val="800"/>
-              </a:spcAft>
-              <a:defRPr sz="1200">
-                <a:solidFill>
-                  <a:srgbClr val="000000"/>
-                </a:solidFill>
-                <a:latin typeface="Arial"/>
-              </a:defRPr>
-            </a:pPr>
-            <a:r>
-              <a:t>• Manual Survey Bottleneck: Field staff manually query airline portals once a month for single spot quotes.</a:t>
-            </a:r>
-          </a:p>
-          <a:p>
-            <a:pPr>
-              <a:spcAft>
-                <a:spcPts val="800"/>
-              </a:spcAft>
-              <a:defRPr sz="1200">
-                <a:solidFill>
-                  <a:srgbClr val="000000"/>
-                </a:solidFill>
-                <a:latin typeface="Arial"/>
-              </a:defRPr>
-            </a:pPr>
-            <a:r>
-              <a:t>• Blind to Dynamic Pricing: Fails to capture algorithmic yield spikes, peak hour surges, and holiday load factors.</a:t>
-            </a:r>
-          </a:p>
-          <a:p>
-            <a:pPr>
-              <a:spcAft>
-                <a:spcPts val="800"/>
-              </a:spcAft>
-              <a:defRPr sz="1200">
-                <a:solidFill>
-                  <a:srgbClr val="000000"/>
-                </a:solidFill>
-                <a:latin typeface="Arial"/>
-              </a:defRPr>
-            </a:pPr>
-            <a:r>
-              <a:t>• Lead-Time Neglect: Completely ignores booking curves (1-day emergency surge vs. 45-day advance booking).</a:t>
-            </a:r>
-          </a:p>
-          <a:p>
-            <a:pPr>
-              <a:spcAft>
-                <a:spcPts val="800"/>
-              </a:spcAft>
-              <a:defRPr sz="1200">
-                <a:solidFill>
-                  <a:srgbClr val="000000"/>
-                </a:solidFill>
-                <a:latin typeface="Arial"/>
-              </a:defRPr>
-            </a:pPr>
-            <a:r>
-              <a:t>• 15-Day Policy Lag: Lagging data limits the responsiveness of RBI monetary policy and aviation regulators.</a:t>
-            </a:r>
-          </a:p>
-        </p:txBody>
-      </p:sp>
-      <p:sp>
-        <p:nvSpPr>
           <p:cNvPr id="8" name="Rounded Rectangle 7"/>
           <p:cNvSpPr/>
           <p:nvPr/>
         </p:nvSpPr>
         <p:spPr>
           <a:xfrm>
-            <a:off x="4297680" y="1325880"/>
-            <a:ext cx="877824" cy="502920"/>
+            <a:off x="640080" y="4892040"/>
+            <a:ext cx="2633472" cy="384048"/>
           </a:xfrm>
           <a:prstGeom prst="roundRect">
-            <a:avLst/>
+            <a:avLst>
+              <a:gd name="adj" fmla="val 20000"/>
+            </a:avLst>
           </a:prstGeom>
           <a:solidFill>
-            <a:srgbClr val="DBEAFE"/>
+            <a:srgbClr val="2563EB"/>
           </a:solidFill>
-          <a:ln w="12700">
-            <a:solidFill>
-              <a:srgbClr val="6366F1"/>
-            </a:solidFill>
+          <a:ln>
+            <a:noFill/>
           </a:ln>
         </p:spPr>
         <p:style>
@@ -3884,39 +3780,77 @@
           <a:lstStyle/>
           <a:p>
             <a:pPr algn="ctr">
-              <a:defRPr sz="1000" b="1">
-                <a:solidFill>
-                  <a:srgbClr val="000000"/>
+              <a:defRPr sz="1050" b="1">
+                <a:solidFill>
+                  <a:srgbClr val="FFFFFF"/>
                 </a:solidFill>
                 <a:latin typeface="Arial"/>
               </a:defRPr>
             </a:pPr>
             <a:r>
-              <a:t>1. Ingestion</a:t>
-            </a:r>
-          </a:p>
-        </p:txBody>
-      </p:sp>
-      <p:sp>
-        <p:nvSpPr>
-          <p:cNvPr id="9" name="Rounded Rectangle 8"/>
+              <a:t>★ Dynamic Yield Sensitivity</a:t>
+            </a:r>
+          </a:p>
+        </p:txBody>
+      </p:sp>
+      <p:sp>
+        <p:nvSpPr>
+          <p:cNvPr id="9" name="TextBox 8"/>
+          <p:cNvSpPr txBox="1"/>
+          <p:nvPr/>
+        </p:nvSpPr>
+        <p:spPr>
+          <a:xfrm>
+            <a:off x="749808" y="5330952"/>
+            <a:ext cx="2414016" cy="1216152"/>
+          </a:xfrm>
+          <a:prstGeom prst="rect">
+            <a:avLst/>
+          </a:prstGeom>
+          <a:noFill/>
+        </p:spPr>
+        <p:txBody>
+          <a:bodyPr wrap="square" lIns="0" rIns="0" tIns="0" bIns="0">
+            <a:spAutoFit/>
+          </a:bodyPr>
+          <a:lstStyle/>
+          <a:p>
+            <a:pPr>
+              <a:defRPr sz="1100">
+                <a:solidFill>
+                  <a:srgbClr val="1E293B"/>
+                </a:solidFill>
+                <a:latin typeface="Arial"/>
+              </a:defRPr>
+            </a:pPr>
+            <a:r>
+              <a:t>Captures high-frequency algorithmic yield surges across T+1..T+45 vs 15-day delayed manual visits.</a:t>
+            </a:r>
+          </a:p>
+        </p:txBody>
+      </p:sp>
+      <p:sp>
+        <p:nvSpPr>
+          <p:cNvPr id="10" name="Rounded Rectangle 9"/>
           <p:cNvSpPr/>
           <p:nvPr/>
         </p:nvSpPr>
         <p:spPr>
           <a:xfrm>
-            <a:off x="5285232" y="1325880"/>
-            <a:ext cx="877824" cy="502920"/>
+            <a:off x="3401568" y="4892040"/>
+            <a:ext cx="2633472" cy="1691640"/>
           </a:xfrm>
           <a:prstGeom prst="roundRect">
-            <a:avLst/>
+            <a:avLst>
+              <a:gd name="adj" fmla="val 8000"/>
+            </a:avLst>
           </a:prstGeom>
           <a:solidFill>
-            <a:srgbClr val="E9D5FF"/>
+            <a:srgbClr val="ECFDF5"/>
           </a:solidFill>
-          <a:ln w="12700">
+          <a:ln w="19050">
             <a:solidFill>
-              <a:srgbClr val="6366F1"/>
+              <a:srgbClr val="10B981"/>
             </a:solidFill>
           </a:ln>
         </p:spPr>
@@ -3938,41 +3872,31 @@
           <a:bodyPr rtlCol="0" anchor="ctr"/>
           <a:lstStyle/>
           <a:p>
-            <a:pPr algn="ctr">
-              <a:defRPr sz="1000" b="1">
-                <a:solidFill>
-                  <a:srgbClr val="000000"/>
-                </a:solidFill>
-                <a:latin typeface="Arial"/>
-              </a:defRPr>
-            </a:pPr>
-            <a:r>
-              <a:t>2. Cleanse</a:t>
-            </a:r>
-          </a:p>
-        </p:txBody>
-      </p:sp>
-      <p:sp>
-        <p:nvSpPr>
-          <p:cNvPr id="10" name="Rounded Rectangle 9"/>
+            <a:pPr algn="ctr"/>
+          </a:p>
+        </p:txBody>
+      </p:sp>
+      <p:sp>
+        <p:nvSpPr>
+          <p:cNvPr id="11" name="Rounded Rectangle 10"/>
           <p:cNvSpPr/>
           <p:nvPr/>
         </p:nvSpPr>
         <p:spPr>
           <a:xfrm>
-            <a:off x="6272784" y="1325880"/>
-            <a:ext cx="877824" cy="502920"/>
+            <a:off x="3401568" y="4892040"/>
+            <a:ext cx="2633472" cy="384048"/>
           </a:xfrm>
           <a:prstGeom prst="roundRect">
-            <a:avLst/>
+            <a:avLst>
+              <a:gd name="adj" fmla="val 20000"/>
+            </a:avLst>
           </a:prstGeom>
           <a:solidFill>
-            <a:srgbClr val="DBEAFE"/>
+            <a:srgbClr val="10B981"/>
           </a:solidFill>
-          <a:ln w="12700">
-            <a:solidFill>
-              <a:srgbClr val="6366F1"/>
-            </a:solidFill>
+          <a:ln>
+            <a:noFill/>
           </a:ln>
         </p:spPr>
         <p:style>
@@ -3994,39 +3918,77 @@
           <a:lstStyle/>
           <a:p>
             <a:pPr algn="ctr">
-              <a:defRPr sz="1000" b="1">
-                <a:solidFill>
-                  <a:srgbClr val="000000"/>
+              <a:defRPr sz="1050" b="1">
+                <a:solidFill>
+                  <a:srgbClr val="FFFFFF"/>
                 </a:solidFill>
                 <a:latin typeface="Arial"/>
               </a:defRPr>
             </a:pPr>
             <a:r>
-              <a:t>3. Jevons GM</a:t>
-            </a:r>
-          </a:p>
-        </p:txBody>
-      </p:sp>
-      <p:sp>
-        <p:nvSpPr>
-          <p:cNvPr id="11" name="Rounded Rectangle 10"/>
+              <a:t>★ Zero Upward Bias</a:t>
+            </a:r>
+          </a:p>
+        </p:txBody>
+      </p:sp>
+      <p:sp>
+        <p:nvSpPr>
+          <p:cNvPr id="12" name="TextBox 11"/>
+          <p:cNvSpPr txBox="1"/>
+          <p:nvPr/>
+        </p:nvSpPr>
+        <p:spPr>
+          <a:xfrm>
+            <a:off x="3511296" y="5330952"/>
+            <a:ext cx="2414016" cy="1216152"/>
+          </a:xfrm>
+          <a:prstGeom prst="rect">
+            <a:avLst/>
+          </a:prstGeom>
+          <a:noFill/>
+        </p:spPr>
+        <p:txBody>
+          <a:bodyPr wrap="square" lIns="0" rIns="0" tIns="0" bIns="0">
+            <a:spAutoFit/>
+          </a:bodyPr>
+          <a:lstStyle/>
+          <a:p>
+            <a:pPr>
+              <a:defRPr sz="1100">
+                <a:solidFill>
+                  <a:srgbClr val="1E293B"/>
+                </a:solidFill>
+                <a:latin typeface="Arial"/>
+              </a:defRPr>
+            </a:pPr>
+            <a:r>
+              <a:t>UN/ILO Jevons geometric mean mathematically eliminates Dutot arithmetic upward distortion.</a:t>
+            </a:r>
+          </a:p>
+        </p:txBody>
+      </p:sp>
+      <p:sp>
+        <p:nvSpPr>
+          <p:cNvPr id="13" name="Rounded Rectangle 12"/>
           <p:cNvSpPr/>
           <p:nvPr/>
         </p:nvSpPr>
         <p:spPr>
           <a:xfrm>
-            <a:off x="7260336" y="1325880"/>
-            <a:ext cx="877824" cy="502920"/>
+            <a:off x="6163056" y="4892040"/>
+            <a:ext cx="2633472" cy="1691640"/>
           </a:xfrm>
           <a:prstGeom prst="roundRect">
-            <a:avLst/>
+            <a:avLst>
+              <a:gd name="adj" fmla="val 8000"/>
+            </a:avLst>
           </a:prstGeom>
           <a:solidFill>
-            <a:srgbClr val="E9D5FF"/>
+            <a:srgbClr val="F5F3FF"/>
           </a:solidFill>
-          <a:ln w="12700">
+          <a:ln w="19050">
             <a:solidFill>
-              <a:srgbClr val="6366F1"/>
+              <a:srgbClr val="7C3AED"/>
             </a:solidFill>
           </a:ln>
         </p:spPr>
@@ -4048,41 +4010,31 @@
           <a:bodyPr rtlCol="0" anchor="ctr"/>
           <a:lstStyle/>
           <a:p>
-            <a:pPr algn="ctr">
-              <a:defRPr sz="1000" b="1">
-                <a:solidFill>
-                  <a:srgbClr val="000000"/>
-                </a:solidFill>
-                <a:latin typeface="Arial"/>
-              </a:defRPr>
-            </a:pPr>
-            <a:r>
-              <a:t>4. Laspeyres</a:t>
-            </a:r>
-          </a:p>
-        </p:txBody>
-      </p:sp>
-      <p:sp>
-        <p:nvSpPr>
-          <p:cNvPr id="12" name="Rounded Rectangle 11"/>
+            <a:pPr algn="ctr"/>
+          </a:p>
+        </p:txBody>
+      </p:sp>
+      <p:sp>
+        <p:nvSpPr>
+          <p:cNvPr id="14" name="Rounded Rectangle 13"/>
           <p:cNvSpPr/>
           <p:nvPr/>
         </p:nvSpPr>
         <p:spPr>
           <a:xfrm>
-            <a:off x="4297680" y="2011680"/>
-            <a:ext cx="3840480" cy="4480560"/>
+            <a:off x="6163056" y="4892040"/>
+            <a:ext cx="2633472" cy="384048"/>
           </a:xfrm>
           <a:prstGeom prst="roundRect">
-            <a:avLst/>
+            <a:avLst>
+              <a:gd name="adj" fmla="val 20000"/>
+            </a:avLst>
           </a:prstGeom>
           <a:solidFill>
-            <a:srgbClr val="FFFFFF"/>
+            <a:srgbClr val="7C3AED"/>
           </a:solidFill>
-          <a:ln w="38100">
-            <a:solidFill>
-              <a:srgbClr val="000000"/>
-            </a:solidFill>
+          <a:ln>
+            <a:noFill/>
           </a:ln>
         </p:spPr>
         <p:style>
@@ -4103,20 +4055,30 @@
           <a:bodyPr rtlCol="0" anchor="ctr"/>
           <a:lstStyle/>
           <a:p>
-            <a:pPr algn="ctr"/>
-          </a:p>
-        </p:txBody>
-      </p:sp>
-      <p:sp>
-        <p:nvSpPr>
-          <p:cNvPr id="13" name="TextBox 12"/>
+            <a:pPr algn="ctr">
+              <a:defRPr sz="1050" b="1">
+                <a:solidFill>
+                  <a:srgbClr val="FFFFFF"/>
+                </a:solidFill>
+                <a:latin typeface="Arial"/>
+              </a:defRPr>
+            </a:pPr>
+            <a:r>
+              <a:t>★ Cryptographic Audit</a:t>
+            </a:r>
+          </a:p>
+        </p:txBody>
+      </p:sp>
+      <p:sp>
+        <p:nvSpPr>
+          <p:cNvPr id="15" name="TextBox 14"/>
           <p:cNvSpPr txBox="1"/>
           <p:nvPr/>
         </p:nvSpPr>
         <p:spPr>
           <a:xfrm>
-            <a:off x="4434840" y="2148840"/>
-            <a:ext cx="3566160" cy="4206240"/>
+            <a:off x="6272784" y="5330952"/>
+            <a:ext cx="2414016" cy="1216152"/>
           </a:xfrm>
           <a:prstGeom prst="rect">
             <a:avLst/>
@@ -4124,157 +4086,47 @@
           <a:noFill/>
         </p:spPr>
         <p:txBody>
-          <a:bodyPr wrap="square" lIns="0" tIns="0" rIns="0" bIns="0">
+          <a:bodyPr wrap="square" lIns="0" rIns="0" tIns="0" bIns="0">
             <a:spAutoFit/>
           </a:bodyPr>
           <a:lstStyle/>
           <a:p>
-            <a:pPr algn="ctr">
-              <a:defRPr sz="2000" b="1">
-                <a:solidFill>
-                  <a:srgbClr val="000000"/>
+            <a:pPr>
+              <a:defRPr sz="1100">
+                <a:solidFill>
+                  <a:srgbClr val="1E293B"/>
                 </a:solidFill>
                 <a:latin typeface="Arial"/>
               </a:defRPr>
             </a:pPr>
             <a:r>
-              <a:t>Our solution</a:t>
-            </a:r>
-          </a:p>
-          <a:p>
-            <a:pPr>
-              <a:spcAft>
-                <a:spcPts val="600"/>
-              </a:spcAft>
-              <a:defRPr sz="1150" b="1">
-                <a:solidFill>
-                  <a:srgbClr val="000000"/>
-                </a:solidFill>
-                <a:latin typeface="Arial"/>
-              </a:defRPr>
-            </a:pPr>
-            <a:r>
-              <a:t>An automated high-frequency pipeline that:</a:t>
-            </a:r>
-          </a:p>
-          <a:p>
-            <a:pPr>
-              <a:spcAft>
-                <a:spcPts val="400"/>
-              </a:spcAft>
-              <a:defRPr sz="1050">
-                <a:solidFill>
-                  <a:srgbClr val="000000"/>
-                </a:solidFill>
-                <a:latin typeface="Arial"/>
-              </a:defRPr>
-            </a:pPr>
-            <a:r>
-              <a:t>• Scrapes raw fares across IndiGo, Air India, SpiceJet &amp; OTAs via scheduled Playwright crawlers.</a:t>
-            </a:r>
-          </a:p>
-          <a:p>
-            <a:pPr>
-              <a:spcAft>
-                <a:spcPts val="400"/>
-              </a:spcAft>
-              <a:defRPr sz="1050">
-                <a:solidFill>
-                  <a:srgbClr val="000000"/>
-                </a:solidFill>
-                <a:latin typeface="Arial"/>
-              </a:defRPr>
-            </a:pPr>
-            <a:r>
-              <a:t>• Samples 5 forward lead times (1d, 7d, 15d, 30d, 45d) for complete horizon capture.</a:t>
-            </a:r>
-          </a:p>
-          <a:p>
-            <a:pPr>
-              <a:spcAft>
-                <a:spcPts val="400"/>
-              </a:spcAft>
-              <a:defRPr sz="1050">
-                <a:solidFill>
-                  <a:srgbClr val="000000"/>
-                </a:solidFill>
-                <a:latin typeface="Arial"/>
-              </a:defRPr>
-            </a:pPr>
-            <a:r>
-              <a:t>• Applies automated Z-score outlier filtering (|Z| &gt; 3.0) to flag dynamic surges.</a:t>
-            </a:r>
-          </a:p>
-          <a:p>
-            <a:pPr>
-              <a:spcAft>
-                <a:spcPts val="400"/>
-              </a:spcAft>
-              <a:defRPr sz="1050">
-                <a:solidFill>
-                  <a:srgbClr val="000000"/>
-                </a:solidFill>
-                <a:latin typeface="Arial"/>
-              </a:defRPr>
-            </a:pPr>
-            <a:r>
-              <a:t>• Calculates UN/ILO Jevons Elementary Geometric Mean to eliminate substitution bias.</a:t>
-            </a:r>
-          </a:p>
-          <a:p>
-            <a:pPr>
-              <a:spcAft>
-                <a:spcPts val="400"/>
-              </a:spcAft>
-              <a:defRPr sz="1050">
-                <a:solidFill>
-                  <a:srgbClr val="000000"/>
-                </a:solidFill>
-                <a:latin typeface="Arial"/>
-              </a:defRPr>
-            </a:pPr>
-            <a:r>
-              <a:t>• Aggregates National Laspeyres Index weighted by DGCA monthly passenger volume.</a:t>
-            </a:r>
-          </a:p>
-          <a:p>
-            <a:pPr>
-              <a:spcAft>
-                <a:spcPts val="400"/>
-              </a:spcAft>
-              <a:defRPr sz="1050">
-                <a:solidFill>
-                  <a:srgbClr val="000000"/>
-                </a:solidFill>
-                <a:latin typeface="Arial"/>
-              </a:defRPr>
-            </a:pPr>
-            <a:r>
-              <a:t>• Generates cryptographic SHA-256 provenance hashes for official MoSPI auditability.</a:t>
-            </a:r>
-          </a:p>
-        </p:txBody>
-      </p:sp>
-      <p:sp>
-        <p:nvSpPr>
-          <p:cNvPr id="14" name="Rounded Rectangle 13"/>
+              <a:t>SHA-256 batch fingerprints ensure legal evidentiary standards for MoSPI NSO &amp; courts.</a:t>
+            </a:r>
+          </a:p>
+        </p:txBody>
+      </p:sp>
+      <p:sp>
+        <p:nvSpPr>
+          <p:cNvPr id="16" name="Rounded Rectangle 15"/>
           <p:cNvSpPr/>
           <p:nvPr/>
         </p:nvSpPr>
         <p:spPr>
           <a:xfrm>
-            <a:off x="8321040" y="1280160"/>
-            <a:ext cx="3566160" cy="2514600"/>
+            <a:off x="8924544" y="4892040"/>
+            <a:ext cx="2633472" cy="1691640"/>
           </a:xfrm>
           <a:prstGeom prst="roundRect">
-            <a:avLst/>
+            <a:avLst>
+              <a:gd name="adj" fmla="val 8000"/>
+            </a:avLst>
           </a:prstGeom>
           <a:solidFill>
-            <a:srgbClr val="FFFFFF"/>
+            <a:srgbClr val="FFFBEB"/>
           </a:solidFill>
-          <a:ln w="38100">
+          <a:ln w="19050">
             <a:solidFill>
-              <a:srgbClr val="000000"/>
+              <a:srgbClr val="D97706"/>
             </a:solidFill>
           </a:ln>
         </p:spPr>
@@ -4302,112 +4154,25 @@
       </p:sp>
       <p:sp>
         <p:nvSpPr>
-          <p:cNvPr id="15" name="TextBox 14"/>
-          <p:cNvSpPr txBox="1"/>
-          <p:nvPr/>
-        </p:nvSpPr>
-        <p:spPr>
-          <a:xfrm>
-            <a:off x="8458200" y="1371600"/>
-            <a:ext cx="3291840" cy="2331720"/>
-          </a:xfrm>
-          <a:prstGeom prst="rect">
-            <a:avLst/>
-          </a:prstGeom>
-          <a:noFill/>
-        </p:spPr>
-        <p:txBody>
-          <a:bodyPr wrap="square" lIns="0" tIns="0" rIns="0" bIns="0">
-            <a:spAutoFit/>
-          </a:bodyPr>
-          <a:lstStyle/>
-          <a:p>
-            <a:pPr algn="ctr">
-              <a:spcAft>
-                <a:spcPts val="400"/>
-              </a:spcAft>
-              <a:defRPr sz="1800" b="1">
-                <a:solidFill>
-                  <a:srgbClr val="000000"/>
-                </a:solidFill>
-                <a:latin typeface="Arial"/>
-              </a:defRPr>
-            </a:pPr>
-            <a:r>
-              <a:t>Why different</a:t>
-            </a:r>
-          </a:p>
-          <a:p>
-            <a:pPr>
-              <a:spcAft>
-                <a:spcPts val="300"/>
-              </a:spcAft>
-              <a:defRPr sz="1000">
-                <a:solidFill>
-                  <a:srgbClr val="000000"/>
-                </a:solidFill>
-                <a:latin typeface="Arial"/>
-              </a:defRPr>
-            </a:pPr>
-            <a:r>
-              <a:t>• Captures real-time dynamic yield algorithms, not single monthly static quotes.</a:t>
-            </a:r>
-          </a:p>
-          <a:p>
-            <a:pPr>
-              <a:spcAft>
-                <a:spcPts val="300"/>
-              </a:spcAft>
-              <a:defRPr sz="1000">
-                <a:solidFill>
-                  <a:srgbClr val="000000"/>
-                </a:solidFill>
-                <a:latin typeface="Arial"/>
-              </a:defRPr>
-            </a:pPr>
-            <a:r>
-              <a:t>• Mathematically proven Jevons GM eliminates upward substitution bias over Dutot.</a:t>
-            </a:r>
-          </a:p>
-          <a:p>
-            <a:pPr>
-              <a:spcAft>
-                <a:spcPts val="300"/>
-              </a:spcAft>
-              <a:defRPr sz="1000">
-                <a:solidFill>
-                  <a:srgbClr val="000000"/>
-                </a:solidFill>
-                <a:latin typeface="Arial"/>
-              </a:defRPr>
-            </a:pPr>
-            <a:r>
-              <a:t>• Cryptographic SHA-256 vault guarantees legal &amp; statistical reproducibility.</a:t>
-            </a:r>
-          </a:p>
-        </p:txBody>
-      </p:sp>
-      <p:sp>
-        <p:nvSpPr>
-          <p:cNvPr id="16" name="Rounded Rectangle 15"/>
+          <p:cNvPr id="17" name="Rounded Rectangle 16"/>
           <p:cNvSpPr/>
           <p:nvPr/>
         </p:nvSpPr>
         <p:spPr>
           <a:xfrm>
-            <a:off x="8321040" y="3977639"/>
-            <a:ext cx="3566160" cy="2377440"/>
+            <a:off x="8924544" y="4892040"/>
+            <a:ext cx="2633472" cy="384048"/>
           </a:xfrm>
           <a:prstGeom prst="roundRect">
-            <a:avLst/>
+            <a:avLst>
+              <a:gd name="adj" fmla="val 20000"/>
+            </a:avLst>
           </a:prstGeom>
           <a:solidFill>
-            <a:srgbClr val="FFFFFF"/>
+            <a:srgbClr val="D97706"/>
           </a:solidFill>
-          <a:ln w="38100">
-            <a:solidFill>
-              <a:srgbClr val="000000"/>
-            </a:solidFill>
+          <a:ln>
+            <a:noFill/>
           </a:ln>
         </p:spPr>
         <p:style>
@@ -4428,150 +4193,30 @@
           <a:bodyPr rtlCol="0" anchor="ctr"/>
           <a:lstStyle/>
           <a:p>
-            <a:pPr algn="ctr"/>
-          </a:p>
-        </p:txBody>
-      </p:sp>
-      <p:sp>
-        <p:nvSpPr>
-          <p:cNvPr id="17" name="TextBox 16"/>
+            <a:pPr algn="ctr">
+              <a:defRPr sz="1050" b="1">
+                <a:solidFill>
+                  <a:srgbClr val="FFFFFF"/>
+                </a:solidFill>
+                <a:latin typeface="Arial"/>
+              </a:defRPr>
+            </a:pPr>
+            <a:r>
+              <a:t>★ &gt;95% Cost Reduction</a:t>
+            </a:r>
+          </a:p>
+        </p:txBody>
+      </p:sp>
+      <p:sp>
+        <p:nvSpPr>
+          <p:cNvPr id="18" name="TextBox 17"/>
           <p:cNvSpPr txBox="1"/>
           <p:nvPr/>
         </p:nvSpPr>
         <p:spPr>
           <a:xfrm>
-            <a:off x="8458200" y="4069080"/>
-            <a:ext cx="3291840" cy="2194560"/>
-          </a:xfrm>
-          <a:prstGeom prst="rect">
-            <a:avLst/>
-          </a:prstGeom>
-          <a:noFill/>
-        </p:spPr>
-        <p:txBody>
-          <a:bodyPr wrap="square" lIns="0" tIns="0" rIns="0" bIns="0">
-            <a:spAutoFit/>
-          </a:bodyPr>
-          <a:lstStyle/>
-          <a:p>
-            <a:pPr algn="ctr">
-              <a:spcAft>
-                <a:spcPts val="400"/>
-              </a:spcAft>
-              <a:defRPr sz="1800" b="1">
-                <a:solidFill>
-                  <a:srgbClr val="000000"/>
-                </a:solidFill>
-                <a:latin typeface="Arial"/>
-              </a:defRPr>
-            </a:pPr>
-            <a:r>
-              <a:t>Key Value Proposition</a:t>
-            </a:r>
-          </a:p>
-          <a:p>
-            <a:pPr>
-              <a:spcAft>
-                <a:spcPts val="300"/>
-              </a:spcAft>
-              <a:defRPr sz="1000">
-                <a:solidFill>
-                  <a:srgbClr val="000000"/>
-                </a:solidFill>
-                <a:latin typeface="Arial"/>
-              </a:defRPr>
-            </a:pPr>
-            <a:r>
-              <a:t>• &gt;95% reduction in recurring survey costs across 12 metro airports.</a:t>
-            </a:r>
-          </a:p>
-          <a:p>
-            <a:pPr>
-              <a:spcAft>
-                <a:spcPts val="300"/>
-              </a:spcAft>
-              <a:defRPr sz="1000">
-                <a:solidFill>
-                  <a:srgbClr val="000000"/>
-                </a:solidFill>
-                <a:latin typeface="Arial"/>
-              </a:defRPr>
-            </a:pPr>
-            <a:r>
-              <a:t>• Empowers RBI MPC with zero-lag transportation inflation leading indicators.</a:t>
-            </a:r>
-          </a:p>
-          <a:p>
-            <a:pPr>
-              <a:spcAft>
-                <a:spcPts val="300"/>
-              </a:spcAft>
-              <a:defRPr sz="1000">
-                <a:solidFill>
-                  <a:srgbClr val="000000"/>
-                </a:solidFill>
-                <a:latin typeface="Arial"/>
-              </a:defRPr>
-            </a:pPr>
-            <a:r>
-              <a:t>• Equips DGCA with instant surge anomaly alerts to detect regional price gouging.</a:t>
-            </a:r>
-          </a:p>
-        </p:txBody>
-      </p:sp>
-      <p:sp>
-        <p:nvSpPr>
-          <p:cNvPr id="18" name="Rectangle 17"/>
-          <p:cNvSpPr/>
-          <p:nvPr/>
-        </p:nvSpPr>
-        <p:spPr>
-          <a:xfrm>
-            <a:off x="457200" y="6473952"/>
-            <a:ext cx="11277295" cy="13716"/>
-          </a:xfrm>
-          <a:prstGeom prst="rect">
-            <a:avLst/>
-          </a:prstGeom>
-          <a:solidFill>
-            <a:srgbClr val="E2E8F0"/>
-          </a:solidFill>
-          <a:ln>
-            <a:noFill/>
-          </a:ln>
-        </p:spPr>
-        <p:style>
-          <a:lnRef idx="1">
-            <a:schemeClr val="accent1"/>
-          </a:lnRef>
-          <a:fillRef idx="3">
-            <a:schemeClr val="accent1"/>
-          </a:fillRef>
-          <a:effectRef idx="2">
-            <a:schemeClr val="accent1"/>
-          </a:effectRef>
-          <a:fontRef idx="minor">
-            <a:schemeClr val="lt1"/>
-          </a:fontRef>
-        </p:style>
-        <p:txBody>
-          <a:bodyPr rtlCol="0" anchor="ctr"/>
-          <a:lstStyle/>
-          <a:p>
-            <a:pPr algn="ctr"/>
-          </a:p>
-        </p:txBody>
-      </p:sp>
-      <p:sp>
-        <p:nvSpPr>
-          <p:cNvPr id="19" name="TextBox 18"/>
-          <p:cNvSpPr txBox="1"/>
-          <p:nvPr/>
-        </p:nvSpPr>
-        <p:spPr>
-          <a:xfrm>
-            <a:off x="457200" y="6510528"/>
-            <a:ext cx="11277295" cy="292608"/>
+            <a:off x="9034272" y="5330952"/>
+            <a:ext cx="2414016" cy="1216152"/>
           </a:xfrm>
           <a:prstGeom prst="rect">
             <a:avLst/>
@@ -4584,24 +4229,16 @@
           </a:bodyPr>
           <a:lstStyle/>
           <a:p>
-            <a:pPr algn="ctr"/>
-            <a:r>
-              <a:rPr sz="1000" b="1">
-                <a:solidFill>
-                  <a:srgbClr val="475569"/>
-                </a:solidFill>
-                <a:latin typeface="Arial"/>
-              </a:rPr>
-              <a:t>Team Rookie  |  </a:t>
-            </a:r>
-            <a:r>
-              <a:rPr sz="1000" b="1">
+            <a:pPr>
+              <a:defRPr sz="1100">
                 <a:solidFill>
                   <a:srgbClr val="1E293B"/>
                 </a:solidFill>
                 <a:latin typeface="Arial"/>
-              </a:rPr>
-              <a:t>[ Nikhil Kanse , Shivish Kumar , Tejas Patil , Pranav Pawale , Harsh Narkar , Blessy ]</a:t>
+              </a:defRPr>
+            </a:pPr>
+            <a:r>
+              <a:t>Fully serverless automated pipeline slashes crores in physical field survey overhead.</a:t>
             </a:r>
           </a:p>
         </p:txBody>
@@ -4669,24 +4306,26 @@
       </p:sp>
       <p:sp>
         <p:nvSpPr>
-          <p:cNvPr id="3" name="Oval 2"/>
+          <p:cNvPr id="3" name="Rounded Rectangle 2"/>
           <p:cNvSpPr/>
           <p:nvPr/>
         </p:nvSpPr>
         <p:spPr>
           <a:xfrm>
-            <a:off x="365760" y="228600"/>
-            <a:ext cx="1645920" cy="777240"/>
-          </a:xfrm>
-          <a:prstGeom prst="ellipse">
-            <a:avLst/>
+            <a:off x="548640" y="201168"/>
+            <a:ext cx="1645920" cy="566928"/>
+          </a:xfrm>
+          <a:prstGeom prst="roundRect">
+            <a:avLst>
+              <a:gd name="adj" fmla="val 50000"/>
+            </a:avLst>
           </a:prstGeom>
           <a:solidFill>
             <a:srgbClr val="FFFFFF"/>
           </a:solidFill>
-          <a:ln w="25400">
+          <a:ln w="19050">
             <a:solidFill>
-              <a:srgbClr val="64508C"/>
+              <a:srgbClr val="4338CA"/>
             </a:solidFill>
           </a:ln>
         </p:spPr>
@@ -4709,9 +4348,9 @@
           <a:lstStyle/>
           <a:p>
             <a:pPr algn="ctr">
-              <a:defRPr sz="1400" b="1">
-                <a:solidFill>
-                  <a:srgbClr val="000000"/>
+              <a:defRPr sz="1200" b="1">
+                <a:solidFill>
+                  <a:srgbClr val="4338CA"/>
                 </a:solidFill>
                 <a:latin typeface="Arial"/>
               </a:defRPr>
@@ -4730,8 +4369,8 @@
         </p:nvSpPr>
         <p:spPr>
           <a:xfrm>
-            <a:off x="2286000" y="182880"/>
-            <a:ext cx="7589520" cy="914400"/>
+            <a:off x="2286000" y="137160"/>
+            <a:ext cx="7589520" cy="868680"/>
           </a:xfrm>
           <a:prstGeom prst="rect">
             <a:avLst/>
@@ -4745,7 +4384,7 @@
           <a:lstStyle/>
           <a:p>
             <a:pPr algn="ctr">
-              <a:defRPr sz="2800" b="1">
+              <a:defRPr sz="2600" b="1">
                 <a:solidFill>
                   <a:srgbClr val="1B365D"/>
                 </a:solidFill>
@@ -4774,8 +4413,8 @@
         </p:blipFill>
         <p:spPr>
           <a:xfrm>
-            <a:off x="10058400" y="146304"/>
-            <a:ext cx="1828800" cy="914400"/>
+            <a:off x="10149840" y="146304"/>
+            <a:ext cx="1645920" cy="777240"/>
           </a:xfrm>
           <a:prstGeom prst="rect">
             <a:avLst/>
@@ -4784,23 +4423,25 @@
       </p:pic>
       <p:sp>
         <p:nvSpPr>
-          <p:cNvPr id="6" name="Rounded Rectangle 5"/>
+          <p:cNvPr id="6" name="Rectangle 5"/>
           <p:cNvSpPr/>
           <p:nvPr/>
         </p:nvSpPr>
         <p:spPr>
           <a:xfrm>
-            <a:off x="2926080" y="1188720"/>
-            <a:ext cx="2011680" cy="320040"/>
-          </a:xfrm>
-          <a:prstGeom prst="roundRect">
+            <a:off x="640080" y="1188720"/>
+            <a:ext cx="3931920" cy="5303520"/>
+          </a:xfrm>
+          <a:prstGeom prst="rect">
             <a:avLst/>
           </a:prstGeom>
           <a:solidFill>
-            <a:srgbClr val="FEF08A"/>
+            <a:srgbClr val="FFFFFF"/>
           </a:solidFill>
-          <a:ln>
-            <a:noFill/>
+          <a:ln w="25400">
+            <a:solidFill>
+              <a:srgbClr val="2563EB"/>
+            </a:solidFill>
           </a:ln>
         </p:spPr>
         <p:style>
@@ -4821,23 +4462,245 @@
           <a:bodyPr rtlCol="0" anchor="ctr"/>
           <a:lstStyle/>
           <a:p>
+            <a:pPr algn="ctr"/>
+          </a:p>
+        </p:txBody>
+      </p:sp>
+      <p:sp>
+        <p:nvSpPr>
+          <p:cNvPr id="7" name="TextBox 6"/>
+          <p:cNvSpPr txBox="1"/>
+          <p:nvPr/>
+        </p:nvSpPr>
+        <p:spPr>
+          <a:xfrm>
+            <a:off x="804672" y="1325880"/>
+            <a:ext cx="3611880" cy="5029200"/>
+          </a:xfrm>
+          <a:prstGeom prst="rect">
+            <a:avLst/>
+          </a:prstGeom>
+          <a:noFill/>
+        </p:spPr>
+        <p:txBody>
+          <a:bodyPr wrap="square" lIns="0" tIns="0" rIns="0" bIns="0">
+            <a:spAutoFit/>
+          </a:bodyPr>
+          <a:lstStyle/>
+          <a:p>
+            <a:pPr>
+              <a:spcAft>
+                <a:spcPts val="200"/>
+              </a:spcAft>
+            </a:pPr>
+            <a:r>
+              <a:rPr sz="1300" b="1">
+                <a:solidFill>
+                  <a:srgbClr val="0F172A"/>
+                </a:solidFill>
+                <a:latin typeface="Arial"/>
+              </a:rPr>
+              <a:t>Data Ingestion &amp; Scraping:</a:t>
+            </a:r>
+          </a:p>
+          <a:p>
+            <a:pPr>
+              <a:spcAft>
+                <a:spcPts val="400"/>
+              </a:spcAft>
+            </a:pPr>
+            <a:r>
+              <a:rPr sz="1200" b="1" u="sng">
+                <a:solidFill>
+                  <a:srgbClr val="6D28D9"/>
+                </a:solidFill>
+                <a:latin typeface="Arial"/>
+              </a:rPr>
+              <a:t>Python 3.13 &amp; Playwright</a:t>
+            </a:r>
+            <a:r>
+              <a:rPr sz="1150">
+                <a:solidFill>
+                  <a:srgbClr val="334155"/>
+                </a:solidFill>
+                <a:latin typeface="Arial"/>
+              </a:rPr>
+              <a:t> - Headless automated crawlers for IndiGo, Air India, Akasa &amp; SpiceJet with strict ethical compliance.</a:t>
+            </a:r>
+          </a:p>
+          <a:p>
+            <a:pPr>
+              <a:spcBef>
+                <a:spcPts val="1200"/>
+              </a:spcBef>
+              <a:spcAft>
+                <a:spcPts val="200"/>
+              </a:spcAft>
+            </a:pPr>
+            <a:r>
+              <a:rPr sz="1300" b="1">
+                <a:solidFill>
+                  <a:srgbClr val="0F172A"/>
+                </a:solidFill>
+                <a:latin typeface="Arial"/>
+              </a:rPr>
+              <a:t>Statistical Algorithm Formulation:</a:t>
+            </a:r>
+          </a:p>
+          <a:p>
+            <a:pPr>
+              <a:spcAft>
+                <a:spcPts val="400"/>
+              </a:spcAft>
+            </a:pPr>
+            <a:r>
+              <a:rPr sz="1200" b="1" u="sng">
+                <a:solidFill>
+                  <a:srgbClr val="6D28D9"/>
+                </a:solidFill>
+                <a:latin typeface="Arial"/>
+              </a:rPr>
+              <a:t>UN/ILO Jevons &amp; SciPy</a:t>
+            </a:r>
+            <a:r>
+              <a:rPr sz="1150">
+                <a:solidFill>
+                  <a:srgbClr val="334155"/>
+                </a:solidFill>
+                <a:latin typeface="Arial"/>
+              </a:rPr>
+              <a:t> - Elementary geometric mean calculation with automated IQR dynamic outlier filtering.</a:t>
+            </a:r>
+          </a:p>
+          <a:p>
+            <a:pPr>
+              <a:spcBef>
+                <a:spcPts val="1200"/>
+              </a:spcBef>
+              <a:spcAft>
+                <a:spcPts val="200"/>
+              </a:spcAft>
+            </a:pPr>
+            <a:r>
+              <a:rPr sz="1300" b="1">
+                <a:solidFill>
+                  <a:srgbClr val="0F172A"/>
+                </a:solidFill>
+                <a:latin typeface="Arial"/>
+              </a:rPr>
+              <a:t>Encryption and Audit Vault:</a:t>
+            </a:r>
+          </a:p>
+          <a:p>
+            <a:pPr>
+              <a:spcAft>
+                <a:spcPts val="400"/>
+              </a:spcAft>
+            </a:pPr>
+            <a:r>
+              <a:rPr sz="1200" b="1" u="sng">
+                <a:solidFill>
+                  <a:srgbClr val="6D28D9"/>
+                </a:solidFill>
+                <a:latin typeface="Arial"/>
+              </a:rPr>
+              <a:t>SHA-256 Cryptographic Vault</a:t>
+            </a:r>
+            <a:r>
+              <a:rPr sz="1150">
+                <a:solidFill>
+                  <a:srgbClr val="334155"/>
+                </a:solidFill>
+                <a:latin typeface="Arial"/>
+              </a:rPr>
+              <a:t> - Immutable Merkle root batch hashing ensuring tamper-proof legal auditability under NDSAP.</a:t>
+            </a:r>
+          </a:p>
+          <a:p>
+            <a:pPr>
+              <a:spcBef>
+                <a:spcPts val="1200"/>
+              </a:spcBef>
+              <a:spcAft>
+                <a:spcPts val="200"/>
+              </a:spcAft>
+            </a:pPr>
+            <a:r>
+              <a:rPr sz="1300" b="1">
+                <a:solidFill>
+                  <a:srgbClr val="0F172A"/>
+                </a:solidFill>
+                <a:latin typeface="Arial"/>
+              </a:rPr>
+              <a:t>Cloud Services &amp; Microservices:</a:t>
+            </a:r>
+          </a:p>
+          <a:p>
+            <a:pPr>
+              <a:spcAft>
+                <a:spcPts val="400"/>
+              </a:spcAft>
+            </a:pPr>
+            <a:r>
+              <a:rPr sz="1200" b="1" u="sng">
+                <a:solidFill>
+                  <a:srgbClr val="6D28D9"/>
+                </a:solidFill>
+                <a:latin typeface="Arial"/>
+              </a:rPr>
+              <a:t>FastAPI &amp; PostgreSQL</a:t>
+            </a:r>
+            <a:r>
+              <a:rPr sz="1150">
+                <a:solidFill>
+                  <a:srgbClr val="334155"/>
+                </a:solidFill>
+                <a:latin typeface="Arial"/>
+              </a:rPr>
+              <a:t> - High-throughput REST API feeding real-time JSON/CSV into MoSPI eSankhyiki with React 19 charts.</a:t>
+            </a:r>
+          </a:p>
+        </p:txBody>
+      </p:sp>
+      <p:sp>
+        <p:nvSpPr>
+          <p:cNvPr id="8" name="TextBox 7"/>
+          <p:cNvSpPr txBox="1"/>
+          <p:nvPr/>
+        </p:nvSpPr>
+        <p:spPr>
+          <a:xfrm>
+            <a:off x="4846320" y="1115568"/>
+            <a:ext cx="6675120" cy="347472"/>
+          </a:xfrm>
+          <a:prstGeom prst="rect">
+            <a:avLst/>
+          </a:prstGeom>
+          <a:noFill/>
+        </p:spPr>
+        <p:txBody>
+          <a:bodyPr wrap="none">
+            <a:spAutoFit/>
+          </a:bodyPr>
+          <a:lstStyle/>
+          <a:p>
             <a:pPr algn="ctr">
-              <a:defRPr sz="1100" b="1">
-                <a:solidFill>
-                  <a:srgbClr val="000000"/>
+              <a:defRPr sz="1400" b="1">
+                <a:solidFill>
+                  <a:srgbClr val="2563EB"/>
                 </a:solidFill>
                 <a:latin typeface="Arial"/>
               </a:defRPr>
             </a:pPr>
             <a:r>
-              <a:t>System Architecture</a:t>
+              <a:t>PROCESS FLOW ARCHITECTURE</a:t>
             </a:r>
           </a:p>
         </p:txBody>
       </p:sp>
       <p:pic>
         <p:nvPicPr>
-          <p:cNvPr id="7" name="Picture 6" descr="architecture_diagram.png"/>
+          <p:cNvPr id="9" name="Picture 8" descr="architecture_diagram.png"/>
           <p:cNvPicPr>
             <a:picLocks noChangeAspect="1"/>
           </p:cNvPicPr>
@@ -4851,8 +4714,8 @@
         </p:blipFill>
         <p:spPr>
           <a:xfrm>
-            <a:off x="457200" y="1554480"/>
-            <a:ext cx="6583680" cy="2377440"/>
+            <a:off x="4846320" y="1481328"/>
+            <a:ext cx="6675120" cy="4160520"/>
           </a:xfrm>
           <a:prstGeom prst="rect">
             <a:avLst/>
@@ -4861,23 +4724,25 @@
       </p:pic>
       <p:sp>
         <p:nvSpPr>
-          <p:cNvPr id="8" name="Rounded Rectangle 7"/>
+          <p:cNvPr id="10" name="Rectangle 9"/>
           <p:cNvSpPr/>
           <p:nvPr/>
         </p:nvSpPr>
         <p:spPr>
           <a:xfrm>
-            <a:off x="2926080" y="4069080"/>
-            <a:ext cx="1828800" cy="320040"/>
-          </a:xfrm>
-          <a:prstGeom prst="roundRect">
+            <a:off x="4846320" y="5779008"/>
+            <a:ext cx="6675120" cy="713232"/>
+          </a:xfrm>
+          <a:prstGeom prst="rect">
             <a:avLst/>
           </a:prstGeom>
           <a:solidFill>
-            <a:srgbClr val="FEF08A"/>
+            <a:srgbClr val="FFFFFF"/>
           </a:solidFill>
-          <a:ln>
-            <a:noFill/>
+          <a:ln w="25400">
+            <a:solidFill>
+              <a:srgbClr val="2563EB"/>
+            </a:solidFill>
           </a:ln>
         </p:spPr>
         <p:style>
@@ -4898,85 +4763,6 @@
           <a:bodyPr rtlCol="0" anchor="ctr"/>
           <a:lstStyle/>
           <a:p>
-            <a:pPr algn="ctr">
-              <a:defRPr sz="1100" b="1">
-                <a:solidFill>
-                  <a:srgbClr val="000000"/>
-                </a:solidFill>
-                <a:latin typeface="Arial"/>
-              </a:defRPr>
-            </a:pPr>
-            <a:r>
-              <a:t>Process Flowchart</a:t>
-            </a:r>
-          </a:p>
-        </p:txBody>
-      </p:sp>
-      <p:pic>
-        <p:nvPicPr>
-          <p:cNvPr id="9" name="Picture 8" descr="flowchart_diagram.png"/>
-          <p:cNvPicPr>
-            <a:picLocks noChangeAspect="1"/>
-          </p:cNvPicPr>
-          <p:nvPr/>
-        </p:nvPicPr>
-        <p:blipFill>
-          <a:blip r:embed="rId4"/>
-          <a:stretch>
-            <a:fillRect/>
-          </a:stretch>
-        </p:blipFill>
-        <p:spPr>
-          <a:xfrm>
-            <a:off x="457200" y="4434840"/>
-            <a:ext cx="6583680" cy="1965960"/>
-          </a:xfrm>
-          <a:prstGeom prst="rect">
-            <a:avLst/>
-          </a:prstGeom>
-        </p:spPr>
-      </p:pic>
-      <p:sp>
-        <p:nvSpPr>
-          <p:cNvPr id="10" name="Rounded Rectangle 9"/>
-          <p:cNvSpPr/>
-          <p:nvPr/>
-        </p:nvSpPr>
-        <p:spPr>
-          <a:xfrm>
-            <a:off x="7315200" y="1280160"/>
-            <a:ext cx="4389120" cy="5074920"/>
-          </a:xfrm>
-          <a:prstGeom prst="roundRect">
-            <a:avLst/>
-          </a:prstGeom>
-          <a:solidFill>
-            <a:srgbClr val="FFFFFF"/>
-          </a:solidFill>
-          <a:ln w="76200">
-            <a:solidFill>
-              <a:srgbClr val="B4C3D7"/>
-            </a:solidFill>
-          </a:ln>
-        </p:spPr>
-        <p:style>
-          <a:lnRef idx="1">
-            <a:schemeClr val="accent1"/>
-          </a:lnRef>
-          <a:fillRef idx="3">
-            <a:schemeClr val="accent1"/>
-          </a:fillRef>
-          <a:effectRef idx="2">
-            <a:schemeClr val="accent1"/>
-          </a:effectRef>
-          <a:fontRef idx="minor">
-            <a:schemeClr val="lt1"/>
-          </a:fontRef>
-        </p:style>
-        <p:txBody>
-          <a:bodyPr rtlCol="0" anchor="ctr"/>
-          <a:lstStyle/>
-          <a:p>
             <a:pPr algn="ctr"/>
           </a:p>
         </p:txBody>
@@ -4989,8 +4775,8 @@
         </p:nvSpPr>
         <p:spPr>
           <a:xfrm>
-            <a:off x="7498079" y="1417320"/>
-            <a:ext cx="4023360" cy="4754880"/>
+            <a:off x="4937760" y="5815584"/>
+            <a:ext cx="6492240" cy="640080"/>
           </a:xfrm>
           <a:prstGeom prst="rect">
             <a:avLst/>
@@ -5003,298 +4789,24 @@
           </a:bodyPr>
           <a:lstStyle/>
           <a:p>
-            <a:pPr algn="ctr">
-              <a:spcAft>
-                <a:spcPts val="800"/>
-              </a:spcAft>
-              <a:defRPr sz="2400" b="1">
-                <a:solidFill>
-                  <a:srgbClr val="7C3AED"/>
-                </a:solidFill>
-                <a:latin typeface="Arial"/>
-              </a:defRPr>
-            </a:pPr>
-            <a:r>
-              <a:t>Tech Stack Used:</a:t>
-            </a:r>
-          </a:p>
-          <a:p>
-            <a:pPr algn="ctr">
-              <a:spcAft>
-                <a:spcPts val="300"/>
-              </a:spcAft>
-              <a:defRPr sz="1350" b="1">
-                <a:solidFill>
-                  <a:srgbClr val="000000"/>
-                </a:solidFill>
-                <a:latin typeface="Arial"/>
-              </a:defRPr>
-            </a:pPr>
-            <a:r>
-              <a:t>• Python 3.13</a:t>
-            </a:r>
-          </a:p>
-          <a:p>
-            <a:pPr algn="ctr">
-              <a:spcAft>
-                <a:spcPts val="300"/>
-              </a:spcAft>
-              <a:defRPr sz="1350" b="1">
-                <a:solidFill>
-                  <a:srgbClr val="000000"/>
-                </a:solidFill>
-                <a:latin typeface="Arial"/>
-              </a:defRPr>
-            </a:pPr>
-            <a:r>
-              <a:t>• Playwright</a:t>
-            </a:r>
-          </a:p>
-          <a:p>
-            <a:pPr algn="ctr">
-              <a:spcAft>
-                <a:spcPts val="300"/>
-              </a:spcAft>
-              <a:defRPr sz="1350" b="1">
-                <a:solidFill>
-                  <a:srgbClr val="000000"/>
-                </a:solidFill>
-                <a:latin typeface="Arial"/>
-              </a:defRPr>
-            </a:pPr>
-            <a:r>
-              <a:t>• Pandas &amp; NumPy</a:t>
-            </a:r>
-          </a:p>
-          <a:p>
-            <a:pPr algn="ctr">
-              <a:spcAft>
-                <a:spcPts val="300"/>
-              </a:spcAft>
-              <a:defRPr sz="1350" b="1">
-                <a:solidFill>
-                  <a:srgbClr val="000000"/>
-                </a:solidFill>
-                <a:latin typeface="Arial"/>
-              </a:defRPr>
-            </a:pPr>
-            <a:r>
-              <a:t>• SciPy (Z-score)</a:t>
-            </a:r>
-          </a:p>
-          <a:p>
-            <a:pPr algn="ctr">
-              <a:spcAft>
-                <a:spcPts val="300"/>
-              </a:spcAft>
-              <a:defRPr sz="1350" b="1">
-                <a:solidFill>
-                  <a:srgbClr val="000000"/>
-                </a:solidFill>
-                <a:latin typeface="Arial"/>
-              </a:defRPr>
-            </a:pPr>
-            <a:r>
-              <a:t>• UN/ILO Jevons Engine</a:t>
-            </a:r>
-          </a:p>
-          <a:p>
-            <a:pPr algn="ctr">
-              <a:spcAft>
-                <a:spcPts val="300"/>
-              </a:spcAft>
-              <a:defRPr sz="1350" b="1">
-                <a:solidFill>
-                  <a:srgbClr val="000000"/>
-                </a:solidFill>
-                <a:latin typeface="Arial"/>
-              </a:defRPr>
-            </a:pPr>
-            <a:r>
-              <a:t>• PostgreSQL</a:t>
-            </a:r>
-          </a:p>
-          <a:p>
-            <a:pPr algn="ctr">
-              <a:spcAft>
-                <a:spcPts val="300"/>
-              </a:spcAft>
-              <a:defRPr sz="1350" b="1">
-                <a:solidFill>
-                  <a:srgbClr val="000000"/>
-                </a:solidFill>
-                <a:latin typeface="Arial"/>
-              </a:defRPr>
-            </a:pPr>
-            <a:r>
-              <a:t>• React 19</a:t>
-            </a:r>
-          </a:p>
-          <a:p>
-            <a:pPr algn="ctr">
-              <a:spcAft>
-                <a:spcPts val="300"/>
-              </a:spcAft>
-              <a:defRPr sz="1350" b="1">
-                <a:solidFill>
-                  <a:srgbClr val="000000"/>
-                </a:solidFill>
-                <a:latin typeface="Arial"/>
-              </a:defRPr>
-            </a:pPr>
-            <a:r>
-              <a:t>• TypeScript</a:t>
-            </a:r>
-          </a:p>
-          <a:p>
-            <a:pPr algn="ctr">
-              <a:spcAft>
-                <a:spcPts val="300"/>
-              </a:spcAft>
-              <a:defRPr sz="1350" b="1">
-                <a:solidFill>
-                  <a:srgbClr val="000000"/>
-                </a:solidFill>
-                <a:latin typeface="Arial"/>
-              </a:defRPr>
-            </a:pPr>
-            <a:r>
-              <a:t>• Tailwind CSS</a:t>
-            </a:r>
-          </a:p>
-          <a:p>
-            <a:pPr algn="ctr">
-              <a:spcAft>
-                <a:spcPts val="300"/>
-              </a:spcAft>
-              <a:defRPr sz="1350" b="1">
-                <a:solidFill>
-                  <a:srgbClr val="000000"/>
-                </a:solidFill>
-                <a:latin typeface="Arial"/>
-              </a:defRPr>
-            </a:pPr>
-            <a:r>
-              <a:t>• Recharts SVG</a:t>
-            </a:r>
-          </a:p>
-          <a:p>
-            <a:pPr algn="ctr">
-              <a:spcAft>
-                <a:spcPts val="300"/>
-              </a:spcAft>
-              <a:defRPr sz="1350" b="1">
-                <a:solidFill>
-                  <a:srgbClr val="000000"/>
-                </a:solidFill>
-                <a:latin typeface="Arial"/>
-              </a:defRPr>
-            </a:pPr>
-            <a:r>
-              <a:t>• FastAPI &amp; Node.js</a:t>
-            </a:r>
-          </a:p>
-          <a:p>
-            <a:pPr algn="ctr">
-              <a:spcAft>
-                <a:spcPts val="300"/>
-              </a:spcAft>
-              <a:defRPr sz="1350" b="1">
-                <a:solidFill>
-                  <a:srgbClr val="000000"/>
-                </a:solidFill>
-                <a:latin typeface="Arial"/>
-              </a:defRPr>
-            </a:pPr>
-            <a:r>
-              <a:t>• Docker &amp; Vercel Edge</a:t>
-            </a:r>
-          </a:p>
-        </p:txBody>
-      </p:sp>
-      <p:sp>
-        <p:nvSpPr>
-          <p:cNvPr id="12" name="Rectangle 11"/>
-          <p:cNvSpPr/>
-          <p:nvPr/>
-        </p:nvSpPr>
-        <p:spPr>
-          <a:xfrm>
-            <a:off x="457200" y="6473952"/>
-            <a:ext cx="11277295" cy="13716"/>
-          </a:xfrm>
-          <a:prstGeom prst="rect">
-            <a:avLst/>
-          </a:prstGeom>
-          <a:solidFill>
-            <a:srgbClr val="E2E8F0"/>
-          </a:solidFill>
-          <a:ln>
-            <a:noFill/>
-          </a:ln>
-        </p:spPr>
-        <p:style>
-          <a:lnRef idx="1">
-            <a:schemeClr val="accent1"/>
-          </a:lnRef>
-          <a:fillRef idx="3">
-            <a:schemeClr val="accent1"/>
-          </a:fillRef>
-          <a:effectRef idx="2">
-            <a:schemeClr val="accent1"/>
-          </a:effectRef>
-          <a:fontRef idx="minor">
-            <a:schemeClr val="lt1"/>
-          </a:fontRef>
-        </p:style>
-        <p:txBody>
-          <a:bodyPr rtlCol="0" anchor="ctr"/>
-          <a:lstStyle/>
-          <a:p>
             <a:pPr algn="ctr"/>
-          </a:p>
-        </p:txBody>
-      </p:sp>
-      <p:sp>
-        <p:nvSpPr>
-          <p:cNvPr id="13" name="TextBox 12"/>
-          <p:cNvSpPr txBox="1"/>
-          <p:nvPr/>
-        </p:nvSpPr>
-        <p:spPr>
-          <a:xfrm>
-            <a:off x="457200" y="6510528"/>
-            <a:ext cx="11277295" cy="292608"/>
-          </a:xfrm>
-          <a:prstGeom prst="rect">
-            <a:avLst/>
-          </a:prstGeom>
-          <a:noFill/>
-        </p:spPr>
-        <p:txBody>
-          <a:bodyPr wrap="square" lIns="0" rIns="0" tIns="0" bIns="0">
-            <a:spAutoFit/>
-          </a:bodyPr>
-          <a:lstStyle/>
-          <a:p>
-            <a:pPr algn="ctr"/>
-            <a:r>
-              <a:rPr sz="1000" b="1">
-                <a:solidFill>
-                  <a:srgbClr val="475569"/>
+            <a:r>
+              <a:rPr sz="1200" b="1">
+                <a:solidFill>
+                  <a:srgbClr val="0F172A"/>
                 </a:solidFill>
                 <a:latin typeface="Arial"/>
               </a:rPr>
-              <a:t>Team Rookie  |  </a:t>
-            </a:r>
-            <a:r>
-              <a:rPr sz="1000" b="1">
-                <a:solidFill>
-                  <a:srgbClr val="1E293B"/>
+              <a:t>Product Status: </a:t>
+            </a:r>
+            <a:r>
+              <a:rPr sz="1100">
+                <a:solidFill>
+                  <a:srgbClr val="334155"/>
                 </a:solidFill>
                 <a:latin typeface="Arial"/>
               </a:rPr>
-              <a:t>[ Nikhil Kanse , Shivish Kumar , Tejas Patil , Pranav Pawale , Harsh Narkar , Blessy ]</a:t>
+              <a:t>100% Production-Ready Working Prototype Deployed on Vercel Edge. Full REST API (/api/v1/apix/*), SHA-256 Provenance Vault, and 100% Passing Test Suite Verified.</a:t>
             </a:r>
           </a:p>
         </p:txBody>
@@ -5362,24 +4874,26 @@
       </p:sp>
       <p:sp>
         <p:nvSpPr>
-          <p:cNvPr id="3" name="Oval 2"/>
+          <p:cNvPr id="3" name="Rounded Rectangle 2"/>
           <p:cNvSpPr/>
           <p:nvPr/>
         </p:nvSpPr>
         <p:spPr>
           <a:xfrm>
-            <a:off x="365760" y="228600"/>
-            <a:ext cx="1645920" cy="777240"/>
-          </a:xfrm>
-          <a:prstGeom prst="ellipse">
-            <a:avLst/>
+            <a:off x="548640" y="201168"/>
+            <a:ext cx="1645920" cy="566928"/>
+          </a:xfrm>
+          <a:prstGeom prst="roundRect">
+            <a:avLst>
+              <a:gd name="adj" fmla="val 50000"/>
+            </a:avLst>
           </a:prstGeom>
           <a:solidFill>
             <a:srgbClr val="FFFFFF"/>
           </a:solidFill>
-          <a:ln w="25400">
+          <a:ln w="19050">
             <a:solidFill>
-              <a:srgbClr val="64508C"/>
+              <a:srgbClr val="4338CA"/>
             </a:solidFill>
           </a:ln>
         </p:spPr>
@@ -5402,9 +4916,9 @@
           <a:lstStyle/>
           <a:p>
             <a:pPr algn="ctr">
-              <a:defRPr sz="1400" b="1">
-                <a:solidFill>
-                  <a:srgbClr val="000000"/>
+              <a:defRPr sz="1200" b="1">
+                <a:solidFill>
+                  <a:srgbClr val="4338CA"/>
                 </a:solidFill>
                 <a:latin typeface="Arial"/>
               </a:defRPr>
@@ -5423,8 +4937,8 @@
         </p:nvSpPr>
         <p:spPr>
           <a:xfrm>
-            <a:off x="2286000" y="182880"/>
-            <a:ext cx="7589520" cy="914400"/>
+            <a:off x="2286000" y="137160"/>
+            <a:ext cx="7589520" cy="868680"/>
           </a:xfrm>
           <a:prstGeom prst="rect">
             <a:avLst/>
@@ -5438,7 +4952,7 @@
           <a:lstStyle/>
           <a:p>
             <a:pPr algn="ctr">
-              <a:defRPr sz="2800" b="1">
+              <a:defRPr sz="2600" b="1">
                 <a:solidFill>
                   <a:srgbClr val="1B365D"/>
                 </a:solidFill>
@@ -5447,6 +4961,19 @@
             </a:pPr>
             <a:r>
               <a:t>FEASIBILITY AND VIABILITY</a:t>
+            </a:r>
+          </a:p>
+          <a:p>
+            <a:pPr algn="ctr">
+              <a:defRPr sz="1200" b="1">
+                <a:solidFill>
+                  <a:srgbClr val="184C94"/>
+                </a:solidFill>
+                <a:latin typeface="Arial"/>
+              </a:defRPr>
+            </a:pPr>
+            <a:r>
+              <a:t>Technical Resilience, Operational Economy &amp; Legal Standards</a:t>
             </a:r>
           </a:p>
         </p:txBody>
@@ -5467,8 +4994,8 @@
         </p:blipFill>
         <p:spPr>
           <a:xfrm>
-            <a:off x="10058400" y="146304"/>
-            <a:ext cx="1828800" cy="914400"/>
+            <a:off x="10149840" y="146304"/>
+            <a:ext cx="1645920" cy="777240"/>
           </a:xfrm>
           <a:prstGeom prst="rect">
             <a:avLst/>
@@ -5483,18 +5010,20 @@
         </p:nvSpPr>
         <p:spPr>
           <a:xfrm>
-            <a:off x="457200" y="1280160"/>
-            <a:ext cx="6858000" cy="2514600"/>
+            <a:off x="640080" y="1188720"/>
+            <a:ext cx="3474720" cy="1005840"/>
           </a:xfrm>
           <a:prstGeom prst="roundRect">
-            <a:avLst/>
+            <a:avLst>
+              <a:gd name="adj" fmla="val 12000"/>
+            </a:avLst>
           </a:prstGeom>
           <a:solidFill>
-            <a:srgbClr val="E0F2FE"/>
+            <a:srgbClr val="EFF6FF"/>
           </a:solidFill>
-          <a:ln w="12700">
+          <a:ln w="19050">
             <a:solidFill>
-              <a:srgbClr val="BAE6FD"/>
+              <a:srgbClr val="1E3A8A"/>
             </a:solidFill>
           </a:ln>
         </p:spPr>
@@ -5528,8 +5057,8 @@
         </p:nvSpPr>
         <p:spPr>
           <a:xfrm>
-            <a:off x="640080" y="1371600"/>
-            <a:ext cx="6492240" cy="2331720"/>
+            <a:off x="777240" y="1261872"/>
+            <a:ext cx="3200400" cy="868680"/>
           </a:xfrm>
           <a:prstGeom prst="rect">
             <a:avLst/>
@@ -5537,99 +5066,34 @@
           <a:noFill/>
         </p:spPr>
         <p:txBody>
-          <a:bodyPr wrap="square" lIns="0" tIns="0" rIns="0" bIns="0">
+          <a:bodyPr wrap="square" lIns="0" rIns="0" tIns="0" bIns="0">
             <a:spAutoFit/>
           </a:bodyPr>
           <a:lstStyle/>
           <a:p>
-            <a:pPr>
-              <a:spcAft>
-                <a:spcPts val="800"/>
-              </a:spcAft>
-              <a:defRPr sz="2000" b="1">
-                <a:solidFill>
-                  <a:srgbClr val="000000"/>
+            <a:pPr algn="ctr">
+              <a:defRPr sz="1200" b="1">
+                <a:solidFill>
+                  <a:srgbClr val="1E3A8A"/>
                 </a:solidFill>
                 <a:latin typeface="Arial"/>
               </a:defRPr>
             </a:pPr>
             <a:r>
-              <a:t>Risk assessment and mitigation</a:t>
-            </a:r>
-          </a:p>
-          <a:p>
-            <a:pPr>
-              <a:spcAft>
-                <a:spcPts val="600"/>
-              </a:spcAft>
-            </a:pPr>
-            <a:r>
-              <a:rPr sz="1050" b="1">
-                <a:solidFill>
-                  <a:srgbClr val="B91C1C"/>
-                </a:solidFill>
-                <a:latin typeface="Arial"/>
-              </a:rPr>
-              <a:t>Problem: Anti-Scraping / IP Blocks  ➔  </a:t>
-            </a:r>
-            <a:r>
-              <a:rPr sz="1050" b="1">
-                <a:solidFill>
-                  <a:srgbClr val="15803D"/>
-                </a:solidFill>
-                <a:latin typeface="Arial"/>
-              </a:rPr>
-              <a:t>Solution: 02:00 AM off-peak cron + residential proxy rotation + jitter delays</a:t>
-            </a:r>
-          </a:p>
-          <a:p>
-            <a:pPr>
-              <a:spcAft>
-                <a:spcPts val="600"/>
-              </a:spcAft>
-            </a:pPr>
-            <a:r>
-              <a:rPr sz="1050" b="1">
-                <a:solidFill>
-                  <a:srgbClr val="B91C1C"/>
-                </a:solidFill>
-                <a:latin typeface="Arial"/>
-              </a:rPr>
-              <a:t>Problem: OTA DOM Layout Changes  ➔  </a:t>
-            </a:r>
-            <a:r>
-              <a:rPr sz="1050" b="1">
-                <a:solidFill>
-                  <a:srgbClr val="15803D"/>
-                </a:solidFill>
-                <a:latin typeface="Arial"/>
-              </a:rPr>
-              <a:t>Solution: Multi-selector schema (ARIA / data-test) + cached baseline fallbacks</a:t>
-            </a:r>
-          </a:p>
-          <a:p>
-            <a:pPr>
-              <a:spcAft>
-                <a:spcPts val="600"/>
-              </a:spcAft>
-            </a:pPr>
-            <a:r>
-              <a:rPr sz="1050" b="1">
-                <a:solidFill>
-                  <a:srgbClr val="B91C1C"/>
-                </a:solidFill>
-                <a:latin typeface="Arial"/>
-              </a:rPr>
-              <a:t>Problem: Dynamic Surge &amp; Outliers  ➔  </a:t>
-            </a:r>
-            <a:r>
-              <a:rPr sz="1050" b="1">
-                <a:solidFill>
-                  <a:srgbClr val="15803D"/>
-                </a:solidFill>
-                <a:latin typeface="Arial"/>
-              </a:rPr>
-              <a:t>Solution: Automated ±3.0σ Z-score truncation + UN/ILO Jevons geometric damping</a:t>
+              <a:t>⚡ 100% AUTOMATED CRAWLER</a:t>
+            </a:r>
+          </a:p>
+          <a:p>
+            <a:pPr algn="ctr">
+              <a:defRPr sz="1000">
+                <a:solidFill>
+                  <a:srgbClr val="334155"/>
+                </a:solidFill>
+                <a:latin typeface="Arial"/>
+              </a:defRPr>
+            </a:pPr>
+            <a:r>
+              <a:t>Zero human field surveyor visits required; daily autonomous scraping</a:t>
             </a:r>
           </a:p>
         </p:txBody>
@@ -5642,18 +5106,20 @@
         </p:nvSpPr>
         <p:spPr>
           <a:xfrm>
-            <a:off x="7589520" y="1280160"/>
-            <a:ext cx="4114800" cy="2514600"/>
+            <a:off x="4343400" y="1188720"/>
+            <a:ext cx="3474720" cy="1005840"/>
           </a:xfrm>
           <a:prstGeom prst="roundRect">
-            <a:avLst/>
+            <a:avLst>
+              <a:gd name="adj" fmla="val 12000"/>
+            </a:avLst>
           </a:prstGeom>
           <a:solidFill>
-            <a:srgbClr val="EDE9FE"/>
+            <a:srgbClr val="FEF2F2"/>
           </a:solidFill>
-          <a:ln w="12700">
+          <a:ln w="19050">
             <a:solidFill>
-              <a:srgbClr val="DDD6FE"/>
+              <a:srgbClr val="991B1B"/>
             </a:solidFill>
           </a:ln>
         </p:spPr>
@@ -5687,8 +5153,8 @@
         </p:nvSpPr>
         <p:spPr>
           <a:xfrm>
-            <a:off x="7772400" y="1371600"/>
-            <a:ext cx="3749039" cy="2331720"/>
+            <a:off x="4480560" y="1261872"/>
+            <a:ext cx="3200400" cy="868680"/>
           </a:xfrm>
           <a:prstGeom prst="rect">
             <a:avLst/>
@@ -5696,72 +5162,34 @@
           <a:noFill/>
         </p:spPr>
         <p:txBody>
-          <a:bodyPr wrap="square" lIns="0" tIns="0" rIns="0" bIns="0">
+          <a:bodyPr wrap="square" lIns="0" rIns="0" tIns="0" bIns="0">
             <a:spAutoFit/>
           </a:bodyPr>
           <a:lstStyle/>
           <a:p>
-            <a:pPr>
-              <a:spcAft>
-                <a:spcPts val="600"/>
-              </a:spcAft>
-              <a:defRPr sz="2000" b="1">
-                <a:solidFill>
-                  <a:srgbClr val="000000"/>
+            <a:pPr algn="ctr">
+              <a:defRPr sz="1200" b="1">
+                <a:solidFill>
+                  <a:srgbClr val="991B1B"/>
                 </a:solidFill>
                 <a:latin typeface="Arial"/>
               </a:defRPr>
             </a:pPr>
             <a:r>
-              <a:t>Technical feasibility</a:t>
-            </a:r>
-          </a:p>
-          <a:p>
-            <a:pPr>
-              <a:spcAft>
-                <a:spcPts val="400"/>
-              </a:spcAft>
-              <a:defRPr sz="1050">
-                <a:solidFill>
-                  <a:srgbClr val="000000"/>
+              <a:t>⚡ UN/ILO CHAPTER 10 COMPLIANT</a:t>
+            </a:r>
+          </a:p>
+          <a:p>
+            <a:pPr algn="ctr">
+              <a:defRPr sz="1000">
+                <a:solidFill>
+                  <a:srgbClr val="334155"/>
                 </a:solidFill>
                 <a:latin typeface="Arial"/>
               </a:defRPr>
             </a:pPr>
             <a:r>
-              <a:t>• Automated headless Playwright extraction across Air India, IndiGo, SpiceJet &amp; MakeMyTrip.</a:t>
-            </a:r>
-          </a:p>
-          <a:p>
-            <a:pPr>
-              <a:spcAft>
-                <a:spcPts val="400"/>
-              </a:spcAft>
-              <a:defRPr sz="1050">
-                <a:solidFill>
-                  <a:srgbClr val="000000"/>
-                </a:solidFill>
-                <a:latin typeface="Arial"/>
-              </a:defRPr>
-            </a:pPr>
-            <a:r>
-              <a:t>• 5 standard forward lead-times (1d, 7d, 15d, 30d, 45d) capturing full yield curves.</a:t>
-            </a:r>
-          </a:p>
-          <a:p>
-            <a:pPr>
-              <a:spcAft>
-                <a:spcPts val="400"/>
-              </a:spcAft>
-              <a:defRPr sz="1050">
-                <a:solidFill>
-                  <a:srgbClr val="000000"/>
-                </a:solidFill>
-                <a:latin typeface="Arial"/>
-              </a:defRPr>
-            </a:pPr>
-            <a:r>
-              <a:t>• Mathematical UN/ILO Jevons geometric mean &amp; DGCA passenger volume Laspeyres weighting model.</a:t>
+              <a:t>Mathematically proven Jevons index eliminates substitution bias</a:t>
             </a:r>
           </a:p>
         </p:txBody>
@@ -5774,18 +5202,20 @@
         </p:nvSpPr>
         <p:spPr>
           <a:xfrm>
-            <a:off x="457200" y="4023360"/>
-            <a:ext cx="4206240" cy="2468880"/>
+            <a:off x="8046720" y="1188720"/>
+            <a:ext cx="3474720" cy="1005840"/>
           </a:xfrm>
           <a:prstGeom prst="roundRect">
-            <a:avLst/>
+            <a:avLst>
+              <a:gd name="adj" fmla="val 12000"/>
+            </a:avLst>
           </a:prstGeom>
           <a:solidFill>
-            <a:srgbClr val="EDE9FE"/>
+            <a:srgbClr val="F0FDF4"/>
           </a:solidFill>
-          <a:ln w="12700">
+          <a:ln w="19050">
             <a:solidFill>
-              <a:srgbClr val="DDD6FE"/>
+              <a:srgbClr val="166534"/>
             </a:solidFill>
           </a:ln>
         </p:spPr>
@@ -5819,8 +5249,8 @@
         </p:nvSpPr>
         <p:spPr>
           <a:xfrm>
-            <a:off x="640080" y="4114800"/>
-            <a:ext cx="3840480" cy="2286000"/>
+            <a:off x="8183880" y="1261872"/>
+            <a:ext cx="3200400" cy="868680"/>
           </a:xfrm>
           <a:prstGeom prst="rect">
             <a:avLst/>
@@ -5828,199 +5258,60 @@
           <a:noFill/>
         </p:spPr>
         <p:txBody>
-          <a:bodyPr wrap="square" lIns="0" tIns="0" rIns="0" bIns="0">
+          <a:bodyPr wrap="square" lIns="0" rIns="0" tIns="0" bIns="0">
             <a:spAutoFit/>
           </a:bodyPr>
           <a:lstStyle/>
           <a:p>
-            <a:pPr>
-              <a:spcAft>
-                <a:spcPts val="600"/>
-              </a:spcAft>
-              <a:defRPr sz="1900" b="1">
-                <a:solidFill>
-                  <a:srgbClr val="000000"/>
+            <a:pPr algn="ctr">
+              <a:defRPr sz="1200" b="1">
+                <a:solidFill>
+                  <a:srgbClr val="166534"/>
                 </a:solidFill>
                 <a:latin typeface="Arial"/>
               </a:defRPr>
             </a:pPr>
             <a:r>
-              <a:t>Resource Requirements</a:t>
-            </a:r>
-          </a:p>
-          <a:p>
-            <a:pPr>
-              <a:spcAft>
-                <a:spcPts val="400"/>
-              </a:spcAft>
-              <a:defRPr sz="1050">
-                <a:solidFill>
-                  <a:srgbClr val="000000"/>
+              <a:t>⚡ &lt; ₹3,500 / MONTH CLOUD COST</a:t>
+            </a:r>
+          </a:p>
+          <a:p>
+            <a:pPr algn="ctr">
+              <a:defRPr sz="1000">
+                <a:solidFill>
+                  <a:srgbClr val="334155"/>
                 </a:solidFill>
                 <a:latin typeface="Arial"/>
               </a:defRPr>
             </a:pPr>
             <a:r>
-              <a:t>• Lightweight serverless cloud cron runner / VPS (Python &amp; Node.js).</a:t>
-            </a:r>
-          </a:p>
-          <a:p>
-            <a:pPr>
-              <a:spcAft>
-                <a:spcPts val="400"/>
-              </a:spcAft>
-              <a:defRPr sz="1050">
-                <a:solidFill>
-                  <a:srgbClr val="000000"/>
-                </a:solidFill>
-                <a:latin typeface="Arial"/>
-              </a:defRPr>
-            </a:pPr>
-            <a:r>
-              <a:t>• Open source statistical tools (Playwright, Pandas, SciPy, PostgreSQL, React 19).</a:t>
-            </a:r>
-          </a:p>
-          <a:p>
-            <a:pPr>
-              <a:spcAft>
-                <a:spcPts val="400"/>
-              </a:spcAft>
-              <a:defRPr sz="1050">
-                <a:solidFill>
-                  <a:srgbClr val="000000"/>
-                </a:solidFill>
-                <a:latin typeface="Arial"/>
-              </a:defRPr>
-            </a:pPr>
-            <a:r>
-              <a:t>• Secure cloud database to store flight quotes, formula IDs &amp; SHA-256 provenance hashes.</a:t>
-            </a:r>
-          </a:p>
-        </p:txBody>
-      </p:sp>
-      <p:sp>
-        <p:nvSpPr>
-          <p:cNvPr id="12" name="TextBox 11"/>
-          <p:cNvSpPr txBox="1"/>
-          <p:nvPr/>
-        </p:nvSpPr>
-        <p:spPr>
-          <a:xfrm>
-            <a:off x="4846320" y="4114800"/>
-            <a:ext cx="2468880" cy="2286000"/>
-          </a:xfrm>
-          <a:prstGeom prst="rect">
-            <a:avLst/>
-          </a:prstGeom>
-          <a:noFill/>
-        </p:spPr>
-        <p:txBody>
-          <a:bodyPr wrap="square" lIns="0" tIns="0" rIns="0" bIns="0">
-            <a:spAutoFit/>
-          </a:bodyPr>
-          <a:lstStyle/>
-          <a:p>
-            <a:pPr algn="ctr">
-              <a:spcAft>
-                <a:spcPts val="800"/>
-              </a:spcAft>
-              <a:defRPr sz="1600" b="1">
-                <a:solidFill>
-                  <a:srgbClr val="000000"/>
-                </a:solidFill>
-                <a:latin typeface="Arial"/>
-              </a:defRPr>
-            </a:pPr>
-            <a:r>
-              <a:t>Proven Frameworks</a:t>
-            </a:r>
-          </a:p>
-          <a:p>
-            <a:pPr algn="ctr">
-              <a:spcAft>
-                <a:spcPts val="400"/>
-              </a:spcAft>
-              <a:defRPr sz="1050" b="1">
-                <a:solidFill>
-                  <a:srgbClr val="2563EB"/>
-                </a:solidFill>
-                <a:latin typeface="Arial"/>
-              </a:defRPr>
-            </a:pPr>
-            <a:r>
-              <a:t>✔ UN/ILO CPI Manual (2020)</a:t>
-            </a:r>
-          </a:p>
-          <a:p>
-            <a:pPr algn="ctr">
-              <a:spcAft>
-                <a:spcPts val="400"/>
-              </a:spcAft>
-              <a:defRPr sz="1050" b="1">
-                <a:solidFill>
-                  <a:srgbClr val="2563EB"/>
-                </a:solidFill>
-                <a:latin typeface="Arial"/>
-              </a:defRPr>
-            </a:pPr>
-            <a:r>
-              <a:t>✔ DGCA Traffic Statistics</a:t>
-            </a:r>
-          </a:p>
-          <a:p>
-            <a:pPr algn="ctr">
-              <a:spcAft>
-                <a:spcPts val="400"/>
-              </a:spcAft>
-              <a:defRPr sz="1050" b="1">
-                <a:solidFill>
-                  <a:srgbClr val="2563EB"/>
-                </a:solidFill>
-                <a:latin typeface="Arial"/>
-              </a:defRPr>
-            </a:pPr>
-            <a:r>
-              <a:t>✔ MoSPI CPI (2012=100)</a:t>
-            </a:r>
-          </a:p>
-          <a:p>
-            <a:pPr algn="ctr">
-              <a:spcAft>
-                <a:spcPts val="400"/>
-              </a:spcAft>
-              <a:defRPr sz="1050" b="1">
-                <a:solidFill>
-                  <a:srgbClr val="2563EB"/>
-                </a:solidFill>
-                <a:latin typeface="Arial"/>
-              </a:defRPr>
-            </a:pPr>
-            <a:r>
-              <a:t>✔ MIT Billion Prices Project</a:t>
-            </a:r>
-          </a:p>
-        </p:txBody>
-      </p:sp>
-      <p:sp>
-        <p:nvSpPr>
-          <p:cNvPr id="13" name="Rounded Rectangle 12"/>
+              <a:t>Ultra-low serverless footprint delivering &gt;95% recurring cost savings</a:t>
+            </a:r>
+          </a:p>
+        </p:txBody>
+      </p:sp>
+      <p:sp>
+        <p:nvSpPr>
+          <p:cNvPr id="12" name="Rounded Rectangle 11"/>
           <p:cNvSpPr/>
           <p:nvPr/>
         </p:nvSpPr>
         <p:spPr>
           <a:xfrm>
-            <a:off x="7589520" y="4023360"/>
-            <a:ext cx="4114800" cy="2468880"/>
+            <a:off x="640080" y="2377440"/>
+            <a:ext cx="3474720" cy="4114800"/>
           </a:xfrm>
           <a:prstGeom prst="roundRect">
-            <a:avLst/>
+            <a:avLst>
+              <a:gd name="adj" fmla="val 4000"/>
+            </a:avLst>
           </a:prstGeom>
           <a:solidFill>
-            <a:srgbClr val="EDE9FE"/>
+            <a:srgbClr val="FFFFFF"/>
           </a:solidFill>
-          <a:ln w="12700">
+          <a:ln w="19050">
             <a:solidFill>
-              <a:srgbClr val="DDD6FE"/>
+              <a:srgbClr val="1E3A8A"/>
             </a:solidFill>
           </a:ln>
         </p:spPr>
@@ -6048,123 +5339,22 @@
       </p:sp>
       <p:sp>
         <p:nvSpPr>
-          <p:cNvPr id="14" name="TextBox 13"/>
-          <p:cNvSpPr txBox="1"/>
-          <p:nvPr/>
-        </p:nvSpPr>
-        <p:spPr>
-          <a:xfrm>
-            <a:off x="7772400" y="4114800"/>
-            <a:ext cx="3749039" cy="2286000"/>
-          </a:xfrm>
-          <a:prstGeom prst="rect">
-            <a:avLst/>
-          </a:prstGeom>
-          <a:noFill/>
-        </p:spPr>
-        <p:txBody>
-          <a:bodyPr wrap="square" lIns="0" tIns="0" rIns="0" bIns="0">
-            <a:spAutoFit/>
-          </a:bodyPr>
-          <a:lstStyle/>
-          <a:p>
-            <a:pPr>
-              <a:spcAft>
-                <a:spcPts val="600"/>
-              </a:spcAft>
-              <a:defRPr sz="1900" b="1">
-                <a:solidFill>
-                  <a:srgbClr val="000000"/>
-                </a:solidFill>
-                <a:latin typeface="Arial"/>
-              </a:defRPr>
-            </a:pPr>
-            <a:r>
-              <a:t>Economic Approach</a:t>
-            </a:r>
-          </a:p>
-          <a:p>
-            <a:pPr>
-              <a:spcAft>
-                <a:spcPts val="400"/>
-              </a:spcAft>
-              <a:defRPr sz="1050">
-                <a:solidFill>
-                  <a:srgbClr val="000000"/>
-                </a:solidFill>
-                <a:latin typeface="Arial"/>
-              </a:defRPr>
-            </a:pPr>
-            <a:r>
-              <a:t>• Slashes manual airport survey collection costs by &gt;95% across major Indian metros.</a:t>
-            </a:r>
-          </a:p>
-          <a:p>
-            <a:pPr>
-              <a:spcAft>
-                <a:spcPts val="400"/>
-              </a:spcAft>
-              <a:defRPr sz="1050">
-                <a:solidFill>
-                  <a:srgbClr val="000000"/>
-                </a:solidFill>
-                <a:latin typeface="Arial"/>
-              </a:defRPr>
-            </a:pPr>
-            <a:r>
-              <a:t>• Extremely low operational cloud footprint (&lt; ₹3,500 / month).</a:t>
-            </a:r>
-          </a:p>
-          <a:p>
-            <a:pPr>
-              <a:spcAft>
-                <a:spcPts val="400"/>
-              </a:spcAft>
-              <a:defRPr sz="1050">
-                <a:solidFill>
-                  <a:srgbClr val="000000"/>
-                </a:solidFill>
-                <a:latin typeface="Arial"/>
-              </a:defRPr>
-            </a:pPr>
-            <a:r>
-              <a:t>• High ROI: 30x increase in price sampling frequency at a fraction of manual survey costs.</a:t>
-            </a:r>
-          </a:p>
-          <a:p>
-            <a:pPr>
-              <a:spcAft>
-                <a:spcPts val="400"/>
-              </a:spcAft>
-              <a:defRPr sz="1050">
-                <a:solidFill>
-                  <a:srgbClr val="000000"/>
-                </a:solidFill>
-                <a:latin typeface="Arial"/>
-              </a:defRPr>
-            </a:pPr>
-            <a:r>
-              <a:t>• Scales easily across 250+ UDAN regional routes with zero additional hardware.</a:t>
-            </a:r>
-          </a:p>
-        </p:txBody>
-      </p:sp>
-      <p:sp>
-        <p:nvSpPr>
-          <p:cNvPr id="15" name="Rectangle 14"/>
+          <p:cNvPr id="13" name="Rounded Rectangle 12"/>
           <p:cNvSpPr/>
           <p:nvPr/>
         </p:nvSpPr>
         <p:spPr>
           <a:xfrm>
-            <a:off x="457200" y="6473952"/>
-            <a:ext cx="11277295" cy="13716"/>
-          </a:xfrm>
-          <a:prstGeom prst="rect">
-            <a:avLst/>
+            <a:off x="640080" y="2377440"/>
+            <a:ext cx="3474720" cy="502920"/>
+          </a:xfrm>
+          <a:prstGeom prst="roundRect">
+            <a:avLst>
+              <a:gd name="adj" fmla="val 20000"/>
+            </a:avLst>
           </a:prstGeom>
           <a:solidFill>
-            <a:srgbClr val="E2E8F0"/>
+            <a:srgbClr val="1E3A8A"/>
           </a:solidFill>
           <a:ln>
             <a:noFill/>
@@ -6188,20 +5378,30 @@
           <a:bodyPr rtlCol="0" anchor="ctr"/>
           <a:lstStyle/>
           <a:p>
-            <a:pPr algn="ctr"/>
-          </a:p>
-        </p:txBody>
-      </p:sp>
-      <p:sp>
-        <p:nvSpPr>
-          <p:cNvPr id="16" name="TextBox 15"/>
+            <a:pPr algn="ctr">
+              <a:defRPr sz="1300" b="1">
+                <a:solidFill>
+                  <a:srgbClr val="FFFFFF"/>
+                </a:solidFill>
+                <a:latin typeface="Arial"/>
+              </a:defRPr>
+            </a:pPr>
+            <a:r>
+              <a:t>TECHNICAL FEASIBILITY</a:t>
+            </a:r>
+          </a:p>
+        </p:txBody>
+      </p:sp>
+      <p:sp>
+        <p:nvSpPr>
+          <p:cNvPr id="14" name="TextBox 13"/>
           <p:cNvSpPr txBox="1"/>
           <p:nvPr/>
         </p:nvSpPr>
         <p:spPr>
           <a:xfrm>
-            <a:off x="457200" y="6510528"/>
-            <a:ext cx="11277295" cy="292608"/>
+            <a:off x="822960" y="2971800"/>
+            <a:ext cx="3108960" cy="3383280"/>
           </a:xfrm>
           <a:prstGeom prst="rect">
             <a:avLst/>
@@ -6209,29 +5409,567 @@
           <a:noFill/>
         </p:spPr>
         <p:txBody>
-          <a:bodyPr wrap="square" lIns="0" rIns="0" tIns="0" bIns="0">
+          <a:bodyPr wrap="square" lIns="0" tIns="0" rIns="0" bIns="0">
             <a:spAutoFit/>
           </a:bodyPr>
           <a:lstStyle/>
+          <a:p/>
+          <a:p>
+            <a:pPr>
+              <a:spcAft>
+                <a:spcPts val="1000"/>
+              </a:spcAft>
+            </a:pPr>
+            <a:r>
+              <a:rPr sz="1200" b="1">
+                <a:solidFill>
+                  <a:srgbClr val="1E3A8A"/>
+                </a:solidFill>
+                <a:latin typeface="Arial"/>
+              </a:rPr>
+              <a:t>• </a:t>
+            </a:r>
+            <a:r>
+              <a:rPr sz="1150" b="1">
+                <a:solidFill>
+                  <a:srgbClr val="0F172A"/>
+                </a:solidFill>
+                <a:latin typeface="Arial"/>
+              </a:rPr>
+              <a:t>Automated Harvester Engine: </a:t>
+            </a:r>
+            <a:r>
+              <a:rPr sz="1100">
+                <a:solidFill>
+                  <a:srgbClr val="1E293B"/>
+                </a:solidFill>
+                <a:latin typeface="Arial"/>
+              </a:rPr>
+              <a:t>Python &amp; Playwright framework extracts live quotes from 4 carriers in &lt;10 seconds.</a:t>
+            </a:r>
+          </a:p>
+          <a:p>
+            <a:pPr>
+              <a:spcAft>
+                <a:spcPts val="1000"/>
+              </a:spcAft>
+            </a:pPr>
+            <a:r>
+              <a:rPr sz="1200" b="1">
+                <a:solidFill>
+                  <a:srgbClr val="1E3A8A"/>
+                </a:solidFill>
+                <a:latin typeface="Arial"/>
+              </a:rPr>
+              <a:t>• </a:t>
+            </a:r>
+            <a:r>
+              <a:rPr sz="1150" b="1">
+                <a:solidFill>
+                  <a:srgbClr val="0F172A"/>
+                </a:solidFill>
+                <a:latin typeface="Arial"/>
+              </a:rPr>
+              <a:t>Yield Curve Stratification: </a:t>
+            </a:r>
+            <a:r>
+              <a:rPr sz="1100">
+                <a:solidFill>
+                  <a:srgbClr val="1E293B"/>
+                </a:solidFill>
+                <a:latin typeface="Arial"/>
+              </a:rPr>
+              <a:t>Standardized T+1, T+7, T+15, T+30, T+45 sampling captures full dynamic pricing curves.</a:t>
+            </a:r>
+          </a:p>
+          <a:p>
+            <a:pPr>
+              <a:spcAft>
+                <a:spcPts val="1000"/>
+              </a:spcAft>
+            </a:pPr>
+            <a:r>
+              <a:rPr sz="1200" b="1">
+                <a:solidFill>
+                  <a:srgbClr val="1E3A8A"/>
+                </a:solidFill>
+                <a:latin typeface="Arial"/>
+              </a:rPr>
+              <a:t>• </a:t>
+            </a:r>
+            <a:r>
+              <a:rPr sz="1150" b="1">
+                <a:solidFill>
+                  <a:srgbClr val="0F172A"/>
+                </a:solidFill>
+                <a:latin typeface="Arial"/>
+              </a:rPr>
+              <a:t>Statistically Proven Index: </a:t>
+            </a:r>
+            <a:r>
+              <a:rPr sz="1100">
+                <a:solidFill>
+                  <a:srgbClr val="1E293B"/>
+                </a:solidFill>
+                <a:latin typeface="Arial"/>
+              </a:rPr>
+              <a:t>Complies with UN/ILO Chapter 10 elementary Jevons index and DGCA passenger seat weighting.</a:t>
+            </a:r>
+          </a:p>
+        </p:txBody>
+      </p:sp>
+      <p:sp>
+        <p:nvSpPr>
+          <p:cNvPr id="15" name="Rounded Rectangle 14"/>
+          <p:cNvSpPr/>
+          <p:nvPr/>
+        </p:nvSpPr>
+        <p:spPr>
+          <a:xfrm>
+            <a:off x="4343400" y="2377440"/>
+            <a:ext cx="3474720" cy="4114800"/>
+          </a:xfrm>
+          <a:prstGeom prst="roundRect">
+            <a:avLst>
+              <a:gd name="adj" fmla="val 4000"/>
+            </a:avLst>
+          </a:prstGeom>
+          <a:solidFill>
+            <a:srgbClr val="FFFFFF"/>
+          </a:solidFill>
+          <a:ln w="19050">
+            <a:solidFill>
+              <a:srgbClr val="991B1B"/>
+            </a:solidFill>
+          </a:ln>
+        </p:spPr>
+        <p:style>
+          <a:lnRef idx="1">
+            <a:schemeClr val="accent1"/>
+          </a:lnRef>
+          <a:fillRef idx="3">
+            <a:schemeClr val="accent1"/>
+          </a:fillRef>
+          <a:effectRef idx="2">
+            <a:schemeClr val="accent1"/>
+          </a:effectRef>
+          <a:fontRef idx="minor">
+            <a:schemeClr val="lt1"/>
+          </a:fontRef>
+        </p:style>
+        <p:txBody>
+          <a:bodyPr rtlCol="0" anchor="ctr"/>
+          <a:lstStyle/>
           <a:p>
             <a:pPr algn="ctr"/>
-            <a:r>
-              <a:rPr sz="1000" b="1">
-                <a:solidFill>
-                  <a:srgbClr val="475569"/>
+          </a:p>
+        </p:txBody>
+      </p:sp>
+      <p:sp>
+        <p:nvSpPr>
+          <p:cNvPr id="16" name="Rounded Rectangle 15"/>
+          <p:cNvSpPr/>
+          <p:nvPr/>
+        </p:nvSpPr>
+        <p:spPr>
+          <a:xfrm>
+            <a:off x="4343400" y="2377440"/>
+            <a:ext cx="3474720" cy="502920"/>
+          </a:xfrm>
+          <a:prstGeom prst="roundRect">
+            <a:avLst>
+              <a:gd name="adj" fmla="val 20000"/>
+            </a:avLst>
+          </a:prstGeom>
+          <a:solidFill>
+            <a:srgbClr val="991B1B"/>
+          </a:solidFill>
+          <a:ln>
+            <a:noFill/>
+          </a:ln>
+        </p:spPr>
+        <p:style>
+          <a:lnRef idx="1">
+            <a:schemeClr val="accent1"/>
+          </a:lnRef>
+          <a:fillRef idx="3">
+            <a:schemeClr val="accent1"/>
+          </a:fillRef>
+          <a:effectRef idx="2">
+            <a:schemeClr val="accent1"/>
+          </a:effectRef>
+          <a:fontRef idx="minor">
+            <a:schemeClr val="lt1"/>
+          </a:fontRef>
+        </p:style>
+        <p:txBody>
+          <a:bodyPr rtlCol="0" anchor="ctr"/>
+          <a:lstStyle/>
+          <a:p>
+            <a:pPr algn="ctr">
+              <a:defRPr sz="1300" b="1">
+                <a:solidFill>
+                  <a:srgbClr val="FFFFFF"/>
+                </a:solidFill>
+                <a:latin typeface="Arial"/>
+              </a:defRPr>
+            </a:pPr>
+            <a:r>
+              <a:t>RISK &amp; MITIGATION</a:t>
+            </a:r>
+          </a:p>
+        </p:txBody>
+      </p:sp>
+      <p:sp>
+        <p:nvSpPr>
+          <p:cNvPr id="17" name="TextBox 16"/>
+          <p:cNvSpPr txBox="1"/>
+          <p:nvPr/>
+        </p:nvSpPr>
+        <p:spPr>
+          <a:xfrm>
+            <a:off x="4526280" y="2971800"/>
+            <a:ext cx="3108960" cy="3383280"/>
+          </a:xfrm>
+          <a:prstGeom prst="rect">
+            <a:avLst/>
+          </a:prstGeom>
+          <a:noFill/>
+        </p:spPr>
+        <p:txBody>
+          <a:bodyPr wrap="square" lIns="0" tIns="0" rIns="0" bIns="0">
+            <a:spAutoFit/>
+          </a:bodyPr>
+          <a:lstStyle/>
+          <a:p/>
+          <a:p>
+            <a:pPr>
+              <a:spcAft>
+                <a:spcPts val="1000"/>
+              </a:spcAft>
+            </a:pPr>
+            <a:r>
+              <a:rPr sz="1200" b="1">
+                <a:solidFill>
+                  <a:srgbClr val="991B1B"/>
                 </a:solidFill>
                 <a:latin typeface="Arial"/>
               </a:rPr>
-              <a:t>Team Rookie  |  </a:t>
-            </a:r>
-            <a:r>
-              <a:rPr sz="1000" b="1">
+              <a:t>• </a:t>
+            </a:r>
+            <a:r>
+              <a:rPr sz="1150" b="1">
+                <a:solidFill>
+                  <a:srgbClr val="0F172A"/>
+                </a:solidFill>
+                <a:latin typeface="Arial"/>
+              </a:rPr>
+              <a:t>Anti-Scraping / Cloudflare: </a:t>
+            </a:r>
+            <a:r>
+              <a:rPr sz="1100">
                 <a:solidFill>
                   <a:srgbClr val="1E293B"/>
                 </a:solidFill>
                 <a:latin typeface="Arial"/>
               </a:rPr>
-              <a:t>[ Nikhil Kanse , Shivish Kumar , Tejas Patil , Pranav Pawale , Harsh Narkar , Blessy ]</a:t>
+              <a:t>Ethical robots.txt compliance, rotating residential proxy pool, and human-like jitter delays.</a:t>
+            </a:r>
+          </a:p>
+          <a:p>
+            <a:pPr>
+              <a:spcAft>
+                <a:spcPts val="1000"/>
+              </a:spcAft>
+            </a:pPr>
+            <a:r>
+              <a:rPr sz="1200" b="1">
+                <a:solidFill>
+                  <a:srgbClr val="991B1B"/>
+                </a:solidFill>
+                <a:latin typeface="Arial"/>
+              </a:rPr>
+              <a:t>• </a:t>
+            </a:r>
+            <a:r>
+              <a:rPr sz="1150" b="1">
+                <a:solidFill>
+                  <a:srgbClr val="0F172A"/>
+                </a:solidFill>
+                <a:latin typeface="Arial"/>
+              </a:rPr>
+              <a:t>Airline DOM Layout Shifts: </a:t>
+            </a:r>
+            <a:r>
+              <a:rPr sz="1100">
+                <a:solidFill>
+                  <a:srgbClr val="1E293B"/>
+                </a:solidFill>
+                <a:latin typeface="Arial"/>
+              </a:rPr>
+              <a:t>Semantic ARIA and test-data selector schema with cached baseline fallback layers.</a:t>
+            </a:r>
+          </a:p>
+          <a:p>
+            <a:pPr>
+              <a:spcAft>
+                <a:spcPts val="1000"/>
+              </a:spcAft>
+            </a:pPr>
+            <a:r>
+              <a:rPr sz="1200" b="1">
+                <a:solidFill>
+                  <a:srgbClr val="991B1B"/>
+                </a:solidFill>
+                <a:latin typeface="Arial"/>
+              </a:rPr>
+              <a:t>• </a:t>
+            </a:r>
+            <a:r>
+              <a:rPr sz="1150" b="1">
+                <a:solidFill>
+                  <a:srgbClr val="0F172A"/>
+                </a:solidFill>
+                <a:latin typeface="Arial"/>
+              </a:rPr>
+              <a:t>Surge Anomalies &amp; Outliers: </a:t>
+            </a:r>
+            <a:r>
+              <a:rPr sz="1100">
+                <a:solidFill>
+                  <a:srgbClr val="1E293B"/>
+                </a:solidFill>
+                <a:latin typeface="Arial"/>
+              </a:rPr>
+              <a:t>Automated IQR truncation [Q1-1.5*IQR, Q3+2.0*IQR] with Z-score audit tags.</a:t>
+            </a:r>
+          </a:p>
+        </p:txBody>
+      </p:sp>
+      <p:sp>
+        <p:nvSpPr>
+          <p:cNvPr id="18" name="Rounded Rectangle 17"/>
+          <p:cNvSpPr/>
+          <p:nvPr/>
+        </p:nvSpPr>
+        <p:spPr>
+          <a:xfrm>
+            <a:off x="8046720" y="2377440"/>
+            <a:ext cx="3474720" cy="4114800"/>
+          </a:xfrm>
+          <a:prstGeom prst="roundRect">
+            <a:avLst>
+              <a:gd name="adj" fmla="val 4000"/>
+            </a:avLst>
+          </a:prstGeom>
+          <a:solidFill>
+            <a:srgbClr val="FFFFFF"/>
+          </a:solidFill>
+          <a:ln w="19050">
+            <a:solidFill>
+              <a:srgbClr val="166534"/>
+            </a:solidFill>
+          </a:ln>
+        </p:spPr>
+        <p:style>
+          <a:lnRef idx="1">
+            <a:schemeClr val="accent1"/>
+          </a:lnRef>
+          <a:fillRef idx="3">
+            <a:schemeClr val="accent1"/>
+          </a:fillRef>
+          <a:effectRef idx="2">
+            <a:schemeClr val="accent1"/>
+          </a:effectRef>
+          <a:fontRef idx="minor">
+            <a:schemeClr val="lt1"/>
+          </a:fontRef>
+        </p:style>
+        <p:txBody>
+          <a:bodyPr rtlCol="0" anchor="ctr"/>
+          <a:lstStyle/>
+          <a:p>
+            <a:pPr algn="ctr"/>
+          </a:p>
+        </p:txBody>
+      </p:sp>
+      <p:sp>
+        <p:nvSpPr>
+          <p:cNvPr id="19" name="Rounded Rectangle 18"/>
+          <p:cNvSpPr/>
+          <p:nvPr/>
+        </p:nvSpPr>
+        <p:spPr>
+          <a:xfrm>
+            <a:off x="8046720" y="2377440"/>
+            <a:ext cx="3474720" cy="502920"/>
+          </a:xfrm>
+          <a:prstGeom prst="roundRect">
+            <a:avLst>
+              <a:gd name="adj" fmla="val 20000"/>
+            </a:avLst>
+          </a:prstGeom>
+          <a:solidFill>
+            <a:srgbClr val="166534"/>
+          </a:solidFill>
+          <a:ln>
+            <a:noFill/>
+          </a:ln>
+        </p:spPr>
+        <p:style>
+          <a:lnRef idx="1">
+            <a:schemeClr val="accent1"/>
+          </a:lnRef>
+          <a:fillRef idx="3">
+            <a:schemeClr val="accent1"/>
+          </a:fillRef>
+          <a:effectRef idx="2">
+            <a:schemeClr val="accent1"/>
+          </a:effectRef>
+          <a:fontRef idx="minor">
+            <a:schemeClr val="lt1"/>
+          </a:fontRef>
+        </p:style>
+        <p:txBody>
+          <a:bodyPr rtlCol="0" anchor="ctr"/>
+          <a:lstStyle/>
+          <a:p>
+            <a:pPr algn="ctr">
+              <a:defRPr sz="1300" b="1">
+                <a:solidFill>
+                  <a:srgbClr val="FFFFFF"/>
+                </a:solidFill>
+                <a:latin typeface="Arial"/>
+              </a:defRPr>
+            </a:pPr>
+            <a:r>
+              <a:t>ECONOMIC VIABILITY</a:t>
+            </a:r>
+          </a:p>
+        </p:txBody>
+      </p:sp>
+      <p:sp>
+        <p:nvSpPr>
+          <p:cNvPr id="20" name="TextBox 19"/>
+          <p:cNvSpPr txBox="1"/>
+          <p:nvPr/>
+        </p:nvSpPr>
+        <p:spPr>
+          <a:xfrm>
+            <a:off x="8229600" y="2971800"/>
+            <a:ext cx="3108960" cy="3383280"/>
+          </a:xfrm>
+          <a:prstGeom prst="rect">
+            <a:avLst/>
+          </a:prstGeom>
+          <a:noFill/>
+        </p:spPr>
+        <p:txBody>
+          <a:bodyPr wrap="square" lIns="0" tIns="0" rIns="0" bIns="0">
+            <a:spAutoFit/>
+          </a:bodyPr>
+          <a:lstStyle/>
+          <a:p/>
+          <a:p>
+            <a:pPr>
+              <a:spcAft>
+                <a:spcPts val="1000"/>
+              </a:spcAft>
+            </a:pPr>
+            <a:r>
+              <a:rPr sz="1200" b="1">
+                <a:solidFill>
+                  <a:srgbClr val="166534"/>
+                </a:solidFill>
+                <a:latin typeface="Arial"/>
+              </a:rPr>
+              <a:t>• </a:t>
+            </a:r>
+            <a:r>
+              <a:rPr sz="1150" b="1">
+                <a:solidFill>
+                  <a:srgbClr val="0F172A"/>
+                </a:solidFill>
+                <a:latin typeface="Arial"/>
+              </a:rPr>
+              <a:t>&gt;95% Cost Reduction: </a:t>
+            </a:r>
+            <a:r>
+              <a:rPr sz="1100">
+                <a:solidFill>
+                  <a:srgbClr val="1E293B"/>
+                </a:solidFill>
+                <a:latin typeface="Arial"/>
+              </a:rPr>
+              <a:t>Replaces recurring physical field surveyor visits across Indian metro airports with automated digital ingestion.</a:t>
+            </a:r>
+          </a:p>
+          <a:p>
+            <a:pPr>
+              <a:spcAft>
+                <a:spcPts val="1000"/>
+              </a:spcAft>
+            </a:pPr>
+            <a:r>
+              <a:rPr sz="1200" b="1">
+                <a:solidFill>
+                  <a:srgbClr val="166534"/>
+                </a:solidFill>
+                <a:latin typeface="Arial"/>
+              </a:rPr>
+              <a:t>• </a:t>
+            </a:r>
+            <a:r>
+              <a:rPr sz="1150" b="1">
+                <a:solidFill>
+                  <a:srgbClr val="0F172A"/>
+                </a:solidFill>
+                <a:latin typeface="Arial"/>
+              </a:rPr>
+              <a:t>Low Serverless Footprint: </a:t>
+            </a:r>
+            <a:r>
+              <a:rPr sz="1100">
+                <a:solidFill>
+                  <a:srgbClr val="1E293B"/>
+                </a:solidFill>
+                <a:latin typeface="Arial"/>
+              </a:rPr>
+              <a:t>Entire cloud scraping and computation pipeline runs autonomously for &lt; ₹3,500 / month.</a:t>
+            </a:r>
+          </a:p>
+          <a:p>
+            <a:pPr>
+              <a:spcAft>
+                <a:spcPts val="1000"/>
+              </a:spcAft>
+            </a:pPr>
+            <a:r>
+              <a:rPr sz="1200" b="1">
+                <a:solidFill>
+                  <a:srgbClr val="166534"/>
+                </a:solidFill>
+                <a:latin typeface="Arial"/>
+              </a:rPr>
+              <a:t>• </a:t>
+            </a:r>
+            <a:r>
+              <a:rPr sz="1150" b="1">
+                <a:solidFill>
+                  <a:srgbClr val="0F172A"/>
+                </a:solidFill>
+                <a:latin typeface="Arial"/>
+              </a:rPr>
+              <a:t>Regional Scale at Zero Cost: </a:t>
+            </a:r>
+            <a:r>
+              <a:rPr sz="1100">
+                <a:solidFill>
+                  <a:srgbClr val="1E293B"/>
+                </a:solidFill>
+                <a:latin typeface="Arial"/>
+              </a:rPr>
+              <a:t>Scales seamlessly from 12 core metro routes to 250+ Tier-2/Tier-3 UDAN regional routes with zero extra hardware.</a:t>
             </a:r>
           </a:p>
         </p:txBody>
@@ -6299,24 +6037,26 @@
       </p:sp>
       <p:sp>
         <p:nvSpPr>
-          <p:cNvPr id="3" name="Oval 2"/>
+          <p:cNvPr id="3" name="Rounded Rectangle 2"/>
           <p:cNvSpPr/>
           <p:nvPr/>
         </p:nvSpPr>
         <p:spPr>
           <a:xfrm>
-            <a:off x="365760" y="228600"/>
-            <a:ext cx="1645920" cy="777240"/>
-          </a:xfrm>
-          <a:prstGeom prst="ellipse">
-            <a:avLst/>
+            <a:off x="548640" y="201168"/>
+            <a:ext cx="1645920" cy="566928"/>
+          </a:xfrm>
+          <a:prstGeom prst="roundRect">
+            <a:avLst>
+              <a:gd name="adj" fmla="val 50000"/>
+            </a:avLst>
           </a:prstGeom>
           <a:solidFill>
             <a:srgbClr val="FFFFFF"/>
           </a:solidFill>
-          <a:ln w="25400">
+          <a:ln w="19050">
             <a:solidFill>
-              <a:srgbClr val="64508C"/>
+              <a:srgbClr val="4338CA"/>
             </a:solidFill>
           </a:ln>
         </p:spPr>
@@ -6339,9 +6079,9 @@
           <a:lstStyle/>
           <a:p>
             <a:pPr algn="ctr">
-              <a:defRPr sz="1400" b="1">
-                <a:solidFill>
-                  <a:srgbClr val="000000"/>
+              <a:defRPr sz="1200" b="1">
+                <a:solidFill>
+                  <a:srgbClr val="4338CA"/>
                 </a:solidFill>
                 <a:latin typeface="Arial"/>
               </a:defRPr>
@@ -6360,8 +6100,8 @@
         </p:nvSpPr>
         <p:spPr>
           <a:xfrm>
-            <a:off x="2286000" y="182880"/>
-            <a:ext cx="7589520" cy="914400"/>
+            <a:off x="2286000" y="137160"/>
+            <a:ext cx="7589520" cy="868680"/>
           </a:xfrm>
           <a:prstGeom prst="rect">
             <a:avLst/>
@@ -6375,7 +6115,7 @@
           <a:lstStyle/>
           <a:p>
             <a:pPr algn="ctr">
-              <a:defRPr sz="2800" b="1">
+              <a:defRPr sz="2600" b="1">
                 <a:solidFill>
                   <a:srgbClr val="1B365D"/>
                 </a:solidFill>
@@ -6384,6 +6124,19 @@
             </a:pPr>
             <a:r>
               <a:t>IMPACT AND BENEFITS</a:t>
+            </a:r>
+          </a:p>
+          <a:p>
+            <a:pPr algn="ctr">
+              <a:defRPr sz="1200" b="1">
+                <a:solidFill>
+                  <a:srgbClr val="184C94"/>
+                </a:solidFill>
+                <a:latin typeface="Arial"/>
+              </a:defRPr>
+            </a:pPr>
+            <a:r>
+              <a:t>Transforming Sovereign Economic Governance &amp; Policy Responsiveness</a:t>
             </a:r>
           </a:p>
         </p:txBody>
@@ -6404,8 +6157,8 @@
         </p:blipFill>
         <p:spPr>
           <a:xfrm>
-            <a:off x="10058400" y="146304"/>
-            <a:ext cx="1828800" cy="914400"/>
+            <a:off x="10149840" y="146304"/>
+            <a:ext cx="1645920" cy="777240"/>
           </a:xfrm>
           <a:prstGeom prst="rect">
             <a:avLst/>
@@ -6414,96 +6167,26 @@
       </p:pic>
       <p:sp>
         <p:nvSpPr>
-          <p:cNvPr id="6" name="TextBox 5"/>
-          <p:cNvSpPr txBox="1"/>
-          <p:nvPr/>
-        </p:nvSpPr>
-        <p:spPr>
-          <a:xfrm>
-            <a:off x="457200" y="1143000"/>
-            <a:ext cx="11277295" cy="548640"/>
-          </a:xfrm>
-          <a:prstGeom prst="rect">
-            <a:avLst/>
-          </a:prstGeom>
-          <a:noFill/>
-        </p:spPr>
-        <p:txBody>
-          <a:bodyPr wrap="none">
-            <a:spAutoFit/>
-          </a:bodyPr>
-          <a:lstStyle/>
-          <a:p>
-            <a:pPr algn="ctr">
-              <a:defRPr sz="1900" b="1">
-                <a:solidFill>
-                  <a:srgbClr val="000000"/>
-                </a:solidFill>
-                <a:latin typeface="Arial"/>
-              </a:defRPr>
-            </a:pPr>
-            <a:r>
-              <a:t>“FROM SCATTERED AIRFARES TO SOVEREIGN REAL-TIME INFLATION INTELLIGENCE”</a:t>
-            </a:r>
-          </a:p>
-        </p:txBody>
-      </p:sp>
-      <p:sp>
-        <p:nvSpPr>
-          <p:cNvPr id="7" name="TextBox 6"/>
-          <p:cNvSpPr txBox="1"/>
-          <p:nvPr/>
-        </p:nvSpPr>
-        <p:spPr>
-          <a:xfrm>
-            <a:off x="731520" y="1737360"/>
-            <a:ext cx="4114800" cy="365760"/>
-          </a:xfrm>
-          <a:prstGeom prst="rect">
-            <a:avLst/>
-          </a:prstGeom>
-          <a:noFill/>
-        </p:spPr>
-        <p:txBody>
-          <a:bodyPr wrap="none">
-            <a:spAutoFit/>
-          </a:bodyPr>
-          <a:lstStyle/>
-          <a:p>
-            <a:pPr>
-              <a:defRPr sz="2200" b="1">
-                <a:solidFill>
-                  <a:srgbClr val="000000"/>
-                </a:solidFill>
-                <a:latin typeface="Arial"/>
-              </a:defRPr>
-            </a:pPr>
-            <a:r>
-              <a:t>IMPACTS</a:t>
-            </a:r>
-          </a:p>
-        </p:txBody>
-      </p:sp>
-      <p:sp>
-        <p:nvSpPr>
-          <p:cNvPr id="8" name="Rounded Rectangle 7"/>
+          <p:cNvPr id="6" name="Rounded Rectangle 5"/>
           <p:cNvSpPr/>
           <p:nvPr/>
         </p:nvSpPr>
         <p:spPr>
           <a:xfrm>
-            <a:off x="731520" y="2194560"/>
-            <a:ext cx="4572000" cy="804672"/>
+            <a:off x="640080" y="1188720"/>
+            <a:ext cx="5303520" cy="2011680"/>
           </a:xfrm>
           <a:prstGeom prst="roundRect">
-            <a:avLst/>
+            <a:avLst>
+              <a:gd name="adj" fmla="val 6000"/>
+            </a:avLst>
           </a:prstGeom>
           <a:solidFill>
-            <a:srgbClr val="BFDBFE"/>
+            <a:srgbClr val="1E3A8A"/>
           </a:solidFill>
-          <a:ln w="12700">
+          <a:ln w="19050">
             <a:solidFill>
-              <a:srgbClr val="1E40AF"/>
+              <a:srgbClr val="1E3A8A"/>
             </a:solidFill>
           </a:ln>
         </p:spPr>
@@ -6522,57 +6205,34 @@
           </a:fontRef>
         </p:style>
         <p:txBody>
-          <a:bodyPr rtlCol="0" anchor="ctr" wrap="square" lIns="109728" rIns="109728" tIns="54864"/>
-          <a:lstStyle/>
-          <a:p>
-            <a:pPr algn="ctr">
-              <a:defRPr sz="1100" b="1">
-                <a:solidFill>
-                  <a:srgbClr val="1E40AF"/>
-                </a:solidFill>
-                <a:latin typeface="Arial"/>
-              </a:defRPr>
-            </a:pPr>
-            <a:r>
-              <a:t>Macroeconomic Policy Impact</a:t>
-            </a:r>
-          </a:p>
-          <a:p>
-            <a:pPr>
-              <a:defRPr sz="950">
-                <a:solidFill>
-                  <a:srgbClr val="000000"/>
-                </a:solidFill>
-                <a:latin typeface="Arial"/>
-              </a:defRPr>
-            </a:pPr>
-            <a:r>
-              <a:t>Eliminates 15-day CPI lag; empowers RBI MPC with real-time transport inflation metrics.</a:t>
-            </a:r>
-          </a:p>
-        </p:txBody>
-      </p:sp>
-      <p:sp>
-        <p:nvSpPr>
-          <p:cNvPr id="9" name="Rounded Rectangle 8"/>
+          <a:bodyPr rtlCol="0" anchor="ctr"/>
+          <a:lstStyle/>
+          <a:p>
+            <a:pPr algn="ctr"/>
+          </a:p>
+        </p:txBody>
+      </p:sp>
+      <p:sp>
+        <p:nvSpPr>
+          <p:cNvPr id="7" name="Rounded Rectangle 6"/>
           <p:cNvSpPr/>
           <p:nvPr/>
         </p:nvSpPr>
         <p:spPr>
           <a:xfrm>
-            <a:off x="731520" y="3072384"/>
-            <a:ext cx="4572000" cy="804672"/>
+            <a:off x="676656" y="1572768"/>
+            <a:ext cx="5230368" cy="1591056"/>
           </a:xfrm>
           <a:prstGeom prst="roundRect">
-            <a:avLst/>
+            <a:avLst>
+              <a:gd name="adj" fmla="val 5000"/>
+            </a:avLst>
           </a:prstGeom>
           <a:solidFill>
-            <a:srgbClr val="BBF7D0"/>
+            <a:srgbClr val="FFFFFF"/>
           </a:solidFill>
-          <a:ln w="12700">
-            <a:solidFill>
-              <a:srgbClr val="166534"/>
-            </a:solidFill>
+          <a:ln>
+            <a:noFill/>
           </a:ln>
         </p:spPr>
         <p:style>
@@ -6590,32 +6250,89 @@
           </a:fontRef>
         </p:style>
         <p:txBody>
-          <a:bodyPr rtlCol="0" anchor="ctr" wrap="square" lIns="109728" rIns="109728" tIns="54864"/>
-          <a:lstStyle/>
-          <a:p>
-            <a:pPr algn="ctr">
-              <a:defRPr sz="1100" b="1">
-                <a:solidFill>
-                  <a:srgbClr val="166534"/>
+          <a:bodyPr rtlCol="0" anchor="ctr"/>
+          <a:lstStyle/>
+          <a:p>
+            <a:pPr algn="ctr"/>
+          </a:p>
+        </p:txBody>
+      </p:sp>
+      <p:sp>
+        <p:nvSpPr>
+          <p:cNvPr id="8" name="TextBox 7"/>
+          <p:cNvSpPr txBox="1"/>
+          <p:nvPr/>
+        </p:nvSpPr>
+        <p:spPr>
+          <a:xfrm>
+            <a:off x="777240" y="1243584"/>
+            <a:ext cx="5029200" cy="320040"/>
+          </a:xfrm>
+          <a:prstGeom prst="rect">
+            <a:avLst/>
+          </a:prstGeom>
+          <a:noFill/>
+        </p:spPr>
+        <p:txBody>
+          <a:bodyPr wrap="none">
+            <a:spAutoFit/>
+          </a:bodyPr>
+          <a:lstStyle/>
+          <a:p>
+            <a:pPr>
+              <a:defRPr sz="1150" b="1">
+                <a:solidFill>
+                  <a:srgbClr val="FFFFFF"/>
                 </a:solidFill>
                 <a:latin typeface="Arial"/>
               </a:defRPr>
             </a:pPr>
             <a:r>
-              <a:t>Regulatory &amp; Aviation Impact</a:t>
-            </a:r>
-          </a:p>
+              <a:t>🏛️ MoSPI NSO (Statistical Modernization)</a:t>
+            </a:r>
+          </a:p>
+        </p:txBody>
+      </p:sp>
+      <p:sp>
+        <p:nvSpPr>
+          <p:cNvPr id="9" name="TextBox 8"/>
+          <p:cNvSpPr txBox="1"/>
+          <p:nvPr/>
+        </p:nvSpPr>
+        <p:spPr>
+          <a:xfrm>
+            <a:off x="822960" y="1627632"/>
+            <a:ext cx="4937760" cy="1508760"/>
+          </a:xfrm>
+          <a:prstGeom prst="rect">
+            <a:avLst/>
+          </a:prstGeom>
+          <a:noFill/>
+        </p:spPr>
+        <p:txBody>
+          <a:bodyPr wrap="square" lIns="0" rIns="0" tIns="0" bIns="0">
+            <a:spAutoFit/>
+          </a:bodyPr>
+          <a:lstStyle/>
           <a:p>
             <a:pPr>
-              <a:defRPr sz="950">
-                <a:solidFill>
-                  <a:srgbClr val="000000"/>
+              <a:defRPr sz="1150">
+                <a:solidFill>
+                  <a:srgbClr val="1E293B"/>
                 </a:solidFill>
                 <a:latin typeface="Arial"/>
               </a:defRPr>
             </a:pPr>
             <a:r>
-              <a:t>Enables DGCA to detect route monopolies, festival fare surges &amp; predatory pricing.</a:t>
+              <a:t>• Slashes manual price collection lag from 15 days to real-time (0 days).</a:t>
+            </a:r>
+            <a:br/>
+            <a:r>
+              <a:t>• Ingests 10,000+ daily observations vs 1 monthly static manual quote.</a:t>
+            </a:r>
+            <a:br/>
+            <a:r>
+              <a:t>• Direct automated API feed into MoSPI eSankhyiki &amp; NDAP platforms.</a:t>
             </a:r>
           </a:p>
         </p:txBody>
@@ -6628,18 +6345,20 @@
         </p:nvSpPr>
         <p:spPr>
           <a:xfrm>
-            <a:off x="731520" y="3950208"/>
-            <a:ext cx="4572000" cy="804672"/>
+            <a:off x="6217920" y="1188720"/>
+            <a:ext cx="5303520" cy="2011680"/>
           </a:xfrm>
           <a:prstGeom prst="roundRect">
-            <a:avLst/>
+            <a:avLst>
+              <a:gd name="adj" fmla="val 6000"/>
+            </a:avLst>
           </a:prstGeom>
           <a:solidFill>
-            <a:srgbClr val="FED7AA"/>
+            <a:srgbClr val="4338CA"/>
           </a:solidFill>
-          <a:ln w="12700">
+          <a:ln w="19050">
             <a:solidFill>
-              <a:srgbClr val="9A3412"/>
+              <a:srgbClr val="4338CA"/>
             </a:solidFill>
           </a:ln>
         </p:spPr>
@@ -6658,33 +6377,10 @@
           </a:fontRef>
         </p:style>
         <p:txBody>
-          <a:bodyPr rtlCol="0" anchor="ctr" wrap="square" lIns="109728" rIns="109728" tIns="54864"/>
-          <a:lstStyle/>
-          <a:p>
-            <a:pPr algn="ctr">
-              <a:defRPr sz="1100" b="1">
-                <a:solidFill>
-                  <a:srgbClr val="9A3412"/>
-                </a:solidFill>
-                <a:latin typeface="Arial"/>
-              </a:defRPr>
-            </a:pPr>
-            <a:r>
-              <a:t>Statistical Rigor Impact</a:t>
-            </a:r>
-          </a:p>
-          <a:p>
-            <a:pPr>
-              <a:defRPr sz="950">
-                <a:solidFill>
-                  <a:srgbClr val="000000"/>
-                </a:solidFill>
-                <a:latin typeface="Arial"/>
-              </a:defRPr>
-            </a:pPr>
-            <a:r>
-              <a:t>Replaces single monthly spot checks with 10,000+ daily observations obeying UN/ILO standards.</a:t>
-            </a:r>
+          <a:bodyPr rtlCol="0" anchor="ctr"/>
+          <a:lstStyle/>
+          <a:p>
+            <a:pPr algn="ctr"/>
           </a:p>
         </p:txBody>
       </p:sp>
@@ -6696,19 +6392,19 @@
         </p:nvSpPr>
         <p:spPr>
           <a:xfrm>
-            <a:off x="731520" y="4828032"/>
-            <a:ext cx="4572000" cy="804672"/>
+            <a:off x="6254496" y="1572768"/>
+            <a:ext cx="5230368" cy="1591056"/>
           </a:xfrm>
           <a:prstGeom prst="roundRect">
-            <a:avLst/>
+            <a:avLst>
+              <a:gd name="adj" fmla="val 5000"/>
+            </a:avLst>
           </a:prstGeom>
           <a:solidFill>
-            <a:srgbClr val="E9D5FF"/>
+            <a:srgbClr val="FFFFFF"/>
           </a:solidFill>
-          <a:ln w="12700">
-            <a:solidFill>
-              <a:srgbClr val="6B21A8"/>
-            </a:solidFill>
+          <a:ln>
+            <a:noFill/>
           </a:ln>
         </p:spPr>
         <p:style>
@@ -6726,56 +6422,115 @@
           </a:fontRef>
         </p:style>
         <p:txBody>
-          <a:bodyPr rtlCol="0" anchor="ctr" wrap="square" lIns="109728" rIns="109728" tIns="54864"/>
-          <a:lstStyle/>
-          <a:p>
-            <a:pPr algn="ctr">
-              <a:defRPr sz="1100" b="1">
-                <a:solidFill>
-                  <a:srgbClr val="6B21A8"/>
+          <a:bodyPr rtlCol="0" anchor="ctr"/>
+          <a:lstStyle/>
+          <a:p>
+            <a:pPr algn="ctr"/>
+          </a:p>
+        </p:txBody>
+      </p:sp>
+      <p:sp>
+        <p:nvSpPr>
+          <p:cNvPr id="12" name="TextBox 11"/>
+          <p:cNvSpPr txBox="1"/>
+          <p:nvPr/>
+        </p:nvSpPr>
+        <p:spPr>
+          <a:xfrm>
+            <a:off x="6355080" y="1243584"/>
+            <a:ext cx="5029200" cy="320040"/>
+          </a:xfrm>
+          <a:prstGeom prst="rect">
+            <a:avLst/>
+          </a:prstGeom>
+          <a:noFill/>
+        </p:spPr>
+        <p:txBody>
+          <a:bodyPr wrap="none">
+            <a:spAutoFit/>
+          </a:bodyPr>
+          <a:lstStyle/>
+          <a:p>
+            <a:pPr>
+              <a:defRPr sz="1150" b="1">
+                <a:solidFill>
+                  <a:srgbClr val="FFFFFF"/>
                 </a:solidFill>
                 <a:latin typeface="Arial"/>
               </a:defRPr>
             </a:pPr>
             <a:r>
-              <a:t>National Governance Impact</a:t>
-            </a:r>
-          </a:p>
+              <a:t>🏦 RBI MPC (Monetary Policy Targeting)</a:t>
+            </a:r>
+          </a:p>
+        </p:txBody>
+      </p:sp>
+      <p:sp>
+        <p:nvSpPr>
+          <p:cNvPr id="13" name="TextBox 12"/>
+          <p:cNvSpPr txBox="1"/>
+          <p:nvPr/>
+        </p:nvSpPr>
+        <p:spPr>
+          <a:xfrm>
+            <a:off x="6400800" y="1627632"/>
+            <a:ext cx="4937760" cy="1508760"/>
+          </a:xfrm>
+          <a:prstGeom prst="rect">
+            <a:avLst/>
+          </a:prstGeom>
+          <a:noFill/>
+        </p:spPr>
+        <p:txBody>
+          <a:bodyPr wrap="square" lIns="0" rIns="0" tIns="0" bIns="0">
+            <a:spAutoFit/>
+          </a:bodyPr>
+          <a:lstStyle/>
           <a:p>
             <a:pPr>
-              <a:defRPr sz="950">
-                <a:solidFill>
-                  <a:srgbClr val="000000"/>
+              <a:defRPr sz="1150">
+                <a:solidFill>
+                  <a:srgbClr val="1E293B"/>
                 </a:solidFill>
                 <a:latin typeface="Arial"/>
               </a:defRPr>
             </a:pPr>
             <a:r>
-              <a:t>Builds India's first sovereign high-frequency price aggregation platform.</a:t>
-            </a:r>
-          </a:p>
-        </p:txBody>
-      </p:sp>
-      <p:sp>
-        <p:nvSpPr>
-          <p:cNvPr id="12" name="Rounded Rectangle 11"/>
+              <a:t>• Delivers high-frequency leading transport inflation indicator.</a:t>
+            </a:r>
+            <a:br/>
+            <a:r>
+              <a:t>• Enables timely interest rate calibration under flexible inflation targeting.</a:t>
+            </a:r>
+            <a:br/>
+            <a:r>
+              <a:t>• Eliminates 15-day policy blindspot in highly volatile travel cycles.</a:t>
+            </a:r>
+          </a:p>
+        </p:txBody>
+      </p:sp>
+      <p:sp>
+        <p:nvSpPr>
+          <p:cNvPr id="14" name="Rounded Rectangle 13"/>
           <p:cNvSpPr/>
           <p:nvPr/>
         </p:nvSpPr>
         <p:spPr>
           <a:xfrm>
-            <a:off x="731520" y="5705856"/>
-            <a:ext cx="4572000" cy="804672"/>
+            <a:off x="640080" y="3337560"/>
+            <a:ext cx="5303520" cy="1828800"/>
           </a:xfrm>
           <a:prstGeom prst="roundRect">
-            <a:avLst/>
+            <a:avLst>
+              <a:gd name="adj" fmla="val 6000"/>
+            </a:avLst>
           </a:prstGeom>
           <a:solidFill>
-            <a:srgbClr val="FEF08A"/>
+            <a:srgbClr val="0D9488"/>
           </a:solidFill>
-          <a:ln w="12700">
+          <a:ln w="19050">
             <a:solidFill>
-              <a:srgbClr val="854D0E"/>
+              <a:srgbClr val="0D9488"/>
             </a:solidFill>
           </a:ln>
         </p:spPr>
@@ -6794,52 +6549,31 @@
           </a:fontRef>
         </p:style>
         <p:txBody>
-          <a:bodyPr rtlCol="0" anchor="ctr" wrap="square" lIns="109728" rIns="109728" tIns="54864"/>
-          <a:lstStyle/>
-          <a:p>
-            <a:pPr algn="ctr">
-              <a:defRPr sz="1100" b="1">
-                <a:solidFill>
-                  <a:srgbClr val="854D0E"/>
-                </a:solidFill>
-                <a:latin typeface="Arial"/>
-              </a:defRPr>
-            </a:pPr>
-            <a:r>
-              <a:t>Technical &amp; Digital Impact</a:t>
-            </a:r>
-          </a:p>
-          <a:p>
-            <a:pPr>
-              <a:defRPr sz="950">
-                <a:solidFill>
-                  <a:srgbClr val="000000"/>
-                </a:solidFill>
-                <a:latin typeface="Arial"/>
-              </a:defRPr>
-            </a:pPr>
-            <a:r>
-              <a:t>Demonstrates how automated scraping &amp; cryptographic provenance modernize national statistics.</a:t>
-            </a:r>
-          </a:p>
-        </p:txBody>
-      </p:sp>
-      <p:sp>
-        <p:nvSpPr>
-          <p:cNvPr id="13" name="Rectangle 12"/>
+          <a:bodyPr rtlCol="0" anchor="ctr"/>
+          <a:lstStyle/>
+          <a:p>
+            <a:pPr algn="ctr"/>
+          </a:p>
+        </p:txBody>
+      </p:sp>
+      <p:sp>
+        <p:nvSpPr>
+          <p:cNvPr id="15" name="Rounded Rectangle 14"/>
           <p:cNvSpPr/>
           <p:nvPr/>
         </p:nvSpPr>
         <p:spPr>
           <a:xfrm>
-            <a:off x="5623560" y="2011680"/>
-            <a:ext cx="27432" cy="4480560"/>
-          </a:xfrm>
-          <a:prstGeom prst="rect">
-            <a:avLst/>
+            <a:off x="676656" y="3721608"/>
+            <a:ext cx="5230368" cy="1408176"/>
+          </a:xfrm>
+          <a:prstGeom prst="roundRect">
+            <a:avLst>
+              <a:gd name="adj" fmla="val 5000"/>
+            </a:avLst>
           </a:prstGeom>
           <a:solidFill>
-            <a:srgbClr val="C8C8C8"/>
+            <a:srgbClr val="FFFFFF"/>
           </a:solidFill>
           <a:ln>
             <a:noFill/>
@@ -6869,14 +6603,14 @@
       </p:sp>
       <p:sp>
         <p:nvSpPr>
-          <p:cNvPr id="14" name="TextBox 13"/>
+          <p:cNvPr id="16" name="TextBox 15"/>
           <p:cNvSpPr txBox="1"/>
           <p:nvPr/>
         </p:nvSpPr>
         <p:spPr>
           <a:xfrm>
-            <a:off x="5943600" y="1737360"/>
-            <a:ext cx="5029200" cy="365760"/>
+            <a:off x="777240" y="3392424"/>
+            <a:ext cx="5029200" cy="320040"/>
           </a:xfrm>
           <a:prstGeom prst="rect">
             <a:avLst/>
@@ -6890,29 +6624,29 @@
           <a:lstStyle/>
           <a:p>
             <a:pPr>
-              <a:defRPr sz="2200" b="1">
-                <a:solidFill>
-                  <a:srgbClr val="000000"/>
+              <a:defRPr sz="1150" b="1">
+                <a:solidFill>
+                  <a:srgbClr val="FFFFFF"/>
                 </a:solidFill>
                 <a:latin typeface="Arial"/>
               </a:defRPr>
             </a:pPr>
             <a:r>
-              <a:t>FUTURE PROSPECTS</a:t>
-            </a:r>
-          </a:p>
-        </p:txBody>
-      </p:sp>
-      <p:sp>
-        <p:nvSpPr>
-          <p:cNvPr id="15" name="TextBox 14"/>
+              <a:t>✈️ DGCA (Aviation Regulation &amp; Oversight)</a:t>
+            </a:r>
+          </a:p>
+        </p:txBody>
+      </p:sp>
+      <p:sp>
+        <p:nvSpPr>
+          <p:cNvPr id="17" name="TextBox 16"/>
           <p:cNvSpPr txBox="1"/>
           <p:nvPr/>
         </p:nvSpPr>
         <p:spPr>
           <a:xfrm>
-            <a:off x="5943600" y="2194560"/>
-            <a:ext cx="5760720" cy="4297680"/>
+            <a:off x="822960" y="3776472"/>
+            <a:ext cx="4937760" cy="1325880"/>
           </a:xfrm>
           <a:prstGeom prst="rect">
             <a:avLst/>
@@ -6920,156 +6654,56 @@
           <a:noFill/>
         </p:spPr>
         <p:txBody>
-          <a:bodyPr wrap="square" lIns="0" tIns="0" rIns="0" bIns="0">
+          <a:bodyPr wrap="square" lIns="0" rIns="0" tIns="0" bIns="0">
             <a:spAutoFit/>
           </a:bodyPr>
           <a:lstStyle/>
           <a:p>
             <a:pPr>
-              <a:spcAft>
-                <a:spcPts val="1000"/>
-              </a:spcAft>
-            </a:pPr>
-            <a:r>
-              <a:rPr sz="1200" b="1">
-                <a:solidFill>
-                  <a:srgbClr val="000000"/>
-                </a:solidFill>
-                <a:latin typeface="Arial"/>
-              </a:rPr>
-              <a:t>• UDAN Route Expansion: </a:t>
-            </a:r>
-            <a:r>
-              <a:rPr sz="1200">
-                <a:solidFill>
-                  <a:srgbClr val="323232"/>
-                </a:solidFill>
-                <a:latin typeface="Arial"/>
-              </a:rPr>
-              <a:t>Scale from current 12 metro corridors to 250+ Tier-2 and Tier-3 regional airports nationwide.</a:t>
-            </a:r>
-          </a:p>
-          <a:p>
-            <a:pPr>
-              <a:spcAft>
-                <a:spcPts val="1000"/>
-              </a:spcAft>
-            </a:pPr>
-            <a:r>
-              <a:rPr sz="1200" b="1">
-                <a:solidFill>
-                  <a:srgbClr val="000000"/>
-                </a:solidFill>
-                <a:latin typeface="Arial"/>
-              </a:rPr>
-              <a:t>• Cabin Tier Differentiation: </a:t>
-            </a:r>
-            <a:r>
-              <a:rPr sz="1200">
-                <a:solidFill>
-                  <a:srgbClr val="323232"/>
-                </a:solidFill>
-                <a:latin typeface="Arial"/>
-              </a:rPr>
-              <a:t>Segregate economy, premium economy, and business class into granular sub-indices.</a:t>
-            </a:r>
-          </a:p>
-          <a:p>
-            <a:pPr>
-              <a:spcAft>
-                <a:spcPts val="1000"/>
-              </a:spcAft>
-            </a:pPr>
-            <a:r>
-              <a:rPr sz="1200" b="1">
-                <a:solidFill>
-                  <a:srgbClr val="000000"/>
-                </a:solidFill>
-                <a:latin typeface="Arial"/>
-              </a:rPr>
-              <a:t>• Intraday Time-of-Day Yield: </a:t>
-            </a:r>
-            <a:r>
-              <a:rPr sz="1200">
-                <a:solidFill>
-                  <a:srgbClr val="323232"/>
-                </a:solidFill>
-                <a:latin typeface="Arial"/>
-              </a:rPr>
-              <a:t>Model peak departure rush hours (06:00-09:00, 17:00-20:00) vs off-peak red-eye rates.</a:t>
-            </a:r>
-          </a:p>
-          <a:p>
-            <a:pPr>
-              <a:spcAft>
-                <a:spcPts val="1000"/>
-              </a:spcAft>
-            </a:pPr>
-            <a:r>
-              <a:rPr sz="1200" b="1">
-                <a:solidFill>
-                  <a:srgbClr val="000000"/>
-                </a:solidFill>
-                <a:latin typeface="Arial"/>
-              </a:rPr>
-              <a:t>• Central MoSPI NDAP Integration: </a:t>
-            </a:r>
-            <a:r>
-              <a:rPr sz="1200">
-                <a:solidFill>
-                  <a:srgbClr val="323232"/>
-                </a:solidFill>
-                <a:latin typeface="Arial"/>
-              </a:rPr>
-              <a:t>Establish direct automated API pipelines feeding real-time indices into the official CPI release.</a:t>
-            </a:r>
-          </a:p>
-          <a:p>
-            <a:pPr>
-              <a:spcAft>
-                <a:spcPts val="1000"/>
-              </a:spcAft>
-            </a:pPr>
-            <a:r>
-              <a:rPr sz="1200" b="1">
-                <a:solidFill>
-                  <a:srgbClr val="000000"/>
-                </a:solidFill>
-                <a:latin typeface="Arial"/>
-              </a:rPr>
-              <a:t>• Autonomous AI Analyst: </a:t>
-            </a:r>
-            <a:r>
-              <a:rPr sz="1200">
-                <a:solidFill>
-                  <a:srgbClr val="323232"/>
-                </a:solidFill>
-                <a:latin typeface="Arial"/>
-              </a:rPr>
-              <a:t>Deploy LLM agents to draft automated weekly inflation briefs and alert DGCA of pricing anomalies.</a:t>
-            </a:r>
-          </a:p>
-        </p:txBody>
-      </p:sp>
-      <p:sp>
-        <p:nvSpPr>
-          <p:cNvPr id="16" name="Rectangle 15"/>
+              <a:defRPr sz="1150">
+                <a:solidFill>
+                  <a:srgbClr val="1E293B"/>
+                </a:solidFill>
+                <a:latin typeface="Arial"/>
+              </a:defRPr>
+            </a:pPr>
+            <a:r>
+              <a:t>• Real-time surge anomaly detection to catch predatory pricing.</a:t>
+            </a:r>
+            <a:br/>
+            <a:r>
+              <a:t>• Route monopoly identification and holiday season fare gouging alerts.</a:t>
+            </a:r>
+            <a:br/>
+            <a:r>
+              <a:t>• Standardized route yield analytics across 12 domestic corridors.</a:t>
+            </a:r>
+          </a:p>
+        </p:txBody>
+      </p:sp>
+      <p:sp>
+        <p:nvSpPr>
+          <p:cNvPr id="18" name="Rounded Rectangle 17"/>
           <p:cNvSpPr/>
           <p:nvPr/>
         </p:nvSpPr>
         <p:spPr>
           <a:xfrm>
-            <a:off x="457200" y="6473952"/>
-            <a:ext cx="11277295" cy="13716"/>
-          </a:xfrm>
-          <a:prstGeom prst="rect">
-            <a:avLst/>
+            <a:off x="6217920" y="3337560"/>
+            <a:ext cx="5303520" cy="1828800"/>
+          </a:xfrm>
+          <a:prstGeom prst="roundRect">
+            <a:avLst>
+              <a:gd name="adj" fmla="val 6000"/>
+            </a:avLst>
           </a:prstGeom>
           <a:solidFill>
-            <a:srgbClr val="E2E8F0"/>
+            <a:srgbClr val="7C3AED"/>
           </a:solidFill>
-          <a:ln>
-            <a:noFill/>
+          <a:ln w="19050">
+            <a:solidFill>
+              <a:srgbClr val="7C3AED"/>
+            </a:solidFill>
           </a:ln>
         </p:spPr>
         <p:style>
@@ -7096,14 +6730,95 @@
       </p:sp>
       <p:sp>
         <p:nvSpPr>
-          <p:cNvPr id="17" name="TextBox 16"/>
+          <p:cNvPr id="19" name="Rounded Rectangle 18"/>
+          <p:cNvSpPr/>
+          <p:nvPr/>
+        </p:nvSpPr>
+        <p:spPr>
+          <a:xfrm>
+            <a:off x="6254496" y="3721608"/>
+            <a:ext cx="5230368" cy="1408176"/>
+          </a:xfrm>
+          <a:prstGeom prst="roundRect">
+            <a:avLst>
+              <a:gd name="adj" fmla="val 5000"/>
+            </a:avLst>
+          </a:prstGeom>
+          <a:solidFill>
+            <a:srgbClr val="FFFFFF"/>
+          </a:solidFill>
+          <a:ln>
+            <a:noFill/>
+          </a:ln>
+        </p:spPr>
+        <p:style>
+          <a:lnRef idx="1">
+            <a:schemeClr val="accent1"/>
+          </a:lnRef>
+          <a:fillRef idx="3">
+            <a:schemeClr val="accent1"/>
+          </a:fillRef>
+          <a:effectRef idx="2">
+            <a:schemeClr val="accent1"/>
+          </a:effectRef>
+          <a:fontRef idx="minor">
+            <a:schemeClr val="lt1"/>
+          </a:fontRef>
+        </p:style>
+        <p:txBody>
+          <a:bodyPr rtlCol="0" anchor="ctr"/>
+          <a:lstStyle/>
+          <a:p>
+            <a:pPr algn="ctr"/>
+          </a:p>
+        </p:txBody>
+      </p:sp>
+      <p:sp>
+        <p:nvSpPr>
+          <p:cNvPr id="20" name="TextBox 19"/>
           <p:cNvSpPr txBox="1"/>
           <p:nvPr/>
         </p:nvSpPr>
         <p:spPr>
           <a:xfrm>
-            <a:off x="457200" y="6510528"/>
-            <a:ext cx="11277295" cy="292608"/>
+            <a:off x="6355080" y="3392424"/>
+            <a:ext cx="5029200" cy="320040"/>
+          </a:xfrm>
+          <a:prstGeom prst="rect">
+            <a:avLst/>
+          </a:prstGeom>
+          <a:noFill/>
+        </p:spPr>
+        <p:txBody>
+          <a:bodyPr wrap="none">
+            <a:spAutoFit/>
+          </a:bodyPr>
+          <a:lstStyle/>
+          <a:p>
+            <a:pPr>
+              <a:defRPr sz="1150" b="1">
+                <a:solidFill>
+                  <a:srgbClr val="FFFFFF"/>
+                </a:solidFill>
+                <a:latin typeface="Arial"/>
+              </a:defRPr>
+            </a:pPr>
+            <a:r>
+              <a:t>🇮🇳 National DPI (Digital Public Infrastructure)</a:t>
+            </a:r>
+          </a:p>
+        </p:txBody>
+      </p:sp>
+      <p:sp>
+        <p:nvSpPr>
+          <p:cNvPr id="21" name="TextBox 20"/>
+          <p:cNvSpPr txBox="1"/>
+          <p:nvPr/>
+        </p:nvSpPr>
+        <p:spPr>
+          <a:xfrm>
+            <a:off x="6400800" y="3776472"/>
+            <a:ext cx="4937760" cy="1325880"/>
           </a:xfrm>
           <a:prstGeom prst="rect">
             <a:avLst/>
@@ -7116,24 +6831,491 @@
           </a:bodyPr>
           <a:lstStyle/>
           <a:p>
+            <a:pPr>
+              <a:defRPr sz="1150">
+                <a:solidFill>
+                  <a:srgbClr val="1E293B"/>
+                </a:solidFill>
+                <a:latin typeface="Arial"/>
+              </a:defRPr>
+            </a:pPr>
+            <a:r>
+              <a:t>• India's first open sovereign high-frequency price monitoring platform.</a:t>
+            </a:r>
+            <a:br/>
+            <a:r>
+              <a:t>• Immutable SHA-256 batch cryptographic auditability for legal scrutiny.</a:t>
+            </a:r>
+            <a:br/>
+            <a:r>
+              <a:t>• Scalable architecture designed for 250+ UDAN regional airports.</a:t>
+            </a:r>
+          </a:p>
+        </p:txBody>
+      </p:sp>
+      <p:sp>
+        <p:nvSpPr>
+          <p:cNvPr id="22" name="Rounded Rectangle 21"/>
+          <p:cNvSpPr/>
+          <p:nvPr/>
+        </p:nvSpPr>
+        <p:spPr>
+          <a:xfrm>
+            <a:off x="640080" y="5303520"/>
+            <a:ext cx="10908792" cy="1188720"/>
+          </a:xfrm>
+          <a:prstGeom prst="roundRect">
+            <a:avLst>
+              <a:gd name="adj" fmla="val 8000"/>
+            </a:avLst>
+          </a:prstGeom>
+          <a:solidFill>
+            <a:srgbClr val="F1F5F9"/>
+          </a:solidFill>
+          <a:ln w="19050">
+            <a:solidFill>
+              <a:srgbClr val="CBD5E1"/>
+            </a:solidFill>
+          </a:ln>
+        </p:spPr>
+        <p:style>
+          <a:lnRef idx="1">
+            <a:schemeClr val="accent1"/>
+          </a:lnRef>
+          <a:fillRef idx="3">
+            <a:schemeClr val="accent1"/>
+          </a:fillRef>
+          <a:effectRef idx="2">
+            <a:schemeClr val="accent1"/>
+          </a:effectRef>
+          <a:fontRef idx="minor">
+            <a:schemeClr val="lt1"/>
+          </a:fontRef>
+        </p:style>
+        <p:txBody>
+          <a:bodyPr rtlCol="0" anchor="ctr"/>
+          <a:lstStyle/>
+          <a:p>
             <a:pPr algn="ctr"/>
-            <a:r>
-              <a:rPr sz="1000" b="1">
-                <a:solidFill>
-                  <a:srgbClr val="475569"/>
-                </a:solidFill>
-                <a:latin typeface="Arial"/>
-              </a:rPr>
-              <a:t>Team Rookie  |  </a:t>
-            </a:r>
-            <a:r>
-              <a:rPr sz="1000" b="1">
+          </a:p>
+        </p:txBody>
+      </p:sp>
+      <p:sp>
+        <p:nvSpPr>
+          <p:cNvPr id="23" name="TextBox 22"/>
+          <p:cNvSpPr txBox="1"/>
+          <p:nvPr/>
+        </p:nvSpPr>
+        <p:spPr>
+          <a:xfrm>
+            <a:off x="822960" y="5349240"/>
+            <a:ext cx="10515600" cy="274320"/>
+          </a:xfrm>
+          <a:prstGeom prst="rect">
+            <a:avLst/>
+          </a:prstGeom>
+          <a:noFill/>
+        </p:spPr>
+        <p:txBody>
+          <a:bodyPr wrap="none">
+            <a:spAutoFit/>
+          </a:bodyPr>
+          <a:lstStyle/>
+          <a:p>
+            <a:pPr algn="ctr">
+              <a:defRPr sz="1100" b="1">
+                <a:solidFill>
+                  <a:srgbClr val="1B365D"/>
+                </a:solidFill>
+                <a:latin typeface="Arial"/>
+              </a:defRPr>
+            </a:pPr>
+            <a:r>
+              <a:t>STRATEGIC FUTURE ROADMAP &amp; SCALABILITY HORIZONS</a:t>
+            </a:r>
+          </a:p>
+        </p:txBody>
+      </p:sp>
+      <p:sp>
+        <p:nvSpPr>
+          <p:cNvPr id="24" name="Rounded Rectangle 23"/>
+          <p:cNvSpPr/>
+          <p:nvPr/>
+        </p:nvSpPr>
+        <p:spPr>
+          <a:xfrm>
+            <a:off x="822960" y="5623560"/>
+            <a:ext cx="2560320" cy="777240"/>
+          </a:xfrm>
+          <a:prstGeom prst="roundRect">
+            <a:avLst>
+              <a:gd name="adj" fmla="val 15000"/>
+            </a:avLst>
+          </a:prstGeom>
+          <a:solidFill>
+            <a:srgbClr val="FFFFFF"/>
+          </a:solidFill>
+          <a:ln w="12700">
+            <a:solidFill>
+              <a:srgbClr val="2563EB"/>
+            </a:solidFill>
+          </a:ln>
+        </p:spPr>
+        <p:style>
+          <a:lnRef idx="1">
+            <a:schemeClr val="accent1"/>
+          </a:lnRef>
+          <a:fillRef idx="3">
+            <a:schemeClr val="accent1"/>
+          </a:fillRef>
+          <a:effectRef idx="2">
+            <a:schemeClr val="accent1"/>
+          </a:effectRef>
+          <a:fontRef idx="minor">
+            <a:schemeClr val="lt1"/>
+          </a:fontRef>
+        </p:style>
+        <p:txBody>
+          <a:bodyPr rtlCol="0" anchor="ctr"/>
+          <a:lstStyle/>
+          <a:p>
+            <a:pPr algn="ctr"/>
+          </a:p>
+        </p:txBody>
+      </p:sp>
+      <p:sp>
+        <p:nvSpPr>
+          <p:cNvPr id="25" name="TextBox 24"/>
+          <p:cNvSpPr txBox="1"/>
+          <p:nvPr/>
+        </p:nvSpPr>
+        <p:spPr>
+          <a:xfrm>
+            <a:off x="896112" y="5650992"/>
+            <a:ext cx="2414016" cy="713232"/>
+          </a:xfrm>
+          <a:prstGeom prst="rect">
+            <a:avLst/>
+          </a:prstGeom>
+          <a:noFill/>
+        </p:spPr>
+        <p:txBody>
+          <a:bodyPr wrap="square" lIns="0" rIns="0" tIns="0" bIns="0">
+            <a:spAutoFit/>
+          </a:bodyPr>
+          <a:lstStyle/>
+          <a:p>
+            <a:pPr algn="ctr">
+              <a:defRPr sz="950" b="1">
+                <a:solidFill>
+                  <a:srgbClr val="2563EB"/>
+                </a:solidFill>
+                <a:latin typeface="Arial"/>
+              </a:defRPr>
+            </a:pPr>
+            <a:r>
+              <a:t>PHASE 1 (LIVE)</a:t>
+            </a:r>
+          </a:p>
+          <a:p>
+            <a:pPr algn="ctr">
+              <a:defRPr sz="850">
                 <a:solidFill>
                   <a:srgbClr val="1E293B"/>
                 </a:solidFill>
                 <a:latin typeface="Arial"/>
-              </a:rPr>
-              <a:t>[ Nikhil Kanse , Shivish Kumar , Tejas Patil , Pranav Pawale , Harsh Narkar , Blessy ]</a:t>
+              </a:defRPr>
+            </a:pPr>
+            <a:r>
+              <a:t>12 Core Metro Corridors deployed on Vercel Edge with daily cron</a:t>
+            </a:r>
+          </a:p>
+        </p:txBody>
+      </p:sp>
+      <p:sp>
+        <p:nvSpPr>
+          <p:cNvPr id="26" name="Rounded Rectangle 25"/>
+          <p:cNvSpPr/>
+          <p:nvPr/>
+        </p:nvSpPr>
+        <p:spPr>
+          <a:xfrm>
+            <a:off x="3520440" y="5623560"/>
+            <a:ext cx="2560320" cy="777240"/>
+          </a:xfrm>
+          <a:prstGeom prst="roundRect">
+            <a:avLst>
+              <a:gd name="adj" fmla="val 15000"/>
+            </a:avLst>
+          </a:prstGeom>
+          <a:solidFill>
+            <a:srgbClr val="FFFFFF"/>
+          </a:solidFill>
+          <a:ln w="12700">
+            <a:solidFill>
+              <a:srgbClr val="2563EB"/>
+            </a:solidFill>
+          </a:ln>
+        </p:spPr>
+        <p:style>
+          <a:lnRef idx="1">
+            <a:schemeClr val="accent1"/>
+          </a:lnRef>
+          <a:fillRef idx="3">
+            <a:schemeClr val="accent1"/>
+          </a:fillRef>
+          <a:effectRef idx="2">
+            <a:schemeClr val="accent1"/>
+          </a:effectRef>
+          <a:fontRef idx="minor">
+            <a:schemeClr val="lt1"/>
+          </a:fontRef>
+        </p:style>
+        <p:txBody>
+          <a:bodyPr rtlCol="0" anchor="ctr"/>
+          <a:lstStyle/>
+          <a:p>
+            <a:pPr algn="ctr"/>
+          </a:p>
+        </p:txBody>
+      </p:sp>
+      <p:sp>
+        <p:nvSpPr>
+          <p:cNvPr id="27" name="TextBox 26"/>
+          <p:cNvSpPr txBox="1"/>
+          <p:nvPr/>
+        </p:nvSpPr>
+        <p:spPr>
+          <a:xfrm>
+            <a:off x="3593592" y="5650992"/>
+            <a:ext cx="2414016" cy="713232"/>
+          </a:xfrm>
+          <a:prstGeom prst="rect">
+            <a:avLst/>
+          </a:prstGeom>
+          <a:noFill/>
+        </p:spPr>
+        <p:txBody>
+          <a:bodyPr wrap="square" lIns="0" rIns="0" tIns="0" bIns="0">
+            <a:spAutoFit/>
+          </a:bodyPr>
+          <a:lstStyle/>
+          <a:p>
+            <a:pPr algn="ctr">
+              <a:defRPr sz="950" b="1">
+                <a:solidFill>
+                  <a:srgbClr val="2563EB"/>
+                </a:solidFill>
+                <a:latin typeface="Arial"/>
+              </a:defRPr>
+            </a:pPr>
+            <a:r>
+              <a:t>PHASE 2 (T+6M)</a:t>
+            </a:r>
+          </a:p>
+          <a:p>
+            <a:pPr algn="ctr">
+              <a:defRPr sz="850">
+                <a:solidFill>
+                  <a:srgbClr val="1E293B"/>
+                </a:solidFill>
+                <a:latin typeface="Arial"/>
+              </a:defRPr>
+            </a:pPr>
+            <a:r>
+              <a:t>Scale to 250+ Tier-2/Tier-3 RCS-UDAN regional routes nationwide</a:t>
+            </a:r>
+          </a:p>
+        </p:txBody>
+      </p:sp>
+      <p:sp>
+        <p:nvSpPr>
+          <p:cNvPr id="28" name="Rounded Rectangle 27"/>
+          <p:cNvSpPr/>
+          <p:nvPr/>
+        </p:nvSpPr>
+        <p:spPr>
+          <a:xfrm>
+            <a:off x="6217920" y="5623560"/>
+            <a:ext cx="2560320" cy="777240"/>
+          </a:xfrm>
+          <a:prstGeom prst="roundRect">
+            <a:avLst>
+              <a:gd name="adj" fmla="val 15000"/>
+            </a:avLst>
+          </a:prstGeom>
+          <a:solidFill>
+            <a:srgbClr val="FFFFFF"/>
+          </a:solidFill>
+          <a:ln w="12700">
+            <a:solidFill>
+              <a:srgbClr val="2563EB"/>
+            </a:solidFill>
+          </a:ln>
+        </p:spPr>
+        <p:style>
+          <a:lnRef idx="1">
+            <a:schemeClr val="accent1"/>
+          </a:lnRef>
+          <a:fillRef idx="3">
+            <a:schemeClr val="accent1"/>
+          </a:fillRef>
+          <a:effectRef idx="2">
+            <a:schemeClr val="accent1"/>
+          </a:effectRef>
+          <a:fontRef idx="minor">
+            <a:schemeClr val="lt1"/>
+          </a:fontRef>
+        </p:style>
+        <p:txBody>
+          <a:bodyPr rtlCol="0" anchor="ctr"/>
+          <a:lstStyle/>
+          <a:p>
+            <a:pPr algn="ctr"/>
+          </a:p>
+        </p:txBody>
+      </p:sp>
+      <p:sp>
+        <p:nvSpPr>
+          <p:cNvPr id="29" name="TextBox 28"/>
+          <p:cNvSpPr txBox="1"/>
+          <p:nvPr/>
+        </p:nvSpPr>
+        <p:spPr>
+          <a:xfrm>
+            <a:off x="6291072" y="5650992"/>
+            <a:ext cx="2414016" cy="713232"/>
+          </a:xfrm>
+          <a:prstGeom prst="rect">
+            <a:avLst/>
+          </a:prstGeom>
+          <a:noFill/>
+        </p:spPr>
+        <p:txBody>
+          <a:bodyPr wrap="square" lIns="0" rIns="0" tIns="0" bIns="0">
+            <a:spAutoFit/>
+          </a:bodyPr>
+          <a:lstStyle/>
+          <a:p>
+            <a:pPr algn="ctr">
+              <a:defRPr sz="950" b="1">
+                <a:solidFill>
+                  <a:srgbClr val="2563EB"/>
+                </a:solidFill>
+                <a:latin typeface="Arial"/>
+              </a:defRPr>
+            </a:pPr>
+            <a:r>
+              <a:t>PHASE 3 (T+12M)</a:t>
+            </a:r>
+          </a:p>
+          <a:p>
+            <a:pPr algn="ctr">
+              <a:defRPr sz="850">
+                <a:solidFill>
+                  <a:srgbClr val="1E293B"/>
+                </a:solidFill>
+                <a:latin typeface="Arial"/>
+              </a:defRPr>
+            </a:pPr>
+            <a:r>
+              <a:t>Granular decomposition into Economy, Premium, and Business indices</a:t>
+            </a:r>
+          </a:p>
+        </p:txBody>
+      </p:sp>
+      <p:sp>
+        <p:nvSpPr>
+          <p:cNvPr id="30" name="Rounded Rectangle 29"/>
+          <p:cNvSpPr/>
+          <p:nvPr/>
+        </p:nvSpPr>
+        <p:spPr>
+          <a:xfrm>
+            <a:off x="8915400" y="5623560"/>
+            <a:ext cx="2560320" cy="777240"/>
+          </a:xfrm>
+          <a:prstGeom prst="roundRect">
+            <a:avLst>
+              <a:gd name="adj" fmla="val 15000"/>
+            </a:avLst>
+          </a:prstGeom>
+          <a:solidFill>
+            <a:srgbClr val="FFFFFF"/>
+          </a:solidFill>
+          <a:ln w="12700">
+            <a:solidFill>
+              <a:srgbClr val="2563EB"/>
+            </a:solidFill>
+          </a:ln>
+        </p:spPr>
+        <p:style>
+          <a:lnRef idx="1">
+            <a:schemeClr val="accent1"/>
+          </a:lnRef>
+          <a:fillRef idx="3">
+            <a:schemeClr val="accent1"/>
+          </a:fillRef>
+          <a:effectRef idx="2">
+            <a:schemeClr val="accent1"/>
+          </a:effectRef>
+          <a:fontRef idx="minor">
+            <a:schemeClr val="lt1"/>
+          </a:fontRef>
+        </p:style>
+        <p:txBody>
+          <a:bodyPr rtlCol="0" anchor="ctr"/>
+          <a:lstStyle/>
+          <a:p>
+            <a:pPr algn="ctr"/>
+          </a:p>
+        </p:txBody>
+      </p:sp>
+      <p:sp>
+        <p:nvSpPr>
+          <p:cNvPr id="31" name="TextBox 30"/>
+          <p:cNvSpPr txBox="1"/>
+          <p:nvPr/>
+        </p:nvSpPr>
+        <p:spPr>
+          <a:xfrm>
+            <a:off x="8988552" y="5650992"/>
+            <a:ext cx="2414016" cy="713232"/>
+          </a:xfrm>
+          <a:prstGeom prst="rect">
+            <a:avLst/>
+          </a:prstGeom>
+          <a:noFill/>
+        </p:spPr>
+        <p:txBody>
+          <a:bodyPr wrap="square" lIns="0" rIns="0" tIns="0" bIns="0">
+            <a:spAutoFit/>
+          </a:bodyPr>
+          <a:lstStyle/>
+          <a:p>
+            <a:pPr algn="ctr">
+              <a:defRPr sz="950" b="1">
+                <a:solidFill>
+                  <a:srgbClr val="2563EB"/>
+                </a:solidFill>
+                <a:latin typeface="Arial"/>
+              </a:defRPr>
+            </a:pPr>
+            <a:r>
+              <a:t>PHASE 4 (T+18M)</a:t>
+            </a:r>
+          </a:p>
+          <a:p>
+            <a:pPr algn="ctr">
+              <a:defRPr sz="850">
+                <a:solidFill>
+                  <a:srgbClr val="1E293B"/>
+                </a:solidFill>
+                <a:latin typeface="Arial"/>
+              </a:defRPr>
+            </a:pPr>
+            <a:r>
+              <a:t>Autonomous LLM Inflation Analyst drafting automated MoSPI briefs</a:t>
             </a:r>
           </a:p>
         </p:txBody>
@@ -7201,14 +7383,71 @@
       </p:sp>
       <p:sp>
         <p:nvSpPr>
-          <p:cNvPr id="3" name="TextBox 2"/>
+          <p:cNvPr id="3" name="Rounded Rectangle 2"/>
+          <p:cNvSpPr/>
+          <p:nvPr/>
+        </p:nvSpPr>
+        <p:spPr>
+          <a:xfrm>
+            <a:off x="548640" y="201168"/>
+            <a:ext cx="1645920" cy="566928"/>
+          </a:xfrm>
+          <a:prstGeom prst="roundRect">
+            <a:avLst>
+              <a:gd name="adj" fmla="val 50000"/>
+            </a:avLst>
+          </a:prstGeom>
+          <a:solidFill>
+            <a:srgbClr val="FFFFFF"/>
+          </a:solidFill>
+          <a:ln w="19050">
+            <a:solidFill>
+              <a:srgbClr val="4338CA"/>
+            </a:solidFill>
+          </a:ln>
+        </p:spPr>
+        <p:style>
+          <a:lnRef idx="1">
+            <a:schemeClr val="accent1"/>
+          </a:lnRef>
+          <a:fillRef idx="3">
+            <a:schemeClr val="accent1"/>
+          </a:fillRef>
+          <a:effectRef idx="2">
+            <a:schemeClr val="accent1"/>
+          </a:effectRef>
+          <a:fontRef idx="minor">
+            <a:schemeClr val="lt1"/>
+          </a:fontRef>
+        </p:style>
+        <p:txBody>
+          <a:bodyPr rtlCol="0" anchor="ctr" wrap="square"/>
+          <a:lstStyle/>
+          <a:p>
+            <a:pPr algn="ctr">
+              <a:defRPr sz="1200" b="1">
+                <a:solidFill>
+                  <a:srgbClr val="4338CA"/>
+                </a:solidFill>
+                <a:latin typeface="Arial"/>
+              </a:defRPr>
+            </a:pPr>
+            <a:r>
+              <a:t>Team Rookie</a:t>
+            </a:r>
+          </a:p>
+        </p:txBody>
+      </p:sp>
+      <p:sp>
+        <p:nvSpPr>
+          <p:cNvPr id="4" name="TextBox 3"/>
           <p:cNvSpPr txBox="1"/>
           <p:nvPr/>
         </p:nvSpPr>
         <p:spPr>
           <a:xfrm>
-            <a:off x="2286000" y="182880"/>
-            <a:ext cx="7589520" cy="914400"/>
+            <a:off x="2286000" y="137160"/>
+            <a:ext cx="7589520" cy="868680"/>
           </a:xfrm>
           <a:prstGeom prst="rect">
             <a:avLst/>
@@ -7222,7 +7461,7 @@
           <a:lstStyle/>
           <a:p>
             <a:pPr algn="ctr">
-              <a:defRPr sz="2800" b="1">
+              <a:defRPr sz="2600" b="1">
                 <a:solidFill>
                   <a:srgbClr val="1B365D"/>
                 </a:solidFill>
@@ -7233,11 +7472,24 @@
               <a:t>RESEARCH AND REFERENCES</a:t>
             </a:r>
           </a:p>
+          <a:p>
+            <a:pPr algn="ctr">
+              <a:defRPr sz="1200" b="1">
+                <a:solidFill>
+                  <a:srgbClr val="184C94"/>
+                </a:solidFill>
+                <a:latin typeface="Arial"/>
+              </a:defRPr>
+            </a:pPr>
+            <a:r>
+              <a:t>Academic Foundations, Official Data Sources &amp; Technical Documentation</a:t>
+            </a:r>
+          </a:p>
         </p:txBody>
       </p:sp>
       <p:pic>
         <p:nvPicPr>
-          <p:cNvPr id="4" name="Picture 3" descr="sih_2026_logo_hd.png"/>
+          <p:cNvPr id="5" name="Picture 4" descr="sih_2026_logo_hd.png"/>
           <p:cNvPicPr>
             <a:picLocks noChangeAspect="1"/>
           </p:cNvPicPr>
@@ -7251,8 +7503,8 @@
         </p:blipFill>
         <p:spPr>
           <a:xfrm>
-            <a:off x="10058400" y="146304"/>
-            <a:ext cx="1828800" cy="914400"/>
+            <a:off x="10149840" y="146304"/>
+            <a:ext cx="1645920" cy="777240"/>
           </a:xfrm>
           <a:prstGeom prst="rect">
             <a:avLst/>
@@ -7261,23 +7513,27 @@
       </p:pic>
       <p:sp>
         <p:nvSpPr>
-          <p:cNvPr id="5" name="Rectangle 4"/>
+          <p:cNvPr id="6" name="Rounded Rectangle 5"/>
           <p:cNvSpPr/>
           <p:nvPr/>
         </p:nvSpPr>
         <p:spPr>
           <a:xfrm>
-            <a:off x="320040" y="1234440"/>
-            <a:ext cx="5715000" cy="2423160"/>
-          </a:xfrm>
-          <a:prstGeom prst="rect">
-            <a:avLst/>
+            <a:off x="731520" y="1280160"/>
+            <a:ext cx="5120640" cy="2377440"/>
+          </a:xfrm>
+          <a:prstGeom prst="roundRect">
+            <a:avLst>
+              <a:gd name="adj" fmla="val 5000"/>
+            </a:avLst>
           </a:prstGeom>
           <a:solidFill>
-            <a:srgbClr val="BAE6FD"/>
+            <a:srgbClr val="E0F2FE"/>
           </a:solidFill>
-          <a:ln>
-            <a:noFill/>
+          <a:ln w="19050">
+            <a:solidFill>
+              <a:srgbClr val="0EA5E9"/>
+            </a:solidFill>
           </a:ln>
         </p:spPr>
         <p:style>
@@ -7304,14 +7560,14 @@
       </p:sp>
       <p:sp>
         <p:nvSpPr>
-          <p:cNvPr id="6" name="TextBox 5"/>
+          <p:cNvPr id="7" name="TextBox 6"/>
           <p:cNvSpPr txBox="1"/>
           <p:nvPr/>
         </p:nvSpPr>
         <p:spPr>
           <a:xfrm>
-            <a:off x="548640" y="1417320"/>
-            <a:ext cx="5257800" cy="2148840"/>
+            <a:off x="1005840" y="1463040"/>
+            <a:ext cx="4572000" cy="2011680"/>
           </a:xfrm>
           <a:prstGeom prst="rect">
             <a:avLst/>
@@ -7328,9 +7584,9 @@
               <a:spcAft>
                 <a:spcPts val="800"/>
               </a:spcAft>
-              <a:defRPr sz="2000" b="1">
-                <a:solidFill>
-                  <a:srgbClr val="000000"/>
+              <a:defRPr sz="1350" b="1">
+                <a:solidFill>
+                  <a:srgbClr val="0369A1"/>
                 </a:solidFill>
                 <a:latin typeface="Arial"/>
               </a:defRPr>
@@ -7342,32 +7598,32 @@
           <a:p>
             <a:pPr>
               <a:spcAft>
-                <a:spcPts val="600"/>
+                <a:spcPts val="500"/>
               </a:spcAft>
-              <a:defRPr sz="1100">
-                <a:solidFill>
-                  <a:srgbClr val="000000"/>
-                </a:solidFill>
-                <a:latin typeface="Arial"/>
-              </a:defRPr>
-            </a:pPr>
-            <a:r>
-              <a:t>• Cavallo, A., &amp; Rigobon, R. (2016). 'The Billion Prices Project: Using Online Data for Measurement and Research.' Journal of Economic Perspectives.</a:t>
+            </a:pPr>
+            <a:r>
+              <a:rPr sz="1050">
+                <a:solidFill>
+                  <a:srgbClr val="1E293B"/>
+                </a:solidFill>
+                <a:latin typeface="Arial"/>
+              </a:rPr>
+              <a:t>• Cavallo, A., &amp; Rigobon, R. (2016). 'The Billion Prices Project: Using Online Data for Measurement and Research.' Journal of Economic Perspectives, 30(2), 151-178.</a:t>
             </a:r>
           </a:p>
           <a:p>
             <a:pPr>
               <a:spcAft>
-                <a:spcPts val="600"/>
+                <a:spcPts val="500"/>
               </a:spcAft>
-              <a:defRPr sz="1100">
-                <a:solidFill>
-                  <a:srgbClr val="000000"/>
-                </a:solidFill>
-                <a:latin typeface="Arial"/>
-              </a:defRPr>
-            </a:pPr>
-            <a:r>
+            </a:pPr>
+            <a:r>
+              <a:rPr sz="1050">
+                <a:solidFill>
+                  <a:srgbClr val="1E293B"/>
+                </a:solidFill>
+                <a:latin typeface="Arial"/>
+              </a:rPr>
               <a:t>• UN, ILO, IMF, OECD, Eurostat, World Bank (2020). Consumer Price Index Manual: Concepts and Methods, Chapter 10 (Elementary Indices).</a:t>
             </a:r>
           </a:p>
@@ -7375,23 +7631,27 @@
       </p:sp>
       <p:sp>
         <p:nvSpPr>
-          <p:cNvPr id="7" name="Rectangle 6"/>
+          <p:cNvPr id="8" name="Rounded Rectangle 7"/>
           <p:cNvSpPr/>
           <p:nvPr/>
         </p:nvSpPr>
         <p:spPr>
           <a:xfrm>
-            <a:off x="6172200" y="1234440"/>
-            <a:ext cx="5715000" cy="2423160"/>
-          </a:xfrm>
-          <a:prstGeom prst="rect">
-            <a:avLst/>
+            <a:off x="6217920" y="1280160"/>
+            <a:ext cx="5120640" cy="2377440"/>
+          </a:xfrm>
+          <a:prstGeom prst="roundRect">
+            <a:avLst>
+              <a:gd name="adj" fmla="val 5000"/>
+            </a:avLst>
           </a:prstGeom>
           <a:solidFill>
-            <a:srgbClr val="0A1931"/>
+            <a:srgbClr val="F1F5F9"/>
           </a:solidFill>
-          <a:ln>
-            <a:noFill/>
+          <a:ln w="19050">
+            <a:solidFill>
+              <a:srgbClr val="0F172A"/>
+            </a:solidFill>
           </a:ln>
         </p:spPr>
         <p:style>
@@ -7418,14 +7678,14 @@
       </p:sp>
       <p:sp>
         <p:nvSpPr>
-          <p:cNvPr id="8" name="TextBox 7"/>
+          <p:cNvPr id="9" name="TextBox 8"/>
           <p:cNvSpPr txBox="1"/>
           <p:nvPr/>
         </p:nvSpPr>
         <p:spPr>
           <a:xfrm>
-            <a:off x="6400800" y="1417320"/>
-            <a:ext cx="5257800" cy="2148840"/>
+            <a:off x="6492240" y="1463040"/>
+            <a:ext cx="4572000" cy="2011680"/>
           </a:xfrm>
           <a:prstGeom prst="rect">
             <a:avLst/>
@@ -7442,102 +7702,106 @@
               <a:spcAft>
                 <a:spcPts val="800"/>
               </a:spcAft>
-              <a:defRPr sz="2000" b="1">
-                <a:solidFill>
-                  <a:srgbClr val="FFFFFF"/>
+              <a:defRPr sz="1350" b="1">
+                <a:solidFill>
+                  <a:srgbClr val="0F172A"/>
                 </a:solidFill>
                 <a:latin typeface="Arial"/>
               </a:defRPr>
             </a:pPr>
             <a:r>
-              <a:t>DATA SOURCES</a:t>
-            </a:r>
-          </a:p>
-          <a:p>
-            <a:pPr algn="ctr">
+              <a:t>OFFICIAL DATA SOURCES</a:t>
+            </a:r>
+          </a:p>
+          <a:p>
+            <a:pPr>
               <a:spcAft>
-                <a:spcPts val="400"/>
+                <a:spcPts val="500"/>
               </a:spcAft>
-              <a:defRPr sz="1050">
-                <a:solidFill>
-                  <a:srgbClr val="DCE6FA"/>
-                </a:solidFill>
-                <a:latin typeface="Arial"/>
-              </a:defRPr>
-            </a:pPr>
-            <a:r>
-              <a:t>https://www.dgca.gov.in/ (DGCA Monthly Scheduled Domestic Passenger Traffic)</a:t>
-            </a:r>
-          </a:p>
-          <a:p>
-            <a:pPr algn="ctr">
+            </a:pPr>
+            <a:r>
+              <a:rPr sz="1050">
+                <a:solidFill>
+                  <a:srgbClr val="1E293B"/>
+                </a:solidFill>
+                <a:latin typeface="Arial"/>
+              </a:rPr>
+              <a:t>• DGCA India: Monthly Scheduled Domestic Passenger Traffic (dgca.gov.in)</a:t>
+            </a:r>
+          </a:p>
+          <a:p>
+            <a:pPr>
               <a:spcAft>
-                <a:spcPts val="400"/>
+                <a:spcPts val="500"/>
               </a:spcAft>
-              <a:defRPr sz="1050">
-                <a:solidFill>
-                  <a:srgbClr val="DCE6FA"/>
-                </a:solidFill>
-                <a:latin typeface="Arial"/>
-              </a:defRPr>
-            </a:pPr>
-            <a:r>
-              <a:t>https://www.mospi.gov.in/ (CSO Consumer Price Index Manual &amp; Guidelines)</a:t>
-            </a:r>
-          </a:p>
-          <a:p>
-            <a:pPr algn="ctr">
+            </a:pPr>
+            <a:r>
+              <a:rPr sz="1050">
+                <a:solidFill>
+                  <a:srgbClr val="1E293B"/>
+                </a:solidFill>
+                <a:latin typeface="Arial"/>
+              </a:rPr>
+              <a:t>• MoSPI NSO: Consumer Price Index Concepts &amp; Guidelines (mospi.gov.in)</a:t>
+            </a:r>
+          </a:p>
+          <a:p>
+            <a:pPr>
               <a:spcAft>
-                <a:spcPts val="400"/>
+                <a:spcPts val="500"/>
               </a:spcAft>
-              <a:defRPr sz="1050">
-                <a:solidFill>
-                  <a:srgbClr val="DCE6FA"/>
-                </a:solidFill>
-                <a:latin typeface="Arial"/>
-              </a:defRPr>
-            </a:pPr>
-            <a:r>
-              <a:t>https://www.airindia.com/ &amp; https://www.goindigo.in/ (Direct Carrier Portals)</a:t>
-            </a:r>
-          </a:p>
-          <a:p>
-            <a:pPr algn="ctr">
+            </a:pPr>
+            <a:r>
+              <a:rPr sz="1050">
+                <a:solidFill>
+                  <a:srgbClr val="1E293B"/>
+                </a:solidFill>
+                <a:latin typeface="Arial"/>
+              </a:rPr>
+              <a:t>• Direct Airline Portals: Air India, IndiGo, Akasa, SpiceJet</a:t>
+            </a:r>
+          </a:p>
+          <a:p>
+            <a:pPr>
               <a:spcAft>
-                <a:spcPts val="400"/>
+                <a:spcPts val="500"/>
               </a:spcAft>
-              <a:defRPr sz="1050">
-                <a:solidFill>
-                  <a:srgbClr val="DCE6FA"/>
-                </a:solidFill>
-                <a:latin typeface="Arial"/>
-              </a:defRPr>
-            </a:pPr>
-            <a:r>
-              <a:t>https://www.makemytrip.com/ (Online Travel Aggregator Non-Stop Domestic Flight Rates)</a:t>
-            </a:r>
-          </a:p>
-        </p:txBody>
-      </p:sp>
-      <p:sp>
-        <p:nvSpPr>
-          <p:cNvPr id="9" name="Rectangle 8"/>
+            </a:pPr>
+            <a:r>
+              <a:rPr sz="1050">
+                <a:solidFill>
+                  <a:srgbClr val="1E293B"/>
+                </a:solidFill>
+                <a:latin typeface="Arial"/>
+              </a:rPr>
+              <a:t>• Online Travel Aggregators: MakeMyTrip, EaseMyTrip Non-Stop Rates</a:t>
+            </a:r>
+          </a:p>
+        </p:txBody>
+      </p:sp>
+      <p:sp>
+        <p:nvSpPr>
+          <p:cNvPr id="10" name="Rounded Rectangle 9"/>
           <p:cNvSpPr/>
           <p:nvPr/>
         </p:nvSpPr>
         <p:spPr>
           <a:xfrm>
-            <a:off x="320040" y="3886200"/>
-            <a:ext cx="5715000" cy="2423160"/>
-          </a:xfrm>
-          <a:prstGeom prst="rect">
-            <a:avLst/>
+            <a:off x="731520" y="3931920"/>
+            <a:ext cx="5120640" cy="2468880"/>
+          </a:xfrm>
+          <a:prstGeom prst="roundRect">
+            <a:avLst>
+              <a:gd name="adj" fmla="val 5000"/>
+            </a:avLst>
           </a:prstGeom>
           <a:solidFill>
-            <a:srgbClr val="0F172A"/>
+            <a:srgbClr val="F1F5F9"/>
           </a:solidFill>
-          <a:ln>
-            <a:noFill/>
+          <a:ln w="19050">
+            <a:solidFill>
+              <a:srgbClr val="0F172A"/>
+            </a:solidFill>
           </a:ln>
         </p:spPr>
         <p:style>
@@ -7564,14 +7828,14 @@
       </p:sp>
       <p:sp>
         <p:nvSpPr>
-          <p:cNvPr id="10" name="TextBox 9"/>
+          <p:cNvPr id="11" name="TextBox 10"/>
           <p:cNvSpPr txBox="1"/>
           <p:nvPr/>
         </p:nvSpPr>
         <p:spPr>
           <a:xfrm>
-            <a:off x="548640" y="4069080"/>
-            <a:ext cx="5257800" cy="2148840"/>
+            <a:off x="1005840" y="4114800"/>
+            <a:ext cx="4572000" cy="2103120"/>
           </a:xfrm>
           <a:prstGeom prst="rect">
             <a:avLst/>
@@ -7588,9 +7852,9 @@
               <a:spcAft>
                 <a:spcPts val="800"/>
               </a:spcAft>
-              <a:defRPr sz="2000" b="1">
-                <a:solidFill>
-                  <a:srgbClr val="C7D2FE"/>
+              <a:defRPr sz="1350" b="1">
+                <a:solidFill>
+                  <a:srgbClr val="0F172A"/>
                 </a:solidFill>
                 <a:latin typeface="Arial"/>
               </a:defRPr>
@@ -7602,88 +7866,92 @@
           <a:p>
             <a:pPr>
               <a:spcAft>
-                <a:spcPts val="400"/>
+                <a:spcPts val="500"/>
               </a:spcAft>
-              <a:defRPr sz="1050">
-                <a:solidFill>
-                  <a:srgbClr val="FFFFFF"/>
-                </a:solidFill>
-                <a:latin typeface="Arial"/>
-              </a:defRPr>
-            </a:pPr>
-            <a:r>
-              <a:t>• Indian domestic air passenger traffic is projected to grow at &gt;15% CAGR (2024–2030).</a:t>
+            </a:pPr>
+            <a:r>
+              <a:rPr sz="1050">
+                <a:solidFill>
+                  <a:srgbClr val="1E293B"/>
+                </a:solidFill>
+                <a:latin typeface="Arial"/>
+              </a:rPr>
+              <a:t>• Indian domestic passenger traffic projected to grow at &gt;15% CAGR (2024–2030).</a:t>
             </a:r>
           </a:p>
           <a:p>
             <a:pPr>
               <a:spcAft>
-                <a:spcPts val="400"/>
+                <a:spcPts val="500"/>
               </a:spcAft>
-              <a:defRPr sz="1050">
-                <a:solidFill>
-                  <a:srgbClr val="FFFFFF"/>
-                </a:solidFill>
-                <a:latin typeface="Arial"/>
-              </a:defRPr>
-            </a:pPr>
-            <a:r>
-              <a:t>• Algorithmic dynamic pricing creates massive intraday and lead-time fare dispersion.</a:t>
+            </a:pPr>
+            <a:r>
+              <a:rPr sz="1050">
+                <a:solidFill>
+                  <a:srgbClr val="1E293B"/>
+                </a:solidFill>
+                <a:latin typeface="Arial"/>
+              </a:rPr>
+              <a:t>• Algorithmic dynamic pricing creates massive 200–400% intraday fare dispersion.</a:t>
             </a:r>
           </a:p>
           <a:p>
             <a:pPr>
               <a:spcAft>
-                <a:spcPts val="400"/>
+                <a:spcPts val="500"/>
               </a:spcAft>
-              <a:defRPr sz="1050">
-                <a:solidFill>
-                  <a:srgbClr val="FFFFFF"/>
-                </a:solidFill>
-                <a:latin typeface="Arial"/>
-              </a:defRPr>
-            </a:pPr>
-            <a:r>
-              <a:t>• Zero automated tools currently exist in India for daily algorithmic CPI airfare tracking.</a:t>
+            </a:pPr>
+            <a:r>
+              <a:rPr sz="1050">
+                <a:solidFill>
+                  <a:srgbClr val="1E293B"/>
+                </a:solidFill>
+                <a:latin typeface="Arial"/>
+              </a:rPr>
+              <a:t>• Zero automated tools previously existed in India for daily airfare CPI tracking.</a:t>
             </a:r>
           </a:p>
           <a:p>
             <a:pPr>
               <a:spcAft>
-                <a:spcPts val="400"/>
+                <a:spcPts val="500"/>
               </a:spcAft>
-              <a:defRPr sz="1050">
-                <a:solidFill>
-                  <a:srgbClr val="FFFFFF"/>
-                </a:solidFill>
-                <a:latin typeface="Arial"/>
-              </a:defRPr>
-            </a:pPr>
-            <a:r>
-              <a:t>• AirIntel India fills the critical 15-day MoSPI manual survey lag with zero latency.</a:t>
-            </a:r>
-          </a:p>
-        </p:txBody>
-      </p:sp>
-      <p:sp>
-        <p:nvSpPr>
-          <p:cNvPr id="11" name="Rectangle 10"/>
+            </a:pPr>
+            <a:r>
+              <a:rPr sz="1050">
+                <a:solidFill>
+                  <a:srgbClr val="1E293B"/>
+                </a:solidFill>
+                <a:latin typeface="Arial"/>
+              </a:rPr>
+              <a:t>• VayuSuchak eliminates the critical 15-day MoSPI manual survey lag with zero latency.</a:t>
+            </a:r>
+          </a:p>
+        </p:txBody>
+      </p:sp>
+      <p:sp>
+        <p:nvSpPr>
+          <p:cNvPr id="12" name="Rounded Rectangle 11"/>
           <p:cNvSpPr/>
           <p:nvPr/>
         </p:nvSpPr>
         <p:spPr>
           <a:xfrm>
-            <a:off x="6172200" y="3886200"/>
-            <a:ext cx="5715000" cy="2423160"/>
-          </a:xfrm>
-          <a:prstGeom prst="rect">
-            <a:avLst/>
+            <a:off x="6217920" y="3931920"/>
+            <a:ext cx="5120640" cy="2468880"/>
+          </a:xfrm>
+          <a:prstGeom prst="roundRect">
+            <a:avLst>
+              <a:gd name="adj" fmla="val 5000"/>
+            </a:avLst>
           </a:prstGeom>
           <a:solidFill>
-            <a:srgbClr val="7DD3FC"/>
+            <a:srgbClr val="E0F2FE"/>
           </a:solidFill>
-          <a:ln>
-            <a:noFill/>
+          <a:ln w="19050">
+            <a:solidFill>
+              <a:srgbClr val="0EA5E9"/>
+            </a:solidFill>
           </a:ln>
         </p:spPr>
         <p:style>
@@ -7710,14 +7978,14 @@
       </p:sp>
       <p:sp>
         <p:nvSpPr>
-          <p:cNvPr id="12" name="TextBox 11"/>
+          <p:cNvPr id="13" name="TextBox 12"/>
           <p:cNvSpPr txBox="1"/>
           <p:nvPr/>
         </p:nvSpPr>
         <p:spPr>
           <a:xfrm>
-            <a:off x="6400800" y="4069080"/>
-            <a:ext cx="5257800" cy="2148840"/>
+            <a:off x="6492240" y="4114800"/>
+            <a:ext cx="4572000" cy="2103120"/>
           </a:xfrm>
           <a:prstGeom prst="rect">
             <a:avLst/>
@@ -7734,9 +8002,9 @@
               <a:spcAft>
                 <a:spcPts val="800"/>
               </a:spcAft>
-              <a:defRPr sz="2000" b="1">
-                <a:solidFill>
-                  <a:srgbClr val="000000"/>
+              <a:defRPr sz="1350" b="1">
+                <a:solidFill>
+                  <a:srgbClr val="0369A1"/>
                 </a:solidFill>
                 <a:latin typeface="Arial"/>
               </a:defRPr>
@@ -7748,152 +8016,65 @@
           <a:p>
             <a:pPr>
               <a:spcAft>
-                <a:spcPts val="400"/>
+                <a:spcPts val="500"/>
               </a:spcAft>
-              <a:defRPr sz="1050" b="1">
-                <a:solidFill>
-                  <a:srgbClr val="000000"/>
-                </a:solidFill>
-                <a:latin typeface="Arial"/>
-              </a:defRPr>
-            </a:pPr>
-            <a:r>
+            </a:pPr>
+            <a:r>
+              <a:rPr sz="1050">
+                <a:solidFill>
+                  <a:srgbClr val="1E293B"/>
+                </a:solidFill>
+                <a:latin typeface="Arial"/>
+              </a:rPr>
               <a:t>• Index Formulations: UN/ILO Jevons Geometric Mean vs Dutot Arithmetic Comparison.</a:t>
             </a:r>
           </a:p>
           <a:p>
             <a:pPr>
               <a:spcAft>
-                <a:spcPts val="400"/>
+                <a:spcPts val="500"/>
               </a:spcAft>
-              <a:defRPr sz="1050" b="1">
-                <a:solidFill>
-                  <a:srgbClr val="000000"/>
-                </a:solidFill>
-                <a:latin typeface="Arial"/>
-              </a:defRPr>
-            </a:pPr>
-            <a:r>
+            </a:pPr>
+            <a:r>
+              <a:rPr sz="1050">
+                <a:solidFill>
+                  <a:srgbClr val="1E293B"/>
+                </a:solidFill>
+                <a:latin typeface="Arial"/>
+              </a:rPr>
               <a:t>• Scraper Framework: Playwright Chromium Headless with Random UA &amp; Stealth Evasion.</a:t>
             </a:r>
           </a:p>
           <a:p>
             <a:pPr>
               <a:spcAft>
-                <a:spcPts val="400"/>
+                <a:spcPts val="500"/>
               </a:spcAft>
-              <a:defRPr sz="1050" b="1">
-                <a:solidFill>
-                  <a:srgbClr val="000000"/>
-                </a:solidFill>
-                <a:latin typeface="Arial"/>
-              </a:defRPr>
-            </a:pPr>
-            <a:r>
+            </a:pPr>
+            <a:r>
+              <a:rPr sz="1050">
+                <a:solidFill>
+                  <a:srgbClr val="1E293B"/>
+                </a:solidFill>
+                <a:latin typeface="Arial"/>
+              </a:rPr>
               <a:t>• Provenance Architecture: SHA-256 Hash Manifest conforming to NDSAP open standards.</a:t>
             </a:r>
           </a:p>
           <a:p>
             <a:pPr>
               <a:spcAft>
-                <a:spcPts val="400"/>
+                <a:spcPts val="500"/>
               </a:spcAft>
-              <a:defRPr sz="1050" b="1">
-                <a:solidFill>
-                  <a:srgbClr val="000000"/>
-                </a:solidFill>
-                <a:latin typeface="Arial"/>
-              </a:defRPr>
-            </a:pPr>
-            <a:r>
+            </a:pPr>
+            <a:r>
+              <a:rPr sz="1050">
+                <a:solidFill>
+                  <a:srgbClr val="1E293B"/>
+                </a:solidFill>
+                <a:latin typeface="Arial"/>
+              </a:rPr>
               <a:t>• Deployment: Dockerized serverless cron (02:00 AM) + Vercel Edge Web Portal.</a:t>
-            </a:r>
-          </a:p>
-        </p:txBody>
-      </p:sp>
-      <p:sp>
-        <p:nvSpPr>
-          <p:cNvPr id="13" name="Rectangle 12"/>
-          <p:cNvSpPr/>
-          <p:nvPr/>
-        </p:nvSpPr>
-        <p:spPr>
-          <a:xfrm>
-            <a:off x="457200" y="6473952"/>
-            <a:ext cx="11277295" cy="13716"/>
-          </a:xfrm>
-          <a:prstGeom prst="rect">
-            <a:avLst/>
-          </a:prstGeom>
-          <a:solidFill>
-            <a:srgbClr val="E2E8F0"/>
-          </a:solidFill>
-          <a:ln>
-            <a:noFill/>
-          </a:ln>
-        </p:spPr>
-        <p:style>
-          <a:lnRef idx="1">
-            <a:schemeClr val="accent1"/>
-          </a:lnRef>
-          <a:fillRef idx="3">
-            <a:schemeClr val="accent1"/>
-          </a:fillRef>
-          <a:effectRef idx="2">
-            <a:schemeClr val="accent1"/>
-          </a:effectRef>
-          <a:fontRef idx="minor">
-            <a:schemeClr val="lt1"/>
-          </a:fontRef>
-        </p:style>
-        <p:txBody>
-          <a:bodyPr rtlCol="0" anchor="ctr"/>
-          <a:lstStyle/>
-          <a:p>
-            <a:pPr algn="ctr"/>
-          </a:p>
-        </p:txBody>
-      </p:sp>
-      <p:sp>
-        <p:nvSpPr>
-          <p:cNvPr id="14" name="TextBox 13"/>
-          <p:cNvSpPr txBox="1"/>
-          <p:nvPr/>
-        </p:nvSpPr>
-        <p:spPr>
-          <a:xfrm>
-            <a:off x="457200" y="6510528"/>
-            <a:ext cx="11277295" cy="292608"/>
-          </a:xfrm>
-          <a:prstGeom prst="rect">
-            <a:avLst/>
-          </a:prstGeom>
-          <a:noFill/>
-        </p:spPr>
-        <p:txBody>
-          <a:bodyPr wrap="square" lIns="0" rIns="0" tIns="0" bIns="0">
-            <a:spAutoFit/>
-          </a:bodyPr>
-          <a:lstStyle/>
-          <a:p>
-            <a:pPr algn="ctr"/>
-            <a:r>
-              <a:rPr sz="1000" b="1">
-                <a:solidFill>
-                  <a:srgbClr val="475569"/>
-                </a:solidFill>
-                <a:latin typeface="Arial"/>
-              </a:rPr>
-              <a:t>Team Rookie  |  </a:t>
-            </a:r>
-            <a:r>
-              <a:rPr sz="1000" b="1">
-                <a:solidFill>
-                  <a:srgbClr val="1E293B"/>
-                </a:solidFill>
-                <a:latin typeface="Arial"/>
-              </a:rPr>
-              <a:t>[ Nikhil Kanse , Shivish Kumar , Tejas Patil , Pranav Pawale , Harsh Narkar , Blessy ]</a:t>
             </a:r>
           </a:p>
         </p:txBody>

--- a/AirIntel_India_SIH26056_Presentation.pptx
+++ b/AirIntel_India_SIH26056_Presentation.pptx
@@ -3144,8 +3144,8 @@
         </p:nvSpPr>
         <p:spPr>
           <a:xfrm>
-            <a:off x="822960" y="502920"/>
-            <a:ext cx="10515600" cy="914400"/>
+            <a:off x="2286000" y="109728"/>
+            <a:ext cx="7589520" cy="868680"/>
           </a:xfrm>
           <a:prstGeom prst="rect">
             <a:avLst/>
@@ -3153,13 +3153,13 @@
           <a:noFill/>
         </p:spPr>
         <p:txBody>
-          <a:bodyPr wrap="square">
+          <a:bodyPr wrap="square" lIns="0" rIns="0" tIns="0" bIns="0">
             <a:spAutoFit/>
           </a:bodyPr>
           <a:lstStyle/>
           <a:p>
             <a:pPr algn="ctr">
-              <a:defRPr sz="3600" b="1">
+              <a:defRPr sz="3400" b="1">
                 <a:solidFill>
                   <a:srgbClr val="1B365D"/>
                 </a:solidFill>
@@ -3170,47 +3170,24 @@
               <a:t>SMART INDIA HACKATHON 2026</a:t>
             </a:r>
           </a:p>
-        </p:txBody>
-      </p:sp>
-      <p:sp>
-        <p:nvSpPr>
-          <p:cNvPr id="4" name="TextBox 3"/>
-          <p:cNvSpPr txBox="1"/>
-          <p:nvPr/>
-        </p:nvSpPr>
-        <p:spPr>
-          <a:xfrm>
-            <a:off x="2286000" y="1280160"/>
-            <a:ext cx="7589520" cy="411480"/>
-          </a:xfrm>
-          <a:prstGeom prst="rect">
-            <a:avLst/>
-          </a:prstGeom>
-          <a:noFill/>
-        </p:spPr>
-        <p:txBody>
-          <a:bodyPr wrap="none">
-            <a:spAutoFit/>
-          </a:bodyPr>
-          <a:lstStyle/>
           <a:p>
             <a:pPr algn="ctr">
-              <a:defRPr sz="1300" b="1">
-                <a:solidFill>
-                  <a:srgbClr val="184C94"/>
-                </a:solidFill>
-                <a:latin typeface="Arial"/>
+              <a:defRPr sz="2500" b="1">
+                <a:solidFill>
+                  <a:srgbClr val="1B365D"/>
+                </a:solidFill>
+                <a:latin typeface="Times New Roman"/>
               </a:defRPr>
             </a:pPr>
             <a:r>
-              <a:t>Sovereign Digital Public Infrastructure for MoSPI NSO &amp; RBI Inflation Targeting</a:t>
+              <a:t>TITLE PAGE</a:t>
             </a:r>
           </a:p>
         </p:txBody>
       </p:sp>
       <p:pic>
         <p:nvPicPr>
-          <p:cNvPr id="5" name="Picture 4" descr="sih_2026_logo_hd.png"/>
+          <p:cNvPr id="4" name="Picture 3" descr="page_1_img_2.png"/>
           <p:cNvPicPr>
             <a:picLocks noChangeAspect="1"/>
           </p:cNvPicPr>
@@ -3224,8 +3201,8 @@
         </p:blipFill>
         <p:spPr>
           <a:xfrm>
-            <a:off x="10149840" y="182880"/>
-            <a:ext cx="1645920" cy="822960"/>
+            <a:off x="10149840" y="109728"/>
+            <a:ext cx="1645920" cy="777240"/>
           </a:xfrm>
           <a:prstGeom prst="rect">
             <a:avLst/>
@@ -3234,7 +3211,7 @@
       </p:pic>
       <p:pic>
         <p:nvPicPr>
-          <p:cNvPr id="6" name="Picture 5" descr="sih_cover_badge_hd.png"/>
+          <p:cNvPr id="5" name="Picture 4" descr="page_1_img_1.png"/>
           <p:cNvPicPr>
             <a:picLocks noChangeAspect="1"/>
           </p:cNvPicPr>
@@ -3248,8 +3225,8 @@
         </p:blipFill>
         <p:spPr>
           <a:xfrm>
-            <a:off x="7589520" y="1828800"/>
-            <a:ext cx="3931920" cy="4389120"/>
+            <a:off x="6949440" y="1188720"/>
+            <a:ext cx="4389120" cy="5303520"/>
           </a:xfrm>
           <a:prstGeom prst="rect">
             <a:avLst/>
@@ -3258,61 +3235,14 @@
       </p:pic>
       <p:sp>
         <p:nvSpPr>
-          <p:cNvPr id="7" name="Rounded Rectangle 6"/>
-          <p:cNvSpPr/>
-          <p:nvPr/>
-        </p:nvSpPr>
-        <p:spPr>
-          <a:xfrm>
-            <a:off x="822960" y="1874519"/>
-            <a:ext cx="6583680" cy="4297680"/>
-          </a:xfrm>
-          <a:prstGeom prst="roundRect">
-            <a:avLst>
-              <a:gd name="adj" fmla="val 4000"/>
-            </a:avLst>
-          </a:prstGeom>
-          <a:solidFill>
-            <a:srgbClr val="F8FAFC"/>
-          </a:solidFill>
-          <a:ln w="19050">
-            <a:solidFill>
-              <a:srgbClr val="CBD5E1"/>
-            </a:solidFill>
-          </a:ln>
-        </p:spPr>
-        <p:style>
-          <a:lnRef idx="1">
-            <a:schemeClr val="accent1"/>
-          </a:lnRef>
-          <a:fillRef idx="3">
-            <a:schemeClr val="accent1"/>
-          </a:fillRef>
-          <a:effectRef idx="2">
-            <a:schemeClr val="accent1"/>
-          </a:effectRef>
-          <a:fontRef idx="minor">
-            <a:schemeClr val="lt1"/>
-          </a:fontRef>
-        </p:style>
-        <p:txBody>
-          <a:bodyPr rtlCol="0" anchor="ctr"/>
-          <a:lstStyle/>
-          <a:p>
-            <a:pPr algn="ctr"/>
-          </a:p>
-        </p:txBody>
-      </p:sp>
-      <p:sp>
-        <p:nvSpPr>
-          <p:cNvPr id="8" name="TextBox 7"/>
+          <p:cNvPr id="6" name="TextBox 5"/>
           <p:cNvSpPr txBox="1"/>
           <p:nvPr/>
         </p:nvSpPr>
         <p:spPr>
           <a:xfrm>
-            <a:off x="1097280" y="2057400"/>
-            <a:ext cx="6035040" cy="3931920"/>
+            <a:off x="594360" y="1280160"/>
+            <a:ext cx="6858000" cy="5212080"/>
           </a:xfrm>
           <a:prstGeom prst="rect">
             <a:avLst/>
@@ -3326,23 +3256,26 @@
           <a:lstStyle/>
           <a:p>
             <a:pPr>
+              <a:spcBef>
+                <a:spcPts val="800"/>
+              </a:spcBef>
               <a:spcAft>
-                <a:spcPts val="1400"/>
+                <a:spcPts val="800"/>
               </a:spcAft>
             </a:pPr>
             <a:r>
-              <a:rPr sz="1600" b="1">
-                <a:solidFill>
-                  <a:srgbClr val="0F172A"/>
+              <a:rPr sz="1550" b="1">
+                <a:solidFill>
+                  <a:srgbClr val="000000"/>
                 </a:solidFill>
                 <a:latin typeface="Arial"/>
               </a:rPr>
               <a:t>• Problem Statement ID – </a:t>
             </a:r>
             <a:r>
-              <a:rPr sz="1600" b="1">
-                <a:solidFill>
-                  <a:srgbClr val="184C94"/>
+              <a:rPr sz="1550" b="1">
+                <a:solidFill>
+                  <a:srgbClr val="000000"/>
                 </a:solidFill>
                 <a:latin typeface="Arial"/>
               </a:rPr>
@@ -3351,127 +3284,170 @@
           </a:p>
           <a:p>
             <a:pPr>
+              <a:spcBef>
+                <a:spcPts val="800"/>
+              </a:spcBef>
               <a:spcAft>
-                <a:spcPts val="1400"/>
+                <a:spcPts val="800"/>
               </a:spcAft>
             </a:pPr>
             <a:r>
-              <a:rPr sz="1600" b="1">
-                <a:solidFill>
-                  <a:srgbClr val="0F172A"/>
-                </a:solidFill>
-                <a:latin typeface="Arial"/>
-              </a:rPr>
-              <a:t>• Problem Statement Title – </a:t>
-            </a:r>
-            <a:r>
-              <a:rPr sz="1600" b="1">
-                <a:solidFill>
-                  <a:srgbClr val="184C94"/>
-                </a:solidFill>
-                <a:latin typeface="Arial"/>
-              </a:rPr>
-              <a:t>Real-time Airfare Price Index for CPI Augmentation</a:t>
+              <a:rPr sz="1550" b="1">
+                <a:solidFill>
+                  <a:srgbClr val="000000"/>
+                </a:solidFill>
+                <a:latin typeface="Arial"/>
+              </a:rPr>
+              <a:t>• Problem Statement Title- </a:t>
+            </a:r>
+            <a:r>
+              <a:rPr sz="1550" b="1">
+                <a:solidFill>
+                  <a:srgbClr val="DC2626"/>
+                </a:solidFill>
+                <a:latin typeface="Arial"/>
+              </a:rPr>
+              <a:t>Development of a Real-time Airfare Price Index for India through Automated Web Scraping</a:t>
             </a:r>
           </a:p>
           <a:p>
             <a:pPr>
+              <a:spcBef>
+                <a:spcPts val="800"/>
+              </a:spcBef>
               <a:spcAft>
-                <a:spcPts val="1400"/>
+                <a:spcPts val="800"/>
               </a:spcAft>
             </a:pPr>
             <a:r>
-              <a:rPr sz="1600" b="1">
-                <a:solidFill>
-                  <a:srgbClr val="0F172A"/>
+              <a:rPr sz="1550" b="1">
+                <a:solidFill>
+                  <a:srgbClr val="000000"/>
+                </a:solidFill>
+                <a:latin typeface="Arial"/>
+              </a:rPr>
+              <a:t>• Department – </a:t>
+            </a:r>
+            <a:r>
+              <a:rPr sz="1550" b="1">
+                <a:solidFill>
+                  <a:srgbClr val="000000"/>
+                </a:solidFill>
+                <a:latin typeface="Arial"/>
+              </a:rPr>
+              <a:t>Data Informatics &amp; Innovation Division (DIID)</a:t>
+            </a:r>
+          </a:p>
+          <a:p>
+            <a:pPr>
+              <a:spcBef>
+                <a:spcPts val="800"/>
+              </a:spcBef>
+              <a:spcAft>
+                <a:spcPts val="800"/>
+              </a:spcAft>
+            </a:pPr>
+            <a:r>
+              <a:rPr sz="1550" b="1">
+                <a:solidFill>
+                  <a:srgbClr val="000000"/>
+                </a:solidFill>
+                <a:latin typeface="Arial"/>
+              </a:rPr>
+              <a:t>• Category – </a:t>
+            </a:r>
+            <a:r>
+              <a:rPr sz="1550" b="1">
+                <a:solidFill>
+                  <a:srgbClr val="000000"/>
+                </a:solidFill>
+                <a:latin typeface="Arial"/>
+              </a:rPr>
+              <a:t>Software</a:t>
+            </a:r>
+          </a:p>
+          <a:p>
+            <a:pPr>
+              <a:spcBef>
+                <a:spcPts val="800"/>
+              </a:spcBef>
+              <a:spcAft>
+                <a:spcPts val="800"/>
+              </a:spcAft>
+            </a:pPr>
+            <a:r>
+              <a:rPr sz="1550" b="1">
+                <a:solidFill>
+                  <a:srgbClr val="000000"/>
                 </a:solidFill>
                 <a:latin typeface="Arial"/>
               </a:rPr>
               <a:t>• Theme – </a:t>
             </a:r>
             <a:r>
-              <a:rPr sz="1600" b="1">
-                <a:solidFill>
-                  <a:srgbClr val="184C94"/>
-                </a:solidFill>
-                <a:latin typeface="Arial"/>
-              </a:rPr>
-              <a:t>Smart Governance / Miscellaneous</a:t>
+              <a:rPr sz="1550" b="1">
+                <a:solidFill>
+                  <a:srgbClr val="000000"/>
+                </a:solidFill>
+                <a:latin typeface="Arial"/>
+              </a:rPr>
+              <a:t>Smart Automation</a:t>
             </a:r>
           </a:p>
           <a:p>
             <a:pPr>
+              <a:spcBef>
+                <a:spcPts val="800"/>
+              </a:spcBef>
               <a:spcAft>
-                <a:spcPts val="1400"/>
+                <a:spcPts val="800"/>
               </a:spcAft>
             </a:pPr>
             <a:r>
-              <a:rPr sz="1600" b="1">
-                <a:solidFill>
-                  <a:srgbClr val="0F172A"/>
-                </a:solidFill>
-                <a:latin typeface="Arial"/>
-              </a:rPr>
-              <a:t>• PS Category – </a:t>
-            </a:r>
-            <a:r>
-              <a:rPr sz="1600" b="1">
-                <a:solidFill>
-                  <a:srgbClr val="184C94"/>
-                </a:solidFill>
-                <a:latin typeface="Arial"/>
-              </a:rPr>
-              <a:t>Software</a:t>
+              <a:rPr sz="1550" b="1">
+                <a:solidFill>
+                  <a:srgbClr val="000000"/>
+                </a:solidFill>
+                <a:latin typeface="Arial"/>
+              </a:rPr>
+              <a:t>• Team ID – </a:t>
+            </a:r>
+            <a:r>
+              <a:rPr sz="1550" b="1">
+                <a:solidFill>
+                  <a:srgbClr val="000000"/>
+                </a:solidFill>
+                <a:latin typeface="Arial"/>
+              </a:rPr>
+              <a:t>168405</a:t>
             </a:r>
           </a:p>
           <a:p>
             <a:pPr>
+              <a:spcBef>
+                <a:spcPts val="800"/>
+              </a:spcBef>
               <a:spcAft>
-                <a:spcPts val="1400"/>
+                <a:spcPts val="800"/>
               </a:spcAft>
             </a:pPr>
             <a:r>
-              <a:rPr sz="1600" b="1">
-                <a:solidFill>
-                  <a:srgbClr val="0F172A"/>
-                </a:solidFill>
-                <a:latin typeface="Arial"/>
-              </a:rPr>
-              <a:t>• Team ID – </a:t>
-            </a:r>
-            <a:r>
-              <a:rPr sz="1600" b="1">
-                <a:solidFill>
-                  <a:srgbClr val="184C94"/>
-                </a:solidFill>
-                <a:latin typeface="Arial"/>
-              </a:rPr>
-              <a:t>Team Rookie</a:t>
-            </a:r>
-          </a:p>
-          <a:p>
-            <a:pPr>
-              <a:spcAft>
-                <a:spcPts val="1400"/>
-              </a:spcAft>
-            </a:pPr>
-            <a:r>
-              <a:rPr sz="1600" b="1">
-                <a:solidFill>
-                  <a:srgbClr val="0F172A"/>
+              <a:rPr sz="1550" b="1">
+                <a:solidFill>
+                  <a:srgbClr val="000000"/>
                 </a:solidFill>
                 <a:latin typeface="Arial"/>
               </a:rPr>
               <a:t>• Team Name – </a:t>
             </a:r>
             <a:r>
-              <a:rPr sz="1600" b="1">
-                <a:solidFill>
-                  <a:srgbClr val="184C94"/>
-                </a:solidFill>
-                <a:latin typeface="Arial"/>
-              </a:rPr>
-              <a:t>Team Rookie</a:t>
+              <a:rPr sz="1550" b="1">
+                <a:solidFill>
+                  <a:srgbClr val="000000"/>
+                </a:solidFill>
+                <a:latin typeface="Arial"/>
+              </a:rPr>
+              <a:t>Roorkies</a:t>
             </a:r>
           </a:p>
         </p:txBody>
@@ -3545,8 +3521,8 @@
         </p:nvSpPr>
         <p:spPr>
           <a:xfrm>
-            <a:off x="548640" y="201168"/>
-            <a:ext cx="1645920" cy="566928"/>
+            <a:off x="502920" y="201168"/>
+            <a:ext cx="1645920" cy="502920"/>
           </a:xfrm>
           <a:prstGeom prst="roundRect">
             <a:avLst>
@@ -3558,7 +3534,7 @@
           </a:solidFill>
           <a:ln w="19050">
             <a:solidFill>
-              <a:srgbClr val="4338CA"/>
+              <a:srgbClr val="64748B"/>
             </a:solidFill>
           </a:ln>
         </p:spPr>
@@ -3581,15 +3557,15 @@
           <a:lstStyle/>
           <a:p>
             <a:pPr algn="ctr">
-              <a:defRPr sz="1200" b="1">
-                <a:solidFill>
-                  <a:srgbClr val="4338CA"/>
+              <a:defRPr sz="1300" b="1">
+                <a:solidFill>
+                  <a:srgbClr val="000000"/>
                 </a:solidFill>
                 <a:latin typeface="Arial"/>
               </a:defRPr>
             </a:pPr>
             <a:r>
-              <a:t>Team Rookie</a:t>
+              <a:t>Roorkies</a:t>
             </a:r>
           </a:p>
         </p:txBody>
@@ -3602,7 +3578,7 @@
         </p:nvSpPr>
         <p:spPr>
           <a:xfrm>
-            <a:off x="2286000" y="137160"/>
+            <a:off x="2286000" y="109728"/>
             <a:ext cx="7589520" cy="868680"/>
           </a:xfrm>
           <a:prstGeom prst="rect">
@@ -3617,35 +3593,35 @@
           <a:lstStyle/>
           <a:p>
             <a:pPr algn="ctr">
-              <a:defRPr sz="2600" b="1">
-                <a:solidFill>
-                  <a:srgbClr val="1B365D"/>
-                </a:solidFill>
-                <a:latin typeface="Times New Roman"/>
+              <a:defRPr sz="2100" b="1">
+                <a:solidFill>
+                  <a:srgbClr val="000000"/>
+                </a:solidFill>
+                <a:latin typeface="Arial"/>
               </a:defRPr>
             </a:pPr>
             <a:r>
-              <a:t>VAYUSUCHAK (वायु सूचक)</a:t>
+              <a:t>VayuSuchak: Real-Time Airfare Price Index</a:t>
             </a:r>
           </a:p>
           <a:p>
             <a:pPr algn="ctr">
-              <a:defRPr sz="1200" b="1">
-                <a:solidFill>
-                  <a:srgbClr val="184C94"/>
+              <a:defRPr sz="1500" b="1">
+                <a:solidFill>
+                  <a:srgbClr val="000000"/>
                 </a:solidFill>
                 <a:latin typeface="Arial"/>
               </a:defRPr>
             </a:pPr>
             <a:r>
-              <a:t>Real-Time Airfare Price Index (APIx) for Augmenting CPI</a:t>
+              <a:t>Augmenting CPI Transport Inflation</a:t>
             </a:r>
           </a:p>
         </p:txBody>
       </p:sp>
       <p:pic>
         <p:nvPicPr>
-          <p:cNvPr id="5" name="Picture 4" descr="sih_2026_logo_hd.png"/>
+          <p:cNvPr id="5" name="Picture 4" descr="page_1_img_2.png"/>
           <p:cNvPicPr>
             <a:picLocks noChangeAspect="1"/>
           </p:cNvPicPr>
@@ -3659,7 +3635,7 @@
         </p:blipFill>
         <p:spPr>
           <a:xfrm>
-            <a:off x="10149840" y="146304"/>
+            <a:off x="10149840" y="109728"/>
             <a:ext cx="1645920" cy="777240"/>
           </a:xfrm>
           <a:prstGeom prst="rect">
@@ -3667,9 +3643,519 @@
           </a:prstGeom>
         </p:spPr>
       </p:pic>
+      <p:sp>
+        <p:nvSpPr>
+          <p:cNvPr id="6" name="TextBox 5"/>
+          <p:cNvSpPr txBox="1"/>
+          <p:nvPr/>
+        </p:nvSpPr>
+        <p:spPr>
+          <a:xfrm>
+            <a:off x="502920" y="1005840"/>
+            <a:ext cx="11155680" cy="365760"/>
+          </a:xfrm>
+          <a:prstGeom prst="rect">
+            <a:avLst/>
+          </a:prstGeom>
+          <a:noFill/>
+        </p:spPr>
+        <p:txBody>
+          <a:bodyPr wrap="none" lIns="0" tIns="0" rIns="0" bIns="0">
+            <a:spAutoFit/>
+          </a:bodyPr>
+          <a:lstStyle/>
+          <a:p>
+            <a:pPr>
+              <a:defRPr sz="1550" b="1">
+                <a:solidFill>
+                  <a:srgbClr val="1E40AF"/>
+                </a:solidFill>
+                <a:latin typeface="Arial"/>
+              </a:defRPr>
+            </a:pPr>
+            <a:r>
+              <a:t>❖ Proposed Solution: Problem vs. Solution Architecture</a:t>
+            </a:r>
+          </a:p>
+        </p:txBody>
+      </p:sp>
+      <p:sp>
+        <p:nvSpPr>
+          <p:cNvPr id="7" name="Rounded Rectangle 6"/>
+          <p:cNvSpPr/>
+          <p:nvPr/>
+        </p:nvSpPr>
+        <p:spPr>
+          <a:xfrm>
+            <a:off x="502920" y="1298448"/>
+            <a:ext cx="5440680" cy="2697480"/>
+          </a:xfrm>
+          <a:prstGeom prst="roundRect">
+            <a:avLst>
+              <a:gd name="adj" fmla="val 4000"/>
+            </a:avLst>
+          </a:prstGeom>
+          <a:solidFill>
+            <a:srgbClr val="F8FAFC"/>
+          </a:solidFill>
+          <a:ln w="19050">
+            <a:solidFill>
+              <a:srgbClr val="DC2626"/>
+            </a:solidFill>
+          </a:ln>
+        </p:spPr>
+        <p:style>
+          <a:lnRef idx="1">
+            <a:schemeClr val="accent1"/>
+          </a:lnRef>
+          <a:fillRef idx="3">
+            <a:schemeClr val="accent1"/>
+          </a:fillRef>
+          <a:effectRef idx="2">
+            <a:schemeClr val="accent1"/>
+          </a:effectRef>
+          <a:fontRef idx="minor">
+            <a:schemeClr val="lt1"/>
+          </a:fontRef>
+        </p:style>
+        <p:txBody>
+          <a:bodyPr rtlCol="0" anchor="ctr"/>
+          <a:lstStyle/>
+          <a:p>
+            <a:pPr algn="ctr"/>
+          </a:p>
+        </p:txBody>
+      </p:sp>
+      <p:sp>
+        <p:nvSpPr>
+          <p:cNvPr id="8" name="Rounded Rectangle 7"/>
+          <p:cNvSpPr/>
+          <p:nvPr/>
+        </p:nvSpPr>
+        <p:spPr>
+          <a:xfrm>
+            <a:off x="502920" y="1298448"/>
+            <a:ext cx="5440680" cy="384048"/>
+          </a:xfrm>
+          <a:prstGeom prst="roundRect">
+            <a:avLst>
+              <a:gd name="adj" fmla="val 20000"/>
+            </a:avLst>
+          </a:prstGeom>
+          <a:solidFill>
+            <a:srgbClr val="DC2626"/>
+          </a:solidFill>
+          <a:ln>
+            <a:noFill/>
+          </a:ln>
+        </p:spPr>
+        <p:style>
+          <a:lnRef idx="1">
+            <a:schemeClr val="accent1"/>
+          </a:lnRef>
+          <a:fillRef idx="3">
+            <a:schemeClr val="accent1"/>
+          </a:fillRef>
+          <a:effectRef idx="2">
+            <a:schemeClr val="accent1"/>
+          </a:effectRef>
+          <a:fontRef idx="minor">
+            <a:schemeClr val="lt1"/>
+          </a:fontRef>
+        </p:style>
+        <p:txBody>
+          <a:bodyPr rtlCol="0" anchor="ctr"/>
+          <a:lstStyle/>
+          <a:p>
+            <a:pPr algn="ctr">
+              <a:defRPr sz="1150" b="1">
+                <a:solidFill>
+                  <a:srgbClr val="FFFFFF"/>
+                </a:solidFill>
+                <a:latin typeface="Arial"/>
+              </a:defRPr>
+            </a:pPr>
+            <a:r>
+              <a:t>▲ THE PROBLEM (Current MoSPI Manual Survey)</a:t>
+            </a:r>
+          </a:p>
+        </p:txBody>
+      </p:sp>
+      <p:sp>
+        <p:nvSpPr>
+          <p:cNvPr id="9" name="TextBox 8"/>
+          <p:cNvSpPr txBox="1"/>
+          <p:nvPr/>
+        </p:nvSpPr>
+        <p:spPr>
+          <a:xfrm>
+            <a:off x="685800" y="1737360"/>
+            <a:ext cx="5074920" cy="2221992"/>
+          </a:xfrm>
+          <a:prstGeom prst="rect">
+            <a:avLst/>
+          </a:prstGeom>
+          <a:noFill/>
+        </p:spPr>
+        <p:txBody>
+          <a:bodyPr wrap="square">
+            <a:spAutoFit/>
+          </a:bodyPr>
+          <a:lstStyle/>
+          <a:p>
+            <a:pPr>
+              <a:lnSpc>
+                <a:spcPct val="115000"/>
+              </a:lnSpc>
+              <a:spcAft>
+                <a:spcPts val="500"/>
+              </a:spcAft>
+            </a:pPr>
+            <a:r>
+              <a:rPr sz="1019" b="1">
+                <a:solidFill>
+                  <a:srgbClr val="B91C1C"/>
+                </a:solidFill>
+                <a:latin typeface="Arial"/>
+              </a:rPr>
+              <a:t>• 15-Day Information Lag: </a:t>
+            </a:r>
+            <a:r>
+              <a:rPr sz="980">
+                <a:solidFill>
+                  <a:srgbClr val="0F172A"/>
+                </a:solidFill>
+                <a:latin typeface="Arial"/>
+              </a:rPr>
+              <a:t>Manual surveyor visits delay CPI reporting by 2 weeks, missing high-frequency price volatility.</a:t>
+            </a:r>
+          </a:p>
+          <a:p>
+            <a:pPr>
+              <a:lnSpc>
+                <a:spcPct val="115000"/>
+              </a:lnSpc>
+              <a:spcAft>
+                <a:spcPts val="500"/>
+              </a:spcAft>
+            </a:pPr>
+            <a:r>
+              <a:rPr sz="1019" b="1">
+                <a:solidFill>
+                  <a:srgbClr val="B91C1C"/>
+                </a:solidFill>
+                <a:latin typeface="Arial"/>
+              </a:rPr>
+              <a:t>• Static Single Snapshot: </a:t>
+            </a:r>
+            <a:r>
+              <a:rPr sz="980">
+                <a:solidFill>
+                  <a:srgbClr val="0F172A"/>
+                </a:solidFill>
+                <a:latin typeface="Arial"/>
+              </a:rPr>
+              <a:t>Only 1 quote collected per route/month, failing to capture 10,000+ daily dynamic algorithmic fares.</a:t>
+            </a:r>
+          </a:p>
+          <a:p>
+            <a:pPr>
+              <a:lnSpc>
+                <a:spcPct val="115000"/>
+              </a:lnSpc>
+              <a:spcAft>
+                <a:spcPts val="500"/>
+              </a:spcAft>
+            </a:pPr>
+            <a:r>
+              <a:rPr sz="1019" b="1">
+                <a:solidFill>
+                  <a:srgbClr val="B91C1C"/>
+                </a:solidFill>
+                <a:latin typeface="Arial"/>
+              </a:rPr>
+              <a:t>• Dutot Upward Bias: </a:t>
+            </a:r>
+            <a:r>
+              <a:rPr sz="980">
+                <a:solidFill>
+                  <a:srgbClr val="0F172A"/>
+                </a:solidFill>
+                <a:latin typeface="Arial"/>
+              </a:rPr>
+              <a:t>Arithmetic mean formula overstates airfare transport inflation by 20-30 bps.</a:t>
+            </a:r>
+          </a:p>
+          <a:p>
+            <a:pPr>
+              <a:lnSpc>
+                <a:spcPct val="115000"/>
+              </a:lnSpc>
+              <a:spcAft>
+                <a:spcPts val="500"/>
+              </a:spcAft>
+            </a:pPr>
+            <a:r>
+              <a:rPr sz="1019" b="1">
+                <a:solidFill>
+                  <a:srgbClr val="B91C1C"/>
+                </a:solidFill>
+                <a:latin typeface="Arial"/>
+              </a:rPr>
+              <a:t>• High Operational Cost: </a:t>
+            </a:r>
+            <a:r>
+              <a:rPr sz="980">
+                <a:solidFill>
+                  <a:srgbClr val="0F172A"/>
+                </a:solidFill>
+                <a:latin typeface="Arial"/>
+              </a:rPr>
+              <a:t>Multi-crore physical surveyor logistics across airports with zero cryptographic audit trail.</a:t>
+            </a:r>
+          </a:p>
+        </p:txBody>
+      </p:sp>
+      <p:sp>
+        <p:nvSpPr>
+          <p:cNvPr id="10" name="Rounded Rectangle 9"/>
+          <p:cNvSpPr/>
+          <p:nvPr/>
+        </p:nvSpPr>
+        <p:spPr>
+          <a:xfrm>
+            <a:off x="6245352" y="1298448"/>
+            <a:ext cx="5440680" cy="2697480"/>
+          </a:xfrm>
+          <a:prstGeom prst="roundRect">
+            <a:avLst>
+              <a:gd name="adj" fmla="val 4000"/>
+            </a:avLst>
+          </a:prstGeom>
+          <a:solidFill>
+            <a:srgbClr val="F0FDF4"/>
+          </a:solidFill>
+          <a:ln w="19050">
+            <a:solidFill>
+              <a:srgbClr val="16A34A"/>
+            </a:solidFill>
+          </a:ln>
+        </p:spPr>
+        <p:style>
+          <a:lnRef idx="1">
+            <a:schemeClr val="accent1"/>
+          </a:lnRef>
+          <a:fillRef idx="3">
+            <a:schemeClr val="accent1"/>
+          </a:fillRef>
+          <a:effectRef idx="2">
+            <a:schemeClr val="accent1"/>
+          </a:effectRef>
+          <a:fontRef idx="minor">
+            <a:schemeClr val="lt1"/>
+          </a:fontRef>
+        </p:style>
+        <p:txBody>
+          <a:bodyPr rtlCol="0" anchor="ctr"/>
+          <a:lstStyle/>
+          <a:p>
+            <a:pPr algn="ctr"/>
+          </a:p>
+        </p:txBody>
+      </p:sp>
+      <p:sp>
+        <p:nvSpPr>
+          <p:cNvPr id="11" name="Rounded Rectangle 10"/>
+          <p:cNvSpPr/>
+          <p:nvPr/>
+        </p:nvSpPr>
+        <p:spPr>
+          <a:xfrm>
+            <a:off x="6245352" y="1298448"/>
+            <a:ext cx="5440680" cy="384048"/>
+          </a:xfrm>
+          <a:prstGeom prst="roundRect">
+            <a:avLst>
+              <a:gd name="adj" fmla="val 20000"/>
+            </a:avLst>
+          </a:prstGeom>
+          <a:solidFill>
+            <a:srgbClr val="16A34A"/>
+          </a:solidFill>
+          <a:ln>
+            <a:noFill/>
+          </a:ln>
+        </p:spPr>
+        <p:style>
+          <a:lnRef idx="1">
+            <a:schemeClr val="accent1"/>
+          </a:lnRef>
+          <a:fillRef idx="3">
+            <a:schemeClr val="accent1"/>
+          </a:fillRef>
+          <a:effectRef idx="2">
+            <a:schemeClr val="accent1"/>
+          </a:effectRef>
+          <a:fontRef idx="minor">
+            <a:schemeClr val="lt1"/>
+          </a:fontRef>
+        </p:style>
+        <p:txBody>
+          <a:bodyPr rtlCol="0" anchor="ctr"/>
+          <a:lstStyle/>
+          <a:p>
+            <a:pPr algn="ctr">
+              <a:defRPr sz="1150" b="1">
+                <a:solidFill>
+                  <a:srgbClr val="FFFFFF"/>
+                </a:solidFill>
+                <a:latin typeface="Arial"/>
+              </a:defRPr>
+            </a:pPr>
+            <a:r>
+              <a:t>▶ HOW OUR APP SOLVES IT (VayuSuchak Engine)</a:t>
+            </a:r>
+          </a:p>
+        </p:txBody>
+      </p:sp>
+      <p:sp>
+        <p:nvSpPr>
+          <p:cNvPr id="12" name="TextBox 11"/>
+          <p:cNvSpPr txBox="1"/>
+          <p:nvPr/>
+        </p:nvSpPr>
+        <p:spPr>
+          <a:xfrm>
+            <a:off x="6428232" y="1737360"/>
+            <a:ext cx="5074920" cy="2221992"/>
+          </a:xfrm>
+          <a:prstGeom prst="rect">
+            <a:avLst/>
+          </a:prstGeom>
+          <a:noFill/>
+        </p:spPr>
+        <p:txBody>
+          <a:bodyPr wrap="square">
+            <a:spAutoFit/>
+          </a:bodyPr>
+          <a:lstStyle/>
+          <a:p>
+            <a:pPr>
+              <a:lnSpc>
+                <a:spcPct val="115000"/>
+              </a:lnSpc>
+              <a:spcAft>
+                <a:spcPts val="500"/>
+              </a:spcAft>
+            </a:pPr>
+            <a:r>
+              <a:rPr sz="1019" b="1">
+                <a:solidFill>
+                  <a:srgbClr val="15803D"/>
+                </a:solidFill>
+                <a:latin typeface="Arial"/>
+              </a:rPr>
+              <a:t>• Real-Time Extraction: </a:t>
+            </a:r>
+            <a:r>
+              <a:rPr sz="980">
+                <a:solidFill>
+                  <a:srgbClr val="0F172A"/>
+                </a:solidFill>
+                <a:latin typeface="Arial"/>
+              </a:rPr>
+              <a:t>Playwright headless bots harvest 10,000+ live fares daily with sub-24h latency at 02:00 AM IST.</a:t>
+            </a:r>
+          </a:p>
+          <a:p>
+            <a:pPr>
+              <a:lnSpc>
+                <a:spcPct val="115000"/>
+              </a:lnSpc>
+              <a:spcAft>
+                <a:spcPts val="500"/>
+              </a:spcAft>
+            </a:pPr>
+            <a:r>
+              <a:rPr sz="1019" b="1">
+                <a:solidFill>
+                  <a:srgbClr val="15803D"/>
+                </a:solidFill>
+                <a:latin typeface="Arial"/>
+              </a:rPr>
+              <a:t>• T+1..T+45 Advance Horizons: </a:t>
+            </a:r>
+            <a:r>
+              <a:rPr sz="980">
+                <a:solidFill>
+                  <a:srgbClr val="0F172A"/>
+                </a:solidFill>
+                <a:latin typeface="Arial"/>
+              </a:rPr>
+              <a:t>Captures urgent vs saver fares weighted dynamically by official DGCA passenger volumes.</a:t>
+            </a:r>
+          </a:p>
+          <a:p>
+            <a:pPr>
+              <a:lnSpc>
+                <a:spcPct val="115000"/>
+              </a:lnSpc>
+              <a:spcAft>
+                <a:spcPts val="500"/>
+              </a:spcAft>
+            </a:pPr>
+            <a:r>
+              <a:rPr sz="1019" b="1">
+                <a:solidFill>
+                  <a:srgbClr val="15803D"/>
+                </a:solidFill>
+                <a:latin typeface="Arial"/>
+              </a:rPr>
+              <a:t>• UN/ILO Jevons Index: </a:t>
+            </a:r>
+            <a:r>
+              <a:rPr sz="980">
+                <a:solidFill>
+                  <a:srgbClr val="0F172A"/>
+                </a:solidFill>
+                <a:latin typeface="Arial"/>
+              </a:rPr>
+              <a:t>Geometric mean formulation mathematically eliminates Dutot upward substitution distortion.</a:t>
+            </a:r>
+          </a:p>
+          <a:p>
+            <a:pPr>
+              <a:lnSpc>
+                <a:spcPct val="115000"/>
+              </a:lnSpc>
+              <a:spcAft>
+                <a:spcPts val="500"/>
+              </a:spcAft>
+            </a:pPr>
+            <a:r>
+              <a:rPr sz="1019" b="1">
+                <a:solidFill>
+                  <a:srgbClr val="15803D"/>
+                </a:solidFill>
+                <a:latin typeface="Arial"/>
+              </a:rPr>
+              <a:t>• SHA-256 Audit Ledger: </a:t>
+            </a:r>
+            <a:r>
+              <a:rPr sz="980">
+                <a:solidFill>
+                  <a:srgbClr val="0F172A"/>
+                </a:solidFill>
+                <a:latin typeface="Arial"/>
+              </a:rPr>
+              <a:t>Immutable cryptographic fingerprints ensure sovereign-grade evidentiary auditability for MoSPI.</a:t>
+            </a:r>
+          </a:p>
+        </p:txBody>
+      </p:sp>
       <p:pic>
         <p:nvPicPr>
-          <p:cNvPr id="6" name="Picture 5" descr="problem_solution_diagram.png"/>
+          <p:cNvPr id="13" name="Picture 12" descr="workflow_circular_nodes.png"/>
           <p:cNvPicPr>
             <a:picLocks noChangeAspect="1"/>
           </p:cNvPicPr>
@@ -3683,8 +4169,8 @@
         </p:blipFill>
         <p:spPr>
           <a:xfrm>
-            <a:off x="640080" y="1143000"/>
-            <a:ext cx="10908792" cy="3611880"/>
+            <a:off x="502920" y="4069080"/>
+            <a:ext cx="11183112" cy="1755648"/>
           </a:xfrm>
           <a:prstGeom prst="rect">
             <a:avLst/>
@@ -3693,26 +4179,26 @@
       </p:pic>
       <p:sp>
         <p:nvSpPr>
-          <p:cNvPr id="7" name="Rounded Rectangle 6"/>
+          <p:cNvPr id="14" name="Rounded Rectangle 13"/>
           <p:cNvSpPr/>
           <p:nvPr/>
         </p:nvSpPr>
         <p:spPr>
           <a:xfrm>
-            <a:off x="640080" y="4892040"/>
-            <a:ext cx="2633472" cy="1691640"/>
+            <a:off x="502920" y="5943600"/>
+            <a:ext cx="11183112" cy="438912"/>
           </a:xfrm>
           <a:prstGeom prst="roundRect">
             <a:avLst>
-              <a:gd name="adj" fmla="val 8000"/>
+              <a:gd name="adj" fmla="val 20000"/>
             </a:avLst>
           </a:prstGeom>
           <a:solidFill>
-            <a:srgbClr val="EFF6FF"/>
+            <a:srgbClr val="0F172A"/>
           </a:solidFill>
-          <a:ln w="19050">
+          <a:ln w="15240">
             <a:solidFill>
-              <a:srgbClr val="2563EB"/>
+              <a:srgbClr val="1E3A8A"/>
             </a:solidFill>
           </a:ln>
         </p:spPr>
@@ -3740,69 +4226,14 @@
       </p:sp>
       <p:sp>
         <p:nvSpPr>
-          <p:cNvPr id="8" name="Rounded Rectangle 7"/>
-          <p:cNvSpPr/>
-          <p:nvPr/>
-        </p:nvSpPr>
-        <p:spPr>
-          <a:xfrm>
-            <a:off x="640080" y="4892040"/>
-            <a:ext cx="2633472" cy="384048"/>
-          </a:xfrm>
-          <a:prstGeom prst="roundRect">
-            <a:avLst>
-              <a:gd name="adj" fmla="val 20000"/>
-            </a:avLst>
-          </a:prstGeom>
-          <a:solidFill>
-            <a:srgbClr val="2563EB"/>
-          </a:solidFill>
-          <a:ln>
-            <a:noFill/>
-          </a:ln>
-        </p:spPr>
-        <p:style>
-          <a:lnRef idx="1">
-            <a:schemeClr val="accent1"/>
-          </a:lnRef>
-          <a:fillRef idx="3">
-            <a:schemeClr val="accent1"/>
-          </a:fillRef>
-          <a:effectRef idx="2">
-            <a:schemeClr val="accent1"/>
-          </a:effectRef>
-          <a:fontRef idx="minor">
-            <a:schemeClr val="lt1"/>
-          </a:fontRef>
-        </p:style>
-        <p:txBody>
-          <a:bodyPr rtlCol="0" anchor="ctr"/>
-          <a:lstStyle/>
-          <a:p>
-            <a:pPr algn="ctr">
-              <a:defRPr sz="1050" b="1">
-                <a:solidFill>
-                  <a:srgbClr val="FFFFFF"/>
-                </a:solidFill>
-                <a:latin typeface="Arial"/>
-              </a:defRPr>
-            </a:pPr>
-            <a:r>
-              <a:t>★ Dynamic Yield Sensitivity</a:t>
-            </a:r>
-          </a:p>
-        </p:txBody>
-      </p:sp>
-      <p:sp>
-        <p:nvSpPr>
-          <p:cNvPr id="9" name="TextBox 8"/>
+          <p:cNvPr id="15" name="TextBox 14"/>
           <p:cNvSpPr txBox="1"/>
           <p:nvPr/>
         </p:nvSpPr>
         <p:spPr>
           <a:xfrm>
-            <a:off x="749808" y="5330952"/>
-            <a:ext cx="2414016" cy="1216152"/>
+            <a:off x="594360" y="5998464"/>
+            <a:ext cx="11000232" cy="329184"/>
           </a:xfrm>
           <a:prstGeom prst="rect">
             <a:avLst/>
@@ -3810,435 +4241,92 @@
           <a:noFill/>
         </p:spPr>
         <p:txBody>
-          <a:bodyPr wrap="square" lIns="0" rIns="0" tIns="0" bIns="0">
+          <a:bodyPr wrap="none">
             <a:spAutoFit/>
           </a:bodyPr>
           <a:lstStyle/>
           <a:p>
-            <a:pPr>
-              <a:defRPr sz="1100">
-                <a:solidFill>
-                  <a:srgbClr val="1E293B"/>
-                </a:solidFill>
-                <a:latin typeface="Arial"/>
-              </a:defRPr>
-            </a:pPr>
-            <a:r>
-              <a:t>Captures high-frequency algorithmic yield surges across T+1..T+45 vs 15-day delayed manual visits.</a:t>
-            </a:r>
-          </a:p>
-        </p:txBody>
-      </p:sp>
-      <p:sp>
-        <p:nvSpPr>
-          <p:cNvPr id="10" name="Rounded Rectangle 9"/>
-          <p:cNvSpPr/>
-          <p:nvPr/>
-        </p:nvSpPr>
-        <p:spPr>
-          <a:xfrm>
-            <a:off x="3401568" y="4892040"/>
-            <a:ext cx="2633472" cy="1691640"/>
-          </a:xfrm>
-          <a:prstGeom prst="roundRect">
-            <a:avLst>
-              <a:gd name="adj" fmla="val 8000"/>
-            </a:avLst>
-          </a:prstGeom>
-          <a:solidFill>
-            <a:srgbClr val="ECFDF5"/>
-          </a:solidFill>
-          <a:ln w="19050">
-            <a:solidFill>
-              <a:srgbClr val="10B981"/>
-            </a:solidFill>
-          </a:ln>
-        </p:spPr>
-        <p:style>
-          <a:lnRef idx="1">
-            <a:schemeClr val="accent1"/>
-          </a:lnRef>
-          <a:fillRef idx="3">
-            <a:schemeClr val="accent1"/>
-          </a:fillRef>
-          <a:effectRef idx="2">
-            <a:schemeClr val="accent1"/>
-          </a:effectRef>
-          <a:fontRef idx="minor">
-            <a:schemeClr val="lt1"/>
-          </a:fontRef>
-        </p:style>
-        <p:txBody>
-          <a:bodyPr rtlCol="0" anchor="ctr"/>
-          <a:lstStyle/>
-          <a:p>
             <a:pPr algn="ctr"/>
-          </a:p>
-        </p:txBody>
-      </p:sp>
-      <p:sp>
-        <p:nvSpPr>
-          <p:cNvPr id="11" name="Rounded Rectangle 10"/>
-          <p:cNvSpPr/>
-          <p:nvPr/>
-        </p:nvSpPr>
-        <p:spPr>
-          <a:xfrm>
-            <a:off x="3401568" y="4892040"/>
-            <a:ext cx="2633472" cy="384048"/>
-          </a:xfrm>
-          <a:prstGeom prst="roundRect">
-            <a:avLst>
-              <a:gd name="adj" fmla="val 20000"/>
-            </a:avLst>
-          </a:prstGeom>
-          <a:solidFill>
-            <a:srgbClr val="10B981"/>
-          </a:solidFill>
-          <a:ln>
-            <a:noFill/>
-          </a:ln>
-        </p:spPr>
-        <p:style>
-          <a:lnRef idx="1">
-            <a:schemeClr val="accent1"/>
-          </a:lnRef>
-          <a:fillRef idx="3">
-            <a:schemeClr val="accent1"/>
-          </a:fillRef>
-          <a:effectRef idx="2">
-            <a:schemeClr val="accent1"/>
-          </a:effectRef>
-          <a:fontRef idx="minor">
-            <a:schemeClr val="lt1"/>
-          </a:fontRef>
-        </p:style>
-        <p:txBody>
-          <a:bodyPr rtlCol="0" anchor="ctr"/>
-          <a:lstStyle/>
-          <a:p>
-            <a:pPr algn="ctr">
-              <a:defRPr sz="1050" b="1">
+            <a:r>
+              <a:rPr sz="1050" b="1">
                 <a:solidFill>
                   <a:srgbClr val="FFFFFF"/>
                 </a:solidFill>
                 <a:latin typeface="Arial"/>
-              </a:defRPr>
-            </a:pPr>
-            <a:r>
-              <a:t>★ Zero Upward Bias</a:t>
-            </a:r>
-          </a:p>
-        </p:txBody>
-      </p:sp>
-      <p:sp>
-        <p:nvSpPr>
-          <p:cNvPr id="12" name="TextBox 11"/>
-          <p:cNvSpPr txBox="1"/>
-          <p:nvPr/>
-        </p:nvSpPr>
-        <p:spPr>
-          <a:xfrm>
-            <a:off x="3511296" y="5330952"/>
-            <a:ext cx="2414016" cy="1216152"/>
-          </a:xfrm>
-          <a:prstGeom prst="rect">
-            <a:avLst/>
-          </a:prstGeom>
-          <a:noFill/>
-        </p:spPr>
-        <p:txBody>
-          <a:bodyPr wrap="square" lIns="0" rIns="0" tIns="0" bIns="0">
-            <a:spAutoFit/>
-          </a:bodyPr>
-          <a:lstStyle/>
-          <a:p>
-            <a:pPr>
-              <a:defRPr sz="1100">
-                <a:solidFill>
-                  <a:srgbClr val="1E293B"/>
-                </a:solidFill>
-                <a:latin typeface="Arial"/>
-              </a:defRPr>
-            </a:pPr>
-            <a:r>
-              <a:t>UN/ILO Jevons geometric mean mathematically eliminates Dutot arithmetic upward distortion.</a:t>
-            </a:r>
-          </a:p>
-        </p:txBody>
-      </p:sp>
-      <p:sp>
-        <p:nvSpPr>
-          <p:cNvPr id="13" name="Rounded Rectangle 12"/>
-          <p:cNvSpPr/>
-          <p:nvPr/>
-        </p:nvSpPr>
-        <p:spPr>
-          <a:xfrm>
-            <a:off x="6163056" y="4892040"/>
-            <a:ext cx="2633472" cy="1691640"/>
-          </a:xfrm>
-          <a:prstGeom prst="roundRect">
-            <a:avLst>
-              <a:gd name="adj" fmla="val 8000"/>
-            </a:avLst>
-          </a:prstGeom>
-          <a:solidFill>
-            <a:srgbClr val="F5F3FF"/>
-          </a:solidFill>
-          <a:ln w="19050">
-            <a:solidFill>
-              <a:srgbClr val="7C3AED"/>
-            </a:solidFill>
-          </a:ln>
-        </p:spPr>
-        <p:style>
-          <a:lnRef idx="1">
-            <a:schemeClr val="accent1"/>
-          </a:lnRef>
-          <a:fillRef idx="3">
-            <a:schemeClr val="accent1"/>
-          </a:fillRef>
-          <a:effectRef idx="2">
-            <a:schemeClr val="accent1"/>
-          </a:effectRef>
-          <a:fontRef idx="minor">
-            <a:schemeClr val="lt1"/>
-          </a:fontRef>
-        </p:style>
-        <p:txBody>
-          <a:bodyPr rtlCol="0" anchor="ctr"/>
-          <a:lstStyle/>
-          <a:p>
-            <a:pPr algn="ctr"/>
-          </a:p>
-        </p:txBody>
-      </p:sp>
-      <p:sp>
-        <p:nvSpPr>
-          <p:cNvPr id="14" name="Rounded Rectangle 13"/>
-          <p:cNvSpPr/>
-          <p:nvPr/>
-        </p:nvSpPr>
-        <p:spPr>
-          <a:xfrm>
-            <a:off x="6163056" y="4892040"/>
-            <a:ext cx="2633472" cy="384048"/>
-          </a:xfrm>
-          <a:prstGeom prst="roundRect">
-            <a:avLst>
-              <a:gd name="adj" fmla="val 20000"/>
-            </a:avLst>
-          </a:prstGeom>
-          <a:solidFill>
-            <a:srgbClr val="7C3AED"/>
-          </a:solidFill>
-          <a:ln>
-            <a:noFill/>
-          </a:ln>
-        </p:spPr>
-        <p:style>
-          <a:lnRef idx="1">
-            <a:schemeClr val="accent1"/>
-          </a:lnRef>
-          <a:fillRef idx="3">
-            <a:schemeClr val="accent1"/>
-          </a:fillRef>
-          <a:effectRef idx="2">
-            <a:schemeClr val="accent1"/>
-          </a:effectRef>
-          <a:fontRef idx="minor">
-            <a:schemeClr val="lt1"/>
-          </a:fontRef>
-        </p:style>
-        <p:txBody>
-          <a:bodyPr rtlCol="0" anchor="ctr"/>
-          <a:lstStyle/>
-          <a:p>
-            <a:pPr algn="ctr">
-              <a:defRPr sz="1050" b="1">
+              </a:rPr>
+              <a:t>DATA HARVESTING</a:t>
+            </a:r>
+            <a:r>
+              <a:rPr sz="1050" b="1">
+                <a:solidFill>
+                  <a:srgbClr val="38BDF8"/>
+                </a:solidFill>
+                <a:latin typeface="Arial"/>
+              </a:rPr>
+              <a:t>  ➔  </a:t>
+            </a:r>
+            <a:r>
+              <a:rPr sz="1050" b="1">
                 <a:solidFill>
                   <a:srgbClr val="FFFFFF"/>
                 </a:solidFill>
                 <a:latin typeface="Arial"/>
-              </a:defRPr>
-            </a:pPr>
-            <a:r>
-              <a:t>★ Cryptographic Audit</a:t>
-            </a:r>
-          </a:p>
-        </p:txBody>
-      </p:sp>
-      <p:sp>
-        <p:nvSpPr>
-          <p:cNvPr id="15" name="TextBox 14"/>
-          <p:cNvSpPr txBox="1"/>
-          <p:nvPr/>
-        </p:nvSpPr>
-        <p:spPr>
-          <a:xfrm>
-            <a:off x="6272784" y="5330952"/>
-            <a:ext cx="2414016" cy="1216152"/>
-          </a:xfrm>
-          <a:prstGeom prst="rect">
-            <a:avLst/>
-          </a:prstGeom>
-          <a:noFill/>
-        </p:spPr>
-        <p:txBody>
-          <a:bodyPr wrap="square" lIns="0" rIns="0" tIns="0" bIns="0">
-            <a:spAutoFit/>
-          </a:bodyPr>
-          <a:lstStyle/>
-          <a:p>
-            <a:pPr>
-              <a:defRPr sz="1100">
-                <a:solidFill>
-                  <a:srgbClr val="1E293B"/>
-                </a:solidFill>
-                <a:latin typeface="Arial"/>
-              </a:defRPr>
-            </a:pPr>
-            <a:r>
-              <a:t>SHA-256 batch fingerprints ensure legal evidentiary standards for MoSPI NSO &amp; courts.</a:t>
-            </a:r>
-          </a:p>
-        </p:txBody>
-      </p:sp>
-      <p:sp>
-        <p:nvSpPr>
-          <p:cNvPr id="16" name="Rounded Rectangle 15"/>
-          <p:cNvSpPr/>
-          <p:nvPr/>
-        </p:nvSpPr>
-        <p:spPr>
-          <a:xfrm>
-            <a:off x="8924544" y="4892040"/>
-            <a:ext cx="2633472" cy="1691640"/>
-          </a:xfrm>
-          <a:prstGeom prst="roundRect">
-            <a:avLst>
-              <a:gd name="adj" fmla="val 8000"/>
-            </a:avLst>
-          </a:prstGeom>
-          <a:solidFill>
-            <a:srgbClr val="FFFBEB"/>
-          </a:solidFill>
-          <a:ln w="19050">
-            <a:solidFill>
-              <a:srgbClr val="D97706"/>
-            </a:solidFill>
-          </a:ln>
-        </p:spPr>
-        <p:style>
-          <a:lnRef idx="1">
-            <a:schemeClr val="accent1"/>
-          </a:lnRef>
-          <a:fillRef idx="3">
-            <a:schemeClr val="accent1"/>
-          </a:fillRef>
-          <a:effectRef idx="2">
-            <a:schemeClr val="accent1"/>
-          </a:effectRef>
-          <a:fontRef idx="minor">
-            <a:schemeClr val="lt1"/>
-          </a:fontRef>
-        </p:style>
-        <p:txBody>
-          <a:bodyPr rtlCol="0" anchor="ctr"/>
-          <a:lstStyle/>
-          <a:p>
-            <a:pPr algn="ctr"/>
-          </a:p>
-        </p:txBody>
-      </p:sp>
-      <p:sp>
-        <p:nvSpPr>
-          <p:cNvPr id="17" name="Rounded Rectangle 16"/>
-          <p:cNvSpPr/>
-          <p:nvPr/>
-        </p:nvSpPr>
-        <p:spPr>
-          <a:xfrm>
-            <a:off x="8924544" y="4892040"/>
-            <a:ext cx="2633472" cy="384048"/>
-          </a:xfrm>
-          <a:prstGeom prst="roundRect">
-            <a:avLst>
-              <a:gd name="adj" fmla="val 20000"/>
-            </a:avLst>
-          </a:prstGeom>
-          <a:solidFill>
-            <a:srgbClr val="D97706"/>
-          </a:solidFill>
-          <a:ln>
-            <a:noFill/>
-          </a:ln>
-        </p:spPr>
-        <p:style>
-          <a:lnRef idx="1">
-            <a:schemeClr val="accent1"/>
-          </a:lnRef>
-          <a:fillRef idx="3">
-            <a:schemeClr val="accent1"/>
-          </a:fillRef>
-          <a:effectRef idx="2">
-            <a:schemeClr val="accent1"/>
-          </a:effectRef>
-          <a:fontRef idx="minor">
-            <a:schemeClr val="lt1"/>
-          </a:fontRef>
-        </p:style>
-        <p:txBody>
-          <a:bodyPr rtlCol="0" anchor="ctr"/>
-          <a:lstStyle/>
-          <a:p>
-            <a:pPr algn="ctr">
-              <a:defRPr sz="1050" b="1">
+              </a:rPr>
+              <a:t>IQR OUTLIER TRUNCATION</a:t>
+            </a:r>
+            <a:r>
+              <a:rPr sz="1050" b="1">
+                <a:solidFill>
+                  <a:srgbClr val="38BDF8"/>
+                </a:solidFill>
+                <a:latin typeface="Arial"/>
+              </a:rPr>
+              <a:t>  ➔  </a:t>
+            </a:r>
+            <a:r>
+              <a:rPr sz="1050" b="1">
                 <a:solidFill>
                   <a:srgbClr val="FFFFFF"/>
                 </a:solidFill>
                 <a:latin typeface="Arial"/>
-              </a:defRPr>
-            </a:pPr>
-            <a:r>
-              <a:t>★ &gt;95% Cost Reduction</a:t>
-            </a:r>
-          </a:p>
-        </p:txBody>
-      </p:sp>
-      <p:sp>
-        <p:nvSpPr>
-          <p:cNvPr id="18" name="TextBox 17"/>
-          <p:cNvSpPr txBox="1"/>
-          <p:nvPr/>
-        </p:nvSpPr>
-        <p:spPr>
-          <a:xfrm>
-            <a:off x="9034272" y="5330952"/>
-            <a:ext cx="2414016" cy="1216152"/>
-          </a:xfrm>
-          <a:prstGeom prst="rect">
-            <a:avLst/>
-          </a:prstGeom>
-          <a:noFill/>
-        </p:spPr>
-        <p:txBody>
-          <a:bodyPr wrap="square" lIns="0" rIns="0" tIns="0" bIns="0">
-            <a:spAutoFit/>
-          </a:bodyPr>
-          <a:lstStyle/>
-          <a:p>
-            <a:pPr>
-              <a:defRPr sz="1100">
-                <a:solidFill>
-                  <a:srgbClr val="1E293B"/>
-                </a:solidFill>
-                <a:latin typeface="Arial"/>
-              </a:defRPr>
-            </a:pPr>
-            <a:r>
-              <a:t>Fully serverless automated pipeline slashes crores in physical field survey overhead.</a:t>
+              </a:rPr>
+              <a:t>JEVONS GEOMETRIC INDEX</a:t>
+            </a:r>
+            <a:r>
+              <a:rPr sz="1050" b="1">
+                <a:solidFill>
+                  <a:srgbClr val="38BDF8"/>
+                </a:solidFill>
+                <a:latin typeface="Arial"/>
+              </a:rPr>
+              <a:t>  ➔  </a:t>
+            </a:r>
+            <a:r>
+              <a:rPr sz="1050" b="1">
+                <a:solidFill>
+                  <a:srgbClr val="FFFFFF"/>
+                </a:solidFill>
+                <a:latin typeface="Arial"/>
+              </a:rPr>
+              <a:t>SHA-256 PROVENANCE</a:t>
+            </a:r>
+            <a:r>
+              <a:rPr sz="1050" b="1">
+                <a:solidFill>
+                  <a:srgbClr val="38BDF8"/>
+                </a:solidFill>
+                <a:latin typeface="Arial"/>
+              </a:rPr>
+              <a:t>  ➔  </a:t>
+            </a:r>
+            <a:r>
+              <a:rPr sz="1050" b="1">
+                <a:solidFill>
+                  <a:srgbClr val="FFFFFF"/>
+                </a:solidFill>
+                <a:latin typeface="Arial"/>
+              </a:rPr>
+              <a:t>MoSPI &amp; RBI CPI INTEGRATION</a:t>
             </a:r>
           </a:p>
         </p:txBody>
@@ -4312,8 +4400,8 @@
         </p:nvSpPr>
         <p:spPr>
           <a:xfrm>
-            <a:off x="548640" y="201168"/>
-            <a:ext cx="1645920" cy="566928"/>
+            <a:off x="502920" y="201168"/>
+            <a:ext cx="1645920" cy="502920"/>
           </a:xfrm>
           <a:prstGeom prst="roundRect">
             <a:avLst>
@@ -4325,7 +4413,7 @@
           </a:solidFill>
           <a:ln w="19050">
             <a:solidFill>
-              <a:srgbClr val="4338CA"/>
+              <a:srgbClr val="64748B"/>
             </a:solidFill>
           </a:ln>
         </p:spPr>
@@ -4348,15 +4436,15 @@
           <a:lstStyle/>
           <a:p>
             <a:pPr algn="ctr">
-              <a:defRPr sz="1200" b="1">
-                <a:solidFill>
-                  <a:srgbClr val="4338CA"/>
+              <a:defRPr sz="1300" b="1">
+                <a:solidFill>
+                  <a:srgbClr val="000000"/>
                 </a:solidFill>
                 <a:latin typeface="Arial"/>
               </a:defRPr>
             </a:pPr>
             <a:r>
-              <a:t>Team Rookie</a:t>
+              <a:t>Roorkies</a:t>
             </a:r>
           </a:p>
         </p:txBody>
@@ -4369,7 +4457,7 @@
         </p:nvSpPr>
         <p:spPr>
           <a:xfrm>
-            <a:off x="2286000" y="137160"/>
+            <a:off x="2286000" y="109728"/>
             <a:ext cx="7589520" cy="868680"/>
           </a:xfrm>
           <a:prstGeom prst="rect">
@@ -4384,9 +4472,9 @@
           <a:lstStyle/>
           <a:p>
             <a:pPr algn="ctr">
-              <a:defRPr sz="2600" b="1">
-                <a:solidFill>
-                  <a:srgbClr val="1B365D"/>
+              <a:defRPr sz="2500" b="1">
+                <a:solidFill>
+                  <a:srgbClr val="000000"/>
                 </a:solidFill>
                 <a:latin typeface="Times New Roman"/>
               </a:defRPr>
@@ -4399,7 +4487,7 @@
       </p:sp>
       <p:pic>
         <p:nvPicPr>
-          <p:cNvPr id="5" name="Picture 4" descr="sih_2026_logo_hd.png"/>
+          <p:cNvPr id="5" name="Picture 4" descr="page_1_img_2.png"/>
           <p:cNvPicPr>
             <a:picLocks noChangeAspect="1"/>
           </p:cNvPicPr>
@@ -4413,7 +4501,7 @@
         </p:blipFill>
         <p:spPr>
           <a:xfrm>
-            <a:off x="10149840" y="146304"/>
+            <a:off x="10149840" y="109728"/>
             <a:ext cx="1645920" cy="777240"/>
           </a:xfrm>
           <a:prstGeom prst="rect">
@@ -4429,18 +4517,18 @@
         </p:nvSpPr>
         <p:spPr>
           <a:xfrm>
-            <a:off x="640080" y="1188720"/>
-            <a:ext cx="3931920" cy="5303520"/>
+            <a:off x="502920" y="1051560"/>
+            <a:ext cx="3154680" cy="5440680"/>
           </a:xfrm>
           <a:prstGeom prst="rect">
             <a:avLst/>
           </a:prstGeom>
           <a:solidFill>
-            <a:srgbClr val="FFFFFF"/>
+            <a:srgbClr val="F8FAFC"/>
           </a:solidFill>
-          <a:ln w="25400">
+          <a:ln w="19050">
             <a:solidFill>
-              <a:srgbClr val="2563EB"/>
+              <a:srgbClr val="1E40AF"/>
             </a:solidFill>
           </a:ln>
         </p:spPr>
@@ -4474,8 +4562,8 @@
         </p:nvSpPr>
         <p:spPr>
           <a:xfrm>
-            <a:off x="804672" y="1325880"/>
-            <a:ext cx="3611880" cy="5029200"/>
+            <a:off x="640080" y="1179576"/>
+            <a:ext cx="2880360" cy="5184648"/>
           </a:xfrm>
           <a:prstGeom prst="rect">
             <a:avLst/>
@@ -4490,211 +4578,439 @@
           <a:p>
             <a:pPr>
               <a:spcAft>
-                <a:spcPts val="200"/>
+                <a:spcPts val="1000"/>
               </a:spcAft>
-            </a:pPr>
-            <a:r>
-              <a:rPr sz="1300" b="1">
-                <a:solidFill>
-                  <a:srgbClr val="0F172A"/>
-                </a:solidFill>
-                <a:latin typeface="Arial"/>
-              </a:rPr>
-              <a:t>Data Ingestion &amp; Scraping:</a:t>
+              <a:defRPr sz="1700" b="1">
+                <a:solidFill>
+                  <a:srgbClr val="1E40AF"/>
+                </a:solidFill>
+                <a:latin typeface="Arial"/>
+              </a:defRPr>
+            </a:pPr>
+            <a:r>
+              <a:t>Technologies Used:</a:t>
+            </a:r>
+          </a:p>
+          <a:p>
+            <a:pPr>
+              <a:spcBef>
+                <a:spcPts val="800"/>
+              </a:spcBef>
+              <a:spcAft>
+                <a:spcPts val="300"/>
+              </a:spcAft>
+            </a:pPr>
+            <a:r>
+              <a:rPr sz="1150" b="1">
+                <a:solidFill>
+                  <a:srgbClr val="DC2626"/>
+                </a:solidFill>
+                <a:latin typeface="Arial"/>
+              </a:rPr>
+              <a:t>Languages &amp; Runtimes:</a:t>
             </a:r>
           </a:p>
           <a:p>
             <a:pPr>
               <a:spcAft>
-                <a:spcPts val="400"/>
+                <a:spcPts val="250"/>
               </a:spcAft>
             </a:pPr>
             <a:r>
-              <a:rPr sz="1200" b="1" u="sng">
-                <a:solidFill>
-                  <a:srgbClr val="6D28D9"/>
-                </a:solidFill>
-                <a:latin typeface="Arial"/>
-              </a:rPr>
-              <a:t>Python 3.13 &amp; Playwright</a:t>
-            </a:r>
-            <a:r>
-              <a:rPr sz="1150">
-                <a:solidFill>
-                  <a:srgbClr val="334155"/>
-                </a:solidFill>
-                <a:latin typeface="Arial"/>
-              </a:rPr>
-              <a:t> - Headless automated crawlers for IndiGo, Air India, Akasa &amp; SpiceJet with strict ethical compliance.</a:t>
+              <a:rPr sz="1000" b="1">
+                <a:solidFill>
+                  <a:srgbClr val="0F172A"/>
+                </a:solidFill>
+                <a:latin typeface="Arial"/>
+              </a:rPr>
+              <a:t>• </a:t>
+            </a:r>
+            <a:r>
+              <a:rPr sz="980">
+                <a:solidFill>
+                  <a:srgbClr val="0F172A"/>
+                </a:solidFill>
+                <a:latin typeface="Arial"/>
+              </a:rPr>
+              <a:t>Python 3.13 (Async Harvester &amp; Engine)</a:t>
+            </a:r>
+          </a:p>
+          <a:p>
+            <a:pPr>
+              <a:spcAft>
+                <a:spcPts val="250"/>
+              </a:spcAft>
+            </a:pPr>
+            <a:r>
+              <a:rPr sz="1000" b="1">
+                <a:solidFill>
+                  <a:srgbClr val="0F172A"/>
+                </a:solidFill>
+                <a:latin typeface="Arial"/>
+              </a:rPr>
+              <a:t>• </a:t>
+            </a:r>
+            <a:r>
+              <a:rPr sz="980">
+                <a:solidFill>
+                  <a:srgbClr val="0F172A"/>
+                </a:solidFill>
+                <a:latin typeface="Arial"/>
+              </a:rPr>
+              <a:t>TypeScript &amp; React 19 (Dashboard UI)</a:t>
+            </a:r>
+          </a:p>
+          <a:p>
+            <a:pPr>
+              <a:spcAft>
+                <a:spcPts val="250"/>
+              </a:spcAft>
+            </a:pPr>
+            <a:r>
+              <a:rPr sz="1000" b="1">
+                <a:solidFill>
+                  <a:srgbClr val="0F172A"/>
+                </a:solidFill>
+                <a:latin typeface="Arial"/>
+              </a:rPr>
+              <a:t>• </a:t>
+            </a:r>
+            <a:r>
+              <a:rPr sz="980">
+                <a:solidFill>
+                  <a:srgbClr val="0F172A"/>
+                </a:solidFill>
+                <a:latin typeface="Arial"/>
+              </a:rPr>
+              <a:t>SQL (PostgreSQL Time-Series &amp; SQLite)</a:t>
             </a:r>
           </a:p>
           <a:p>
             <a:pPr>
               <a:spcBef>
-                <a:spcPts val="1200"/>
+                <a:spcPts val="800"/>
               </a:spcBef>
               <a:spcAft>
-                <a:spcPts val="200"/>
+                <a:spcPts val="300"/>
               </a:spcAft>
             </a:pPr>
             <a:r>
-              <a:rPr sz="1300" b="1">
-                <a:solidFill>
-                  <a:srgbClr val="0F172A"/>
-                </a:solidFill>
-                <a:latin typeface="Arial"/>
-              </a:rPr>
-              <a:t>Statistical Algorithm Formulation:</a:t>
+              <a:rPr sz="1150" b="1">
+                <a:solidFill>
+                  <a:srgbClr val="1E40AF"/>
+                </a:solidFill>
+                <a:latin typeface="Arial"/>
+              </a:rPr>
+              <a:t>Extraction &amp; Cleansing:</a:t>
             </a:r>
           </a:p>
           <a:p>
             <a:pPr>
               <a:spcAft>
-                <a:spcPts val="400"/>
+                <a:spcPts val="250"/>
               </a:spcAft>
             </a:pPr>
             <a:r>
-              <a:rPr sz="1200" b="1" u="sng">
-                <a:solidFill>
-                  <a:srgbClr val="6D28D9"/>
-                </a:solidFill>
-                <a:latin typeface="Arial"/>
-              </a:rPr>
-              <a:t>UN/ILO Jevons &amp; SciPy</a:t>
-            </a:r>
-            <a:r>
-              <a:rPr sz="1150">
-                <a:solidFill>
-                  <a:srgbClr val="334155"/>
-                </a:solidFill>
-                <a:latin typeface="Arial"/>
-              </a:rPr>
-              <a:t> - Elementary geometric mean calculation with automated IQR dynamic outlier filtering.</a:t>
+              <a:rPr sz="1000" b="1">
+                <a:solidFill>
+                  <a:srgbClr val="0F172A"/>
+                </a:solidFill>
+                <a:latin typeface="Arial"/>
+              </a:rPr>
+              <a:t>• </a:t>
+            </a:r>
+            <a:r>
+              <a:rPr sz="980">
+                <a:solidFill>
+                  <a:srgbClr val="0F172A"/>
+                </a:solidFill>
+                <a:latin typeface="Arial"/>
+              </a:rPr>
+              <a:t>Playwright Headless Stealth Proxy Pool</a:t>
+            </a:r>
+          </a:p>
+          <a:p>
+            <a:pPr>
+              <a:spcAft>
+                <a:spcPts val="250"/>
+              </a:spcAft>
+            </a:pPr>
+            <a:r>
+              <a:rPr sz="1000" b="1">
+                <a:solidFill>
+                  <a:srgbClr val="0F172A"/>
+                </a:solidFill>
+                <a:latin typeface="Arial"/>
+              </a:rPr>
+              <a:t>• </a:t>
+            </a:r>
+            <a:r>
+              <a:rPr sz="980">
+                <a:solidFill>
+                  <a:srgbClr val="0F172A"/>
+                </a:solidFill>
+                <a:latin typeface="Arial"/>
+              </a:rPr>
+              <a:t>T+1..T+45 Advance Horizons Dynamic Tracking</a:t>
+            </a:r>
+          </a:p>
+          <a:p>
+            <a:pPr>
+              <a:spcAft>
+                <a:spcPts val="250"/>
+              </a:spcAft>
+            </a:pPr>
+            <a:r>
+              <a:rPr sz="1000" b="1">
+                <a:solidFill>
+                  <a:srgbClr val="0F172A"/>
+                </a:solidFill>
+                <a:latin typeface="Arial"/>
+              </a:rPr>
+              <a:t>• </a:t>
+            </a:r>
+            <a:r>
+              <a:rPr sz="980">
+                <a:solidFill>
+                  <a:srgbClr val="0F172A"/>
+                </a:solidFill>
+                <a:latin typeface="Arial"/>
+              </a:rPr>
+              <a:t>SciPy &amp; NumPy Dynamic IQR Outlier Filter</a:t>
             </a:r>
           </a:p>
           <a:p>
             <a:pPr>
               <a:spcBef>
-                <a:spcPts val="1200"/>
+                <a:spcPts val="800"/>
               </a:spcBef>
               <a:spcAft>
-                <a:spcPts val="200"/>
+                <a:spcPts val="300"/>
               </a:spcAft>
             </a:pPr>
             <a:r>
-              <a:rPr sz="1300" b="1">
-                <a:solidFill>
-                  <a:srgbClr val="0F172A"/>
-                </a:solidFill>
-                <a:latin typeface="Arial"/>
-              </a:rPr>
-              <a:t>Encryption and Audit Vault:</a:t>
+              <a:rPr sz="1150" b="1">
+                <a:solidFill>
+                  <a:srgbClr val="7C3AED"/>
+                </a:solidFill>
+                <a:latin typeface="Arial"/>
+              </a:rPr>
+              <a:t>Index Engine &amp; Crypto:</a:t>
             </a:r>
           </a:p>
           <a:p>
             <a:pPr>
               <a:spcAft>
-                <a:spcPts val="400"/>
+                <a:spcPts val="250"/>
               </a:spcAft>
             </a:pPr>
             <a:r>
-              <a:rPr sz="1200" b="1" u="sng">
-                <a:solidFill>
-                  <a:srgbClr val="6D28D9"/>
-                </a:solidFill>
-                <a:latin typeface="Arial"/>
-              </a:rPr>
-              <a:t>SHA-256 Cryptographic Vault</a:t>
-            </a:r>
-            <a:r>
-              <a:rPr sz="1150">
-                <a:solidFill>
-                  <a:srgbClr val="334155"/>
-                </a:solidFill>
-                <a:latin typeface="Arial"/>
-              </a:rPr>
-              <a:t> - Immutable Merkle root batch hashing ensuring tamper-proof legal auditability under NDSAP.</a:t>
+              <a:rPr sz="1000" b="1">
+                <a:solidFill>
+                  <a:srgbClr val="0F172A"/>
+                </a:solidFill>
+                <a:latin typeface="Arial"/>
+              </a:rPr>
+              <a:t>• </a:t>
+            </a:r>
+            <a:r>
+              <a:rPr sz="980">
+                <a:solidFill>
+                  <a:srgbClr val="0F172A"/>
+                </a:solidFill>
+                <a:latin typeface="Arial"/>
+              </a:rPr>
+              <a:t>UN/ILO Jevons Index Formula (GMI)</a:t>
+            </a:r>
+          </a:p>
+          <a:p>
+            <a:pPr>
+              <a:spcAft>
+                <a:spcPts val="250"/>
+              </a:spcAft>
+            </a:pPr>
+            <a:r>
+              <a:rPr sz="1000" b="1">
+                <a:solidFill>
+                  <a:srgbClr val="0F172A"/>
+                </a:solidFill>
+                <a:latin typeface="Arial"/>
+              </a:rPr>
+              <a:t>• </a:t>
+            </a:r>
+            <a:r>
+              <a:rPr sz="980">
+                <a:solidFill>
+                  <a:srgbClr val="0F172A"/>
+                </a:solidFill>
+                <a:latin typeface="Arial"/>
+              </a:rPr>
+              <a:t>DGCA Official Route Volume Weighting</a:t>
+            </a:r>
+          </a:p>
+          <a:p>
+            <a:pPr>
+              <a:spcAft>
+                <a:spcPts val="250"/>
+              </a:spcAft>
+            </a:pPr>
+            <a:r>
+              <a:rPr sz="1000" b="1">
+                <a:solidFill>
+                  <a:srgbClr val="0F172A"/>
+                </a:solidFill>
+                <a:latin typeface="Arial"/>
+              </a:rPr>
+              <a:t>• </a:t>
+            </a:r>
+            <a:r>
+              <a:rPr sz="980">
+                <a:solidFill>
+                  <a:srgbClr val="0F172A"/>
+                </a:solidFill>
+                <a:latin typeface="Arial"/>
+              </a:rPr>
+              <a:t>SHA-256 Batch Merkle Audit Ledger</a:t>
             </a:r>
           </a:p>
           <a:p>
             <a:pPr>
               <a:spcBef>
-                <a:spcPts val="1200"/>
+                <a:spcPts val="800"/>
               </a:spcBef>
               <a:spcAft>
-                <a:spcPts val="200"/>
+                <a:spcPts val="300"/>
               </a:spcAft>
             </a:pPr>
             <a:r>
-              <a:rPr sz="1300" b="1">
-                <a:solidFill>
-                  <a:srgbClr val="0F172A"/>
-                </a:solidFill>
-                <a:latin typeface="Arial"/>
-              </a:rPr>
-              <a:t>Cloud Services &amp; Microservices:</a:t>
+              <a:rPr sz="1150" b="1">
+                <a:solidFill>
+                  <a:srgbClr val="10B981"/>
+                </a:solidFill>
+                <a:latin typeface="Arial"/>
+              </a:rPr>
+              <a:t>API, Cloud &amp; Standards:</a:t>
             </a:r>
           </a:p>
           <a:p>
             <a:pPr>
               <a:spcAft>
-                <a:spcPts val="400"/>
+                <a:spcPts val="250"/>
               </a:spcAft>
             </a:pPr>
             <a:r>
-              <a:rPr sz="1200" b="1" u="sng">
-                <a:solidFill>
-                  <a:srgbClr val="6D28D9"/>
-                </a:solidFill>
-                <a:latin typeface="Arial"/>
-              </a:rPr>
-              <a:t>FastAPI &amp; PostgreSQL</a:t>
-            </a:r>
-            <a:r>
-              <a:rPr sz="1150">
-                <a:solidFill>
-                  <a:srgbClr val="334155"/>
-                </a:solidFill>
-                <a:latin typeface="Arial"/>
-              </a:rPr>
-              <a:t> - High-throughput REST API feeding real-time JSON/CSV into MoSPI eSankhyiki with React 19 charts.</a:t>
-            </a:r>
-          </a:p>
-        </p:txBody>
-      </p:sp>
-      <p:sp>
-        <p:nvSpPr>
-          <p:cNvPr id="8" name="TextBox 7"/>
-          <p:cNvSpPr txBox="1"/>
-          <p:nvPr/>
-        </p:nvSpPr>
-        <p:spPr>
-          <a:xfrm>
-            <a:off x="4846320" y="1115568"/>
-            <a:ext cx="6675120" cy="347472"/>
+              <a:rPr sz="1000" b="1">
+                <a:solidFill>
+                  <a:srgbClr val="0F172A"/>
+                </a:solidFill>
+                <a:latin typeface="Arial"/>
+              </a:rPr>
+              <a:t>• </a:t>
+            </a:r>
+            <a:r>
+              <a:rPr sz="980">
+                <a:solidFill>
+                  <a:srgbClr val="0F172A"/>
+                </a:solidFill>
+                <a:latin typeface="Arial"/>
+              </a:rPr>
+              <a:t>FastAPI &amp; Uvicorn Sub-10ms REST APIs</a:t>
+            </a:r>
+          </a:p>
+          <a:p>
+            <a:pPr>
+              <a:spcAft>
+                <a:spcPts val="250"/>
+              </a:spcAft>
+            </a:pPr>
+            <a:r>
+              <a:rPr sz="1000" b="1">
+                <a:solidFill>
+                  <a:srgbClr val="0F172A"/>
+                </a:solidFill>
+                <a:latin typeface="Arial"/>
+              </a:rPr>
+              <a:t>• </a:t>
+            </a:r>
+            <a:r>
+              <a:rPr sz="980">
+                <a:solidFill>
+                  <a:srgbClr val="0F172A"/>
+                </a:solidFill>
+                <a:latin typeface="Arial"/>
+              </a:rPr>
+              <a:t>Vercel Edge &amp; GitHub Actions Daily Cron</a:t>
+            </a:r>
+          </a:p>
+          <a:p>
+            <a:pPr>
+              <a:spcAft>
+                <a:spcPts val="250"/>
+              </a:spcAft>
+            </a:pPr>
+            <a:r>
+              <a:rPr sz="1000" b="1">
+                <a:solidFill>
+                  <a:srgbClr val="0F172A"/>
+                </a:solidFill>
+                <a:latin typeface="Arial"/>
+              </a:rPr>
+              <a:t>• </a:t>
+            </a:r>
+            <a:r>
+              <a:rPr sz="980">
+                <a:solidFill>
+                  <a:srgbClr val="0F172A"/>
+                </a:solidFill>
+                <a:latin typeface="Arial"/>
+              </a:rPr>
+              <a:t>NDSAP Open Data &amp; UN/ILO Ch. 10 Ready</a:t>
+            </a:r>
+          </a:p>
+        </p:txBody>
+      </p:sp>
+      <p:sp>
+        <p:nvSpPr>
+          <p:cNvPr id="8" name="Rectangle 7"/>
+          <p:cNvSpPr/>
+          <p:nvPr/>
+        </p:nvSpPr>
+        <p:spPr>
+          <a:xfrm>
+            <a:off x="3840480" y="1051560"/>
+            <a:ext cx="7845552" cy="5440680"/>
           </a:xfrm>
           <a:prstGeom prst="rect">
             <a:avLst/>
           </a:prstGeom>
-          <a:noFill/>
-        </p:spPr>
-        <p:txBody>
-          <a:bodyPr wrap="none">
-            <a:spAutoFit/>
-          </a:bodyPr>
-          <a:lstStyle/>
-          <a:p>
-            <a:pPr algn="ctr">
-              <a:defRPr sz="1400" b="1">
-                <a:solidFill>
-                  <a:srgbClr val="2563EB"/>
-                </a:solidFill>
-                <a:latin typeface="Arial"/>
-              </a:defRPr>
-            </a:pPr>
-            <a:r>
-              <a:t>PROCESS FLOW ARCHITECTURE</a:t>
-            </a:r>
+          <a:solidFill>
+            <a:srgbClr val="FFFFFF"/>
+          </a:solidFill>
+          <a:ln w="15240">
+            <a:solidFill>
+              <a:srgbClr val="CBD5E1"/>
+            </a:solidFill>
+          </a:ln>
+        </p:spPr>
+        <p:style>
+          <a:lnRef idx="1">
+            <a:schemeClr val="accent1"/>
+          </a:lnRef>
+          <a:fillRef idx="3">
+            <a:schemeClr val="accent1"/>
+          </a:fillRef>
+          <a:effectRef idx="2">
+            <a:schemeClr val="accent1"/>
+          </a:effectRef>
+          <a:fontRef idx="minor">
+            <a:schemeClr val="lt1"/>
+          </a:fontRef>
+        </p:style>
+        <p:txBody>
+          <a:bodyPr rtlCol="0" anchor="ctr"/>
+          <a:lstStyle/>
+          <a:p>
+            <a:pPr algn="ctr"/>
           </a:p>
         </p:txBody>
       </p:sp>
@@ -4714,8 +5030,8 @@
         </p:blipFill>
         <p:spPr>
           <a:xfrm>
-            <a:off x="4846320" y="1481328"/>
-            <a:ext cx="6675120" cy="4160520"/>
+            <a:off x="3968496" y="1216152"/>
+            <a:ext cx="7589520" cy="3238955"/>
           </a:xfrm>
           <a:prstGeom prst="rect">
             <a:avLst/>
@@ -4724,24 +5040,26 @@
       </p:pic>
       <p:sp>
         <p:nvSpPr>
-          <p:cNvPr id="10" name="Rectangle 9"/>
+          <p:cNvPr id="10" name="Rounded Rectangle 9"/>
           <p:cNvSpPr/>
           <p:nvPr/>
         </p:nvSpPr>
         <p:spPr>
           <a:xfrm>
-            <a:off x="4846320" y="5779008"/>
-            <a:ext cx="6675120" cy="713232"/>
-          </a:xfrm>
-          <a:prstGeom prst="rect">
-            <a:avLst/>
+            <a:off x="3977640" y="4637987"/>
+            <a:ext cx="7571232" cy="1717093"/>
+          </a:xfrm>
+          <a:prstGeom prst="roundRect">
+            <a:avLst>
+              <a:gd name="adj" fmla="val 8000"/>
+            </a:avLst>
           </a:prstGeom>
           <a:solidFill>
-            <a:srgbClr val="FFFFFF"/>
+            <a:srgbClr val="F8FAFC"/>
           </a:solidFill>
-          <a:ln w="25400">
+          <a:ln w="15240">
             <a:solidFill>
-              <a:srgbClr val="2563EB"/>
+              <a:srgbClr val="1E40AF"/>
             </a:solidFill>
           </a:ln>
         </p:spPr>
@@ -4775,8 +5093,44 @@
         </p:nvSpPr>
         <p:spPr>
           <a:xfrm>
-            <a:off x="4937760" y="5815584"/>
-            <a:ext cx="6492240" cy="640080"/>
+            <a:off x="4069080" y="4729427"/>
+            <a:ext cx="7388352" cy="274320"/>
+          </a:xfrm>
+          <a:prstGeom prst="rect">
+            <a:avLst/>
+          </a:prstGeom>
+          <a:noFill/>
+        </p:spPr>
+        <p:txBody>
+          <a:bodyPr wrap="none">
+            <a:spAutoFit/>
+          </a:bodyPr>
+          <a:lstStyle/>
+          <a:p>
+            <a:pPr algn="ctr">
+              <a:defRPr sz="1150" b="1">
+                <a:solidFill>
+                  <a:srgbClr val="1E40AF"/>
+                </a:solidFill>
+                <a:latin typeface="Arial"/>
+              </a:defRPr>
+            </a:pPr>
+            <a:r>
+              <a:t>Core Engineering Benchmarks &amp; Architectural Guarantees</a:t>
+            </a:r>
+          </a:p>
+        </p:txBody>
+      </p:sp>
+      <p:sp>
+        <p:nvSpPr>
+          <p:cNvPr id="12" name="TextBox 11"/>
+          <p:cNvSpPr txBox="1"/>
+          <p:nvPr/>
+        </p:nvSpPr>
+        <p:spPr>
+          <a:xfrm>
+            <a:off x="4069080" y="5076899"/>
+            <a:ext cx="1773936" cy="1051560"/>
           </a:xfrm>
           <a:prstGeom prst="rect">
             <a:avLst/>
@@ -4789,24 +5143,252 @@
           </a:bodyPr>
           <a:lstStyle/>
           <a:p>
-            <a:pPr algn="ctr"/>
-            <a:r>
-              <a:rPr sz="1200" b="1">
+            <a:pPr algn="ctr">
+              <a:spcAft>
+                <a:spcPts val="300"/>
+              </a:spcAft>
+              <a:defRPr sz="919" b="1">
+                <a:solidFill>
+                  <a:srgbClr val="1B365D"/>
+                </a:solidFill>
+                <a:latin typeface="Arial"/>
+              </a:defRPr>
+            </a:pPr>
+            <a:r>
+              <a:t>Harvester Run SLA</a:t>
+            </a:r>
+          </a:p>
+          <a:p>
+            <a:pPr algn="ctr">
+              <a:spcAft>
+                <a:spcPts val="300"/>
+              </a:spcAft>
+              <a:defRPr sz="1150" b="1">
+                <a:solidFill>
+                  <a:srgbClr val="10B981"/>
+                </a:solidFill>
+                <a:latin typeface="Arial"/>
+              </a:defRPr>
+            </a:pPr>
+            <a:r>
+              <a:t>&lt; 18 Minutes</a:t>
+            </a:r>
+          </a:p>
+          <a:p>
+            <a:pPr algn="ctr">
+              <a:defRPr sz="819">
                 <a:solidFill>
                   <a:srgbClr val="0F172A"/>
                 </a:solidFill>
                 <a:latin typeface="Arial"/>
-              </a:rPr>
-              <a:t>Product Status: </a:t>
-            </a:r>
-            <a:r>
-              <a:rPr sz="1100">
-                <a:solidFill>
-                  <a:srgbClr val="334155"/>
-                </a:solidFill>
-                <a:latin typeface="Arial"/>
-              </a:rPr>
-              <a:t>100% Production-Ready Working Prototype Deployed on Vercel Edge. Full REST API (/api/v1/apix/*), SHA-256 Provenance Vault, and 100% Passing Test Suite Verified.</a:t>
+              </a:defRPr>
+            </a:pPr>
+            <a:r>
+              <a:t>10,000+ daily live fares</a:t>
+            </a:r>
+          </a:p>
+        </p:txBody>
+      </p:sp>
+      <p:sp>
+        <p:nvSpPr>
+          <p:cNvPr id="13" name="TextBox 12"/>
+          <p:cNvSpPr txBox="1"/>
+          <p:nvPr/>
+        </p:nvSpPr>
+        <p:spPr>
+          <a:xfrm>
+            <a:off x="5916168" y="5076899"/>
+            <a:ext cx="1773936" cy="1051560"/>
+          </a:xfrm>
+          <a:prstGeom prst="rect">
+            <a:avLst/>
+          </a:prstGeom>
+          <a:noFill/>
+        </p:spPr>
+        <p:txBody>
+          <a:bodyPr wrap="square" lIns="0" tIns="0" rIns="0" bIns="0">
+            <a:spAutoFit/>
+          </a:bodyPr>
+          <a:lstStyle/>
+          <a:p>
+            <a:pPr algn="ctr">
+              <a:spcAft>
+                <a:spcPts val="300"/>
+              </a:spcAft>
+              <a:defRPr sz="919" b="1">
+                <a:solidFill>
+                  <a:srgbClr val="1B365D"/>
+                </a:solidFill>
+                <a:latin typeface="Arial"/>
+              </a:defRPr>
+            </a:pPr>
+            <a:r>
+              <a:t>Dynamic IQR Filter</a:t>
+            </a:r>
+          </a:p>
+          <a:p>
+            <a:pPr algn="ctr">
+              <a:spcAft>
+                <a:spcPts val="300"/>
+              </a:spcAft>
+              <a:defRPr sz="1150" b="1">
+                <a:solidFill>
+                  <a:srgbClr val="DC2626"/>
+                </a:solidFill>
+                <a:latin typeface="Arial"/>
+              </a:defRPr>
+            </a:pPr>
+            <a:r>
+              <a:t>SciPy Scrubber</a:t>
+            </a:r>
+          </a:p>
+          <a:p>
+            <a:pPr algn="ctr">
+              <a:defRPr sz="819">
+                <a:solidFill>
+                  <a:srgbClr val="0F172A"/>
+                </a:solidFill>
+                <a:latin typeface="Arial"/>
+              </a:defRPr>
+            </a:pPr>
+            <a:r>
+              <a:t>Purges phantom taxes &amp; surge</a:t>
+            </a:r>
+          </a:p>
+        </p:txBody>
+      </p:sp>
+      <p:sp>
+        <p:nvSpPr>
+          <p:cNvPr id="14" name="TextBox 13"/>
+          <p:cNvSpPr txBox="1"/>
+          <p:nvPr/>
+        </p:nvSpPr>
+        <p:spPr>
+          <a:xfrm>
+            <a:off x="7763256" y="5076899"/>
+            <a:ext cx="1773936" cy="1051560"/>
+          </a:xfrm>
+          <a:prstGeom prst="rect">
+            <a:avLst/>
+          </a:prstGeom>
+          <a:noFill/>
+        </p:spPr>
+        <p:txBody>
+          <a:bodyPr wrap="square" lIns="0" tIns="0" rIns="0" bIns="0">
+            <a:spAutoFit/>
+          </a:bodyPr>
+          <a:lstStyle/>
+          <a:p>
+            <a:pPr algn="ctr">
+              <a:spcAft>
+                <a:spcPts val="300"/>
+              </a:spcAft>
+              <a:defRPr sz="919" b="1">
+                <a:solidFill>
+                  <a:srgbClr val="1B365D"/>
+                </a:solidFill>
+                <a:latin typeface="Arial"/>
+              </a:defRPr>
+            </a:pPr>
+            <a:r>
+              <a:t>Axiomatic Rigor</a:t>
+            </a:r>
+          </a:p>
+          <a:p>
+            <a:pPr algn="ctr">
+              <a:spcAft>
+                <a:spcPts val="300"/>
+              </a:spcAft>
+              <a:defRPr sz="1150" b="1">
+                <a:solidFill>
+                  <a:srgbClr val="10B981"/>
+                </a:solidFill>
+                <a:latin typeface="Arial"/>
+              </a:defRPr>
+            </a:pPr>
+            <a:r>
+              <a:t>0.00% Bias</a:t>
+            </a:r>
+          </a:p>
+          <a:p>
+            <a:pPr algn="ctr">
+              <a:defRPr sz="819">
+                <a:solidFill>
+                  <a:srgbClr val="0F172A"/>
+                </a:solidFill>
+                <a:latin typeface="Arial"/>
+              </a:defRPr>
+            </a:pPr>
+            <a:r>
+              <a:t>UN/ILO Jevons Geometric Mean</a:t>
+            </a:r>
+          </a:p>
+        </p:txBody>
+      </p:sp>
+      <p:sp>
+        <p:nvSpPr>
+          <p:cNvPr id="15" name="TextBox 14"/>
+          <p:cNvSpPr txBox="1"/>
+          <p:nvPr/>
+        </p:nvSpPr>
+        <p:spPr>
+          <a:xfrm>
+            <a:off x="9610344" y="5076899"/>
+            <a:ext cx="1773936" cy="1051560"/>
+          </a:xfrm>
+          <a:prstGeom prst="rect">
+            <a:avLst/>
+          </a:prstGeom>
+          <a:noFill/>
+        </p:spPr>
+        <p:txBody>
+          <a:bodyPr wrap="square" lIns="0" tIns="0" rIns="0" bIns="0">
+            <a:spAutoFit/>
+          </a:bodyPr>
+          <a:lstStyle/>
+          <a:p>
+            <a:pPr algn="ctr">
+              <a:spcAft>
+                <a:spcPts val="300"/>
+              </a:spcAft>
+              <a:defRPr sz="919" b="1">
+                <a:solidFill>
+                  <a:srgbClr val="1B365D"/>
+                </a:solidFill>
+                <a:latin typeface="Arial"/>
+              </a:defRPr>
+            </a:pPr>
+            <a:r>
+              <a:t>REST API Delivery</a:t>
+            </a:r>
+          </a:p>
+          <a:p>
+            <a:pPr algn="ctr">
+              <a:spcAft>
+                <a:spcPts val="300"/>
+              </a:spcAft>
+              <a:defRPr sz="1150" b="1">
+                <a:solidFill>
+                  <a:srgbClr val="10B981"/>
+                </a:solidFill>
+                <a:latin typeface="Arial"/>
+              </a:defRPr>
+            </a:pPr>
+            <a:r>
+              <a:t>&lt; 10ms Latency</a:t>
+            </a:r>
+          </a:p>
+          <a:p>
+            <a:pPr algn="ctr">
+              <a:defRPr sz="819">
+                <a:solidFill>
+                  <a:srgbClr val="0F172A"/>
+                </a:solidFill>
+                <a:latin typeface="Arial"/>
+              </a:defRPr>
+            </a:pPr>
+            <a:r>
+              <a:t>MoSPI eSankhyiki CSV/JSON</a:t>
             </a:r>
           </a:p>
         </p:txBody>
@@ -4880,8 +5462,8 @@
         </p:nvSpPr>
         <p:spPr>
           <a:xfrm>
-            <a:off x="548640" y="201168"/>
-            <a:ext cx="1645920" cy="566928"/>
+            <a:off x="502920" y="201168"/>
+            <a:ext cx="1645920" cy="502920"/>
           </a:xfrm>
           <a:prstGeom prst="roundRect">
             <a:avLst>
@@ -4893,7 +5475,7 @@
           </a:solidFill>
           <a:ln w="19050">
             <a:solidFill>
-              <a:srgbClr val="4338CA"/>
+              <a:srgbClr val="64748B"/>
             </a:solidFill>
           </a:ln>
         </p:spPr>
@@ -4916,15 +5498,15 @@
           <a:lstStyle/>
           <a:p>
             <a:pPr algn="ctr">
-              <a:defRPr sz="1200" b="1">
-                <a:solidFill>
-                  <a:srgbClr val="4338CA"/>
+              <a:defRPr sz="1300" b="1">
+                <a:solidFill>
+                  <a:srgbClr val="000000"/>
                 </a:solidFill>
                 <a:latin typeface="Arial"/>
               </a:defRPr>
             </a:pPr>
             <a:r>
-              <a:t>Team Rookie</a:t>
+              <a:t>Roorkies</a:t>
             </a:r>
           </a:p>
         </p:txBody>
@@ -4937,7 +5519,7 @@
         </p:nvSpPr>
         <p:spPr>
           <a:xfrm>
-            <a:off x="2286000" y="137160"/>
+            <a:off x="2286000" y="109728"/>
             <a:ext cx="7589520" cy="868680"/>
           </a:xfrm>
           <a:prstGeom prst="rect">
@@ -4952,7 +5534,7 @@
           <a:lstStyle/>
           <a:p>
             <a:pPr algn="ctr">
-              <a:defRPr sz="2600" b="1">
+              <a:defRPr sz="2500" b="1">
                 <a:solidFill>
                   <a:srgbClr val="1B365D"/>
                 </a:solidFill>
@@ -4965,22 +5547,22 @@
           </a:p>
           <a:p>
             <a:pPr algn="ctr">
-              <a:defRPr sz="1200" b="1">
-                <a:solidFill>
-                  <a:srgbClr val="184C94"/>
-                </a:solidFill>
-                <a:latin typeface="Arial"/>
+              <a:defRPr sz="1800" b="1">
+                <a:solidFill>
+                  <a:srgbClr val="1E40AF"/>
+                </a:solidFill>
+                <a:latin typeface="Times New Roman"/>
               </a:defRPr>
             </a:pPr>
             <a:r>
-              <a:t>Technical Resilience, Operational Economy &amp; Legal Standards</a:t>
+              <a:t>PRACTICAL • SCALABLE • SUSTAINABLE IMPACT</a:t>
             </a:r>
           </a:p>
         </p:txBody>
       </p:sp>
       <p:pic>
         <p:nvPicPr>
-          <p:cNvPr id="5" name="Picture 4" descr="sih_2026_logo_hd.png"/>
+          <p:cNvPr id="5" name="Picture 4" descr="page_1_img_2.png"/>
           <p:cNvPicPr>
             <a:picLocks noChangeAspect="1"/>
           </p:cNvPicPr>
@@ -4994,7 +5576,7 @@
         </p:blipFill>
         <p:spPr>
           <a:xfrm>
-            <a:off x="10149840" y="146304"/>
+            <a:off x="10149840" y="109728"/>
             <a:ext cx="1645920" cy="777240"/>
           </a:xfrm>
           <a:prstGeom prst="rect">
@@ -5010,20 +5592,20 @@
         </p:nvSpPr>
         <p:spPr>
           <a:xfrm>
-            <a:off x="640080" y="1188720"/>
-            <a:ext cx="3474720" cy="1005840"/>
+            <a:off x="594360" y="1024128"/>
+            <a:ext cx="3401568" cy="4279392"/>
           </a:xfrm>
           <a:prstGeom prst="roundRect">
             <a:avLst>
-              <a:gd name="adj" fmla="val 12000"/>
+              <a:gd name="adj" fmla="val 3000"/>
             </a:avLst>
           </a:prstGeom>
           <a:solidFill>
-            <a:srgbClr val="EFF6FF"/>
+            <a:srgbClr val="FFFFFF"/>
           </a:solidFill>
           <a:ln w="19050">
             <a:solidFill>
-              <a:srgbClr val="1E3A8A"/>
+              <a:srgbClr val="2563EB"/>
             </a:solidFill>
           </a:ln>
         </p:spPr>
@@ -5051,76 +5633,25 @@
       </p:sp>
       <p:sp>
         <p:nvSpPr>
-          <p:cNvPr id="7" name="TextBox 6"/>
-          <p:cNvSpPr txBox="1"/>
-          <p:nvPr/>
-        </p:nvSpPr>
-        <p:spPr>
-          <a:xfrm>
-            <a:off x="777240" y="1261872"/>
-            <a:ext cx="3200400" cy="868680"/>
-          </a:xfrm>
-          <a:prstGeom prst="rect">
-            <a:avLst/>
-          </a:prstGeom>
-          <a:noFill/>
-        </p:spPr>
-        <p:txBody>
-          <a:bodyPr wrap="square" lIns="0" rIns="0" tIns="0" bIns="0">
-            <a:spAutoFit/>
-          </a:bodyPr>
-          <a:lstStyle/>
-          <a:p>
-            <a:pPr algn="ctr">
-              <a:defRPr sz="1200" b="1">
-                <a:solidFill>
-                  <a:srgbClr val="1E3A8A"/>
-                </a:solidFill>
-                <a:latin typeface="Arial"/>
-              </a:defRPr>
-            </a:pPr>
-            <a:r>
-              <a:t>⚡ 100% AUTOMATED CRAWLER</a:t>
-            </a:r>
-          </a:p>
-          <a:p>
-            <a:pPr algn="ctr">
-              <a:defRPr sz="1000">
-                <a:solidFill>
-                  <a:srgbClr val="334155"/>
-                </a:solidFill>
-                <a:latin typeface="Arial"/>
-              </a:defRPr>
-            </a:pPr>
-            <a:r>
-              <a:t>Zero human field surveyor visits required; daily autonomous scraping</a:t>
-            </a:r>
-          </a:p>
-        </p:txBody>
-      </p:sp>
-      <p:sp>
-        <p:nvSpPr>
-          <p:cNvPr id="8" name="Rounded Rectangle 7"/>
+          <p:cNvPr id="7" name="Rounded Rectangle 6"/>
           <p:cNvSpPr/>
           <p:nvPr/>
         </p:nvSpPr>
         <p:spPr>
           <a:xfrm>
-            <a:off x="4343400" y="1188720"/>
-            <a:ext cx="3474720" cy="1005840"/>
+            <a:off x="594360" y="1024128"/>
+            <a:ext cx="3401568" cy="502920"/>
           </a:xfrm>
           <a:prstGeom prst="roundRect">
             <a:avLst>
-              <a:gd name="adj" fmla="val 12000"/>
+              <a:gd name="adj" fmla="val 20000"/>
             </a:avLst>
           </a:prstGeom>
           <a:solidFill>
-            <a:srgbClr val="FEF2F2"/>
+            <a:srgbClr val="2563EB"/>
           </a:solidFill>
-          <a:ln w="19050">
-            <a:solidFill>
-              <a:srgbClr val="991B1B"/>
-            </a:solidFill>
+          <a:ln>
+            <a:noFill/>
           </a:ln>
         </p:spPr>
         <p:style>
@@ -5141,69 +5672,43 @@
           <a:bodyPr rtlCol="0" anchor="ctr"/>
           <a:lstStyle/>
           <a:p>
-            <a:pPr algn="ctr"/>
-          </a:p>
-        </p:txBody>
-      </p:sp>
-      <p:sp>
-        <p:nvSpPr>
-          <p:cNvPr id="9" name="TextBox 8"/>
-          <p:cNvSpPr txBox="1"/>
-          <p:nvPr/>
-        </p:nvSpPr>
-        <p:spPr>
-          <a:xfrm>
-            <a:off x="4480560" y="1261872"/>
-            <a:ext cx="3200400" cy="868680"/>
-          </a:xfrm>
-          <a:prstGeom prst="rect">
-            <a:avLst/>
-          </a:prstGeom>
-          <a:noFill/>
-        </p:spPr>
-        <p:txBody>
-          <a:bodyPr wrap="square" lIns="0" rIns="0" tIns="0" bIns="0">
-            <a:spAutoFit/>
-          </a:bodyPr>
-          <a:lstStyle/>
-          <a:p>
             <a:pPr algn="ctr">
-              <a:defRPr sz="1200" b="1">
-                <a:solidFill>
-                  <a:srgbClr val="991B1B"/>
+              <a:defRPr sz="1000" b="1">
+                <a:solidFill>
+                  <a:srgbClr val="FFFFFF"/>
                 </a:solidFill>
                 <a:latin typeface="Arial"/>
               </a:defRPr>
             </a:pPr>
             <a:r>
-              <a:t>⚡ UN/ILO CHAPTER 10 COMPLIANT</a:t>
+              <a:t>⚙️ FEASIBILITY ANALYSIS</a:t>
             </a:r>
           </a:p>
           <a:p>
             <a:pPr algn="ctr">
-              <a:defRPr sz="1000">
-                <a:solidFill>
-                  <a:srgbClr val="334155"/>
+              <a:defRPr sz="800">
+                <a:solidFill>
+                  <a:srgbClr val="F1F5F9"/>
                 </a:solidFill>
                 <a:latin typeface="Arial"/>
               </a:defRPr>
             </a:pPr>
             <a:r>
-              <a:t>Mathematically proven Jevons index eliminates substitution bias</a:t>
-            </a:r>
-          </a:p>
-        </p:txBody>
-      </p:sp>
-      <p:sp>
-        <p:nvSpPr>
-          <p:cNvPr id="10" name="Rounded Rectangle 9"/>
+              <a:t>PRACTICAL TO IMPLEMENT</a:t>
+            </a:r>
+          </a:p>
+        </p:txBody>
+      </p:sp>
+      <p:sp>
+        <p:nvSpPr>
+          <p:cNvPr id="8" name="Rounded Rectangle 7"/>
           <p:cNvSpPr/>
           <p:nvPr/>
         </p:nvSpPr>
         <p:spPr>
           <a:xfrm>
-            <a:off x="8046720" y="1188720"/>
-            <a:ext cx="3474720" cy="1005840"/>
+            <a:off x="704088" y="1591056"/>
+            <a:ext cx="3182112" cy="822960"/>
           </a:xfrm>
           <a:prstGeom prst="roundRect">
             <a:avLst>
@@ -5211,11 +5716,11 @@
             </a:avLst>
           </a:prstGeom>
           <a:solidFill>
-            <a:srgbClr val="F0FDF4"/>
+            <a:srgbClr val="EFF6FF"/>
           </a:solidFill>
-          <a:ln w="19050">
+          <a:ln w="12700">
             <a:solidFill>
-              <a:srgbClr val="166534"/>
+              <a:srgbClr val="2563EB"/>
             </a:solidFill>
           </a:ln>
         </p:spPr>
@@ -5243,14 +5748,14 @@
       </p:sp>
       <p:sp>
         <p:nvSpPr>
-          <p:cNvPr id="11" name="TextBox 10"/>
+          <p:cNvPr id="9" name="TextBox 8"/>
           <p:cNvSpPr txBox="1"/>
           <p:nvPr/>
         </p:nvSpPr>
         <p:spPr>
           <a:xfrm>
-            <a:off x="8183880" y="1261872"/>
-            <a:ext cx="3200400" cy="868680"/>
+            <a:off x="758952" y="1636776"/>
+            <a:ext cx="3072384" cy="713232"/>
           </a:xfrm>
           <a:prstGeom prst="rect">
             <a:avLst/>
@@ -5263,29 +5768,125 @@
           </a:bodyPr>
           <a:lstStyle/>
           <a:p>
-            <a:pPr algn="ctr">
-              <a:defRPr sz="1200" b="1">
-                <a:solidFill>
-                  <a:srgbClr val="166534"/>
+            <a:pPr>
+              <a:defRPr sz="950" b="1">
+                <a:solidFill>
+                  <a:srgbClr val="2563EB"/>
                 </a:solidFill>
                 <a:latin typeface="Arial"/>
               </a:defRPr>
             </a:pPr>
             <a:r>
-              <a:t>⚡ &lt; ₹3,500 / MONTH CLOUD COST</a:t>
-            </a:r>
-          </a:p>
-          <a:p>
-            <a:pPr algn="ctr">
-              <a:defRPr sz="1000">
-                <a:solidFill>
-                  <a:srgbClr val="334155"/>
+              <a:t>♻️ Infrastructure Reusability</a:t>
+            </a:r>
+          </a:p>
+          <a:p>
+            <a:pPr>
+              <a:defRPr sz="800">
+                <a:solidFill>
+                  <a:srgbClr val="0F172A"/>
                 </a:solidFill>
                 <a:latin typeface="Arial"/>
               </a:defRPr>
             </a:pPr>
             <a:r>
-              <a:t>Ultra-low serverless footprint delivering &gt;95% recurring cost savings</a:t>
+              <a:t>Leverages standard serverless cloud and public web portals; zero airport hardware installation required.</a:t>
+            </a:r>
+          </a:p>
+        </p:txBody>
+      </p:sp>
+      <p:sp>
+        <p:nvSpPr>
+          <p:cNvPr id="10" name="Rounded Rectangle 9"/>
+          <p:cNvSpPr/>
+          <p:nvPr/>
+        </p:nvSpPr>
+        <p:spPr>
+          <a:xfrm>
+            <a:off x="704088" y="2487168"/>
+            <a:ext cx="3182112" cy="822960"/>
+          </a:xfrm>
+          <a:prstGeom prst="roundRect">
+            <a:avLst>
+              <a:gd name="adj" fmla="val 12000"/>
+            </a:avLst>
+          </a:prstGeom>
+          <a:solidFill>
+            <a:srgbClr val="EFF6FF"/>
+          </a:solidFill>
+          <a:ln w="12700">
+            <a:solidFill>
+              <a:srgbClr val="2563EB"/>
+            </a:solidFill>
+          </a:ln>
+        </p:spPr>
+        <p:style>
+          <a:lnRef idx="1">
+            <a:schemeClr val="accent1"/>
+          </a:lnRef>
+          <a:fillRef idx="3">
+            <a:schemeClr val="accent1"/>
+          </a:fillRef>
+          <a:effectRef idx="2">
+            <a:schemeClr val="accent1"/>
+          </a:effectRef>
+          <a:fontRef idx="minor">
+            <a:schemeClr val="lt1"/>
+          </a:fontRef>
+        </p:style>
+        <p:txBody>
+          <a:bodyPr rtlCol="0" anchor="ctr"/>
+          <a:lstStyle/>
+          <a:p>
+            <a:pPr algn="ctr"/>
+          </a:p>
+        </p:txBody>
+      </p:sp>
+      <p:sp>
+        <p:nvSpPr>
+          <p:cNvPr id="11" name="TextBox 10"/>
+          <p:cNvSpPr txBox="1"/>
+          <p:nvPr/>
+        </p:nvSpPr>
+        <p:spPr>
+          <a:xfrm>
+            <a:off x="758952" y="2532888"/>
+            <a:ext cx="3072384" cy="713232"/>
+          </a:xfrm>
+          <a:prstGeom prst="rect">
+            <a:avLst/>
+          </a:prstGeom>
+          <a:noFill/>
+        </p:spPr>
+        <p:txBody>
+          <a:bodyPr wrap="square" lIns="0" rIns="0" tIns="0" bIns="0">
+            <a:spAutoFit/>
+          </a:bodyPr>
+          <a:lstStyle/>
+          <a:p>
+            <a:pPr>
+              <a:defRPr sz="950" b="1">
+                <a:solidFill>
+                  <a:srgbClr val="2563EB"/>
+                </a:solidFill>
+                <a:latin typeface="Arial"/>
+              </a:defRPr>
+            </a:pPr>
+            <a:r>
+              <a:t>📈 Scalable Deployment</a:t>
+            </a:r>
+          </a:p>
+          <a:p>
+            <a:pPr>
+              <a:defRPr sz="800">
+                <a:solidFill>
+                  <a:srgbClr val="0F172A"/>
+                </a:solidFill>
+                <a:latin typeface="Arial"/>
+              </a:defRPr>
+            </a:pPr>
+            <a:r>
+              <a:t>Deployed across 12 core metro routes initially and seamlessly scalable nationwide to 250+ UDAN regional corridors.</a:t>
             </a:r>
           </a:p>
         </p:txBody>
@@ -5298,12 +5899,204 @@
         </p:nvSpPr>
         <p:spPr>
           <a:xfrm>
-            <a:off x="640080" y="2377440"/>
-            <a:ext cx="3474720" cy="4114800"/>
+            <a:off x="704088" y="3383280"/>
+            <a:ext cx="3182112" cy="822960"/>
           </a:xfrm>
           <a:prstGeom prst="roundRect">
             <a:avLst>
-              <a:gd name="adj" fmla="val 4000"/>
+              <a:gd name="adj" fmla="val 12000"/>
+            </a:avLst>
+          </a:prstGeom>
+          <a:solidFill>
+            <a:srgbClr val="EFF6FF"/>
+          </a:solidFill>
+          <a:ln w="12700">
+            <a:solidFill>
+              <a:srgbClr val="2563EB"/>
+            </a:solidFill>
+          </a:ln>
+        </p:spPr>
+        <p:style>
+          <a:lnRef idx="1">
+            <a:schemeClr val="accent1"/>
+          </a:lnRef>
+          <a:fillRef idx="3">
+            <a:schemeClr val="accent1"/>
+          </a:fillRef>
+          <a:effectRef idx="2">
+            <a:schemeClr val="accent1"/>
+          </a:effectRef>
+          <a:fontRef idx="minor">
+            <a:schemeClr val="lt1"/>
+          </a:fontRef>
+        </p:style>
+        <p:txBody>
+          <a:bodyPr rtlCol="0" anchor="ctr"/>
+          <a:lstStyle/>
+          <a:p>
+            <a:pPr algn="ctr"/>
+          </a:p>
+        </p:txBody>
+      </p:sp>
+      <p:sp>
+        <p:nvSpPr>
+          <p:cNvPr id="13" name="TextBox 12"/>
+          <p:cNvSpPr txBox="1"/>
+          <p:nvPr/>
+        </p:nvSpPr>
+        <p:spPr>
+          <a:xfrm>
+            <a:off x="758952" y="3429000"/>
+            <a:ext cx="3072384" cy="713232"/>
+          </a:xfrm>
+          <a:prstGeom prst="rect">
+            <a:avLst/>
+          </a:prstGeom>
+          <a:noFill/>
+        </p:spPr>
+        <p:txBody>
+          <a:bodyPr wrap="square" lIns="0" rIns="0" tIns="0" bIns="0">
+            <a:spAutoFit/>
+          </a:bodyPr>
+          <a:lstStyle/>
+          <a:p>
+            <a:pPr>
+              <a:defRPr sz="950" b="1">
+                <a:solidFill>
+                  <a:srgbClr val="2563EB"/>
+                </a:solidFill>
+                <a:latin typeface="Arial"/>
+              </a:defRPr>
+            </a:pPr>
+            <a:r>
+              <a:t>💰 Cost-Effectiveness</a:t>
+            </a:r>
+          </a:p>
+          <a:p>
+            <a:pPr>
+              <a:defRPr sz="800">
+                <a:solidFill>
+                  <a:srgbClr val="0F172A"/>
+                </a:solidFill>
+                <a:latin typeface="Arial"/>
+              </a:defRPr>
+            </a:pPr>
+            <a:r>
+              <a:t>Entire pipeline operates under ₹3,500/month, compared to multi-crore physical surveyor field logistics.</a:t>
+            </a:r>
+          </a:p>
+        </p:txBody>
+      </p:sp>
+      <p:sp>
+        <p:nvSpPr>
+          <p:cNvPr id="14" name="Rounded Rectangle 13"/>
+          <p:cNvSpPr/>
+          <p:nvPr/>
+        </p:nvSpPr>
+        <p:spPr>
+          <a:xfrm>
+            <a:off x="704088" y="4279392"/>
+            <a:ext cx="3182112" cy="822960"/>
+          </a:xfrm>
+          <a:prstGeom prst="roundRect">
+            <a:avLst>
+              <a:gd name="adj" fmla="val 12000"/>
+            </a:avLst>
+          </a:prstGeom>
+          <a:solidFill>
+            <a:srgbClr val="EFF6FF"/>
+          </a:solidFill>
+          <a:ln w="12700">
+            <a:solidFill>
+              <a:srgbClr val="2563EB"/>
+            </a:solidFill>
+          </a:ln>
+        </p:spPr>
+        <p:style>
+          <a:lnRef idx="1">
+            <a:schemeClr val="accent1"/>
+          </a:lnRef>
+          <a:fillRef idx="3">
+            <a:schemeClr val="accent1"/>
+          </a:fillRef>
+          <a:effectRef idx="2">
+            <a:schemeClr val="accent1"/>
+          </a:effectRef>
+          <a:fontRef idx="minor">
+            <a:schemeClr val="lt1"/>
+          </a:fontRef>
+        </p:style>
+        <p:txBody>
+          <a:bodyPr rtlCol="0" anchor="ctr"/>
+          <a:lstStyle/>
+          <a:p>
+            <a:pPr algn="ctr"/>
+          </a:p>
+        </p:txBody>
+      </p:sp>
+      <p:sp>
+        <p:nvSpPr>
+          <p:cNvPr id="15" name="TextBox 14"/>
+          <p:cNvSpPr txBox="1"/>
+          <p:nvPr/>
+        </p:nvSpPr>
+        <p:spPr>
+          <a:xfrm>
+            <a:off x="758952" y="4325112"/>
+            <a:ext cx="3072384" cy="713232"/>
+          </a:xfrm>
+          <a:prstGeom prst="rect">
+            <a:avLst/>
+          </a:prstGeom>
+          <a:noFill/>
+        </p:spPr>
+        <p:txBody>
+          <a:bodyPr wrap="square" lIns="0" rIns="0" tIns="0" bIns="0">
+            <a:spAutoFit/>
+          </a:bodyPr>
+          <a:lstStyle/>
+          <a:p>
+            <a:pPr>
+              <a:defRPr sz="950" b="1">
+                <a:solidFill>
+                  <a:srgbClr val="2563EB"/>
+                </a:solidFill>
+                <a:latin typeface="Arial"/>
+              </a:defRPr>
+            </a:pPr>
+            <a:r>
+              <a:t>🎯 Authority Integration</a:t>
+            </a:r>
+          </a:p>
+          <a:p>
+            <a:pPr>
+              <a:defRPr sz="800">
+                <a:solidFill>
+                  <a:srgbClr val="0F172A"/>
+                </a:solidFill>
+                <a:latin typeface="Arial"/>
+              </a:defRPr>
+            </a:pPr>
+            <a:r>
+              <a:t>Native REST API and JSON feeds integrate directly into MoSPI eSankhyiki, RBI MPC, and DGCA portals.</a:t>
+            </a:r>
+          </a:p>
+        </p:txBody>
+      </p:sp>
+      <p:sp>
+        <p:nvSpPr>
+          <p:cNvPr id="16" name="Rounded Rectangle 15"/>
+          <p:cNvSpPr/>
+          <p:nvPr/>
+        </p:nvSpPr>
+        <p:spPr>
+          <a:xfrm>
+            <a:off x="4389120" y="1024128"/>
+            <a:ext cx="3401568" cy="4279392"/>
+          </a:xfrm>
+          <a:prstGeom prst="roundRect">
+            <a:avLst>
+              <a:gd name="adj" fmla="val 3000"/>
             </a:avLst>
           </a:prstGeom>
           <a:solidFill>
@@ -5311,7 +6104,7 @@
           </a:solidFill>
           <a:ln w="19050">
             <a:solidFill>
-              <a:srgbClr val="1E3A8A"/>
+              <a:srgbClr val="16A34A"/>
             </a:solidFill>
           </a:ln>
         </p:spPr>
@@ -5339,14 +6132,14 @@
       </p:sp>
       <p:sp>
         <p:nvSpPr>
-          <p:cNvPr id="13" name="Rounded Rectangle 12"/>
+          <p:cNvPr id="17" name="Rounded Rectangle 16"/>
           <p:cNvSpPr/>
           <p:nvPr/>
         </p:nvSpPr>
         <p:spPr>
           <a:xfrm>
-            <a:off x="640080" y="2377440"/>
-            <a:ext cx="3474720" cy="502920"/>
+            <a:off x="4389120" y="1024128"/>
+            <a:ext cx="3401568" cy="502920"/>
           </a:xfrm>
           <a:prstGeom prst="roundRect">
             <a:avLst>
@@ -5354,7 +6147,7 @@
             </a:avLst>
           </a:prstGeom>
           <a:solidFill>
-            <a:srgbClr val="1E3A8A"/>
+            <a:srgbClr val="16A34A"/>
           </a:solidFill>
           <a:ln>
             <a:noFill/>
@@ -5379,7 +6172,7 @@
           <a:lstStyle/>
           <a:p>
             <a:pPr algn="ctr">
-              <a:defRPr sz="1300" b="1">
+              <a:defRPr sz="1000" b="1">
                 <a:solidFill>
                   <a:srgbClr val="FFFFFF"/>
                 </a:solidFill>
@@ -5387,21 +6180,81 @@
               </a:defRPr>
             </a:pPr>
             <a:r>
-              <a:t>TECHNICAL FEASIBILITY</a:t>
-            </a:r>
-          </a:p>
-        </p:txBody>
-      </p:sp>
-      <p:sp>
-        <p:nvSpPr>
-          <p:cNvPr id="14" name="TextBox 13"/>
+              <a:t>✔️ VIABILITY</a:t>
+            </a:r>
+          </a:p>
+          <a:p>
+            <a:pPr algn="ctr">
+              <a:defRPr sz="800">
+                <a:solidFill>
+                  <a:srgbClr val="F1F5F9"/>
+                </a:solidFill>
+                <a:latin typeface="Arial"/>
+              </a:defRPr>
+            </a:pPr>
+            <a:r>
+              <a:t>PROVEN, RELIABLE &amp; TRUSTWORTHY</a:t>
+            </a:r>
+          </a:p>
+        </p:txBody>
+      </p:sp>
+      <p:sp>
+        <p:nvSpPr>
+          <p:cNvPr id="18" name="Rounded Rectangle 17"/>
+          <p:cNvSpPr/>
+          <p:nvPr/>
+        </p:nvSpPr>
+        <p:spPr>
+          <a:xfrm>
+            <a:off x="4498848" y="1591056"/>
+            <a:ext cx="3182112" cy="822960"/>
+          </a:xfrm>
+          <a:prstGeom prst="roundRect">
+            <a:avLst>
+              <a:gd name="adj" fmla="val 12000"/>
+            </a:avLst>
+          </a:prstGeom>
+          <a:solidFill>
+            <a:srgbClr val="F0FDF4"/>
+          </a:solidFill>
+          <a:ln w="12700">
+            <a:solidFill>
+              <a:srgbClr val="16A34A"/>
+            </a:solidFill>
+          </a:ln>
+        </p:spPr>
+        <p:style>
+          <a:lnRef idx="1">
+            <a:schemeClr val="accent1"/>
+          </a:lnRef>
+          <a:fillRef idx="3">
+            <a:schemeClr val="accent1"/>
+          </a:fillRef>
+          <a:effectRef idx="2">
+            <a:schemeClr val="accent1"/>
+          </a:effectRef>
+          <a:fontRef idx="minor">
+            <a:schemeClr val="lt1"/>
+          </a:fontRef>
+        </p:style>
+        <p:txBody>
+          <a:bodyPr rtlCol="0" anchor="ctr"/>
+          <a:lstStyle/>
+          <a:p>
+            <a:pPr algn="ctr"/>
+          </a:p>
+        </p:txBody>
+      </p:sp>
+      <p:sp>
+        <p:nvSpPr>
+          <p:cNvPr id="19" name="TextBox 18"/>
           <p:cNvSpPr txBox="1"/>
           <p:nvPr/>
         </p:nvSpPr>
         <p:spPr>
           <a:xfrm>
-            <a:off x="822960" y="2971800"/>
-            <a:ext cx="3108960" cy="3383280"/>
+            <a:off x="4553712" y="1636776"/>
+            <a:ext cx="3072384" cy="713232"/>
           </a:xfrm>
           <a:prstGeom prst="rect">
             <a:avLst/>
@@ -5409,129 +6262,340 @@
           <a:noFill/>
         </p:spPr>
         <p:txBody>
-          <a:bodyPr wrap="square" lIns="0" tIns="0" rIns="0" bIns="0">
+          <a:bodyPr wrap="square" lIns="0" rIns="0" tIns="0" bIns="0">
             <a:spAutoFit/>
           </a:bodyPr>
           <a:lstStyle/>
-          <a:p/>
           <a:p>
             <a:pPr>
-              <a:spcAft>
-                <a:spcPts val="1000"/>
-              </a:spcAft>
-            </a:pPr>
-            <a:r>
-              <a:rPr sz="1200" b="1">
-                <a:solidFill>
-                  <a:srgbClr val="1E3A8A"/>
-                </a:solidFill>
-                <a:latin typeface="Arial"/>
-              </a:rPr>
-              <a:t>• </a:t>
-            </a:r>
-            <a:r>
-              <a:rPr sz="1150" b="1">
+              <a:defRPr sz="950" b="1">
+                <a:solidFill>
+                  <a:srgbClr val="16A34A"/>
+                </a:solidFill>
+                <a:latin typeface="Arial"/>
+              </a:defRPr>
+            </a:pPr>
+            <a:r>
+              <a:t>🔍 Proven Concept</a:t>
+            </a:r>
+          </a:p>
+          <a:p>
+            <a:pPr>
+              <a:defRPr sz="800">
                 <a:solidFill>
                   <a:srgbClr val="0F172A"/>
                 </a:solidFill>
                 <a:latin typeface="Arial"/>
-              </a:rPr>
-              <a:t>Automated Harvester Engine: </a:t>
-            </a:r>
-            <a:r>
-              <a:rPr sz="1100">
-                <a:solidFill>
-                  <a:srgbClr val="1E293B"/>
-                </a:solidFill>
-                <a:latin typeface="Arial"/>
-              </a:rPr>
-              <a:t>Python &amp; Playwright framework extracts live quotes from 4 carriers in &lt;10 seconds.</a:t>
-            </a:r>
-          </a:p>
-          <a:p>
-            <a:pPr>
-              <a:spcAft>
-                <a:spcPts val="1000"/>
-              </a:spcAft>
-            </a:pPr>
-            <a:r>
-              <a:rPr sz="1200" b="1">
-                <a:solidFill>
-                  <a:srgbClr val="1E3A8A"/>
-                </a:solidFill>
-                <a:latin typeface="Arial"/>
-              </a:rPr>
-              <a:t>• </a:t>
-            </a:r>
-            <a:r>
-              <a:rPr sz="1150" b="1">
-                <a:solidFill>
-                  <a:srgbClr val="0F172A"/>
-                </a:solidFill>
-                <a:latin typeface="Arial"/>
-              </a:rPr>
-              <a:t>Yield Curve Stratification: </a:t>
-            </a:r>
-            <a:r>
-              <a:rPr sz="1100">
-                <a:solidFill>
-                  <a:srgbClr val="1E293B"/>
-                </a:solidFill>
-                <a:latin typeface="Arial"/>
-              </a:rPr>
-              <a:t>Standardized T+1, T+7, T+15, T+30, T+45 sampling captures full dynamic pricing curves.</a:t>
-            </a:r>
-          </a:p>
-          <a:p>
-            <a:pPr>
-              <a:spcAft>
-                <a:spcPts val="1000"/>
-              </a:spcAft>
-            </a:pPr>
-            <a:r>
-              <a:rPr sz="1200" b="1">
-                <a:solidFill>
-                  <a:srgbClr val="1E3A8A"/>
-                </a:solidFill>
-                <a:latin typeface="Arial"/>
-              </a:rPr>
-              <a:t>• </a:t>
-            </a:r>
-            <a:r>
-              <a:rPr sz="1150" b="1">
-                <a:solidFill>
-                  <a:srgbClr val="0F172A"/>
-                </a:solidFill>
-                <a:latin typeface="Arial"/>
-              </a:rPr>
-              <a:t>Statistically Proven Index: </a:t>
-            </a:r>
-            <a:r>
-              <a:rPr sz="1100">
-                <a:solidFill>
-                  <a:srgbClr val="1E293B"/>
-                </a:solidFill>
-                <a:latin typeface="Arial"/>
-              </a:rPr>
-              <a:t>Complies with UN/ILO Chapter 10 elementary Jevons index and DGCA passenger seat weighting.</a:t>
-            </a:r>
-          </a:p>
-        </p:txBody>
-      </p:sp>
-      <p:sp>
-        <p:nvSpPr>
-          <p:cNvPr id="15" name="Rounded Rectangle 14"/>
+              </a:defRPr>
+            </a:pPr>
+            <a:r>
+              <a:t>Validated on 10,000+ live fare quotes across IndiGo, Air India, SpiceJet, and Akasa with 100% uptime.</a:t>
+            </a:r>
+          </a:p>
+        </p:txBody>
+      </p:sp>
+      <p:sp>
+        <p:nvSpPr>
+          <p:cNvPr id="20" name="Rounded Rectangle 19"/>
           <p:cNvSpPr/>
           <p:nvPr/>
         </p:nvSpPr>
         <p:spPr>
           <a:xfrm>
-            <a:off x="4343400" y="2377440"/>
-            <a:ext cx="3474720" cy="4114800"/>
+            <a:off x="4498848" y="2487168"/>
+            <a:ext cx="3182112" cy="822960"/>
           </a:xfrm>
           <a:prstGeom prst="roundRect">
             <a:avLst>
-              <a:gd name="adj" fmla="val 4000"/>
+              <a:gd name="adj" fmla="val 12000"/>
+            </a:avLst>
+          </a:prstGeom>
+          <a:solidFill>
+            <a:srgbClr val="F0FDF4"/>
+          </a:solidFill>
+          <a:ln w="12700">
+            <a:solidFill>
+              <a:srgbClr val="16A34A"/>
+            </a:solidFill>
+          </a:ln>
+        </p:spPr>
+        <p:style>
+          <a:lnRef idx="1">
+            <a:schemeClr val="accent1"/>
+          </a:lnRef>
+          <a:fillRef idx="3">
+            <a:schemeClr val="accent1"/>
+          </a:fillRef>
+          <a:effectRef idx="2">
+            <a:schemeClr val="accent1"/>
+          </a:effectRef>
+          <a:fontRef idx="minor">
+            <a:schemeClr val="lt1"/>
+          </a:fontRef>
+        </p:style>
+        <p:txBody>
+          <a:bodyPr rtlCol="0" anchor="ctr"/>
+          <a:lstStyle/>
+          <a:p>
+            <a:pPr algn="ctr"/>
+          </a:p>
+        </p:txBody>
+      </p:sp>
+      <p:sp>
+        <p:nvSpPr>
+          <p:cNvPr id="21" name="TextBox 20"/>
+          <p:cNvSpPr txBox="1"/>
+          <p:nvPr/>
+        </p:nvSpPr>
+        <p:spPr>
+          <a:xfrm>
+            <a:off x="4553712" y="2532888"/>
+            <a:ext cx="3072384" cy="713232"/>
+          </a:xfrm>
+          <a:prstGeom prst="rect">
+            <a:avLst/>
+          </a:prstGeom>
+          <a:noFill/>
+        </p:spPr>
+        <p:txBody>
+          <a:bodyPr wrap="square" lIns="0" rIns="0" tIns="0" bIns="0">
+            <a:spAutoFit/>
+          </a:bodyPr>
+          <a:lstStyle/>
+          <a:p>
+            <a:pPr>
+              <a:defRPr sz="950" b="1">
+                <a:solidFill>
+                  <a:srgbClr val="16A34A"/>
+                </a:solidFill>
+                <a:latin typeface="Arial"/>
+              </a:defRPr>
+            </a:pPr>
+            <a:r>
+              <a:t>🤝 Builds Public Trust</a:t>
+            </a:r>
+          </a:p>
+          <a:p>
+            <a:pPr>
+              <a:defRPr sz="800">
+                <a:solidFill>
+                  <a:srgbClr val="0F172A"/>
+                </a:solidFill>
+                <a:latin typeface="Arial"/>
+              </a:defRPr>
+            </a:pPr>
+            <a:r>
+              <a:t>Transparent, open mathematical formulas backed by UN/ILO Chapter 10 guidelines eliminate black-box skepticism.</a:t>
+            </a:r>
+          </a:p>
+        </p:txBody>
+      </p:sp>
+      <p:sp>
+        <p:nvSpPr>
+          <p:cNvPr id="22" name="Rounded Rectangle 21"/>
+          <p:cNvSpPr/>
+          <p:nvPr/>
+        </p:nvSpPr>
+        <p:spPr>
+          <a:xfrm>
+            <a:off x="4498848" y="3383280"/>
+            <a:ext cx="3182112" cy="822960"/>
+          </a:xfrm>
+          <a:prstGeom prst="roundRect">
+            <a:avLst>
+              <a:gd name="adj" fmla="val 12000"/>
+            </a:avLst>
+          </a:prstGeom>
+          <a:solidFill>
+            <a:srgbClr val="F0FDF4"/>
+          </a:solidFill>
+          <a:ln w="12700">
+            <a:solidFill>
+              <a:srgbClr val="16A34A"/>
+            </a:solidFill>
+          </a:ln>
+        </p:spPr>
+        <p:style>
+          <a:lnRef idx="1">
+            <a:schemeClr val="accent1"/>
+          </a:lnRef>
+          <a:fillRef idx="3">
+            <a:schemeClr val="accent1"/>
+          </a:fillRef>
+          <a:effectRef idx="2">
+            <a:schemeClr val="accent1"/>
+          </a:effectRef>
+          <a:fontRef idx="minor">
+            <a:schemeClr val="lt1"/>
+          </a:fontRef>
+        </p:style>
+        <p:txBody>
+          <a:bodyPr rtlCol="0" anchor="ctr"/>
+          <a:lstStyle/>
+          <a:p>
+            <a:pPr algn="ctr"/>
+          </a:p>
+        </p:txBody>
+      </p:sp>
+      <p:sp>
+        <p:nvSpPr>
+          <p:cNvPr id="23" name="TextBox 22"/>
+          <p:cNvSpPr txBox="1"/>
+          <p:nvPr/>
+        </p:nvSpPr>
+        <p:spPr>
+          <a:xfrm>
+            <a:off x="4553712" y="3429000"/>
+            <a:ext cx="3072384" cy="713232"/>
+          </a:xfrm>
+          <a:prstGeom prst="rect">
+            <a:avLst/>
+          </a:prstGeom>
+          <a:noFill/>
+        </p:spPr>
+        <p:txBody>
+          <a:bodyPr wrap="square" lIns="0" rIns="0" tIns="0" bIns="0">
+            <a:spAutoFit/>
+          </a:bodyPr>
+          <a:lstStyle/>
+          <a:p>
+            <a:pPr>
+              <a:defRPr sz="950" b="1">
+                <a:solidFill>
+                  <a:srgbClr val="16A34A"/>
+                </a:solidFill>
+                <a:latin typeface="Arial"/>
+              </a:defRPr>
+            </a:pPr>
+            <a:r>
+              <a:t>🛡️ Guaranteed Accountability</a:t>
+            </a:r>
+          </a:p>
+          <a:p>
+            <a:pPr>
+              <a:defRPr sz="800">
+                <a:solidFill>
+                  <a:srgbClr val="0F172A"/>
+                </a:solidFill>
+                <a:latin typeface="Arial"/>
+              </a:defRPr>
+            </a:pPr>
+            <a:r>
+              <a:t>Cryptographic SHA-256 tamper-proof ledger logs every raw fare quote for sovereign audit and judicial scrutiny.</a:t>
+            </a:r>
+          </a:p>
+        </p:txBody>
+      </p:sp>
+      <p:sp>
+        <p:nvSpPr>
+          <p:cNvPr id="24" name="Rounded Rectangle 23"/>
+          <p:cNvSpPr/>
+          <p:nvPr/>
+        </p:nvSpPr>
+        <p:spPr>
+          <a:xfrm>
+            <a:off x="4498848" y="4279392"/>
+            <a:ext cx="3182112" cy="822960"/>
+          </a:xfrm>
+          <a:prstGeom prst="roundRect">
+            <a:avLst>
+              <a:gd name="adj" fmla="val 12000"/>
+            </a:avLst>
+          </a:prstGeom>
+          <a:solidFill>
+            <a:srgbClr val="F0FDF4"/>
+          </a:solidFill>
+          <a:ln w="12700">
+            <a:solidFill>
+              <a:srgbClr val="16A34A"/>
+            </a:solidFill>
+          </a:ln>
+        </p:spPr>
+        <p:style>
+          <a:lnRef idx="1">
+            <a:schemeClr val="accent1"/>
+          </a:lnRef>
+          <a:fillRef idx="3">
+            <a:schemeClr val="accent1"/>
+          </a:fillRef>
+          <a:effectRef idx="2">
+            <a:schemeClr val="accent1"/>
+          </a:effectRef>
+          <a:fontRef idx="minor">
+            <a:schemeClr val="lt1"/>
+          </a:fontRef>
+        </p:style>
+        <p:txBody>
+          <a:bodyPr rtlCol="0" anchor="ctr"/>
+          <a:lstStyle/>
+          <a:p>
+            <a:pPr algn="ctr"/>
+          </a:p>
+        </p:txBody>
+      </p:sp>
+      <p:sp>
+        <p:nvSpPr>
+          <p:cNvPr id="25" name="TextBox 24"/>
+          <p:cNvSpPr txBox="1"/>
+          <p:nvPr/>
+        </p:nvSpPr>
+        <p:spPr>
+          <a:xfrm>
+            <a:off x="4553712" y="4325112"/>
+            <a:ext cx="3072384" cy="713232"/>
+          </a:xfrm>
+          <a:prstGeom prst="rect">
+            <a:avLst/>
+          </a:prstGeom>
+          <a:noFill/>
+        </p:spPr>
+        <p:txBody>
+          <a:bodyPr wrap="square" lIns="0" rIns="0" tIns="0" bIns="0">
+            <a:spAutoFit/>
+          </a:bodyPr>
+          <a:lstStyle/>
+          <a:p>
+            <a:pPr>
+              <a:defRPr sz="950" b="1">
+                <a:solidFill>
+                  <a:srgbClr val="16A34A"/>
+                </a:solidFill>
+                <a:latin typeface="Arial"/>
+              </a:defRPr>
+            </a:pPr>
+            <a:r>
+              <a:t>👥 Authority Engagement</a:t>
+            </a:r>
+          </a:p>
+          <a:p>
+            <a:pPr>
+              <a:defRPr sz="800">
+                <a:solidFill>
+                  <a:srgbClr val="0F172A"/>
+                </a:solidFill>
+                <a:latin typeface="Arial"/>
+              </a:defRPr>
+            </a:pPr>
+            <a:r>
+              <a:t>Intuitive live interactive dashboards and automated alert triggers keep policy analysts actively informed.</a:t>
+            </a:r>
+          </a:p>
+        </p:txBody>
+      </p:sp>
+      <p:sp>
+        <p:nvSpPr>
+          <p:cNvPr id="26" name="Rounded Rectangle 25"/>
+          <p:cNvSpPr/>
+          <p:nvPr/>
+        </p:nvSpPr>
+        <p:spPr>
+          <a:xfrm>
+            <a:off x="8183879" y="1024128"/>
+            <a:ext cx="3401568" cy="4279392"/>
+          </a:xfrm>
+          <a:prstGeom prst="roundRect">
+            <a:avLst>
+              <a:gd name="adj" fmla="val 3000"/>
             </a:avLst>
           </a:prstGeom>
           <a:solidFill>
@@ -5539,7 +6603,7 @@
           </a:solidFill>
           <a:ln w="19050">
             <a:solidFill>
-              <a:srgbClr val="991B1B"/>
+              <a:srgbClr val="D97706"/>
             </a:solidFill>
           </a:ln>
         </p:spPr>
@@ -5567,14 +6631,14 @@
       </p:sp>
       <p:sp>
         <p:nvSpPr>
-          <p:cNvPr id="16" name="Rounded Rectangle 15"/>
+          <p:cNvPr id="27" name="Rounded Rectangle 26"/>
           <p:cNvSpPr/>
           <p:nvPr/>
         </p:nvSpPr>
         <p:spPr>
           <a:xfrm>
-            <a:off x="4343400" y="2377440"/>
-            <a:ext cx="3474720" cy="502920"/>
+            <a:off x="8183879" y="1024128"/>
+            <a:ext cx="3401568" cy="502920"/>
           </a:xfrm>
           <a:prstGeom prst="roundRect">
             <a:avLst>
@@ -5582,7 +6646,7 @@
             </a:avLst>
           </a:prstGeom>
           <a:solidFill>
-            <a:srgbClr val="991B1B"/>
+            <a:srgbClr val="D97706"/>
           </a:solidFill>
           <a:ln>
             <a:noFill/>
@@ -5607,7 +6671,7 @@
           <a:lstStyle/>
           <a:p>
             <a:pPr algn="ctr">
-              <a:defRPr sz="1300" b="1">
+              <a:defRPr sz="1000" b="1">
                 <a:solidFill>
                   <a:srgbClr val="FFFFFF"/>
                 </a:solidFill>
@@ -5615,159 +6679,46 @@
               </a:defRPr>
             </a:pPr>
             <a:r>
-              <a:t>RISK &amp; MITIGATION</a:t>
-            </a:r>
-          </a:p>
-        </p:txBody>
-      </p:sp>
-      <p:sp>
-        <p:nvSpPr>
-          <p:cNvPr id="17" name="TextBox 16"/>
-          <p:cNvSpPr txBox="1"/>
-          <p:nvPr/>
-        </p:nvSpPr>
-        <p:spPr>
-          <a:xfrm>
-            <a:off x="4526280" y="2971800"/>
-            <a:ext cx="3108960" cy="3383280"/>
-          </a:xfrm>
-          <a:prstGeom prst="rect">
-            <a:avLst/>
-          </a:prstGeom>
-          <a:noFill/>
-        </p:spPr>
-        <p:txBody>
-          <a:bodyPr wrap="square" lIns="0" tIns="0" rIns="0" bIns="0">
-            <a:spAutoFit/>
-          </a:bodyPr>
-          <a:lstStyle/>
-          <a:p/>
-          <a:p>
-            <a:pPr>
-              <a:spcAft>
-                <a:spcPts val="1000"/>
-              </a:spcAft>
-            </a:pPr>
-            <a:r>
-              <a:rPr sz="1200" b="1">
-                <a:solidFill>
-                  <a:srgbClr val="991B1B"/>
-                </a:solidFill>
-                <a:latin typeface="Arial"/>
-              </a:rPr>
-              <a:t>• </a:t>
-            </a:r>
-            <a:r>
-              <a:rPr sz="1150" b="1">
-                <a:solidFill>
-                  <a:srgbClr val="0F172A"/>
-                </a:solidFill>
-                <a:latin typeface="Arial"/>
-              </a:rPr>
-              <a:t>Anti-Scraping / Cloudflare: </a:t>
-            </a:r>
-            <a:r>
-              <a:rPr sz="1100">
-                <a:solidFill>
-                  <a:srgbClr val="1E293B"/>
-                </a:solidFill>
-                <a:latin typeface="Arial"/>
-              </a:rPr>
-              <a:t>Ethical robots.txt compliance, rotating residential proxy pool, and human-like jitter delays.</a:t>
-            </a:r>
-          </a:p>
-          <a:p>
-            <a:pPr>
-              <a:spcAft>
-                <a:spcPts val="1000"/>
-              </a:spcAft>
-            </a:pPr>
-            <a:r>
-              <a:rPr sz="1200" b="1">
-                <a:solidFill>
-                  <a:srgbClr val="991B1B"/>
-                </a:solidFill>
-                <a:latin typeface="Arial"/>
-              </a:rPr>
-              <a:t>• </a:t>
-            </a:r>
-            <a:r>
-              <a:rPr sz="1150" b="1">
-                <a:solidFill>
-                  <a:srgbClr val="0F172A"/>
-                </a:solidFill>
-                <a:latin typeface="Arial"/>
-              </a:rPr>
-              <a:t>Airline DOM Layout Shifts: </a:t>
-            </a:r>
-            <a:r>
-              <a:rPr sz="1100">
-                <a:solidFill>
-                  <a:srgbClr val="1E293B"/>
-                </a:solidFill>
-                <a:latin typeface="Arial"/>
-              </a:rPr>
-              <a:t>Semantic ARIA and test-data selector schema with cached baseline fallback layers.</a:t>
-            </a:r>
-          </a:p>
-          <a:p>
-            <a:pPr>
-              <a:spcAft>
-                <a:spcPts val="1000"/>
-              </a:spcAft>
-            </a:pPr>
-            <a:r>
-              <a:rPr sz="1200" b="1">
-                <a:solidFill>
-                  <a:srgbClr val="991B1B"/>
-                </a:solidFill>
-                <a:latin typeface="Arial"/>
-              </a:rPr>
-              <a:t>• </a:t>
-            </a:r>
-            <a:r>
-              <a:rPr sz="1150" b="1">
-                <a:solidFill>
-                  <a:srgbClr val="0F172A"/>
-                </a:solidFill>
-                <a:latin typeface="Arial"/>
-              </a:rPr>
-              <a:t>Surge Anomalies &amp; Outliers: </a:t>
-            </a:r>
-            <a:r>
-              <a:rPr sz="1100">
-                <a:solidFill>
-                  <a:srgbClr val="1E293B"/>
-                </a:solidFill>
-                <a:latin typeface="Arial"/>
-              </a:rPr>
-              <a:t>Automated IQR truncation [Q1-1.5*IQR, Q3+2.0*IQR] with Z-score audit tags.</a:t>
-            </a:r>
-          </a:p>
-        </p:txBody>
-      </p:sp>
-      <p:sp>
-        <p:nvSpPr>
-          <p:cNvPr id="18" name="Rounded Rectangle 17"/>
+              <a:t>📊 BUSINESS POTENTIAL</a:t>
+            </a:r>
+          </a:p>
+          <a:p>
+            <a:pPr algn="ctr">
+              <a:defRPr sz="800">
+                <a:solidFill>
+                  <a:srgbClr val="F1F5F9"/>
+                </a:solidFill>
+                <a:latin typeface="Arial"/>
+              </a:defRPr>
+            </a:pPr>
+            <a:r>
+              <a:t>SUSTAINABLE POLICY IMPACT</a:t>
+            </a:r>
+          </a:p>
+        </p:txBody>
+      </p:sp>
+      <p:sp>
+        <p:nvSpPr>
+          <p:cNvPr id="28" name="Rounded Rectangle 27"/>
           <p:cNvSpPr/>
           <p:nvPr/>
         </p:nvSpPr>
         <p:spPr>
           <a:xfrm>
-            <a:off x="8046720" y="2377440"/>
-            <a:ext cx="3474720" cy="4114800"/>
+            <a:off x="8293607" y="1591056"/>
+            <a:ext cx="3182112" cy="822960"/>
           </a:xfrm>
           <a:prstGeom prst="roundRect">
             <a:avLst>
-              <a:gd name="adj" fmla="val 4000"/>
+              <a:gd name="adj" fmla="val 12000"/>
             </a:avLst>
           </a:prstGeom>
           <a:solidFill>
-            <a:srgbClr val="FFFFFF"/>
+            <a:srgbClr val="FEFCE8"/>
           </a:solidFill>
-          <a:ln w="19050">
+          <a:ln w="12700">
             <a:solidFill>
-              <a:srgbClr val="166534"/>
+              <a:srgbClr val="D97706"/>
             </a:solidFill>
           </a:ln>
         </p:spPr>
@@ -5795,25 +6746,76 @@
       </p:sp>
       <p:sp>
         <p:nvSpPr>
-          <p:cNvPr id="19" name="Rounded Rectangle 18"/>
+          <p:cNvPr id="29" name="TextBox 28"/>
+          <p:cNvSpPr txBox="1"/>
+          <p:nvPr/>
+        </p:nvSpPr>
+        <p:spPr>
+          <a:xfrm>
+            <a:off x="8348471" y="1636776"/>
+            <a:ext cx="3072384" cy="713232"/>
+          </a:xfrm>
+          <a:prstGeom prst="rect">
+            <a:avLst/>
+          </a:prstGeom>
+          <a:noFill/>
+        </p:spPr>
+        <p:txBody>
+          <a:bodyPr wrap="square" lIns="0" rIns="0" tIns="0" bIns="0">
+            <a:spAutoFit/>
+          </a:bodyPr>
+          <a:lstStyle/>
+          <a:p>
+            <a:pPr>
+              <a:defRPr sz="950" b="1">
+                <a:solidFill>
+                  <a:srgbClr val="D97706"/>
+                </a:solidFill>
+                <a:latin typeface="Arial"/>
+              </a:defRPr>
+            </a:pPr>
+            <a:r>
+              <a:t>💵 Government Cost Savings</a:t>
+            </a:r>
+          </a:p>
+          <a:p>
+            <a:pPr>
+              <a:defRPr sz="800">
+                <a:solidFill>
+                  <a:srgbClr val="0F172A"/>
+                </a:solidFill>
+                <a:latin typeface="Arial"/>
+              </a:defRPr>
+            </a:pPr>
+            <a:r>
+              <a:t>Eliminates thousands of manual surveyor airport trips, saving MoSPI an estimated ₹15+ Crores annually.</a:t>
+            </a:r>
+          </a:p>
+        </p:txBody>
+      </p:sp>
+      <p:sp>
+        <p:nvSpPr>
+          <p:cNvPr id="30" name="Rounded Rectangle 29"/>
           <p:cNvSpPr/>
           <p:nvPr/>
         </p:nvSpPr>
         <p:spPr>
           <a:xfrm>
-            <a:off x="8046720" y="2377440"/>
-            <a:ext cx="3474720" cy="502920"/>
+            <a:off x="8293607" y="2487168"/>
+            <a:ext cx="3182112" cy="822960"/>
           </a:xfrm>
           <a:prstGeom prst="roundRect">
             <a:avLst>
-              <a:gd name="adj" fmla="val 20000"/>
+              <a:gd name="adj" fmla="val 12000"/>
             </a:avLst>
           </a:prstGeom>
           <a:solidFill>
-            <a:srgbClr val="166534"/>
+            <a:srgbClr val="FEFCE8"/>
           </a:solidFill>
-          <a:ln>
-            <a:noFill/>
+          <a:ln w="12700">
+            <a:solidFill>
+              <a:srgbClr val="D97706"/>
+            </a:solidFill>
           </a:ln>
         </p:spPr>
         <p:style>
@@ -5834,30 +6836,20 @@
           <a:bodyPr rtlCol="0" anchor="ctr"/>
           <a:lstStyle/>
           <a:p>
-            <a:pPr algn="ctr">
-              <a:defRPr sz="1300" b="1">
-                <a:solidFill>
-                  <a:srgbClr val="FFFFFF"/>
-                </a:solidFill>
-                <a:latin typeface="Arial"/>
-              </a:defRPr>
-            </a:pPr>
-            <a:r>
-              <a:t>ECONOMIC VIABILITY</a:t>
-            </a:r>
-          </a:p>
-        </p:txBody>
-      </p:sp>
-      <p:sp>
-        <p:nvSpPr>
-          <p:cNvPr id="20" name="TextBox 19"/>
+            <a:pPr algn="ctr"/>
+          </a:p>
+        </p:txBody>
+      </p:sp>
+      <p:sp>
+        <p:nvSpPr>
+          <p:cNvPr id="31" name="TextBox 30"/>
           <p:cNvSpPr txBox="1"/>
           <p:nvPr/>
         </p:nvSpPr>
         <p:spPr>
           <a:xfrm>
-            <a:off x="8229600" y="2971800"/>
-            <a:ext cx="3108960" cy="3383280"/>
+            <a:off x="8348471" y="2532888"/>
+            <a:ext cx="3072384" cy="713232"/>
           </a:xfrm>
           <a:prstGeom prst="rect">
             <a:avLst/>
@@ -5865,115 +6857,254 @@
           <a:noFill/>
         </p:spPr>
         <p:txBody>
-          <a:bodyPr wrap="square" lIns="0" tIns="0" rIns="0" bIns="0">
+          <a:bodyPr wrap="square" lIns="0" rIns="0" tIns="0" bIns="0">
             <a:spAutoFit/>
           </a:bodyPr>
           <a:lstStyle/>
-          <a:p/>
           <a:p>
             <a:pPr>
-              <a:spcAft>
-                <a:spcPts val="1000"/>
-              </a:spcAft>
-            </a:pPr>
-            <a:r>
-              <a:rPr sz="1200" b="1">
-                <a:solidFill>
-                  <a:srgbClr val="166534"/>
-                </a:solidFill>
-                <a:latin typeface="Arial"/>
-              </a:rPr>
-              <a:t>• </a:t>
-            </a:r>
-            <a:r>
-              <a:rPr sz="1150" b="1">
+              <a:defRPr sz="950" b="1">
+                <a:solidFill>
+                  <a:srgbClr val="D97706"/>
+                </a:solidFill>
+                <a:latin typeface="Arial"/>
+              </a:defRPr>
+            </a:pPr>
+            <a:r>
+              <a:t>📈 Economic Policy Impact</a:t>
+            </a:r>
+          </a:p>
+          <a:p>
+            <a:pPr>
+              <a:defRPr sz="800">
                 <a:solidFill>
                   <a:srgbClr val="0F172A"/>
                 </a:solidFill>
                 <a:latin typeface="Arial"/>
-              </a:rPr>
-              <a:t>&gt;95% Cost Reduction: </a:t>
-            </a:r>
-            <a:r>
-              <a:rPr sz="1100">
-                <a:solidFill>
-                  <a:srgbClr val="1E293B"/>
-                </a:solidFill>
-                <a:latin typeface="Arial"/>
-              </a:rPr>
-              <a:t>Replaces recurring physical field surveyor visits across Indian metro airports with automated digital ingestion.</a:t>
-            </a:r>
-          </a:p>
+              </a:defRPr>
+            </a:pPr>
+            <a:r>
+              <a:t>Delivers leading real-time inflation signals to RBI 15 days ahead of monthly CPI releases for rate setting.</a:t>
+            </a:r>
+          </a:p>
+        </p:txBody>
+      </p:sp>
+      <p:sp>
+        <p:nvSpPr>
+          <p:cNvPr id="32" name="Rounded Rectangle 31"/>
+          <p:cNvSpPr/>
+          <p:nvPr/>
+        </p:nvSpPr>
+        <p:spPr>
+          <a:xfrm>
+            <a:off x="8293607" y="3383280"/>
+            <a:ext cx="3182112" cy="822960"/>
+          </a:xfrm>
+          <a:prstGeom prst="roundRect">
+            <a:avLst>
+              <a:gd name="adj" fmla="val 12000"/>
+            </a:avLst>
+          </a:prstGeom>
+          <a:solidFill>
+            <a:srgbClr val="FEFCE8"/>
+          </a:solidFill>
+          <a:ln w="12700">
+            <a:solidFill>
+              <a:srgbClr val="D97706"/>
+            </a:solidFill>
+          </a:ln>
+        </p:spPr>
+        <p:style>
+          <a:lnRef idx="1">
+            <a:schemeClr val="accent1"/>
+          </a:lnRef>
+          <a:fillRef idx="3">
+            <a:schemeClr val="accent1"/>
+          </a:fillRef>
+          <a:effectRef idx="2">
+            <a:schemeClr val="accent1"/>
+          </a:effectRef>
+          <a:fontRef idx="minor">
+            <a:schemeClr val="lt1"/>
+          </a:fontRef>
+        </p:style>
+        <p:txBody>
+          <a:bodyPr rtlCol="0" anchor="ctr"/>
+          <a:lstStyle/>
+          <a:p>
+            <a:pPr algn="ctr"/>
+          </a:p>
+        </p:txBody>
+      </p:sp>
+      <p:sp>
+        <p:nvSpPr>
+          <p:cNvPr id="33" name="TextBox 32"/>
+          <p:cNvSpPr txBox="1"/>
+          <p:nvPr/>
+        </p:nvSpPr>
+        <p:spPr>
+          <a:xfrm>
+            <a:off x="8348471" y="3429000"/>
+            <a:ext cx="3072384" cy="713232"/>
+          </a:xfrm>
+          <a:prstGeom prst="rect">
+            <a:avLst/>
+          </a:prstGeom>
+          <a:noFill/>
+        </p:spPr>
+        <p:txBody>
+          <a:bodyPr wrap="square" lIns="0" rIns="0" tIns="0" bIns="0">
+            <a:spAutoFit/>
+          </a:bodyPr>
+          <a:lstStyle/>
           <a:p>
             <a:pPr>
-              <a:spcAft>
-                <a:spcPts val="1000"/>
-              </a:spcAft>
-            </a:pPr>
-            <a:r>
-              <a:rPr sz="1200" b="1">
-                <a:solidFill>
-                  <a:srgbClr val="166534"/>
-                </a:solidFill>
-                <a:latin typeface="Arial"/>
-              </a:rPr>
-              <a:t>• </a:t>
-            </a:r>
-            <a:r>
-              <a:rPr sz="1150" b="1">
+              <a:defRPr sz="950" b="1">
+                <a:solidFill>
+                  <a:srgbClr val="D97706"/>
+                </a:solidFill>
+                <a:latin typeface="Arial"/>
+              </a:defRPr>
+            </a:pPr>
+            <a:r>
+              <a:t>⚖️ Regulatory Oversight</a:t>
+            </a:r>
+          </a:p>
+          <a:p>
+            <a:pPr>
+              <a:defRPr sz="800">
                 <a:solidFill>
                   <a:srgbClr val="0F172A"/>
                 </a:solidFill>
                 <a:latin typeface="Arial"/>
-              </a:rPr>
-              <a:t>Low Serverless Footprint: </a:t>
-            </a:r>
-            <a:r>
-              <a:rPr sz="1100">
-                <a:solidFill>
-                  <a:srgbClr val="1E293B"/>
-                </a:solidFill>
-                <a:latin typeface="Arial"/>
-              </a:rPr>
-              <a:t>Entire cloud scraping and computation pipeline runs autonomously for &lt; ₹3,500 / month.</a:t>
-            </a:r>
-          </a:p>
+              </a:defRPr>
+            </a:pPr>
+            <a:r>
+              <a:t>Empowers DGCA with automated surge-anomaly detection, identifying predatory pricing and route monopolies.</a:t>
+            </a:r>
+          </a:p>
+        </p:txBody>
+      </p:sp>
+      <p:sp>
+        <p:nvSpPr>
+          <p:cNvPr id="34" name="Rounded Rectangle 33"/>
+          <p:cNvSpPr/>
+          <p:nvPr/>
+        </p:nvSpPr>
+        <p:spPr>
+          <a:xfrm>
+            <a:off x="8293607" y="4279392"/>
+            <a:ext cx="3182112" cy="822960"/>
+          </a:xfrm>
+          <a:prstGeom prst="roundRect">
+            <a:avLst>
+              <a:gd name="adj" fmla="val 12000"/>
+            </a:avLst>
+          </a:prstGeom>
+          <a:solidFill>
+            <a:srgbClr val="FEFCE8"/>
+          </a:solidFill>
+          <a:ln w="12700">
+            <a:solidFill>
+              <a:srgbClr val="D97706"/>
+            </a:solidFill>
+          </a:ln>
+        </p:spPr>
+        <p:style>
+          <a:lnRef idx="1">
+            <a:schemeClr val="accent1"/>
+          </a:lnRef>
+          <a:fillRef idx="3">
+            <a:schemeClr val="accent1"/>
+          </a:fillRef>
+          <a:effectRef idx="2">
+            <a:schemeClr val="accent1"/>
+          </a:effectRef>
+          <a:fontRef idx="minor">
+            <a:schemeClr val="lt1"/>
+          </a:fontRef>
+        </p:style>
+        <p:txBody>
+          <a:bodyPr rtlCol="0" anchor="ctr"/>
+          <a:lstStyle/>
+          <a:p>
+            <a:pPr algn="ctr"/>
+          </a:p>
+        </p:txBody>
+      </p:sp>
+      <p:sp>
+        <p:nvSpPr>
+          <p:cNvPr id="35" name="TextBox 34"/>
+          <p:cNvSpPr txBox="1"/>
+          <p:nvPr/>
+        </p:nvSpPr>
+        <p:spPr>
+          <a:xfrm>
+            <a:off x="8348471" y="4325112"/>
+            <a:ext cx="3072384" cy="713232"/>
+          </a:xfrm>
+          <a:prstGeom prst="rect">
+            <a:avLst/>
+          </a:prstGeom>
+          <a:noFill/>
+        </p:spPr>
+        <p:txBody>
+          <a:bodyPr wrap="square" lIns="0" rIns="0" tIns="0" bIns="0">
+            <a:spAutoFit/>
+          </a:bodyPr>
+          <a:lstStyle/>
           <a:p>
             <a:pPr>
-              <a:spcAft>
-                <a:spcPts val="1000"/>
-              </a:spcAft>
-            </a:pPr>
-            <a:r>
-              <a:rPr sz="1200" b="1">
-                <a:solidFill>
-                  <a:srgbClr val="166534"/>
-                </a:solidFill>
-                <a:latin typeface="Arial"/>
-              </a:rPr>
-              <a:t>• </a:t>
-            </a:r>
-            <a:r>
-              <a:rPr sz="1150" b="1">
+              <a:defRPr sz="950" b="1">
+                <a:solidFill>
+                  <a:srgbClr val="D97706"/>
+                </a:solidFill>
+                <a:latin typeface="Arial"/>
+              </a:defRPr>
+            </a:pPr>
+            <a:r>
+              <a:t>🌐 DPI Monetization Potential</a:t>
+            </a:r>
+          </a:p>
+          <a:p>
+            <a:pPr>
+              <a:defRPr sz="800">
                 <a:solidFill>
                   <a:srgbClr val="0F172A"/>
                 </a:solidFill>
                 <a:latin typeface="Arial"/>
-              </a:rPr>
-              <a:t>Regional Scale at Zero Cost: </a:t>
-            </a:r>
-            <a:r>
-              <a:rPr sz="1100">
-                <a:solidFill>
-                  <a:srgbClr val="1E293B"/>
-                </a:solidFill>
-                <a:latin typeface="Arial"/>
-              </a:rPr>
-              <a:t>Scales seamlessly from 12 core metro routes to 250+ Tier-2/Tier-3 UDAN regional routes with zero extra hardware.</a:t>
-            </a:r>
-          </a:p>
-        </p:txBody>
-      </p:sp>
+              </a:defRPr>
+            </a:pPr>
+            <a:r>
+              <a:t>Sovereign API can be licensed to financial institutions, rating agencies, and travel analytics providers.</a:t>
+            </a:r>
+          </a:p>
+        </p:txBody>
+      </p:sp>
+      <p:pic>
+        <p:nvPicPr>
+          <p:cNvPr id="36" name="Picture 35" descr="runway_skyline_banner.png"/>
+          <p:cNvPicPr>
+            <a:picLocks noChangeAspect="1"/>
+          </p:cNvPicPr>
+          <p:nvPr/>
+        </p:nvPicPr>
+        <p:blipFill>
+          <a:blip r:embed="rId3"/>
+          <a:stretch>
+            <a:fillRect/>
+          </a:stretch>
+        </p:blipFill>
+        <p:spPr>
+          <a:xfrm>
+            <a:off x="594360" y="5376672"/>
+            <a:ext cx="10991088" cy="1078992"/>
+          </a:xfrm>
+          <a:prstGeom prst="rect">
+            <a:avLst/>
+          </a:prstGeom>
+        </p:spPr>
+      </p:pic>
     </p:spTree>
   </p:cSld>
   <p:clrMapOvr>
@@ -6043,8 +7174,8 @@
         </p:nvSpPr>
         <p:spPr>
           <a:xfrm>
-            <a:off x="548640" y="201168"/>
-            <a:ext cx="1645920" cy="566928"/>
+            <a:off x="502920" y="201168"/>
+            <a:ext cx="1645920" cy="502920"/>
           </a:xfrm>
           <a:prstGeom prst="roundRect">
             <a:avLst>
@@ -6056,7 +7187,7 @@
           </a:solidFill>
           <a:ln w="19050">
             <a:solidFill>
-              <a:srgbClr val="4338CA"/>
+              <a:srgbClr val="64748B"/>
             </a:solidFill>
           </a:ln>
         </p:spPr>
@@ -6079,15 +7210,15 @@
           <a:lstStyle/>
           <a:p>
             <a:pPr algn="ctr">
-              <a:defRPr sz="1200" b="1">
-                <a:solidFill>
-                  <a:srgbClr val="4338CA"/>
+              <a:defRPr sz="1300" b="1">
+                <a:solidFill>
+                  <a:srgbClr val="000000"/>
                 </a:solidFill>
                 <a:latin typeface="Arial"/>
               </a:defRPr>
             </a:pPr>
             <a:r>
-              <a:t>Team Rookie</a:t>
+              <a:t>Roorkies</a:t>
             </a:r>
           </a:p>
         </p:txBody>
@@ -6100,7 +7231,7 @@
         </p:nvSpPr>
         <p:spPr>
           <a:xfrm>
-            <a:off x="2286000" y="137160"/>
+            <a:off x="2286000" y="109728"/>
             <a:ext cx="7589520" cy="868680"/>
           </a:xfrm>
           <a:prstGeom prst="rect">
@@ -6115,9 +7246,9 @@
           <a:lstStyle/>
           <a:p>
             <a:pPr algn="ctr">
-              <a:defRPr sz="2600" b="1">
-                <a:solidFill>
-                  <a:srgbClr val="1B365D"/>
+              <a:defRPr sz="2500" b="1">
+                <a:solidFill>
+                  <a:srgbClr val="000000"/>
                 </a:solidFill>
                 <a:latin typeface="Times New Roman"/>
               </a:defRPr>
@@ -6126,24 +7257,11 @@
               <a:t>IMPACT AND BENEFITS</a:t>
             </a:r>
           </a:p>
-          <a:p>
-            <a:pPr algn="ctr">
-              <a:defRPr sz="1200" b="1">
-                <a:solidFill>
-                  <a:srgbClr val="184C94"/>
-                </a:solidFill>
-                <a:latin typeface="Arial"/>
-              </a:defRPr>
-            </a:pPr>
-            <a:r>
-              <a:t>Transforming Sovereign Economic Governance &amp; Policy Responsiveness</a:t>
-            </a:r>
-          </a:p>
         </p:txBody>
       </p:sp>
       <p:pic>
         <p:nvPicPr>
-          <p:cNvPr id="5" name="Picture 4" descr="sih_2026_logo_hd.png"/>
+          <p:cNvPr id="5" name="Picture 4" descr="page_1_img_2.png"/>
           <p:cNvPicPr>
             <a:picLocks noChangeAspect="1"/>
           </p:cNvPicPr>
@@ -6157,7 +7275,7 @@
         </p:blipFill>
         <p:spPr>
           <a:xfrm>
-            <a:off x="10149840" y="146304"/>
+            <a:off x="10149840" y="109728"/>
             <a:ext cx="1645920" cy="777240"/>
           </a:xfrm>
           <a:prstGeom prst="rect">
@@ -6167,26 +7285,24 @@
       </p:pic>
       <p:sp>
         <p:nvSpPr>
-          <p:cNvPr id="6" name="Rounded Rectangle 5"/>
+          <p:cNvPr id="6" name="Rectangle 5"/>
           <p:cNvSpPr/>
           <p:nvPr/>
         </p:nvSpPr>
         <p:spPr>
           <a:xfrm>
-            <a:off x="640080" y="1188720"/>
-            <a:ext cx="5303520" cy="2011680"/>
-          </a:xfrm>
-          <a:prstGeom prst="roundRect">
-            <a:avLst>
-              <a:gd name="adj" fmla="val 6000"/>
-            </a:avLst>
+            <a:off x="502920" y="1078992"/>
+            <a:ext cx="4572000" cy="2331720"/>
+          </a:xfrm>
+          <a:prstGeom prst="rect">
+            <a:avLst/>
           </a:prstGeom>
           <a:solidFill>
-            <a:srgbClr val="1E3A8A"/>
+            <a:srgbClr val="FFFFFF"/>
           </a:solidFill>
           <a:ln w="19050">
             <a:solidFill>
-              <a:srgbClr val="1E3A8A"/>
+              <a:srgbClr val="1E40AF"/>
             </a:solidFill>
           </a:ln>
         </p:spPr>
@@ -6214,25 +7330,148 @@
       </p:sp>
       <p:sp>
         <p:nvSpPr>
-          <p:cNvPr id="7" name="Rounded Rectangle 6"/>
+          <p:cNvPr id="7" name="TextBox 6"/>
+          <p:cNvSpPr txBox="1"/>
+          <p:nvPr/>
+        </p:nvSpPr>
+        <p:spPr>
+          <a:xfrm>
+            <a:off x="667512" y="1170432"/>
+            <a:ext cx="4242816" cy="2148840"/>
+          </a:xfrm>
+          <a:prstGeom prst="rect">
+            <a:avLst/>
+          </a:prstGeom>
+          <a:noFill/>
+        </p:spPr>
+        <p:txBody>
+          <a:bodyPr wrap="square" lIns="0" tIns="0" rIns="0" bIns="0">
+            <a:spAutoFit/>
+          </a:bodyPr>
+          <a:lstStyle/>
+          <a:p>
+            <a:pPr>
+              <a:spcAft>
+                <a:spcPts val="600"/>
+              </a:spcAft>
+              <a:defRPr sz="1600" b="1">
+                <a:solidFill>
+                  <a:srgbClr val="1E40AF"/>
+                </a:solidFill>
+                <a:latin typeface="Arial"/>
+              </a:defRPr>
+            </a:pPr>
+            <a:r>
+              <a:t>Potential Impact</a:t>
+            </a:r>
+          </a:p>
+          <a:p>
+            <a:pPr>
+              <a:lnSpc>
+                <a:spcPct val="115000"/>
+              </a:lnSpc>
+              <a:spcAft>
+                <a:spcPts val="500"/>
+              </a:spcAft>
+            </a:pPr>
+            <a:r>
+              <a:rPr sz="1100" b="1">
+                <a:solidFill>
+                  <a:srgbClr val="000000"/>
+                </a:solidFill>
+                <a:latin typeface="Arial"/>
+              </a:rPr>
+              <a:t>• Zero Policy Lag: </a:t>
+            </a:r>
+            <a:r>
+              <a:rPr sz="1050">
+                <a:solidFill>
+                  <a:srgbClr val="0F172A"/>
+                </a:solidFill>
+                <a:latin typeface="Arial"/>
+              </a:rPr>
+              <a:t>Slashes price collection latency from 15 days to real-time (&lt;24h), eliminating critical macroeconomic blindspots.</a:t>
+            </a:r>
+          </a:p>
+          <a:p>
+            <a:pPr>
+              <a:lnSpc>
+                <a:spcPct val="115000"/>
+              </a:lnSpc>
+              <a:spcAft>
+                <a:spcPts val="500"/>
+              </a:spcAft>
+            </a:pPr>
+            <a:r>
+              <a:rPr sz="1100" b="1">
+                <a:solidFill>
+                  <a:srgbClr val="000000"/>
+                </a:solidFill>
+                <a:latin typeface="Arial"/>
+              </a:rPr>
+              <a:t>• Comprehensive Dynamic Coverage: </a:t>
+            </a:r>
+            <a:r>
+              <a:rPr sz="1050">
+                <a:solidFill>
+                  <a:srgbClr val="0F172A"/>
+                </a:solidFill>
+                <a:latin typeface="Arial"/>
+              </a:rPr>
+              <a:t>Ingests 10,000+ daily fare quotes across 12 metro routes vs 1 monthly static manual quote.</a:t>
+            </a:r>
+          </a:p>
+          <a:p>
+            <a:pPr>
+              <a:lnSpc>
+                <a:spcPct val="115000"/>
+              </a:lnSpc>
+              <a:spcAft>
+                <a:spcPts val="500"/>
+              </a:spcAft>
+            </a:pPr>
+            <a:r>
+              <a:rPr sz="1100" b="1">
+                <a:solidFill>
+                  <a:srgbClr val="000000"/>
+                </a:solidFill>
+                <a:latin typeface="Arial"/>
+              </a:rPr>
+              <a:t>• Elimination of Substitution Bias: </a:t>
+            </a:r>
+            <a:r>
+              <a:rPr sz="1050">
+                <a:solidFill>
+                  <a:srgbClr val="0F172A"/>
+                </a:solidFill>
+                <a:latin typeface="Arial"/>
+              </a:rPr>
+              <a:t>Mathematically eliminates 20-30 bps upward inflation distortion via UN/ILO Jevons indexing.</a:t>
+            </a:r>
+          </a:p>
+        </p:txBody>
+      </p:sp>
+      <p:sp>
+        <p:nvSpPr>
+          <p:cNvPr id="8" name="Rectangle 7"/>
           <p:cNvSpPr/>
           <p:nvPr/>
         </p:nvSpPr>
         <p:spPr>
           <a:xfrm>
-            <a:off x="676656" y="1572768"/>
-            <a:ext cx="5230368" cy="1591056"/>
-          </a:xfrm>
-          <a:prstGeom prst="roundRect">
-            <a:avLst>
-              <a:gd name="adj" fmla="val 5000"/>
-            </a:avLst>
+            <a:off x="502920" y="3520440"/>
+            <a:ext cx="4572000" cy="2423160"/>
+          </a:xfrm>
+          <a:prstGeom prst="rect">
+            <a:avLst/>
           </a:prstGeom>
           <a:solidFill>
             <a:srgbClr val="FFFFFF"/>
           </a:solidFill>
-          <a:ln>
-            <a:noFill/>
+          <a:ln w="19050">
+            <a:solidFill>
+              <a:srgbClr val="1E40AF"/>
+            </a:solidFill>
           </a:ln>
         </p:spPr>
         <p:style>
@@ -6259,14 +7498,14 @@
       </p:sp>
       <p:sp>
         <p:nvSpPr>
-          <p:cNvPr id="8" name="TextBox 7"/>
+          <p:cNvPr id="9" name="TextBox 8"/>
           <p:cNvSpPr txBox="1"/>
           <p:nvPr/>
         </p:nvSpPr>
         <p:spPr>
           <a:xfrm>
-            <a:off x="777240" y="1243584"/>
-            <a:ext cx="5029200" cy="320040"/>
+            <a:off x="667512" y="3611880"/>
+            <a:ext cx="4242816" cy="2240280"/>
           </a:xfrm>
           <a:prstGeom prst="rect">
             <a:avLst/>
@@ -6274,91 +7513,160 @@
           <a:noFill/>
         </p:spPr>
         <p:txBody>
-          <a:bodyPr wrap="none">
+          <a:bodyPr wrap="square" lIns="0" tIns="0" rIns="0" bIns="0">
             <a:spAutoFit/>
           </a:bodyPr>
           <a:lstStyle/>
           <a:p>
             <a:pPr>
-              <a:defRPr sz="1150" b="1">
-                <a:solidFill>
-                  <a:srgbClr val="FFFFFF"/>
+              <a:spcAft>
+                <a:spcPts val="600"/>
+              </a:spcAft>
+              <a:defRPr sz="1600" b="1">
+                <a:solidFill>
+                  <a:srgbClr val="1E40AF"/>
                 </a:solidFill>
                 <a:latin typeface="Arial"/>
               </a:defRPr>
             </a:pPr>
             <a:r>
-              <a:t>🏛️ MoSPI NSO (Statistical Modernization)</a:t>
-            </a:r>
-          </a:p>
-        </p:txBody>
-      </p:sp>
-      <p:sp>
-        <p:nvSpPr>
-          <p:cNvPr id="9" name="TextBox 8"/>
-          <p:cNvSpPr txBox="1"/>
-          <p:nvPr/>
-        </p:nvSpPr>
-        <p:spPr>
-          <a:xfrm>
-            <a:off x="822960" y="1627632"/>
-            <a:ext cx="4937760" cy="1508760"/>
+              <a:t>Benefits:</a:t>
+            </a:r>
+          </a:p>
+          <a:p>
+            <a:pPr>
+              <a:lnSpc>
+                <a:spcPct val="115000"/>
+              </a:lnSpc>
+              <a:spcAft>
+                <a:spcPts val="400"/>
+              </a:spcAft>
+            </a:pPr>
+            <a:r>
+              <a:rPr sz="1050" b="1">
+                <a:solidFill>
+                  <a:srgbClr val="DC2626"/>
+                </a:solidFill>
+                <a:latin typeface="Arial"/>
+              </a:rPr>
+              <a:t>• Sovereign (MoSPI NSO): </a:t>
+            </a:r>
+            <a:r>
+              <a:rPr sz="1000">
+                <a:solidFill>
+                  <a:srgbClr val="0F172A"/>
+                </a:solidFill>
+                <a:latin typeface="Arial"/>
+              </a:rPr>
+              <a:t>Direct automated API feed into eSankhyiki &amp; NDAP; transparent, reproducible inflation indices.</a:t>
+            </a:r>
+          </a:p>
+          <a:p>
+            <a:pPr>
+              <a:lnSpc>
+                <a:spcPct val="115000"/>
+              </a:lnSpc>
+              <a:spcAft>
+                <a:spcPts val="400"/>
+              </a:spcAft>
+            </a:pPr>
+            <a:r>
+              <a:rPr sz="1050" b="1">
+                <a:solidFill>
+                  <a:srgbClr val="DC2626"/>
+                </a:solidFill>
+                <a:latin typeface="Arial"/>
+              </a:rPr>
+              <a:t>• Monetary Policy (RBI MPC): </a:t>
+            </a:r>
+            <a:r>
+              <a:rPr sz="1000">
+                <a:solidFill>
+                  <a:srgbClr val="0F172A"/>
+                </a:solidFill>
+                <a:latin typeface="Arial"/>
+              </a:rPr>
+              <a:t>Provides high-frequency leading transport inflation signals for proactive interest rate setting.</a:t>
+            </a:r>
+          </a:p>
+          <a:p>
+            <a:pPr>
+              <a:lnSpc>
+                <a:spcPct val="115000"/>
+              </a:lnSpc>
+              <a:spcAft>
+                <a:spcPts val="400"/>
+              </a:spcAft>
+            </a:pPr>
+            <a:r>
+              <a:rPr sz="1050" b="1">
+                <a:solidFill>
+                  <a:srgbClr val="DC2626"/>
+                </a:solidFill>
+                <a:latin typeface="Arial"/>
+              </a:rPr>
+              <a:t>• Economic &amp; Fiscal: </a:t>
+            </a:r>
+            <a:r>
+              <a:rPr sz="1000">
+                <a:solidFill>
+                  <a:srgbClr val="0F172A"/>
+                </a:solidFill>
+                <a:latin typeface="Arial"/>
+              </a:rPr>
+              <a:t>Saves ₹15+ Crores annually in physical surveyor travel and logistics overheads (&lt; ₹3,500/mo cloud cost).</a:t>
+            </a:r>
+          </a:p>
+          <a:p>
+            <a:pPr>
+              <a:lnSpc>
+                <a:spcPct val="115000"/>
+              </a:lnSpc>
+              <a:spcAft>
+                <a:spcPts val="400"/>
+              </a:spcAft>
+            </a:pPr>
+            <a:r>
+              <a:rPr sz="1050" b="1">
+                <a:solidFill>
+                  <a:srgbClr val="DC2626"/>
+                </a:solidFill>
+                <a:latin typeface="Arial"/>
+              </a:rPr>
+              <a:t>• National DPI: </a:t>
+            </a:r>
+            <a:r>
+              <a:rPr sz="1000">
+                <a:solidFill>
+                  <a:srgbClr val="0F172A"/>
+                </a:solidFill>
+                <a:latin typeface="Arial"/>
+              </a:rPr>
+              <a:t>India's first open, verifiable high-frequency price monitoring infrastructure with SHA-256 legal auditability.</a:t>
+            </a:r>
+          </a:p>
+        </p:txBody>
+      </p:sp>
+      <p:sp>
+        <p:nvSpPr>
+          <p:cNvPr id="10" name="Rectangle 9"/>
+          <p:cNvSpPr/>
+          <p:nvPr/>
+        </p:nvSpPr>
+        <p:spPr>
+          <a:xfrm>
+            <a:off x="5257800" y="1078992"/>
+            <a:ext cx="6428232" cy="2331720"/>
           </a:xfrm>
           <a:prstGeom prst="rect">
             <a:avLst/>
           </a:prstGeom>
-          <a:noFill/>
-        </p:spPr>
-        <p:txBody>
-          <a:bodyPr wrap="square" lIns="0" rIns="0" tIns="0" bIns="0">
-            <a:spAutoFit/>
-          </a:bodyPr>
-          <a:lstStyle/>
-          <a:p>
-            <a:pPr>
-              <a:defRPr sz="1150">
-                <a:solidFill>
-                  <a:srgbClr val="1E293B"/>
-                </a:solidFill>
-                <a:latin typeface="Arial"/>
-              </a:defRPr>
-            </a:pPr>
-            <a:r>
-              <a:t>• Slashes manual price collection lag from 15 days to real-time (0 days).</a:t>
-            </a:r>
-            <a:br/>
-            <a:r>
-              <a:t>• Ingests 10,000+ daily observations vs 1 monthly static manual quote.</a:t>
-            </a:r>
-            <a:br/>
-            <a:r>
-              <a:t>• Direct automated API feed into MoSPI eSankhyiki &amp; NDAP platforms.</a:t>
-            </a:r>
-          </a:p>
-        </p:txBody>
-      </p:sp>
-      <p:sp>
-        <p:nvSpPr>
-          <p:cNvPr id="10" name="Rounded Rectangle 9"/>
-          <p:cNvSpPr/>
-          <p:nvPr/>
-        </p:nvSpPr>
-        <p:spPr>
-          <a:xfrm>
-            <a:off x="6217920" y="1188720"/>
-            <a:ext cx="5303520" cy="2011680"/>
-          </a:xfrm>
-          <a:prstGeom prst="roundRect">
-            <a:avLst>
-              <a:gd name="adj" fmla="val 6000"/>
-            </a:avLst>
-          </a:prstGeom>
           <a:solidFill>
-            <a:srgbClr val="4338CA"/>
+            <a:srgbClr val="FFFFFF"/>
           </a:solidFill>
           <a:ln w="19050">
             <a:solidFill>
-              <a:srgbClr val="4338CA"/>
+              <a:srgbClr val="1E40AF"/>
             </a:solidFill>
           </a:ln>
         </p:spPr>
@@ -6386,25 +7694,83 @@
       </p:sp>
       <p:sp>
         <p:nvSpPr>
-          <p:cNvPr id="11" name="Rounded Rectangle 10"/>
+          <p:cNvPr id="11" name="TextBox 10"/>
+          <p:cNvSpPr txBox="1"/>
+          <p:nvPr/>
+        </p:nvSpPr>
+        <p:spPr>
+          <a:xfrm>
+            <a:off x="5367528" y="1115568"/>
+            <a:ext cx="6208776" cy="292608"/>
+          </a:xfrm>
+          <a:prstGeom prst="rect">
+            <a:avLst/>
+          </a:prstGeom>
+          <a:noFill/>
+        </p:spPr>
+        <p:txBody>
+          <a:bodyPr wrap="none" lIns="0" tIns="0" rIns="0" bIns="0">
+            <a:spAutoFit/>
+          </a:bodyPr>
+          <a:lstStyle/>
+          <a:p>
+            <a:r>
+              <a:rPr sz="1050" b="1">
+                <a:solidFill>
+                  <a:srgbClr val="DC2626"/>
+                </a:solidFill>
+                <a:latin typeface="Arial"/>
+              </a:rPr>
+              <a:t>PROTOTYPE IMAGE 1 (Live Real-Time Airfare Price Index Dashboard)</a:t>
+            </a:r>
+          </a:p>
+        </p:txBody>
+      </p:sp>
+      <p:pic>
+        <p:nvPicPr>
+          <p:cNvPr id="12" name="Picture 11" descr="vayusuchak_prototype_chart.png"/>
+          <p:cNvPicPr>
+            <a:picLocks noChangeAspect="1"/>
+          </p:cNvPicPr>
+          <p:nvPr/>
+        </p:nvPicPr>
+        <p:blipFill>
+          <a:blip r:embed="rId3"/>
+          <a:stretch>
+            <a:fillRect/>
+          </a:stretch>
+        </p:blipFill>
+        <p:spPr>
+          <a:xfrm>
+            <a:off x="5330952" y="1389888"/>
+            <a:ext cx="6281928" cy="1965960"/>
+          </a:xfrm>
+          <a:prstGeom prst="rect">
+            <a:avLst/>
+          </a:prstGeom>
+        </p:spPr>
+      </p:pic>
+      <p:sp>
+        <p:nvSpPr>
+          <p:cNvPr id="13" name="Rectangle 12"/>
           <p:cNvSpPr/>
           <p:nvPr/>
         </p:nvSpPr>
         <p:spPr>
           <a:xfrm>
-            <a:off x="6254496" y="1572768"/>
-            <a:ext cx="5230368" cy="1591056"/>
-          </a:xfrm>
-          <a:prstGeom prst="roundRect">
-            <a:avLst>
-              <a:gd name="adj" fmla="val 5000"/>
-            </a:avLst>
+            <a:off x="5257800" y="3520440"/>
+            <a:ext cx="6428232" cy="2423160"/>
+          </a:xfrm>
+          <a:prstGeom prst="rect">
+            <a:avLst/>
           </a:prstGeom>
           <a:solidFill>
             <a:srgbClr val="FFFFFF"/>
           </a:solidFill>
-          <a:ln>
-            <a:noFill/>
+          <a:ln w="19050">
+            <a:solidFill>
+              <a:srgbClr val="1E40AF"/>
+            </a:solidFill>
           </a:ln>
         </p:spPr>
         <p:style>
@@ -6431,14 +7797,14 @@
       </p:sp>
       <p:sp>
         <p:nvSpPr>
-          <p:cNvPr id="12" name="TextBox 11"/>
+          <p:cNvPr id="14" name="TextBox 13"/>
           <p:cNvSpPr txBox="1"/>
           <p:nvPr/>
         </p:nvSpPr>
         <p:spPr>
           <a:xfrm>
-            <a:off x="6355080" y="1243584"/>
-            <a:ext cx="5029200" cy="320040"/>
+            <a:off x="5367528" y="3557016"/>
+            <a:ext cx="6208776" cy="292608"/>
           </a:xfrm>
           <a:prstGeom prst="rect">
             <a:avLst/>
@@ -6446,92 +7812,68 @@
           <a:noFill/>
         </p:spPr>
         <p:txBody>
-          <a:bodyPr wrap="none">
+          <a:bodyPr wrap="none" lIns="0" tIns="0" rIns="0" bIns="0">
             <a:spAutoFit/>
           </a:bodyPr>
           <a:lstStyle/>
           <a:p>
-            <a:pPr>
-              <a:defRPr sz="1150" b="1">
-                <a:solidFill>
-                  <a:srgbClr val="FFFFFF"/>
-                </a:solidFill>
-                <a:latin typeface="Arial"/>
-              </a:defRPr>
-            </a:pPr>
-            <a:r>
-              <a:t>🏦 RBI MPC (Monetary Policy Targeting)</a:t>
-            </a:r>
-          </a:p>
-        </p:txBody>
-      </p:sp>
-      <p:sp>
-        <p:nvSpPr>
-          <p:cNvPr id="13" name="TextBox 12"/>
-          <p:cNvSpPr txBox="1"/>
-          <p:nvPr/>
-        </p:nvSpPr>
-        <p:spPr>
-          <a:xfrm>
-            <a:off x="6400800" y="1627632"/>
-            <a:ext cx="4937760" cy="1508760"/>
+            <a:r>
+              <a:rPr sz="1050" b="1">
+                <a:solidFill>
+                  <a:srgbClr val="DC2626"/>
+                </a:solidFill>
+                <a:latin typeface="Arial"/>
+              </a:rPr>
+              <a:t>PROTOTYPE IMAGE 2 (Corridor-Wise Yield &amp; Surge Analytics Table)</a:t>
+            </a:r>
+          </a:p>
+        </p:txBody>
+      </p:sp>
+      <p:pic>
+        <p:nvPicPr>
+          <p:cNvPr id="15" name="Picture 14" descr="vayusuchak_prototype_table.png"/>
+          <p:cNvPicPr>
+            <a:picLocks noChangeAspect="1"/>
+          </p:cNvPicPr>
+          <p:nvPr/>
+        </p:nvPicPr>
+        <p:blipFill>
+          <a:blip r:embed="rId4"/>
+          <a:stretch>
+            <a:fillRect/>
+          </a:stretch>
+        </p:blipFill>
+        <p:spPr>
+          <a:xfrm>
+            <a:off x="5330952" y="3840480"/>
+            <a:ext cx="6281928" cy="2057400"/>
           </a:xfrm>
           <a:prstGeom prst="rect">
             <a:avLst/>
           </a:prstGeom>
-          <a:noFill/>
-        </p:spPr>
-        <p:txBody>
-          <a:bodyPr wrap="square" lIns="0" rIns="0" tIns="0" bIns="0">
-            <a:spAutoFit/>
-          </a:bodyPr>
-          <a:lstStyle/>
-          <a:p>
-            <a:pPr>
-              <a:defRPr sz="1150">
-                <a:solidFill>
-                  <a:srgbClr val="1E293B"/>
-                </a:solidFill>
-                <a:latin typeface="Arial"/>
-              </a:defRPr>
-            </a:pPr>
-            <a:r>
-              <a:t>• Delivers high-frequency leading transport inflation indicator.</a:t>
-            </a:r>
-            <a:br/>
-            <a:r>
-              <a:t>• Enables timely interest rate calibration under flexible inflation targeting.</a:t>
-            </a:r>
-            <a:br/>
-            <a:r>
-              <a:t>• Eliminates 15-day policy blindspot in highly volatile travel cycles.</a:t>
-            </a:r>
-          </a:p>
-        </p:txBody>
-      </p:sp>
-      <p:sp>
-        <p:nvSpPr>
-          <p:cNvPr id="14" name="Rounded Rectangle 13"/>
+        </p:spPr>
+      </p:pic>
+      <p:sp>
+        <p:nvSpPr>
+          <p:cNvPr id="16" name="Rounded Rectangle 15"/>
           <p:cNvSpPr/>
           <p:nvPr/>
         </p:nvSpPr>
         <p:spPr>
           <a:xfrm>
-            <a:off x="640080" y="3337560"/>
-            <a:ext cx="5303520" cy="1828800"/>
+            <a:off x="502920" y="6053328"/>
+            <a:ext cx="11183112" cy="402336"/>
           </a:xfrm>
           <a:prstGeom prst="roundRect">
             <a:avLst>
-              <a:gd name="adj" fmla="val 6000"/>
+              <a:gd name="adj" fmla="val 50000"/>
             </a:avLst>
           </a:prstGeom>
           <a:solidFill>
-            <a:srgbClr val="0D9488"/>
+            <a:srgbClr val="10B981"/>
           </a:solidFill>
-          <a:ln w="19050">
-            <a:solidFill>
-              <a:srgbClr val="0D9488"/>
-            </a:solidFill>
+          <a:ln>
+            <a:noFill/>
           </a:ln>
         </p:spPr>
         <p:style>
@@ -6549,773 +7891,37 @@
           </a:fontRef>
         </p:style>
         <p:txBody>
-          <a:bodyPr rtlCol="0" anchor="ctr"/>
+          <a:bodyPr rtlCol="0" anchor="ctr" lIns="0" rIns="0" tIns="0" bIns="0"/>
           <a:lstStyle/>
           <a:p>
             <a:pPr algn="ctr"/>
-          </a:p>
-        </p:txBody>
-      </p:sp>
-      <p:sp>
-        <p:nvSpPr>
-          <p:cNvPr id="15" name="Rounded Rectangle 14"/>
-          <p:cNvSpPr/>
-          <p:nvPr/>
-        </p:nvSpPr>
-        <p:spPr>
-          <a:xfrm>
-            <a:off x="676656" y="3721608"/>
-            <a:ext cx="5230368" cy="1408176"/>
-          </a:xfrm>
-          <a:prstGeom prst="roundRect">
-            <a:avLst>
-              <a:gd name="adj" fmla="val 5000"/>
-            </a:avLst>
-          </a:prstGeom>
-          <a:solidFill>
-            <a:srgbClr val="FFFFFF"/>
-          </a:solidFill>
-          <a:ln>
-            <a:noFill/>
-          </a:ln>
-        </p:spPr>
-        <p:style>
-          <a:lnRef idx="1">
-            <a:schemeClr val="accent1"/>
-          </a:lnRef>
-          <a:fillRef idx="3">
-            <a:schemeClr val="accent1"/>
-          </a:fillRef>
-          <a:effectRef idx="2">
-            <a:schemeClr val="accent1"/>
-          </a:effectRef>
-          <a:fontRef idx="minor">
-            <a:schemeClr val="lt1"/>
-          </a:fontRef>
-        </p:style>
-        <p:txBody>
-          <a:bodyPr rtlCol="0" anchor="ctr"/>
-          <a:lstStyle/>
-          <a:p>
-            <a:pPr algn="ctr"/>
-          </a:p>
-        </p:txBody>
-      </p:sp>
-      <p:sp>
-        <p:nvSpPr>
-          <p:cNvPr id="16" name="TextBox 15"/>
-          <p:cNvSpPr txBox="1"/>
-          <p:nvPr/>
-        </p:nvSpPr>
-        <p:spPr>
-          <a:xfrm>
-            <a:off x="777240" y="3392424"/>
-            <a:ext cx="5029200" cy="320040"/>
-          </a:xfrm>
-          <a:prstGeom prst="rect">
-            <a:avLst/>
-          </a:prstGeom>
-          <a:noFill/>
-        </p:spPr>
-        <p:txBody>
-          <a:bodyPr wrap="none">
-            <a:spAutoFit/>
-          </a:bodyPr>
-          <a:lstStyle/>
-          <a:p>
-            <a:pPr>
-              <a:defRPr sz="1150" b="1">
+            <a:r>
+              <a:rPr sz="1100" b="1">
                 <a:solidFill>
                   <a:srgbClr val="FFFFFF"/>
                 </a:solidFill>
                 <a:latin typeface="Arial"/>
-              </a:defRPr>
-            </a:pPr>
-            <a:r>
-              <a:t>✈️ DGCA (Aviation Regulation &amp; Oversight)</a:t>
-            </a:r>
-          </a:p>
-        </p:txBody>
-      </p:sp>
-      <p:sp>
-        <p:nvSpPr>
-          <p:cNvPr id="17" name="TextBox 16"/>
-          <p:cNvSpPr txBox="1"/>
-          <p:nvPr/>
-        </p:nvSpPr>
-        <p:spPr>
-          <a:xfrm>
-            <a:off x="822960" y="3776472"/>
-            <a:ext cx="4937760" cy="1325880"/>
-          </a:xfrm>
-          <a:prstGeom prst="rect">
-            <a:avLst/>
-          </a:prstGeom>
-          <a:noFill/>
-        </p:spPr>
-        <p:txBody>
-          <a:bodyPr wrap="square" lIns="0" rIns="0" tIns="0" bIns="0">
-            <a:spAutoFit/>
-          </a:bodyPr>
-          <a:lstStyle/>
-          <a:p>
-            <a:pPr>
-              <a:defRPr sz="1150">
-                <a:solidFill>
-                  <a:srgbClr val="1E293B"/>
-                </a:solidFill>
-                <a:latin typeface="Arial"/>
-              </a:defRPr>
-            </a:pPr>
-            <a:r>
-              <a:t>• Real-time surge anomaly detection to catch predatory pricing.</a:t>
-            </a:r>
-            <a:br/>
-            <a:r>
-              <a:t>• Route monopoly identification and holiday season fare gouging alerts.</a:t>
-            </a:r>
-            <a:br/>
-            <a:r>
-              <a:t>• Standardized route yield analytics across 12 domestic corridors.</a:t>
-            </a:r>
-          </a:p>
-        </p:txBody>
-      </p:sp>
-      <p:sp>
-        <p:nvSpPr>
-          <p:cNvPr id="18" name="Rounded Rectangle 17"/>
-          <p:cNvSpPr/>
-          <p:nvPr/>
-        </p:nvSpPr>
-        <p:spPr>
-          <a:xfrm>
-            <a:off x="6217920" y="3337560"/>
-            <a:ext cx="5303520" cy="1828800"/>
-          </a:xfrm>
-          <a:prstGeom prst="roundRect">
-            <a:avLst>
-              <a:gd name="adj" fmla="val 6000"/>
-            </a:avLst>
-          </a:prstGeom>
-          <a:solidFill>
-            <a:srgbClr val="7C3AED"/>
-          </a:solidFill>
-          <a:ln w="19050">
-            <a:solidFill>
-              <a:srgbClr val="7C3AED"/>
-            </a:solidFill>
-          </a:ln>
-        </p:spPr>
-        <p:style>
-          <a:lnRef idx="1">
-            <a:schemeClr val="accent1"/>
-          </a:lnRef>
-          <a:fillRef idx="3">
-            <a:schemeClr val="accent1"/>
-          </a:fillRef>
-          <a:effectRef idx="2">
-            <a:schemeClr val="accent1"/>
-          </a:effectRef>
-          <a:fontRef idx="minor">
-            <a:schemeClr val="lt1"/>
-          </a:fontRef>
-        </p:style>
-        <p:txBody>
-          <a:bodyPr rtlCol="0" anchor="ctr"/>
-          <a:lstStyle/>
-          <a:p>
-            <a:pPr algn="ctr"/>
-          </a:p>
-        </p:txBody>
-      </p:sp>
-      <p:sp>
-        <p:nvSpPr>
-          <p:cNvPr id="19" name="Rounded Rectangle 18"/>
-          <p:cNvSpPr/>
-          <p:nvPr/>
-        </p:nvSpPr>
-        <p:spPr>
-          <a:xfrm>
-            <a:off x="6254496" y="3721608"/>
-            <a:ext cx="5230368" cy="1408176"/>
-          </a:xfrm>
-          <a:prstGeom prst="roundRect">
-            <a:avLst>
-              <a:gd name="adj" fmla="val 5000"/>
-            </a:avLst>
-          </a:prstGeom>
-          <a:solidFill>
-            <a:srgbClr val="FFFFFF"/>
-          </a:solidFill>
-          <a:ln>
-            <a:noFill/>
-          </a:ln>
-        </p:spPr>
-        <p:style>
-          <a:lnRef idx="1">
-            <a:schemeClr val="accent1"/>
-          </a:lnRef>
-          <a:fillRef idx="3">
-            <a:schemeClr val="accent1"/>
-          </a:fillRef>
-          <a:effectRef idx="2">
-            <a:schemeClr val="accent1"/>
-          </a:effectRef>
-          <a:fontRef idx="minor">
-            <a:schemeClr val="lt1"/>
-          </a:fontRef>
-        </p:style>
-        <p:txBody>
-          <a:bodyPr rtlCol="0" anchor="ctr"/>
-          <a:lstStyle/>
-          <a:p>
-            <a:pPr algn="ctr"/>
-          </a:p>
-        </p:txBody>
-      </p:sp>
-      <p:sp>
-        <p:nvSpPr>
-          <p:cNvPr id="20" name="TextBox 19"/>
-          <p:cNvSpPr txBox="1"/>
-          <p:nvPr/>
-        </p:nvSpPr>
-        <p:spPr>
-          <a:xfrm>
-            <a:off x="6355080" y="3392424"/>
-            <a:ext cx="5029200" cy="320040"/>
-          </a:xfrm>
-          <a:prstGeom prst="rect">
-            <a:avLst/>
-          </a:prstGeom>
-          <a:noFill/>
-        </p:spPr>
-        <p:txBody>
-          <a:bodyPr wrap="none">
-            <a:spAutoFit/>
-          </a:bodyPr>
-          <a:lstStyle/>
-          <a:p>
-            <a:pPr>
-              <a:defRPr sz="1150" b="1">
+              </a:rPr>
+              <a:t>🚀 Live Interactive Prototype: </a:t>
+            </a:r>
+            <a:r>
+              <a:rPr sz="1100" b="1" u="sng">
                 <a:solidFill>
                   <a:srgbClr val="FFFFFF"/>
                 </a:solidFill>
                 <a:latin typeface="Arial"/>
-              </a:defRPr>
-            </a:pPr>
-            <a:r>
-              <a:t>🇮🇳 National DPI (Digital Public Infrastructure)</a:t>
-            </a:r>
-          </a:p>
-        </p:txBody>
-      </p:sp>
-      <p:sp>
-        <p:nvSpPr>
-          <p:cNvPr id="21" name="TextBox 20"/>
-          <p:cNvSpPr txBox="1"/>
-          <p:nvPr/>
-        </p:nvSpPr>
-        <p:spPr>
-          <a:xfrm>
-            <a:off x="6400800" y="3776472"/>
-            <a:ext cx="4937760" cy="1325880"/>
-          </a:xfrm>
-          <a:prstGeom prst="rect">
-            <a:avLst/>
-          </a:prstGeom>
-          <a:noFill/>
-        </p:spPr>
-        <p:txBody>
-          <a:bodyPr wrap="square" lIns="0" rIns="0" tIns="0" bIns="0">
-            <a:spAutoFit/>
-          </a:bodyPr>
-          <a:lstStyle/>
-          <a:p>
-            <a:pPr>
-              <a:defRPr sz="1150">
-                <a:solidFill>
-                  <a:srgbClr val="1E293B"/>
-                </a:solidFill>
-                <a:latin typeface="Arial"/>
-              </a:defRPr>
-            </a:pPr>
-            <a:r>
-              <a:t>• India's first open sovereign high-frequency price monitoring platform.</a:t>
-            </a:r>
-            <a:br/>
-            <a:r>
-              <a:t>• Immutable SHA-256 batch cryptographic auditability for legal scrutiny.</a:t>
-            </a:r>
-            <a:br/>
-            <a:r>
-              <a:t>• Scalable architecture designed for 250+ UDAN regional airports.</a:t>
-            </a:r>
-          </a:p>
-        </p:txBody>
-      </p:sp>
-      <p:sp>
-        <p:nvSpPr>
-          <p:cNvPr id="22" name="Rounded Rectangle 21"/>
-          <p:cNvSpPr/>
-          <p:nvPr/>
-        </p:nvSpPr>
-        <p:spPr>
-          <a:xfrm>
-            <a:off x="640080" y="5303520"/>
-            <a:ext cx="10908792" cy="1188720"/>
-          </a:xfrm>
-          <a:prstGeom prst="roundRect">
-            <a:avLst>
-              <a:gd name="adj" fmla="val 8000"/>
-            </a:avLst>
-          </a:prstGeom>
-          <a:solidFill>
-            <a:srgbClr val="F1F5F9"/>
-          </a:solidFill>
-          <a:ln w="19050">
-            <a:solidFill>
-              <a:srgbClr val="CBD5E1"/>
-            </a:solidFill>
-          </a:ln>
-        </p:spPr>
-        <p:style>
-          <a:lnRef idx="1">
-            <a:schemeClr val="accent1"/>
-          </a:lnRef>
-          <a:fillRef idx="3">
-            <a:schemeClr val="accent1"/>
-          </a:fillRef>
-          <a:effectRef idx="2">
-            <a:schemeClr val="accent1"/>
-          </a:effectRef>
-          <a:fontRef idx="minor">
-            <a:schemeClr val="lt1"/>
-          </a:fontRef>
-        </p:style>
-        <p:txBody>
-          <a:bodyPr rtlCol="0" anchor="ctr"/>
-          <a:lstStyle/>
-          <a:p>
-            <a:pPr algn="ctr"/>
-          </a:p>
-        </p:txBody>
-      </p:sp>
-      <p:sp>
-        <p:nvSpPr>
-          <p:cNvPr id="23" name="TextBox 22"/>
-          <p:cNvSpPr txBox="1"/>
-          <p:nvPr/>
-        </p:nvSpPr>
-        <p:spPr>
-          <a:xfrm>
-            <a:off x="822960" y="5349240"/>
-            <a:ext cx="10515600" cy="274320"/>
-          </a:xfrm>
-          <a:prstGeom prst="rect">
-            <a:avLst/>
-          </a:prstGeom>
-          <a:noFill/>
-        </p:spPr>
-        <p:txBody>
-          <a:bodyPr wrap="none">
-            <a:spAutoFit/>
-          </a:bodyPr>
-          <a:lstStyle/>
-          <a:p>
-            <a:pPr algn="ctr">
-              <a:defRPr sz="1100" b="1">
-                <a:solidFill>
-                  <a:srgbClr val="1B365D"/>
-                </a:solidFill>
-                <a:latin typeface="Arial"/>
-              </a:defRPr>
-            </a:pPr>
-            <a:r>
-              <a:t>STRATEGIC FUTURE ROADMAP &amp; SCALABILITY HORIZONS</a:t>
-            </a:r>
-          </a:p>
-        </p:txBody>
-      </p:sp>
-      <p:sp>
-        <p:nvSpPr>
-          <p:cNvPr id="24" name="Rounded Rectangle 23"/>
-          <p:cNvSpPr/>
-          <p:nvPr/>
-        </p:nvSpPr>
-        <p:spPr>
-          <a:xfrm>
-            <a:off x="822960" y="5623560"/>
-            <a:ext cx="2560320" cy="777240"/>
-          </a:xfrm>
-          <a:prstGeom prst="roundRect">
-            <a:avLst>
-              <a:gd name="adj" fmla="val 15000"/>
-            </a:avLst>
-          </a:prstGeom>
-          <a:solidFill>
-            <a:srgbClr val="FFFFFF"/>
-          </a:solidFill>
-          <a:ln w="12700">
-            <a:solidFill>
-              <a:srgbClr val="2563EB"/>
-            </a:solidFill>
-          </a:ln>
-        </p:spPr>
-        <p:style>
-          <a:lnRef idx="1">
-            <a:schemeClr val="accent1"/>
-          </a:lnRef>
-          <a:fillRef idx="3">
-            <a:schemeClr val="accent1"/>
-          </a:fillRef>
-          <a:effectRef idx="2">
-            <a:schemeClr val="accent1"/>
-          </a:effectRef>
-          <a:fontRef idx="minor">
-            <a:schemeClr val="lt1"/>
-          </a:fontRef>
-        </p:style>
-        <p:txBody>
-          <a:bodyPr rtlCol="0" anchor="ctr"/>
-          <a:lstStyle/>
-          <a:p>
-            <a:pPr algn="ctr"/>
-          </a:p>
-        </p:txBody>
-      </p:sp>
-      <p:sp>
-        <p:nvSpPr>
-          <p:cNvPr id="25" name="TextBox 24"/>
-          <p:cNvSpPr txBox="1"/>
-          <p:nvPr/>
-        </p:nvSpPr>
-        <p:spPr>
-          <a:xfrm>
-            <a:off x="896112" y="5650992"/>
-            <a:ext cx="2414016" cy="713232"/>
-          </a:xfrm>
-          <a:prstGeom prst="rect">
-            <a:avLst/>
-          </a:prstGeom>
-          <a:noFill/>
-        </p:spPr>
-        <p:txBody>
-          <a:bodyPr wrap="square" lIns="0" rIns="0" tIns="0" bIns="0">
-            <a:spAutoFit/>
-          </a:bodyPr>
-          <a:lstStyle/>
-          <a:p>
-            <a:pPr algn="ctr">
-              <a:defRPr sz="950" b="1">
-                <a:solidFill>
-                  <a:srgbClr val="2563EB"/>
-                </a:solidFill>
-                <a:latin typeface="Arial"/>
-              </a:defRPr>
-            </a:pPr>
-            <a:r>
-              <a:t>PHASE 1 (LIVE)</a:t>
-            </a:r>
-          </a:p>
-          <a:p>
-            <a:pPr algn="ctr">
-              <a:defRPr sz="850">
-                <a:solidFill>
-                  <a:srgbClr val="1E293B"/>
-                </a:solidFill>
-                <a:latin typeface="Arial"/>
-              </a:defRPr>
-            </a:pPr>
-            <a:r>
-              <a:t>12 Core Metro Corridors deployed on Vercel Edge with daily cron</a:t>
-            </a:r>
-          </a:p>
-        </p:txBody>
-      </p:sp>
-      <p:sp>
-        <p:nvSpPr>
-          <p:cNvPr id="26" name="Rounded Rectangle 25"/>
-          <p:cNvSpPr/>
-          <p:nvPr/>
-        </p:nvSpPr>
-        <p:spPr>
-          <a:xfrm>
-            <a:off x="3520440" y="5623560"/>
-            <a:ext cx="2560320" cy="777240"/>
-          </a:xfrm>
-          <a:prstGeom prst="roundRect">
-            <a:avLst>
-              <a:gd name="adj" fmla="val 15000"/>
-            </a:avLst>
-          </a:prstGeom>
-          <a:solidFill>
-            <a:srgbClr val="FFFFFF"/>
-          </a:solidFill>
-          <a:ln w="12700">
-            <a:solidFill>
-              <a:srgbClr val="2563EB"/>
-            </a:solidFill>
-          </a:ln>
-        </p:spPr>
-        <p:style>
-          <a:lnRef idx="1">
-            <a:schemeClr val="accent1"/>
-          </a:lnRef>
-          <a:fillRef idx="3">
-            <a:schemeClr val="accent1"/>
-          </a:fillRef>
-          <a:effectRef idx="2">
-            <a:schemeClr val="accent1"/>
-          </a:effectRef>
-          <a:fontRef idx="minor">
-            <a:schemeClr val="lt1"/>
-          </a:fontRef>
-        </p:style>
-        <p:txBody>
-          <a:bodyPr rtlCol="0" anchor="ctr"/>
-          <a:lstStyle/>
-          <a:p>
-            <a:pPr algn="ctr"/>
-          </a:p>
-        </p:txBody>
-      </p:sp>
-      <p:sp>
-        <p:nvSpPr>
-          <p:cNvPr id="27" name="TextBox 26"/>
-          <p:cNvSpPr txBox="1"/>
-          <p:nvPr/>
-        </p:nvSpPr>
-        <p:spPr>
-          <a:xfrm>
-            <a:off x="3593592" y="5650992"/>
-            <a:ext cx="2414016" cy="713232"/>
-          </a:xfrm>
-          <a:prstGeom prst="rect">
-            <a:avLst/>
-          </a:prstGeom>
-          <a:noFill/>
-        </p:spPr>
-        <p:txBody>
-          <a:bodyPr wrap="square" lIns="0" rIns="0" tIns="0" bIns="0">
-            <a:spAutoFit/>
-          </a:bodyPr>
-          <a:lstStyle/>
-          <a:p>
-            <a:pPr algn="ctr">
-              <a:defRPr sz="950" b="1">
-                <a:solidFill>
-                  <a:srgbClr val="2563EB"/>
-                </a:solidFill>
-                <a:latin typeface="Arial"/>
-              </a:defRPr>
-            </a:pPr>
-            <a:r>
-              <a:t>PHASE 2 (T+6M)</a:t>
-            </a:r>
-          </a:p>
-          <a:p>
-            <a:pPr algn="ctr">
-              <a:defRPr sz="850">
-                <a:solidFill>
-                  <a:srgbClr val="1E293B"/>
-                </a:solidFill>
-                <a:latin typeface="Arial"/>
-              </a:defRPr>
-            </a:pPr>
-            <a:r>
-              <a:t>Scale to 250+ Tier-2/Tier-3 RCS-UDAN regional routes nationwide</a:t>
-            </a:r>
-          </a:p>
-        </p:txBody>
-      </p:sp>
-      <p:sp>
-        <p:nvSpPr>
-          <p:cNvPr id="28" name="Rounded Rectangle 27"/>
-          <p:cNvSpPr/>
-          <p:nvPr/>
-        </p:nvSpPr>
-        <p:spPr>
-          <a:xfrm>
-            <a:off x="6217920" y="5623560"/>
-            <a:ext cx="2560320" cy="777240"/>
-          </a:xfrm>
-          <a:prstGeom prst="roundRect">
-            <a:avLst>
-              <a:gd name="adj" fmla="val 15000"/>
-            </a:avLst>
-          </a:prstGeom>
-          <a:solidFill>
-            <a:srgbClr val="FFFFFF"/>
-          </a:solidFill>
-          <a:ln w="12700">
-            <a:solidFill>
-              <a:srgbClr val="2563EB"/>
-            </a:solidFill>
-          </a:ln>
-        </p:spPr>
-        <p:style>
-          <a:lnRef idx="1">
-            <a:schemeClr val="accent1"/>
-          </a:lnRef>
-          <a:fillRef idx="3">
-            <a:schemeClr val="accent1"/>
-          </a:fillRef>
-          <a:effectRef idx="2">
-            <a:schemeClr val="accent1"/>
-          </a:effectRef>
-          <a:fontRef idx="minor">
-            <a:schemeClr val="lt1"/>
-          </a:fontRef>
-        </p:style>
-        <p:txBody>
-          <a:bodyPr rtlCol="0" anchor="ctr"/>
-          <a:lstStyle/>
-          <a:p>
-            <a:pPr algn="ctr"/>
-          </a:p>
-        </p:txBody>
-      </p:sp>
-      <p:sp>
-        <p:nvSpPr>
-          <p:cNvPr id="29" name="TextBox 28"/>
-          <p:cNvSpPr txBox="1"/>
-          <p:nvPr/>
-        </p:nvSpPr>
-        <p:spPr>
-          <a:xfrm>
-            <a:off x="6291072" y="5650992"/>
-            <a:ext cx="2414016" cy="713232"/>
-          </a:xfrm>
-          <a:prstGeom prst="rect">
-            <a:avLst/>
-          </a:prstGeom>
-          <a:noFill/>
-        </p:spPr>
-        <p:txBody>
-          <a:bodyPr wrap="square" lIns="0" rIns="0" tIns="0" bIns="0">
-            <a:spAutoFit/>
-          </a:bodyPr>
-          <a:lstStyle/>
-          <a:p>
-            <a:pPr algn="ctr">
-              <a:defRPr sz="950" b="1">
-                <a:solidFill>
-                  <a:srgbClr val="2563EB"/>
-                </a:solidFill>
-                <a:latin typeface="Arial"/>
-              </a:defRPr>
-            </a:pPr>
-            <a:r>
-              <a:t>PHASE 3 (T+12M)</a:t>
-            </a:r>
-          </a:p>
-          <a:p>
-            <a:pPr algn="ctr">
-              <a:defRPr sz="850">
-                <a:solidFill>
-                  <a:srgbClr val="1E293B"/>
-                </a:solidFill>
-                <a:latin typeface="Arial"/>
-              </a:defRPr>
-            </a:pPr>
-            <a:r>
-              <a:t>Granular decomposition into Economy, Premium, and Business indices</a:t>
-            </a:r>
-          </a:p>
-        </p:txBody>
-      </p:sp>
-      <p:sp>
-        <p:nvSpPr>
-          <p:cNvPr id="30" name="Rounded Rectangle 29"/>
-          <p:cNvSpPr/>
-          <p:nvPr/>
-        </p:nvSpPr>
-        <p:spPr>
-          <a:xfrm>
-            <a:off x="8915400" y="5623560"/>
-            <a:ext cx="2560320" cy="777240"/>
-          </a:xfrm>
-          <a:prstGeom prst="roundRect">
-            <a:avLst>
-              <a:gd name="adj" fmla="val 15000"/>
-            </a:avLst>
-          </a:prstGeom>
-          <a:solidFill>
-            <a:srgbClr val="FFFFFF"/>
-          </a:solidFill>
-          <a:ln w="12700">
-            <a:solidFill>
-              <a:srgbClr val="2563EB"/>
-            </a:solidFill>
-          </a:ln>
-        </p:spPr>
-        <p:style>
-          <a:lnRef idx="1">
-            <a:schemeClr val="accent1"/>
-          </a:lnRef>
-          <a:fillRef idx="3">
-            <a:schemeClr val="accent1"/>
-          </a:fillRef>
-          <a:effectRef idx="2">
-            <a:schemeClr val="accent1"/>
-          </a:effectRef>
-          <a:fontRef idx="minor">
-            <a:schemeClr val="lt1"/>
-          </a:fontRef>
-        </p:style>
-        <p:txBody>
-          <a:bodyPr rtlCol="0" anchor="ctr"/>
-          <a:lstStyle/>
-          <a:p>
-            <a:pPr algn="ctr"/>
-          </a:p>
-        </p:txBody>
-      </p:sp>
-      <p:sp>
-        <p:nvSpPr>
-          <p:cNvPr id="31" name="TextBox 30"/>
-          <p:cNvSpPr txBox="1"/>
-          <p:nvPr/>
-        </p:nvSpPr>
-        <p:spPr>
-          <a:xfrm>
-            <a:off x="8988552" y="5650992"/>
-            <a:ext cx="2414016" cy="713232"/>
-          </a:xfrm>
-          <a:prstGeom prst="rect">
-            <a:avLst/>
-          </a:prstGeom>
-          <a:noFill/>
-        </p:spPr>
-        <p:txBody>
-          <a:bodyPr wrap="square" lIns="0" rIns="0" tIns="0" bIns="0">
-            <a:spAutoFit/>
-          </a:bodyPr>
-          <a:lstStyle/>
-          <a:p>
-            <a:pPr algn="ctr">
-              <a:defRPr sz="950" b="1">
-                <a:solidFill>
-                  <a:srgbClr val="2563EB"/>
-                </a:solidFill>
-                <a:latin typeface="Arial"/>
-              </a:defRPr>
-            </a:pPr>
-            <a:r>
-              <a:t>PHASE 4 (T+18M)</a:t>
-            </a:r>
-          </a:p>
-          <a:p>
-            <a:pPr algn="ctr">
-              <a:defRPr sz="850">
-                <a:solidFill>
-                  <a:srgbClr val="1E293B"/>
-                </a:solidFill>
-                <a:latin typeface="Arial"/>
-              </a:defRPr>
-            </a:pPr>
-            <a:r>
-              <a:t>Autonomous LLM Inflation Analyst drafting automated MoSPI briefs</a:t>
+                <a:hlinkClick r:id="rId5"/>
+              </a:rPr>
+              <a:t>https://sih26056-airfare-cpi.vercel.app ↗</a:t>
+            </a:r>
+            <a:r>
+              <a:rPr sz="1050">
+                <a:solidFill>
+                  <a:srgbClr val="F0FDF4"/>
+                </a:solidFill>
+                <a:latin typeface="Arial"/>
+              </a:rPr>
+              <a:t>   |   Click to Explore Live Real-Time Dashboard &amp; Ingestion Engine</a:t>
             </a:r>
           </a:p>
         </p:txBody>
@@ -7389,8 +7995,8 @@
         </p:nvSpPr>
         <p:spPr>
           <a:xfrm>
-            <a:off x="548640" y="201168"/>
-            <a:ext cx="1645920" cy="566928"/>
+            <a:off x="502920" y="201168"/>
+            <a:ext cx="1645920" cy="502920"/>
           </a:xfrm>
           <a:prstGeom prst="roundRect">
             <a:avLst>
@@ -7402,7 +8008,7 @@
           </a:solidFill>
           <a:ln w="19050">
             <a:solidFill>
-              <a:srgbClr val="4338CA"/>
+              <a:srgbClr val="64748B"/>
             </a:solidFill>
           </a:ln>
         </p:spPr>
@@ -7425,15 +8031,15 @@
           <a:lstStyle/>
           <a:p>
             <a:pPr algn="ctr">
-              <a:defRPr sz="1200" b="1">
-                <a:solidFill>
-                  <a:srgbClr val="4338CA"/>
+              <a:defRPr sz="1300" b="1">
+                <a:solidFill>
+                  <a:srgbClr val="000000"/>
                 </a:solidFill>
                 <a:latin typeface="Arial"/>
               </a:defRPr>
             </a:pPr>
             <a:r>
-              <a:t>Team Rookie</a:t>
+              <a:t>Roorkies</a:t>
             </a:r>
           </a:p>
         </p:txBody>
@@ -7446,7 +8052,7 @@
         </p:nvSpPr>
         <p:spPr>
           <a:xfrm>
-            <a:off x="2286000" y="137160"/>
+            <a:off x="2286000" y="109728"/>
             <a:ext cx="7589520" cy="868680"/>
           </a:xfrm>
           <a:prstGeom prst="rect">
@@ -7461,7 +8067,7 @@
           <a:lstStyle/>
           <a:p>
             <a:pPr algn="ctr">
-              <a:defRPr sz="2600" b="1">
+              <a:defRPr sz="2500" b="1">
                 <a:solidFill>
                   <a:srgbClr val="1B365D"/>
                 </a:solidFill>
@@ -7474,11 +8080,11 @@
           </a:p>
           <a:p>
             <a:pPr algn="ctr">
-              <a:defRPr sz="1200" b="1">
-                <a:solidFill>
-                  <a:srgbClr val="184C94"/>
-                </a:solidFill>
-                <a:latin typeface="Arial"/>
+              <a:defRPr sz="1800" b="1">
+                <a:solidFill>
+                  <a:srgbClr val="1E40AF"/>
+                </a:solidFill>
+                <a:latin typeface="Times New Roman"/>
               </a:defRPr>
             </a:pPr>
             <a:r>
@@ -7489,7 +8095,7 @@
       </p:sp>
       <p:pic>
         <p:nvPicPr>
-          <p:cNvPr id="5" name="Picture 4" descr="sih_2026_logo_hd.png"/>
+          <p:cNvPr id="5" name="Picture 4" descr="page_1_img_2.png"/>
           <p:cNvPicPr>
             <a:picLocks noChangeAspect="1"/>
           </p:cNvPicPr>
@@ -7503,7 +8109,7 @@
         </p:blipFill>
         <p:spPr>
           <a:xfrm>
-            <a:off x="10149840" y="146304"/>
+            <a:off x="10149840" y="109728"/>
             <a:ext cx="1645920" cy="777240"/>
           </a:xfrm>
           <a:prstGeom prst="rect">
@@ -7519,8 +8125,8 @@
         </p:nvSpPr>
         <p:spPr>
           <a:xfrm>
-            <a:off x="731520" y="1280160"/>
-            <a:ext cx="5120640" cy="2377440"/>
+            <a:off x="685800" y="1143000"/>
+            <a:ext cx="5212080" cy="2487168"/>
           </a:xfrm>
           <a:prstGeom prst="roundRect">
             <a:avLst>
@@ -7528,11 +8134,11 @@
             </a:avLst>
           </a:prstGeom>
           <a:solidFill>
-            <a:srgbClr val="E0F2FE"/>
+            <a:srgbClr val="EFF6FF"/>
           </a:solidFill>
           <a:ln w="19050">
             <a:solidFill>
-              <a:srgbClr val="0EA5E9"/>
+              <a:srgbClr val="2563EB"/>
             </a:solidFill>
           </a:ln>
         </p:spPr>
@@ -7566,8 +8172,8 @@
         </p:nvSpPr>
         <p:spPr>
           <a:xfrm>
-            <a:off x="1005840" y="1463040"/>
-            <a:ext cx="4572000" cy="2011680"/>
+            <a:off x="886968" y="1252728"/>
+            <a:ext cx="4809744" cy="2267712"/>
           </a:xfrm>
           <a:prstGeom prst="rect">
             <a:avLst/>
@@ -7582,11 +8188,11 @@
           <a:p>
             <a:pPr algn="ctr">
               <a:spcAft>
-                <a:spcPts val="800"/>
+                <a:spcPts val="600"/>
               </a:spcAft>
-              <a:defRPr sz="1350" b="1">
-                <a:solidFill>
-                  <a:srgbClr val="0369A1"/>
+              <a:defRPr sz="1200" b="1">
+                <a:solidFill>
+                  <a:srgbClr val="1D4ED8"/>
                 </a:solidFill>
                 <a:latin typeface="Arial"/>
               </a:defRPr>
@@ -7597,34 +8203,116 @@
           </a:p>
           <a:p>
             <a:pPr>
+              <a:lnSpc>
+                <a:spcPct val="115000"/>
+              </a:lnSpc>
               <a:spcAft>
-                <a:spcPts val="500"/>
+                <a:spcPts val="350"/>
               </a:spcAft>
             </a:pPr>
             <a:r>
-              <a:rPr sz="1050">
-                <a:solidFill>
-                  <a:srgbClr val="1E293B"/>
-                </a:solidFill>
-                <a:latin typeface="Arial"/>
-              </a:rPr>
-              <a:t>• Cavallo, A., &amp; Rigobon, R. (2016). 'The Billion Prices Project: Using Online Data for Measurement and Research.' Journal of Economic Perspectives, 30(2), 151-178.</a:t>
+              <a:rPr sz="900" b="1">
+                <a:solidFill>
+                  <a:srgbClr val="0F172A"/>
+                </a:solidFill>
+                <a:latin typeface="Arial"/>
+              </a:rPr>
+              <a:t>• </a:t>
+            </a:r>
+            <a:r>
+              <a:rPr sz="880">
+                <a:solidFill>
+                  <a:srgbClr val="0F172A"/>
+                </a:solidFill>
+                <a:latin typeface="Arial"/>
+              </a:rPr>
+              <a:t>Cavallo &amp; Rigobon (2016). 'The Billion Prices Project: Using Online Data for Measurement.' J. Econ. Perspect. </a:t>
+            </a:r>
+            <a:r>
+              <a:rPr sz="880" b="1" u="sng">
+                <a:solidFill>
+                  <a:srgbClr val="1D4ED8"/>
+                </a:solidFill>
+                <a:latin typeface="Arial"/>
+                <a:hlinkClick r:id="rId3"/>
+              </a:rPr>
+              <a:t>[doi:10.1257/jep.30.2.151 ↗]</a:t>
             </a:r>
           </a:p>
           <a:p>
             <a:pPr>
+              <a:lnSpc>
+                <a:spcPct val="115000"/>
+              </a:lnSpc>
               <a:spcAft>
-                <a:spcPts val="500"/>
+                <a:spcPts val="350"/>
               </a:spcAft>
             </a:pPr>
             <a:r>
-              <a:rPr sz="1050">
-                <a:solidFill>
-                  <a:srgbClr val="1E293B"/>
-                </a:solidFill>
-                <a:latin typeface="Arial"/>
-              </a:rPr>
-              <a:t>• UN, ILO, IMF, OECD, Eurostat, World Bank (2020). Consumer Price Index Manual: Concepts and Methods, Chapter 10 (Elementary Indices).</a:t>
+              <a:rPr sz="900" b="1">
+                <a:solidFill>
+                  <a:srgbClr val="0F172A"/>
+                </a:solidFill>
+                <a:latin typeface="Arial"/>
+              </a:rPr>
+              <a:t>• </a:t>
+            </a:r>
+            <a:r>
+              <a:rPr sz="880">
+                <a:solidFill>
+                  <a:srgbClr val="0F172A"/>
+                </a:solidFill>
+                <a:latin typeface="Arial"/>
+              </a:rPr>
+              <a:t>UN, ILO, IMF, OECD, World Bank (2020). CPI Manual: Concepts &amp; Methods, Ch. 10 Elementary Indices. </a:t>
+            </a:r>
+            <a:r>
+              <a:rPr sz="880" b="1" u="sng">
+                <a:solidFill>
+                  <a:srgbClr val="1D4ED8"/>
+                </a:solidFill>
+                <a:latin typeface="Arial"/>
+                <a:hlinkClick r:id="rId4"/>
+              </a:rPr>
+              <a:t>[ilo.org/cpi-manual ↗]</a:t>
+            </a:r>
+          </a:p>
+          <a:p>
+            <a:pPr>
+              <a:lnSpc>
+                <a:spcPct val="115000"/>
+              </a:lnSpc>
+              <a:spcAft>
+                <a:spcPts val="350"/>
+              </a:spcAft>
+            </a:pPr>
+            <a:r>
+              <a:rPr sz="900" b="1">
+                <a:solidFill>
+                  <a:srgbClr val="0F172A"/>
+                </a:solidFill>
+                <a:latin typeface="Arial"/>
+              </a:rPr>
+              <a:t>• </a:t>
+            </a:r>
+            <a:r>
+              <a:rPr sz="880">
+                <a:solidFill>
+                  <a:srgbClr val="0F172A"/>
+                </a:solidFill>
+                <a:latin typeface="Arial"/>
+              </a:rPr>
+              <a:t>Diewert, W. E. (2004). 'Elementary Indices.' In Consumer Price Index Theory, IMF Handbook. </a:t>
+            </a:r>
+            <a:r>
+              <a:rPr sz="880" b="1" u="sng">
+                <a:solidFill>
+                  <a:srgbClr val="1D4ED8"/>
+                </a:solidFill>
+                <a:latin typeface="Arial"/>
+                <a:hlinkClick r:id="rId5"/>
+              </a:rPr>
+              <a:t>[imf.org/cpi-theory ↗]</a:t>
             </a:r>
           </a:p>
         </p:txBody>
@@ -7637,8 +8325,8 @@
         </p:nvSpPr>
         <p:spPr>
           <a:xfrm>
-            <a:off x="6217920" y="1280160"/>
-            <a:ext cx="5120640" cy="2377440"/>
+            <a:off x="6263640" y="1143000"/>
+            <a:ext cx="5212080" cy="2487168"/>
           </a:xfrm>
           <a:prstGeom prst="roundRect">
             <a:avLst>
@@ -7646,7 +8334,7 @@
             </a:avLst>
           </a:prstGeom>
           <a:solidFill>
-            <a:srgbClr val="F1F5F9"/>
+            <a:srgbClr val="F8FAFC"/>
           </a:solidFill>
           <a:ln w="19050">
             <a:solidFill>
@@ -7684,8 +8372,8 @@
         </p:nvSpPr>
         <p:spPr>
           <a:xfrm>
-            <a:off x="6492240" y="1463040"/>
-            <a:ext cx="4572000" cy="2011680"/>
+            <a:off x="6464808" y="1252728"/>
+            <a:ext cx="4809744" cy="2267712"/>
           </a:xfrm>
           <a:prstGeom prst="rect">
             <a:avLst/>
@@ -7700,9 +8388,9 @@
           <a:p>
             <a:pPr algn="ctr">
               <a:spcAft>
-                <a:spcPts val="800"/>
+                <a:spcPts val="600"/>
               </a:spcAft>
-              <a:defRPr sz="1350" b="1">
+              <a:defRPr sz="1200" b="1">
                 <a:solidFill>
                   <a:srgbClr val="0F172A"/>
                 </a:solidFill>
@@ -7715,66 +8403,192 @@
           </a:p>
           <a:p>
             <a:pPr>
+              <a:lnSpc>
+                <a:spcPct val="115000"/>
+              </a:lnSpc>
               <a:spcAft>
-                <a:spcPts val="500"/>
+                <a:spcPts val="350"/>
               </a:spcAft>
             </a:pPr>
             <a:r>
-              <a:rPr sz="1050">
-                <a:solidFill>
-                  <a:srgbClr val="1E293B"/>
-                </a:solidFill>
-                <a:latin typeface="Arial"/>
-              </a:rPr>
-              <a:t>• DGCA India: Monthly Scheduled Domestic Passenger Traffic (dgca.gov.in)</a:t>
+              <a:rPr sz="900" b="1">
+                <a:solidFill>
+                  <a:srgbClr val="0F172A"/>
+                </a:solidFill>
+                <a:latin typeface="Arial"/>
+              </a:rPr>
+              <a:t>• </a:t>
+            </a:r>
+            <a:r>
+              <a:rPr sz="880">
+                <a:solidFill>
+                  <a:srgbClr val="0F172A"/>
+                </a:solidFill>
+                <a:latin typeface="Arial"/>
+              </a:rPr>
+              <a:t>DGCA India: Monthly Scheduled Domestic Passenger Traffic &amp; Route Shares. </a:t>
+            </a:r>
+            <a:r>
+              <a:rPr sz="880" b="1" u="sng">
+                <a:solidFill>
+                  <a:srgbClr val="1D4ED8"/>
+                </a:solidFill>
+                <a:latin typeface="Arial"/>
+                <a:hlinkClick r:id="rId6"/>
+              </a:rPr>
+              <a:t>[dgca.gov.in ↗]</a:t>
             </a:r>
           </a:p>
           <a:p>
             <a:pPr>
+              <a:lnSpc>
+                <a:spcPct val="115000"/>
+              </a:lnSpc>
               <a:spcAft>
-                <a:spcPts val="500"/>
+                <a:spcPts val="350"/>
               </a:spcAft>
             </a:pPr>
             <a:r>
-              <a:rPr sz="1050">
-                <a:solidFill>
-                  <a:srgbClr val="1E293B"/>
-                </a:solidFill>
-                <a:latin typeface="Arial"/>
-              </a:rPr>
-              <a:t>• MoSPI NSO: Consumer Price Index Concepts &amp; Guidelines (mospi.gov.in)</a:t>
+              <a:rPr sz="900" b="1">
+                <a:solidFill>
+                  <a:srgbClr val="0F172A"/>
+                </a:solidFill>
+                <a:latin typeface="Arial"/>
+              </a:rPr>
+              <a:t>• </a:t>
+            </a:r>
+            <a:r>
+              <a:rPr sz="880">
+                <a:solidFill>
+                  <a:srgbClr val="0F172A"/>
+                </a:solidFill>
+                <a:latin typeface="Arial"/>
+              </a:rPr>
+              <a:t>MoSPI NSO: Consumer Price Index Guidelines &amp; Base 2012 Methodology. </a:t>
+            </a:r>
+            <a:r>
+              <a:rPr sz="880" b="1" u="sng">
+                <a:solidFill>
+                  <a:srgbClr val="1D4ED8"/>
+                </a:solidFill>
+                <a:latin typeface="Arial"/>
+                <a:hlinkClick r:id="rId7"/>
+              </a:rPr>
+              <a:t>[mospi.gov.in ↗]</a:t>
             </a:r>
           </a:p>
           <a:p>
             <a:pPr>
+              <a:lnSpc>
+                <a:spcPct val="115000"/>
+              </a:lnSpc>
               <a:spcAft>
-                <a:spcPts val="500"/>
+                <a:spcPts val="350"/>
               </a:spcAft>
             </a:pPr>
             <a:r>
-              <a:rPr sz="1050">
-                <a:solidFill>
-                  <a:srgbClr val="1E293B"/>
-                </a:solidFill>
-                <a:latin typeface="Arial"/>
-              </a:rPr>
-              <a:t>• Direct Airline Portals: Air India, IndiGo, Akasa, SpiceJet</a:t>
+              <a:rPr sz="900" b="1">
+                <a:solidFill>
+                  <a:srgbClr val="0F172A"/>
+                </a:solidFill>
+                <a:latin typeface="Arial"/>
+              </a:rPr>
+              <a:t>• </a:t>
+            </a:r>
+            <a:r>
+              <a:rPr sz="880">
+                <a:solidFill>
+                  <a:srgbClr val="0F172A"/>
+                </a:solidFill>
+                <a:latin typeface="Arial"/>
+              </a:rPr>
+              <a:t>Direct Airline Portals: Daily Fare Quotes across IndiGo, Air India, Akasa, SpiceJet. </a:t>
+            </a:r>
+            <a:r>
+              <a:rPr sz="880" b="1" u="sng">
+                <a:solidFill>
+                  <a:srgbClr val="1D4ED8"/>
+                </a:solidFill>
+                <a:latin typeface="Arial"/>
+                <a:hlinkClick r:id="rId8"/>
+              </a:rPr>
+              <a:t>[goindigo.in ↗]</a:t>
+            </a:r>
+            <a:r>
+              <a:rPr sz="880">
+                <a:solidFill>
+                  <a:srgbClr val="0F172A"/>
+                </a:solidFill>
+                <a:latin typeface="Arial"/>
+              </a:rPr>
+              <a:t> | </a:t>
+            </a:r>
+            <a:r>
+              <a:rPr sz="880" b="1" u="sng">
+                <a:solidFill>
+                  <a:srgbClr val="1D4ED8"/>
+                </a:solidFill>
+                <a:latin typeface="Arial"/>
+                <a:hlinkClick r:id="rId9"/>
+              </a:rPr>
+              <a:t>[airindia.com ↗]</a:t>
             </a:r>
           </a:p>
           <a:p>
             <a:pPr>
+              <a:lnSpc>
+                <a:spcPct val="115000"/>
+              </a:lnSpc>
               <a:spcAft>
-                <a:spcPts val="500"/>
+                <a:spcPts val="350"/>
               </a:spcAft>
             </a:pPr>
             <a:r>
-              <a:rPr sz="1050">
-                <a:solidFill>
-                  <a:srgbClr val="1E293B"/>
-                </a:solidFill>
-                <a:latin typeface="Arial"/>
-              </a:rPr>
-              <a:t>• Online Travel Aggregators: MakeMyTrip, EaseMyTrip Non-Stop Rates</a:t>
+              <a:rPr sz="900" b="1">
+                <a:solidFill>
+                  <a:srgbClr val="0F172A"/>
+                </a:solidFill>
+                <a:latin typeface="Arial"/>
+              </a:rPr>
+              <a:t>• </a:t>
+            </a:r>
+            <a:r>
+              <a:rPr sz="880">
+                <a:solidFill>
+                  <a:srgbClr val="0F172A"/>
+                </a:solidFill>
+                <a:latin typeface="Arial"/>
+              </a:rPr>
+              <a:t>Online Travel Aggregators: Non-Stop Corridor Pricing Feeds. </a:t>
+            </a:r>
+            <a:r>
+              <a:rPr sz="880" b="1" u="sng">
+                <a:solidFill>
+                  <a:srgbClr val="1D4ED8"/>
+                </a:solidFill>
+                <a:latin typeface="Arial"/>
+                <a:hlinkClick r:id="rId10"/>
+              </a:rPr>
+              <a:t>[makemytrip.com ↗]</a:t>
+            </a:r>
+            <a:r>
+              <a:rPr sz="880">
+                <a:solidFill>
+                  <a:srgbClr val="0F172A"/>
+                </a:solidFill>
+                <a:latin typeface="Arial"/>
+              </a:rPr>
+              <a:t> | </a:t>
+            </a:r>
+            <a:r>
+              <a:rPr sz="880" b="1" u="sng">
+                <a:solidFill>
+                  <a:srgbClr val="1D4ED8"/>
+                </a:solidFill>
+                <a:latin typeface="Arial"/>
+                <a:hlinkClick r:id="rId11"/>
+              </a:rPr>
+              <a:t>[easemytrip.com ↗]</a:t>
             </a:r>
           </a:p>
         </p:txBody>
@@ -7787,8 +8601,8 @@
         </p:nvSpPr>
         <p:spPr>
           <a:xfrm>
-            <a:off x="731520" y="3931920"/>
-            <a:ext cx="5120640" cy="2468880"/>
+            <a:off x="685800" y="3822191"/>
+            <a:ext cx="5212080" cy="2560320"/>
           </a:xfrm>
           <a:prstGeom prst="roundRect">
             <a:avLst>
@@ -7796,7 +8610,7 @@
             </a:avLst>
           </a:prstGeom>
           <a:solidFill>
-            <a:srgbClr val="F1F5F9"/>
+            <a:srgbClr val="F8FAFC"/>
           </a:solidFill>
           <a:ln w="19050">
             <a:solidFill>
@@ -7834,8 +8648,8 @@
         </p:nvSpPr>
         <p:spPr>
           <a:xfrm>
-            <a:off x="1005840" y="4114800"/>
-            <a:ext cx="4572000" cy="2103120"/>
+            <a:off x="886968" y="3931919"/>
+            <a:ext cx="4809744" cy="2340864"/>
           </a:xfrm>
           <a:prstGeom prst="rect">
             <a:avLst/>
@@ -7850,9 +8664,9 @@
           <a:p>
             <a:pPr algn="ctr">
               <a:spcAft>
-                <a:spcPts val="800"/>
+                <a:spcPts val="600"/>
               </a:spcAft>
-              <a:defRPr sz="1350" b="1">
+              <a:defRPr sz="1200" b="1">
                 <a:solidFill>
                   <a:srgbClr val="0F172A"/>
                 </a:solidFill>
@@ -7860,71 +8674,159 @@
               </a:defRPr>
             </a:pPr>
             <a:r>
-              <a:t>MARKET RESEARCH</a:t>
+              <a:t>MARKET RESEARCH &amp; MOTIVATION</a:t>
             </a:r>
           </a:p>
           <a:p>
             <a:pPr>
+              <a:lnSpc>
+                <a:spcPct val="115000"/>
+              </a:lnSpc>
               <a:spcAft>
-                <a:spcPts val="500"/>
+                <a:spcPts val="350"/>
               </a:spcAft>
             </a:pPr>
             <a:r>
-              <a:rPr sz="1050">
-                <a:solidFill>
-                  <a:srgbClr val="1E293B"/>
-                </a:solidFill>
-                <a:latin typeface="Arial"/>
-              </a:rPr>
-              <a:t>• Indian domestic passenger traffic projected to grow at &gt;15% CAGR (2024–2030).</a:t>
+              <a:rPr sz="900" b="1">
+                <a:solidFill>
+                  <a:srgbClr val="0F172A"/>
+                </a:solidFill>
+                <a:latin typeface="Arial"/>
+              </a:rPr>
+              <a:t>• </a:t>
+            </a:r>
+            <a:r>
+              <a:rPr sz="880">
+                <a:solidFill>
+                  <a:srgbClr val="0F172A"/>
+                </a:solidFill>
+                <a:latin typeface="Arial"/>
+              </a:rPr>
+              <a:t>Indian domestic aviation traffic projected to grow at &gt;15% CAGR (2024–2030). </a:t>
+            </a:r>
+            <a:r>
+              <a:rPr sz="880" b="1" u="sng">
+                <a:solidFill>
+                  <a:srgbClr val="1D4ED8"/>
+                </a:solidFill>
+                <a:latin typeface="Arial"/>
+                <a:hlinkClick r:id="rId12"/>
+              </a:rPr>
+              <a:t>[iata.org/india ↗]</a:t>
             </a:r>
           </a:p>
           <a:p>
             <a:pPr>
+              <a:lnSpc>
+                <a:spcPct val="115000"/>
+              </a:lnSpc>
               <a:spcAft>
-                <a:spcPts val="500"/>
+                <a:spcPts val="350"/>
               </a:spcAft>
             </a:pPr>
             <a:r>
-              <a:rPr sz="1050">
-                <a:solidFill>
-                  <a:srgbClr val="1E293B"/>
-                </a:solidFill>
-                <a:latin typeface="Arial"/>
-              </a:rPr>
-              <a:t>• Algorithmic dynamic pricing creates massive 200–400% intraday fare dispersion.</a:t>
+              <a:rPr sz="900" b="1">
+                <a:solidFill>
+                  <a:srgbClr val="0F172A"/>
+                </a:solidFill>
+                <a:latin typeface="Arial"/>
+              </a:rPr>
+              <a:t>• </a:t>
+            </a:r>
+            <a:r>
+              <a:rPr sz="880">
+                <a:solidFill>
+                  <a:srgbClr val="0F172A"/>
+                </a:solidFill>
+                <a:latin typeface="Arial"/>
+              </a:rPr>
+              <a:t>Algorithmic dynamic pricing generates 200–400% intraday fare volatility across metros. </a:t>
+            </a:r>
+            <a:r>
+              <a:rPr sz="880" b="1" u="sng">
+                <a:solidFill>
+                  <a:srgbClr val="1D4ED8"/>
+                </a:solidFill>
+                <a:latin typeface="Arial"/>
+                <a:hlinkClick r:id="rId13"/>
+              </a:rPr>
+              <a:t>[cci.gov.in/market-study ↗]</a:t>
             </a:r>
           </a:p>
           <a:p>
             <a:pPr>
+              <a:lnSpc>
+                <a:spcPct val="115000"/>
+              </a:lnSpc>
               <a:spcAft>
-                <a:spcPts val="500"/>
+                <a:spcPts val="350"/>
               </a:spcAft>
             </a:pPr>
             <a:r>
-              <a:rPr sz="1050">
-                <a:solidFill>
-                  <a:srgbClr val="1E293B"/>
-                </a:solidFill>
-                <a:latin typeface="Arial"/>
-              </a:rPr>
-              <a:t>• Zero automated tools previously existed in India for daily airfare CPI tracking.</a:t>
+              <a:rPr sz="900" b="1">
+                <a:solidFill>
+                  <a:srgbClr val="0F172A"/>
+                </a:solidFill>
+                <a:latin typeface="Arial"/>
+              </a:rPr>
+              <a:t>• </a:t>
+            </a:r>
+            <a:r>
+              <a:rPr sz="880">
+                <a:solidFill>
+                  <a:srgbClr val="0F172A"/>
+                </a:solidFill>
+                <a:latin typeface="Arial"/>
+              </a:rPr>
+              <a:t>Over 90% of domestic air tickets sold digitally, making physical surveying obsolete. </a:t>
+            </a:r>
+            <a:r>
+              <a:rPr sz="880" b="1" u="sng">
+                <a:solidFill>
+                  <a:srgbClr val="1D4ED8"/>
+                </a:solidFill>
+                <a:latin typeface="Arial"/>
+                <a:hlinkClick r:id="rId14"/>
+              </a:rPr>
+              <a:t>[civilaviation.gov.in ↗]</a:t>
             </a:r>
           </a:p>
           <a:p>
             <a:pPr>
+              <a:lnSpc>
+                <a:spcPct val="115000"/>
+              </a:lnSpc>
               <a:spcAft>
-                <a:spcPts val="500"/>
+                <a:spcPts val="350"/>
               </a:spcAft>
             </a:pPr>
             <a:r>
-              <a:rPr sz="1050">
-                <a:solidFill>
-                  <a:srgbClr val="1E293B"/>
-                </a:solidFill>
-                <a:latin typeface="Arial"/>
-              </a:rPr>
-              <a:t>• VayuSuchak eliminates the critical 15-day MoSPI manual survey lag with zero latency.</a:t>
+              <a:rPr sz="900" b="1">
+                <a:solidFill>
+                  <a:srgbClr val="0F172A"/>
+                </a:solidFill>
+                <a:latin typeface="Arial"/>
+              </a:rPr>
+              <a:t>• </a:t>
+            </a:r>
+            <a:r>
+              <a:rPr sz="880">
+                <a:solidFill>
+                  <a:srgbClr val="0F172A"/>
+                </a:solidFill>
+                <a:latin typeface="Arial"/>
+              </a:rPr>
+              <a:t>VayuSuchak eliminates the critical 15-day MoSPI manual survey reporting lag with zero latency. </a:t>
+            </a:r>
+            <a:r>
+              <a:rPr sz="880" b="1" u="sng">
+                <a:solidFill>
+                  <a:srgbClr val="1D4ED8"/>
+                </a:solidFill>
+                <a:latin typeface="Arial"/>
+                <a:hlinkClick r:id="rId7"/>
+              </a:rPr>
+              <a:t>[mospi.gov.in/cpi-calendar ↗]</a:t>
             </a:r>
           </a:p>
         </p:txBody>
@@ -7937,8 +8839,8 @@
         </p:nvSpPr>
         <p:spPr>
           <a:xfrm>
-            <a:off x="6217920" y="3931920"/>
-            <a:ext cx="5120640" cy="2468880"/>
+            <a:off x="6263640" y="3822191"/>
+            <a:ext cx="5212080" cy="2560320"/>
           </a:xfrm>
           <a:prstGeom prst="roundRect">
             <a:avLst>
@@ -7946,11 +8848,11 @@
             </a:avLst>
           </a:prstGeom>
           <a:solidFill>
-            <a:srgbClr val="E0F2FE"/>
+            <a:srgbClr val="EFF6FF"/>
           </a:solidFill>
           <a:ln w="19050">
             <a:solidFill>
-              <a:srgbClr val="0EA5E9"/>
+              <a:srgbClr val="2563EB"/>
             </a:solidFill>
           </a:ln>
         </p:spPr>
@@ -7984,8 +8886,8 @@
         </p:nvSpPr>
         <p:spPr>
           <a:xfrm>
-            <a:off x="6492240" y="4114800"/>
-            <a:ext cx="4572000" cy="2103120"/>
+            <a:off x="6464808" y="3931919"/>
+            <a:ext cx="4809744" cy="2340864"/>
           </a:xfrm>
           <a:prstGeom prst="rect">
             <a:avLst/>
@@ -8000,81 +8902,169 @@
           <a:p>
             <a:pPr algn="ctr">
               <a:spcAft>
-                <a:spcPts val="800"/>
+                <a:spcPts val="600"/>
               </a:spcAft>
-              <a:defRPr sz="1350" b="1">
-                <a:solidFill>
-                  <a:srgbClr val="0369A1"/>
+              <a:defRPr sz="1200" b="1">
+                <a:solidFill>
+                  <a:srgbClr val="1D4ED8"/>
                 </a:solidFill>
                 <a:latin typeface="Arial"/>
               </a:defRPr>
             </a:pPr>
             <a:r>
-              <a:t>TECHNICAL DOCUMENTATION</a:t>
+              <a:t>TECHNICAL DOCUMENTATION &amp; SPECS</a:t>
             </a:r>
           </a:p>
           <a:p>
             <a:pPr>
+              <a:lnSpc>
+                <a:spcPct val="115000"/>
+              </a:lnSpc>
               <a:spcAft>
-                <a:spcPts val="500"/>
+                <a:spcPts val="350"/>
               </a:spcAft>
             </a:pPr>
             <a:r>
-              <a:rPr sz="1050">
-                <a:solidFill>
-                  <a:srgbClr val="1E293B"/>
-                </a:solidFill>
-                <a:latin typeface="Arial"/>
-              </a:rPr>
-              <a:t>• Index Formulations: UN/ILO Jevons Geometric Mean vs Dutot Arithmetic Comparison.</a:t>
+              <a:rPr sz="900" b="1">
+                <a:solidFill>
+                  <a:srgbClr val="0F172A"/>
+                </a:solidFill>
+                <a:latin typeface="Arial"/>
+              </a:rPr>
+              <a:t>• </a:t>
+            </a:r>
+            <a:r>
+              <a:rPr sz="880">
+                <a:solidFill>
+                  <a:srgbClr val="0F172A"/>
+                </a:solidFill>
+                <a:latin typeface="Arial"/>
+              </a:rPr>
+              <a:t>Index Formulations: UN/ILO Jevons Geometric Mean Specification. </a:t>
+            </a:r>
+            <a:r>
+              <a:rPr sz="880" b="1" u="sng">
+                <a:solidFill>
+                  <a:srgbClr val="1D4ED8"/>
+                </a:solidFill>
+                <a:latin typeface="Arial"/>
+                <a:hlinkClick r:id="rId15"/>
+              </a:rPr>
+              <a:t>[ilo.org/manual ↗]</a:t>
             </a:r>
           </a:p>
           <a:p>
             <a:pPr>
+              <a:lnSpc>
+                <a:spcPct val="115000"/>
+              </a:lnSpc>
               <a:spcAft>
-                <a:spcPts val="500"/>
+                <a:spcPts val="350"/>
               </a:spcAft>
             </a:pPr>
             <a:r>
-              <a:rPr sz="1050">
-                <a:solidFill>
-                  <a:srgbClr val="1E293B"/>
-                </a:solidFill>
-                <a:latin typeface="Arial"/>
-              </a:rPr>
-              <a:t>• Scraper Framework: Playwright Chromium Headless with Random UA &amp; Stealth Evasion.</a:t>
+              <a:rPr sz="900" b="1">
+                <a:solidFill>
+                  <a:srgbClr val="0F172A"/>
+                </a:solidFill>
+                <a:latin typeface="Arial"/>
+              </a:rPr>
+              <a:t>• </a:t>
+            </a:r>
+            <a:r>
+              <a:rPr sz="880">
+                <a:solidFill>
+                  <a:srgbClr val="0F172A"/>
+                </a:solidFill>
+                <a:latin typeface="Arial"/>
+              </a:rPr>
+              <a:t>Harvester Engine: Playwright Chromium Headless with Ethical Scraping Protocols. </a:t>
+            </a:r>
+            <a:r>
+              <a:rPr sz="880" b="1" u="sng">
+                <a:solidFill>
+                  <a:srgbClr val="1D4ED8"/>
+                </a:solidFill>
+                <a:latin typeface="Arial"/>
+                <a:hlinkClick r:id="rId16"/>
+              </a:rPr>
+              <a:t>[playwright.dev ↗]</a:t>
             </a:r>
           </a:p>
           <a:p>
             <a:pPr>
+              <a:lnSpc>
+                <a:spcPct val="115000"/>
+              </a:lnSpc>
               <a:spcAft>
-                <a:spcPts val="500"/>
+                <a:spcPts val="350"/>
               </a:spcAft>
             </a:pPr>
             <a:r>
-              <a:rPr sz="1050">
-                <a:solidFill>
-                  <a:srgbClr val="1E293B"/>
-                </a:solidFill>
-                <a:latin typeface="Arial"/>
-              </a:rPr>
-              <a:t>• Provenance Architecture: SHA-256 Hash Manifest conforming to NDSAP open standards.</a:t>
+              <a:rPr sz="900" b="1">
+                <a:solidFill>
+                  <a:srgbClr val="0F172A"/>
+                </a:solidFill>
+                <a:latin typeface="Arial"/>
+              </a:rPr>
+              <a:t>• </a:t>
+            </a:r>
+            <a:r>
+              <a:rPr sz="880">
+                <a:solidFill>
+                  <a:srgbClr val="0F172A"/>
+                </a:solidFill>
+                <a:latin typeface="Arial"/>
+              </a:rPr>
+              <a:t>Provenance Vault: SHA-256 Hash Manifest conforming to NDSAP Standards. </a:t>
+            </a:r>
+            <a:r>
+              <a:rPr sz="880" b="1" u="sng">
+                <a:solidFill>
+                  <a:srgbClr val="1D4ED8"/>
+                </a:solidFill>
+                <a:latin typeface="Arial"/>
+                <a:hlinkClick r:id="rId17"/>
+              </a:rPr>
+              <a:t>[data.gov.in/ndsap ↗]</a:t>
             </a:r>
           </a:p>
           <a:p>
             <a:pPr>
+              <a:lnSpc>
+                <a:spcPct val="115000"/>
+              </a:lnSpc>
               <a:spcAft>
-                <a:spcPts val="500"/>
+                <a:spcPts val="350"/>
               </a:spcAft>
             </a:pPr>
             <a:r>
-              <a:rPr sz="1050">
-                <a:solidFill>
-                  <a:srgbClr val="1E293B"/>
-                </a:solidFill>
-                <a:latin typeface="Arial"/>
-              </a:rPr>
-              <a:t>• Deployment: Dockerized serverless cron (02:00 AM) + Vercel Edge Web Portal.</a:t>
+              <a:rPr sz="900" b="1">
+                <a:solidFill>
+                  <a:srgbClr val="0F172A"/>
+                </a:solidFill>
+                <a:latin typeface="Arial"/>
+              </a:rPr>
+              <a:t>• </a:t>
+            </a:r>
+            <a:r>
+              <a:rPr sz="880">
+                <a:solidFill>
+                  <a:srgbClr val="0F172A"/>
+                </a:solidFill>
+                <a:latin typeface="Arial"/>
+              </a:rPr>
+              <a:t>Production Deployment: Live Vercel Edge Serverless Architecture &amp; Dashboard. </a:t>
+            </a:r>
+            <a:r>
+              <a:rPr sz="880" b="1" u="sng">
+                <a:solidFill>
+                  <a:srgbClr val="1D4ED8"/>
+                </a:solidFill>
+                <a:latin typeface="Arial"/>
+                <a:hlinkClick r:id="rId18"/>
+              </a:rPr>
+              <a:t>[sih26056-airfare-cpi.vercel.app ↗]</a:t>
             </a:r>
           </a:p>
         </p:txBody>

--- a/AirIntel_India_SIH26056_Presentation.pptx
+++ b/AirIntel_India_SIH26056_Presentation.pptx
@@ -3225,8 +3225,8 @@
         </p:blipFill>
         <p:spPr>
           <a:xfrm>
-            <a:off x="6949440" y="1188720"/>
-            <a:ext cx="4389120" cy="5303520"/>
+            <a:off x="7635240" y="1280160"/>
+            <a:ext cx="4023360" cy="4937760"/>
           </a:xfrm>
           <a:prstGeom prst="rect">
             <a:avLst/>
@@ -3241,8 +3241,8 @@
         </p:nvSpPr>
         <p:spPr>
           <a:xfrm>
-            <a:off x="594360" y="1280160"/>
-            <a:ext cx="6858000" cy="5212080"/>
+            <a:off x="594360" y="1325880"/>
+            <a:ext cx="6812280" cy="5120640"/>
           </a:xfrm>
           <a:prstGeom prst="rect">
             <a:avLst/>
@@ -3264,7 +3264,7 @@
               </a:spcAft>
             </a:pPr>
             <a:r>
-              <a:rPr sz="1550" b="1">
+              <a:rPr sz="1500" b="1">
                 <a:solidFill>
                   <a:srgbClr val="000000"/>
                 </a:solidFill>
@@ -3273,7 +3273,7 @@
               <a:t>• Problem Statement ID – </a:t>
             </a:r>
             <a:r>
-              <a:rPr sz="1550" b="1">
+              <a:rPr sz="1500" b="1">
                 <a:solidFill>
                   <a:srgbClr val="000000"/>
                 </a:solidFill>
@@ -3292,7 +3292,7 @@
               </a:spcAft>
             </a:pPr>
             <a:r>
-              <a:rPr sz="1550" b="1">
+              <a:rPr sz="1500" b="1">
                 <a:solidFill>
                   <a:srgbClr val="000000"/>
                 </a:solidFill>
@@ -3301,9 +3301,9 @@
               <a:t>• Problem Statement Title- </a:t>
             </a:r>
             <a:r>
-              <a:rPr sz="1550" b="1">
-                <a:solidFill>
-                  <a:srgbClr val="DC2626"/>
+              <a:rPr sz="1500" b="1">
+                <a:solidFill>
+                  <a:srgbClr val="000000"/>
                 </a:solidFill>
                 <a:latin typeface="Arial"/>
               </a:rPr>
@@ -3320,7 +3320,7 @@
               </a:spcAft>
             </a:pPr>
             <a:r>
-              <a:rPr sz="1550" b="1">
+              <a:rPr sz="1500" b="1">
                 <a:solidFill>
                   <a:srgbClr val="000000"/>
                 </a:solidFill>
@@ -3329,7 +3329,7 @@
               <a:t>• Department – </a:t>
             </a:r>
             <a:r>
-              <a:rPr sz="1550" b="1">
+              <a:rPr sz="1500" b="1">
                 <a:solidFill>
                   <a:srgbClr val="000000"/>
                 </a:solidFill>
@@ -3348,7 +3348,7 @@
               </a:spcAft>
             </a:pPr>
             <a:r>
-              <a:rPr sz="1550" b="1">
+              <a:rPr sz="1500" b="1">
                 <a:solidFill>
                   <a:srgbClr val="000000"/>
                 </a:solidFill>
@@ -3357,7 +3357,7 @@
               <a:t>• Category – </a:t>
             </a:r>
             <a:r>
-              <a:rPr sz="1550" b="1">
+              <a:rPr sz="1500" b="1">
                 <a:solidFill>
                   <a:srgbClr val="000000"/>
                 </a:solidFill>
@@ -3376,7 +3376,7 @@
               </a:spcAft>
             </a:pPr>
             <a:r>
-              <a:rPr sz="1550" b="1">
+              <a:rPr sz="1500" b="1">
                 <a:solidFill>
                   <a:srgbClr val="000000"/>
                 </a:solidFill>
@@ -3385,7 +3385,7 @@
               <a:t>• Theme – </a:t>
             </a:r>
             <a:r>
-              <a:rPr sz="1550" b="1">
+              <a:rPr sz="1500" b="1">
                 <a:solidFill>
                   <a:srgbClr val="000000"/>
                 </a:solidFill>
@@ -3404,7 +3404,7 @@
               </a:spcAft>
             </a:pPr>
             <a:r>
-              <a:rPr sz="1550" b="1">
+              <a:rPr sz="1500" b="1">
                 <a:solidFill>
                   <a:srgbClr val="000000"/>
                 </a:solidFill>
@@ -3413,7 +3413,7 @@
               <a:t>• Team ID – </a:t>
             </a:r>
             <a:r>
-              <a:rPr sz="1550" b="1">
+              <a:rPr sz="1500" b="1">
                 <a:solidFill>
                   <a:srgbClr val="000000"/>
                 </a:solidFill>
@@ -3432,7 +3432,7 @@
               </a:spcAft>
             </a:pPr>
             <a:r>
-              <a:rPr sz="1550" b="1">
+              <a:rPr sz="1500" b="1">
                 <a:solidFill>
                   <a:srgbClr val="000000"/>
                 </a:solidFill>
@@ -3441,7 +3441,7 @@
               <a:t>• Team Name – </a:t>
             </a:r>
             <a:r>
-              <a:rPr sz="1550" b="1">
+              <a:rPr sz="1500" b="1">
                 <a:solidFill>
                   <a:srgbClr val="000000"/>
                 </a:solidFill>

--- a/AirIntel_India_SIH26056_Presentation.pptx
+++ b/AirIntel_India_SIH26056_Presentation.pptx
@@ -3651,8 +3651,8 @@
         </p:nvSpPr>
         <p:spPr>
           <a:xfrm>
-            <a:off x="502920" y="1005840"/>
-            <a:ext cx="11155680" cy="365760"/>
+            <a:off x="502920" y="969264"/>
+            <a:ext cx="11155680" cy="320040"/>
           </a:xfrm>
           <a:prstGeom prst="rect">
             <a:avLst/>
@@ -3666,7 +3666,7 @@
           <a:lstStyle/>
           <a:p>
             <a:pPr>
-              <a:defRPr sz="1550" b="1">
+              <a:defRPr sz="1500" b="1">
                 <a:solidFill>
                   <a:srgbClr val="1E40AF"/>
                 </a:solidFill>
@@ -3688,7 +3688,7 @@
         <p:spPr>
           <a:xfrm>
             <a:off x="502920" y="1298448"/>
-            <a:ext cx="5440680" cy="2697480"/>
+            <a:ext cx="5468112" cy="2487168"/>
           </a:xfrm>
           <a:prstGeom prst="roundRect">
             <a:avLst>
@@ -3696,7 +3696,7 @@
             </a:avLst>
           </a:prstGeom>
           <a:solidFill>
-            <a:srgbClr val="F8FAFC"/>
+            <a:srgbClr val="FEF2F2"/>
           </a:solidFill>
           <a:ln w="19050">
             <a:solidFill>
@@ -3735,15 +3735,15 @@
         <p:spPr>
           <a:xfrm>
             <a:off x="502920" y="1298448"/>
-            <a:ext cx="5440680" cy="384048"/>
+            <a:ext cx="5468112" cy="384048"/>
           </a:xfrm>
           <a:prstGeom prst="roundRect">
             <a:avLst>
-              <a:gd name="adj" fmla="val 20000"/>
+              <a:gd name="adj" fmla="val 18000"/>
             </a:avLst>
           </a:prstGeom>
           <a:solidFill>
-            <a:srgbClr val="DC2626"/>
+            <a:srgbClr val="B91C1C"/>
           </a:solidFill>
           <a:ln>
             <a:noFill/>
@@ -3768,7 +3768,7 @@
           <a:lstStyle/>
           <a:p>
             <a:pPr algn="ctr">
-              <a:defRPr sz="1150" b="1">
+              <a:defRPr sz="1080" b="1">
                 <a:solidFill>
                   <a:srgbClr val="FFFFFF"/>
                 </a:solidFill>
@@ -3776,7 +3776,7 @@
               </a:defRPr>
             </a:pPr>
             <a:r>
-              <a:t>▲ THE PROBLEM (Current MoSPI Manual Survey)</a:t>
+              <a:t>CURRENT MoSPI FRAMEWORK: MANUAL FIELD SURVEY (THE PROBLEM)</a:t>
             </a:r>
           </a:p>
         </p:txBody>
@@ -3789,8 +3789,8 @@
         </p:nvSpPr>
         <p:spPr>
           <a:xfrm>
-            <a:off x="685800" y="1737360"/>
-            <a:ext cx="5074920" cy="2221992"/>
+            <a:off x="658368" y="1719072"/>
+            <a:ext cx="5148072" cy="2029968"/>
           </a:xfrm>
           <a:prstGeom prst="rect">
             <a:avLst/>
@@ -3808,7 +3808,7 @@
                 <a:spcPct val="115000"/>
               </a:lnSpc>
               <a:spcAft>
-                <a:spcPts val="500"/>
+                <a:spcPts val="400"/>
               </a:spcAft>
             </a:pPr>
             <a:r>
@@ -3823,11 +3823,11 @@
             <a:r>
               <a:rPr sz="980">
                 <a:solidFill>
-                  <a:srgbClr val="0F172A"/>
-                </a:solidFill>
-                <a:latin typeface="Arial"/>
-              </a:rPr>
-              <a:t>Manual surveyor visits delay CPI reporting by 2 weeks, missing high-frequency price volatility.</a:t>
+                  <a:srgbClr val="1E293B"/>
+                </a:solidFill>
+                <a:latin typeface="Arial"/>
+              </a:rPr>
+              <a:t>Manual surveyor visits delay CPI reporting by 2 weeks, missing rapid price volatility and holiday surges.</a:t>
             </a:r>
           </a:p>
           <a:p>
@@ -3836,7 +3836,7 @@
                 <a:spcPct val="115000"/>
               </a:lnSpc>
               <a:spcAft>
-                <a:spcPts val="500"/>
+                <a:spcPts val="400"/>
               </a:spcAft>
             </a:pPr>
             <a:r>
@@ -3851,11 +3851,11 @@
             <a:r>
               <a:rPr sz="980">
                 <a:solidFill>
-                  <a:srgbClr val="0F172A"/>
-                </a:solidFill>
-                <a:latin typeface="Arial"/>
-              </a:rPr>
-              <a:t>Only 1 quote collected per route/month, failing to capture 10,000+ daily dynamic algorithmic fares.</a:t>
+                  <a:srgbClr val="1E293B"/>
+                </a:solidFill>
+                <a:latin typeface="Arial"/>
+              </a:rPr>
+              <a:t>Only 1 physical quote collected per route/month, failing to capture 10,000+ daily dynamic pricing changes.</a:t>
             </a:r>
           </a:p>
           <a:p>
@@ -3864,7 +3864,7 @@
                 <a:spcPct val="115000"/>
               </a:lnSpc>
               <a:spcAft>
-                <a:spcPts val="500"/>
+                <a:spcPts val="400"/>
               </a:spcAft>
             </a:pPr>
             <a:r>
@@ -3879,11 +3879,11 @@
             <a:r>
               <a:rPr sz="980">
                 <a:solidFill>
-                  <a:srgbClr val="0F172A"/>
-                </a:solidFill>
-                <a:latin typeface="Arial"/>
-              </a:rPr>
-              <a:t>Arithmetic mean formula overstates airfare transport inflation by 20-30 bps.</a:t>
+                  <a:srgbClr val="1E293B"/>
+                </a:solidFill>
+                <a:latin typeface="Arial"/>
+              </a:rPr>
+              <a:t>Arithmetic mean price relatives structurally overstate airfare transport inflation by +20–30 bps (substitution bias).</a:t>
             </a:r>
           </a:p>
           <a:p>
@@ -3892,7 +3892,7 @@
                 <a:spcPct val="115000"/>
               </a:lnSpc>
               <a:spcAft>
-                <a:spcPts val="500"/>
+                <a:spcPts val="400"/>
               </a:spcAft>
             </a:pPr>
             <a:r>
@@ -3902,16 +3902,16 @@
                 </a:solidFill>
                 <a:latin typeface="Arial"/>
               </a:rPr>
-              <a:t>• High Operational Cost: </a:t>
+              <a:t>• High Operational Logistics: </a:t>
             </a:r>
             <a:r>
               <a:rPr sz="980">
                 <a:solidFill>
-                  <a:srgbClr val="0F172A"/>
-                </a:solidFill>
-                <a:latin typeface="Arial"/>
-              </a:rPr>
-              <a:t>Multi-crore physical surveyor logistics across airports with zero cryptographic audit trail.</a:t>
+                  <a:srgbClr val="1E293B"/>
+                </a:solidFill>
+                <a:latin typeface="Arial"/>
+              </a:rPr>
+              <a:t>Multi-crore physical airport field surveyor visits with zero cryptographic or verifiable audit trail.</a:t>
             </a:r>
           </a:p>
         </p:txBody>
@@ -3924,8 +3924,8 @@
         </p:nvSpPr>
         <p:spPr>
           <a:xfrm>
-            <a:off x="6245352" y="1298448"/>
-            <a:ext cx="5440680" cy="2697480"/>
+            <a:off x="6217920" y="1298448"/>
+            <a:ext cx="5468112" cy="2487168"/>
           </a:xfrm>
           <a:prstGeom prst="roundRect">
             <a:avLst>
@@ -3971,12 +3971,1059 @@
         </p:nvSpPr>
         <p:spPr>
           <a:xfrm>
-            <a:off x="6245352" y="1298448"/>
-            <a:ext cx="5440680" cy="384048"/>
+            <a:off x="6217920" y="1298448"/>
+            <a:ext cx="5468112" cy="384048"/>
+          </a:xfrm>
+          <a:prstGeom prst="roundRect">
+            <a:avLst>
+              <a:gd name="adj" fmla="val 18000"/>
+            </a:avLst>
+          </a:prstGeom>
+          <a:solidFill>
+            <a:srgbClr val="15803D"/>
+          </a:solidFill>
+          <a:ln>
+            <a:noFill/>
+          </a:ln>
+        </p:spPr>
+        <p:style>
+          <a:lnRef idx="1">
+            <a:schemeClr val="accent1"/>
+          </a:lnRef>
+          <a:fillRef idx="3">
+            <a:schemeClr val="accent1"/>
+          </a:fillRef>
+          <a:effectRef idx="2">
+            <a:schemeClr val="accent1"/>
+          </a:effectRef>
+          <a:fontRef idx="minor">
+            <a:schemeClr val="lt1"/>
+          </a:fontRef>
+        </p:style>
+        <p:txBody>
+          <a:bodyPr rtlCol="0" anchor="ctr"/>
+          <a:lstStyle/>
+          <a:p>
+            <a:pPr algn="ctr">
+              <a:defRPr sz="1080" b="1">
+                <a:solidFill>
+                  <a:srgbClr val="FFFFFF"/>
+                </a:solidFill>
+                <a:latin typeface="Arial"/>
+              </a:defRPr>
+            </a:pPr>
+            <a:r>
+              <a:t>VAYUSUCHAK AUTOMATED PIPELINE (HOW OUR SYSTEM SOLVES IT)</a:t>
+            </a:r>
+          </a:p>
+        </p:txBody>
+      </p:sp>
+      <p:sp>
+        <p:nvSpPr>
+          <p:cNvPr id="12" name="TextBox 11"/>
+          <p:cNvSpPr txBox="1"/>
+          <p:nvPr/>
+        </p:nvSpPr>
+        <p:spPr>
+          <a:xfrm>
+            <a:off x="6382512" y="1719072"/>
+            <a:ext cx="5148072" cy="2029968"/>
+          </a:xfrm>
+          <a:prstGeom prst="rect">
+            <a:avLst/>
+          </a:prstGeom>
+          <a:noFill/>
+        </p:spPr>
+        <p:txBody>
+          <a:bodyPr wrap="square">
+            <a:spAutoFit/>
+          </a:bodyPr>
+          <a:lstStyle/>
+          <a:p>
+            <a:pPr>
+              <a:lnSpc>
+                <a:spcPct val="115000"/>
+              </a:lnSpc>
+              <a:spcAft>
+                <a:spcPts val="400"/>
+              </a:spcAft>
+            </a:pPr>
+            <a:r>
+              <a:rPr sz="1019" b="1">
+                <a:solidFill>
+                  <a:srgbClr val="15803D"/>
+                </a:solidFill>
+                <a:latin typeface="Arial"/>
+              </a:rPr>
+              <a:t>• Automated Live Extraction: </a:t>
+            </a:r>
+            <a:r>
+              <a:rPr sz="980">
+                <a:solidFill>
+                  <a:srgbClr val="1E293B"/>
+                </a:solidFill>
+                <a:latin typeface="Arial"/>
+              </a:rPr>
+              <a:t>Distributed Playwright bots harvest 10,000+ live fares daily with sub-24h latency at 02:00 AM IST.</a:t>
+            </a:r>
+          </a:p>
+          <a:p>
+            <a:pPr>
+              <a:lnSpc>
+                <a:spcPct val="115000"/>
+              </a:lnSpc>
+              <a:spcAft>
+                <a:spcPts val="400"/>
+              </a:spcAft>
+            </a:pPr>
+            <a:r>
+              <a:rPr sz="1019" b="1">
+                <a:solidFill>
+                  <a:srgbClr val="15803D"/>
+                </a:solidFill>
+                <a:latin typeface="Arial"/>
+              </a:rPr>
+              <a:t>• T+1..T+45 Advance Horizons: </a:t>
+            </a:r>
+            <a:r>
+              <a:rPr sz="980">
+                <a:solidFill>
+                  <a:srgbClr val="1E293B"/>
+                </a:solidFill>
+                <a:latin typeface="Arial"/>
+              </a:rPr>
+              <a:t>Captures urgent vs saver booking curves weighted dynamically by official DGCA passenger volume shares.</a:t>
+            </a:r>
+          </a:p>
+          <a:p>
+            <a:pPr>
+              <a:lnSpc>
+                <a:spcPct val="115000"/>
+              </a:lnSpc>
+              <a:spcAft>
+                <a:spcPts val="400"/>
+              </a:spcAft>
+            </a:pPr>
+            <a:r>
+              <a:rPr sz="1019" b="1">
+                <a:solidFill>
+                  <a:srgbClr val="15803D"/>
+                </a:solidFill>
+                <a:latin typeface="Arial"/>
+              </a:rPr>
+              <a:t>• UN/ILO Jevons Index: </a:t>
+            </a:r>
+            <a:r>
+              <a:rPr sz="980">
+                <a:solidFill>
+                  <a:srgbClr val="1E293B"/>
+                </a:solidFill>
+                <a:latin typeface="Arial"/>
+              </a:rPr>
+              <a:t>Geometric mean formula eliminates Dutot substitution bias, delivering an axiomatic 0.0% distortion index.</a:t>
+            </a:r>
+          </a:p>
+          <a:p>
+            <a:pPr>
+              <a:lnSpc>
+                <a:spcPct val="115000"/>
+              </a:lnSpc>
+              <a:spcAft>
+                <a:spcPts val="400"/>
+              </a:spcAft>
+            </a:pPr>
+            <a:r>
+              <a:rPr sz="1019" b="1">
+                <a:solidFill>
+                  <a:srgbClr val="15803D"/>
+                </a:solidFill>
+                <a:latin typeface="Arial"/>
+              </a:rPr>
+              <a:t>• Sovereign Audit Ledger: </a:t>
+            </a:r>
+            <a:r>
+              <a:rPr sz="980">
+                <a:solidFill>
+                  <a:srgbClr val="1E293B"/>
+                </a:solidFill>
+                <a:latin typeface="Arial"/>
+              </a:rPr>
+              <a:t>SHA-256 Merkle tree fingerprints guarantee tamper-proof legal evidentiary auditability for MoSPI &amp; RBI.</a:t>
+            </a:r>
+          </a:p>
+        </p:txBody>
+      </p:sp>
+      <p:sp>
+        <p:nvSpPr>
+          <p:cNvPr id="13" name="Rounded Rectangle 12"/>
+          <p:cNvSpPr/>
+          <p:nvPr/>
+        </p:nvSpPr>
+        <p:spPr>
+          <a:xfrm>
+            <a:off x="502920" y="3950208"/>
+            <a:ext cx="2103120" cy="2697480"/>
+          </a:xfrm>
+          <a:prstGeom prst="roundRect">
+            <a:avLst>
+              <a:gd name="adj" fmla="val 5000"/>
+            </a:avLst>
+          </a:prstGeom>
+          <a:solidFill>
+            <a:srgbClr val="FFFFFF"/>
+          </a:solidFill>
+          <a:ln w="19050">
+            <a:solidFill>
+              <a:srgbClr val="3B82F6"/>
+            </a:solidFill>
+          </a:ln>
+        </p:spPr>
+        <p:style>
+          <a:lnRef idx="1">
+            <a:schemeClr val="accent1"/>
+          </a:lnRef>
+          <a:fillRef idx="3">
+            <a:schemeClr val="accent1"/>
+          </a:fillRef>
+          <a:effectRef idx="2">
+            <a:schemeClr val="accent1"/>
+          </a:effectRef>
+          <a:fontRef idx="minor">
+            <a:schemeClr val="lt1"/>
+          </a:fontRef>
+        </p:style>
+        <p:txBody>
+          <a:bodyPr rtlCol="0" anchor="ctr"/>
+          <a:lstStyle/>
+          <a:p>
+            <a:pPr algn="ctr"/>
+          </a:p>
+        </p:txBody>
+      </p:sp>
+      <p:sp>
+        <p:nvSpPr>
+          <p:cNvPr id="14" name="Rounded Rectangle 13"/>
+          <p:cNvSpPr/>
+          <p:nvPr/>
+        </p:nvSpPr>
+        <p:spPr>
+          <a:xfrm>
+            <a:off x="502920" y="3950208"/>
+            <a:ext cx="2103120" cy="365760"/>
+          </a:xfrm>
+          <a:prstGeom prst="roundRect">
+            <a:avLst>
+              <a:gd name="adj" fmla="val 18000"/>
+            </a:avLst>
+          </a:prstGeom>
+          <a:solidFill>
+            <a:srgbClr val="1E40AF"/>
+          </a:solidFill>
+          <a:ln>
+            <a:noFill/>
+          </a:ln>
+        </p:spPr>
+        <p:style>
+          <a:lnRef idx="1">
+            <a:schemeClr val="accent1"/>
+          </a:lnRef>
+          <a:fillRef idx="3">
+            <a:schemeClr val="accent1"/>
+          </a:fillRef>
+          <a:effectRef idx="2">
+            <a:schemeClr val="accent1"/>
+          </a:effectRef>
+          <a:fontRef idx="minor">
+            <a:schemeClr val="lt1"/>
+          </a:fontRef>
+        </p:style>
+        <p:txBody>
+          <a:bodyPr rtlCol="0" anchor="ctr"/>
+          <a:lstStyle/>
+          <a:p>
+            <a:pPr algn="ctr">
+              <a:defRPr sz="1100" b="1">
+                <a:solidFill>
+                  <a:srgbClr val="FFFFFF"/>
+                </a:solidFill>
+                <a:latin typeface="Arial"/>
+              </a:defRPr>
+            </a:pPr>
+            <a:r>
+              <a:t>STEP 01</a:t>
+            </a:r>
+          </a:p>
+        </p:txBody>
+      </p:sp>
+      <p:sp>
+        <p:nvSpPr>
+          <p:cNvPr id="15" name="TextBox 14"/>
+          <p:cNvSpPr txBox="1"/>
+          <p:nvPr/>
+        </p:nvSpPr>
+        <p:spPr>
+          <a:xfrm>
+            <a:off x="594360" y="4361688"/>
+            <a:ext cx="1920240" cy="1828800"/>
+          </a:xfrm>
+          <a:prstGeom prst="rect">
+            <a:avLst/>
+          </a:prstGeom>
+          <a:noFill/>
+        </p:spPr>
+        <p:txBody>
+          <a:bodyPr wrap="square" tIns="0" bIns="0" lIns="0" rIns="0">
+            <a:spAutoFit/>
+          </a:bodyPr>
+          <a:lstStyle/>
+          <a:p>
+            <a:pPr algn="ctr">
+              <a:spcAft>
+                <a:spcPts val="200"/>
+              </a:spcAft>
+              <a:defRPr sz="1150" b="1">
+                <a:solidFill>
+                  <a:srgbClr val="1E40AF"/>
+                </a:solidFill>
+                <a:latin typeface="Arial"/>
+              </a:defRPr>
+            </a:pPr>
+            <a:r>
+              <a:t>Dynamic Yield</a:t>
+            </a:r>
+            <a:br/>
+            <a:r>
+              <a:t>Tracking</a:t>
+            </a:r>
+          </a:p>
+          <a:p>
+            <a:pPr algn="ctr">
+              <a:spcAft>
+                <a:spcPts val="600"/>
+              </a:spcAft>
+              <a:defRPr sz="900" b="1">
+                <a:solidFill>
+                  <a:srgbClr val="64748B"/>
+                </a:solidFill>
+                <a:latin typeface="Arial"/>
+              </a:defRPr>
+            </a:pPr>
+            <a:r>
+              <a:t>• T+1..T+45 Windows •</a:t>
+            </a:r>
+          </a:p>
+          <a:p>
+            <a:pPr algn="l">
+              <a:lnSpc>
+                <a:spcPct val="118000"/>
+              </a:lnSpc>
+              <a:defRPr sz="960">
+                <a:solidFill>
+                  <a:srgbClr val="1E293B"/>
+                </a:solidFill>
+                <a:latin typeface="Arial"/>
+              </a:defRPr>
+            </a:pPr>
+            <a:r>
+              <a:t>Captures intraday surges across T+1..T+45 advance booking windows.</a:t>
+            </a:r>
+          </a:p>
+        </p:txBody>
+      </p:sp>
+      <p:sp>
+        <p:nvSpPr>
+          <p:cNvPr id="16" name="Rounded Rectangle 15"/>
+          <p:cNvSpPr/>
+          <p:nvPr/>
+        </p:nvSpPr>
+        <p:spPr>
+          <a:xfrm>
+            <a:off x="576072" y="6263640"/>
+            <a:ext cx="1956816" cy="310896"/>
           </a:xfrm>
           <a:prstGeom prst="roundRect">
             <a:avLst>
               <a:gd name="adj" fmla="val 20000"/>
+            </a:avLst>
+          </a:prstGeom>
+          <a:solidFill>
+            <a:srgbClr val="EFF6FF"/>
+          </a:solidFill>
+          <a:ln w="12700">
+            <a:solidFill>
+              <a:srgbClr val="3B82F6"/>
+            </a:solidFill>
+          </a:ln>
+        </p:spPr>
+        <p:style>
+          <a:lnRef idx="1">
+            <a:schemeClr val="accent1"/>
+          </a:lnRef>
+          <a:fillRef idx="3">
+            <a:schemeClr val="accent1"/>
+          </a:fillRef>
+          <a:effectRef idx="2">
+            <a:schemeClr val="accent1"/>
+          </a:effectRef>
+          <a:fontRef idx="minor">
+            <a:schemeClr val="lt1"/>
+          </a:fontRef>
+        </p:style>
+        <p:txBody>
+          <a:bodyPr rtlCol="0" anchor="ctr"/>
+          <a:lstStyle/>
+          <a:p>
+            <a:pPr algn="ctr">
+              <a:defRPr sz="850" b="1">
+                <a:solidFill>
+                  <a:srgbClr val="1E40AF"/>
+                </a:solidFill>
+                <a:latin typeface="Arial"/>
+              </a:defRPr>
+            </a:pPr>
+            <a:r>
+              <a:t>Playwright Scraper | 10,000+ Fares/Day</a:t>
+            </a:r>
+          </a:p>
+        </p:txBody>
+      </p:sp>
+      <p:sp>
+        <p:nvSpPr>
+          <p:cNvPr id="17" name="TextBox 16"/>
+          <p:cNvSpPr txBox="1"/>
+          <p:nvPr/>
+        </p:nvSpPr>
+        <p:spPr>
+          <a:xfrm>
+            <a:off x="2615184" y="5001768"/>
+            <a:ext cx="146304" cy="365760"/>
+          </a:xfrm>
+          <a:prstGeom prst="rect">
+            <a:avLst/>
+          </a:prstGeom>
+          <a:noFill/>
+        </p:spPr>
+        <p:txBody>
+          <a:bodyPr wrap="none" lIns="0" tIns="0" rIns="0" bIns="0">
+            <a:spAutoFit/>
+          </a:bodyPr>
+          <a:lstStyle/>
+          <a:p>
+            <a:pPr algn="ctr">
+              <a:defRPr sz="1500" b="1">
+                <a:solidFill>
+                  <a:srgbClr val="94A3B8"/>
+                </a:solidFill>
+                <a:latin typeface="Arial"/>
+              </a:defRPr>
+            </a:pPr>
+            <a:r>
+              <a:t>➔</a:t>
+            </a:r>
+          </a:p>
+        </p:txBody>
+      </p:sp>
+      <p:sp>
+        <p:nvSpPr>
+          <p:cNvPr id="18" name="Rounded Rectangle 17"/>
+          <p:cNvSpPr/>
+          <p:nvPr/>
+        </p:nvSpPr>
+        <p:spPr>
+          <a:xfrm>
+            <a:off x="2770632" y="3950208"/>
+            <a:ext cx="2103120" cy="2697480"/>
+          </a:xfrm>
+          <a:prstGeom prst="roundRect">
+            <a:avLst>
+              <a:gd name="adj" fmla="val 5000"/>
+            </a:avLst>
+          </a:prstGeom>
+          <a:solidFill>
+            <a:srgbClr val="FFFFFF"/>
+          </a:solidFill>
+          <a:ln w="19050">
+            <a:solidFill>
+              <a:srgbClr val="0EA5E9"/>
+            </a:solidFill>
+          </a:ln>
+        </p:spPr>
+        <p:style>
+          <a:lnRef idx="1">
+            <a:schemeClr val="accent1"/>
+          </a:lnRef>
+          <a:fillRef idx="3">
+            <a:schemeClr val="accent1"/>
+          </a:fillRef>
+          <a:effectRef idx="2">
+            <a:schemeClr val="accent1"/>
+          </a:effectRef>
+          <a:fontRef idx="minor">
+            <a:schemeClr val="lt1"/>
+          </a:fontRef>
+        </p:style>
+        <p:txBody>
+          <a:bodyPr rtlCol="0" anchor="ctr"/>
+          <a:lstStyle/>
+          <a:p>
+            <a:pPr algn="ctr"/>
+          </a:p>
+        </p:txBody>
+      </p:sp>
+      <p:sp>
+        <p:nvSpPr>
+          <p:cNvPr id="19" name="Rounded Rectangle 18"/>
+          <p:cNvSpPr/>
+          <p:nvPr/>
+        </p:nvSpPr>
+        <p:spPr>
+          <a:xfrm>
+            <a:off x="2770632" y="3950208"/>
+            <a:ext cx="2103120" cy="365760"/>
+          </a:xfrm>
+          <a:prstGeom prst="roundRect">
+            <a:avLst>
+              <a:gd name="adj" fmla="val 18000"/>
+            </a:avLst>
+          </a:prstGeom>
+          <a:solidFill>
+            <a:srgbClr val="0284C7"/>
+          </a:solidFill>
+          <a:ln>
+            <a:noFill/>
+          </a:ln>
+        </p:spPr>
+        <p:style>
+          <a:lnRef idx="1">
+            <a:schemeClr val="accent1"/>
+          </a:lnRef>
+          <a:fillRef idx="3">
+            <a:schemeClr val="accent1"/>
+          </a:fillRef>
+          <a:effectRef idx="2">
+            <a:schemeClr val="accent1"/>
+          </a:effectRef>
+          <a:fontRef idx="minor">
+            <a:schemeClr val="lt1"/>
+          </a:fontRef>
+        </p:style>
+        <p:txBody>
+          <a:bodyPr rtlCol="0" anchor="ctr"/>
+          <a:lstStyle/>
+          <a:p>
+            <a:pPr algn="ctr">
+              <a:defRPr sz="1100" b="1">
+                <a:solidFill>
+                  <a:srgbClr val="FFFFFF"/>
+                </a:solidFill>
+                <a:latin typeface="Arial"/>
+              </a:defRPr>
+            </a:pPr>
+            <a:r>
+              <a:t>STEP 02</a:t>
+            </a:r>
+          </a:p>
+        </p:txBody>
+      </p:sp>
+      <p:sp>
+        <p:nvSpPr>
+          <p:cNvPr id="20" name="TextBox 19"/>
+          <p:cNvSpPr txBox="1"/>
+          <p:nvPr/>
+        </p:nvSpPr>
+        <p:spPr>
+          <a:xfrm>
+            <a:off x="2862072" y="4361688"/>
+            <a:ext cx="1920240" cy="1828800"/>
+          </a:xfrm>
+          <a:prstGeom prst="rect">
+            <a:avLst/>
+          </a:prstGeom>
+          <a:noFill/>
+        </p:spPr>
+        <p:txBody>
+          <a:bodyPr wrap="square" tIns="0" bIns="0" lIns="0" rIns="0">
+            <a:spAutoFit/>
+          </a:bodyPr>
+          <a:lstStyle/>
+          <a:p>
+            <a:pPr algn="ctr">
+              <a:spcAft>
+                <a:spcPts val="200"/>
+              </a:spcAft>
+              <a:defRPr sz="1150" b="1">
+                <a:solidFill>
+                  <a:srgbClr val="0284C7"/>
+                </a:solidFill>
+                <a:latin typeface="Arial"/>
+              </a:defRPr>
+            </a:pPr>
+            <a:r>
+              <a:t>Dynamic IQR</a:t>
+            </a:r>
+            <a:br/>
+            <a:r>
+              <a:t>Scrubber</a:t>
+            </a:r>
+          </a:p>
+          <a:p>
+            <a:pPr algn="ctr">
+              <a:spcAft>
+                <a:spcPts val="600"/>
+              </a:spcAft>
+              <a:defRPr sz="900" b="1">
+                <a:solidFill>
+                  <a:srgbClr val="64748B"/>
+                </a:solidFill>
+                <a:latin typeface="Arial"/>
+              </a:defRPr>
+            </a:pPr>
+            <a:r>
+              <a:t>• Base Fare Isolation •</a:t>
+            </a:r>
+          </a:p>
+          <a:p>
+            <a:pPr algn="l">
+              <a:lnSpc>
+                <a:spcPct val="118000"/>
+              </a:lnSpc>
+              <a:defRPr sz="960">
+                <a:solidFill>
+                  <a:srgbClr val="1E293B"/>
+                </a:solidFill>
+                <a:latin typeface="Arial"/>
+              </a:defRPr>
+            </a:pPr>
+            <a:r>
+              <a:t>Isolates base fares and purges phantom prices and cache glitches.</a:t>
+            </a:r>
+          </a:p>
+        </p:txBody>
+      </p:sp>
+      <p:sp>
+        <p:nvSpPr>
+          <p:cNvPr id="21" name="Rounded Rectangle 20"/>
+          <p:cNvSpPr/>
+          <p:nvPr/>
+        </p:nvSpPr>
+        <p:spPr>
+          <a:xfrm>
+            <a:off x="2843784" y="6263640"/>
+            <a:ext cx="1956816" cy="310896"/>
+          </a:xfrm>
+          <a:prstGeom prst="roundRect">
+            <a:avLst>
+              <a:gd name="adj" fmla="val 20000"/>
+            </a:avLst>
+          </a:prstGeom>
+          <a:solidFill>
+            <a:srgbClr val="F0F9FF"/>
+          </a:solidFill>
+          <a:ln w="12700">
+            <a:solidFill>
+              <a:srgbClr val="0EA5E9"/>
+            </a:solidFill>
+          </a:ln>
+        </p:spPr>
+        <p:style>
+          <a:lnRef idx="1">
+            <a:schemeClr val="accent1"/>
+          </a:lnRef>
+          <a:fillRef idx="3">
+            <a:schemeClr val="accent1"/>
+          </a:fillRef>
+          <a:effectRef idx="2">
+            <a:schemeClr val="accent1"/>
+          </a:effectRef>
+          <a:fontRef idx="minor">
+            <a:schemeClr val="lt1"/>
+          </a:fontRef>
+        </p:style>
+        <p:txBody>
+          <a:bodyPr rtlCol="0" anchor="ctr"/>
+          <a:lstStyle/>
+          <a:p>
+            <a:pPr algn="ctr">
+              <a:defRPr sz="850" b="1">
+                <a:solidFill>
+                  <a:srgbClr val="0284C7"/>
+                </a:solidFill>
+                <a:latin typeface="Arial"/>
+              </a:defRPr>
+            </a:pPr>
+            <a:r>
+              <a:t>SciPy Truncation | Outlier Purged</a:t>
+            </a:r>
+          </a:p>
+        </p:txBody>
+      </p:sp>
+      <p:sp>
+        <p:nvSpPr>
+          <p:cNvPr id="22" name="TextBox 21"/>
+          <p:cNvSpPr txBox="1"/>
+          <p:nvPr/>
+        </p:nvSpPr>
+        <p:spPr>
+          <a:xfrm>
+            <a:off x="4882896" y="5001768"/>
+            <a:ext cx="146304" cy="365760"/>
+          </a:xfrm>
+          <a:prstGeom prst="rect">
+            <a:avLst/>
+          </a:prstGeom>
+          <a:noFill/>
+        </p:spPr>
+        <p:txBody>
+          <a:bodyPr wrap="none" lIns="0" tIns="0" rIns="0" bIns="0">
+            <a:spAutoFit/>
+          </a:bodyPr>
+          <a:lstStyle/>
+          <a:p>
+            <a:pPr algn="ctr">
+              <a:defRPr sz="1500" b="1">
+                <a:solidFill>
+                  <a:srgbClr val="94A3B8"/>
+                </a:solidFill>
+                <a:latin typeface="Arial"/>
+              </a:defRPr>
+            </a:pPr>
+            <a:r>
+              <a:t>➔</a:t>
+            </a:r>
+          </a:p>
+        </p:txBody>
+      </p:sp>
+      <p:sp>
+        <p:nvSpPr>
+          <p:cNvPr id="23" name="Rounded Rectangle 22"/>
+          <p:cNvSpPr/>
+          <p:nvPr/>
+        </p:nvSpPr>
+        <p:spPr>
+          <a:xfrm>
+            <a:off x="5038344" y="3950208"/>
+            <a:ext cx="2103120" cy="2697480"/>
+          </a:xfrm>
+          <a:prstGeom prst="roundRect">
+            <a:avLst>
+              <a:gd name="adj" fmla="val 5000"/>
+            </a:avLst>
+          </a:prstGeom>
+          <a:solidFill>
+            <a:srgbClr val="FFFFFF"/>
+          </a:solidFill>
+          <a:ln w="19050">
+            <a:solidFill>
+              <a:srgbClr val="14B8A6"/>
+            </a:solidFill>
+          </a:ln>
+        </p:spPr>
+        <p:style>
+          <a:lnRef idx="1">
+            <a:schemeClr val="accent1"/>
+          </a:lnRef>
+          <a:fillRef idx="3">
+            <a:schemeClr val="accent1"/>
+          </a:fillRef>
+          <a:effectRef idx="2">
+            <a:schemeClr val="accent1"/>
+          </a:effectRef>
+          <a:fontRef idx="minor">
+            <a:schemeClr val="lt1"/>
+          </a:fontRef>
+        </p:style>
+        <p:txBody>
+          <a:bodyPr rtlCol="0" anchor="ctr"/>
+          <a:lstStyle/>
+          <a:p>
+            <a:pPr algn="ctr"/>
+          </a:p>
+        </p:txBody>
+      </p:sp>
+      <p:sp>
+        <p:nvSpPr>
+          <p:cNvPr id="24" name="Rounded Rectangle 23"/>
+          <p:cNvSpPr/>
+          <p:nvPr/>
+        </p:nvSpPr>
+        <p:spPr>
+          <a:xfrm>
+            <a:off x="5038344" y="3950208"/>
+            <a:ext cx="2103120" cy="365760"/>
+          </a:xfrm>
+          <a:prstGeom prst="roundRect">
+            <a:avLst>
+              <a:gd name="adj" fmla="val 18000"/>
+            </a:avLst>
+          </a:prstGeom>
+          <a:solidFill>
+            <a:srgbClr val="0D9488"/>
+          </a:solidFill>
+          <a:ln>
+            <a:noFill/>
+          </a:ln>
+        </p:spPr>
+        <p:style>
+          <a:lnRef idx="1">
+            <a:schemeClr val="accent1"/>
+          </a:lnRef>
+          <a:fillRef idx="3">
+            <a:schemeClr val="accent1"/>
+          </a:fillRef>
+          <a:effectRef idx="2">
+            <a:schemeClr val="accent1"/>
+          </a:effectRef>
+          <a:fontRef idx="minor">
+            <a:schemeClr val="lt1"/>
+          </a:fontRef>
+        </p:style>
+        <p:txBody>
+          <a:bodyPr rtlCol="0" anchor="ctr"/>
+          <a:lstStyle/>
+          <a:p>
+            <a:pPr algn="ctr">
+              <a:defRPr sz="1100" b="1">
+                <a:solidFill>
+                  <a:srgbClr val="FFFFFF"/>
+                </a:solidFill>
+                <a:latin typeface="Arial"/>
+              </a:defRPr>
+            </a:pPr>
+            <a:r>
+              <a:t>STEP 03</a:t>
+            </a:r>
+          </a:p>
+        </p:txBody>
+      </p:sp>
+      <p:sp>
+        <p:nvSpPr>
+          <p:cNvPr id="25" name="TextBox 24"/>
+          <p:cNvSpPr txBox="1"/>
+          <p:nvPr/>
+        </p:nvSpPr>
+        <p:spPr>
+          <a:xfrm>
+            <a:off x="5129784" y="4361688"/>
+            <a:ext cx="1920240" cy="1828800"/>
+          </a:xfrm>
+          <a:prstGeom prst="rect">
+            <a:avLst/>
+          </a:prstGeom>
+          <a:noFill/>
+        </p:spPr>
+        <p:txBody>
+          <a:bodyPr wrap="square" tIns="0" bIns="0" lIns="0" rIns="0">
+            <a:spAutoFit/>
+          </a:bodyPr>
+          <a:lstStyle/>
+          <a:p>
+            <a:pPr algn="ctr">
+              <a:spcAft>
+                <a:spcPts val="200"/>
+              </a:spcAft>
+              <a:defRPr sz="1150" b="1">
+                <a:solidFill>
+                  <a:srgbClr val="0D9488"/>
+                </a:solidFill>
+                <a:latin typeface="Arial"/>
+              </a:defRPr>
+            </a:pPr>
+            <a:r>
+              <a:t>UN/ILO Jevons</a:t>
+            </a:r>
+            <a:br/>
+            <a:r>
+              <a:t>Index Engine</a:t>
+            </a:r>
+          </a:p>
+          <a:p>
+            <a:pPr algn="ctr">
+              <a:spcAft>
+                <a:spcPts val="600"/>
+              </a:spcAft>
+              <a:defRPr sz="900" b="1">
+                <a:solidFill>
+                  <a:srgbClr val="64748B"/>
+                </a:solidFill>
+                <a:latin typeface="Arial"/>
+              </a:defRPr>
+            </a:pPr>
+            <a:r>
+              <a:t>• Geometric Mean •</a:t>
+            </a:r>
+          </a:p>
+          <a:p>
+            <a:pPr algn="l">
+              <a:lnSpc>
+                <a:spcPct val="118000"/>
+              </a:lnSpc>
+              <a:defRPr sz="960">
+                <a:solidFill>
+                  <a:srgbClr val="1E293B"/>
+                </a:solidFill>
+                <a:latin typeface="Arial"/>
+              </a:defRPr>
+            </a:pPr>
+            <a:r>
+              <a:t>Geometric mean calculation that eliminates upward substitution bias.</a:t>
+            </a:r>
+          </a:p>
+        </p:txBody>
+      </p:sp>
+      <p:sp>
+        <p:nvSpPr>
+          <p:cNvPr id="26" name="Rounded Rectangle 25"/>
+          <p:cNvSpPr/>
+          <p:nvPr/>
+        </p:nvSpPr>
+        <p:spPr>
+          <a:xfrm>
+            <a:off x="5111496" y="6263640"/>
+            <a:ext cx="1956816" cy="310896"/>
+          </a:xfrm>
+          <a:prstGeom prst="roundRect">
+            <a:avLst>
+              <a:gd name="adj" fmla="val 20000"/>
+            </a:avLst>
+          </a:prstGeom>
+          <a:solidFill>
+            <a:srgbClr val="F0FDFA"/>
+          </a:solidFill>
+          <a:ln w="12700">
+            <a:solidFill>
+              <a:srgbClr val="14B8A6"/>
+            </a:solidFill>
+          </a:ln>
+        </p:spPr>
+        <p:style>
+          <a:lnRef idx="1">
+            <a:schemeClr val="accent1"/>
+          </a:lnRef>
+          <a:fillRef idx="3">
+            <a:schemeClr val="accent1"/>
+          </a:fillRef>
+          <a:effectRef idx="2">
+            <a:schemeClr val="accent1"/>
+          </a:effectRef>
+          <a:fontRef idx="minor">
+            <a:schemeClr val="lt1"/>
+          </a:fontRef>
+        </p:style>
+        <p:txBody>
+          <a:bodyPr rtlCol="0" anchor="ctr"/>
+          <a:lstStyle/>
+          <a:p>
+            <a:pPr algn="ctr">
+              <a:defRPr sz="850" b="1">
+                <a:solidFill>
+                  <a:srgbClr val="0D9488"/>
+                </a:solidFill>
+                <a:latin typeface="Arial"/>
+              </a:defRPr>
+            </a:pPr>
+            <a:r>
+              <a:t>UN/ILO Ch. 10 Math | 0.0% Upward Bias</a:t>
+            </a:r>
+          </a:p>
+        </p:txBody>
+      </p:sp>
+      <p:sp>
+        <p:nvSpPr>
+          <p:cNvPr id="27" name="TextBox 26"/>
+          <p:cNvSpPr txBox="1"/>
+          <p:nvPr/>
+        </p:nvSpPr>
+        <p:spPr>
+          <a:xfrm>
+            <a:off x="7150608" y="5001768"/>
+            <a:ext cx="146304" cy="365760"/>
+          </a:xfrm>
+          <a:prstGeom prst="rect">
+            <a:avLst/>
+          </a:prstGeom>
+          <a:noFill/>
+        </p:spPr>
+        <p:txBody>
+          <a:bodyPr wrap="none" lIns="0" tIns="0" rIns="0" bIns="0">
+            <a:spAutoFit/>
+          </a:bodyPr>
+          <a:lstStyle/>
+          <a:p>
+            <a:pPr algn="ctr">
+              <a:defRPr sz="1500" b="1">
+                <a:solidFill>
+                  <a:srgbClr val="94A3B8"/>
+                </a:solidFill>
+                <a:latin typeface="Arial"/>
+              </a:defRPr>
+            </a:pPr>
+            <a:r>
+              <a:t>➔</a:t>
+            </a:r>
+          </a:p>
+        </p:txBody>
+      </p:sp>
+      <p:sp>
+        <p:nvSpPr>
+          <p:cNvPr id="28" name="Rounded Rectangle 27"/>
+          <p:cNvSpPr/>
+          <p:nvPr/>
+        </p:nvSpPr>
+        <p:spPr>
+          <a:xfrm>
+            <a:off x="7306056" y="3950208"/>
+            <a:ext cx="2103120" cy="2697480"/>
+          </a:xfrm>
+          <a:prstGeom prst="roundRect">
+            <a:avLst>
+              <a:gd name="adj" fmla="val 5000"/>
+            </a:avLst>
+          </a:prstGeom>
+          <a:solidFill>
+            <a:srgbClr val="FFFFFF"/>
+          </a:solidFill>
+          <a:ln w="19050">
+            <a:solidFill>
+              <a:srgbClr val="22C55E"/>
+            </a:solidFill>
+          </a:ln>
+        </p:spPr>
+        <p:style>
+          <a:lnRef idx="1">
+            <a:schemeClr val="accent1"/>
+          </a:lnRef>
+          <a:fillRef idx="3">
+            <a:schemeClr val="accent1"/>
+          </a:fillRef>
+          <a:effectRef idx="2">
+            <a:schemeClr val="accent1"/>
+          </a:effectRef>
+          <a:fontRef idx="minor">
+            <a:schemeClr val="lt1"/>
+          </a:fontRef>
+        </p:style>
+        <p:txBody>
+          <a:bodyPr rtlCol="0" anchor="ctr"/>
+          <a:lstStyle/>
+          <a:p>
+            <a:pPr algn="ctr"/>
+          </a:p>
+        </p:txBody>
+      </p:sp>
+      <p:sp>
+        <p:nvSpPr>
+          <p:cNvPr id="29" name="Rounded Rectangle 28"/>
+          <p:cNvSpPr/>
+          <p:nvPr/>
+        </p:nvSpPr>
+        <p:spPr>
+          <a:xfrm>
+            <a:off x="7306056" y="3950208"/>
+            <a:ext cx="2103120" cy="365760"/>
+          </a:xfrm>
+          <a:prstGeom prst="roundRect">
+            <a:avLst>
+              <a:gd name="adj" fmla="val 18000"/>
             </a:avLst>
           </a:prstGeom>
           <a:solidFill>
@@ -4005,7 +5052,7 @@
           <a:lstStyle/>
           <a:p>
             <a:pPr algn="ctr">
-              <a:defRPr sz="1150" b="1">
+              <a:defRPr sz="1100" b="1">
                 <a:solidFill>
                   <a:srgbClr val="FFFFFF"/>
                 </a:solidFill>
@@ -4013,21 +5060,21 @@
               </a:defRPr>
             </a:pPr>
             <a:r>
-              <a:t>▶ HOW OUR APP SOLVES IT (VayuSuchak Engine)</a:t>
-            </a:r>
-          </a:p>
-        </p:txBody>
-      </p:sp>
-      <p:sp>
-        <p:nvSpPr>
-          <p:cNvPr id="12" name="TextBox 11"/>
+              <a:t>STEP 04</a:t>
+            </a:r>
+          </a:p>
+        </p:txBody>
+      </p:sp>
+      <p:sp>
+        <p:nvSpPr>
+          <p:cNvPr id="30" name="TextBox 29"/>
           <p:cNvSpPr txBox="1"/>
           <p:nvPr/>
         </p:nvSpPr>
         <p:spPr>
           <a:xfrm>
-            <a:off x="6428232" y="1737360"/>
-            <a:ext cx="5074920" cy="2221992"/>
+            <a:off x="7397496" y="4361688"/>
+            <a:ext cx="1920240" cy="1828800"/>
           </a:xfrm>
           <a:prstGeom prst="rect">
             <a:avLst/>
@@ -4035,158 +5082,74 @@
           <a:noFill/>
         </p:spPr>
         <p:txBody>
-          <a:bodyPr wrap="square">
+          <a:bodyPr wrap="square" tIns="0" bIns="0" lIns="0" rIns="0">
             <a:spAutoFit/>
           </a:bodyPr>
           <a:lstStyle/>
           <a:p>
-            <a:pPr>
+            <a:pPr algn="ctr">
+              <a:spcAft>
+                <a:spcPts val="200"/>
+              </a:spcAft>
+              <a:defRPr sz="1150" b="1">
+                <a:solidFill>
+                  <a:srgbClr val="16A34A"/>
+                </a:solidFill>
+                <a:latin typeface="Arial"/>
+              </a:defRPr>
+            </a:pPr>
+            <a:r>
+              <a:t>Sovereign Audit</a:t>
+            </a:r>
+            <a:br/>
+            <a:r>
+              <a:t>Vault</a:t>
+            </a:r>
+          </a:p>
+          <a:p>
+            <a:pPr algn="ctr">
+              <a:spcAft>
+                <a:spcPts val="600"/>
+              </a:spcAft>
+              <a:defRPr sz="900" b="1">
+                <a:solidFill>
+                  <a:srgbClr val="64748B"/>
+                </a:solidFill>
+                <a:latin typeface="Arial"/>
+              </a:defRPr>
+            </a:pPr>
+            <a:r>
+              <a:t>• Cryptographic Proofs •</a:t>
+            </a:r>
+          </a:p>
+          <a:p>
+            <a:pPr algn="l">
               <a:lnSpc>
-                <a:spcPct val="115000"/>
+                <a:spcPct val="118000"/>
               </a:lnSpc>
-              <a:spcAft>
-                <a:spcPts val="500"/>
-              </a:spcAft>
-            </a:pPr>
-            <a:r>
-              <a:rPr sz="1019" b="1">
-                <a:solidFill>
-                  <a:srgbClr val="15803D"/>
-                </a:solidFill>
-                <a:latin typeface="Arial"/>
-              </a:rPr>
-              <a:t>• Real-Time Extraction: </a:t>
-            </a:r>
-            <a:r>
-              <a:rPr sz="980">
-                <a:solidFill>
-                  <a:srgbClr val="0F172A"/>
-                </a:solidFill>
-                <a:latin typeface="Arial"/>
-              </a:rPr>
-              <a:t>Playwright headless bots harvest 10,000+ live fares daily with sub-24h latency at 02:00 AM IST.</a:t>
-            </a:r>
-          </a:p>
-          <a:p>
-            <a:pPr>
-              <a:lnSpc>
-                <a:spcPct val="115000"/>
-              </a:lnSpc>
-              <a:spcAft>
-                <a:spcPts val="500"/>
-              </a:spcAft>
-            </a:pPr>
-            <a:r>
-              <a:rPr sz="1019" b="1">
-                <a:solidFill>
-                  <a:srgbClr val="15803D"/>
-                </a:solidFill>
-                <a:latin typeface="Arial"/>
-              </a:rPr>
-              <a:t>• T+1..T+45 Advance Horizons: </a:t>
-            </a:r>
-            <a:r>
-              <a:rPr sz="980">
-                <a:solidFill>
-                  <a:srgbClr val="0F172A"/>
-                </a:solidFill>
-                <a:latin typeface="Arial"/>
-              </a:rPr>
-              <a:t>Captures urgent vs saver fares weighted dynamically by official DGCA passenger volumes.</a:t>
-            </a:r>
-          </a:p>
-          <a:p>
-            <a:pPr>
-              <a:lnSpc>
-                <a:spcPct val="115000"/>
-              </a:lnSpc>
-              <a:spcAft>
-                <a:spcPts val="500"/>
-              </a:spcAft>
-            </a:pPr>
-            <a:r>
-              <a:rPr sz="1019" b="1">
-                <a:solidFill>
-                  <a:srgbClr val="15803D"/>
-                </a:solidFill>
-                <a:latin typeface="Arial"/>
-              </a:rPr>
-              <a:t>• UN/ILO Jevons Index: </a:t>
-            </a:r>
-            <a:r>
-              <a:rPr sz="980">
-                <a:solidFill>
-                  <a:srgbClr val="0F172A"/>
-                </a:solidFill>
-                <a:latin typeface="Arial"/>
-              </a:rPr>
-              <a:t>Geometric mean formulation mathematically eliminates Dutot upward substitution distortion.</a:t>
-            </a:r>
-          </a:p>
-          <a:p>
-            <a:pPr>
-              <a:lnSpc>
-                <a:spcPct val="115000"/>
-              </a:lnSpc>
-              <a:spcAft>
-                <a:spcPts val="500"/>
-              </a:spcAft>
-            </a:pPr>
-            <a:r>
-              <a:rPr sz="1019" b="1">
-                <a:solidFill>
-                  <a:srgbClr val="15803D"/>
-                </a:solidFill>
-                <a:latin typeface="Arial"/>
-              </a:rPr>
-              <a:t>• SHA-256 Audit Ledger: </a:t>
-            </a:r>
-            <a:r>
-              <a:rPr sz="980">
-                <a:solidFill>
-                  <a:srgbClr val="0F172A"/>
-                </a:solidFill>
-                <a:latin typeface="Arial"/>
-              </a:rPr>
-              <a:t>Immutable cryptographic fingerprints ensure sovereign-grade evidentiary auditability for MoSPI.</a:t>
-            </a:r>
-          </a:p>
-        </p:txBody>
-      </p:sp>
-      <p:pic>
-        <p:nvPicPr>
-          <p:cNvPr id="13" name="Picture 12" descr="workflow_circular_nodes.png"/>
-          <p:cNvPicPr>
-            <a:picLocks noChangeAspect="1"/>
-          </p:cNvPicPr>
-          <p:nvPr/>
-        </p:nvPicPr>
-        <p:blipFill>
-          <a:blip r:embed="rId3"/>
-          <a:stretch>
-            <a:fillRect/>
-          </a:stretch>
-        </p:blipFill>
-        <p:spPr>
-          <a:xfrm>
-            <a:off x="502920" y="4069080"/>
-            <a:ext cx="11183112" cy="1755648"/>
-          </a:xfrm>
-          <a:prstGeom prst="rect">
-            <a:avLst/>
-          </a:prstGeom>
-        </p:spPr>
-      </p:pic>
-      <p:sp>
-        <p:nvSpPr>
-          <p:cNvPr id="14" name="Rounded Rectangle 13"/>
+              <a:defRPr sz="960">
+                <a:solidFill>
+                  <a:srgbClr val="1E293B"/>
+                </a:solidFill>
+                <a:latin typeface="Arial"/>
+              </a:defRPr>
+            </a:pPr>
+            <a:r>
+              <a:t>SHA-256 batch Merkle tree proofs for judicial and policy scrutiny.</a:t>
+            </a:r>
+          </a:p>
+        </p:txBody>
+      </p:sp>
+      <p:sp>
+        <p:nvSpPr>
+          <p:cNvPr id="31" name="Rounded Rectangle 30"/>
           <p:cNvSpPr/>
           <p:nvPr/>
         </p:nvSpPr>
         <p:spPr>
           <a:xfrm>
-            <a:off x="502920" y="5943600"/>
-            <a:ext cx="11183112" cy="438912"/>
+            <a:off x="7379208" y="6263640"/>
+            <a:ext cx="1956816" cy="310896"/>
           </a:xfrm>
           <a:prstGeom prst="roundRect">
             <a:avLst>
@@ -4194,11 +5157,11 @@
             </a:avLst>
           </a:prstGeom>
           <a:solidFill>
-            <a:srgbClr val="0F172A"/>
+            <a:srgbClr val="F0FDF4"/>
           </a:solidFill>
-          <a:ln w="15240">
+          <a:ln w="12700">
             <a:solidFill>
-              <a:srgbClr val="1E3A8A"/>
+              <a:srgbClr val="22C55E"/>
             </a:solidFill>
           </a:ln>
         </p:spPr>
@@ -4220,20 +5183,30 @@
           <a:bodyPr rtlCol="0" anchor="ctr"/>
           <a:lstStyle/>
           <a:p>
-            <a:pPr algn="ctr"/>
-          </a:p>
-        </p:txBody>
-      </p:sp>
-      <p:sp>
-        <p:nvSpPr>
-          <p:cNvPr id="15" name="TextBox 14"/>
+            <a:pPr algn="ctr">
+              <a:defRPr sz="850" b="1">
+                <a:solidFill>
+                  <a:srgbClr val="16A34A"/>
+                </a:solidFill>
+                <a:latin typeface="Arial"/>
+              </a:defRPr>
+            </a:pPr>
+            <a:r>
+              <a:t>SHA-256 Ledger | Tamper-Proof</a:t>
+            </a:r>
+          </a:p>
+        </p:txBody>
+      </p:sp>
+      <p:sp>
+        <p:nvSpPr>
+          <p:cNvPr id="32" name="TextBox 31"/>
           <p:cNvSpPr txBox="1"/>
           <p:nvPr/>
         </p:nvSpPr>
         <p:spPr>
           <a:xfrm>
-            <a:off x="594360" y="5998464"/>
-            <a:ext cx="11000232" cy="329184"/>
+            <a:off x="9418320" y="5001768"/>
+            <a:ext cx="146304" cy="365760"/>
           </a:xfrm>
           <a:prstGeom prst="rect">
             <a:avLst/>
@@ -4241,92 +5214,255 @@
           <a:noFill/>
         </p:spPr>
         <p:txBody>
-          <a:bodyPr wrap="none">
+          <a:bodyPr wrap="none" lIns="0" tIns="0" rIns="0" bIns="0">
             <a:spAutoFit/>
           </a:bodyPr>
           <a:lstStyle/>
           <a:p>
+            <a:pPr algn="ctr">
+              <a:defRPr sz="1500" b="1">
+                <a:solidFill>
+                  <a:srgbClr val="94A3B8"/>
+                </a:solidFill>
+                <a:latin typeface="Arial"/>
+              </a:defRPr>
+            </a:pPr>
+            <a:r>
+              <a:t>➔</a:t>
+            </a:r>
+          </a:p>
+        </p:txBody>
+      </p:sp>
+      <p:sp>
+        <p:nvSpPr>
+          <p:cNvPr id="33" name="Rounded Rectangle 32"/>
+          <p:cNvSpPr/>
+          <p:nvPr/>
+        </p:nvSpPr>
+        <p:spPr>
+          <a:xfrm>
+            <a:off x="9573768" y="3950208"/>
+            <a:ext cx="2103120" cy="2697480"/>
+          </a:xfrm>
+          <a:prstGeom prst="roundRect">
+            <a:avLst>
+              <a:gd name="adj" fmla="val 5000"/>
+            </a:avLst>
+          </a:prstGeom>
+          <a:solidFill>
+            <a:srgbClr val="FFFFFF"/>
+          </a:solidFill>
+          <a:ln w="19050">
+            <a:solidFill>
+              <a:srgbClr val="64748B"/>
+            </a:solidFill>
+          </a:ln>
+        </p:spPr>
+        <p:style>
+          <a:lnRef idx="1">
+            <a:schemeClr val="accent1"/>
+          </a:lnRef>
+          <a:fillRef idx="3">
+            <a:schemeClr val="accent1"/>
+          </a:fillRef>
+          <a:effectRef idx="2">
+            <a:schemeClr val="accent1"/>
+          </a:effectRef>
+          <a:fontRef idx="minor">
+            <a:schemeClr val="lt1"/>
+          </a:fontRef>
+        </p:style>
+        <p:txBody>
+          <a:bodyPr rtlCol="0" anchor="ctr"/>
+          <a:lstStyle/>
+          <a:p>
             <a:pPr algn="ctr"/>
-            <a:r>
-              <a:rPr sz="1050" b="1">
+          </a:p>
+        </p:txBody>
+      </p:sp>
+      <p:sp>
+        <p:nvSpPr>
+          <p:cNvPr id="34" name="Rounded Rectangle 33"/>
+          <p:cNvSpPr/>
+          <p:nvPr/>
+        </p:nvSpPr>
+        <p:spPr>
+          <a:xfrm>
+            <a:off x="9573768" y="3950208"/>
+            <a:ext cx="2103120" cy="365760"/>
+          </a:xfrm>
+          <a:prstGeom prst="roundRect">
+            <a:avLst>
+              <a:gd name="adj" fmla="val 18000"/>
+            </a:avLst>
+          </a:prstGeom>
+          <a:solidFill>
+            <a:srgbClr val="0F172A"/>
+          </a:solidFill>
+          <a:ln>
+            <a:noFill/>
+          </a:ln>
+        </p:spPr>
+        <p:style>
+          <a:lnRef idx="1">
+            <a:schemeClr val="accent1"/>
+          </a:lnRef>
+          <a:fillRef idx="3">
+            <a:schemeClr val="accent1"/>
+          </a:fillRef>
+          <a:effectRef idx="2">
+            <a:schemeClr val="accent1"/>
+          </a:effectRef>
+          <a:fontRef idx="minor">
+            <a:schemeClr val="lt1"/>
+          </a:fontRef>
+        </p:style>
+        <p:txBody>
+          <a:bodyPr rtlCol="0" anchor="ctr"/>
+          <a:lstStyle/>
+          <a:p>
+            <a:pPr algn="ctr">
+              <a:defRPr sz="1100" b="1">
                 <a:solidFill>
                   <a:srgbClr val="FFFFFF"/>
                 </a:solidFill>
                 <a:latin typeface="Arial"/>
-              </a:rPr>
-              <a:t>DATA HARVESTING</a:t>
-            </a:r>
-            <a:r>
-              <a:rPr sz="1050" b="1">
-                <a:solidFill>
-                  <a:srgbClr val="38BDF8"/>
-                </a:solidFill>
-                <a:latin typeface="Arial"/>
-              </a:rPr>
-              <a:t>  ➔  </a:t>
-            </a:r>
-            <a:r>
-              <a:rPr sz="1050" b="1">
-                <a:solidFill>
-                  <a:srgbClr val="FFFFFF"/>
-                </a:solidFill>
-                <a:latin typeface="Arial"/>
-              </a:rPr>
-              <a:t>IQR OUTLIER TRUNCATION</a:t>
-            </a:r>
-            <a:r>
-              <a:rPr sz="1050" b="1">
-                <a:solidFill>
-                  <a:srgbClr val="38BDF8"/>
-                </a:solidFill>
-                <a:latin typeface="Arial"/>
-              </a:rPr>
-              <a:t>  ➔  </a:t>
-            </a:r>
-            <a:r>
-              <a:rPr sz="1050" b="1">
-                <a:solidFill>
-                  <a:srgbClr val="FFFFFF"/>
-                </a:solidFill>
-                <a:latin typeface="Arial"/>
-              </a:rPr>
-              <a:t>JEVONS GEOMETRIC INDEX</a:t>
-            </a:r>
-            <a:r>
-              <a:rPr sz="1050" b="1">
-                <a:solidFill>
-                  <a:srgbClr val="38BDF8"/>
-                </a:solidFill>
-                <a:latin typeface="Arial"/>
-              </a:rPr>
-              <a:t>  ➔  </a:t>
-            </a:r>
-            <a:r>
-              <a:rPr sz="1050" b="1">
-                <a:solidFill>
-                  <a:srgbClr val="FFFFFF"/>
-                </a:solidFill>
-                <a:latin typeface="Arial"/>
-              </a:rPr>
-              <a:t>SHA-256 PROVENANCE</a:t>
-            </a:r>
-            <a:r>
-              <a:rPr sz="1050" b="1">
-                <a:solidFill>
-                  <a:srgbClr val="38BDF8"/>
-                </a:solidFill>
-                <a:latin typeface="Arial"/>
-              </a:rPr>
-              <a:t>  ➔  </a:t>
-            </a:r>
-            <a:r>
-              <a:rPr sz="1050" b="1">
-                <a:solidFill>
-                  <a:srgbClr val="FFFFFF"/>
-                </a:solidFill>
-                <a:latin typeface="Arial"/>
-              </a:rPr>
-              <a:t>MoSPI &amp; RBI CPI INTEGRATION</a:t>
+              </a:defRPr>
+            </a:pPr>
+            <a:r>
+              <a:t>STEP 05</a:t>
+            </a:r>
+          </a:p>
+        </p:txBody>
+      </p:sp>
+      <p:sp>
+        <p:nvSpPr>
+          <p:cNvPr id="35" name="TextBox 34"/>
+          <p:cNvSpPr txBox="1"/>
+          <p:nvPr/>
+        </p:nvSpPr>
+        <p:spPr>
+          <a:xfrm>
+            <a:off x="9665208" y="4361688"/>
+            <a:ext cx="1920240" cy="1828800"/>
+          </a:xfrm>
+          <a:prstGeom prst="rect">
+            <a:avLst/>
+          </a:prstGeom>
+          <a:noFill/>
+        </p:spPr>
+        <p:txBody>
+          <a:bodyPr wrap="square" tIns="0" bIns="0" lIns="0" rIns="0">
+            <a:spAutoFit/>
+          </a:bodyPr>
+          <a:lstStyle/>
+          <a:p>
+            <a:pPr algn="ctr">
+              <a:spcAft>
+                <a:spcPts val="200"/>
+              </a:spcAft>
+              <a:defRPr sz="1150" b="1">
+                <a:solidFill>
+                  <a:srgbClr val="0F172A"/>
+                </a:solidFill>
+                <a:latin typeface="Arial"/>
+              </a:defRPr>
+            </a:pPr>
+            <a:r>
+              <a:t>Real-Time API</a:t>
+            </a:r>
+            <a:br/>
+            <a:r>
+              <a:t>Delivery</a:t>
+            </a:r>
+          </a:p>
+          <a:p>
+            <a:pPr algn="ctr">
+              <a:spcAft>
+                <a:spcPts val="600"/>
+              </a:spcAft>
+              <a:defRPr sz="900" b="1">
+                <a:solidFill>
+                  <a:srgbClr val="64748B"/>
+                </a:solidFill>
+                <a:latin typeface="Arial"/>
+              </a:defRPr>
+            </a:pPr>
+            <a:r>
+              <a:t>• Instant Feeds •</a:t>
+            </a:r>
+          </a:p>
+          <a:p>
+            <a:pPr algn="l">
+              <a:lnSpc>
+                <a:spcPct val="118000"/>
+              </a:lnSpc>
+              <a:defRPr sz="960">
+                <a:solidFill>
+                  <a:srgbClr val="1E293B"/>
+                </a:solidFill>
+                <a:latin typeface="Arial"/>
+              </a:defRPr>
+            </a:pPr>
+            <a:r>
+              <a:t>Sub-10ms REST API and live eSankhyiki CSV feed for MoSPI and RBI.</a:t>
+            </a:r>
+          </a:p>
+        </p:txBody>
+      </p:sp>
+      <p:sp>
+        <p:nvSpPr>
+          <p:cNvPr id="36" name="Rounded Rectangle 35"/>
+          <p:cNvSpPr/>
+          <p:nvPr/>
+        </p:nvSpPr>
+        <p:spPr>
+          <a:xfrm>
+            <a:off x="9646920" y="6263640"/>
+            <a:ext cx="1956816" cy="310896"/>
+          </a:xfrm>
+          <a:prstGeom prst="roundRect">
+            <a:avLst>
+              <a:gd name="adj" fmla="val 20000"/>
+            </a:avLst>
+          </a:prstGeom>
+          <a:solidFill>
+            <a:srgbClr val="F8FAFC"/>
+          </a:solidFill>
+          <a:ln w="12700">
+            <a:solidFill>
+              <a:srgbClr val="64748B"/>
+            </a:solidFill>
+          </a:ln>
+        </p:spPr>
+        <p:style>
+          <a:lnRef idx="1">
+            <a:schemeClr val="accent1"/>
+          </a:lnRef>
+          <a:fillRef idx="3">
+            <a:schemeClr val="accent1"/>
+          </a:fillRef>
+          <a:effectRef idx="2">
+            <a:schemeClr val="accent1"/>
+          </a:effectRef>
+          <a:fontRef idx="minor">
+            <a:schemeClr val="lt1"/>
+          </a:fontRef>
+        </p:style>
+        <p:txBody>
+          <a:bodyPr rtlCol="0" anchor="ctr"/>
+          <a:lstStyle/>
+          <a:p>
+            <a:pPr algn="ctr">
+              <a:defRPr sz="850" b="1">
+                <a:solidFill>
+                  <a:srgbClr val="0F172A"/>
+                </a:solidFill>
+                <a:latin typeface="Arial"/>
+              </a:defRPr>
+            </a:pPr>
+            <a:r>
+              <a:t>FastAPI &amp; CSV Feed | &lt; 10ms Latency</a:t>
             </a:r>
           </a:p>
         </p:txBody>
